--- a/slides/C24_Regressor_Softmax.pptx
+++ b/slides/C24_Regressor_Softmax.pptx
@@ -300,7 +300,7 @@
           <a:p>
             <a:fld id="{144F1436-6906-4D93-B7A2-786C327BFA14}" type="datetimeFigureOut">
               <a:rPr lang="nl-BE" smtClean="0"/>
-              <a:t>6/04/2026</a:t>
+              <a:t>13/09/2026</a:t>
             </a:fld>
             <a:endParaRPr lang="nl-BE"/>
           </a:p>
@@ -366,7 +366,7 @@
           <a:p>
             <a:fld id="{F7E56D9B-79AD-444A-AFED-DEC23408F8B4}" type="slidenum">
               <a:rPr lang="nl-BE" smtClean="0"/>
-              <a:t>‹#›</a:t>
+              <a:t>‹nº›</a:t>
             </a:fld>
             <a:endParaRPr lang="nl-BE"/>
           </a:p>
@@ -465,7 +465,7 @@
           <a:p>
             <a:fld id="{AA8CD09E-2914-4F47-B6C1-51B2C31814C9}" type="datetimeFigureOut">
               <a:rPr lang="pt-BR" smtClean="0"/>
-              <a:t>06/04/2026</a:t>
+              <a:t>13/09/2026</a:t>
             </a:fld>
             <a:endParaRPr lang="pt-BR"/>
           </a:p>
@@ -623,7 +623,7 @@
           <a:p>
             <a:fld id="{6FC8D850-966F-45A6-8DE7-15B891E7D40D}" type="slidenum">
               <a:rPr lang="pt-BR" smtClean="0"/>
-              <a:t>‹#›</a:t>
+              <a:t>‹nº›</a:t>
             </a:fld>
             <a:endParaRPr lang="pt-BR"/>
           </a:p>
@@ -2897,6 +2897,18 @@
               </a:rPr>
               <a:t>Classificação de documentos por tópicos</a:t>
             </a:r>
+            <a:r>
+              <a:rPr lang="pt-BR" sz="1200" b="0" i="0" kern="1200" dirty="0">
+                <a:solidFill>
+                  <a:schemeClr val="tx1"/>
+                </a:solidFill>
+                <a:effectLst/>
+                <a:latin typeface="+mn-lt"/>
+                <a:ea typeface="+mn-ea"/>
+                <a:cs typeface="+mn-cs"/>
+              </a:rPr>
+              <a:t/>
+            </a:r>
             <a:br>
               <a:rPr lang="pt-BR" sz="1200" b="0" i="0" kern="1200" dirty="0">
                 <a:solidFill>
@@ -2934,6 +2946,18 @@
               </a:rPr>
               <a:t>Reconhecimento de objetos em imagens</a:t>
             </a:r>
+            <a:r>
+              <a:rPr lang="pt-BR" sz="1200" b="0" i="0" kern="1200" dirty="0">
+                <a:solidFill>
+                  <a:schemeClr val="tx1"/>
+                </a:solidFill>
+                <a:effectLst/>
+                <a:latin typeface="+mn-lt"/>
+                <a:ea typeface="+mn-ea"/>
+                <a:cs typeface="+mn-cs"/>
+              </a:rPr>
+              <a:t/>
+            </a:r>
             <a:br>
               <a:rPr lang="pt-BR" sz="1200" b="0" i="0" kern="1200" dirty="0">
                 <a:solidFill>
@@ -2971,6 +2995,18 @@
               </a:rPr>
               <a:t>Sistema de recomendação de filmes por gêneros</a:t>
             </a:r>
+            <a:r>
+              <a:rPr lang="pt-BR" sz="1200" b="0" i="0" kern="1200" dirty="0">
+                <a:solidFill>
+                  <a:schemeClr val="tx1"/>
+                </a:solidFill>
+                <a:effectLst/>
+                <a:latin typeface="+mn-lt"/>
+                <a:ea typeface="+mn-ea"/>
+                <a:cs typeface="+mn-cs"/>
+              </a:rPr>
+              <a:t/>
+            </a:r>
             <a:br>
               <a:rPr lang="pt-BR" sz="1200" b="0" i="0" kern="1200" dirty="0">
                 <a:solidFill>
@@ -3008,6 +3044,18 @@
               </a:rPr>
               <a:t>Diagnóstico médico</a:t>
             </a:r>
+            <a:r>
+              <a:rPr lang="pt-BR" sz="1200" b="0" i="0" kern="1200" dirty="0">
+                <a:solidFill>
+                  <a:schemeClr val="tx1"/>
+                </a:solidFill>
+                <a:effectLst/>
+                <a:latin typeface="+mn-lt"/>
+                <a:ea typeface="+mn-ea"/>
+                <a:cs typeface="+mn-cs"/>
+              </a:rPr>
+              <a:t/>
+            </a:r>
             <a:br>
               <a:rPr lang="pt-BR" sz="1200" b="0" i="0" kern="1200" dirty="0">
                 <a:solidFill>
@@ -3045,6 +3093,18 @@
               </a:rPr>
               <a:t>Análise de sentimentos em texto</a:t>
             </a:r>
+            <a:r>
+              <a:rPr lang="pt-BR" sz="1200" b="0" i="0" kern="1200" dirty="0">
+                <a:solidFill>
+                  <a:schemeClr val="tx1"/>
+                </a:solidFill>
+                <a:effectLst/>
+                <a:latin typeface="+mn-lt"/>
+                <a:ea typeface="+mn-ea"/>
+                <a:cs typeface="+mn-cs"/>
+              </a:rPr>
+              <a:t/>
+            </a:r>
             <a:br>
               <a:rPr lang="pt-BR" sz="1200" b="0" i="0" kern="1200" dirty="0">
                 <a:solidFill>
@@ -3094,6 +3154,18 @@
               </a:rPr>
               <a:t> em produtos de e-commerce</a:t>
             </a:r>
+            <a:r>
+              <a:rPr lang="pt-BR" sz="1200" b="0" i="0" kern="1200" dirty="0">
+                <a:solidFill>
+                  <a:schemeClr val="tx1"/>
+                </a:solidFill>
+                <a:effectLst/>
+                <a:latin typeface="+mn-lt"/>
+                <a:ea typeface="+mn-ea"/>
+                <a:cs typeface="+mn-cs"/>
+              </a:rPr>
+              <a:t/>
+            </a:r>
             <a:br>
               <a:rPr lang="pt-BR" sz="1200" b="0" i="0" kern="1200" dirty="0">
                 <a:solidFill>
@@ -3155,6 +3227,18 @@
               </a:rPr>
               <a:t>Classificação de músicas por gênero</a:t>
             </a:r>
+            <a:r>
+              <a:rPr lang="pt-BR" sz="1200" b="0" i="0" kern="1200" dirty="0">
+                <a:solidFill>
+                  <a:schemeClr val="tx1"/>
+                </a:solidFill>
+                <a:effectLst/>
+                <a:latin typeface="+mn-lt"/>
+                <a:ea typeface="+mn-ea"/>
+                <a:cs typeface="+mn-cs"/>
+              </a:rPr>
+              <a:t/>
+            </a:r>
             <a:br>
               <a:rPr lang="pt-BR" sz="1200" b="0" i="0" kern="1200" dirty="0">
                 <a:solidFill>
@@ -3180,9 +3264,17 @@
             </a:r>
           </a:p>
           <a:p>
+            <a:r>
+              <a:rPr lang="pt-BR" dirty="0"/>
+              <a:t/>
+            </a:r>
             <a:br>
               <a:rPr lang="pt-BR" dirty="0"/>
             </a:br>
+            <a:r>
+              <a:rPr lang="pt-BR" dirty="0"/>
+              <a:t/>
+            </a:r>
             <a:br>
               <a:rPr lang="pt-BR" dirty="0"/>
             </a:br>
@@ -4777,7 +4869,7 @@
           <p:cNvPr id="2" name="Título 1">
             <a:extLst>
               <a:ext uri="{FF2B5EF4-FFF2-40B4-BE49-F238E27FC236}">
-                <a16:creationId xmlns:a16="http://schemas.microsoft.com/office/drawing/2014/main" id="{1DB9B4FF-B06E-403C-A326-BDC64D8FF94E}"/>
+                <a16:creationId xmlns:a16="http://schemas.microsoft.com/office/drawing/2014/main" xmlns="" id="{1DB9B4FF-B06E-403C-A326-BDC64D8FF94E}"/>
               </a:ext>
             </a:extLst>
           </p:cNvPr>
@@ -4814,7 +4906,7 @@
           <p:cNvPr id="3" name="Subtítulo 2">
             <a:extLst>
               <a:ext uri="{FF2B5EF4-FFF2-40B4-BE49-F238E27FC236}">
-                <a16:creationId xmlns:a16="http://schemas.microsoft.com/office/drawing/2014/main" id="{247BDFCE-746E-45BF-A319-4733D58D1632}"/>
+                <a16:creationId xmlns:a16="http://schemas.microsoft.com/office/drawing/2014/main" xmlns="" id="{247BDFCE-746E-45BF-A319-4733D58D1632}"/>
               </a:ext>
             </a:extLst>
           </p:cNvPr>
@@ -4884,7 +4976,7 @@
           <p:cNvPr id="4" name="Espaço Reservado para Data 3">
             <a:extLst>
               <a:ext uri="{FF2B5EF4-FFF2-40B4-BE49-F238E27FC236}">
-                <a16:creationId xmlns:a16="http://schemas.microsoft.com/office/drawing/2014/main" id="{9EDE2778-5372-4104-B96D-968184DA8288}"/>
+                <a16:creationId xmlns:a16="http://schemas.microsoft.com/office/drawing/2014/main" xmlns="" id="{9EDE2778-5372-4104-B96D-968184DA8288}"/>
               </a:ext>
             </a:extLst>
           </p:cNvPr>
@@ -4902,7 +4994,7 @@
           <a:p>
             <a:fld id="{63289F7E-B80B-496E-81B4-D396C37C9454}" type="datetimeFigureOut">
               <a:rPr lang="pt-BR" smtClean="0"/>
-              <a:t>06/04/2026</a:t>
+              <a:t>13/09/2026</a:t>
             </a:fld>
             <a:endParaRPr lang="pt-BR"/>
           </a:p>
@@ -4913,7 +5005,7 @@
           <p:cNvPr id="5" name="Espaço Reservado para Rodapé 4">
             <a:extLst>
               <a:ext uri="{FF2B5EF4-FFF2-40B4-BE49-F238E27FC236}">
-                <a16:creationId xmlns:a16="http://schemas.microsoft.com/office/drawing/2014/main" id="{C1DD0F41-C861-4051-988D-3024A37A4B93}"/>
+                <a16:creationId xmlns:a16="http://schemas.microsoft.com/office/drawing/2014/main" xmlns="" id="{C1DD0F41-C861-4051-988D-3024A37A4B93}"/>
               </a:ext>
             </a:extLst>
           </p:cNvPr>
@@ -4938,7 +5030,7 @@
           <p:cNvPr id="6" name="Espaço Reservado para Número de Slide 5">
             <a:extLst>
               <a:ext uri="{FF2B5EF4-FFF2-40B4-BE49-F238E27FC236}">
-                <a16:creationId xmlns:a16="http://schemas.microsoft.com/office/drawing/2014/main" id="{07E5967E-D980-431A-A5DB-3F0C5030A81E}"/>
+                <a16:creationId xmlns:a16="http://schemas.microsoft.com/office/drawing/2014/main" xmlns="" id="{07E5967E-D980-431A-A5DB-3F0C5030A81E}"/>
               </a:ext>
             </a:extLst>
           </p:cNvPr>
@@ -4956,7 +5048,7 @@
           <a:p>
             <a:fld id="{1A7E88B7-70CE-4035-AE73-13FA6FB985D4}" type="slidenum">
               <a:rPr lang="pt-BR" smtClean="0"/>
-              <a:t>‹#›</a:t>
+              <a:t>‹nº›</a:t>
             </a:fld>
             <a:endParaRPr lang="pt-BR"/>
           </a:p>
@@ -4997,7 +5089,7 @@
           <p:cNvPr id="2" name="Título 1">
             <a:extLst>
               <a:ext uri="{FF2B5EF4-FFF2-40B4-BE49-F238E27FC236}">
-                <a16:creationId xmlns:a16="http://schemas.microsoft.com/office/drawing/2014/main" id="{9036C49F-3E68-4175-81BA-3C3FEE44308A}"/>
+                <a16:creationId xmlns:a16="http://schemas.microsoft.com/office/drawing/2014/main" xmlns="" id="{9036C49F-3E68-4175-81BA-3C3FEE44308A}"/>
               </a:ext>
             </a:extLst>
           </p:cNvPr>
@@ -5025,7 +5117,7 @@
           <p:cNvPr id="3" name="Espaço Reservado para Texto Vertical 2">
             <a:extLst>
               <a:ext uri="{FF2B5EF4-FFF2-40B4-BE49-F238E27FC236}">
-                <a16:creationId xmlns:a16="http://schemas.microsoft.com/office/drawing/2014/main" id="{426FA736-3DD3-4D4E-B57B-BBE1D8F7D424}"/>
+                <a16:creationId xmlns:a16="http://schemas.microsoft.com/office/drawing/2014/main" xmlns="" id="{426FA736-3DD3-4D4E-B57B-BBE1D8F7D424}"/>
               </a:ext>
             </a:extLst>
           </p:cNvPr>
@@ -5082,7 +5174,7 @@
           <p:cNvPr id="4" name="Espaço Reservado para Data 3">
             <a:extLst>
               <a:ext uri="{FF2B5EF4-FFF2-40B4-BE49-F238E27FC236}">
-                <a16:creationId xmlns:a16="http://schemas.microsoft.com/office/drawing/2014/main" id="{99E8855C-D8FD-48F6-B14E-861E0DE4D915}"/>
+                <a16:creationId xmlns:a16="http://schemas.microsoft.com/office/drawing/2014/main" xmlns="" id="{99E8855C-D8FD-48F6-B14E-861E0DE4D915}"/>
               </a:ext>
             </a:extLst>
           </p:cNvPr>
@@ -5100,7 +5192,7 @@
           <a:p>
             <a:fld id="{63289F7E-B80B-496E-81B4-D396C37C9454}" type="datetimeFigureOut">
               <a:rPr lang="pt-BR" smtClean="0"/>
-              <a:t>06/04/2026</a:t>
+              <a:t>13/09/2026</a:t>
             </a:fld>
             <a:endParaRPr lang="pt-BR"/>
           </a:p>
@@ -5111,7 +5203,7 @@
           <p:cNvPr id="5" name="Espaço Reservado para Rodapé 4">
             <a:extLst>
               <a:ext uri="{FF2B5EF4-FFF2-40B4-BE49-F238E27FC236}">
-                <a16:creationId xmlns:a16="http://schemas.microsoft.com/office/drawing/2014/main" id="{97C0BB88-2F21-42A5-ACFF-83DA47F2D340}"/>
+                <a16:creationId xmlns:a16="http://schemas.microsoft.com/office/drawing/2014/main" xmlns="" id="{97C0BB88-2F21-42A5-ACFF-83DA47F2D340}"/>
               </a:ext>
             </a:extLst>
           </p:cNvPr>
@@ -5136,7 +5228,7 @@
           <p:cNvPr id="6" name="Espaço Reservado para Número de Slide 5">
             <a:extLst>
               <a:ext uri="{FF2B5EF4-FFF2-40B4-BE49-F238E27FC236}">
-                <a16:creationId xmlns:a16="http://schemas.microsoft.com/office/drawing/2014/main" id="{6CB462B3-1F22-4C05-B4B8-7A279FB7D5E9}"/>
+                <a16:creationId xmlns:a16="http://schemas.microsoft.com/office/drawing/2014/main" xmlns="" id="{6CB462B3-1F22-4C05-B4B8-7A279FB7D5E9}"/>
               </a:ext>
             </a:extLst>
           </p:cNvPr>
@@ -5154,7 +5246,7 @@
           <a:p>
             <a:fld id="{1A7E88B7-70CE-4035-AE73-13FA6FB985D4}" type="slidenum">
               <a:rPr lang="pt-BR" smtClean="0"/>
-              <a:t>‹#›</a:t>
+              <a:t>‹nº›</a:t>
             </a:fld>
             <a:endParaRPr lang="pt-BR"/>
           </a:p>
@@ -5195,7 +5287,7 @@
           <p:cNvPr id="2" name="Título Vertical 1">
             <a:extLst>
               <a:ext uri="{FF2B5EF4-FFF2-40B4-BE49-F238E27FC236}">
-                <a16:creationId xmlns:a16="http://schemas.microsoft.com/office/drawing/2014/main" id="{EAEAB728-701C-4207-A9D5-23FF45C60502}"/>
+                <a16:creationId xmlns:a16="http://schemas.microsoft.com/office/drawing/2014/main" xmlns="" id="{EAEAB728-701C-4207-A9D5-23FF45C60502}"/>
               </a:ext>
             </a:extLst>
           </p:cNvPr>
@@ -5228,7 +5320,7 @@
           <p:cNvPr id="3" name="Espaço Reservado para Texto Vertical 2">
             <a:extLst>
               <a:ext uri="{FF2B5EF4-FFF2-40B4-BE49-F238E27FC236}">
-                <a16:creationId xmlns:a16="http://schemas.microsoft.com/office/drawing/2014/main" id="{BA8C8CCF-7823-480A-9A19-0F664DD17E3B}"/>
+                <a16:creationId xmlns:a16="http://schemas.microsoft.com/office/drawing/2014/main" xmlns="" id="{BA8C8CCF-7823-480A-9A19-0F664DD17E3B}"/>
               </a:ext>
             </a:extLst>
           </p:cNvPr>
@@ -5290,7 +5382,7 @@
           <p:cNvPr id="4" name="Espaço Reservado para Data 3">
             <a:extLst>
               <a:ext uri="{FF2B5EF4-FFF2-40B4-BE49-F238E27FC236}">
-                <a16:creationId xmlns:a16="http://schemas.microsoft.com/office/drawing/2014/main" id="{721D5734-7B1F-425D-942F-6EB73344027C}"/>
+                <a16:creationId xmlns:a16="http://schemas.microsoft.com/office/drawing/2014/main" xmlns="" id="{721D5734-7B1F-425D-942F-6EB73344027C}"/>
               </a:ext>
             </a:extLst>
           </p:cNvPr>
@@ -5308,7 +5400,7 @@
           <a:p>
             <a:fld id="{63289F7E-B80B-496E-81B4-D396C37C9454}" type="datetimeFigureOut">
               <a:rPr lang="pt-BR" smtClean="0"/>
-              <a:t>06/04/2026</a:t>
+              <a:t>13/09/2026</a:t>
             </a:fld>
             <a:endParaRPr lang="pt-BR"/>
           </a:p>
@@ -5319,7 +5411,7 @@
           <p:cNvPr id="5" name="Espaço Reservado para Rodapé 4">
             <a:extLst>
               <a:ext uri="{FF2B5EF4-FFF2-40B4-BE49-F238E27FC236}">
-                <a16:creationId xmlns:a16="http://schemas.microsoft.com/office/drawing/2014/main" id="{1E1AAEAC-F08D-45FE-89EC-B1B349A868C9}"/>
+                <a16:creationId xmlns:a16="http://schemas.microsoft.com/office/drawing/2014/main" xmlns="" id="{1E1AAEAC-F08D-45FE-89EC-B1B349A868C9}"/>
               </a:ext>
             </a:extLst>
           </p:cNvPr>
@@ -5344,7 +5436,7 @@
           <p:cNvPr id="6" name="Espaço Reservado para Número de Slide 5">
             <a:extLst>
               <a:ext uri="{FF2B5EF4-FFF2-40B4-BE49-F238E27FC236}">
-                <a16:creationId xmlns:a16="http://schemas.microsoft.com/office/drawing/2014/main" id="{BAA44493-9911-47B2-87A6-C2141A972BC8}"/>
+                <a16:creationId xmlns:a16="http://schemas.microsoft.com/office/drawing/2014/main" xmlns="" id="{BAA44493-9911-47B2-87A6-C2141A972BC8}"/>
               </a:ext>
             </a:extLst>
           </p:cNvPr>
@@ -5362,7 +5454,7 @@
           <a:p>
             <a:fld id="{1A7E88B7-70CE-4035-AE73-13FA6FB985D4}" type="slidenum">
               <a:rPr lang="pt-BR" smtClean="0"/>
-              <a:t>‹#›</a:t>
+              <a:t>‹nº›</a:t>
             </a:fld>
             <a:endParaRPr lang="pt-BR"/>
           </a:p>
@@ -5403,7 +5495,7 @@
           <p:cNvPr id="2" name="Título 1">
             <a:extLst>
               <a:ext uri="{FF2B5EF4-FFF2-40B4-BE49-F238E27FC236}">
-                <a16:creationId xmlns:a16="http://schemas.microsoft.com/office/drawing/2014/main" id="{71BD44A5-8F21-4626-A01D-48A1C874B1D5}"/>
+                <a16:creationId xmlns:a16="http://schemas.microsoft.com/office/drawing/2014/main" xmlns="" id="{71BD44A5-8F21-4626-A01D-48A1C874B1D5}"/>
               </a:ext>
             </a:extLst>
           </p:cNvPr>
@@ -5431,7 +5523,7 @@
           <p:cNvPr id="3" name="Espaço Reservado para Conteúdo 2">
             <a:extLst>
               <a:ext uri="{FF2B5EF4-FFF2-40B4-BE49-F238E27FC236}">
-                <a16:creationId xmlns:a16="http://schemas.microsoft.com/office/drawing/2014/main" id="{B79E8085-65A9-48AA-951D-71D978BFF4ED}"/>
+                <a16:creationId xmlns:a16="http://schemas.microsoft.com/office/drawing/2014/main" xmlns="" id="{B79E8085-65A9-48AA-951D-71D978BFF4ED}"/>
               </a:ext>
             </a:extLst>
           </p:cNvPr>
@@ -5488,7 +5580,7 @@
           <p:cNvPr id="4" name="Espaço Reservado para Data 3">
             <a:extLst>
               <a:ext uri="{FF2B5EF4-FFF2-40B4-BE49-F238E27FC236}">
-                <a16:creationId xmlns:a16="http://schemas.microsoft.com/office/drawing/2014/main" id="{F05BE1AF-51EA-425D-B188-DE7BD675009F}"/>
+                <a16:creationId xmlns:a16="http://schemas.microsoft.com/office/drawing/2014/main" xmlns="" id="{F05BE1AF-51EA-425D-B188-DE7BD675009F}"/>
               </a:ext>
             </a:extLst>
           </p:cNvPr>
@@ -5506,7 +5598,7 @@
           <a:p>
             <a:fld id="{63289F7E-B80B-496E-81B4-D396C37C9454}" type="datetimeFigureOut">
               <a:rPr lang="pt-BR" smtClean="0"/>
-              <a:t>06/04/2026</a:t>
+              <a:t>13/09/2026</a:t>
             </a:fld>
             <a:endParaRPr lang="pt-BR"/>
           </a:p>
@@ -5517,7 +5609,7 @@
           <p:cNvPr id="5" name="Espaço Reservado para Rodapé 4">
             <a:extLst>
               <a:ext uri="{FF2B5EF4-FFF2-40B4-BE49-F238E27FC236}">
-                <a16:creationId xmlns:a16="http://schemas.microsoft.com/office/drawing/2014/main" id="{121BE632-29CF-4CB9-B365-C9EF38F89BE6}"/>
+                <a16:creationId xmlns:a16="http://schemas.microsoft.com/office/drawing/2014/main" xmlns="" id="{121BE632-29CF-4CB9-B365-C9EF38F89BE6}"/>
               </a:ext>
             </a:extLst>
           </p:cNvPr>
@@ -5542,7 +5634,7 @@
           <p:cNvPr id="6" name="Espaço Reservado para Número de Slide 5">
             <a:extLst>
               <a:ext uri="{FF2B5EF4-FFF2-40B4-BE49-F238E27FC236}">
-                <a16:creationId xmlns:a16="http://schemas.microsoft.com/office/drawing/2014/main" id="{60CF3DD1-9AEC-4A57-B461-4E4DD86FAC18}"/>
+                <a16:creationId xmlns:a16="http://schemas.microsoft.com/office/drawing/2014/main" xmlns="" id="{60CF3DD1-9AEC-4A57-B461-4E4DD86FAC18}"/>
               </a:ext>
             </a:extLst>
           </p:cNvPr>
@@ -5560,7 +5652,7 @@
           <a:p>
             <a:fld id="{1A7E88B7-70CE-4035-AE73-13FA6FB985D4}" type="slidenum">
               <a:rPr lang="pt-BR" smtClean="0"/>
-              <a:t>‹#›</a:t>
+              <a:t>‹nº›</a:t>
             </a:fld>
             <a:endParaRPr lang="pt-BR"/>
           </a:p>
@@ -5601,7 +5693,7 @@
           <p:cNvPr id="2" name="Título 1">
             <a:extLst>
               <a:ext uri="{FF2B5EF4-FFF2-40B4-BE49-F238E27FC236}">
-                <a16:creationId xmlns:a16="http://schemas.microsoft.com/office/drawing/2014/main" id="{34AB2FF0-A4D7-4E28-991D-FF26140D5988}"/>
+                <a16:creationId xmlns:a16="http://schemas.microsoft.com/office/drawing/2014/main" xmlns="" id="{34AB2FF0-A4D7-4E28-991D-FF26140D5988}"/>
               </a:ext>
             </a:extLst>
           </p:cNvPr>
@@ -5638,7 +5730,7 @@
           <p:cNvPr id="3" name="Espaço Reservado para Texto 2">
             <a:extLst>
               <a:ext uri="{FF2B5EF4-FFF2-40B4-BE49-F238E27FC236}">
-                <a16:creationId xmlns:a16="http://schemas.microsoft.com/office/drawing/2014/main" id="{E2AC45B0-4145-40DB-8E61-105461170604}"/>
+                <a16:creationId xmlns:a16="http://schemas.microsoft.com/office/drawing/2014/main" xmlns="" id="{E2AC45B0-4145-40DB-8E61-105461170604}"/>
               </a:ext>
             </a:extLst>
           </p:cNvPr>
@@ -5763,7 +5855,7 @@
           <p:cNvPr id="4" name="Espaço Reservado para Data 3">
             <a:extLst>
               <a:ext uri="{FF2B5EF4-FFF2-40B4-BE49-F238E27FC236}">
-                <a16:creationId xmlns:a16="http://schemas.microsoft.com/office/drawing/2014/main" id="{50F1D3FB-740A-4EBA-A309-2CE71D12ECFB}"/>
+                <a16:creationId xmlns:a16="http://schemas.microsoft.com/office/drawing/2014/main" xmlns="" id="{50F1D3FB-740A-4EBA-A309-2CE71D12ECFB}"/>
               </a:ext>
             </a:extLst>
           </p:cNvPr>
@@ -5781,7 +5873,7 @@
           <a:p>
             <a:fld id="{63289F7E-B80B-496E-81B4-D396C37C9454}" type="datetimeFigureOut">
               <a:rPr lang="pt-BR" smtClean="0"/>
-              <a:t>06/04/2026</a:t>
+              <a:t>13/09/2026</a:t>
             </a:fld>
             <a:endParaRPr lang="pt-BR"/>
           </a:p>
@@ -5792,7 +5884,7 @@
           <p:cNvPr id="5" name="Espaço Reservado para Rodapé 4">
             <a:extLst>
               <a:ext uri="{FF2B5EF4-FFF2-40B4-BE49-F238E27FC236}">
-                <a16:creationId xmlns:a16="http://schemas.microsoft.com/office/drawing/2014/main" id="{BDCAB18F-8715-4465-A940-F9C193A2ACE9}"/>
+                <a16:creationId xmlns:a16="http://schemas.microsoft.com/office/drawing/2014/main" xmlns="" id="{BDCAB18F-8715-4465-A940-F9C193A2ACE9}"/>
               </a:ext>
             </a:extLst>
           </p:cNvPr>
@@ -5817,7 +5909,7 @@
           <p:cNvPr id="6" name="Espaço Reservado para Número de Slide 5">
             <a:extLst>
               <a:ext uri="{FF2B5EF4-FFF2-40B4-BE49-F238E27FC236}">
-                <a16:creationId xmlns:a16="http://schemas.microsoft.com/office/drawing/2014/main" id="{353466C6-8248-429F-8056-FF040BF509EB}"/>
+                <a16:creationId xmlns:a16="http://schemas.microsoft.com/office/drawing/2014/main" xmlns="" id="{353466C6-8248-429F-8056-FF040BF509EB}"/>
               </a:ext>
             </a:extLst>
           </p:cNvPr>
@@ -5835,7 +5927,7 @@
           <a:p>
             <a:fld id="{1A7E88B7-70CE-4035-AE73-13FA6FB985D4}" type="slidenum">
               <a:rPr lang="pt-BR" smtClean="0"/>
-              <a:t>‹#›</a:t>
+              <a:t>‹nº›</a:t>
             </a:fld>
             <a:endParaRPr lang="pt-BR"/>
           </a:p>
@@ -5876,7 +5968,7 @@
           <p:cNvPr id="2" name="Título 1">
             <a:extLst>
               <a:ext uri="{FF2B5EF4-FFF2-40B4-BE49-F238E27FC236}">
-                <a16:creationId xmlns:a16="http://schemas.microsoft.com/office/drawing/2014/main" id="{BC7BB9F0-F14B-4A91-B2B7-35BC47FE4DE7}"/>
+                <a16:creationId xmlns:a16="http://schemas.microsoft.com/office/drawing/2014/main" xmlns="" id="{BC7BB9F0-F14B-4A91-B2B7-35BC47FE4DE7}"/>
               </a:ext>
             </a:extLst>
           </p:cNvPr>
@@ -5904,7 +5996,7 @@
           <p:cNvPr id="3" name="Espaço Reservado para Conteúdo 2">
             <a:extLst>
               <a:ext uri="{FF2B5EF4-FFF2-40B4-BE49-F238E27FC236}">
-                <a16:creationId xmlns:a16="http://schemas.microsoft.com/office/drawing/2014/main" id="{EC1FC1C4-73DA-47A6-8496-B0B457F7D39A}"/>
+                <a16:creationId xmlns:a16="http://schemas.microsoft.com/office/drawing/2014/main" xmlns="" id="{EC1FC1C4-73DA-47A6-8496-B0B457F7D39A}"/>
               </a:ext>
             </a:extLst>
           </p:cNvPr>
@@ -5966,7 +6058,7 @@
           <p:cNvPr id="4" name="Espaço Reservado para Conteúdo 3">
             <a:extLst>
               <a:ext uri="{FF2B5EF4-FFF2-40B4-BE49-F238E27FC236}">
-                <a16:creationId xmlns:a16="http://schemas.microsoft.com/office/drawing/2014/main" id="{E92F06A8-A449-4D92-9912-76873E529B38}"/>
+                <a16:creationId xmlns:a16="http://schemas.microsoft.com/office/drawing/2014/main" xmlns="" id="{E92F06A8-A449-4D92-9912-76873E529B38}"/>
               </a:ext>
             </a:extLst>
           </p:cNvPr>
@@ -6028,7 +6120,7 @@
           <p:cNvPr id="5" name="Espaço Reservado para Data 4">
             <a:extLst>
               <a:ext uri="{FF2B5EF4-FFF2-40B4-BE49-F238E27FC236}">
-                <a16:creationId xmlns:a16="http://schemas.microsoft.com/office/drawing/2014/main" id="{938070A4-BC2F-4D55-BD8D-DEAF11BB9EE9}"/>
+                <a16:creationId xmlns:a16="http://schemas.microsoft.com/office/drawing/2014/main" xmlns="" id="{938070A4-BC2F-4D55-BD8D-DEAF11BB9EE9}"/>
               </a:ext>
             </a:extLst>
           </p:cNvPr>
@@ -6046,7 +6138,7 @@
           <a:p>
             <a:fld id="{63289F7E-B80B-496E-81B4-D396C37C9454}" type="datetimeFigureOut">
               <a:rPr lang="pt-BR" smtClean="0"/>
-              <a:t>06/04/2026</a:t>
+              <a:t>13/09/2026</a:t>
             </a:fld>
             <a:endParaRPr lang="pt-BR"/>
           </a:p>
@@ -6057,7 +6149,7 @@
           <p:cNvPr id="6" name="Espaço Reservado para Rodapé 5">
             <a:extLst>
               <a:ext uri="{FF2B5EF4-FFF2-40B4-BE49-F238E27FC236}">
-                <a16:creationId xmlns:a16="http://schemas.microsoft.com/office/drawing/2014/main" id="{45CC2DB8-844A-465F-BA9A-7734C80C7F43}"/>
+                <a16:creationId xmlns:a16="http://schemas.microsoft.com/office/drawing/2014/main" xmlns="" id="{45CC2DB8-844A-465F-BA9A-7734C80C7F43}"/>
               </a:ext>
             </a:extLst>
           </p:cNvPr>
@@ -6082,7 +6174,7 @@
           <p:cNvPr id="7" name="Espaço Reservado para Número de Slide 6">
             <a:extLst>
               <a:ext uri="{FF2B5EF4-FFF2-40B4-BE49-F238E27FC236}">
-                <a16:creationId xmlns:a16="http://schemas.microsoft.com/office/drawing/2014/main" id="{4CC606A8-097B-4040-94E0-CD8C88280D8F}"/>
+                <a16:creationId xmlns:a16="http://schemas.microsoft.com/office/drawing/2014/main" xmlns="" id="{4CC606A8-097B-4040-94E0-CD8C88280D8F}"/>
               </a:ext>
             </a:extLst>
           </p:cNvPr>
@@ -6100,7 +6192,7 @@
           <a:p>
             <a:fld id="{1A7E88B7-70CE-4035-AE73-13FA6FB985D4}" type="slidenum">
               <a:rPr lang="pt-BR" smtClean="0"/>
-              <a:t>‹#›</a:t>
+              <a:t>‹nº›</a:t>
             </a:fld>
             <a:endParaRPr lang="pt-BR"/>
           </a:p>
@@ -6141,7 +6233,7 @@
           <p:cNvPr id="2" name="Título 1">
             <a:extLst>
               <a:ext uri="{FF2B5EF4-FFF2-40B4-BE49-F238E27FC236}">
-                <a16:creationId xmlns:a16="http://schemas.microsoft.com/office/drawing/2014/main" id="{76D66686-0143-4CB6-8C09-BA326F1E7ACA}"/>
+                <a16:creationId xmlns:a16="http://schemas.microsoft.com/office/drawing/2014/main" xmlns="" id="{76D66686-0143-4CB6-8C09-BA326F1E7ACA}"/>
               </a:ext>
             </a:extLst>
           </p:cNvPr>
@@ -6174,7 +6266,7 @@
           <p:cNvPr id="3" name="Espaço Reservado para Texto 2">
             <a:extLst>
               <a:ext uri="{FF2B5EF4-FFF2-40B4-BE49-F238E27FC236}">
-                <a16:creationId xmlns:a16="http://schemas.microsoft.com/office/drawing/2014/main" id="{0227AB85-F59E-4BCE-B846-4FA0992C2F23}"/>
+                <a16:creationId xmlns:a16="http://schemas.microsoft.com/office/drawing/2014/main" xmlns="" id="{0227AB85-F59E-4BCE-B846-4FA0992C2F23}"/>
               </a:ext>
             </a:extLst>
           </p:cNvPr>
@@ -6245,7 +6337,7 @@
           <p:cNvPr id="4" name="Espaço Reservado para Conteúdo 3">
             <a:extLst>
               <a:ext uri="{FF2B5EF4-FFF2-40B4-BE49-F238E27FC236}">
-                <a16:creationId xmlns:a16="http://schemas.microsoft.com/office/drawing/2014/main" id="{3373456C-7319-4D0A-827D-D29F6B083F5D}"/>
+                <a16:creationId xmlns:a16="http://schemas.microsoft.com/office/drawing/2014/main" xmlns="" id="{3373456C-7319-4D0A-827D-D29F6B083F5D}"/>
               </a:ext>
             </a:extLst>
           </p:cNvPr>
@@ -6307,7 +6399,7 @@
           <p:cNvPr id="5" name="Espaço Reservado para Texto 4">
             <a:extLst>
               <a:ext uri="{FF2B5EF4-FFF2-40B4-BE49-F238E27FC236}">
-                <a16:creationId xmlns:a16="http://schemas.microsoft.com/office/drawing/2014/main" id="{4CD109D0-2E83-4262-8029-A871CEC47406}"/>
+                <a16:creationId xmlns:a16="http://schemas.microsoft.com/office/drawing/2014/main" xmlns="" id="{4CD109D0-2E83-4262-8029-A871CEC47406}"/>
               </a:ext>
             </a:extLst>
           </p:cNvPr>
@@ -6378,7 +6470,7 @@
           <p:cNvPr id="6" name="Espaço Reservado para Conteúdo 5">
             <a:extLst>
               <a:ext uri="{FF2B5EF4-FFF2-40B4-BE49-F238E27FC236}">
-                <a16:creationId xmlns:a16="http://schemas.microsoft.com/office/drawing/2014/main" id="{AD706E3A-CFBB-4A6C-A65F-D0360A9E74FE}"/>
+                <a16:creationId xmlns:a16="http://schemas.microsoft.com/office/drawing/2014/main" xmlns="" id="{AD706E3A-CFBB-4A6C-A65F-D0360A9E74FE}"/>
               </a:ext>
             </a:extLst>
           </p:cNvPr>
@@ -6440,7 +6532,7 @@
           <p:cNvPr id="7" name="Espaço Reservado para Data 6">
             <a:extLst>
               <a:ext uri="{FF2B5EF4-FFF2-40B4-BE49-F238E27FC236}">
-                <a16:creationId xmlns:a16="http://schemas.microsoft.com/office/drawing/2014/main" id="{4172C0E5-5AF0-4805-BB51-443733CD2BD5}"/>
+                <a16:creationId xmlns:a16="http://schemas.microsoft.com/office/drawing/2014/main" xmlns="" id="{4172C0E5-5AF0-4805-BB51-443733CD2BD5}"/>
               </a:ext>
             </a:extLst>
           </p:cNvPr>
@@ -6458,7 +6550,7 @@
           <a:p>
             <a:fld id="{63289F7E-B80B-496E-81B4-D396C37C9454}" type="datetimeFigureOut">
               <a:rPr lang="pt-BR" smtClean="0"/>
-              <a:t>06/04/2026</a:t>
+              <a:t>13/09/2026</a:t>
             </a:fld>
             <a:endParaRPr lang="pt-BR"/>
           </a:p>
@@ -6469,7 +6561,7 @@
           <p:cNvPr id="8" name="Espaço Reservado para Rodapé 7">
             <a:extLst>
               <a:ext uri="{FF2B5EF4-FFF2-40B4-BE49-F238E27FC236}">
-                <a16:creationId xmlns:a16="http://schemas.microsoft.com/office/drawing/2014/main" id="{0E801648-156F-497E-99CF-797DF48051E1}"/>
+                <a16:creationId xmlns:a16="http://schemas.microsoft.com/office/drawing/2014/main" xmlns="" id="{0E801648-156F-497E-99CF-797DF48051E1}"/>
               </a:ext>
             </a:extLst>
           </p:cNvPr>
@@ -6494,7 +6586,7 @@
           <p:cNvPr id="9" name="Espaço Reservado para Número de Slide 8">
             <a:extLst>
               <a:ext uri="{FF2B5EF4-FFF2-40B4-BE49-F238E27FC236}">
-                <a16:creationId xmlns:a16="http://schemas.microsoft.com/office/drawing/2014/main" id="{EEE23D32-80E7-4796-A137-66BF842E4B53}"/>
+                <a16:creationId xmlns:a16="http://schemas.microsoft.com/office/drawing/2014/main" xmlns="" id="{EEE23D32-80E7-4796-A137-66BF842E4B53}"/>
               </a:ext>
             </a:extLst>
           </p:cNvPr>
@@ -6512,7 +6604,7 @@
           <a:p>
             <a:fld id="{1A7E88B7-70CE-4035-AE73-13FA6FB985D4}" type="slidenum">
               <a:rPr lang="pt-BR" smtClean="0"/>
-              <a:t>‹#›</a:t>
+              <a:t>‹nº›</a:t>
             </a:fld>
             <a:endParaRPr lang="pt-BR"/>
           </a:p>
@@ -6553,7 +6645,7 @@
           <p:cNvPr id="2" name="Título 1">
             <a:extLst>
               <a:ext uri="{FF2B5EF4-FFF2-40B4-BE49-F238E27FC236}">
-                <a16:creationId xmlns:a16="http://schemas.microsoft.com/office/drawing/2014/main" id="{2BCE2379-C78F-47E1-8CFC-B846E7AF148D}"/>
+                <a16:creationId xmlns:a16="http://schemas.microsoft.com/office/drawing/2014/main" xmlns="" id="{2BCE2379-C78F-47E1-8CFC-B846E7AF148D}"/>
               </a:ext>
             </a:extLst>
           </p:cNvPr>
@@ -6581,7 +6673,7 @@
           <p:cNvPr id="3" name="Espaço Reservado para Data 2">
             <a:extLst>
               <a:ext uri="{FF2B5EF4-FFF2-40B4-BE49-F238E27FC236}">
-                <a16:creationId xmlns:a16="http://schemas.microsoft.com/office/drawing/2014/main" id="{342600A9-7F92-4E22-9D94-E4717252A817}"/>
+                <a16:creationId xmlns:a16="http://schemas.microsoft.com/office/drawing/2014/main" xmlns="" id="{342600A9-7F92-4E22-9D94-E4717252A817}"/>
               </a:ext>
             </a:extLst>
           </p:cNvPr>
@@ -6599,7 +6691,7 @@
           <a:p>
             <a:fld id="{63289F7E-B80B-496E-81B4-D396C37C9454}" type="datetimeFigureOut">
               <a:rPr lang="pt-BR" smtClean="0"/>
-              <a:t>06/04/2026</a:t>
+              <a:t>13/09/2026</a:t>
             </a:fld>
             <a:endParaRPr lang="pt-BR"/>
           </a:p>
@@ -6610,7 +6702,7 @@
           <p:cNvPr id="4" name="Espaço Reservado para Rodapé 3">
             <a:extLst>
               <a:ext uri="{FF2B5EF4-FFF2-40B4-BE49-F238E27FC236}">
-                <a16:creationId xmlns:a16="http://schemas.microsoft.com/office/drawing/2014/main" id="{192E6BED-F546-40CC-A2DF-99CBA853654E}"/>
+                <a16:creationId xmlns:a16="http://schemas.microsoft.com/office/drawing/2014/main" xmlns="" id="{192E6BED-F546-40CC-A2DF-99CBA853654E}"/>
               </a:ext>
             </a:extLst>
           </p:cNvPr>
@@ -6635,7 +6727,7 @@
           <p:cNvPr id="5" name="Espaço Reservado para Número de Slide 4">
             <a:extLst>
               <a:ext uri="{FF2B5EF4-FFF2-40B4-BE49-F238E27FC236}">
-                <a16:creationId xmlns:a16="http://schemas.microsoft.com/office/drawing/2014/main" id="{6091CC40-A8C4-4063-80EB-CC5099621678}"/>
+                <a16:creationId xmlns:a16="http://schemas.microsoft.com/office/drawing/2014/main" xmlns="" id="{6091CC40-A8C4-4063-80EB-CC5099621678}"/>
               </a:ext>
             </a:extLst>
           </p:cNvPr>
@@ -6653,7 +6745,7 @@
           <a:p>
             <a:fld id="{1A7E88B7-70CE-4035-AE73-13FA6FB985D4}" type="slidenum">
               <a:rPr lang="pt-BR" smtClean="0"/>
-              <a:t>‹#›</a:t>
+              <a:t>‹nº›</a:t>
             </a:fld>
             <a:endParaRPr lang="pt-BR"/>
           </a:p>
@@ -6694,7 +6786,7 @@
           <p:cNvPr id="2" name="Espaço Reservado para Data 1">
             <a:extLst>
               <a:ext uri="{FF2B5EF4-FFF2-40B4-BE49-F238E27FC236}">
-                <a16:creationId xmlns:a16="http://schemas.microsoft.com/office/drawing/2014/main" id="{DD19515C-212C-4EAE-84A3-8FF4BC844F1B}"/>
+                <a16:creationId xmlns:a16="http://schemas.microsoft.com/office/drawing/2014/main" xmlns="" id="{DD19515C-212C-4EAE-84A3-8FF4BC844F1B}"/>
               </a:ext>
             </a:extLst>
           </p:cNvPr>
@@ -6712,7 +6804,7 @@
           <a:p>
             <a:fld id="{63289F7E-B80B-496E-81B4-D396C37C9454}" type="datetimeFigureOut">
               <a:rPr lang="pt-BR" smtClean="0"/>
-              <a:t>06/04/2026</a:t>
+              <a:t>13/09/2026</a:t>
             </a:fld>
             <a:endParaRPr lang="pt-BR"/>
           </a:p>
@@ -6723,7 +6815,7 @@
           <p:cNvPr id="3" name="Espaço Reservado para Rodapé 2">
             <a:extLst>
               <a:ext uri="{FF2B5EF4-FFF2-40B4-BE49-F238E27FC236}">
-                <a16:creationId xmlns:a16="http://schemas.microsoft.com/office/drawing/2014/main" id="{94D3D120-B3E8-4C96-861D-7A4F12F49B3A}"/>
+                <a16:creationId xmlns:a16="http://schemas.microsoft.com/office/drawing/2014/main" xmlns="" id="{94D3D120-B3E8-4C96-861D-7A4F12F49B3A}"/>
               </a:ext>
             </a:extLst>
           </p:cNvPr>
@@ -6748,7 +6840,7 @@
           <p:cNvPr id="4" name="Espaço Reservado para Número de Slide 3">
             <a:extLst>
               <a:ext uri="{FF2B5EF4-FFF2-40B4-BE49-F238E27FC236}">
-                <a16:creationId xmlns:a16="http://schemas.microsoft.com/office/drawing/2014/main" id="{42E49B68-FA1B-468B-9F17-D5C09243D454}"/>
+                <a16:creationId xmlns:a16="http://schemas.microsoft.com/office/drawing/2014/main" xmlns="" id="{42E49B68-FA1B-468B-9F17-D5C09243D454}"/>
               </a:ext>
             </a:extLst>
           </p:cNvPr>
@@ -6766,7 +6858,7 @@
           <a:p>
             <a:fld id="{1A7E88B7-70CE-4035-AE73-13FA6FB985D4}" type="slidenum">
               <a:rPr lang="pt-BR" smtClean="0"/>
-              <a:t>‹#›</a:t>
+              <a:t>‹nº›</a:t>
             </a:fld>
             <a:endParaRPr lang="pt-BR"/>
           </a:p>
@@ -6807,7 +6899,7 @@
           <p:cNvPr id="2" name="Título 1">
             <a:extLst>
               <a:ext uri="{FF2B5EF4-FFF2-40B4-BE49-F238E27FC236}">
-                <a16:creationId xmlns:a16="http://schemas.microsoft.com/office/drawing/2014/main" id="{1C17BCBE-A897-4319-85EC-D87909C24980}"/>
+                <a16:creationId xmlns:a16="http://schemas.microsoft.com/office/drawing/2014/main" xmlns="" id="{1C17BCBE-A897-4319-85EC-D87909C24980}"/>
               </a:ext>
             </a:extLst>
           </p:cNvPr>
@@ -6844,7 +6936,7 @@
           <p:cNvPr id="3" name="Espaço Reservado para Conteúdo 2">
             <a:extLst>
               <a:ext uri="{FF2B5EF4-FFF2-40B4-BE49-F238E27FC236}">
-                <a16:creationId xmlns:a16="http://schemas.microsoft.com/office/drawing/2014/main" id="{4226F885-0204-4913-868B-4B8B82576F17}"/>
+                <a16:creationId xmlns:a16="http://schemas.microsoft.com/office/drawing/2014/main" xmlns="" id="{4226F885-0204-4913-868B-4B8B82576F17}"/>
               </a:ext>
             </a:extLst>
           </p:cNvPr>
@@ -6934,7 +7026,7 @@
           <p:cNvPr id="4" name="Espaço Reservado para Texto 3">
             <a:extLst>
               <a:ext uri="{FF2B5EF4-FFF2-40B4-BE49-F238E27FC236}">
-                <a16:creationId xmlns:a16="http://schemas.microsoft.com/office/drawing/2014/main" id="{00F9F784-A858-441B-8AB5-697098141751}"/>
+                <a16:creationId xmlns:a16="http://schemas.microsoft.com/office/drawing/2014/main" xmlns="" id="{00F9F784-A858-441B-8AB5-697098141751}"/>
               </a:ext>
             </a:extLst>
           </p:cNvPr>
@@ -7005,7 +7097,7 @@
           <p:cNvPr id="5" name="Espaço Reservado para Data 4">
             <a:extLst>
               <a:ext uri="{FF2B5EF4-FFF2-40B4-BE49-F238E27FC236}">
-                <a16:creationId xmlns:a16="http://schemas.microsoft.com/office/drawing/2014/main" id="{A4DC363A-5000-472E-8B17-02E7DCB8840A}"/>
+                <a16:creationId xmlns:a16="http://schemas.microsoft.com/office/drawing/2014/main" xmlns="" id="{A4DC363A-5000-472E-8B17-02E7DCB8840A}"/>
               </a:ext>
             </a:extLst>
           </p:cNvPr>
@@ -7023,7 +7115,7 @@
           <a:p>
             <a:fld id="{63289F7E-B80B-496E-81B4-D396C37C9454}" type="datetimeFigureOut">
               <a:rPr lang="pt-BR" smtClean="0"/>
-              <a:t>06/04/2026</a:t>
+              <a:t>13/09/2026</a:t>
             </a:fld>
             <a:endParaRPr lang="pt-BR"/>
           </a:p>
@@ -7034,7 +7126,7 @@
           <p:cNvPr id="6" name="Espaço Reservado para Rodapé 5">
             <a:extLst>
               <a:ext uri="{FF2B5EF4-FFF2-40B4-BE49-F238E27FC236}">
-                <a16:creationId xmlns:a16="http://schemas.microsoft.com/office/drawing/2014/main" id="{5548425D-2C21-4C56-BAD4-662978775C28}"/>
+                <a16:creationId xmlns:a16="http://schemas.microsoft.com/office/drawing/2014/main" xmlns="" id="{5548425D-2C21-4C56-BAD4-662978775C28}"/>
               </a:ext>
             </a:extLst>
           </p:cNvPr>
@@ -7059,7 +7151,7 @@
           <p:cNvPr id="7" name="Espaço Reservado para Número de Slide 6">
             <a:extLst>
               <a:ext uri="{FF2B5EF4-FFF2-40B4-BE49-F238E27FC236}">
-                <a16:creationId xmlns:a16="http://schemas.microsoft.com/office/drawing/2014/main" id="{C63E9726-E64C-42B2-AE8A-8C235A956B48}"/>
+                <a16:creationId xmlns:a16="http://schemas.microsoft.com/office/drawing/2014/main" xmlns="" id="{C63E9726-E64C-42B2-AE8A-8C235A956B48}"/>
               </a:ext>
             </a:extLst>
           </p:cNvPr>
@@ -7077,7 +7169,7 @@
           <a:p>
             <a:fld id="{1A7E88B7-70CE-4035-AE73-13FA6FB985D4}" type="slidenum">
               <a:rPr lang="pt-BR" smtClean="0"/>
-              <a:t>‹#›</a:t>
+              <a:t>‹nº›</a:t>
             </a:fld>
             <a:endParaRPr lang="pt-BR"/>
           </a:p>
@@ -7118,7 +7210,7 @@
           <p:cNvPr id="2" name="Título 1">
             <a:extLst>
               <a:ext uri="{FF2B5EF4-FFF2-40B4-BE49-F238E27FC236}">
-                <a16:creationId xmlns:a16="http://schemas.microsoft.com/office/drawing/2014/main" id="{11086A78-3E74-450C-96A6-CA8AC37AF772}"/>
+                <a16:creationId xmlns:a16="http://schemas.microsoft.com/office/drawing/2014/main" xmlns="" id="{11086A78-3E74-450C-96A6-CA8AC37AF772}"/>
               </a:ext>
             </a:extLst>
           </p:cNvPr>
@@ -7155,7 +7247,7 @@
           <p:cNvPr id="3" name="Espaço Reservado para Imagem 2">
             <a:extLst>
               <a:ext uri="{FF2B5EF4-FFF2-40B4-BE49-F238E27FC236}">
-                <a16:creationId xmlns:a16="http://schemas.microsoft.com/office/drawing/2014/main" id="{5F5B7312-975A-4DBC-9B2F-3652ADA006FD}"/>
+                <a16:creationId xmlns:a16="http://schemas.microsoft.com/office/drawing/2014/main" xmlns="" id="{5F5B7312-975A-4DBC-9B2F-3652ADA006FD}"/>
               </a:ext>
             </a:extLst>
           </p:cNvPr>
@@ -7222,7 +7314,7 @@
           <p:cNvPr id="4" name="Espaço Reservado para Texto 3">
             <a:extLst>
               <a:ext uri="{FF2B5EF4-FFF2-40B4-BE49-F238E27FC236}">
-                <a16:creationId xmlns:a16="http://schemas.microsoft.com/office/drawing/2014/main" id="{AAF805F5-1DFF-41C6-944C-7D79FE0D0963}"/>
+                <a16:creationId xmlns:a16="http://schemas.microsoft.com/office/drawing/2014/main" xmlns="" id="{AAF805F5-1DFF-41C6-944C-7D79FE0D0963}"/>
               </a:ext>
             </a:extLst>
           </p:cNvPr>
@@ -7293,7 +7385,7 @@
           <p:cNvPr id="5" name="Espaço Reservado para Data 4">
             <a:extLst>
               <a:ext uri="{FF2B5EF4-FFF2-40B4-BE49-F238E27FC236}">
-                <a16:creationId xmlns:a16="http://schemas.microsoft.com/office/drawing/2014/main" id="{02113D81-8665-4516-BD81-C6A1F254EECD}"/>
+                <a16:creationId xmlns:a16="http://schemas.microsoft.com/office/drawing/2014/main" xmlns="" id="{02113D81-8665-4516-BD81-C6A1F254EECD}"/>
               </a:ext>
             </a:extLst>
           </p:cNvPr>
@@ -7311,7 +7403,7 @@
           <a:p>
             <a:fld id="{63289F7E-B80B-496E-81B4-D396C37C9454}" type="datetimeFigureOut">
               <a:rPr lang="pt-BR" smtClean="0"/>
-              <a:t>06/04/2026</a:t>
+              <a:t>13/09/2026</a:t>
             </a:fld>
             <a:endParaRPr lang="pt-BR"/>
           </a:p>
@@ -7322,7 +7414,7 @@
           <p:cNvPr id="6" name="Espaço Reservado para Rodapé 5">
             <a:extLst>
               <a:ext uri="{FF2B5EF4-FFF2-40B4-BE49-F238E27FC236}">
-                <a16:creationId xmlns:a16="http://schemas.microsoft.com/office/drawing/2014/main" id="{2B00C88B-FF32-40AA-A187-727D96FD7862}"/>
+                <a16:creationId xmlns:a16="http://schemas.microsoft.com/office/drawing/2014/main" xmlns="" id="{2B00C88B-FF32-40AA-A187-727D96FD7862}"/>
               </a:ext>
             </a:extLst>
           </p:cNvPr>
@@ -7347,7 +7439,7 @@
           <p:cNvPr id="7" name="Espaço Reservado para Número de Slide 6">
             <a:extLst>
               <a:ext uri="{FF2B5EF4-FFF2-40B4-BE49-F238E27FC236}">
-                <a16:creationId xmlns:a16="http://schemas.microsoft.com/office/drawing/2014/main" id="{A04D1A2D-69F7-4B8F-A730-BC26DC340BA6}"/>
+                <a16:creationId xmlns:a16="http://schemas.microsoft.com/office/drawing/2014/main" xmlns="" id="{A04D1A2D-69F7-4B8F-A730-BC26DC340BA6}"/>
               </a:ext>
             </a:extLst>
           </p:cNvPr>
@@ -7365,7 +7457,7 @@
           <a:p>
             <a:fld id="{1A7E88B7-70CE-4035-AE73-13FA6FB985D4}" type="slidenum">
               <a:rPr lang="pt-BR" smtClean="0"/>
-              <a:t>‹#›</a:t>
+              <a:t>‹nº›</a:t>
             </a:fld>
             <a:endParaRPr lang="pt-BR"/>
           </a:p>
@@ -7411,7 +7503,7 @@
           <p:cNvPr id="2" name="Espaço Reservado para Título 1">
             <a:extLst>
               <a:ext uri="{FF2B5EF4-FFF2-40B4-BE49-F238E27FC236}">
-                <a16:creationId xmlns:a16="http://schemas.microsoft.com/office/drawing/2014/main" id="{E69A0273-1966-4A1B-9370-4C1CE5036371}"/>
+                <a16:creationId xmlns:a16="http://schemas.microsoft.com/office/drawing/2014/main" xmlns="" id="{E69A0273-1966-4A1B-9370-4C1CE5036371}"/>
               </a:ext>
             </a:extLst>
           </p:cNvPr>
@@ -7449,7 +7541,7 @@
           <p:cNvPr id="3" name="Espaço Reservado para Texto 2">
             <a:extLst>
               <a:ext uri="{FF2B5EF4-FFF2-40B4-BE49-F238E27FC236}">
-                <a16:creationId xmlns:a16="http://schemas.microsoft.com/office/drawing/2014/main" id="{3B9CF87A-0448-49A7-AB25-EBC1D56A40EF}"/>
+                <a16:creationId xmlns:a16="http://schemas.microsoft.com/office/drawing/2014/main" xmlns="" id="{3B9CF87A-0448-49A7-AB25-EBC1D56A40EF}"/>
               </a:ext>
             </a:extLst>
           </p:cNvPr>
@@ -7516,7 +7608,7 @@
           <p:cNvPr id="4" name="Espaço Reservado para Data 3">
             <a:extLst>
               <a:ext uri="{FF2B5EF4-FFF2-40B4-BE49-F238E27FC236}">
-                <a16:creationId xmlns:a16="http://schemas.microsoft.com/office/drawing/2014/main" id="{2EF7B1F2-BB5A-44D0-816D-16AD2C71430E}"/>
+                <a16:creationId xmlns:a16="http://schemas.microsoft.com/office/drawing/2014/main" xmlns="" id="{2EF7B1F2-BB5A-44D0-816D-16AD2C71430E}"/>
               </a:ext>
             </a:extLst>
           </p:cNvPr>
@@ -7552,7 +7644,7 @@
           <a:p>
             <a:fld id="{63289F7E-B80B-496E-81B4-D396C37C9454}" type="datetimeFigureOut">
               <a:rPr lang="pt-BR" smtClean="0"/>
-              <a:t>06/04/2026</a:t>
+              <a:t>13/09/2026</a:t>
             </a:fld>
             <a:endParaRPr lang="pt-BR"/>
           </a:p>
@@ -7563,7 +7655,7 @@
           <p:cNvPr id="5" name="Espaço Reservado para Rodapé 4">
             <a:extLst>
               <a:ext uri="{FF2B5EF4-FFF2-40B4-BE49-F238E27FC236}">
-                <a16:creationId xmlns:a16="http://schemas.microsoft.com/office/drawing/2014/main" id="{C703F94C-2CC8-4DAA-BC35-14FC3E841DCD}"/>
+                <a16:creationId xmlns:a16="http://schemas.microsoft.com/office/drawing/2014/main" xmlns="" id="{C703F94C-2CC8-4DAA-BC35-14FC3E841DCD}"/>
               </a:ext>
             </a:extLst>
           </p:cNvPr>
@@ -7606,7 +7698,7 @@
           <p:cNvPr id="6" name="Espaço Reservado para Número de Slide 5">
             <a:extLst>
               <a:ext uri="{FF2B5EF4-FFF2-40B4-BE49-F238E27FC236}">
-                <a16:creationId xmlns:a16="http://schemas.microsoft.com/office/drawing/2014/main" id="{64051336-7048-457A-8B61-D94291D71648}"/>
+                <a16:creationId xmlns:a16="http://schemas.microsoft.com/office/drawing/2014/main" xmlns="" id="{64051336-7048-457A-8B61-D94291D71648}"/>
               </a:ext>
             </a:extLst>
           </p:cNvPr>
@@ -7642,7 +7734,7 @@
           <a:p>
             <a:fld id="{1A7E88B7-70CE-4035-AE73-13FA6FB985D4}" type="slidenum">
               <a:rPr lang="pt-BR" smtClean="0"/>
-              <a:t>‹#›</a:t>
+              <a:t>‹nº›</a:t>
             </a:fld>
             <a:endParaRPr lang="pt-BR"/>
           </a:p>
@@ -7974,7 +8066,7 @@
           <p:cNvPr id="4" name="CaixaDeTexto 3">
             <a:extLst>
               <a:ext uri="{FF2B5EF4-FFF2-40B4-BE49-F238E27FC236}">
-                <a16:creationId xmlns:a16="http://schemas.microsoft.com/office/drawing/2014/main" id="{430EB894-B7D4-434C-9D1A-A14094D9BEEC}"/>
+                <a16:creationId xmlns:a16="http://schemas.microsoft.com/office/drawing/2014/main" xmlns="" id="{430EB894-B7D4-434C-9D1A-A14094D9BEEC}"/>
               </a:ext>
             </a:extLst>
           </p:cNvPr>
@@ -8018,7 +8110,7 @@
           <p:cNvPr id="1026" name="Picture 2" descr="Logo">
             <a:extLst>
               <a:ext uri="{FF2B5EF4-FFF2-40B4-BE49-F238E27FC236}">
-                <a16:creationId xmlns:a16="http://schemas.microsoft.com/office/drawing/2014/main" id="{3F2642E0-4F6A-4196-8F58-E77D36E9A33F}"/>
+                <a16:creationId xmlns:a16="http://schemas.microsoft.com/office/drawing/2014/main" xmlns="" id="{3F2642E0-4F6A-4196-8F58-E77D36E9A33F}"/>
               </a:ext>
             </a:extLst>
           </p:cNvPr>
@@ -8063,7 +8155,7 @@
           <p:cNvPr id="5122" name="Picture 2" descr="Image result for machine learning">
             <a:extLst>
               <a:ext uri="{FF2B5EF4-FFF2-40B4-BE49-F238E27FC236}">
-                <a16:creationId xmlns:a16="http://schemas.microsoft.com/office/drawing/2014/main" id="{810CE0A2-4102-44A6-A370-175E7896CDCB}"/>
+                <a16:creationId xmlns:a16="http://schemas.microsoft.com/office/drawing/2014/main" xmlns="" id="{810CE0A2-4102-44A6-A370-175E7896CDCB}"/>
               </a:ext>
             </a:extLst>
           </p:cNvPr>
@@ -8108,7 +8200,7 @@
           <p:cNvPr id="7" name="Título 1">
             <a:extLst>
               <a:ext uri="{FF2B5EF4-FFF2-40B4-BE49-F238E27FC236}">
-                <a16:creationId xmlns:a16="http://schemas.microsoft.com/office/drawing/2014/main" id="{32666AC8-2E17-4DB4-B0F5-60C640CCFD2E}"/>
+                <a16:creationId xmlns:a16="http://schemas.microsoft.com/office/drawing/2014/main" xmlns="" id="{32666AC8-2E17-4DB4-B0F5-60C640CCFD2E}"/>
               </a:ext>
             </a:extLst>
           </p:cNvPr>
@@ -8134,6 +8226,10 @@
             <a:r>
               <a:rPr lang="pt-BR" sz="6600" dirty="0"/>
               <a:t>C24 – Inteligência Artificial:</a:t>
+            </a:r>
+            <a:r>
+              <a:rPr lang="pt-BR" sz="7200" dirty="0"/>
+              <a:t/>
             </a:r>
             <a:br>
               <a:rPr lang="pt-BR" sz="7200" dirty="0"/>
@@ -8189,7 +8285,7 @@
           <p:cNvPr id="2" name="Título 1">
             <a:extLst>
               <a:ext uri="{FF2B5EF4-FFF2-40B4-BE49-F238E27FC236}">
-                <a16:creationId xmlns:a16="http://schemas.microsoft.com/office/drawing/2014/main" id="{028A152F-93D8-11FA-9B7A-B62AE5BB6486}"/>
+                <a16:creationId xmlns:a16="http://schemas.microsoft.com/office/drawing/2014/main" xmlns="" id="{028A152F-93D8-11FA-9B7A-B62AE5BB6486}"/>
               </a:ext>
             </a:extLst>
           </p:cNvPr>
@@ -8216,14 +8312,14 @@
           </a:p>
         </p:txBody>
       </p:sp>
-      <mc:AlternateContent xmlns:mc="http://schemas.openxmlformats.org/markup-compatibility/2006">
-        <mc:Choice xmlns:a14="http://schemas.microsoft.com/office/drawing/2010/main" Requires="a14">
+      <mc:AlternateContent xmlns:mc="http://schemas.openxmlformats.org/markup-compatibility/2006" xmlns:a14="http://schemas.microsoft.com/office/drawing/2010/main">
+        <mc:Choice Requires="a14">
           <p:sp>
             <p:nvSpPr>
               <p:cNvPr id="3" name="Espaço Reservado para Conteúdo 2">
                 <a:extLst>
                   <a:ext uri="{FF2B5EF4-FFF2-40B4-BE49-F238E27FC236}">
-                    <a16:creationId xmlns:a16="http://schemas.microsoft.com/office/drawing/2014/main" id="{B3535727-BB24-BB15-5C03-3DA9A3F9A09A}"/>
+                    <a16:creationId xmlns:a16="http://schemas.microsoft.com/office/drawing/2014/main" xmlns="" id="{B3535727-BB24-BB15-5C03-3DA9A3F9A09A}"/>
                   </a:ext>
                 </a:extLst>
               </p:cNvPr>
@@ -8400,7 +8496,7 @@
             </p:txBody>
           </p:sp>
         </mc:Choice>
-        <mc:Fallback>
+        <mc:Fallback xmlns="">
           <p:sp>
             <p:nvSpPr>
               <p:cNvPr id="3" name="Espaço Reservado para Conteúdo 2">
@@ -8449,7 +8545,7 @@
           <p:cNvPr id="7" name="Picture 6">
             <a:extLst>
               <a:ext uri="{FF2B5EF4-FFF2-40B4-BE49-F238E27FC236}">
-                <a16:creationId xmlns:a16="http://schemas.microsoft.com/office/drawing/2014/main" id="{B29D6ED4-6B75-62EC-8922-9CCA4F704E2B}"/>
+                <a16:creationId xmlns:a16="http://schemas.microsoft.com/office/drawing/2014/main" xmlns="" id="{B29D6ED4-6B75-62EC-8922-9CCA4F704E2B}"/>
               </a:ext>
             </a:extLst>
           </p:cNvPr>
@@ -8459,7 +8555,7 @@
           <p:nvPr/>
         </p:nvPicPr>
         <p:blipFill>
-          <a:blip r:embed="rId4">
+          <a:blip r:embed="rId4" cstate="print">
             <a:extLst>
               <a:ext uri="{28A0092B-C50C-407E-A947-70E740481C1C}">
                 <a14:useLocalDpi xmlns:a14="http://schemas.microsoft.com/office/drawing/2010/main" val="0"/>
@@ -8515,7 +8611,7 @@
           <p:cNvPr id="2" name="Title 1">
             <a:extLst>
               <a:ext uri="{FF2B5EF4-FFF2-40B4-BE49-F238E27FC236}">
-                <a16:creationId xmlns:a16="http://schemas.microsoft.com/office/drawing/2014/main" id="{2DB9D242-5419-0FFB-7863-B3BB3BD80869}"/>
+                <a16:creationId xmlns:a16="http://schemas.microsoft.com/office/drawing/2014/main" xmlns="" id="{2DB9D242-5419-0FFB-7863-B3BB3BD80869}"/>
               </a:ext>
             </a:extLst>
           </p:cNvPr>
@@ -8539,14 +8635,14 @@
           </a:p>
         </p:txBody>
       </p:sp>
-      <mc:AlternateContent xmlns:mc="http://schemas.openxmlformats.org/markup-compatibility/2006">
-        <mc:Choice xmlns:a14="http://schemas.microsoft.com/office/drawing/2010/main" Requires="a14">
+      <mc:AlternateContent xmlns:mc="http://schemas.openxmlformats.org/markup-compatibility/2006" xmlns:a14="http://schemas.microsoft.com/office/drawing/2010/main">
+        <mc:Choice Requires="a14">
           <p:sp>
             <p:nvSpPr>
               <p:cNvPr id="3" name="Content Placeholder 2">
                 <a:extLst>
                   <a:ext uri="{FF2B5EF4-FFF2-40B4-BE49-F238E27FC236}">
-                    <a16:creationId xmlns:a16="http://schemas.microsoft.com/office/drawing/2014/main" id="{34B1DEA3-BAAD-D90C-CD9D-99A5A24F4544}"/>
+                    <a16:creationId xmlns:a16="http://schemas.microsoft.com/office/drawing/2014/main" xmlns="" id="{34B1DEA3-BAAD-D90C-CD9D-99A5A24F4544}"/>
                   </a:ext>
                 </a:extLst>
               </p:cNvPr>
@@ -9417,7 +9513,7 @@
             </p:txBody>
           </p:sp>
         </mc:Choice>
-        <mc:Fallback>
+        <mc:Fallback xmlns="">
           <p:sp>
             <p:nvSpPr>
               <p:cNvPr id="3" name="Content Placeholder 2">
@@ -9496,7 +9592,7 @@
           <p:cNvPr id="2" name="Title 1">
             <a:extLst>
               <a:ext uri="{FF2B5EF4-FFF2-40B4-BE49-F238E27FC236}">
-                <a16:creationId xmlns:a16="http://schemas.microsoft.com/office/drawing/2014/main" id="{997538D5-DC01-EC48-38D2-99D754F1BB92}"/>
+                <a16:creationId xmlns:a16="http://schemas.microsoft.com/office/drawing/2014/main" xmlns="" id="{997538D5-DC01-EC48-38D2-99D754F1BB92}"/>
               </a:ext>
             </a:extLst>
           </p:cNvPr>
@@ -9520,14 +9616,14 @@
           </a:p>
         </p:txBody>
       </p:sp>
-      <mc:AlternateContent xmlns:mc="http://schemas.openxmlformats.org/markup-compatibility/2006">
-        <mc:Choice xmlns:a14="http://schemas.microsoft.com/office/drawing/2010/main" Requires="a14">
+      <mc:AlternateContent xmlns:mc="http://schemas.openxmlformats.org/markup-compatibility/2006" xmlns:a14="http://schemas.microsoft.com/office/drawing/2010/main">
+        <mc:Choice Requires="a14">
           <p:sp>
             <p:nvSpPr>
               <p:cNvPr id="3" name="Content Placeholder 2">
                 <a:extLst>
                   <a:ext uri="{FF2B5EF4-FFF2-40B4-BE49-F238E27FC236}">
-                    <a16:creationId xmlns:a16="http://schemas.microsoft.com/office/drawing/2014/main" id="{17D7928D-3A32-7330-5FDC-756155EF2F3D}"/>
+                    <a16:creationId xmlns:a16="http://schemas.microsoft.com/office/drawing/2014/main" xmlns="" id="{17D7928D-3A32-7330-5FDC-756155EF2F3D}"/>
                   </a:ext>
                 </a:extLst>
               </p:cNvPr>
@@ -9963,7 +10059,7 @@
             </p:txBody>
           </p:sp>
         </mc:Choice>
-        <mc:Fallback>
+        <mc:Fallback xmlns="">
           <p:sp>
             <p:nvSpPr>
               <p:cNvPr id="3" name="Content Placeholder 2">
@@ -10012,7 +10108,7 @@
           <p:cNvPr id="5" name="Picture 4">
             <a:extLst>
               <a:ext uri="{FF2B5EF4-FFF2-40B4-BE49-F238E27FC236}">
-                <a16:creationId xmlns:a16="http://schemas.microsoft.com/office/drawing/2014/main" id="{4AA09737-BB93-F7AB-8A47-090B362628C6}"/>
+                <a16:creationId xmlns:a16="http://schemas.microsoft.com/office/drawing/2014/main" xmlns="" id="{4AA09737-BB93-F7AB-8A47-090B362628C6}"/>
               </a:ext>
             </a:extLst>
           </p:cNvPr>
@@ -10022,7 +10118,7 @@
           <p:nvPr/>
         </p:nvPicPr>
         <p:blipFill>
-          <a:blip r:embed="rId3">
+          <a:blip r:embed="rId3" cstate="print">
             <a:extLst>
               <a:ext uri="{28A0092B-C50C-407E-A947-70E740481C1C}">
                 <a14:useLocalDpi xmlns:a14="http://schemas.microsoft.com/office/drawing/2010/main" val="0"/>
@@ -10078,7 +10174,7 @@
           <p:cNvPr id="2" name="Título 1">
             <a:extLst>
               <a:ext uri="{FF2B5EF4-FFF2-40B4-BE49-F238E27FC236}">
-                <a16:creationId xmlns:a16="http://schemas.microsoft.com/office/drawing/2014/main" id="{1FE7CD05-66F2-8967-6154-CCED38E0F987}"/>
+                <a16:creationId xmlns:a16="http://schemas.microsoft.com/office/drawing/2014/main" xmlns="" id="{1FE7CD05-66F2-8967-6154-CCED38E0F987}"/>
               </a:ext>
             </a:extLst>
           </p:cNvPr>
@@ -10101,14 +10197,14 @@
           </a:p>
         </p:txBody>
       </p:sp>
-      <mc:AlternateContent xmlns:mc="http://schemas.openxmlformats.org/markup-compatibility/2006">
-        <mc:Choice xmlns:a14="http://schemas.microsoft.com/office/drawing/2010/main" Requires="a14">
+      <mc:AlternateContent xmlns:mc="http://schemas.openxmlformats.org/markup-compatibility/2006" xmlns:a14="http://schemas.microsoft.com/office/drawing/2010/main">
+        <mc:Choice Requires="a14">
           <p:sp>
             <p:nvSpPr>
               <p:cNvPr id="3" name="Espaço Reservado para Conteúdo 2">
                 <a:extLst>
                   <a:ext uri="{FF2B5EF4-FFF2-40B4-BE49-F238E27FC236}">
-                    <a16:creationId xmlns:a16="http://schemas.microsoft.com/office/drawing/2014/main" id="{21A86630-5D79-AD4B-79FC-6C8373E8DB39}"/>
+                    <a16:creationId xmlns:a16="http://schemas.microsoft.com/office/drawing/2014/main" xmlns="" id="{21A86630-5D79-AD4B-79FC-6C8373E8DB39}"/>
                   </a:ext>
                 </a:extLst>
               </p:cNvPr>
@@ -11032,7 +11128,7 @@
             </p:txBody>
           </p:sp>
         </mc:Choice>
-        <mc:Fallback>
+        <mc:Fallback xmlns="">
           <p:sp>
             <p:nvSpPr>
               <p:cNvPr id="3" name="Espaço Reservado para Conteúdo 2">
@@ -11111,7 +11207,7 @@
           <p:cNvPr id="2" name="Título 1">
             <a:extLst>
               <a:ext uri="{FF2B5EF4-FFF2-40B4-BE49-F238E27FC236}">
-                <a16:creationId xmlns:a16="http://schemas.microsoft.com/office/drawing/2014/main" id="{E4598F11-6F65-0753-89FE-F5ABED77B46A}"/>
+                <a16:creationId xmlns:a16="http://schemas.microsoft.com/office/drawing/2014/main" xmlns="" id="{E4598F11-6F65-0753-89FE-F5ABED77B46A}"/>
               </a:ext>
             </a:extLst>
           </p:cNvPr>
@@ -11142,7 +11238,7 @@
               <p:cNvPr id="3" name="Espaço Reservado para Conteúdo 2">
                 <a:extLst>
                   <a:ext uri="{FF2B5EF4-FFF2-40B4-BE49-F238E27FC236}">
-                    <a16:creationId xmlns:a16="http://schemas.microsoft.com/office/drawing/2014/main" id="{FEF4E6DC-E916-D97A-4D18-D469285C4F2C}"/>
+                    <a16:creationId xmlns:a16="http://schemas.microsoft.com/office/drawing/2014/main" xmlns="" id="{FEF4E6DC-E916-D97A-4D18-D469285C4F2C}"/>
                   </a:ext>
                 </a:extLst>
               </p:cNvPr>
@@ -11612,7 +11708,7 @@
           <p:cNvPr id="2" name="Título 1">
             <a:extLst>
               <a:ext uri="{FF2B5EF4-FFF2-40B4-BE49-F238E27FC236}">
-                <a16:creationId xmlns:a16="http://schemas.microsoft.com/office/drawing/2014/main" id="{D5807923-28D2-8150-E304-526DA460D220}"/>
+                <a16:creationId xmlns:a16="http://schemas.microsoft.com/office/drawing/2014/main" xmlns="" id="{D5807923-28D2-8150-E304-526DA460D220}"/>
               </a:ext>
             </a:extLst>
           </p:cNvPr>
@@ -11641,7 +11737,7 @@
           <p:cNvPr id="3" name="Espaço Reservado para Conteúdo 2">
             <a:extLst>
               <a:ext uri="{FF2B5EF4-FFF2-40B4-BE49-F238E27FC236}">
-                <a16:creationId xmlns:a16="http://schemas.microsoft.com/office/drawing/2014/main" id="{FFACD180-C529-EB91-BD2D-B5F491B1E35C}"/>
+                <a16:creationId xmlns:a16="http://schemas.microsoft.com/office/drawing/2014/main" xmlns="" id="{FFACD180-C529-EB91-BD2D-B5F491B1E35C}"/>
               </a:ext>
             </a:extLst>
           </p:cNvPr>
@@ -11773,7 +11869,7 @@
           <p:cNvPr id="1026" name="Picture 2">
             <a:extLst>
               <a:ext uri="{FF2B5EF4-FFF2-40B4-BE49-F238E27FC236}">
-                <a16:creationId xmlns:a16="http://schemas.microsoft.com/office/drawing/2014/main" id="{6FC2BDE8-91E0-6379-9BA3-76511C6153D5}"/>
+                <a16:creationId xmlns:a16="http://schemas.microsoft.com/office/drawing/2014/main" xmlns="" id="{6FC2BDE8-91E0-6379-9BA3-76511C6153D5}"/>
               </a:ext>
             </a:extLst>
           </p:cNvPr>
@@ -11818,7 +11914,7 @@
           <p:cNvPr id="5" name="Picture 2">
             <a:extLst>
               <a:ext uri="{FF2B5EF4-FFF2-40B4-BE49-F238E27FC236}">
-                <a16:creationId xmlns:a16="http://schemas.microsoft.com/office/drawing/2014/main" id="{2771BE1F-7B74-36A4-AA69-9171B025A4B6}"/>
+                <a16:creationId xmlns:a16="http://schemas.microsoft.com/office/drawing/2014/main" xmlns="" id="{2771BE1F-7B74-36A4-AA69-9171B025A4B6}"/>
               </a:ext>
             </a:extLst>
           </p:cNvPr>
@@ -11893,7 +11989,7 @@
           <p:cNvPr id="2" name="Título 1">
             <a:extLst>
               <a:ext uri="{FF2B5EF4-FFF2-40B4-BE49-F238E27FC236}">
-                <a16:creationId xmlns:a16="http://schemas.microsoft.com/office/drawing/2014/main" id="{5D929962-9BFC-4174-AB35-CC23FA013168}"/>
+                <a16:creationId xmlns:a16="http://schemas.microsoft.com/office/drawing/2014/main" xmlns="" id="{5D929962-9BFC-4174-AB35-CC23FA013168}"/>
               </a:ext>
             </a:extLst>
           </p:cNvPr>
@@ -11917,14 +12013,14 @@
           </a:p>
         </p:txBody>
       </p:sp>
-      <mc:AlternateContent xmlns:mc="http://schemas.openxmlformats.org/markup-compatibility/2006">
-        <mc:Choice xmlns:a14="http://schemas.microsoft.com/office/drawing/2010/main" Requires="a14">
+      <mc:AlternateContent xmlns:mc="http://schemas.openxmlformats.org/markup-compatibility/2006" xmlns:a14="http://schemas.microsoft.com/office/drawing/2010/main">
+        <mc:Choice Requires="a14">
           <p:sp>
             <p:nvSpPr>
               <p:cNvPr id="3" name="Espaço Reservado para Conteúdo 2">
                 <a:extLst>
                   <a:ext uri="{FF2B5EF4-FFF2-40B4-BE49-F238E27FC236}">
-                    <a16:creationId xmlns:a16="http://schemas.microsoft.com/office/drawing/2014/main" id="{1D38055D-E355-F780-9CA0-0337EA0BE4FD}"/>
+                    <a16:creationId xmlns:a16="http://schemas.microsoft.com/office/drawing/2014/main" xmlns="" id="{1D38055D-E355-F780-9CA0-0337EA0BE4FD}"/>
                   </a:ext>
                 </a:extLst>
               </p:cNvPr>
@@ -13147,7 +13243,7 @@
             </p:txBody>
           </p:sp>
         </mc:Choice>
-        <mc:Fallback>
+        <mc:Fallback xmlns="">
           <p:sp>
             <p:nvSpPr>
               <p:cNvPr id="3" name="Espaço Reservado para Conteúdo 2">
@@ -13226,7 +13322,7 @@
           <p:cNvPr id="2" name="Título 1">
             <a:extLst>
               <a:ext uri="{FF2B5EF4-FFF2-40B4-BE49-F238E27FC236}">
-                <a16:creationId xmlns:a16="http://schemas.microsoft.com/office/drawing/2014/main" id="{01D0947A-594D-A8D5-95F3-38EB04C6BDB6}"/>
+                <a16:creationId xmlns:a16="http://schemas.microsoft.com/office/drawing/2014/main" xmlns="" id="{01D0947A-594D-A8D5-95F3-38EB04C6BDB6}"/>
               </a:ext>
             </a:extLst>
           </p:cNvPr>
@@ -13253,14 +13349,14 @@
           </a:p>
         </p:txBody>
       </p:sp>
-      <mc:AlternateContent xmlns:mc="http://schemas.openxmlformats.org/markup-compatibility/2006">
-        <mc:Choice xmlns:a14="http://schemas.microsoft.com/office/drawing/2010/main" Requires="a14">
+      <mc:AlternateContent xmlns:mc="http://schemas.openxmlformats.org/markup-compatibility/2006" xmlns:a14="http://schemas.microsoft.com/office/drawing/2010/main">
+        <mc:Choice Requires="a14">
           <p:sp>
             <p:nvSpPr>
               <p:cNvPr id="3" name="Espaço Reservado para Conteúdo 2">
                 <a:extLst>
                   <a:ext uri="{FF2B5EF4-FFF2-40B4-BE49-F238E27FC236}">
-                    <a16:creationId xmlns:a16="http://schemas.microsoft.com/office/drawing/2014/main" id="{DDBA288E-BBB8-E157-840C-AA685AD7D65C}"/>
+                    <a16:creationId xmlns:a16="http://schemas.microsoft.com/office/drawing/2014/main" xmlns="" id="{DDBA288E-BBB8-E157-840C-AA685AD7D65C}"/>
                   </a:ext>
                 </a:extLst>
               </p:cNvPr>
@@ -14105,7 +14201,7 @@
             </p:txBody>
           </p:sp>
         </mc:Choice>
-        <mc:Fallback>
+        <mc:Fallback xmlns="">
           <p:sp>
             <p:nvSpPr>
               <p:cNvPr id="3" name="Espaço Reservado para Conteúdo 2">
@@ -14184,7 +14280,7 @@
           <p:cNvPr id="2" name="Título 1">
             <a:extLst>
               <a:ext uri="{FF2B5EF4-FFF2-40B4-BE49-F238E27FC236}">
-                <a16:creationId xmlns:a16="http://schemas.microsoft.com/office/drawing/2014/main" id="{E0F1FD81-6095-2AF0-8691-34E55B8A93B5}"/>
+                <a16:creationId xmlns:a16="http://schemas.microsoft.com/office/drawing/2014/main" xmlns="" id="{E0F1FD81-6095-2AF0-8691-34E55B8A93B5}"/>
               </a:ext>
             </a:extLst>
           </p:cNvPr>
@@ -14218,7 +14314,7 @@
               <p:cNvPr id="3" name="Espaço Reservado para Conteúdo 2">
                 <a:extLst>
                   <a:ext uri="{FF2B5EF4-FFF2-40B4-BE49-F238E27FC236}">
-                    <a16:creationId xmlns:a16="http://schemas.microsoft.com/office/drawing/2014/main" id="{BB734B24-DA50-860B-5D55-C33F6F451B6F}"/>
+                    <a16:creationId xmlns:a16="http://schemas.microsoft.com/office/drawing/2014/main" xmlns="" id="{BB734B24-DA50-860B-5D55-C33F6F451B6F}"/>
                   </a:ext>
                 </a:extLst>
               </p:cNvPr>
@@ -14782,7 +14878,7 @@
           <p:cNvPr id="4" name="Imagem 5">
             <a:extLst>
               <a:ext uri="{FF2B5EF4-FFF2-40B4-BE49-F238E27FC236}">
-                <a16:creationId xmlns:a16="http://schemas.microsoft.com/office/drawing/2014/main" id="{535159CB-11DC-74B8-5C5F-D571CD018327}"/>
+                <a16:creationId xmlns:a16="http://schemas.microsoft.com/office/drawing/2014/main" xmlns="" id="{535159CB-11DC-74B8-5C5F-D571CD018327}"/>
               </a:ext>
             </a:extLst>
           </p:cNvPr>
@@ -14848,7 +14944,7 @@
           <p:cNvPr id="2" name="Título 1">
             <a:extLst>
               <a:ext uri="{FF2B5EF4-FFF2-40B4-BE49-F238E27FC236}">
-                <a16:creationId xmlns:a16="http://schemas.microsoft.com/office/drawing/2014/main" id="{FC175046-E9DF-FCC8-C62B-B00332089713}"/>
+                <a16:creationId xmlns:a16="http://schemas.microsoft.com/office/drawing/2014/main" xmlns="" id="{FC175046-E9DF-FCC8-C62B-B00332089713}"/>
               </a:ext>
             </a:extLst>
           </p:cNvPr>
@@ -14882,7 +14978,7 @@
               <p:cNvPr id="3" name="Espaço Reservado para Conteúdo 2">
                 <a:extLst>
                   <a:ext uri="{FF2B5EF4-FFF2-40B4-BE49-F238E27FC236}">
-                    <a16:creationId xmlns:a16="http://schemas.microsoft.com/office/drawing/2014/main" id="{24721BB7-DBA3-D8BF-7F98-ED91BD59DAEC}"/>
+                    <a16:creationId xmlns:a16="http://schemas.microsoft.com/office/drawing/2014/main" xmlns="" id="{24721BB7-DBA3-D8BF-7F98-ED91BD59DAEC}"/>
                   </a:ext>
                 </a:extLst>
               </p:cNvPr>
@@ -15190,7 +15286,7 @@
           <p:cNvPr id="6" name="Imagem 5">
             <a:extLst>
               <a:ext uri="{FF2B5EF4-FFF2-40B4-BE49-F238E27FC236}">
-                <a16:creationId xmlns:a16="http://schemas.microsoft.com/office/drawing/2014/main" id="{FF78CF76-EB26-3FAE-0391-E452288FA28E}"/>
+                <a16:creationId xmlns:a16="http://schemas.microsoft.com/office/drawing/2014/main" xmlns="" id="{FF78CF76-EB26-3FAE-0391-E452288FA28E}"/>
               </a:ext>
             </a:extLst>
           </p:cNvPr>
@@ -15231,6 +15327,13 @@
   <p:clrMapOvr>
     <a:masterClrMapping/>
   </p:clrMapOvr>
+  <p:timing>
+    <p:tnLst>
+      <p:par>
+        <p:cTn id="1" dur="indefinite" restart="never" nodeType="tmRoot"/>
+      </p:par>
+    </p:tnLst>
+  </p:timing>
 </p:sld>
 </file>
 
@@ -15434,7 +15537,7 @@
           <p:cNvPr id="4" name="Picture 2" descr="Ana Barros (@anathinker) | Twitter">
             <a:extLst>
               <a:ext uri="{FF2B5EF4-FFF2-40B4-BE49-F238E27FC236}">
-                <a16:creationId xmlns:a16="http://schemas.microsoft.com/office/drawing/2014/main" id="{AF3F0044-4F7D-98F6-34C1-8351487DFDAA}"/>
+                <a16:creationId xmlns:a16="http://schemas.microsoft.com/office/drawing/2014/main" xmlns="" id="{AF3F0044-4F7D-98F6-34C1-8351487DFDAA}"/>
               </a:ext>
             </a:extLst>
           </p:cNvPr>
@@ -15481,7 +15584,7 @@
           <p:cNvPr id="5" name="Picture 6" descr="Analyzing Text Classification Techniques on Youtube Data">
             <a:extLst>
               <a:ext uri="{FF2B5EF4-FFF2-40B4-BE49-F238E27FC236}">
-                <a16:creationId xmlns:a16="http://schemas.microsoft.com/office/drawing/2014/main" id="{0E6041F8-AB14-54C0-C790-0288A3AC8FBA}"/>
+                <a16:creationId xmlns:a16="http://schemas.microsoft.com/office/drawing/2014/main" xmlns="" id="{0E6041F8-AB14-54C0-C790-0288A3AC8FBA}"/>
               </a:ext>
             </a:extLst>
           </p:cNvPr>
@@ -15526,7 +15629,7 @@
           <p:cNvPr id="6" name="Picture 2" descr="Sentiment Fig 1">
             <a:extLst>
               <a:ext uri="{FF2B5EF4-FFF2-40B4-BE49-F238E27FC236}">
-                <a16:creationId xmlns:a16="http://schemas.microsoft.com/office/drawing/2014/main" id="{1E7CC96F-55AB-1482-92F6-240F8E2E0D1E}"/>
+                <a16:creationId xmlns:a16="http://schemas.microsoft.com/office/drawing/2014/main" xmlns="" id="{1E7CC96F-55AB-1482-92F6-240F8E2E0D1E}"/>
               </a:ext>
             </a:extLst>
           </p:cNvPr>
@@ -15603,7 +15706,7 @@
           <p:cNvPr id="2" name="Título 1">
             <a:extLst>
               <a:ext uri="{FF2B5EF4-FFF2-40B4-BE49-F238E27FC236}">
-                <a16:creationId xmlns:a16="http://schemas.microsoft.com/office/drawing/2014/main" id="{94AB8438-E56E-2412-517C-8456E4CA773C}"/>
+                <a16:creationId xmlns:a16="http://schemas.microsoft.com/office/drawing/2014/main" xmlns="" id="{94AB8438-E56E-2412-517C-8456E4CA773C}"/>
               </a:ext>
             </a:extLst>
           </p:cNvPr>
@@ -15631,7 +15734,7 @@
           <p:cNvPr id="3" name="Espaço Reservado para Conteúdo 2">
             <a:extLst>
               <a:ext uri="{FF2B5EF4-FFF2-40B4-BE49-F238E27FC236}">
-                <a16:creationId xmlns:a16="http://schemas.microsoft.com/office/drawing/2014/main" id="{F7E2B09C-6D56-4C9F-A364-B904CCE2F1A0}"/>
+                <a16:creationId xmlns:a16="http://schemas.microsoft.com/office/drawing/2014/main" xmlns="" id="{F7E2B09C-6D56-4C9F-A364-B904CCE2F1A0}"/>
               </a:ext>
             </a:extLst>
           </p:cNvPr>
@@ -15668,7 +15771,7 @@
           <p:cNvPr id="18" name="Group 17">
             <a:extLst>
               <a:ext uri="{FF2B5EF4-FFF2-40B4-BE49-F238E27FC236}">
-                <a16:creationId xmlns:a16="http://schemas.microsoft.com/office/drawing/2014/main" id="{627C64FD-88E0-EC8E-2A34-0D5737B4C854}"/>
+                <a16:creationId xmlns:a16="http://schemas.microsoft.com/office/drawing/2014/main" xmlns="" id="{627C64FD-88E0-EC8E-2A34-0D5737B4C854}"/>
               </a:ext>
             </a:extLst>
           </p:cNvPr>
@@ -15688,7 +15791,7 @@
             <p:cNvPr id="12" name="Picture 4" descr="Project Jupyter | Try Jupyter">
               <a:extLst>
                 <a:ext uri="{FF2B5EF4-FFF2-40B4-BE49-F238E27FC236}">
-                  <a16:creationId xmlns:a16="http://schemas.microsoft.com/office/drawing/2014/main" id="{FF92EA36-91E7-292B-D7A0-2D4D83A10F98}"/>
+                  <a16:creationId xmlns:a16="http://schemas.microsoft.com/office/drawing/2014/main" xmlns="" id="{FF92EA36-91E7-292B-D7A0-2D4D83A10F98}"/>
                 </a:ext>
               </a:extLst>
             </p:cNvPr>
@@ -15735,7 +15838,7 @@
             <p:cNvPr id="13" name="Picture 8" descr="Google Colaboratory Colab - Guía Completa Español - Marketing Branding">
               <a:extLst>
                 <a:ext uri="{FF2B5EF4-FFF2-40B4-BE49-F238E27FC236}">
-                  <a16:creationId xmlns:a16="http://schemas.microsoft.com/office/drawing/2014/main" id="{46F1718A-89E6-9E63-E40B-2B19852D6AA0}"/>
+                  <a16:creationId xmlns:a16="http://schemas.microsoft.com/office/drawing/2014/main" xmlns="" id="{46F1718A-89E6-9E63-E40B-2B19852D6AA0}"/>
                 </a:ext>
               </a:extLst>
             </p:cNvPr>
@@ -15780,7 +15883,7 @@
             <p:cNvPr id="14" name="Picture 10" descr="IT12A01: FUNDAMENTALS OF PYTHON PROGRAMMING (SF) (SYNCHRONOUS E-LEARNING) -  NTUC LearningHub">
               <a:extLst>
                 <a:ext uri="{FF2B5EF4-FFF2-40B4-BE49-F238E27FC236}">
-                  <a16:creationId xmlns:a16="http://schemas.microsoft.com/office/drawing/2014/main" id="{33F6B1B4-9B79-D634-3E35-33F24609C848}"/>
+                  <a16:creationId xmlns:a16="http://schemas.microsoft.com/office/drawing/2014/main" xmlns="" id="{33F6B1B4-9B79-D634-3E35-33F24609C848}"/>
                 </a:ext>
               </a:extLst>
             </p:cNvPr>
@@ -15825,7 +15928,7 @@
             <p:cNvPr id="15" name="Sinal de Adição 7">
               <a:extLst>
                 <a:ext uri="{FF2B5EF4-FFF2-40B4-BE49-F238E27FC236}">
-                  <a16:creationId xmlns:a16="http://schemas.microsoft.com/office/drawing/2014/main" id="{6959EE6C-DCDB-E78B-5C50-EBD3FF3049E2}"/>
+                  <a16:creationId xmlns:a16="http://schemas.microsoft.com/office/drawing/2014/main" xmlns="" id="{6959EE6C-DCDB-E78B-5C50-EBD3FF3049E2}"/>
                 </a:ext>
               </a:extLst>
             </p:cNvPr>
@@ -15873,7 +15976,7 @@
             <p:cNvPr id="17" name="Sinal de Adição 10">
               <a:extLst>
                 <a:ext uri="{FF2B5EF4-FFF2-40B4-BE49-F238E27FC236}">
-                  <a16:creationId xmlns:a16="http://schemas.microsoft.com/office/drawing/2014/main" id="{30A21FDB-ABA6-9FD5-49EF-7762414AEF0C}"/>
+                  <a16:creationId xmlns:a16="http://schemas.microsoft.com/office/drawing/2014/main" xmlns="" id="{30A21FDB-ABA6-9FD5-49EF-7762414AEF0C}"/>
                 </a:ext>
               </a:extLst>
             </p:cNvPr>
@@ -15927,6 +16030,13 @@
   <p:clrMapOvr>
     <a:masterClrMapping/>
   </p:clrMapOvr>
+  <p:timing>
+    <p:tnLst>
+      <p:par>
+        <p:cTn id="1" dur="indefinite" restart="never" nodeType="tmRoot"/>
+      </p:par>
+    </p:tnLst>
+  </p:timing>
 </p:sld>
 </file>
 
@@ -15952,7 +16062,7 @@
           <p:cNvPr id="2" name="Title 1">
             <a:extLst>
               <a:ext uri="{FF2B5EF4-FFF2-40B4-BE49-F238E27FC236}">
-                <a16:creationId xmlns:a16="http://schemas.microsoft.com/office/drawing/2014/main" id="{CF49AE95-3E0A-F9BB-A3FD-4C328EF25334}"/>
+                <a16:creationId xmlns:a16="http://schemas.microsoft.com/office/drawing/2014/main" xmlns="" id="{CF49AE95-3E0A-F9BB-A3FD-4C328EF25334}"/>
               </a:ext>
             </a:extLst>
           </p:cNvPr>
@@ -15981,7 +16091,7 @@
           <p:cNvPr id="3" name="Content Placeholder 2">
             <a:extLst>
               <a:ext uri="{FF2B5EF4-FFF2-40B4-BE49-F238E27FC236}">
-                <a16:creationId xmlns:a16="http://schemas.microsoft.com/office/drawing/2014/main" id="{A431927B-FE56-CB25-3ECF-AB5E92A7DC71}"/>
+                <a16:creationId xmlns:a16="http://schemas.microsoft.com/office/drawing/2014/main" xmlns="" id="{A431927B-FE56-CB25-3ECF-AB5E92A7DC71}"/>
               </a:ext>
             </a:extLst>
           </p:cNvPr>
@@ -16038,6 +16148,13 @@
   <p:clrMapOvr>
     <a:masterClrMapping/>
   </p:clrMapOvr>
+  <p:timing>
+    <p:tnLst>
+      <p:par>
+        <p:cTn id="1" dur="indefinite" restart="never" nodeType="tmRoot"/>
+      </p:par>
+    </p:tnLst>
+  </p:timing>
 </p:sld>
 </file>
 
@@ -16063,7 +16180,7 @@
           <p:cNvPr id="4" name="Título 1">
             <a:extLst>
               <a:ext uri="{FF2B5EF4-FFF2-40B4-BE49-F238E27FC236}">
-                <a16:creationId xmlns:a16="http://schemas.microsoft.com/office/drawing/2014/main" id="{32666AC8-2E17-4DB4-B0F5-60C640CCFD2E}"/>
+                <a16:creationId xmlns:a16="http://schemas.microsoft.com/office/drawing/2014/main" xmlns="" id="{32666AC8-2E17-4DB4-B0F5-60C640CCFD2E}"/>
               </a:ext>
             </a:extLst>
           </p:cNvPr>
@@ -16149,7 +16266,7 @@
           <p:cNvPr id="4" name="Título 1">
             <a:extLst>
               <a:ext uri="{FF2B5EF4-FFF2-40B4-BE49-F238E27FC236}">
-                <a16:creationId xmlns:a16="http://schemas.microsoft.com/office/drawing/2014/main" id="{32666AC8-2E17-4DB4-B0F5-60C640CCFD2E}"/>
+                <a16:creationId xmlns:a16="http://schemas.microsoft.com/office/drawing/2014/main" xmlns="" id="{32666AC8-2E17-4DB4-B0F5-60C640CCFD2E}"/>
               </a:ext>
             </a:extLst>
           </p:cNvPr>
@@ -16221,7 +16338,7 @@
         <p:cNvPr id="1" name="">
           <a:extLst>
             <a:ext uri="{FF2B5EF4-FFF2-40B4-BE49-F238E27FC236}">
-              <a16:creationId xmlns:a16="http://schemas.microsoft.com/office/drawing/2014/main" id="{66DA37F4-4ED4-806C-CFDE-46C776755B3A}"/>
+              <a16:creationId xmlns:a16="http://schemas.microsoft.com/office/drawing/2014/main" xmlns="" id="{66DA37F4-4ED4-806C-CFDE-46C776755B3A}"/>
             </a:ext>
           </a:extLst>
         </p:cNvPr>
@@ -16241,7 +16358,7 @@
           <p:cNvPr id="4" name="Título 1">
             <a:extLst>
               <a:ext uri="{FF2B5EF4-FFF2-40B4-BE49-F238E27FC236}">
-                <a16:creationId xmlns:a16="http://schemas.microsoft.com/office/drawing/2014/main" id="{616605E6-566B-D397-B0D6-339FE7F8CB5E}"/>
+                <a16:creationId xmlns:a16="http://schemas.microsoft.com/office/drawing/2014/main" xmlns="" id="{616605E6-566B-D397-B0D6-339FE7F8CB5E}"/>
               </a:ext>
             </a:extLst>
           </p:cNvPr>
@@ -16327,7 +16444,7 @@
           <p:cNvPr id="4" name="Agrupar 22">
             <a:extLst>
               <a:ext uri="{FF2B5EF4-FFF2-40B4-BE49-F238E27FC236}">
-                <a16:creationId xmlns:a16="http://schemas.microsoft.com/office/drawing/2014/main" id="{BDB2E9D3-18AD-6A55-F414-20E01AF3185A}"/>
+                <a16:creationId xmlns:a16="http://schemas.microsoft.com/office/drawing/2014/main" xmlns="" id="{BDB2E9D3-18AD-6A55-F414-20E01AF3185A}"/>
               </a:ext>
             </a:extLst>
           </p:cNvPr>
@@ -16349,7 +16466,7 @@
                 <p:cNvPr id="5" name="CaixaDeTexto 5">
                   <a:extLst>
                     <a:ext uri="{FF2B5EF4-FFF2-40B4-BE49-F238E27FC236}">
-                      <a16:creationId xmlns:a16="http://schemas.microsoft.com/office/drawing/2014/main" id="{AF11FFDB-E923-3C94-D47A-83418BDAD06C}"/>
+                      <a16:creationId xmlns:a16="http://schemas.microsoft.com/office/drawing/2014/main" xmlns="" id="{AF11FFDB-E923-3C94-D47A-83418BDAD06C}"/>
                     </a:ext>
                   </a:extLst>
                 </p:cNvPr>
@@ -16556,7 +16673,7 @@
             <p:cNvPr id="6" name="Agrupar 21">
               <a:extLst>
                 <a:ext uri="{FF2B5EF4-FFF2-40B4-BE49-F238E27FC236}">
-                  <a16:creationId xmlns:a16="http://schemas.microsoft.com/office/drawing/2014/main" id="{0216B346-D594-78F5-A2A5-C50F3A50B5DC}"/>
+                  <a16:creationId xmlns:a16="http://schemas.microsoft.com/office/drawing/2014/main" xmlns="" id="{0216B346-D594-78F5-A2A5-C50F3A50B5DC}"/>
                 </a:ext>
               </a:extLst>
             </p:cNvPr>
@@ -16576,7 +16693,7 @@
               <p:cNvPr id="19" name="Retângulo 6">
                 <a:extLst>
                   <a:ext uri="{FF2B5EF4-FFF2-40B4-BE49-F238E27FC236}">
-                    <a16:creationId xmlns:a16="http://schemas.microsoft.com/office/drawing/2014/main" id="{C45F9961-D53D-BEB9-F54B-3CC4703FA1F8}"/>
+                    <a16:creationId xmlns:a16="http://schemas.microsoft.com/office/drawing/2014/main" xmlns="" id="{C45F9961-D53D-BEB9-F54B-3CC4703FA1F8}"/>
                   </a:ext>
                 </a:extLst>
               </p:cNvPr>
@@ -16630,7 +16747,7 @@
                   <p:cNvPr id="20" name="CaixaDeTexto 7">
                     <a:extLst>
                       <a:ext uri="{FF2B5EF4-FFF2-40B4-BE49-F238E27FC236}">
-                        <a16:creationId xmlns:a16="http://schemas.microsoft.com/office/drawing/2014/main" id="{DD14F424-8D9A-FCFC-0455-7D5B5C6C43F0}"/>
+                        <a16:creationId xmlns:a16="http://schemas.microsoft.com/office/drawing/2014/main" xmlns="" id="{DD14F424-8D9A-FCFC-0455-7D5B5C6C43F0}"/>
                       </a:ext>
                     </a:extLst>
                   </p:cNvPr>
@@ -16894,7 +17011,7 @@
             <p:cNvPr id="7" name="Seta: para a Direita 8">
               <a:extLst>
                 <a:ext uri="{FF2B5EF4-FFF2-40B4-BE49-F238E27FC236}">
-                  <a16:creationId xmlns:a16="http://schemas.microsoft.com/office/drawing/2014/main" id="{D3504EFE-235C-4EED-BD67-1F0134363B33}"/>
+                  <a16:creationId xmlns:a16="http://schemas.microsoft.com/office/drawing/2014/main" xmlns="" id="{D3504EFE-235C-4EED-BD67-1F0134363B33}"/>
                 </a:ext>
               </a:extLst>
             </p:cNvPr>
@@ -16948,7 +17065,7 @@
             <p:cNvPr id="8" name="Seta: para a Direita 9">
               <a:extLst>
                 <a:ext uri="{FF2B5EF4-FFF2-40B4-BE49-F238E27FC236}">
-                  <a16:creationId xmlns:a16="http://schemas.microsoft.com/office/drawing/2014/main" id="{E56F7404-32FC-ED2A-B5D6-AA6AAC63911A}"/>
+                  <a16:creationId xmlns:a16="http://schemas.microsoft.com/office/drawing/2014/main" xmlns="" id="{E56F7404-32FC-ED2A-B5D6-AA6AAC63911A}"/>
                 </a:ext>
               </a:extLst>
             </p:cNvPr>
@@ -17002,7 +17119,7 @@
             <p:cNvPr id="9" name="CaixaDeTexto 10">
               <a:extLst>
                 <a:ext uri="{FF2B5EF4-FFF2-40B4-BE49-F238E27FC236}">
-                  <a16:creationId xmlns:a16="http://schemas.microsoft.com/office/drawing/2014/main" id="{4F9BC649-95D4-52BD-BA63-08F8688BBFD3}"/>
+                  <a16:creationId xmlns:a16="http://schemas.microsoft.com/office/drawing/2014/main" xmlns="" id="{4F9BC649-95D4-52BD-BA63-08F8688BBFD3}"/>
                 </a:ext>
               </a:extLst>
             </p:cNvPr>
@@ -17038,7 +17155,7 @@
             <p:cNvPr id="10" name="CaixaDeTexto 12">
               <a:extLst>
                 <a:ext uri="{FF2B5EF4-FFF2-40B4-BE49-F238E27FC236}">
-                  <a16:creationId xmlns:a16="http://schemas.microsoft.com/office/drawing/2014/main" id="{9C4DD653-BC48-DCA1-5663-281ACCF13641}"/>
+                  <a16:creationId xmlns:a16="http://schemas.microsoft.com/office/drawing/2014/main" xmlns="" id="{9C4DD653-BC48-DCA1-5663-281ACCF13641}"/>
                 </a:ext>
               </a:extLst>
             </p:cNvPr>
@@ -17078,7 +17195,7 @@
             <p:cNvPr id="11" name="Agrupar 20">
               <a:extLst>
                 <a:ext uri="{FF2B5EF4-FFF2-40B4-BE49-F238E27FC236}">
-                  <a16:creationId xmlns:a16="http://schemas.microsoft.com/office/drawing/2014/main" id="{1FBA146D-CAB5-65CA-C09C-DFAE2CF0121E}"/>
+                  <a16:creationId xmlns:a16="http://schemas.microsoft.com/office/drawing/2014/main" xmlns="" id="{1FBA146D-CAB5-65CA-C09C-DFAE2CF0121E}"/>
                 </a:ext>
               </a:extLst>
             </p:cNvPr>
@@ -17100,7 +17217,7 @@
                   <p:cNvPr id="12" name="CaixaDeTexto 4">
                     <a:extLst>
                       <a:ext uri="{FF2B5EF4-FFF2-40B4-BE49-F238E27FC236}">
-                        <a16:creationId xmlns:a16="http://schemas.microsoft.com/office/drawing/2014/main" id="{43C8BB8A-C849-2483-4102-05D4F8A25AE9}"/>
+                        <a16:creationId xmlns:a16="http://schemas.microsoft.com/office/drawing/2014/main" xmlns="" id="{43C8BB8A-C849-2483-4102-05D4F8A25AE9}"/>
                       </a:ext>
                     </a:extLst>
                   </p:cNvPr>
@@ -17302,14 +17419,14 @@
               </p:sp>
             </mc:Fallback>
           </mc:AlternateContent>
-          <mc:AlternateContent xmlns:mc="http://schemas.openxmlformats.org/markup-compatibility/2006">
-            <mc:Choice xmlns:a14="http://schemas.microsoft.com/office/drawing/2010/main" Requires="a14">
+          <mc:AlternateContent xmlns:mc="http://schemas.openxmlformats.org/markup-compatibility/2006" xmlns:a14="http://schemas.microsoft.com/office/drawing/2010/main">
+            <mc:Choice Requires="a14">
               <p:sp>
                 <p:nvSpPr>
                   <p:cNvPr id="13" name="CaixaDeTexto 11">
                     <a:extLst>
                       <a:ext uri="{FF2B5EF4-FFF2-40B4-BE49-F238E27FC236}">
-                        <a16:creationId xmlns:a16="http://schemas.microsoft.com/office/drawing/2014/main" id="{AF290EB5-D075-77C8-B194-538454B60861}"/>
+                        <a16:creationId xmlns:a16="http://schemas.microsoft.com/office/drawing/2014/main" xmlns="" id="{AF290EB5-D075-77C8-B194-538454B60861}"/>
                       </a:ext>
                     </a:extLst>
                   </p:cNvPr>
@@ -17355,7 +17472,7 @@
                 </p:txBody>
               </p:sp>
             </mc:Choice>
-            <mc:Fallback>
+            <mc:Fallback xmlns="">
               <p:sp>
                 <p:nvSpPr>
                   <p:cNvPr id="13" name="CaixaDeTexto 11">
@@ -17407,7 +17524,7 @@
                   <p:cNvPr id="14" name="CaixaDeTexto 14">
                     <a:extLst>
                       <a:ext uri="{FF2B5EF4-FFF2-40B4-BE49-F238E27FC236}">
-                        <a16:creationId xmlns:a16="http://schemas.microsoft.com/office/drawing/2014/main" id="{34981BFA-7FF1-3BFF-417B-6F22F9C69AF2}"/>
+                        <a16:creationId xmlns:a16="http://schemas.microsoft.com/office/drawing/2014/main" xmlns="" id="{34981BFA-7FF1-3BFF-417B-6F22F9C69AF2}"/>
                       </a:ext>
                     </a:extLst>
                   </p:cNvPr>
@@ -17540,7 +17657,7 @@
                   <p:cNvPr id="15" name="CaixaDeTexto 15">
                     <a:extLst>
                       <a:ext uri="{FF2B5EF4-FFF2-40B4-BE49-F238E27FC236}">
-                        <a16:creationId xmlns:a16="http://schemas.microsoft.com/office/drawing/2014/main" id="{DB8F6DFA-2208-43E8-18F4-BC5ACFDCAE49}"/>
+                        <a16:creationId xmlns:a16="http://schemas.microsoft.com/office/drawing/2014/main" xmlns="" id="{DB8F6DFA-2208-43E8-18F4-BC5ACFDCAE49}"/>
                       </a:ext>
                     </a:extLst>
                   </p:cNvPr>
@@ -17673,7 +17790,7 @@
                   <p:cNvPr id="16" name="CaixaDeTexto 16">
                     <a:extLst>
                       <a:ext uri="{FF2B5EF4-FFF2-40B4-BE49-F238E27FC236}">
-                        <a16:creationId xmlns:a16="http://schemas.microsoft.com/office/drawing/2014/main" id="{A5EC037D-8EF0-3DEF-2F8B-84248AE8B86A}"/>
+                        <a16:creationId xmlns:a16="http://schemas.microsoft.com/office/drawing/2014/main" xmlns="" id="{A5EC037D-8EF0-3DEF-2F8B-84248AE8B86A}"/>
                       </a:ext>
                     </a:extLst>
                   </p:cNvPr>
@@ -17806,7 +17923,7 @@
                   <p:cNvPr id="17" name="CaixaDeTexto 17">
                     <a:extLst>
                       <a:ext uri="{FF2B5EF4-FFF2-40B4-BE49-F238E27FC236}">
-                        <a16:creationId xmlns:a16="http://schemas.microsoft.com/office/drawing/2014/main" id="{E842A6BA-1A35-A84A-B1B8-54B2C0A49661}"/>
+                        <a16:creationId xmlns:a16="http://schemas.microsoft.com/office/drawing/2014/main" xmlns="" id="{E842A6BA-1A35-A84A-B1B8-54B2C0A49661}"/>
                       </a:ext>
                     </a:extLst>
                   </p:cNvPr>
@@ -17939,7 +18056,7 @@
                   <p:cNvPr id="18" name="CaixaDeTexto 18">
                     <a:extLst>
                       <a:ext uri="{FF2B5EF4-FFF2-40B4-BE49-F238E27FC236}">
-                        <a16:creationId xmlns:a16="http://schemas.microsoft.com/office/drawing/2014/main" id="{AE06ADE1-A3FE-3684-A19B-1A4A69C1E4AB}"/>
+                        <a16:creationId xmlns:a16="http://schemas.microsoft.com/office/drawing/2014/main" xmlns="" id="{AE06ADE1-A3FE-3684-A19B-1A4A69C1E4AB}"/>
                       </a:ext>
                     </a:extLst>
                   </p:cNvPr>
@@ -18088,7 +18205,7 @@
         <p:cNvPr id="1" name="">
           <a:extLst>
             <a:ext uri="{FF2B5EF4-FFF2-40B4-BE49-F238E27FC236}">
-              <a16:creationId xmlns:a16="http://schemas.microsoft.com/office/drawing/2014/main" id="{5C4572DC-35C8-C64C-E103-3D4F9246EA98}"/>
+              <a16:creationId xmlns:a16="http://schemas.microsoft.com/office/drawing/2014/main" xmlns="" id="{5C4572DC-35C8-C64C-E103-3D4F9246EA98}"/>
             </a:ext>
           </a:extLst>
         </p:cNvPr>
@@ -18108,7 +18225,7 @@
           <p:cNvPr id="36" name="Group 35">
             <a:extLst>
               <a:ext uri="{FF2B5EF4-FFF2-40B4-BE49-F238E27FC236}">
-                <a16:creationId xmlns:a16="http://schemas.microsoft.com/office/drawing/2014/main" id="{48F378AC-D060-0026-4561-6496453280FF}"/>
+                <a16:creationId xmlns:a16="http://schemas.microsoft.com/office/drawing/2014/main" xmlns="" id="{48F378AC-D060-0026-4561-6496453280FF}"/>
               </a:ext>
             </a:extLst>
           </p:cNvPr>
@@ -18123,14 +18240,14 @@
             <a:chExt cx="4280221" cy="2759538"/>
           </a:xfrm>
         </p:grpSpPr>
-        <mc:AlternateContent xmlns:mc="http://schemas.openxmlformats.org/markup-compatibility/2006">
-          <mc:Choice xmlns:a14="http://schemas.microsoft.com/office/drawing/2010/main" Requires="a14">
+        <mc:AlternateContent xmlns:mc="http://schemas.openxmlformats.org/markup-compatibility/2006" xmlns:a14="http://schemas.microsoft.com/office/drawing/2010/main">
+          <mc:Choice Requires="a14">
             <p:sp>
               <p:nvSpPr>
                 <p:cNvPr id="5" name="CaixaDeTexto 5">
                   <a:extLst>
                     <a:ext uri="{FF2B5EF4-FFF2-40B4-BE49-F238E27FC236}">
-                      <a16:creationId xmlns:a16="http://schemas.microsoft.com/office/drawing/2014/main" id="{E8D0D67D-860E-2510-92FC-57A520894F28}"/>
+                      <a16:creationId xmlns:a16="http://schemas.microsoft.com/office/drawing/2014/main" xmlns="" id="{E8D0D67D-860E-2510-92FC-57A520894F28}"/>
                     </a:ext>
                   </a:extLst>
                 </p:cNvPr>
@@ -18287,7 +18404,7 @@
               </p:txBody>
             </p:sp>
           </mc:Choice>
-          <mc:Fallback>
+          <mc:Fallback xmlns="">
             <p:sp>
               <p:nvSpPr>
                 <p:cNvPr id="5" name="CaixaDeTexto 5">
@@ -18337,7 +18454,7 @@
             <p:cNvPr id="9" name="CaixaDeTexto 10">
               <a:extLst>
                 <a:ext uri="{FF2B5EF4-FFF2-40B4-BE49-F238E27FC236}">
-                  <a16:creationId xmlns:a16="http://schemas.microsoft.com/office/drawing/2014/main" id="{E297B5F7-3383-6E2F-1D8A-03955FAC43D2}"/>
+                  <a16:creationId xmlns:a16="http://schemas.microsoft.com/office/drawing/2014/main" xmlns="" id="{E297B5F7-3383-6E2F-1D8A-03955FAC43D2}"/>
                 </a:ext>
               </a:extLst>
             </p:cNvPr>
@@ -18380,14 +18497,14 @@
             </a:p>
           </p:txBody>
         </p:sp>
-        <mc:AlternateContent xmlns:mc="http://schemas.openxmlformats.org/markup-compatibility/2006">
-          <mc:Choice xmlns:a14="http://schemas.microsoft.com/office/drawing/2010/main" Requires="a14">
+        <mc:AlternateContent xmlns:mc="http://schemas.openxmlformats.org/markup-compatibility/2006" xmlns:a14="http://schemas.microsoft.com/office/drawing/2010/main">
+          <mc:Choice Requires="a14">
             <p:sp>
               <p:nvSpPr>
                 <p:cNvPr id="12" name="CaixaDeTexto 4">
                   <a:extLst>
                     <a:ext uri="{FF2B5EF4-FFF2-40B4-BE49-F238E27FC236}">
-                      <a16:creationId xmlns:a16="http://schemas.microsoft.com/office/drawing/2014/main" id="{2C8DDC51-3A16-5E93-8268-EE62BDE151E0}"/>
+                      <a16:creationId xmlns:a16="http://schemas.microsoft.com/office/drawing/2014/main" xmlns="" id="{2C8DDC51-3A16-5E93-8268-EE62BDE151E0}"/>
                     </a:ext>
                   </a:extLst>
                 </p:cNvPr>
@@ -18526,7 +18643,7 @@
               </p:txBody>
             </p:sp>
           </mc:Choice>
-          <mc:Fallback>
+          <mc:Fallback xmlns="">
             <p:sp>
               <p:nvSpPr>
                 <p:cNvPr id="12" name="CaixaDeTexto 4">
@@ -18576,7 +18693,7 @@
             <p:cNvPr id="2" name="Rectangle 1">
               <a:extLst>
                 <a:ext uri="{FF2B5EF4-FFF2-40B4-BE49-F238E27FC236}">
-                  <a16:creationId xmlns:a16="http://schemas.microsoft.com/office/drawing/2014/main" id="{EB611083-738F-80C1-2BA7-92EDB40EFB94}"/>
+                  <a16:creationId xmlns:a16="http://schemas.microsoft.com/office/drawing/2014/main" xmlns="" id="{EB611083-738F-80C1-2BA7-92EDB40EFB94}"/>
                 </a:ext>
               </a:extLst>
             </p:cNvPr>
@@ -18640,7 +18757,7 @@
             <p:cNvPr id="3" name="CaixaDeTexto 10">
               <a:extLst>
                 <a:ext uri="{FF2B5EF4-FFF2-40B4-BE49-F238E27FC236}">
-                  <a16:creationId xmlns:a16="http://schemas.microsoft.com/office/drawing/2014/main" id="{F0E4EAFE-2F57-D46C-B71A-FC2B97DD9DC3}"/>
+                  <a16:creationId xmlns:a16="http://schemas.microsoft.com/office/drawing/2014/main" xmlns="" id="{F0E4EAFE-2F57-D46C-B71A-FC2B97DD9DC3}"/>
                 </a:ext>
               </a:extLst>
             </p:cNvPr>
@@ -18688,7 +18805,7 @@
             <p:cNvPr id="22" name="Straight Arrow Connector 21">
               <a:extLst>
                 <a:ext uri="{FF2B5EF4-FFF2-40B4-BE49-F238E27FC236}">
-                  <a16:creationId xmlns:a16="http://schemas.microsoft.com/office/drawing/2014/main" id="{8F2714CA-3421-42C2-2575-C2D5DB1B504D}"/>
+                  <a16:creationId xmlns:a16="http://schemas.microsoft.com/office/drawing/2014/main" xmlns="" id="{8F2714CA-3421-42C2-2575-C2D5DB1B504D}"/>
                 </a:ext>
               </a:extLst>
             </p:cNvPr>
@@ -18734,7 +18851,7 @@
             <p:cNvPr id="29" name="Straight Arrow Connector 28">
               <a:extLst>
                 <a:ext uri="{FF2B5EF4-FFF2-40B4-BE49-F238E27FC236}">
-                  <a16:creationId xmlns:a16="http://schemas.microsoft.com/office/drawing/2014/main" id="{4613A6D9-EABC-0CE5-50B4-C1C9AA047D5D}"/>
+                  <a16:creationId xmlns:a16="http://schemas.microsoft.com/office/drawing/2014/main" xmlns="" id="{4613A6D9-EABC-0CE5-50B4-C1C9AA047D5D}"/>
                 </a:ext>
               </a:extLst>
             </p:cNvPr>
@@ -18827,8 +18944,8 @@
           </a:p>
         </p:txBody>
       </p:sp>
-      <mc:AlternateContent xmlns:mc="http://schemas.openxmlformats.org/markup-compatibility/2006">
-        <mc:Choice xmlns:a14="http://schemas.microsoft.com/office/drawing/2010/main" Requires="a14">
+      <mc:AlternateContent xmlns:mc="http://schemas.openxmlformats.org/markup-compatibility/2006" xmlns:a14="http://schemas.microsoft.com/office/drawing/2010/main">
+        <mc:Choice Requires="a14">
           <p:sp>
             <p:nvSpPr>
               <p:cNvPr id="3" name="Content Placeholder 2"/>
@@ -18927,7 +19044,7 @@
             </p:txBody>
           </p:sp>
         </mc:Choice>
-        <mc:Fallback>
+        <mc:Fallback xmlns="">
           <p:sp>
             <p:nvSpPr>
               <p:cNvPr id="3" name="Content Placeholder 2"/>
@@ -18970,7 +19087,7 @@
           <p:cNvPr id="7" name="Picture 2" descr="Ana Barros (@anathinker) | Twitter">
             <a:extLst>
               <a:ext uri="{FF2B5EF4-FFF2-40B4-BE49-F238E27FC236}">
-                <a16:creationId xmlns:a16="http://schemas.microsoft.com/office/drawing/2014/main" id="{A2D479C7-0684-420F-2CCD-64C3DB79FDAB}"/>
+                <a16:creationId xmlns:a16="http://schemas.microsoft.com/office/drawing/2014/main" xmlns="" id="{A2D479C7-0684-420F-2CCD-64C3DB79FDAB}"/>
               </a:ext>
             </a:extLst>
           </p:cNvPr>
@@ -19017,7 +19134,7 @@
           <p:cNvPr id="8" name="Picture 6" descr="Analyzing Text Classification Techniques on Youtube Data">
             <a:extLst>
               <a:ext uri="{FF2B5EF4-FFF2-40B4-BE49-F238E27FC236}">
-                <a16:creationId xmlns:a16="http://schemas.microsoft.com/office/drawing/2014/main" id="{A59F8A2C-ACDF-09C7-B528-9064CEF3B848}"/>
+                <a16:creationId xmlns:a16="http://schemas.microsoft.com/office/drawing/2014/main" xmlns="" id="{A59F8A2C-ACDF-09C7-B528-9064CEF3B848}"/>
               </a:ext>
             </a:extLst>
           </p:cNvPr>
@@ -19062,7 +19179,7 @@
           <p:cNvPr id="9" name="Picture 2" descr="Sentiment Fig 1">
             <a:extLst>
               <a:ext uri="{FF2B5EF4-FFF2-40B4-BE49-F238E27FC236}">
-                <a16:creationId xmlns:a16="http://schemas.microsoft.com/office/drawing/2014/main" id="{E178FF16-CC3F-C34B-6C8B-874BC4FA61A4}"/>
+                <a16:creationId xmlns:a16="http://schemas.microsoft.com/office/drawing/2014/main" xmlns="" id="{E178FF16-CC3F-C34B-6C8B-874BC4FA61A4}"/>
               </a:ext>
             </a:extLst>
           </p:cNvPr>
@@ -19139,7 +19256,7 @@
           <p:cNvPr id="2" name="Título 1">
             <a:extLst>
               <a:ext uri="{FF2B5EF4-FFF2-40B4-BE49-F238E27FC236}">
-                <a16:creationId xmlns:a16="http://schemas.microsoft.com/office/drawing/2014/main" id="{B022D379-CAA0-9DC9-CDBD-6E0EBE1BFF31}"/>
+                <a16:creationId xmlns:a16="http://schemas.microsoft.com/office/drawing/2014/main" xmlns="" id="{B022D379-CAA0-9DC9-CDBD-6E0EBE1BFF31}"/>
               </a:ext>
             </a:extLst>
           </p:cNvPr>
@@ -19173,7 +19290,7 @@
               <p:cNvPr id="3" name="Espaço Reservado para Conteúdo 2">
                 <a:extLst>
                   <a:ext uri="{FF2B5EF4-FFF2-40B4-BE49-F238E27FC236}">
-                    <a16:creationId xmlns:a16="http://schemas.microsoft.com/office/drawing/2014/main" id="{B68F0D74-8673-A432-A1D7-BDEF7725851A}"/>
+                    <a16:creationId xmlns:a16="http://schemas.microsoft.com/office/drawing/2014/main" xmlns="" id="{B68F0D74-8673-A432-A1D7-BDEF7725851A}"/>
                   </a:ext>
                 </a:extLst>
               </p:cNvPr>
@@ -19224,19 +19341,35 @@
                       <a:srgbClr val="00B050"/>
                     </a:solidFill>
                   </a:rPr>
-                  <a:t>probabilidades de uma variável categórica </a:t>
-                </a:r>
-                <a:r>
-                  <a:rPr lang="pt-BR" dirty="0"/>
-                  <a:t>(as classes) </a:t>
-                </a:r>
-                <a:r>
-                  <a:rPr lang="pt-BR" b="1" dirty="0">
+                  <a:t>probabilidades </a:t>
+                </a:r>
+                <a:r>
+                  <a:rPr lang="pt-BR" b="1" dirty="0" smtClean="0">
                     <a:solidFill>
                       <a:srgbClr val="00B050"/>
                     </a:solidFill>
                   </a:rPr>
-                  <a:t>dado os atributos e os pesos.</a:t>
+                  <a:t>condicionais das </a:t>
+                </a:r>
+                <a14:m>
+                  <m:oMath xmlns:m="http://schemas.openxmlformats.org/officeDocument/2006/math">
+                    <m:r>
+                      <a:rPr lang="pt-BR" b="1">
+                        <a:solidFill>
+                          <a:srgbClr val="00B050"/>
+                        </a:solidFill>
+                      </a:rPr>
+                      <m:t>𝑄</m:t>
+                    </m:r>
+                  </m:oMath>
+                </a14:m>
+                <a:r>
+                  <a:rPr lang="pt-BR" b="1" dirty="0" smtClean="0">
+                    <a:solidFill>
+                      <a:srgbClr val="00B050"/>
+                    </a:solidFill>
+                  </a:rPr>
+                  <a:t> classes, dado um exemplo de entrada e os pesos.</a:t>
                 </a:r>
               </a:p>
               <a:p>
@@ -19245,8 +19378,12 @@
                   <a:buChar char="§"/>
                 </a:pPr>
                 <a:r>
-                  <a:rPr lang="pt-BR" dirty="0"/>
-                  <a:t>Ou seja, a regressão </a:t>
+                  <a:rPr lang="pt-BR" dirty="0" smtClean="0"/>
+                  <a:t>Ou </a:t>
+                </a:r>
+                <a:r>
+                  <a:rPr lang="pt-BR" dirty="0"/>
+                  <a:t>seja, a regressão </a:t>
                 </a:r>
                 <a:r>
                   <a:rPr lang="pt-BR" b="1" i="1" dirty="0">
@@ -19427,7 +19564,7 @@
               <p:cNvPr id="3" name="Espaço Reservado para Conteúdo 2">
                 <a:extLst>
                   <a:ext uri="{FF2B5EF4-FFF2-40B4-BE49-F238E27FC236}">
-                    <a16:creationId xmlns:a16="http://schemas.microsoft.com/office/drawing/2014/main" id="{B68F0D74-8673-A432-A1D7-BDEF7725851A}"/>
+                    <a16:creationId xmlns:a16="http://schemas.microsoft.com/office/drawing/2014/main" xmlns:a14="http://schemas.microsoft.com/office/drawing/2010/main" xmlns="" id="{B68F0D74-8673-A432-A1D7-BDEF7725851A}"/>
                   </a:ext>
                 </a:extLst>
               </p:cNvPr>
@@ -19443,7 +19580,7 @@
                 <a:off x="838199" y="1825624"/>
                 <a:ext cx="11353801" cy="5032375"/>
               </a:xfrm>
-              <a:blipFill>
+              <a:blipFill rotWithShape="0">
                 <a:blip r:embed="rId3"/>
                 <a:stretch>
                   <a:fillRect l="-913" t="-1937"/>
@@ -19455,7 +19592,7 @@
               <a:lstStyle/>
               <a:p>
                 <a:r>
-                  <a:rPr lang="en-US">
+                  <a:rPr lang="pt-BR">
                     <a:noFill/>
                   </a:rPr>
                   <a:t> </a:t>
@@ -19500,7 +19637,7 @@
           <p:cNvPr id="2" name="Título 1">
             <a:extLst>
               <a:ext uri="{FF2B5EF4-FFF2-40B4-BE49-F238E27FC236}">
-                <a16:creationId xmlns:a16="http://schemas.microsoft.com/office/drawing/2014/main" id="{519F0958-530D-D942-BA01-15C1583DD1E6}"/>
+                <a16:creationId xmlns:a16="http://schemas.microsoft.com/office/drawing/2014/main" xmlns="" id="{519F0958-530D-D942-BA01-15C1583DD1E6}"/>
               </a:ext>
             </a:extLst>
           </p:cNvPr>
@@ -19534,7 +19671,7 @@
               <p:cNvPr id="3" name="Espaço Reservado para Conteúdo 2">
                 <a:extLst>
                   <a:ext uri="{FF2B5EF4-FFF2-40B4-BE49-F238E27FC236}">
-                    <a16:creationId xmlns:a16="http://schemas.microsoft.com/office/drawing/2014/main" id="{21416F72-28FB-E27C-D129-16A944A87C67}"/>
+                    <a16:creationId xmlns:a16="http://schemas.microsoft.com/office/drawing/2014/main" xmlns="" id="{21416F72-28FB-E27C-D129-16A944A87C67}"/>
                   </a:ext>
                 </a:extLst>
               </p:cNvPr>
@@ -19552,7 +19689,9 @@
               </a:xfrm>
             </p:spPr>
             <p:txBody>
-              <a:bodyPr/>
+              <a:bodyPr>
+                <a:normAutofit lnSpcReduction="10000"/>
+              </a:bodyPr>
               <a:lstStyle/>
               <a:p>
                 <a:r>
@@ -19601,12 +19740,21 @@
                       <a:schemeClr val="accent2"/>
                     </a:solidFill>
                   </a:rPr>
-                  <a:t>mutuamente exclusivas </a:t>
-                </a:r>
-                <a:r>
-                  <a:rPr lang="pt-BR" dirty="0"/>
-                  <a:t>como, por exemplo, diferentes tipos de plantas, dígitos, carros, etc.</a:t>
-                </a:r>
+                  <a:t>mutuamente </a:t>
+                </a:r>
+                <a:r>
+                  <a:rPr lang="pt-BR" b="1" dirty="0" smtClean="0">
+                    <a:solidFill>
+                      <a:schemeClr val="accent2"/>
+                    </a:solidFill>
+                  </a:rPr>
+                  <a:t>exclusivas</a:t>
+                </a:r>
+                <a:r>
+                  <a:rPr lang="pt-BR" dirty="0" smtClean="0"/>
+                  <a:t>.</a:t>
+                </a:r>
+                <a:endParaRPr lang="pt-BR" dirty="0"/>
               </a:p>
               <a:p>
                 <a:pPr lvl="1">
@@ -19619,7 +19767,15 @@
                 </a:r>
                 <a:r>
                   <a:rPr lang="pt-BR" dirty="0"/>
-                  <a:t>: caso onde os exemplos pertencem a apenas uma das </a:t>
+                  <a:t>: </a:t>
+                </a:r>
+                <a:r>
+                  <a:rPr lang="pt-BR" dirty="0" smtClean="0"/>
+                  <a:t>exemplos </a:t>
+                </a:r>
+                <a:r>
+                  <a:rPr lang="pt-BR" dirty="0"/>
+                  <a:t>pertencem a apenas uma das </a:t>
                 </a:r>
                 <a14:m>
                   <m:oMath xmlns:m="http://schemas.openxmlformats.org/officeDocument/2006/math">
@@ -19633,7 +19789,11 @@
                 </a14:m>
                 <a:r>
                   <a:rPr lang="pt-BR" dirty="0"/>
-                  <a:t> classes.</a:t>
+                  <a:t> </a:t>
+                </a:r>
+                <a:r>
+                  <a:rPr lang="pt-BR" dirty="0" smtClean="0"/>
+                  <a:t>classes.</a:t>
                 </a:r>
               </a:p>
               <a:p>
@@ -19642,9 +19802,95 @@
                   <a:buChar char="§"/>
                 </a:pPr>
                 <a:r>
-                  <a:rPr lang="pt-BR" dirty="0"/>
-                  <a:t>Por exemplo, notícias, músicas e imagens, por exemplo, podem pertencer a várias classes ao mesmo tempo.</a:t>
-                </a:r>
+                  <a:rPr lang="pt-BR" dirty="0" smtClean="0"/>
+                  <a:t>Por </a:t>
+                </a:r>
+                <a:r>
+                  <a:rPr lang="pt-BR" dirty="0"/>
+                  <a:t>exemplo</a:t>
+                </a:r>
+                <a:r>
+                  <a:rPr lang="pt-BR" dirty="0" smtClean="0"/>
+                  <a:t>, s</a:t>
+                </a:r>
+                <a:r>
+                  <a:rPr lang="pt-BR" dirty="0" smtClean="0"/>
+                  <a:t>uponham </a:t>
+                </a:r>
+                <a:r>
+                  <a:rPr lang="pt-BR" dirty="0"/>
+                  <a:t>que queremos classificar uma imagem </a:t>
+                </a:r>
+                <a:r>
+                  <a:rPr lang="pt-BR" dirty="0" smtClean="0"/>
+                  <a:t>em 3 classes:</a:t>
+                </a:r>
+                <a:endParaRPr lang="pt-BR" dirty="0"/>
+              </a:p>
+              <a:p>
+                <a:pPr lvl="2">
+                  <a:buFont typeface="Courier New" panose="02070309020205020404" pitchFamily="49" charset="0"/>
+                  <a:buChar char="o"/>
+                </a:pPr>
+                <a:r>
+                  <a:rPr lang="pt-BR" dirty="0"/>
+                  <a:t>🐶 Cachorro </a:t>
+                </a:r>
+              </a:p>
+              <a:p>
+                <a:pPr lvl="2">
+                  <a:buFont typeface="Courier New" panose="02070309020205020404" pitchFamily="49" charset="0"/>
+                  <a:buChar char="o"/>
+                </a:pPr>
+                <a:r>
+                  <a:rPr lang="pt-BR" dirty="0"/>
+                  <a:t>🐱 Gato </a:t>
+                </a:r>
+              </a:p>
+              <a:p>
+                <a:pPr lvl="2">
+                  <a:buFont typeface="Courier New" panose="02070309020205020404" pitchFamily="49" charset="0"/>
+                  <a:buChar char="o"/>
+                </a:pPr>
+                <a:r>
+                  <a:rPr lang="pt-BR" dirty="0"/>
+                  <a:t>🐰 Coelho </a:t>
+                </a:r>
+              </a:p>
+              <a:p>
+                <a:pPr lvl="1">
+                  <a:buFont typeface="Wingdings" panose="05000000000000000000" pitchFamily="2" charset="2"/>
+                  <a:buChar char="§"/>
+                </a:pPr>
+                <a:r>
+                  <a:rPr lang="pt-BR" dirty="0"/>
+                  <a:t>Se estamos fazendo </a:t>
+                </a:r>
+                <a:r>
+                  <a:rPr lang="pt-BR" b="1" dirty="0"/>
+                  <a:t>classificação de uma única classe</a:t>
+                </a:r>
+                <a:r>
+                  <a:rPr lang="pt-BR" dirty="0"/>
+                  <a:t>, uma determinada imagem só pode </a:t>
+                </a:r>
+                <a:r>
+                  <a:rPr lang="pt-BR" dirty="0" smtClean="0"/>
+                  <a:t>receber </a:t>
+                </a:r>
+                <a:r>
+                  <a:rPr lang="pt-BR" b="1" dirty="0" smtClean="0"/>
+                  <a:t>uma </a:t>
+                </a:r>
+                <a:r>
+                  <a:rPr lang="pt-BR" b="1" dirty="0"/>
+                  <a:t>dessas classes</a:t>
+                </a:r>
+                <a:r>
+                  <a:rPr lang="pt-BR" dirty="0" smtClean="0"/>
+                  <a:t>.</a:t>
+                </a:r>
+                <a:endParaRPr lang="pt-BR" dirty="0" smtClean="0"/>
               </a:p>
               <a:p>
                 <a:r>
@@ -19942,7 +20188,7 @@
               <p:cNvPr id="3" name="Espaço Reservado para Conteúdo 2">
                 <a:extLst>
                   <a:ext uri="{FF2B5EF4-FFF2-40B4-BE49-F238E27FC236}">
-                    <a16:creationId xmlns:a16="http://schemas.microsoft.com/office/drawing/2014/main" id="{21416F72-28FB-E27C-D129-16A944A87C67}"/>
+                    <a16:creationId xmlns:a16="http://schemas.microsoft.com/office/drawing/2014/main" xmlns:a14="http://schemas.microsoft.com/office/drawing/2010/main" xmlns="" id="{21416F72-28FB-E27C-D129-16A944A87C67}"/>
                   </a:ext>
                 </a:extLst>
               </p:cNvPr>
@@ -19958,10 +20204,10 @@
                 <a:off x="838199" y="1825624"/>
                 <a:ext cx="11353801" cy="5032375"/>
               </a:xfrm>
-              <a:blipFill>
+              <a:blipFill rotWithShape="0">
                 <a:blip r:embed="rId3"/>
                 <a:stretch>
-                  <a:fillRect l="-913" t="-1937"/>
+                  <a:fillRect l="-913" t="-2663" r="-859"/>
                 </a:stretch>
               </a:blipFill>
             </p:spPr>
@@ -19970,7 +20216,7 @@
               <a:lstStyle/>
               <a:p>
                 <a:r>
-                  <a:rPr lang="en-US">
+                  <a:rPr lang="pt-BR">
                     <a:noFill/>
                   </a:rPr>
                   <a:t> </a:t>
@@ -20015,7 +20261,7 @@
           <p:cNvPr id="2" name="Título 1">
             <a:extLst>
               <a:ext uri="{FF2B5EF4-FFF2-40B4-BE49-F238E27FC236}">
-                <a16:creationId xmlns:a16="http://schemas.microsoft.com/office/drawing/2014/main" id="{DCD47F25-5DD1-794E-8733-BFD771A2DE49}"/>
+                <a16:creationId xmlns:a16="http://schemas.microsoft.com/office/drawing/2014/main" xmlns="" id="{DCD47F25-5DD1-794E-8733-BFD771A2DE49}"/>
               </a:ext>
             </a:extLst>
           </p:cNvPr>
@@ -20042,14 +20288,14 @@
           </a:p>
         </p:txBody>
       </p:sp>
-      <mc:AlternateContent xmlns:mc="http://schemas.openxmlformats.org/markup-compatibility/2006">
-        <mc:Choice xmlns:a14="http://schemas.microsoft.com/office/drawing/2010/main" Requires="a14">
+      <mc:AlternateContent xmlns:mc="http://schemas.openxmlformats.org/markup-compatibility/2006" xmlns:a14="http://schemas.microsoft.com/office/drawing/2010/main">
+        <mc:Choice Requires="a14">
           <p:sp>
             <p:nvSpPr>
               <p:cNvPr id="3" name="Espaço Reservado para Conteúdo 2">
                 <a:extLst>
                   <a:ext uri="{FF2B5EF4-FFF2-40B4-BE49-F238E27FC236}">
-                    <a16:creationId xmlns:a16="http://schemas.microsoft.com/office/drawing/2014/main" id="{D79BB7DC-99E7-8958-EC77-566B7E3C2BBB}"/>
+                    <a16:creationId xmlns:a16="http://schemas.microsoft.com/office/drawing/2014/main" xmlns="" id="{D79BB7DC-99E7-8958-EC77-566B7E3C2BBB}"/>
                   </a:ext>
                 </a:extLst>
               </p:cNvPr>
@@ -21270,7 +21516,7 @@
             </p:txBody>
           </p:sp>
         </mc:Choice>
-        <mc:Fallback>
+        <mc:Fallback xmlns="">
           <p:sp>
             <p:nvSpPr>
               <p:cNvPr id="3" name="Espaço Reservado para Conteúdo 2">
@@ -21349,7 +21595,7 @@
           <p:cNvPr id="2" name="Título 1">
             <a:extLst>
               <a:ext uri="{FF2B5EF4-FFF2-40B4-BE49-F238E27FC236}">
-                <a16:creationId xmlns:a16="http://schemas.microsoft.com/office/drawing/2014/main" id="{52E3438D-F516-F1D3-A02F-51857586D07A}"/>
+                <a16:creationId xmlns:a16="http://schemas.microsoft.com/office/drawing/2014/main" xmlns="" id="{52E3438D-F516-F1D3-A02F-51857586D07A}"/>
               </a:ext>
             </a:extLst>
           </p:cNvPr>
@@ -21376,14 +21622,14 @@
           </a:p>
         </p:txBody>
       </p:sp>
-      <mc:AlternateContent xmlns:mc="http://schemas.openxmlformats.org/markup-compatibility/2006">
-        <mc:Choice xmlns:a14="http://schemas.microsoft.com/office/drawing/2010/main" Requires="a14">
+      <mc:AlternateContent xmlns:mc="http://schemas.openxmlformats.org/markup-compatibility/2006" xmlns:a14="http://schemas.microsoft.com/office/drawing/2010/main">
+        <mc:Choice Requires="a14">
           <p:sp>
             <p:nvSpPr>
               <p:cNvPr id="3" name="Espaço Reservado para Conteúdo 2">
                 <a:extLst>
                   <a:ext uri="{FF2B5EF4-FFF2-40B4-BE49-F238E27FC236}">
-                    <a16:creationId xmlns:a16="http://schemas.microsoft.com/office/drawing/2014/main" id="{BCAAD57B-65A0-9DAD-79FC-2AE2692EB84B}"/>
+                    <a16:creationId xmlns:a16="http://schemas.microsoft.com/office/drawing/2014/main" xmlns="" id="{BCAAD57B-65A0-9DAD-79FC-2AE2692EB84B}"/>
                   </a:ext>
                 </a:extLst>
               </p:cNvPr>
@@ -22215,7 +22461,7 @@
             </p:txBody>
           </p:sp>
         </mc:Choice>
-        <mc:Fallback>
+        <mc:Fallback xmlns="">
           <p:sp>
             <p:nvSpPr>
               <p:cNvPr id="3" name="Espaço Reservado para Conteúdo 2">
@@ -22264,7 +22510,7 @@
           <p:cNvPr id="5" name="Rectangle 11">
             <a:extLst>
               <a:ext uri="{FF2B5EF4-FFF2-40B4-BE49-F238E27FC236}">
-                <a16:creationId xmlns:a16="http://schemas.microsoft.com/office/drawing/2014/main" id="{D1D7E603-A964-1188-9D09-B0C1E18592FA}"/>
+                <a16:creationId xmlns:a16="http://schemas.microsoft.com/office/drawing/2014/main" xmlns="" id="{D1D7E603-A964-1188-9D09-B0C1E18592FA}"/>
               </a:ext>
             </a:extLst>
           </p:cNvPr>
@@ -22346,7 +22592,7 @@
           <p:cNvPr id="2" name="Título 1">
             <a:extLst>
               <a:ext uri="{FF2B5EF4-FFF2-40B4-BE49-F238E27FC236}">
-                <a16:creationId xmlns:a16="http://schemas.microsoft.com/office/drawing/2014/main" id="{99DAA83A-B143-94BB-B48B-41A7423070CE}"/>
+                <a16:creationId xmlns:a16="http://schemas.microsoft.com/office/drawing/2014/main" xmlns="" id="{99DAA83A-B143-94BB-B48B-41A7423070CE}"/>
               </a:ext>
             </a:extLst>
           </p:cNvPr>
@@ -22374,14 +22620,14 @@
           </a:p>
         </p:txBody>
       </p:sp>
-      <mc:AlternateContent xmlns:mc="http://schemas.openxmlformats.org/markup-compatibility/2006">
-        <mc:Choice xmlns:a14="http://schemas.microsoft.com/office/drawing/2010/main" Requires="a14">
+      <mc:AlternateContent xmlns:mc="http://schemas.openxmlformats.org/markup-compatibility/2006" xmlns:a14="http://schemas.microsoft.com/office/drawing/2010/main">
+        <mc:Choice Requires="a14">
           <p:sp>
             <p:nvSpPr>
               <p:cNvPr id="3" name="Espaço Reservado para Conteúdo 2">
                 <a:extLst>
                   <a:ext uri="{FF2B5EF4-FFF2-40B4-BE49-F238E27FC236}">
-                    <a16:creationId xmlns:a16="http://schemas.microsoft.com/office/drawing/2014/main" id="{32DF54A1-52F5-C48C-7CD4-D6E451DF19D8}"/>
+                    <a16:creationId xmlns:a16="http://schemas.microsoft.com/office/drawing/2014/main" xmlns="" id="{32DF54A1-52F5-C48C-7CD4-D6E451DF19D8}"/>
                   </a:ext>
                 </a:extLst>
               </p:cNvPr>
@@ -22566,7 +22812,7 @@
             </p:txBody>
           </p:sp>
         </mc:Choice>
-        <mc:Fallback>
+        <mc:Fallback xmlns="">
           <p:sp>
             <p:nvSpPr>
               <p:cNvPr id="3" name="Espaço Reservado para Conteúdo 2">
@@ -22615,7 +22861,7 @@
           <p:cNvPr id="8" name="CaixaDeTexto 7">
             <a:extLst>
               <a:ext uri="{FF2B5EF4-FFF2-40B4-BE49-F238E27FC236}">
-                <a16:creationId xmlns:a16="http://schemas.microsoft.com/office/drawing/2014/main" id="{0DC5673F-9B77-2E9E-8317-E71CA8896FE0}"/>
+                <a16:creationId xmlns:a16="http://schemas.microsoft.com/office/drawing/2014/main" xmlns="" id="{0DC5673F-9B77-2E9E-8317-E71CA8896FE0}"/>
               </a:ext>
             </a:extLst>
           </p:cNvPr>
@@ -22667,7 +22913,7 @@
               <p:cNvPr id="4" name="CaixaDeTexto 3">
                 <a:extLst>
                   <a:ext uri="{FF2B5EF4-FFF2-40B4-BE49-F238E27FC236}">
-                    <a16:creationId xmlns:a16="http://schemas.microsoft.com/office/drawing/2014/main" id="{CBD55F82-56D5-32C8-C5AB-AF99477FBAAC}"/>
+                    <a16:creationId xmlns:a16="http://schemas.microsoft.com/office/drawing/2014/main" xmlns="" id="{CBD55F82-56D5-32C8-C5AB-AF99477FBAAC}"/>
                   </a:ext>
                 </a:extLst>
               </p:cNvPr>
@@ -22764,7 +23010,7 @@
           <p:cNvPr id="10" name="Picture 9">
             <a:extLst>
               <a:ext uri="{FF2B5EF4-FFF2-40B4-BE49-F238E27FC236}">
-                <a16:creationId xmlns:a16="http://schemas.microsoft.com/office/drawing/2014/main" id="{CBF719E4-6CBA-943F-B474-06306C5F6781}"/>
+                <a16:creationId xmlns:a16="http://schemas.microsoft.com/office/drawing/2014/main" xmlns="" id="{CBF719E4-6CBA-943F-B474-06306C5F6781}"/>
               </a:ext>
             </a:extLst>
           </p:cNvPr>
@@ -22774,7 +23020,7 @@
           <p:nvPr/>
         </p:nvPicPr>
         <p:blipFill>
-          <a:blip r:embed="rId5">
+          <a:blip r:embed="rId5" cstate="print">
             <a:extLst>
               <a:ext uri="{28A0092B-C50C-407E-A947-70E740481C1C}">
                 <a14:useLocalDpi xmlns:a14="http://schemas.microsoft.com/office/drawing/2010/main" val="0"/>
@@ -22830,7 +23076,7 @@
           <p:cNvPr id="2" name="Título 1">
             <a:extLst>
               <a:ext uri="{FF2B5EF4-FFF2-40B4-BE49-F238E27FC236}">
-                <a16:creationId xmlns:a16="http://schemas.microsoft.com/office/drawing/2014/main" id="{99DAA83A-B143-94BB-B48B-41A7423070CE}"/>
+                <a16:creationId xmlns:a16="http://schemas.microsoft.com/office/drawing/2014/main" xmlns="" id="{99DAA83A-B143-94BB-B48B-41A7423070CE}"/>
               </a:ext>
             </a:extLst>
           </p:cNvPr>
@@ -22865,7 +23111,7 @@
               <p:cNvPr id="3" name="Espaço Reservado para Conteúdo 2">
                 <a:extLst>
                   <a:ext uri="{FF2B5EF4-FFF2-40B4-BE49-F238E27FC236}">
-                    <a16:creationId xmlns:a16="http://schemas.microsoft.com/office/drawing/2014/main" id="{32DF54A1-52F5-C48C-7CD4-D6E451DF19D8}"/>
+                    <a16:creationId xmlns:a16="http://schemas.microsoft.com/office/drawing/2014/main" xmlns="" id="{32DF54A1-52F5-C48C-7CD4-D6E451DF19D8}"/>
                   </a:ext>
                 </a:extLst>
               </p:cNvPr>
@@ -23387,7 +23633,7 @@
               <p:cNvPr id="4" name="CaixaDeTexto 3">
                 <a:extLst>
                   <a:ext uri="{FF2B5EF4-FFF2-40B4-BE49-F238E27FC236}">
-                    <a16:creationId xmlns:a16="http://schemas.microsoft.com/office/drawing/2014/main" id="{2B7728A0-505D-9DAE-23EC-8172E2EEEFA9}"/>
+                    <a16:creationId xmlns:a16="http://schemas.microsoft.com/office/drawing/2014/main" xmlns="" id="{2B7728A0-505D-9DAE-23EC-8172E2EEEFA9}"/>
                   </a:ext>
                 </a:extLst>
               </p:cNvPr>
@@ -23484,7 +23730,7 @@
           <p:cNvPr id="5" name="Picture 4">
             <a:extLst>
               <a:ext uri="{FF2B5EF4-FFF2-40B4-BE49-F238E27FC236}">
-                <a16:creationId xmlns:a16="http://schemas.microsoft.com/office/drawing/2014/main" id="{5488725B-FC33-B5BC-707D-29521FAA0FD4}"/>
+                <a16:creationId xmlns:a16="http://schemas.microsoft.com/office/drawing/2014/main" xmlns="" id="{5488725B-FC33-B5BC-707D-29521FAA0FD4}"/>
               </a:ext>
             </a:extLst>
           </p:cNvPr>
@@ -23494,7 +23740,7 @@
           <p:nvPr/>
         </p:nvPicPr>
         <p:blipFill>
-          <a:blip r:embed="rId6">
+          <a:blip r:embed="rId6" cstate="print">
             <a:extLst>
               <a:ext uri="{28A0092B-C50C-407E-A947-70E740481C1C}">
                 <a14:useLocalDpi xmlns:a14="http://schemas.microsoft.com/office/drawing/2010/main" val="0"/>

--- a/slides/C24_Regressor_Softmax.pptx
+++ b/slides/C24_Regressor_Softmax.pptx
@@ -4869,7 +4869,7 @@
           <p:cNvPr id="2" name="Título 1">
             <a:extLst>
               <a:ext uri="{FF2B5EF4-FFF2-40B4-BE49-F238E27FC236}">
-                <a16:creationId xmlns:a16="http://schemas.microsoft.com/office/drawing/2014/main" xmlns="" id="{1DB9B4FF-B06E-403C-A326-BDC64D8FF94E}"/>
+                <a16:creationId xmlns="" xmlns:a16="http://schemas.microsoft.com/office/drawing/2014/main" id="{1DB9B4FF-B06E-403C-A326-BDC64D8FF94E}"/>
               </a:ext>
             </a:extLst>
           </p:cNvPr>
@@ -4906,7 +4906,7 @@
           <p:cNvPr id="3" name="Subtítulo 2">
             <a:extLst>
               <a:ext uri="{FF2B5EF4-FFF2-40B4-BE49-F238E27FC236}">
-                <a16:creationId xmlns:a16="http://schemas.microsoft.com/office/drawing/2014/main" xmlns="" id="{247BDFCE-746E-45BF-A319-4733D58D1632}"/>
+                <a16:creationId xmlns="" xmlns:a16="http://schemas.microsoft.com/office/drawing/2014/main" id="{247BDFCE-746E-45BF-A319-4733D58D1632}"/>
               </a:ext>
             </a:extLst>
           </p:cNvPr>
@@ -4976,7 +4976,7 @@
           <p:cNvPr id="4" name="Espaço Reservado para Data 3">
             <a:extLst>
               <a:ext uri="{FF2B5EF4-FFF2-40B4-BE49-F238E27FC236}">
-                <a16:creationId xmlns:a16="http://schemas.microsoft.com/office/drawing/2014/main" xmlns="" id="{9EDE2778-5372-4104-B96D-968184DA8288}"/>
+                <a16:creationId xmlns="" xmlns:a16="http://schemas.microsoft.com/office/drawing/2014/main" id="{9EDE2778-5372-4104-B96D-968184DA8288}"/>
               </a:ext>
             </a:extLst>
           </p:cNvPr>
@@ -5005,7 +5005,7 @@
           <p:cNvPr id="5" name="Espaço Reservado para Rodapé 4">
             <a:extLst>
               <a:ext uri="{FF2B5EF4-FFF2-40B4-BE49-F238E27FC236}">
-                <a16:creationId xmlns:a16="http://schemas.microsoft.com/office/drawing/2014/main" xmlns="" id="{C1DD0F41-C861-4051-988D-3024A37A4B93}"/>
+                <a16:creationId xmlns="" xmlns:a16="http://schemas.microsoft.com/office/drawing/2014/main" id="{C1DD0F41-C861-4051-988D-3024A37A4B93}"/>
               </a:ext>
             </a:extLst>
           </p:cNvPr>
@@ -5030,7 +5030,7 @@
           <p:cNvPr id="6" name="Espaço Reservado para Número de Slide 5">
             <a:extLst>
               <a:ext uri="{FF2B5EF4-FFF2-40B4-BE49-F238E27FC236}">
-                <a16:creationId xmlns:a16="http://schemas.microsoft.com/office/drawing/2014/main" xmlns="" id="{07E5967E-D980-431A-A5DB-3F0C5030A81E}"/>
+                <a16:creationId xmlns="" xmlns:a16="http://schemas.microsoft.com/office/drawing/2014/main" id="{07E5967E-D980-431A-A5DB-3F0C5030A81E}"/>
               </a:ext>
             </a:extLst>
           </p:cNvPr>
@@ -5089,7 +5089,7 @@
           <p:cNvPr id="2" name="Título 1">
             <a:extLst>
               <a:ext uri="{FF2B5EF4-FFF2-40B4-BE49-F238E27FC236}">
-                <a16:creationId xmlns:a16="http://schemas.microsoft.com/office/drawing/2014/main" xmlns="" id="{9036C49F-3E68-4175-81BA-3C3FEE44308A}"/>
+                <a16:creationId xmlns="" xmlns:a16="http://schemas.microsoft.com/office/drawing/2014/main" id="{9036C49F-3E68-4175-81BA-3C3FEE44308A}"/>
               </a:ext>
             </a:extLst>
           </p:cNvPr>
@@ -5117,7 +5117,7 @@
           <p:cNvPr id="3" name="Espaço Reservado para Texto Vertical 2">
             <a:extLst>
               <a:ext uri="{FF2B5EF4-FFF2-40B4-BE49-F238E27FC236}">
-                <a16:creationId xmlns:a16="http://schemas.microsoft.com/office/drawing/2014/main" xmlns="" id="{426FA736-3DD3-4D4E-B57B-BBE1D8F7D424}"/>
+                <a16:creationId xmlns="" xmlns:a16="http://schemas.microsoft.com/office/drawing/2014/main" id="{426FA736-3DD3-4D4E-B57B-BBE1D8F7D424}"/>
               </a:ext>
             </a:extLst>
           </p:cNvPr>
@@ -5174,7 +5174,7 @@
           <p:cNvPr id="4" name="Espaço Reservado para Data 3">
             <a:extLst>
               <a:ext uri="{FF2B5EF4-FFF2-40B4-BE49-F238E27FC236}">
-                <a16:creationId xmlns:a16="http://schemas.microsoft.com/office/drawing/2014/main" xmlns="" id="{99E8855C-D8FD-48F6-B14E-861E0DE4D915}"/>
+                <a16:creationId xmlns="" xmlns:a16="http://schemas.microsoft.com/office/drawing/2014/main" id="{99E8855C-D8FD-48F6-B14E-861E0DE4D915}"/>
               </a:ext>
             </a:extLst>
           </p:cNvPr>
@@ -5203,7 +5203,7 @@
           <p:cNvPr id="5" name="Espaço Reservado para Rodapé 4">
             <a:extLst>
               <a:ext uri="{FF2B5EF4-FFF2-40B4-BE49-F238E27FC236}">
-                <a16:creationId xmlns:a16="http://schemas.microsoft.com/office/drawing/2014/main" xmlns="" id="{97C0BB88-2F21-42A5-ACFF-83DA47F2D340}"/>
+                <a16:creationId xmlns="" xmlns:a16="http://schemas.microsoft.com/office/drawing/2014/main" id="{97C0BB88-2F21-42A5-ACFF-83DA47F2D340}"/>
               </a:ext>
             </a:extLst>
           </p:cNvPr>
@@ -5228,7 +5228,7 @@
           <p:cNvPr id="6" name="Espaço Reservado para Número de Slide 5">
             <a:extLst>
               <a:ext uri="{FF2B5EF4-FFF2-40B4-BE49-F238E27FC236}">
-                <a16:creationId xmlns:a16="http://schemas.microsoft.com/office/drawing/2014/main" xmlns="" id="{6CB462B3-1F22-4C05-B4B8-7A279FB7D5E9}"/>
+                <a16:creationId xmlns="" xmlns:a16="http://schemas.microsoft.com/office/drawing/2014/main" id="{6CB462B3-1F22-4C05-B4B8-7A279FB7D5E9}"/>
               </a:ext>
             </a:extLst>
           </p:cNvPr>
@@ -5287,7 +5287,7 @@
           <p:cNvPr id="2" name="Título Vertical 1">
             <a:extLst>
               <a:ext uri="{FF2B5EF4-FFF2-40B4-BE49-F238E27FC236}">
-                <a16:creationId xmlns:a16="http://schemas.microsoft.com/office/drawing/2014/main" xmlns="" id="{EAEAB728-701C-4207-A9D5-23FF45C60502}"/>
+                <a16:creationId xmlns="" xmlns:a16="http://schemas.microsoft.com/office/drawing/2014/main" id="{EAEAB728-701C-4207-A9D5-23FF45C60502}"/>
               </a:ext>
             </a:extLst>
           </p:cNvPr>
@@ -5320,7 +5320,7 @@
           <p:cNvPr id="3" name="Espaço Reservado para Texto Vertical 2">
             <a:extLst>
               <a:ext uri="{FF2B5EF4-FFF2-40B4-BE49-F238E27FC236}">
-                <a16:creationId xmlns:a16="http://schemas.microsoft.com/office/drawing/2014/main" xmlns="" id="{BA8C8CCF-7823-480A-9A19-0F664DD17E3B}"/>
+                <a16:creationId xmlns="" xmlns:a16="http://schemas.microsoft.com/office/drawing/2014/main" id="{BA8C8CCF-7823-480A-9A19-0F664DD17E3B}"/>
               </a:ext>
             </a:extLst>
           </p:cNvPr>
@@ -5382,7 +5382,7 @@
           <p:cNvPr id="4" name="Espaço Reservado para Data 3">
             <a:extLst>
               <a:ext uri="{FF2B5EF4-FFF2-40B4-BE49-F238E27FC236}">
-                <a16:creationId xmlns:a16="http://schemas.microsoft.com/office/drawing/2014/main" xmlns="" id="{721D5734-7B1F-425D-942F-6EB73344027C}"/>
+                <a16:creationId xmlns="" xmlns:a16="http://schemas.microsoft.com/office/drawing/2014/main" id="{721D5734-7B1F-425D-942F-6EB73344027C}"/>
               </a:ext>
             </a:extLst>
           </p:cNvPr>
@@ -5411,7 +5411,7 @@
           <p:cNvPr id="5" name="Espaço Reservado para Rodapé 4">
             <a:extLst>
               <a:ext uri="{FF2B5EF4-FFF2-40B4-BE49-F238E27FC236}">
-                <a16:creationId xmlns:a16="http://schemas.microsoft.com/office/drawing/2014/main" xmlns="" id="{1E1AAEAC-F08D-45FE-89EC-B1B349A868C9}"/>
+                <a16:creationId xmlns="" xmlns:a16="http://schemas.microsoft.com/office/drawing/2014/main" id="{1E1AAEAC-F08D-45FE-89EC-B1B349A868C9}"/>
               </a:ext>
             </a:extLst>
           </p:cNvPr>
@@ -5436,7 +5436,7 @@
           <p:cNvPr id="6" name="Espaço Reservado para Número de Slide 5">
             <a:extLst>
               <a:ext uri="{FF2B5EF4-FFF2-40B4-BE49-F238E27FC236}">
-                <a16:creationId xmlns:a16="http://schemas.microsoft.com/office/drawing/2014/main" xmlns="" id="{BAA44493-9911-47B2-87A6-C2141A972BC8}"/>
+                <a16:creationId xmlns="" xmlns:a16="http://schemas.microsoft.com/office/drawing/2014/main" id="{BAA44493-9911-47B2-87A6-C2141A972BC8}"/>
               </a:ext>
             </a:extLst>
           </p:cNvPr>
@@ -5495,7 +5495,7 @@
           <p:cNvPr id="2" name="Título 1">
             <a:extLst>
               <a:ext uri="{FF2B5EF4-FFF2-40B4-BE49-F238E27FC236}">
-                <a16:creationId xmlns:a16="http://schemas.microsoft.com/office/drawing/2014/main" xmlns="" id="{71BD44A5-8F21-4626-A01D-48A1C874B1D5}"/>
+                <a16:creationId xmlns="" xmlns:a16="http://schemas.microsoft.com/office/drawing/2014/main" id="{71BD44A5-8F21-4626-A01D-48A1C874B1D5}"/>
               </a:ext>
             </a:extLst>
           </p:cNvPr>
@@ -5523,7 +5523,7 @@
           <p:cNvPr id="3" name="Espaço Reservado para Conteúdo 2">
             <a:extLst>
               <a:ext uri="{FF2B5EF4-FFF2-40B4-BE49-F238E27FC236}">
-                <a16:creationId xmlns:a16="http://schemas.microsoft.com/office/drawing/2014/main" xmlns="" id="{B79E8085-65A9-48AA-951D-71D978BFF4ED}"/>
+                <a16:creationId xmlns="" xmlns:a16="http://schemas.microsoft.com/office/drawing/2014/main" id="{B79E8085-65A9-48AA-951D-71D978BFF4ED}"/>
               </a:ext>
             </a:extLst>
           </p:cNvPr>
@@ -5580,7 +5580,7 @@
           <p:cNvPr id="4" name="Espaço Reservado para Data 3">
             <a:extLst>
               <a:ext uri="{FF2B5EF4-FFF2-40B4-BE49-F238E27FC236}">
-                <a16:creationId xmlns:a16="http://schemas.microsoft.com/office/drawing/2014/main" xmlns="" id="{F05BE1AF-51EA-425D-B188-DE7BD675009F}"/>
+                <a16:creationId xmlns="" xmlns:a16="http://schemas.microsoft.com/office/drawing/2014/main" id="{F05BE1AF-51EA-425D-B188-DE7BD675009F}"/>
               </a:ext>
             </a:extLst>
           </p:cNvPr>
@@ -5609,7 +5609,7 @@
           <p:cNvPr id="5" name="Espaço Reservado para Rodapé 4">
             <a:extLst>
               <a:ext uri="{FF2B5EF4-FFF2-40B4-BE49-F238E27FC236}">
-                <a16:creationId xmlns:a16="http://schemas.microsoft.com/office/drawing/2014/main" xmlns="" id="{121BE632-29CF-4CB9-B365-C9EF38F89BE6}"/>
+                <a16:creationId xmlns="" xmlns:a16="http://schemas.microsoft.com/office/drawing/2014/main" id="{121BE632-29CF-4CB9-B365-C9EF38F89BE6}"/>
               </a:ext>
             </a:extLst>
           </p:cNvPr>
@@ -5634,7 +5634,7 @@
           <p:cNvPr id="6" name="Espaço Reservado para Número de Slide 5">
             <a:extLst>
               <a:ext uri="{FF2B5EF4-FFF2-40B4-BE49-F238E27FC236}">
-                <a16:creationId xmlns:a16="http://schemas.microsoft.com/office/drawing/2014/main" xmlns="" id="{60CF3DD1-9AEC-4A57-B461-4E4DD86FAC18}"/>
+                <a16:creationId xmlns="" xmlns:a16="http://schemas.microsoft.com/office/drawing/2014/main" id="{60CF3DD1-9AEC-4A57-B461-4E4DD86FAC18}"/>
               </a:ext>
             </a:extLst>
           </p:cNvPr>
@@ -5693,7 +5693,7 @@
           <p:cNvPr id="2" name="Título 1">
             <a:extLst>
               <a:ext uri="{FF2B5EF4-FFF2-40B4-BE49-F238E27FC236}">
-                <a16:creationId xmlns:a16="http://schemas.microsoft.com/office/drawing/2014/main" xmlns="" id="{34AB2FF0-A4D7-4E28-991D-FF26140D5988}"/>
+                <a16:creationId xmlns="" xmlns:a16="http://schemas.microsoft.com/office/drawing/2014/main" id="{34AB2FF0-A4D7-4E28-991D-FF26140D5988}"/>
               </a:ext>
             </a:extLst>
           </p:cNvPr>
@@ -5730,7 +5730,7 @@
           <p:cNvPr id="3" name="Espaço Reservado para Texto 2">
             <a:extLst>
               <a:ext uri="{FF2B5EF4-FFF2-40B4-BE49-F238E27FC236}">
-                <a16:creationId xmlns:a16="http://schemas.microsoft.com/office/drawing/2014/main" xmlns="" id="{E2AC45B0-4145-40DB-8E61-105461170604}"/>
+                <a16:creationId xmlns="" xmlns:a16="http://schemas.microsoft.com/office/drawing/2014/main" id="{E2AC45B0-4145-40DB-8E61-105461170604}"/>
               </a:ext>
             </a:extLst>
           </p:cNvPr>
@@ -5855,7 +5855,7 @@
           <p:cNvPr id="4" name="Espaço Reservado para Data 3">
             <a:extLst>
               <a:ext uri="{FF2B5EF4-FFF2-40B4-BE49-F238E27FC236}">
-                <a16:creationId xmlns:a16="http://schemas.microsoft.com/office/drawing/2014/main" xmlns="" id="{50F1D3FB-740A-4EBA-A309-2CE71D12ECFB}"/>
+                <a16:creationId xmlns="" xmlns:a16="http://schemas.microsoft.com/office/drawing/2014/main" id="{50F1D3FB-740A-4EBA-A309-2CE71D12ECFB}"/>
               </a:ext>
             </a:extLst>
           </p:cNvPr>
@@ -5884,7 +5884,7 @@
           <p:cNvPr id="5" name="Espaço Reservado para Rodapé 4">
             <a:extLst>
               <a:ext uri="{FF2B5EF4-FFF2-40B4-BE49-F238E27FC236}">
-                <a16:creationId xmlns:a16="http://schemas.microsoft.com/office/drawing/2014/main" xmlns="" id="{BDCAB18F-8715-4465-A940-F9C193A2ACE9}"/>
+                <a16:creationId xmlns="" xmlns:a16="http://schemas.microsoft.com/office/drawing/2014/main" id="{BDCAB18F-8715-4465-A940-F9C193A2ACE9}"/>
               </a:ext>
             </a:extLst>
           </p:cNvPr>
@@ -5909,7 +5909,7 @@
           <p:cNvPr id="6" name="Espaço Reservado para Número de Slide 5">
             <a:extLst>
               <a:ext uri="{FF2B5EF4-FFF2-40B4-BE49-F238E27FC236}">
-                <a16:creationId xmlns:a16="http://schemas.microsoft.com/office/drawing/2014/main" xmlns="" id="{353466C6-8248-429F-8056-FF040BF509EB}"/>
+                <a16:creationId xmlns="" xmlns:a16="http://schemas.microsoft.com/office/drawing/2014/main" id="{353466C6-8248-429F-8056-FF040BF509EB}"/>
               </a:ext>
             </a:extLst>
           </p:cNvPr>
@@ -5968,7 +5968,7 @@
           <p:cNvPr id="2" name="Título 1">
             <a:extLst>
               <a:ext uri="{FF2B5EF4-FFF2-40B4-BE49-F238E27FC236}">
-                <a16:creationId xmlns:a16="http://schemas.microsoft.com/office/drawing/2014/main" xmlns="" id="{BC7BB9F0-F14B-4A91-B2B7-35BC47FE4DE7}"/>
+                <a16:creationId xmlns="" xmlns:a16="http://schemas.microsoft.com/office/drawing/2014/main" id="{BC7BB9F0-F14B-4A91-B2B7-35BC47FE4DE7}"/>
               </a:ext>
             </a:extLst>
           </p:cNvPr>
@@ -5996,7 +5996,7 @@
           <p:cNvPr id="3" name="Espaço Reservado para Conteúdo 2">
             <a:extLst>
               <a:ext uri="{FF2B5EF4-FFF2-40B4-BE49-F238E27FC236}">
-                <a16:creationId xmlns:a16="http://schemas.microsoft.com/office/drawing/2014/main" xmlns="" id="{EC1FC1C4-73DA-47A6-8496-B0B457F7D39A}"/>
+                <a16:creationId xmlns="" xmlns:a16="http://schemas.microsoft.com/office/drawing/2014/main" id="{EC1FC1C4-73DA-47A6-8496-B0B457F7D39A}"/>
               </a:ext>
             </a:extLst>
           </p:cNvPr>
@@ -6058,7 +6058,7 @@
           <p:cNvPr id="4" name="Espaço Reservado para Conteúdo 3">
             <a:extLst>
               <a:ext uri="{FF2B5EF4-FFF2-40B4-BE49-F238E27FC236}">
-                <a16:creationId xmlns:a16="http://schemas.microsoft.com/office/drawing/2014/main" xmlns="" id="{E92F06A8-A449-4D92-9912-76873E529B38}"/>
+                <a16:creationId xmlns="" xmlns:a16="http://schemas.microsoft.com/office/drawing/2014/main" id="{E92F06A8-A449-4D92-9912-76873E529B38}"/>
               </a:ext>
             </a:extLst>
           </p:cNvPr>
@@ -6120,7 +6120,7 @@
           <p:cNvPr id="5" name="Espaço Reservado para Data 4">
             <a:extLst>
               <a:ext uri="{FF2B5EF4-FFF2-40B4-BE49-F238E27FC236}">
-                <a16:creationId xmlns:a16="http://schemas.microsoft.com/office/drawing/2014/main" xmlns="" id="{938070A4-BC2F-4D55-BD8D-DEAF11BB9EE9}"/>
+                <a16:creationId xmlns="" xmlns:a16="http://schemas.microsoft.com/office/drawing/2014/main" id="{938070A4-BC2F-4D55-BD8D-DEAF11BB9EE9}"/>
               </a:ext>
             </a:extLst>
           </p:cNvPr>
@@ -6149,7 +6149,7 @@
           <p:cNvPr id="6" name="Espaço Reservado para Rodapé 5">
             <a:extLst>
               <a:ext uri="{FF2B5EF4-FFF2-40B4-BE49-F238E27FC236}">
-                <a16:creationId xmlns:a16="http://schemas.microsoft.com/office/drawing/2014/main" xmlns="" id="{45CC2DB8-844A-465F-BA9A-7734C80C7F43}"/>
+                <a16:creationId xmlns="" xmlns:a16="http://schemas.microsoft.com/office/drawing/2014/main" id="{45CC2DB8-844A-465F-BA9A-7734C80C7F43}"/>
               </a:ext>
             </a:extLst>
           </p:cNvPr>
@@ -6174,7 +6174,7 @@
           <p:cNvPr id="7" name="Espaço Reservado para Número de Slide 6">
             <a:extLst>
               <a:ext uri="{FF2B5EF4-FFF2-40B4-BE49-F238E27FC236}">
-                <a16:creationId xmlns:a16="http://schemas.microsoft.com/office/drawing/2014/main" xmlns="" id="{4CC606A8-097B-4040-94E0-CD8C88280D8F}"/>
+                <a16:creationId xmlns="" xmlns:a16="http://schemas.microsoft.com/office/drawing/2014/main" id="{4CC606A8-097B-4040-94E0-CD8C88280D8F}"/>
               </a:ext>
             </a:extLst>
           </p:cNvPr>
@@ -6233,7 +6233,7 @@
           <p:cNvPr id="2" name="Título 1">
             <a:extLst>
               <a:ext uri="{FF2B5EF4-FFF2-40B4-BE49-F238E27FC236}">
-                <a16:creationId xmlns:a16="http://schemas.microsoft.com/office/drawing/2014/main" xmlns="" id="{76D66686-0143-4CB6-8C09-BA326F1E7ACA}"/>
+                <a16:creationId xmlns="" xmlns:a16="http://schemas.microsoft.com/office/drawing/2014/main" id="{76D66686-0143-4CB6-8C09-BA326F1E7ACA}"/>
               </a:ext>
             </a:extLst>
           </p:cNvPr>
@@ -6266,7 +6266,7 @@
           <p:cNvPr id="3" name="Espaço Reservado para Texto 2">
             <a:extLst>
               <a:ext uri="{FF2B5EF4-FFF2-40B4-BE49-F238E27FC236}">
-                <a16:creationId xmlns:a16="http://schemas.microsoft.com/office/drawing/2014/main" xmlns="" id="{0227AB85-F59E-4BCE-B846-4FA0992C2F23}"/>
+                <a16:creationId xmlns="" xmlns:a16="http://schemas.microsoft.com/office/drawing/2014/main" id="{0227AB85-F59E-4BCE-B846-4FA0992C2F23}"/>
               </a:ext>
             </a:extLst>
           </p:cNvPr>
@@ -6337,7 +6337,7 @@
           <p:cNvPr id="4" name="Espaço Reservado para Conteúdo 3">
             <a:extLst>
               <a:ext uri="{FF2B5EF4-FFF2-40B4-BE49-F238E27FC236}">
-                <a16:creationId xmlns:a16="http://schemas.microsoft.com/office/drawing/2014/main" xmlns="" id="{3373456C-7319-4D0A-827D-D29F6B083F5D}"/>
+                <a16:creationId xmlns="" xmlns:a16="http://schemas.microsoft.com/office/drawing/2014/main" id="{3373456C-7319-4D0A-827D-D29F6B083F5D}"/>
               </a:ext>
             </a:extLst>
           </p:cNvPr>
@@ -6399,7 +6399,7 @@
           <p:cNvPr id="5" name="Espaço Reservado para Texto 4">
             <a:extLst>
               <a:ext uri="{FF2B5EF4-FFF2-40B4-BE49-F238E27FC236}">
-                <a16:creationId xmlns:a16="http://schemas.microsoft.com/office/drawing/2014/main" xmlns="" id="{4CD109D0-2E83-4262-8029-A871CEC47406}"/>
+                <a16:creationId xmlns="" xmlns:a16="http://schemas.microsoft.com/office/drawing/2014/main" id="{4CD109D0-2E83-4262-8029-A871CEC47406}"/>
               </a:ext>
             </a:extLst>
           </p:cNvPr>
@@ -6470,7 +6470,7 @@
           <p:cNvPr id="6" name="Espaço Reservado para Conteúdo 5">
             <a:extLst>
               <a:ext uri="{FF2B5EF4-FFF2-40B4-BE49-F238E27FC236}">
-                <a16:creationId xmlns:a16="http://schemas.microsoft.com/office/drawing/2014/main" xmlns="" id="{AD706E3A-CFBB-4A6C-A65F-D0360A9E74FE}"/>
+                <a16:creationId xmlns="" xmlns:a16="http://schemas.microsoft.com/office/drawing/2014/main" id="{AD706E3A-CFBB-4A6C-A65F-D0360A9E74FE}"/>
               </a:ext>
             </a:extLst>
           </p:cNvPr>
@@ -6532,7 +6532,7 @@
           <p:cNvPr id="7" name="Espaço Reservado para Data 6">
             <a:extLst>
               <a:ext uri="{FF2B5EF4-FFF2-40B4-BE49-F238E27FC236}">
-                <a16:creationId xmlns:a16="http://schemas.microsoft.com/office/drawing/2014/main" xmlns="" id="{4172C0E5-5AF0-4805-BB51-443733CD2BD5}"/>
+                <a16:creationId xmlns="" xmlns:a16="http://schemas.microsoft.com/office/drawing/2014/main" id="{4172C0E5-5AF0-4805-BB51-443733CD2BD5}"/>
               </a:ext>
             </a:extLst>
           </p:cNvPr>
@@ -6561,7 +6561,7 @@
           <p:cNvPr id="8" name="Espaço Reservado para Rodapé 7">
             <a:extLst>
               <a:ext uri="{FF2B5EF4-FFF2-40B4-BE49-F238E27FC236}">
-                <a16:creationId xmlns:a16="http://schemas.microsoft.com/office/drawing/2014/main" xmlns="" id="{0E801648-156F-497E-99CF-797DF48051E1}"/>
+                <a16:creationId xmlns="" xmlns:a16="http://schemas.microsoft.com/office/drawing/2014/main" id="{0E801648-156F-497E-99CF-797DF48051E1}"/>
               </a:ext>
             </a:extLst>
           </p:cNvPr>
@@ -6586,7 +6586,7 @@
           <p:cNvPr id="9" name="Espaço Reservado para Número de Slide 8">
             <a:extLst>
               <a:ext uri="{FF2B5EF4-FFF2-40B4-BE49-F238E27FC236}">
-                <a16:creationId xmlns:a16="http://schemas.microsoft.com/office/drawing/2014/main" xmlns="" id="{EEE23D32-80E7-4796-A137-66BF842E4B53}"/>
+                <a16:creationId xmlns="" xmlns:a16="http://schemas.microsoft.com/office/drawing/2014/main" id="{EEE23D32-80E7-4796-A137-66BF842E4B53}"/>
               </a:ext>
             </a:extLst>
           </p:cNvPr>
@@ -6645,7 +6645,7 @@
           <p:cNvPr id="2" name="Título 1">
             <a:extLst>
               <a:ext uri="{FF2B5EF4-FFF2-40B4-BE49-F238E27FC236}">
-                <a16:creationId xmlns:a16="http://schemas.microsoft.com/office/drawing/2014/main" xmlns="" id="{2BCE2379-C78F-47E1-8CFC-B846E7AF148D}"/>
+                <a16:creationId xmlns="" xmlns:a16="http://schemas.microsoft.com/office/drawing/2014/main" id="{2BCE2379-C78F-47E1-8CFC-B846E7AF148D}"/>
               </a:ext>
             </a:extLst>
           </p:cNvPr>
@@ -6673,7 +6673,7 @@
           <p:cNvPr id="3" name="Espaço Reservado para Data 2">
             <a:extLst>
               <a:ext uri="{FF2B5EF4-FFF2-40B4-BE49-F238E27FC236}">
-                <a16:creationId xmlns:a16="http://schemas.microsoft.com/office/drawing/2014/main" xmlns="" id="{342600A9-7F92-4E22-9D94-E4717252A817}"/>
+                <a16:creationId xmlns="" xmlns:a16="http://schemas.microsoft.com/office/drawing/2014/main" id="{342600A9-7F92-4E22-9D94-E4717252A817}"/>
               </a:ext>
             </a:extLst>
           </p:cNvPr>
@@ -6702,7 +6702,7 @@
           <p:cNvPr id="4" name="Espaço Reservado para Rodapé 3">
             <a:extLst>
               <a:ext uri="{FF2B5EF4-FFF2-40B4-BE49-F238E27FC236}">
-                <a16:creationId xmlns:a16="http://schemas.microsoft.com/office/drawing/2014/main" xmlns="" id="{192E6BED-F546-40CC-A2DF-99CBA853654E}"/>
+                <a16:creationId xmlns="" xmlns:a16="http://schemas.microsoft.com/office/drawing/2014/main" id="{192E6BED-F546-40CC-A2DF-99CBA853654E}"/>
               </a:ext>
             </a:extLst>
           </p:cNvPr>
@@ -6727,7 +6727,7 @@
           <p:cNvPr id="5" name="Espaço Reservado para Número de Slide 4">
             <a:extLst>
               <a:ext uri="{FF2B5EF4-FFF2-40B4-BE49-F238E27FC236}">
-                <a16:creationId xmlns:a16="http://schemas.microsoft.com/office/drawing/2014/main" xmlns="" id="{6091CC40-A8C4-4063-80EB-CC5099621678}"/>
+                <a16:creationId xmlns="" xmlns:a16="http://schemas.microsoft.com/office/drawing/2014/main" id="{6091CC40-A8C4-4063-80EB-CC5099621678}"/>
               </a:ext>
             </a:extLst>
           </p:cNvPr>
@@ -6786,7 +6786,7 @@
           <p:cNvPr id="2" name="Espaço Reservado para Data 1">
             <a:extLst>
               <a:ext uri="{FF2B5EF4-FFF2-40B4-BE49-F238E27FC236}">
-                <a16:creationId xmlns:a16="http://schemas.microsoft.com/office/drawing/2014/main" xmlns="" id="{DD19515C-212C-4EAE-84A3-8FF4BC844F1B}"/>
+                <a16:creationId xmlns="" xmlns:a16="http://schemas.microsoft.com/office/drawing/2014/main" id="{DD19515C-212C-4EAE-84A3-8FF4BC844F1B}"/>
               </a:ext>
             </a:extLst>
           </p:cNvPr>
@@ -6815,7 +6815,7 @@
           <p:cNvPr id="3" name="Espaço Reservado para Rodapé 2">
             <a:extLst>
               <a:ext uri="{FF2B5EF4-FFF2-40B4-BE49-F238E27FC236}">
-                <a16:creationId xmlns:a16="http://schemas.microsoft.com/office/drawing/2014/main" xmlns="" id="{94D3D120-B3E8-4C96-861D-7A4F12F49B3A}"/>
+                <a16:creationId xmlns="" xmlns:a16="http://schemas.microsoft.com/office/drawing/2014/main" id="{94D3D120-B3E8-4C96-861D-7A4F12F49B3A}"/>
               </a:ext>
             </a:extLst>
           </p:cNvPr>
@@ -6840,7 +6840,7 @@
           <p:cNvPr id="4" name="Espaço Reservado para Número de Slide 3">
             <a:extLst>
               <a:ext uri="{FF2B5EF4-FFF2-40B4-BE49-F238E27FC236}">
-                <a16:creationId xmlns:a16="http://schemas.microsoft.com/office/drawing/2014/main" xmlns="" id="{42E49B68-FA1B-468B-9F17-D5C09243D454}"/>
+                <a16:creationId xmlns="" xmlns:a16="http://schemas.microsoft.com/office/drawing/2014/main" id="{42E49B68-FA1B-468B-9F17-D5C09243D454}"/>
               </a:ext>
             </a:extLst>
           </p:cNvPr>
@@ -6899,7 +6899,7 @@
           <p:cNvPr id="2" name="Título 1">
             <a:extLst>
               <a:ext uri="{FF2B5EF4-FFF2-40B4-BE49-F238E27FC236}">
-                <a16:creationId xmlns:a16="http://schemas.microsoft.com/office/drawing/2014/main" xmlns="" id="{1C17BCBE-A897-4319-85EC-D87909C24980}"/>
+                <a16:creationId xmlns="" xmlns:a16="http://schemas.microsoft.com/office/drawing/2014/main" id="{1C17BCBE-A897-4319-85EC-D87909C24980}"/>
               </a:ext>
             </a:extLst>
           </p:cNvPr>
@@ -6936,7 +6936,7 @@
           <p:cNvPr id="3" name="Espaço Reservado para Conteúdo 2">
             <a:extLst>
               <a:ext uri="{FF2B5EF4-FFF2-40B4-BE49-F238E27FC236}">
-                <a16:creationId xmlns:a16="http://schemas.microsoft.com/office/drawing/2014/main" xmlns="" id="{4226F885-0204-4913-868B-4B8B82576F17}"/>
+                <a16:creationId xmlns="" xmlns:a16="http://schemas.microsoft.com/office/drawing/2014/main" id="{4226F885-0204-4913-868B-4B8B82576F17}"/>
               </a:ext>
             </a:extLst>
           </p:cNvPr>
@@ -7026,7 +7026,7 @@
           <p:cNvPr id="4" name="Espaço Reservado para Texto 3">
             <a:extLst>
               <a:ext uri="{FF2B5EF4-FFF2-40B4-BE49-F238E27FC236}">
-                <a16:creationId xmlns:a16="http://schemas.microsoft.com/office/drawing/2014/main" xmlns="" id="{00F9F784-A858-441B-8AB5-697098141751}"/>
+                <a16:creationId xmlns="" xmlns:a16="http://schemas.microsoft.com/office/drawing/2014/main" id="{00F9F784-A858-441B-8AB5-697098141751}"/>
               </a:ext>
             </a:extLst>
           </p:cNvPr>
@@ -7097,7 +7097,7 @@
           <p:cNvPr id="5" name="Espaço Reservado para Data 4">
             <a:extLst>
               <a:ext uri="{FF2B5EF4-FFF2-40B4-BE49-F238E27FC236}">
-                <a16:creationId xmlns:a16="http://schemas.microsoft.com/office/drawing/2014/main" xmlns="" id="{A4DC363A-5000-472E-8B17-02E7DCB8840A}"/>
+                <a16:creationId xmlns="" xmlns:a16="http://schemas.microsoft.com/office/drawing/2014/main" id="{A4DC363A-5000-472E-8B17-02E7DCB8840A}"/>
               </a:ext>
             </a:extLst>
           </p:cNvPr>
@@ -7126,7 +7126,7 @@
           <p:cNvPr id="6" name="Espaço Reservado para Rodapé 5">
             <a:extLst>
               <a:ext uri="{FF2B5EF4-FFF2-40B4-BE49-F238E27FC236}">
-                <a16:creationId xmlns:a16="http://schemas.microsoft.com/office/drawing/2014/main" xmlns="" id="{5548425D-2C21-4C56-BAD4-662978775C28}"/>
+                <a16:creationId xmlns="" xmlns:a16="http://schemas.microsoft.com/office/drawing/2014/main" id="{5548425D-2C21-4C56-BAD4-662978775C28}"/>
               </a:ext>
             </a:extLst>
           </p:cNvPr>
@@ -7151,7 +7151,7 @@
           <p:cNvPr id="7" name="Espaço Reservado para Número de Slide 6">
             <a:extLst>
               <a:ext uri="{FF2B5EF4-FFF2-40B4-BE49-F238E27FC236}">
-                <a16:creationId xmlns:a16="http://schemas.microsoft.com/office/drawing/2014/main" xmlns="" id="{C63E9726-E64C-42B2-AE8A-8C235A956B48}"/>
+                <a16:creationId xmlns="" xmlns:a16="http://schemas.microsoft.com/office/drawing/2014/main" id="{C63E9726-E64C-42B2-AE8A-8C235A956B48}"/>
               </a:ext>
             </a:extLst>
           </p:cNvPr>
@@ -7210,7 +7210,7 @@
           <p:cNvPr id="2" name="Título 1">
             <a:extLst>
               <a:ext uri="{FF2B5EF4-FFF2-40B4-BE49-F238E27FC236}">
-                <a16:creationId xmlns:a16="http://schemas.microsoft.com/office/drawing/2014/main" xmlns="" id="{11086A78-3E74-450C-96A6-CA8AC37AF772}"/>
+                <a16:creationId xmlns="" xmlns:a16="http://schemas.microsoft.com/office/drawing/2014/main" id="{11086A78-3E74-450C-96A6-CA8AC37AF772}"/>
               </a:ext>
             </a:extLst>
           </p:cNvPr>
@@ -7247,7 +7247,7 @@
           <p:cNvPr id="3" name="Espaço Reservado para Imagem 2">
             <a:extLst>
               <a:ext uri="{FF2B5EF4-FFF2-40B4-BE49-F238E27FC236}">
-                <a16:creationId xmlns:a16="http://schemas.microsoft.com/office/drawing/2014/main" xmlns="" id="{5F5B7312-975A-4DBC-9B2F-3652ADA006FD}"/>
+                <a16:creationId xmlns="" xmlns:a16="http://schemas.microsoft.com/office/drawing/2014/main" id="{5F5B7312-975A-4DBC-9B2F-3652ADA006FD}"/>
               </a:ext>
             </a:extLst>
           </p:cNvPr>
@@ -7314,7 +7314,7 @@
           <p:cNvPr id="4" name="Espaço Reservado para Texto 3">
             <a:extLst>
               <a:ext uri="{FF2B5EF4-FFF2-40B4-BE49-F238E27FC236}">
-                <a16:creationId xmlns:a16="http://schemas.microsoft.com/office/drawing/2014/main" xmlns="" id="{AAF805F5-1DFF-41C6-944C-7D79FE0D0963}"/>
+                <a16:creationId xmlns="" xmlns:a16="http://schemas.microsoft.com/office/drawing/2014/main" id="{AAF805F5-1DFF-41C6-944C-7D79FE0D0963}"/>
               </a:ext>
             </a:extLst>
           </p:cNvPr>
@@ -7385,7 +7385,7 @@
           <p:cNvPr id="5" name="Espaço Reservado para Data 4">
             <a:extLst>
               <a:ext uri="{FF2B5EF4-FFF2-40B4-BE49-F238E27FC236}">
-                <a16:creationId xmlns:a16="http://schemas.microsoft.com/office/drawing/2014/main" xmlns="" id="{02113D81-8665-4516-BD81-C6A1F254EECD}"/>
+                <a16:creationId xmlns="" xmlns:a16="http://schemas.microsoft.com/office/drawing/2014/main" id="{02113D81-8665-4516-BD81-C6A1F254EECD}"/>
               </a:ext>
             </a:extLst>
           </p:cNvPr>
@@ -7414,7 +7414,7 @@
           <p:cNvPr id="6" name="Espaço Reservado para Rodapé 5">
             <a:extLst>
               <a:ext uri="{FF2B5EF4-FFF2-40B4-BE49-F238E27FC236}">
-                <a16:creationId xmlns:a16="http://schemas.microsoft.com/office/drawing/2014/main" xmlns="" id="{2B00C88B-FF32-40AA-A187-727D96FD7862}"/>
+                <a16:creationId xmlns="" xmlns:a16="http://schemas.microsoft.com/office/drawing/2014/main" id="{2B00C88B-FF32-40AA-A187-727D96FD7862}"/>
               </a:ext>
             </a:extLst>
           </p:cNvPr>
@@ -7439,7 +7439,7 @@
           <p:cNvPr id="7" name="Espaço Reservado para Número de Slide 6">
             <a:extLst>
               <a:ext uri="{FF2B5EF4-FFF2-40B4-BE49-F238E27FC236}">
-                <a16:creationId xmlns:a16="http://schemas.microsoft.com/office/drawing/2014/main" xmlns="" id="{A04D1A2D-69F7-4B8F-A730-BC26DC340BA6}"/>
+                <a16:creationId xmlns="" xmlns:a16="http://schemas.microsoft.com/office/drawing/2014/main" id="{A04D1A2D-69F7-4B8F-A730-BC26DC340BA6}"/>
               </a:ext>
             </a:extLst>
           </p:cNvPr>
@@ -7503,7 +7503,7 @@
           <p:cNvPr id="2" name="Espaço Reservado para Título 1">
             <a:extLst>
               <a:ext uri="{FF2B5EF4-FFF2-40B4-BE49-F238E27FC236}">
-                <a16:creationId xmlns:a16="http://schemas.microsoft.com/office/drawing/2014/main" xmlns="" id="{E69A0273-1966-4A1B-9370-4C1CE5036371}"/>
+                <a16:creationId xmlns="" xmlns:a16="http://schemas.microsoft.com/office/drawing/2014/main" id="{E69A0273-1966-4A1B-9370-4C1CE5036371}"/>
               </a:ext>
             </a:extLst>
           </p:cNvPr>
@@ -7541,7 +7541,7 @@
           <p:cNvPr id="3" name="Espaço Reservado para Texto 2">
             <a:extLst>
               <a:ext uri="{FF2B5EF4-FFF2-40B4-BE49-F238E27FC236}">
-                <a16:creationId xmlns:a16="http://schemas.microsoft.com/office/drawing/2014/main" xmlns="" id="{3B9CF87A-0448-49A7-AB25-EBC1D56A40EF}"/>
+                <a16:creationId xmlns="" xmlns:a16="http://schemas.microsoft.com/office/drawing/2014/main" id="{3B9CF87A-0448-49A7-AB25-EBC1D56A40EF}"/>
               </a:ext>
             </a:extLst>
           </p:cNvPr>
@@ -7608,7 +7608,7 @@
           <p:cNvPr id="4" name="Espaço Reservado para Data 3">
             <a:extLst>
               <a:ext uri="{FF2B5EF4-FFF2-40B4-BE49-F238E27FC236}">
-                <a16:creationId xmlns:a16="http://schemas.microsoft.com/office/drawing/2014/main" xmlns="" id="{2EF7B1F2-BB5A-44D0-816D-16AD2C71430E}"/>
+                <a16:creationId xmlns="" xmlns:a16="http://schemas.microsoft.com/office/drawing/2014/main" id="{2EF7B1F2-BB5A-44D0-816D-16AD2C71430E}"/>
               </a:ext>
             </a:extLst>
           </p:cNvPr>
@@ -7655,7 +7655,7 @@
           <p:cNvPr id="5" name="Espaço Reservado para Rodapé 4">
             <a:extLst>
               <a:ext uri="{FF2B5EF4-FFF2-40B4-BE49-F238E27FC236}">
-                <a16:creationId xmlns:a16="http://schemas.microsoft.com/office/drawing/2014/main" xmlns="" id="{C703F94C-2CC8-4DAA-BC35-14FC3E841DCD}"/>
+                <a16:creationId xmlns="" xmlns:a16="http://schemas.microsoft.com/office/drawing/2014/main" id="{C703F94C-2CC8-4DAA-BC35-14FC3E841DCD}"/>
               </a:ext>
             </a:extLst>
           </p:cNvPr>
@@ -7698,7 +7698,7 @@
           <p:cNvPr id="6" name="Espaço Reservado para Número de Slide 5">
             <a:extLst>
               <a:ext uri="{FF2B5EF4-FFF2-40B4-BE49-F238E27FC236}">
-                <a16:creationId xmlns:a16="http://schemas.microsoft.com/office/drawing/2014/main" xmlns="" id="{64051336-7048-457A-8B61-D94291D71648}"/>
+                <a16:creationId xmlns="" xmlns:a16="http://schemas.microsoft.com/office/drawing/2014/main" id="{64051336-7048-457A-8B61-D94291D71648}"/>
               </a:ext>
             </a:extLst>
           </p:cNvPr>
@@ -8066,7 +8066,7 @@
           <p:cNvPr id="4" name="CaixaDeTexto 3">
             <a:extLst>
               <a:ext uri="{FF2B5EF4-FFF2-40B4-BE49-F238E27FC236}">
-                <a16:creationId xmlns:a16="http://schemas.microsoft.com/office/drawing/2014/main" xmlns="" id="{430EB894-B7D4-434C-9D1A-A14094D9BEEC}"/>
+                <a16:creationId xmlns="" xmlns:a16="http://schemas.microsoft.com/office/drawing/2014/main" id="{430EB894-B7D4-434C-9D1A-A14094D9BEEC}"/>
               </a:ext>
             </a:extLst>
           </p:cNvPr>
@@ -8110,7 +8110,7 @@
           <p:cNvPr id="1026" name="Picture 2" descr="Logo">
             <a:extLst>
               <a:ext uri="{FF2B5EF4-FFF2-40B4-BE49-F238E27FC236}">
-                <a16:creationId xmlns:a16="http://schemas.microsoft.com/office/drawing/2014/main" xmlns="" id="{3F2642E0-4F6A-4196-8F58-E77D36E9A33F}"/>
+                <a16:creationId xmlns="" xmlns:a16="http://schemas.microsoft.com/office/drawing/2014/main" id="{3F2642E0-4F6A-4196-8F58-E77D36E9A33F}"/>
               </a:ext>
             </a:extLst>
           </p:cNvPr>
@@ -8155,7 +8155,7 @@
           <p:cNvPr id="5122" name="Picture 2" descr="Image result for machine learning">
             <a:extLst>
               <a:ext uri="{FF2B5EF4-FFF2-40B4-BE49-F238E27FC236}">
-                <a16:creationId xmlns:a16="http://schemas.microsoft.com/office/drawing/2014/main" xmlns="" id="{810CE0A2-4102-44A6-A370-175E7896CDCB}"/>
+                <a16:creationId xmlns="" xmlns:a16="http://schemas.microsoft.com/office/drawing/2014/main" id="{810CE0A2-4102-44A6-A370-175E7896CDCB}"/>
               </a:ext>
             </a:extLst>
           </p:cNvPr>
@@ -8200,7 +8200,7 @@
           <p:cNvPr id="7" name="Título 1">
             <a:extLst>
               <a:ext uri="{FF2B5EF4-FFF2-40B4-BE49-F238E27FC236}">
-                <a16:creationId xmlns:a16="http://schemas.microsoft.com/office/drawing/2014/main" xmlns="" id="{32666AC8-2E17-4DB4-B0F5-60C640CCFD2E}"/>
+                <a16:creationId xmlns="" xmlns:a16="http://schemas.microsoft.com/office/drawing/2014/main" id="{32666AC8-2E17-4DB4-B0F5-60C640CCFD2E}"/>
               </a:ext>
             </a:extLst>
           </p:cNvPr>
@@ -8285,7 +8285,7 @@
           <p:cNvPr id="2" name="Título 1">
             <a:extLst>
               <a:ext uri="{FF2B5EF4-FFF2-40B4-BE49-F238E27FC236}">
-                <a16:creationId xmlns:a16="http://schemas.microsoft.com/office/drawing/2014/main" xmlns="" id="{028A152F-93D8-11FA-9B7A-B62AE5BB6486}"/>
+                <a16:creationId xmlns="" xmlns:a16="http://schemas.microsoft.com/office/drawing/2014/main" id="{028A152F-93D8-11FA-9B7A-B62AE5BB6486}"/>
               </a:ext>
             </a:extLst>
           </p:cNvPr>
@@ -8312,14 +8312,14 @@
           </a:p>
         </p:txBody>
       </p:sp>
-      <mc:AlternateContent xmlns:mc="http://schemas.openxmlformats.org/markup-compatibility/2006" xmlns:a14="http://schemas.microsoft.com/office/drawing/2010/main">
-        <mc:Choice Requires="a14">
+      <mc:AlternateContent xmlns:mc="http://schemas.openxmlformats.org/markup-compatibility/2006">
+        <mc:Choice xmlns:a14="http://schemas.microsoft.com/office/drawing/2010/main" Requires="a14">
           <p:sp>
             <p:nvSpPr>
               <p:cNvPr id="3" name="Espaço Reservado para Conteúdo 2">
                 <a:extLst>
                   <a:ext uri="{FF2B5EF4-FFF2-40B4-BE49-F238E27FC236}">
-                    <a16:creationId xmlns:a16="http://schemas.microsoft.com/office/drawing/2014/main" xmlns="" id="{B3535727-BB24-BB15-5C03-3DA9A3F9A09A}"/>
+                    <a16:creationId xmlns="" xmlns:a16="http://schemas.microsoft.com/office/drawing/2014/main" id="{B3535727-BB24-BB15-5C03-3DA9A3F9A09A}"/>
                   </a:ext>
                 </a:extLst>
               </p:cNvPr>
@@ -8486,7 +8486,15 @@
                       <a:srgbClr val="7030A0"/>
                     </a:solidFill>
                   </a:rPr>
-                  <a:t> como rótulos</a:t>
+                  <a:t> como </a:t>
+                </a:r>
+                <a:r>
+                  <a:rPr lang="pt-BR" b="1" dirty="0" smtClean="0">
+                    <a:solidFill>
+                      <a:srgbClr val="7030A0"/>
+                    </a:solidFill>
+                  </a:rPr>
+                  <a:t>a representação dos rótulos</a:t>
                 </a:r>
                 <a:r>
                   <a:rPr lang="pt-BR" dirty="0"/>
@@ -8496,13 +8504,13 @@
             </p:txBody>
           </p:sp>
         </mc:Choice>
-        <mc:Fallback xmlns="">
+        <mc:Fallback>
           <p:sp>
             <p:nvSpPr>
               <p:cNvPr id="3" name="Espaço Reservado para Conteúdo 2">
                 <a:extLst>
                   <a:ext uri="{FF2B5EF4-FFF2-40B4-BE49-F238E27FC236}">
-                    <a16:creationId xmlns:a16="http://schemas.microsoft.com/office/drawing/2014/main" id="{B3535727-BB24-BB15-5C03-3DA9A3F9A09A}"/>
+                    <a16:creationId xmlns="" xmlns:a16="http://schemas.microsoft.com/office/drawing/2014/main" xmlns:a14="http://schemas.microsoft.com/office/drawing/2010/main" id="{B3535727-BB24-BB15-5C03-3DA9A3F9A09A}"/>
                   </a:ext>
                 </a:extLst>
               </p:cNvPr>
@@ -8518,7 +8526,7 @@
                 <a:off x="5286376" y="1825624"/>
                 <a:ext cx="6905624" cy="5032375"/>
               </a:xfrm>
-              <a:blipFill>
+              <a:blipFill rotWithShape="0">
                 <a:blip r:embed="rId3"/>
                 <a:stretch>
                   <a:fillRect l="-1589" t="-1937" r="-1677"/>
@@ -8530,7 +8538,7 @@
               <a:lstStyle/>
               <a:p>
                 <a:r>
-                  <a:rPr lang="en-US">
+                  <a:rPr lang="pt-BR">
                     <a:noFill/>
                   </a:rPr>
                   <a:t> </a:t>
@@ -8545,7 +8553,7 @@
           <p:cNvPr id="7" name="Picture 6">
             <a:extLst>
               <a:ext uri="{FF2B5EF4-FFF2-40B4-BE49-F238E27FC236}">
-                <a16:creationId xmlns:a16="http://schemas.microsoft.com/office/drawing/2014/main" xmlns="" id="{B29D6ED4-6B75-62EC-8922-9CCA4F704E2B}"/>
+                <a16:creationId xmlns="" xmlns:a16="http://schemas.microsoft.com/office/drawing/2014/main" id="{B29D6ED4-6B75-62EC-8922-9CCA4F704E2B}"/>
               </a:ext>
             </a:extLst>
           </p:cNvPr>
@@ -8611,7 +8619,7 @@
           <p:cNvPr id="2" name="Title 1">
             <a:extLst>
               <a:ext uri="{FF2B5EF4-FFF2-40B4-BE49-F238E27FC236}">
-                <a16:creationId xmlns:a16="http://schemas.microsoft.com/office/drawing/2014/main" xmlns="" id="{2DB9D242-5419-0FFB-7863-B3BB3BD80869}"/>
+                <a16:creationId xmlns="" xmlns:a16="http://schemas.microsoft.com/office/drawing/2014/main" id="{2DB9D242-5419-0FFB-7863-B3BB3BD80869}"/>
               </a:ext>
             </a:extLst>
           </p:cNvPr>
@@ -8635,14 +8643,14 @@
           </a:p>
         </p:txBody>
       </p:sp>
-      <mc:AlternateContent xmlns:mc="http://schemas.openxmlformats.org/markup-compatibility/2006" xmlns:a14="http://schemas.microsoft.com/office/drawing/2010/main">
-        <mc:Choice Requires="a14">
+      <mc:AlternateContent xmlns:mc="http://schemas.openxmlformats.org/markup-compatibility/2006">
+        <mc:Choice xmlns:a14="http://schemas.microsoft.com/office/drawing/2010/main" Requires="a14">
           <p:sp>
             <p:nvSpPr>
               <p:cNvPr id="3" name="Content Placeholder 2">
                 <a:extLst>
                   <a:ext uri="{FF2B5EF4-FFF2-40B4-BE49-F238E27FC236}">
-                    <a16:creationId xmlns:a16="http://schemas.microsoft.com/office/drawing/2014/main" xmlns="" id="{34B1DEA3-BAAD-D90C-CD9D-99A5A24F4544}"/>
+                    <a16:creationId xmlns="" xmlns:a16="http://schemas.microsoft.com/office/drawing/2014/main" id="{34B1DEA3-BAAD-D90C-CD9D-99A5A24F4544}"/>
                   </a:ext>
                 </a:extLst>
               </p:cNvPr>
@@ -8692,8 +8700,12 @@
               </a:p>
               <a:p>
                 <a:r>
+                  <a:rPr lang="pt-BR" dirty="0" smtClean="0"/>
+                  <a:t>Para isso, usamos </a:t>
+                </a:r>
+                <a:r>
                   <a:rPr lang="pt-BR" dirty="0"/>
-                  <a:t>Usamos a </a:t>
+                  <a:t>a </a:t>
                 </a:r>
                 <a:r>
                   <a:rPr lang="pt-BR" b="1" dirty="0">
@@ -9267,16 +9279,20 @@
                   <a:t> é </a:t>
                 </a:r>
                 <a:r>
-                  <a:rPr lang="pt-BR" b="1" dirty="0">
+                  <a:rPr lang="pt-BR" dirty="0" smtClean="0"/>
+                  <a:t>o </a:t>
+                </a:r>
+                <a:r>
+                  <a:rPr lang="pt-BR" b="1" dirty="0" smtClean="0">
                     <a:solidFill>
                       <a:srgbClr val="7030A0"/>
                     </a:solidFill>
                   </a:rPr>
-                  <a:t>rótulo numérico</a:t>
-                </a:r>
-                <a:r>
-                  <a:rPr lang="pt-BR" dirty="0"/>
-                  <a:t> da </a:t>
+                  <a:t>rótulo escalar </a:t>
+                </a:r>
+                <a:r>
+                  <a:rPr lang="pt-BR" dirty="0" smtClean="0"/>
+                  <a:t>da </a:t>
                 </a:r>
                 <a14:m>
                   <m:oMath xmlns:m="http://schemas.openxmlformats.org/officeDocument/2006/math">
@@ -9513,13 +9529,13 @@
             </p:txBody>
           </p:sp>
         </mc:Choice>
-        <mc:Fallback xmlns="">
+        <mc:Fallback>
           <p:sp>
             <p:nvSpPr>
               <p:cNvPr id="3" name="Content Placeholder 2">
                 <a:extLst>
                   <a:ext uri="{FF2B5EF4-FFF2-40B4-BE49-F238E27FC236}">
-                    <a16:creationId xmlns:a16="http://schemas.microsoft.com/office/drawing/2014/main" id="{34B1DEA3-BAAD-D90C-CD9D-99A5A24F4544}"/>
+                    <a16:creationId xmlns="" xmlns:a16="http://schemas.microsoft.com/office/drawing/2014/main" xmlns:a14="http://schemas.microsoft.com/office/drawing/2010/main" id="{34B1DEA3-BAAD-D90C-CD9D-99A5A24F4544}"/>
                   </a:ext>
                 </a:extLst>
               </p:cNvPr>
@@ -9535,10 +9551,10 @@
                 <a:off x="838199" y="1825624"/>
                 <a:ext cx="11353801" cy="5032375"/>
               </a:xfrm>
-              <a:blipFill>
+              <a:blipFill rotWithShape="0">
                 <a:blip r:embed="rId2"/>
                 <a:stretch>
-                  <a:fillRect l="-1074" t="-2663"/>
+                  <a:fillRect l="-1074" t="-2663" r="-1610"/>
                 </a:stretch>
               </a:blipFill>
             </p:spPr>
@@ -9547,7 +9563,7 @@
               <a:lstStyle/>
               <a:p>
                 <a:r>
-                  <a:rPr lang="en-US">
+                  <a:rPr lang="pt-BR">
                     <a:noFill/>
                   </a:rPr>
                   <a:t> </a:t>
@@ -9592,7 +9608,7 @@
           <p:cNvPr id="2" name="Title 1">
             <a:extLst>
               <a:ext uri="{FF2B5EF4-FFF2-40B4-BE49-F238E27FC236}">
-                <a16:creationId xmlns:a16="http://schemas.microsoft.com/office/drawing/2014/main" xmlns="" id="{997538D5-DC01-EC48-38D2-99D754F1BB92}"/>
+                <a16:creationId xmlns="" xmlns:a16="http://schemas.microsoft.com/office/drawing/2014/main" id="{997538D5-DC01-EC48-38D2-99D754F1BB92}"/>
               </a:ext>
             </a:extLst>
           </p:cNvPr>
@@ -9616,14 +9632,14 @@
           </a:p>
         </p:txBody>
       </p:sp>
-      <mc:AlternateContent xmlns:mc="http://schemas.openxmlformats.org/markup-compatibility/2006" xmlns:a14="http://schemas.microsoft.com/office/drawing/2010/main">
-        <mc:Choice Requires="a14">
+      <mc:AlternateContent xmlns:mc="http://schemas.openxmlformats.org/markup-compatibility/2006">
+        <mc:Choice xmlns:a14="http://schemas.microsoft.com/office/drawing/2010/main" Requires="a14">
           <p:sp>
             <p:nvSpPr>
               <p:cNvPr id="3" name="Content Placeholder 2">
                 <a:extLst>
                   <a:ext uri="{FF2B5EF4-FFF2-40B4-BE49-F238E27FC236}">
-                    <a16:creationId xmlns:a16="http://schemas.microsoft.com/office/drawing/2014/main" xmlns="" id="{17D7928D-3A32-7330-5FDC-756155EF2F3D}"/>
+                    <a16:creationId xmlns="" xmlns:a16="http://schemas.microsoft.com/office/drawing/2014/main" id="{17D7928D-3A32-7330-5FDC-756155EF2F3D}"/>
                   </a:ext>
                 </a:extLst>
               </p:cNvPr>
@@ -10032,8 +10048,20 @@
               </a:p>
               <a:p>
                 <a:r>
+                  <a:rPr lang="pt-BR" dirty="0" smtClean="0"/>
+                  <a:t>A </a:t>
+                </a:r>
+                <a:r>
+                  <a:rPr lang="pt-BR" b="1" dirty="0"/>
+                  <a:t>entropia cruzada categórica </a:t>
+                </a:r>
+                <a:r>
+                  <a:rPr lang="pt-BR" dirty="0" smtClean="0"/>
+                  <a:t>mede </a:t>
+                </a:r>
+                <a:r>
                   <a:rPr lang="pt-BR" dirty="0"/>
-                  <a:t>Essa função mede a </a:t>
+                  <a:t>a </a:t>
                 </a:r>
                 <a:r>
                   <a:rPr lang="pt-BR" b="1" dirty="0">
@@ -10059,13 +10087,13 @@
             </p:txBody>
           </p:sp>
         </mc:Choice>
-        <mc:Fallback xmlns="">
+        <mc:Fallback>
           <p:sp>
             <p:nvSpPr>
               <p:cNvPr id="3" name="Content Placeholder 2">
                 <a:extLst>
                   <a:ext uri="{FF2B5EF4-FFF2-40B4-BE49-F238E27FC236}">
-                    <a16:creationId xmlns:a16="http://schemas.microsoft.com/office/drawing/2014/main" id="{17D7928D-3A32-7330-5FDC-756155EF2F3D}"/>
+                    <a16:creationId xmlns="" xmlns:a16="http://schemas.microsoft.com/office/drawing/2014/main" xmlns:a14="http://schemas.microsoft.com/office/drawing/2010/main" id="{17D7928D-3A32-7330-5FDC-756155EF2F3D}"/>
                   </a:ext>
                 </a:extLst>
               </p:cNvPr>
@@ -10081,10 +10109,10 @@
                 <a:off x="4952246" y="1840372"/>
                 <a:ext cx="7239754" cy="5017627"/>
               </a:xfrm>
-              <a:blipFill>
+              <a:blipFill rotWithShape="0">
                 <a:blip r:embed="rId2"/>
                 <a:stretch>
-                  <a:fillRect l="-1515" t="-122" r="-1010"/>
+                  <a:fillRect l="-1515" r="-1010"/>
                 </a:stretch>
               </a:blipFill>
             </p:spPr>
@@ -10093,7 +10121,7 @@
               <a:lstStyle/>
               <a:p>
                 <a:r>
-                  <a:rPr lang="en-US">
+                  <a:rPr lang="pt-BR">
                     <a:noFill/>
                   </a:rPr>
                   <a:t> </a:t>
@@ -10108,7 +10136,7 @@
           <p:cNvPr id="5" name="Picture 4">
             <a:extLst>
               <a:ext uri="{FF2B5EF4-FFF2-40B4-BE49-F238E27FC236}">
-                <a16:creationId xmlns:a16="http://schemas.microsoft.com/office/drawing/2014/main" xmlns="" id="{4AA09737-BB93-F7AB-8A47-090B362628C6}"/>
+                <a16:creationId xmlns="" xmlns:a16="http://schemas.microsoft.com/office/drawing/2014/main" id="{4AA09737-BB93-F7AB-8A47-090B362628C6}"/>
               </a:ext>
             </a:extLst>
           </p:cNvPr>
@@ -10131,7 +10159,7 @@
         </p:blipFill>
         <p:spPr>
           <a:xfrm>
-            <a:off x="169712" y="2450090"/>
+            <a:off x="379575" y="2585001"/>
             <a:ext cx="4292180" cy="2770936"/>
           </a:xfrm>
           <a:prstGeom prst="rect">
@@ -10174,7 +10202,7 @@
           <p:cNvPr id="2" name="Título 1">
             <a:extLst>
               <a:ext uri="{FF2B5EF4-FFF2-40B4-BE49-F238E27FC236}">
-                <a16:creationId xmlns:a16="http://schemas.microsoft.com/office/drawing/2014/main" xmlns="" id="{1FE7CD05-66F2-8967-6154-CCED38E0F987}"/>
+                <a16:creationId xmlns="" xmlns:a16="http://schemas.microsoft.com/office/drawing/2014/main" id="{1FE7CD05-66F2-8967-6154-CCED38E0F987}"/>
               </a:ext>
             </a:extLst>
           </p:cNvPr>
@@ -10204,7 +10232,7 @@
               <p:cNvPr id="3" name="Espaço Reservado para Conteúdo 2">
                 <a:extLst>
                   <a:ext uri="{FF2B5EF4-FFF2-40B4-BE49-F238E27FC236}">
-                    <a16:creationId xmlns:a16="http://schemas.microsoft.com/office/drawing/2014/main" xmlns="" id="{21A86630-5D79-AD4B-79FC-6C8373E8DB39}"/>
+                    <a16:creationId xmlns="" xmlns:a16="http://schemas.microsoft.com/office/drawing/2014/main" id="{21A86630-5D79-AD4B-79FC-6C8373E8DB39}"/>
                   </a:ext>
                 </a:extLst>
               </p:cNvPr>
@@ -11207,7 +11235,7 @@
           <p:cNvPr id="2" name="Título 1">
             <a:extLst>
               <a:ext uri="{FF2B5EF4-FFF2-40B4-BE49-F238E27FC236}">
-                <a16:creationId xmlns:a16="http://schemas.microsoft.com/office/drawing/2014/main" xmlns="" id="{E4598F11-6F65-0753-89FE-F5ABED77B46A}"/>
+                <a16:creationId xmlns="" xmlns:a16="http://schemas.microsoft.com/office/drawing/2014/main" id="{E4598F11-6F65-0753-89FE-F5ABED77B46A}"/>
               </a:ext>
             </a:extLst>
           </p:cNvPr>
@@ -11231,14 +11259,14 @@
           </a:p>
         </p:txBody>
       </p:sp>
-      <mc:AlternateContent xmlns:mc="http://schemas.openxmlformats.org/markup-compatibility/2006" xmlns:a14="http://schemas.microsoft.com/office/drawing/2010/main">
-        <mc:Choice Requires="a14">
+      <mc:AlternateContent xmlns:mc="http://schemas.openxmlformats.org/markup-compatibility/2006">
+        <mc:Choice xmlns:a14="http://schemas.microsoft.com/office/drawing/2010/main" Requires="a14">
           <p:sp>
             <p:nvSpPr>
               <p:cNvPr id="3" name="Espaço Reservado para Conteúdo 2">
                 <a:extLst>
                   <a:ext uri="{FF2B5EF4-FFF2-40B4-BE49-F238E27FC236}">
-                    <a16:creationId xmlns:a16="http://schemas.microsoft.com/office/drawing/2014/main" xmlns="" id="{FEF4E6DC-E916-D97A-4D18-D469285C4F2C}"/>
+                    <a16:creationId xmlns="" xmlns:a16="http://schemas.microsoft.com/office/drawing/2014/main" id="{FEF4E6DC-E916-D97A-4D18-D469285C4F2C}"/>
                   </a:ext>
                 </a:extLst>
               </p:cNvPr>
@@ -11252,7 +11280,7 @@
             <p:spPr>
               <a:xfrm>
                 <a:off x="838200" y="1825624"/>
-                <a:ext cx="11201400" cy="5032375"/>
+                <a:ext cx="11353800" cy="5032375"/>
               </a:xfrm>
             </p:spPr>
             <p:txBody>
@@ -11616,9 +11644,20 @@
                   </m:oMath>
                 </a14:m>
                 <a:r>
-                  <a:rPr lang="pt-BR" dirty="0"/>
+                  <a:rPr lang="pt-BR" dirty="0" smtClean="0"/>
                   <a:t>.</a:t>
                 </a:r>
+              </a:p>
+              <a:p>
+                <a:pPr lvl="1">
+                  <a:buFont typeface="Wingdings" panose="05000000000000000000" pitchFamily="2" charset="2"/>
+                  <a:buChar char="§"/>
+                </a:pPr>
+                <a:r>
+                  <a:rPr lang="pt-BR" dirty="0" smtClean="0"/>
+                  <a:t>Porém, ao invés de uma única saída escalar, ele apresenta duas saídas, uma para a classe positiva e outra para a negativa.</a:t>
+                </a:r>
+                <a:endParaRPr lang="pt-BR" dirty="0"/>
               </a:p>
               <a:p>
                 <a:r>
@@ -11629,7 +11668,7 @@
             </p:txBody>
           </p:sp>
         </mc:Choice>
-        <mc:Fallback xmlns="">
+        <mc:Fallback>
           <p:sp>
             <p:nvSpPr>
               <p:cNvPr id="3" name="Espaço Reservado para Conteúdo 2">
@@ -11649,12 +11688,12 @@
             <p:spPr>
               <a:xfrm>
                 <a:off x="838200" y="1825624"/>
-                <a:ext cx="11201400" cy="5032375"/>
+                <a:ext cx="11353800" cy="5032375"/>
               </a:xfrm>
               <a:blipFill rotWithShape="0">
                 <a:blip r:embed="rId3"/>
                 <a:stretch>
-                  <a:fillRect l="-980"/>
+                  <a:fillRect l="-967" r="-1611"/>
                 </a:stretch>
               </a:blipFill>
             </p:spPr>
@@ -11708,7 +11747,7 @@
           <p:cNvPr id="2" name="Título 1">
             <a:extLst>
               <a:ext uri="{FF2B5EF4-FFF2-40B4-BE49-F238E27FC236}">
-                <a16:creationId xmlns:a16="http://schemas.microsoft.com/office/drawing/2014/main" xmlns="" id="{D5807923-28D2-8150-E304-526DA460D220}"/>
+                <a16:creationId xmlns="" xmlns:a16="http://schemas.microsoft.com/office/drawing/2014/main" id="{D5807923-28D2-8150-E304-526DA460D220}"/>
               </a:ext>
             </a:extLst>
           </p:cNvPr>
@@ -11737,7 +11776,7 @@
           <p:cNvPr id="3" name="Espaço Reservado para Conteúdo 2">
             <a:extLst>
               <a:ext uri="{FF2B5EF4-FFF2-40B4-BE49-F238E27FC236}">
-                <a16:creationId xmlns:a16="http://schemas.microsoft.com/office/drawing/2014/main" xmlns="" id="{FFACD180-C529-EB91-BD2D-B5F491B1E35C}"/>
+                <a16:creationId xmlns="" xmlns:a16="http://schemas.microsoft.com/office/drawing/2014/main" id="{FFACD180-C529-EB91-BD2D-B5F491B1E35C}"/>
               </a:ext>
             </a:extLst>
           </p:cNvPr>
@@ -11869,7 +11908,7 @@
           <p:cNvPr id="1026" name="Picture 2">
             <a:extLst>
               <a:ext uri="{FF2B5EF4-FFF2-40B4-BE49-F238E27FC236}">
-                <a16:creationId xmlns:a16="http://schemas.microsoft.com/office/drawing/2014/main" xmlns="" id="{6FC2BDE8-91E0-6379-9BA3-76511C6153D5}"/>
+                <a16:creationId xmlns="" xmlns:a16="http://schemas.microsoft.com/office/drawing/2014/main" id="{6FC2BDE8-91E0-6379-9BA3-76511C6153D5}"/>
               </a:ext>
             </a:extLst>
           </p:cNvPr>
@@ -11914,7 +11953,7 @@
           <p:cNvPr id="5" name="Picture 2">
             <a:extLst>
               <a:ext uri="{FF2B5EF4-FFF2-40B4-BE49-F238E27FC236}">
-                <a16:creationId xmlns:a16="http://schemas.microsoft.com/office/drawing/2014/main" xmlns="" id="{2771BE1F-7B74-36A4-AA69-9171B025A4B6}"/>
+                <a16:creationId xmlns="" xmlns:a16="http://schemas.microsoft.com/office/drawing/2014/main" id="{2771BE1F-7B74-36A4-AA69-9171B025A4B6}"/>
               </a:ext>
             </a:extLst>
           </p:cNvPr>
@@ -11989,7 +12028,7 @@
           <p:cNvPr id="2" name="Título 1">
             <a:extLst>
               <a:ext uri="{FF2B5EF4-FFF2-40B4-BE49-F238E27FC236}">
-                <a16:creationId xmlns:a16="http://schemas.microsoft.com/office/drawing/2014/main" xmlns="" id="{5D929962-9BFC-4174-AB35-CC23FA013168}"/>
+                <a16:creationId xmlns="" xmlns:a16="http://schemas.microsoft.com/office/drawing/2014/main" id="{5D929962-9BFC-4174-AB35-CC23FA013168}"/>
               </a:ext>
             </a:extLst>
           </p:cNvPr>
@@ -12020,7 +12059,7 @@
               <p:cNvPr id="3" name="Espaço Reservado para Conteúdo 2">
                 <a:extLst>
                   <a:ext uri="{FF2B5EF4-FFF2-40B4-BE49-F238E27FC236}">
-                    <a16:creationId xmlns:a16="http://schemas.microsoft.com/office/drawing/2014/main" xmlns="" id="{1D38055D-E355-F780-9CA0-0337EA0BE4FD}"/>
+                    <a16:creationId xmlns="" xmlns:a16="http://schemas.microsoft.com/office/drawing/2014/main" id="{1D38055D-E355-F780-9CA0-0337EA0BE4FD}"/>
                   </a:ext>
                 </a:extLst>
               </p:cNvPr>
@@ -13322,7 +13361,7 @@
           <p:cNvPr id="2" name="Título 1">
             <a:extLst>
               <a:ext uri="{FF2B5EF4-FFF2-40B4-BE49-F238E27FC236}">
-                <a16:creationId xmlns:a16="http://schemas.microsoft.com/office/drawing/2014/main" xmlns="" id="{01D0947A-594D-A8D5-95F3-38EB04C6BDB6}"/>
+                <a16:creationId xmlns="" xmlns:a16="http://schemas.microsoft.com/office/drawing/2014/main" id="{01D0947A-594D-A8D5-95F3-38EB04C6BDB6}"/>
               </a:ext>
             </a:extLst>
           </p:cNvPr>
@@ -13356,7 +13395,7 @@
               <p:cNvPr id="3" name="Espaço Reservado para Conteúdo 2">
                 <a:extLst>
                   <a:ext uri="{FF2B5EF4-FFF2-40B4-BE49-F238E27FC236}">
-                    <a16:creationId xmlns:a16="http://schemas.microsoft.com/office/drawing/2014/main" xmlns="" id="{DDBA288E-BBB8-E157-840C-AA685AD7D65C}"/>
+                    <a16:creationId xmlns="" xmlns:a16="http://schemas.microsoft.com/office/drawing/2014/main" id="{DDBA288E-BBB8-E157-840C-AA685AD7D65C}"/>
                   </a:ext>
                 </a:extLst>
               </p:cNvPr>
@@ -14280,7 +14319,7 @@
           <p:cNvPr id="2" name="Título 1">
             <a:extLst>
               <a:ext uri="{FF2B5EF4-FFF2-40B4-BE49-F238E27FC236}">
-                <a16:creationId xmlns:a16="http://schemas.microsoft.com/office/drawing/2014/main" xmlns="" id="{E0F1FD81-6095-2AF0-8691-34E55B8A93B5}"/>
+                <a16:creationId xmlns="" xmlns:a16="http://schemas.microsoft.com/office/drawing/2014/main" id="{E0F1FD81-6095-2AF0-8691-34E55B8A93B5}"/>
               </a:ext>
             </a:extLst>
           </p:cNvPr>
@@ -14314,7 +14353,7 @@
               <p:cNvPr id="3" name="Espaço Reservado para Conteúdo 2">
                 <a:extLst>
                   <a:ext uri="{FF2B5EF4-FFF2-40B4-BE49-F238E27FC236}">
-                    <a16:creationId xmlns:a16="http://schemas.microsoft.com/office/drawing/2014/main" xmlns="" id="{BB734B24-DA50-860B-5D55-C33F6F451B6F}"/>
+                    <a16:creationId xmlns="" xmlns:a16="http://schemas.microsoft.com/office/drawing/2014/main" id="{BB734B24-DA50-860B-5D55-C33F6F451B6F}"/>
                   </a:ext>
                 </a:extLst>
               </p:cNvPr>
@@ -14878,7 +14917,7 @@
           <p:cNvPr id="4" name="Imagem 5">
             <a:extLst>
               <a:ext uri="{FF2B5EF4-FFF2-40B4-BE49-F238E27FC236}">
-                <a16:creationId xmlns:a16="http://schemas.microsoft.com/office/drawing/2014/main" xmlns="" id="{535159CB-11DC-74B8-5C5F-D571CD018327}"/>
+                <a16:creationId xmlns="" xmlns:a16="http://schemas.microsoft.com/office/drawing/2014/main" id="{535159CB-11DC-74B8-5C5F-D571CD018327}"/>
               </a:ext>
             </a:extLst>
           </p:cNvPr>
@@ -14944,7 +14983,7 @@
           <p:cNvPr id="2" name="Título 1">
             <a:extLst>
               <a:ext uri="{FF2B5EF4-FFF2-40B4-BE49-F238E27FC236}">
-                <a16:creationId xmlns:a16="http://schemas.microsoft.com/office/drawing/2014/main" xmlns="" id="{FC175046-E9DF-FCC8-C62B-B00332089713}"/>
+                <a16:creationId xmlns="" xmlns:a16="http://schemas.microsoft.com/office/drawing/2014/main" id="{FC175046-E9DF-FCC8-C62B-B00332089713}"/>
               </a:ext>
             </a:extLst>
           </p:cNvPr>
@@ -14978,7 +15017,7 @@
               <p:cNvPr id="3" name="Espaço Reservado para Conteúdo 2">
                 <a:extLst>
                   <a:ext uri="{FF2B5EF4-FFF2-40B4-BE49-F238E27FC236}">
-                    <a16:creationId xmlns:a16="http://schemas.microsoft.com/office/drawing/2014/main" xmlns="" id="{24721BB7-DBA3-D8BF-7F98-ED91BD59DAEC}"/>
+                    <a16:creationId xmlns="" xmlns:a16="http://schemas.microsoft.com/office/drawing/2014/main" id="{24721BB7-DBA3-D8BF-7F98-ED91BD59DAEC}"/>
                   </a:ext>
                 </a:extLst>
               </p:cNvPr>
@@ -15286,7 +15325,7 @@
           <p:cNvPr id="6" name="Imagem 5">
             <a:extLst>
               <a:ext uri="{FF2B5EF4-FFF2-40B4-BE49-F238E27FC236}">
-                <a16:creationId xmlns:a16="http://schemas.microsoft.com/office/drawing/2014/main" xmlns="" id="{FF78CF76-EB26-3FAE-0391-E452288FA28E}"/>
+                <a16:creationId xmlns="" xmlns:a16="http://schemas.microsoft.com/office/drawing/2014/main" id="{FF78CF76-EB26-3FAE-0391-E452288FA28E}"/>
               </a:ext>
             </a:extLst>
           </p:cNvPr>
@@ -15537,7 +15576,7 @@
           <p:cNvPr id="4" name="Picture 2" descr="Ana Barros (@anathinker) | Twitter">
             <a:extLst>
               <a:ext uri="{FF2B5EF4-FFF2-40B4-BE49-F238E27FC236}">
-                <a16:creationId xmlns:a16="http://schemas.microsoft.com/office/drawing/2014/main" xmlns="" id="{AF3F0044-4F7D-98F6-34C1-8351487DFDAA}"/>
+                <a16:creationId xmlns="" xmlns:a16="http://schemas.microsoft.com/office/drawing/2014/main" id="{AF3F0044-4F7D-98F6-34C1-8351487DFDAA}"/>
               </a:ext>
             </a:extLst>
           </p:cNvPr>
@@ -15584,7 +15623,7 @@
           <p:cNvPr id="5" name="Picture 6" descr="Analyzing Text Classification Techniques on Youtube Data">
             <a:extLst>
               <a:ext uri="{FF2B5EF4-FFF2-40B4-BE49-F238E27FC236}">
-                <a16:creationId xmlns:a16="http://schemas.microsoft.com/office/drawing/2014/main" xmlns="" id="{0E6041F8-AB14-54C0-C790-0288A3AC8FBA}"/>
+                <a16:creationId xmlns="" xmlns:a16="http://schemas.microsoft.com/office/drawing/2014/main" id="{0E6041F8-AB14-54C0-C790-0288A3AC8FBA}"/>
               </a:ext>
             </a:extLst>
           </p:cNvPr>
@@ -15629,7 +15668,7 @@
           <p:cNvPr id="6" name="Picture 2" descr="Sentiment Fig 1">
             <a:extLst>
               <a:ext uri="{FF2B5EF4-FFF2-40B4-BE49-F238E27FC236}">
-                <a16:creationId xmlns:a16="http://schemas.microsoft.com/office/drawing/2014/main" xmlns="" id="{1E7CC96F-55AB-1482-92F6-240F8E2E0D1E}"/>
+                <a16:creationId xmlns="" xmlns:a16="http://schemas.microsoft.com/office/drawing/2014/main" id="{1E7CC96F-55AB-1482-92F6-240F8E2E0D1E}"/>
               </a:ext>
             </a:extLst>
           </p:cNvPr>
@@ -15706,7 +15745,7 @@
           <p:cNvPr id="2" name="Título 1">
             <a:extLst>
               <a:ext uri="{FF2B5EF4-FFF2-40B4-BE49-F238E27FC236}">
-                <a16:creationId xmlns:a16="http://schemas.microsoft.com/office/drawing/2014/main" xmlns="" id="{94AB8438-E56E-2412-517C-8456E4CA773C}"/>
+                <a16:creationId xmlns="" xmlns:a16="http://schemas.microsoft.com/office/drawing/2014/main" id="{94AB8438-E56E-2412-517C-8456E4CA773C}"/>
               </a:ext>
             </a:extLst>
           </p:cNvPr>
@@ -15734,7 +15773,7 @@
           <p:cNvPr id="3" name="Espaço Reservado para Conteúdo 2">
             <a:extLst>
               <a:ext uri="{FF2B5EF4-FFF2-40B4-BE49-F238E27FC236}">
-                <a16:creationId xmlns:a16="http://schemas.microsoft.com/office/drawing/2014/main" xmlns="" id="{F7E2B09C-6D56-4C9F-A364-B904CCE2F1A0}"/>
+                <a16:creationId xmlns="" xmlns:a16="http://schemas.microsoft.com/office/drawing/2014/main" id="{F7E2B09C-6D56-4C9F-A364-B904CCE2F1A0}"/>
               </a:ext>
             </a:extLst>
           </p:cNvPr>
@@ -15771,7 +15810,7 @@
           <p:cNvPr id="18" name="Group 17">
             <a:extLst>
               <a:ext uri="{FF2B5EF4-FFF2-40B4-BE49-F238E27FC236}">
-                <a16:creationId xmlns:a16="http://schemas.microsoft.com/office/drawing/2014/main" xmlns="" id="{627C64FD-88E0-EC8E-2A34-0D5737B4C854}"/>
+                <a16:creationId xmlns="" xmlns:a16="http://schemas.microsoft.com/office/drawing/2014/main" id="{627C64FD-88E0-EC8E-2A34-0D5737B4C854}"/>
               </a:ext>
             </a:extLst>
           </p:cNvPr>
@@ -15791,7 +15830,7 @@
             <p:cNvPr id="12" name="Picture 4" descr="Project Jupyter | Try Jupyter">
               <a:extLst>
                 <a:ext uri="{FF2B5EF4-FFF2-40B4-BE49-F238E27FC236}">
-                  <a16:creationId xmlns:a16="http://schemas.microsoft.com/office/drawing/2014/main" xmlns="" id="{FF92EA36-91E7-292B-D7A0-2D4D83A10F98}"/>
+                  <a16:creationId xmlns="" xmlns:a16="http://schemas.microsoft.com/office/drawing/2014/main" id="{FF92EA36-91E7-292B-D7A0-2D4D83A10F98}"/>
                 </a:ext>
               </a:extLst>
             </p:cNvPr>
@@ -15838,7 +15877,7 @@
             <p:cNvPr id="13" name="Picture 8" descr="Google Colaboratory Colab - Guía Completa Español - Marketing Branding">
               <a:extLst>
                 <a:ext uri="{FF2B5EF4-FFF2-40B4-BE49-F238E27FC236}">
-                  <a16:creationId xmlns:a16="http://schemas.microsoft.com/office/drawing/2014/main" xmlns="" id="{46F1718A-89E6-9E63-E40B-2B19852D6AA0}"/>
+                  <a16:creationId xmlns="" xmlns:a16="http://schemas.microsoft.com/office/drawing/2014/main" id="{46F1718A-89E6-9E63-E40B-2B19852D6AA0}"/>
                 </a:ext>
               </a:extLst>
             </p:cNvPr>
@@ -15883,7 +15922,7 @@
             <p:cNvPr id="14" name="Picture 10" descr="IT12A01: FUNDAMENTALS OF PYTHON PROGRAMMING (SF) (SYNCHRONOUS E-LEARNING) -  NTUC LearningHub">
               <a:extLst>
                 <a:ext uri="{FF2B5EF4-FFF2-40B4-BE49-F238E27FC236}">
-                  <a16:creationId xmlns:a16="http://schemas.microsoft.com/office/drawing/2014/main" xmlns="" id="{33F6B1B4-9B79-D634-3E35-33F24609C848}"/>
+                  <a16:creationId xmlns="" xmlns:a16="http://schemas.microsoft.com/office/drawing/2014/main" id="{33F6B1B4-9B79-D634-3E35-33F24609C848}"/>
                 </a:ext>
               </a:extLst>
             </p:cNvPr>
@@ -15928,7 +15967,7 @@
             <p:cNvPr id="15" name="Sinal de Adição 7">
               <a:extLst>
                 <a:ext uri="{FF2B5EF4-FFF2-40B4-BE49-F238E27FC236}">
-                  <a16:creationId xmlns:a16="http://schemas.microsoft.com/office/drawing/2014/main" xmlns="" id="{6959EE6C-DCDB-E78B-5C50-EBD3FF3049E2}"/>
+                  <a16:creationId xmlns="" xmlns:a16="http://schemas.microsoft.com/office/drawing/2014/main" id="{6959EE6C-DCDB-E78B-5C50-EBD3FF3049E2}"/>
                 </a:ext>
               </a:extLst>
             </p:cNvPr>
@@ -15976,7 +16015,7 @@
             <p:cNvPr id="17" name="Sinal de Adição 10">
               <a:extLst>
                 <a:ext uri="{FF2B5EF4-FFF2-40B4-BE49-F238E27FC236}">
-                  <a16:creationId xmlns:a16="http://schemas.microsoft.com/office/drawing/2014/main" xmlns="" id="{30A21FDB-ABA6-9FD5-49EF-7762414AEF0C}"/>
+                  <a16:creationId xmlns="" xmlns:a16="http://schemas.microsoft.com/office/drawing/2014/main" id="{30A21FDB-ABA6-9FD5-49EF-7762414AEF0C}"/>
                 </a:ext>
               </a:extLst>
             </p:cNvPr>
@@ -16062,7 +16101,7 @@
           <p:cNvPr id="2" name="Title 1">
             <a:extLst>
               <a:ext uri="{FF2B5EF4-FFF2-40B4-BE49-F238E27FC236}">
-                <a16:creationId xmlns:a16="http://schemas.microsoft.com/office/drawing/2014/main" xmlns="" id="{CF49AE95-3E0A-F9BB-A3FD-4C328EF25334}"/>
+                <a16:creationId xmlns="" xmlns:a16="http://schemas.microsoft.com/office/drawing/2014/main" id="{CF49AE95-3E0A-F9BB-A3FD-4C328EF25334}"/>
               </a:ext>
             </a:extLst>
           </p:cNvPr>
@@ -16091,7 +16130,7 @@
           <p:cNvPr id="3" name="Content Placeholder 2">
             <a:extLst>
               <a:ext uri="{FF2B5EF4-FFF2-40B4-BE49-F238E27FC236}">
-                <a16:creationId xmlns:a16="http://schemas.microsoft.com/office/drawing/2014/main" xmlns="" id="{A431927B-FE56-CB25-3ECF-AB5E92A7DC71}"/>
+                <a16:creationId xmlns="" xmlns:a16="http://schemas.microsoft.com/office/drawing/2014/main" id="{A431927B-FE56-CB25-3ECF-AB5E92A7DC71}"/>
               </a:ext>
             </a:extLst>
           </p:cNvPr>
@@ -16180,7 +16219,7 @@
           <p:cNvPr id="4" name="Título 1">
             <a:extLst>
               <a:ext uri="{FF2B5EF4-FFF2-40B4-BE49-F238E27FC236}">
-                <a16:creationId xmlns:a16="http://schemas.microsoft.com/office/drawing/2014/main" xmlns="" id="{32666AC8-2E17-4DB4-B0F5-60C640CCFD2E}"/>
+                <a16:creationId xmlns="" xmlns:a16="http://schemas.microsoft.com/office/drawing/2014/main" id="{32666AC8-2E17-4DB4-B0F5-60C640CCFD2E}"/>
               </a:ext>
             </a:extLst>
           </p:cNvPr>
@@ -16266,7 +16305,7 @@
           <p:cNvPr id="4" name="Título 1">
             <a:extLst>
               <a:ext uri="{FF2B5EF4-FFF2-40B4-BE49-F238E27FC236}">
-                <a16:creationId xmlns:a16="http://schemas.microsoft.com/office/drawing/2014/main" xmlns="" id="{32666AC8-2E17-4DB4-B0F5-60C640CCFD2E}"/>
+                <a16:creationId xmlns="" xmlns:a16="http://schemas.microsoft.com/office/drawing/2014/main" id="{32666AC8-2E17-4DB4-B0F5-60C640CCFD2E}"/>
               </a:ext>
             </a:extLst>
           </p:cNvPr>
@@ -16338,7 +16377,7 @@
         <p:cNvPr id="1" name="">
           <a:extLst>
             <a:ext uri="{FF2B5EF4-FFF2-40B4-BE49-F238E27FC236}">
-              <a16:creationId xmlns:a16="http://schemas.microsoft.com/office/drawing/2014/main" xmlns="" id="{66DA37F4-4ED4-806C-CFDE-46C776755B3A}"/>
+              <a16:creationId xmlns="" xmlns:a16="http://schemas.microsoft.com/office/drawing/2014/main" id="{66DA37F4-4ED4-806C-CFDE-46C776755B3A}"/>
             </a:ext>
           </a:extLst>
         </p:cNvPr>
@@ -16358,7 +16397,7 @@
           <p:cNvPr id="4" name="Título 1">
             <a:extLst>
               <a:ext uri="{FF2B5EF4-FFF2-40B4-BE49-F238E27FC236}">
-                <a16:creationId xmlns:a16="http://schemas.microsoft.com/office/drawing/2014/main" xmlns="" id="{616605E6-566B-D397-B0D6-339FE7F8CB5E}"/>
+                <a16:creationId xmlns="" xmlns:a16="http://schemas.microsoft.com/office/drawing/2014/main" id="{616605E6-566B-D397-B0D6-339FE7F8CB5E}"/>
               </a:ext>
             </a:extLst>
           </p:cNvPr>
@@ -16444,7 +16483,7 @@
           <p:cNvPr id="4" name="Agrupar 22">
             <a:extLst>
               <a:ext uri="{FF2B5EF4-FFF2-40B4-BE49-F238E27FC236}">
-                <a16:creationId xmlns:a16="http://schemas.microsoft.com/office/drawing/2014/main" xmlns="" id="{BDB2E9D3-18AD-6A55-F414-20E01AF3185A}"/>
+                <a16:creationId xmlns="" xmlns:a16="http://schemas.microsoft.com/office/drawing/2014/main" id="{BDB2E9D3-18AD-6A55-F414-20E01AF3185A}"/>
               </a:ext>
             </a:extLst>
           </p:cNvPr>
@@ -16466,7 +16505,7 @@
                 <p:cNvPr id="5" name="CaixaDeTexto 5">
                   <a:extLst>
                     <a:ext uri="{FF2B5EF4-FFF2-40B4-BE49-F238E27FC236}">
-                      <a16:creationId xmlns:a16="http://schemas.microsoft.com/office/drawing/2014/main" xmlns="" id="{AF11FFDB-E923-3C94-D47A-83418BDAD06C}"/>
+                      <a16:creationId xmlns="" xmlns:a16="http://schemas.microsoft.com/office/drawing/2014/main" id="{AF11FFDB-E923-3C94-D47A-83418BDAD06C}"/>
                     </a:ext>
                   </a:extLst>
                 </p:cNvPr>
@@ -16673,7 +16712,7 @@
             <p:cNvPr id="6" name="Agrupar 21">
               <a:extLst>
                 <a:ext uri="{FF2B5EF4-FFF2-40B4-BE49-F238E27FC236}">
-                  <a16:creationId xmlns:a16="http://schemas.microsoft.com/office/drawing/2014/main" xmlns="" id="{0216B346-D594-78F5-A2A5-C50F3A50B5DC}"/>
+                  <a16:creationId xmlns="" xmlns:a16="http://schemas.microsoft.com/office/drawing/2014/main" id="{0216B346-D594-78F5-A2A5-C50F3A50B5DC}"/>
                 </a:ext>
               </a:extLst>
             </p:cNvPr>
@@ -16693,7 +16732,7 @@
               <p:cNvPr id="19" name="Retângulo 6">
                 <a:extLst>
                   <a:ext uri="{FF2B5EF4-FFF2-40B4-BE49-F238E27FC236}">
-                    <a16:creationId xmlns:a16="http://schemas.microsoft.com/office/drawing/2014/main" xmlns="" id="{C45F9961-D53D-BEB9-F54B-3CC4703FA1F8}"/>
+                    <a16:creationId xmlns="" xmlns:a16="http://schemas.microsoft.com/office/drawing/2014/main" id="{C45F9961-D53D-BEB9-F54B-3CC4703FA1F8}"/>
                   </a:ext>
                 </a:extLst>
               </p:cNvPr>
@@ -16747,7 +16786,7 @@
                   <p:cNvPr id="20" name="CaixaDeTexto 7">
                     <a:extLst>
                       <a:ext uri="{FF2B5EF4-FFF2-40B4-BE49-F238E27FC236}">
-                        <a16:creationId xmlns:a16="http://schemas.microsoft.com/office/drawing/2014/main" xmlns="" id="{DD14F424-8D9A-FCFC-0455-7D5B5C6C43F0}"/>
+                        <a16:creationId xmlns="" xmlns:a16="http://schemas.microsoft.com/office/drawing/2014/main" id="{DD14F424-8D9A-FCFC-0455-7D5B5C6C43F0}"/>
                       </a:ext>
                     </a:extLst>
                   </p:cNvPr>
@@ -17011,7 +17050,7 @@
             <p:cNvPr id="7" name="Seta: para a Direita 8">
               <a:extLst>
                 <a:ext uri="{FF2B5EF4-FFF2-40B4-BE49-F238E27FC236}">
-                  <a16:creationId xmlns:a16="http://schemas.microsoft.com/office/drawing/2014/main" xmlns="" id="{D3504EFE-235C-4EED-BD67-1F0134363B33}"/>
+                  <a16:creationId xmlns="" xmlns:a16="http://schemas.microsoft.com/office/drawing/2014/main" id="{D3504EFE-235C-4EED-BD67-1F0134363B33}"/>
                 </a:ext>
               </a:extLst>
             </p:cNvPr>
@@ -17065,7 +17104,7 @@
             <p:cNvPr id="8" name="Seta: para a Direita 9">
               <a:extLst>
                 <a:ext uri="{FF2B5EF4-FFF2-40B4-BE49-F238E27FC236}">
-                  <a16:creationId xmlns:a16="http://schemas.microsoft.com/office/drawing/2014/main" xmlns="" id="{E56F7404-32FC-ED2A-B5D6-AA6AAC63911A}"/>
+                  <a16:creationId xmlns="" xmlns:a16="http://schemas.microsoft.com/office/drawing/2014/main" id="{E56F7404-32FC-ED2A-B5D6-AA6AAC63911A}"/>
                 </a:ext>
               </a:extLst>
             </p:cNvPr>
@@ -17119,7 +17158,7 @@
             <p:cNvPr id="9" name="CaixaDeTexto 10">
               <a:extLst>
                 <a:ext uri="{FF2B5EF4-FFF2-40B4-BE49-F238E27FC236}">
-                  <a16:creationId xmlns:a16="http://schemas.microsoft.com/office/drawing/2014/main" xmlns="" id="{4F9BC649-95D4-52BD-BA63-08F8688BBFD3}"/>
+                  <a16:creationId xmlns="" xmlns:a16="http://schemas.microsoft.com/office/drawing/2014/main" id="{4F9BC649-95D4-52BD-BA63-08F8688BBFD3}"/>
                 </a:ext>
               </a:extLst>
             </p:cNvPr>
@@ -17155,7 +17194,7 @@
             <p:cNvPr id="10" name="CaixaDeTexto 12">
               <a:extLst>
                 <a:ext uri="{FF2B5EF4-FFF2-40B4-BE49-F238E27FC236}">
-                  <a16:creationId xmlns:a16="http://schemas.microsoft.com/office/drawing/2014/main" xmlns="" id="{9C4DD653-BC48-DCA1-5663-281ACCF13641}"/>
+                  <a16:creationId xmlns="" xmlns:a16="http://schemas.microsoft.com/office/drawing/2014/main" id="{9C4DD653-BC48-DCA1-5663-281ACCF13641}"/>
                 </a:ext>
               </a:extLst>
             </p:cNvPr>
@@ -17195,7 +17234,7 @@
             <p:cNvPr id="11" name="Agrupar 20">
               <a:extLst>
                 <a:ext uri="{FF2B5EF4-FFF2-40B4-BE49-F238E27FC236}">
-                  <a16:creationId xmlns:a16="http://schemas.microsoft.com/office/drawing/2014/main" xmlns="" id="{1FBA146D-CAB5-65CA-C09C-DFAE2CF0121E}"/>
+                  <a16:creationId xmlns="" xmlns:a16="http://schemas.microsoft.com/office/drawing/2014/main" id="{1FBA146D-CAB5-65CA-C09C-DFAE2CF0121E}"/>
                 </a:ext>
               </a:extLst>
             </p:cNvPr>
@@ -17217,7 +17256,7 @@
                   <p:cNvPr id="12" name="CaixaDeTexto 4">
                     <a:extLst>
                       <a:ext uri="{FF2B5EF4-FFF2-40B4-BE49-F238E27FC236}">
-                        <a16:creationId xmlns:a16="http://schemas.microsoft.com/office/drawing/2014/main" xmlns="" id="{43C8BB8A-C849-2483-4102-05D4F8A25AE9}"/>
+                        <a16:creationId xmlns="" xmlns:a16="http://schemas.microsoft.com/office/drawing/2014/main" id="{43C8BB8A-C849-2483-4102-05D4F8A25AE9}"/>
                       </a:ext>
                     </a:extLst>
                   </p:cNvPr>
@@ -17426,7 +17465,7 @@
                   <p:cNvPr id="13" name="CaixaDeTexto 11">
                     <a:extLst>
                       <a:ext uri="{FF2B5EF4-FFF2-40B4-BE49-F238E27FC236}">
-                        <a16:creationId xmlns:a16="http://schemas.microsoft.com/office/drawing/2014/main" xmlns="" id="{AF290EB5-D075-77C8-B194-538454B60861}"/>
+                        <a16:creationId xmlns="" xmlns:a16="http://schemas.microsoft.com/office/drawing/2014/main" id="{AF290EB5-D075-77C8-B194-538454B60861}"/>
                       </a:ext>
                     </a:extLst>
                   </p:cNvPr>
@@ -17517,14 +17556,14 @@
               </p:sp>
             </mc:Fallback>
           </mc:AlternateContent>
-          <mc:AlternateContent xmlns:mc="http://schemas.openxmlformats.org/markup-compatibility/2006" xmlns:a14="http://schemas.microsoft.com/office/drawing/2010/main">
-            <mc:Choice Requires="a14">
+          <mc:AlternateContent xmlns:mc="http://schemas.openxmlformats.org/markup-compatibility/2006">
+            <mc:Choice xmlns:a14="http://schemas.microsoft.com/office/drawing/2010/main" Requires="a14">
               <p:sp>
                 <p:nvSpPr>
                   <p:cNvPr id="14" name="CaixaDeTexto 14">
                     <a:extLst>
                       <a:ext uri="{FF2B5EF4-FFF2-40B4-BE49-F238E27FC236}">
-                        <a16:creationId xmlns:a16="http://schemas.microsoft.com/office/drawing/2014/main" xmlns="" id="{34981BFA-7FF1-3BFF-417B-6F22F9C69AF2}"/>
+                        <a16:creationId xmlns="" xmlns:a16="http://schemas.microsoft.com/office/drawing/2014/main" id="{34981BFA-7FF1-3BFF-417B-6F22F9C69AF2}"/>
                       </a:ext>
                     </a:extLst>
                   </p:cNvPr>
@@ -17534,6 +17573,139 @@
                 <p:spPr>
                   <a:xfrm>
                     <a:off x="1558411" y="4328926"/>
+                    <a:ext cx="786581" cy="338554"/>
+                  </a:xfrm>
+                  <a:prstGeom prst="rect">
+                    <a:avLst/>
+                  </a:prstGeom>
+                  <a:noFill/>
+                </p:spPr>
+                <p:txBody>
+                  <a:bodyPr wrap="square">
+                    <a:spAutoFit/>
+                  </a:bodyPr>
+                  <a:lstStyle/>
+                  <a:p>
+                    <a:pPr/>
+                    <a14:m>
+                      <m:oMathPara xmlns:m="http://schemas.openxmlformats.org/officeDocument/2006/math">
+                        <m:oMathParaPr>
+                          <m:jc m:val="centerGroup"/>
+                        </m:oMathParaPr>
+                        <m:oMath xmlns:m="http://schemas.openxmlformats.org/officeDocument/2006/math">
+                          <m:sSub>
+                            <m:sSubPr>
+                              <m:ctrlPr>
+                                <a:rPr lang="pt-BR" sz="1600" i="1" smtClean="0">
+                                  <a:latin typeface="Cambria Math" panose="02040503050406030204" pitchFamily="18" charset="0"/>
+                                </a:rPr>
+                              </m:ctrlPr>
+                            </m:sSubPr>
+                            <m:e>
+                              <m:r>
+                                <a:rPr lang="pt-BR" sz="1600" i="1">
+                                  <a:latin typeface="Cambria Math" panose="02040503050406030204" pitchFamily="18" charset="0"/>
+                                </a:rPr>
+                                <m:t>𝑔</m:t>
+                              </m:r>
+                            </m:e>
+                            <m:sub>
+                              <m:r>
+                                <a:rPr lang="pt-BR" sz="1600" b="0" i="1" smtClean="0">
+                                  <a:latin typeface="Cambria Math" panose="02040503050406030204" pitchFamily="18" charset="0"/>
+                                </a:rPr>
+                                <m:t>0</m:t>
+                              </m:r>
+                            </m:sub>
+                          </m:sSub>
+                          <m:r>
+                            <a:rPr lang="pt-BR" sz="1600" i="1">
+                              <a:latin typeface="Cambria Math" panose="02040503050406030204" pitchFamily="18" charset="0"/>
+                            </a:rPr>
+                            <m:t>(</m:t>
+                          </m:r>
+                          <m:r>
+                            <a:rPr lang="pt-BR" sz="1600" b="1" i="1">
+                              <a:latin typeface="Cambria Math" panose="02040503050406030204" pitchFamily="18" charset="0"/>
+                            </a:rPr>
+                            <m:t>𝒙</m:t>
+                          </m:r>
+                          <m:r>
+                            <a:rPr lang="pt-BR" sz="1600" i="1">
+                              <a:latin typeface="Cambria Math" panose="02040503050406030204" pitchFamily="18" charset="0"/>
+                            </a:rPr>
+                            <m:t>)</m:t>
+                          </m:r>
+                        </m:oMath>
+                      </m:oMathPara>
+                    </a14:m>
+                    <a:endParaRPr lang="pt-BR" sz="1600" dirty="0"/>
+                  </a:p>
+                </p:txBody>
+              </p:sp>
+            </mc:Choice>
+            <mc:Fallback>
+              <p:sp>
+                <p:nvSpPr>
+                  <p:cNvPr id="14" name="CaixaDeTexto 14">
+                    <a:extLst>
+                      <a:ext uri="{FF2B5EF4-FFF2-40B4-BE49-F238E27FC236}">
+                        <a16:creationId xmlns="" xmlns:a16="http://schemas.microsoft.com/office/drawing/2014/main" xmlns:a14="http://schemas.microsoft.com/office/drawing/2010/main" id="{34981BFA-7FF1-3BFF-417B-6F22F9C69AF2}"/>
+                      </a:ext>
+                    </a:extLst>
+                  </p:cNvPr>
+                  <p:cNvSpPr txBox="1">
+                    <a:spLocks noRot="1" noChangeAspect="1" noMove="1" noResize="1" noEditPoints="1" noAdjustHandles="1" noChangeArrowheads="1" noChangeShapeType="1" noTextEdit="1"/>
+                  </p:cNvSpPr>
+                  <p:nvPr/>
+                </p:nvSpPr>
+                <p:spPr>
+                  <a:xfrm>
+                    <a:off x="1558411" y="4328926"/>
+                    <a:ext cx="786581" cy="338554"/>
+                  </a:xfrm>
+                  <a:prstGeom prst="rect">
+                    <a:avLst/>
+                  </a:prstGeom>
+                  <a:blipFill rotWithShape="0">
+                    <a:blip r:embed="rId6"/>
+                    <a:stretch>
+                      <a:fillRect b="-10909"/>
+                    </a:stretch>
+                  </a:blipFill>
+                </p:spPr>
+                <p:txBody>
+                  <a:bodyPr/>
+                  <a:lstStyle/>
+                  <a:p>
+                    <a:r>
+                      <a:rPr lang="pt-BR">
+                        <a:noFill/>
+                      </a:rPr>
+                      <a:t> </a:t>
+                    </a:r>
+                  </a:p>
+                </p:txBody>
+              </p:sp>
+            </mc:Fallback>
+          </mc:AlternateContent>
+          <mc:AlternateContent xmlns:mc="http://schemas.openxmlformats.org/markup-compatibility/2006">
+            <mc:Choice xmlns:a14="http://schemas.microsoft.com/office/drawing/2010/main" Requires="a14">
+              <p:sp>
+                <p:nvSpPr>
+                  <p:cNvPr id="15" name="CaixaDeTexto 15">
+                    <a:extLst>
+                      <a:ext uri="{FF2B5EF4-FFF2-40B4-BE49-F238E27FC236}">
+                        <a16:creationId xmlns="" xmlns:a16="http://schemas.microsoft.com/office/drawing/2014/main" id="{DB8F6DFA-2208-43E8-18F4-BC5ACFDCAE49}"/>
+                      </a:ext>
+                    </a:extLst>
+                  </p:cNvPr>
+                  <p:cNvSpPr txBox="1"/>
+                  <p:nvPr/>
+                </p:nvSpPr>
+                <p:spPr>
+                  <a:xfrm>
+                    <a:off x="1558411" y="4711915"/>
                     <a:ext cx="786581" cy="338554"/>
                   </a:xfrm>
                   <a:prstGeom prst="rect">
@@ -17605,13 +17777,13 @@
                 </p:txBody>
               </p:sp>
             </mc:Choice>
-            <mc:Fallback xmlns="">
+            <mc:Fallback>
               <p:sp>
                 <p:nvSpPr>
-                  <p:cNvPr id="15" name="CaixaDeTexto 14">
+                  <p:cNvPr id="15" name="CaixaDeTexto 15">
                     <a:extLst>
                       <a:ext uri="{FF2B5EF4-FFF2-40B4-BE49-F238E27FC236}">
-                        <a16:creationId xmlns:a16="http://schemas.microsoft.com/office/drawing/2014/main" id="{21996556-5E1C-0532-ED2B-D417F96263BF}"/>
+                        <a16:creationId xmlns="" xmlns:a16="http://schemas.microsoft.com/office/drawing/2014/main" xmlns:a14="http://schemas.microsoft.com/office/drawing/2010/main" id="{DB8F6DFA-2208-43E8-18F4-BC5ACFDCAE49}"/>
                       </a:ext>
                     </a:extLst>
                   </p:cNvPr>
@@ -17622,14 +17794,14 @@
                 </p:nvSpPr>
                 <p:spPr>
                   <a:xfrm>
-                    <a:off x="1558411" y="4328926"/>
+                    <a:off x="1558411" y="4711915"/>
                     <a:ext cx="786581" cy="338554"/>
                   </a:xfrm>
                   <a:prstGeom prst="rect">
                     <a:avLst/>
                   </a:prstGeom>
-                  <a:blipFill>
-                    <a:blip r:embed="rId6"/>
+                  <a:blipFill rotWithShape="0">
+                    <a:blip r:embed="rId7"/>
                     <a:stretch>
                       <a:fillRect b="-10909"/>
                     </a:stretch>
@@ -17650,14 +17822,14 @@
               </p:sp>
             </mc:Fallback>
           </mc:AlternateContent>
-          <mc:AlternateContent xmlns:mc="http://schemas.openxmlformats.org/markup-compatibility/2006" xmlns:a14="http://schemas.microsoft.com/office/drawing/2010/main">
-            <mc:Choice Requires="a14">
+          <mc:AlternateContent xmlns:mc="http://schemas.openxmlformats.org/markup-compatibility/2006">
+            <mc:Choice xmlns:a14="http://schemas.microsoft.com/office/drawing/2010/main" Requires="a14">
               <p:sp>
                 <p:nvSpPr>
-                  <p:cNvPr id="15" name="CaixaDeTexto 15">
+                  <p:cNvPr id="16" name="CaixaDeTexto 16">
                     <a:extLst>
                       <a:ext uri="{FF2B5EF4-FFF2-40B4-BE49-F238E27FC236}">
-                        <a16:creationId xmlns:a16="http://schemas.microsoft.com/office/drawing/2014/main" xmlns="" id="{DB8F6DFA-2208-43E8-18F4-BC5ACFDCAE49}"/>
+                        <a16:creationId xmlns="" xmlns:a16="http://schemas.microsoft.com/office/drawing/2014/main" id="{A5EC037D-8EF0-3DEF-2F8B-84248AE8B86A}"/>
                       </a:ext>
                     </a:extLst>
                   </p:cNvPr>
@@ -17666,7 +17838,7 @@
                 </p:nvSpPr>
                 <p:spPr>
                   <a:xfrm>
-                    <a:off x="1558411" y="4711915"/>
+                    <a:off x="1558411" y="5081651"/>
                     <a:ext cx="786581" cy="338554"/>
                   </a:xfrm>
                   <a:prstGeom prst="rect">
@@ -17738,13 +17910,13 @@
                 </p:txBody>
               </p:sp>
             </mc:Choice>
-            <mc:Fallback xmlns="">
+            <mc:Fallback>
               <p:sp>
                 <p:nvSpPr>
-                  <p:cNvPr id="16" name="CaixaDeTexto 15">
+                  <p:cNvPr id="16" name="CaixaDeTexto 16">
                     <a:extLst>
                       <a:ext uri="{FF2B5EF4-FFF2-40B4-BE49-F238E27FC236}">
-                        <a16:creationId xmlns:a16="http://schemas.microsoft.com/office/drawing/2014/main" id="{56799DC0-EC54-BFAE-A5C1-F9419AAD72E7}"/>
+                        <a16:creationId xmlns="" xmlns:a16="http://schemas.microsoft.com/office/drawing/2014/main" xmlns:a14="http://schemas.microsoft.com/office/drawing/2010/main" id="{A5EC037D-8EF0-3DEF-2F8B-84248AE8B86A}"/>
                       </a:ext>
                     </a:extLst>
                   </p:cNvPr>
@@ -17755,16 +17927,16 @@
                 </p:nvSpPr>
                 <p:spPr>
                   <a:xfrm>
-                    <a:off x="1558411" y="4711915"/>
+                    <a:off x="1558411" y="5081651"/>
                     <a:ext cx="786581" cy="338554"/>
                   </a:xfrm>
                   <a:prstGeom prst="rect">
                     <a:avLst/>
                   </a:prstGeom>
-                  <a:blipFill>
-                    <a:blip r:embed="rId7"/>
+                  <a:blipFill rotWithShape="0">
+                    <a:blip r:embed="rId8"/>
                     <a:stretch>
-                      <a:fillRect b="-10909"/>
+                      <a:fillRect b="-8929"/>
                     </a:stretch>
                   </a:blipFill>
                 </p:spPr>
@@ -17783,14 +17955,14 @@
               </p:sp>
             </mc:Fallback>
           </mc:AlternateContent>
-          <mc:AlternateContent xmlns:mc="http://schemas.openxmlformats.org/markup-compatibility/2006" xmlns:a14="http://schemas.microsoft.com/office/drawing/2010/main">
-            <mc:Choice Requires="a14">
+          <mc:AlternateContent xmlns:mc="http://schemas.openxmlformats.org/markup-compatibility/2006">
+            <mc:Choice xmlns:a14="http://schemas.microsoft.com/office/drawing/2010/main" Requires="a14">
               <p:sp>
                 <p:nvSpPr>
-                  <p:cNvPr id="16" name="CaixaDeTexto 16">
+                  <p:cNvPr id="17" name="CaixaDeTexto 17">
                     <a:extLst>
                       <a:ext uri="{FF2B5EF4-FFF2-40B4-BE49-F238E27FC236}">
-                        <a16:creationId xmlns:a16="http://schemas.microsoft.com/office/drawing/2014/main" xmlns="" id="{A5EC037D-8EF0-3DEF-2F8B-84248AE8B86A}"/>
+                        <a16:creationId xmlns="" xmlns:a16="http://schemas.microsoft.com/office/drawing/2014/main" id="{E842A6BA-1A35-A84A-B1B8-54B2C0A49661}"/>
                       </a:ext>
                     </a:extLst>
                   </p:cNvPr>
@@ -17799,7 +17971,7 @@
                 </p:nvSpPr>
                 <p:spPr>
                   <a:xfrm>
-                    <a:off x="1558411" y="5081651"/>
+                    <a:off x="1558412" y="5483258"/>
                     <a:ext cx="786581" cy="338554"/>
                   </a:xfrm>
                   <a:prstGeom prst="rect">
@@ -17871,13 +18043,13 @@
                 </p:txBody>
               </p:sp>
             </mc:Choice>
-            <mc:Fallback xmlns="">
+            <mc:Fallback>
               <p:sp>
                 <p:nvSpPr>
-                  <p:cNvPr id="17" name="CaixaDeTexto 16">
+                  <p:cNvPr id="17" name="CaixaDeTexto 17">
                     <a:extLst>
                       <a:ext uri="{FF2B5EF4-FFF2-40B4-BE49-F238E27FC236}">
-                        <a16:creationId xmlns:a16="http://schemas.microsoft.com/office/drawing/2014/main" id="{D260C477-09FF-3E43-480D-BA56F3E968FB}"/>
+                        <a16:creationId xmlns="" xmlns:a16="http://schemas.microsoft.com/office/drawing/2014/main" xmlns:a14="http://schemas.microsoft.com/office/drawing/2010/main" id="{E842A6BA-1A35-A84A-B1B8-54B2C0A49661}"/>
                       </a:ext>
                     </a:extLst>
                   </p:cNvPr>
@@ -17888,14 +18060,14 @@
                 </p:nvSpPr>
                 <p:spPr>
                   <a:xfrm>
-                    <a:off x="1558411" y="5081651"/>
+                    <a:off x="1558412" y="5483258"/>
                     <a:ext cx="786581" cy="338554"/>
                   </a:xfrm>
                   <a:prstGeom prst="rect">
                     <a:avLst/>
                   </a:prstGeom>
-                  <a:blipFill>
-                    <a:blip r:embed="rId8"/>
+                  <a:blipFill rotWithShape="0">
+                    <a:blip r:embed="rId9"/>
                     <a:stretch>
                       <a:fillRect b="-8929"/>
                     </a:stretch>
@@ -17916,14 +18088,14 @@
               </p:sp>
             </mc:Fallback>
           </mc:AlternateContent>
-          <mc:AlternateContent xmlns:mc="http://schemas.openxmlformats.org/markup-compatibility/2006" xmlns:a14="http://schemas.microsoft.com/office/drawing/2010/main">
-            <mc:Choice Requires="a14">
+          <mc:AlternateContent xmlns:mc="http://schemas.openxmlformats.org/markup-compatibility/2006">
+            <mc:Choice xmlns:a14="http://schemas.microsoft.com/office/drawing/2010/main" Requires="a14">
               <p:sp>
                 <p:nvSpPr>
-                  <p:cNvPr id="17" name="CaixaDeTexto 17">
+                  <p:cNvPr id="18" name="CaixaDeTexto 18">
                     <a:extLst>
                       <a:ext uri="{FF2B5EF4-FFF2-40B4-BE49-F238E27FC236}">
-                        <a16:creationId xmlns:a16="http://schemas.microsoft.com/office/drawing/2014/main" xmlns="" id="{E842A6BA-1A35-A84A-B1B8-54B2C0A49661}"/>
+                        <a16:creationId xmlns="" xmlns:a16="http://schemas.microsoft.com/office/drawing/2014/main" id="{AE06ADE1-A3FE-3684-A19B-1A4A69C1E4AB}"/>
                       </a:ext>
                     </a:extLst>
                   </p:cNvPr>
@@ -17932,7 +18104,7 @@
                 </p:nvSpPr>
                 <p:spPr>
                   <a:xfrm>
-                    <a:off x="1558412" y="5483258"/>
+                    <a:off x="1558411" y="5874947"/>
                     <a:ext cx="786581" cy="338554"/>
                   </a:xfrm>
                   <a:prstGeom prst="rect">
@@ -18004,146 +18176,13 @@
                 </p:txBody>
               </p:sp>
             </mc:Choice>
-            <mc:Fallback xmlns="">
-              <p:sp>
-                <p:nvSpPr>
-                  <p:cNvPr id="18" name="CaixaDeTexto 17">
-                    <a:extLst>
-                      <a:ext uri="{FF2B5EF4-FFF2-40B4-BE49-F238E27FC236}">
-                        <a16:creationId xmlns:a16="http://schemas.microsoft.com/office/drawing/2014/main" id="{D39B43A7-A1EB-24AB-D6A2-C63A54430649}"/>
-                      </a:ext>
-                    </a:extLst>
-                  </p:cNvPr>
-                  <p:cNvSpPr txBox="1">
-                    <a:spLocks noRot="1" noChangeAspect="1" noMove="1" noResize="1" noEditPoints="1" noAdjustHandles="1" noChangeArrowheads="1" noChangeShapeType="1" noTextEdit="1"/>
-                  </p:cNvSpPr>
-                  <p:nvPr/>
-                </p:nvSpPr>
-                <p:spPr>
-                  <a:xfrm>
-                    <a:off x="1558412" y="5483258"/>
-                    <a:ext cx="786581" cy="338554"/>
-                  </a:xfrm>
-                  <a:prstGeom prst="rect">
-                    <a:avLst/>
-                  </a:prstGeom>
-                  <a:blipFill>
-                    <a:blip r:embed="rId9"/>
-                    <a:stretch>
-                      <a:fillRect b="-8929"/>
-                    </a:stretch>
-                  </a:blipFill>
-                </p:spPr>
-                <p:txBody>
-                  <a:bodyPr/>
-                  <a:lstStyle/>
-                  <a:p>
-                    <a:r>
-                      <a:rPr lang="pt-BR">
-                        <a:noFill/>
-                      </a:rPr>
-                      <a:t> </a:t>
-                    </a:r>
-                  </a:p>
-                </p:txBody>
-              </p:sp>
-            </mc:Fallback>
-          </mc:AlternateContent>
-          <mc:AlternateContent xmlns:mc="http://schemas.openxmlformats.org/markup-compatibility/2006" xmlns:a14="http://schemas.microsoft.com/office/drawing/2010/main">
-            <mc:Choice Requires="a14">
+            <mc:Fallback>
               <p:sp>
                 <p:nvSpPr>
                   <p:cNvPr id="18" name="CaixaDeTexto 18">
                     <a:extLst>
                       <a:ext uri="{FF2B5EF4-FFF2-40B4-BE49-F238E27FC236}">
-                        <a16:creationId xmlns:a16="http://schemas.microsoft.com/office/drawing/2014/main" xmlns="" id="{AE06ADE1-A3FE-3684-A19B-1A4A69C1E4AB}"/>
-                      </a:ext>
-                    </a:extLst>
-                  </p:cNvPr>
-                  <p:cNvSpPr txBox="1"/>
-                  <p:nvPr/>
-                </p:nvSpPr>
-                <p:spPr>
-                  <a:xfrm>
-                    <a:off x="1558411" y="5874947"/>
-                    <a:ext cx="786581" cy="338554"/>
-                  </a:xfrm>
-                  <a:prstGeom prst="rect">
-                    <a:avLst/>
-                  </a:prstGeom>
-                  <a:noFill/>
-                </p:spPr>
-                <p:txBody>
-                  <a:bodyPr wrap="square">
-                    <a:spAutoFit/>
-                  </a:bodyPr>
-                  <a:lstStyle/>
-                  <a:p>
-                    <a:pPr/>
-                    <a14:m>
-                      <m:oMathPara xmlns:m="http://schemas.openxmlformats.org/officeDocument/2006/math">
-                        <m:oMathParaPr>
-                          <m:jc m:val="centerGroup"/>
-                        </m:oMathParaPr>
-                        <m:oMath xmlns:m="http://schemas.openxmlformats.org/officeDocument/2006/math">
-                          <m:sSub>
-                            <m:sSubPr>
-                              <m:ctrlPr>
-                                <a:rPr lang="pt-BR" sz="1600" i="1" smtClean="0">
-                                  <a:latin typeface="Cambria Math" panose="02040503050406030204" pitchFamily="18" charset="0"/>
-                                </a:rPr>
-                              </m:ctrlPr>
-                            </m:sSubPr>
-                            <m:e>
-                              <m:r>
-                                <a:rPr lang="pt-BR" sz="1600" i="1">
-                                  <a:latin typeface="Cambria Math" panose="02040503050406030204" pitchFamily="18" charset="0"/>
-                                </a:rPr>
-                                <m:t>𝑔</m:t>
-                              </m:r>
-                            </m:e>
-                            <m:sub>
-                              <m:r>
-                                <a:rPr lang="pt-BR" sz="1600" b="0" i="1" smtClean="0">
-                                  <a:latin typeface="Cambria Math" panose="02040503050406030204" pitchFamily="18" charset="0"/>
-                                </a:rPr>
-                                <m:t>5</m:t>
-                              </m:r>
-                            </m:sub>
-                          </m:sSub>
-                          <m:r>
-                            <a:rPr lang="pt-BR" sz="1600" i="1">
-                              <a:latin typeface="Cambria Math" panose="02040503050406030204" pitchFamily="18" charset="0"/>
-                            </a:rPr>
-                            <m:t>(</m:t>
-                          </m:r>
-                          <m:r>
-                            <a:rPr lang="pt-BR" sz="1600" b="1" i="1">
-                              <a:latin typeface="Cambria Math" panose="02040503050406030204" pitchFamily="18" charset="0"/>
-                            </a:rPr>
-                            <m:t>𝒙</m:t>
-                          </m:r>
-                          <m:r>
-                            <a:rPr lang="pt-BR" sz="1600" i="1">
-                              <a:latin typeface="Cambria Math" panose="02040503050406030204" pitchFamily="18" charset="0"/>
-                            </a:rPr>
-                            <m:t>)</m:t>
-                          </m:r>
-                        </m:oMath>
-                      </m:oMathPara>
-                    </a14:m>
-                    <a:endParaRPr lang="pt-BR" sz="1600" dirty="0"/>
-                  </a:p>
-                </p:txBody>
-              </p:sp>
-            </mc:Choice>
-            <mc:Fallback xmlns="">
-              <p:sp>
-                <p:nvSpPr>
-                  <p:cNvPr id="19" name="CaixaDeTexto 18">
-                    <a:extLst>
-                      <a:ext uri="{FF2B5EF4-FFF2-40B4-BE49-F238E27FC236}">
-                        <a16:creationId xmlns:a16="http://schemas.microsoft.com/office/drawing/2014/main" id="{F4C19D8A-53B6-E387-20AE-D331C04A4541}"/>
+                        <a16:creationId xmlns="" xmlns:a16="http://schemas.microsoft.com/office/drawing/2014/main" xmlns:a14="http://schemas.microsoft.com/office/drawing/2010/main" id="{AE06ADE1-A3FE-3684-A19B-1A4A69C1E4AB}"/>
                       </a:ext>
                     </a:extLst>
                   </p:cNvPr>
@@ -18160,7 +18199,7 @@
                   <a:prstGeom prst="rect">
                     <a:avLst/>
                   </a:prstGeom>
-                  <a:blipFill>
+                  <a:blipFill rotWithShape="0">
                     <a:blip r:embed="rId10"/>
                     <a:stretch>
                       <a:fillRect b="-8929"/>
@@ -18205,7 +18244,7 @@
         <p:cNvPr id="1" name="">
           <a:extLst>
             <a:ext uri="{FF2B5EF4-FFF2-40B4-BE49-F238E27FC236}">
-              <a16:creationId xmlns:a16="http://schemas.microsoft.com/office/drawing/2014/main" xmlns="" id="{5C4572DC-35C8-C64C-E103-3D4F9246EA98}"/>
+              <a16:creationId xmlns="" xmlns:a16="http://schemas.microsoft.com/office/drawing/2014/main" id="{5C4572DC-35C8-C64C-E103-3D4F9246EA98}"/>
             </a:ext>
           </a:extLst>
         </p:cNvPr>
@@ -18225,7 +18264,7 @@
           <p:cNvPr id="36" name="Group 35">
             <a:extLst>
               <a:ext uri="{FF2B5EF4-FFF2-40B4-BE49-F238E27FC236}">
-                <a16:creationId xmlns:a16="http://schemas.microsoft.com/office/drawing/2014/main" xmlns="" id="{48F378AC-D060-0026-4561-6496453280FF}"/>
+                <a16:creationId xmlns="" xmlns:a16="http://schemas.microsoft.com/office/drawing/2014/main" id="{48F378AC-D060-0026-4561-6496453280FF}"/>
               </a:ext>
             </a:extLst>
           </p:cNvPr>
@@ -18247,7 +18286,7 @@
                 <p:cNvPr id="5" name="CaixaDeTexto 5">
                   <a:extLst>
                     <a:ext uri="{FF2B5EF4-FFF2-40B4-BE49-F238E27FC236}">
-                      <a16:creationId xmlns:a16="http://schemas.microsoft.com/office/drawing/2014/main" xmlns="" id="{E8D0D67D-860E-2510-92FC-57A520894F28}"/>
+                      <a16:creationId xmlns="" xmlns:a16="http://schemas.microsoft.com/office/drawing/2014/main" id="{E8D0D67D-860E-2510-92FC-57A520894F28}"/>
                     </a:ext>
                   </a:extLst>
                 </p:cNvPr>
@@ -18454,7 +18493,7 @@
             <p:cNvPr id="9" name="CaixaDeTexto 10">
               <a:extLst>
                 <a:ext uri="{FF2B5EF4-FFF2-40B4-BE49-F238E27FC236}">
-                  <a16:creationId xmlns:a16="http://schemas.microsoft.com/office/drawing/2014/main" xmlns="" id="{E297B5F7-3383-6E2F-1D8A-03955FAC43D2}"/>
+                  <a16:creationId xmlns="" xmlns:a16="http://schemas.microsoft.com/office/drawing/2014/main" id="{E297B5F7-3383-6E2F-1D8A-03955FAC43D2}"/>
                 </a:ext>
               </a:extLst>
             </p:cNvPr>
@@ -18504,7 +18543,7 @@
                 <p:cNvPr id="12" name="CaixaDeTexto 4">
                   <a:extLst>
                     <a:ext uri="{FF2B5EF4-FFF2-40B4-BE49-F238E27FC236}">
-                      <a16:creationId xmlns:a16="http://schemas.microsoft.com/office/drawing/2014/main" xmlns="" id="{2C8DDC51-3A16-5E93-8268-EE62BDE151E0}"/>
+                      <a16:creationId xmlns="" xmlns:a16="http://schemas.microsoft.com/office/drawing/2014/main" id="{2C8DDC51-3A16-5E93-8268-EE62BDE151E0}"/>
                     </a:ext>
                   </a:extLst>
                 </p:cNvPr>
@@ -18693,7 +18732,7 @@
             <p:cNvPr id="2" name="Rectangle 1">
               <a:extLst>
                 <a:ext uri="{FF2B5EF4-FFF2-40B4-BE49-F238E27FC236}">
-                  <a16:creationId xmlns:a16="http://schemas.microsoft.com/office/drawing/2014/main" xmlns="" id="{EB611083-738F-80C1-2BA7-92EDB40EFB94}"/>
+                  <a16:creationId xmlns="" xmlns:a16="http://schemas.microsoft.com/office/drawing/2014/main" id="{EB611083-738F-80C1-2BA7-92EDB40EFB94}"/>
                 </a:ext>
               </a:extLst>
             </p:cNvPr>
@@ -18757,7 +18796,7 @@
             <p:cNvPr id="3" name="CaixaDeTexto 10">
               <a:extLst>
                 <a:ext uri="{FF2B5EF4-FFF2-40B4-BE49-F238E27FC236}">
-                  <a16:creationId xmlns:a16="http://schemas.microsoft.com/office/drawing/2014/main" xmlns="" id="{F0E4EAFE-2F57-D46C-B71A-FC2B97DD9DC3}"/>
+                  <a16:creationId xmlns="" xmlns:a16="http://schemas.microsoft.com/office/drawing/2014/main" id="{F0E4EAFE-2F57-D46C-B71A-FC2B97DD9DC3}"/>
                 </a:ext>
               </a:extLst>
             </p:cNvPr>
@@ -18805,7 +18844,7 @@
             <p:cNvPr id="22" name="Straight Arrow Connector 21">
               <a:extLst>
                 <a:ext uri="{FF2B5EF4-FFF2-40B4-BE49-F238E27FC236}">
-                  <a16:creationId xmlns:a16="http://schemas.microsoft.com/office/drawing/2014/main" xmlns="" id="{8F2714CA-3421-42C2-2575-C2D5DB1B504D}"/>
+                  <a16:creationId xmlns="" xmlns:a16="http://schemas.microsoft.com/office/drawing/2014/main" id="{8F2714CA-3421-42C2-2575-C2D5DB1B504D}"/>
                 </a:ext>
               </a:extLst>
             </p:cNvPr>
@@ -18851,7 +18890,7 @@
             <p:cNvPr id="29" name="Straight Arrow Connector 28">
               <a:extLst>
                 <a:ext uri="{FF2B5EF4-FFF2-40B4-BE49-F238E27FC236}">
-                  <a16:creationId xmlns:a16="http://schemas.microsoft.com/office/drawing/2014/main" xmlns="" id="{4613A6D9-EABC-0CE5-50B4-C1C9AA047D5D}"/>
+                  <a16:creationId xmlns="" xmlns:a16="http://schemas.microsoft.com/office/drawing/2014/main" id="{4613A6D9-EABC-0CE5-50B4-C1C9AA047D5D}"/>
                 </a:ext>
               </a:extLst>
             </p:cNvPr>
@@ -19087,7 +19126,7 @@
           <p:cNvPr id="7" name="Picture 2" descr="Ana Barros (@anathinker) | Twitter">
             <a:extLst>
               <a:ext uri="{FF2B5EF4-FFF2-40B4-BE49-F238E27FC236}">
-                <a16:creationId xmlns:a16="http://schemas.microsoft.com/office/drawing/2014/main" xmlns="" id="{A2D479C7-0684-420F-2CCD-64C3DB79FDAB}"/>
+                <a16:creationId xmlns="" xmlns:a16="http://schemas.microsoft.com/office/drawing/2014/main" id="{A2D479C7-0684-420F-2CCD-64C3DB79FDAB}"/>
               </a:ext>
             </a:extLst>
           </p:cNvPr>
@@ -19134,7 +19173,7 @@
           <p:cNvPr id="8" name="Picture 6" descr="Analyzing Text Classification Techniques on Youtube Data">
             <a:extLst>
               <a:ext uri="{FF2B5EF4-FFF2-40B4-BE49-F238E27FC236}">
-                <a16:creationId xmlns:a16="http://schemas.microsoft.com/office/drawing/2014/main" xmlns="" id="{A59F8A2C-ACDF-09C7-B528-9064CEF3B848}"/>
+                <a16:creationId xmlns="" xmlns:a16="http://schemas.microsoft.com/office/drawing/2014/main" id="{A59F8A2C-ACDF-09C7-B528-9064CEF3B848}"/>
               </a:ext>
             </a:extLst>
           </p:cNvPr>
@@ -19179,7 +19218,7 @@
           <p:cNvPr id="9" name="Picture 2" descr="Sentiment Fig 1">
             <a:extLst>
               <a:ext uri="{FF2B5EF4-FFF2-40B4-BE49-F238E27FC236}">
-                <a16:creationId xmlns:a16="http://schemas.microsoft.com/office/drawing/2014/main" xmlns="" id="{E178FF16-CC3F-C34B-6C8B-874BC4FA61A4}"/>
+                <a16:creationId xmlns="" xmlns:a16="http://schemas.microsoft.com/office/drawing/2014/main" id="{E178FF16-CC3F-C34B-6C8B-874BC4FA61A4}"/>
               </a:ext>
             </a:extLst>
           </p:cNvPr>
@@ -19256,7 +19295,7 @@
           <p:cNvPr id="2" name="Título 1">
             <a:extLst>
               <a:ext uri="{FF2B5EF4-FFF2-40B4-BE49-F238E27FC236}">
-                <a16:creationId xmlns:a16="http://schemas.microsoft.com/office/drawing/2014/main" xmlns="" id="{B022D379-CAA0-9DC9-CDBD-6E0EBE1BFF31}"/>
+                <a16:creationId xmlns="" xmlns:a16="http://schemas.microsoft.com/office/drawing/2014/main" id="{B022D379-CAA0-9DC9-CDBD-6E0EBE1BFF31}"/>
               </a:ext>
             </a:extLst>
           </p:cNvPr>
@@ -19283,14 +19322,14 @@
           </a:p>
         </p:txBody>
       </p:sp>
-      <mc:AlternateContent xmlns:mc="http://schemas.openxmlformats.org/markup-compatibility/2006">
-        <mc:Choice xmlns:a14="http://schemas.microsoft.com/office/drawing/2010/main" Requires="a14">
+      <mc:AlternateContent xmlns:mc="http://schemas.openxmlformats.org/markup-compatibility/2006" xmlns:a14="http://schemas.microsoft.com/office/drawing/2010/main">
+        <mc:Choice Requires="a14">
           <p:sp>
             <p:nvSpPr>
               <p:cNvPr id="3" name="Espaço Reservado para Conteúdo 2">
                 <a:extLst>
                   <a:ext uri="{FF2B5EF4-FFF2-40B4-BE49-F238E27FC236}">
-                    <a16:creationId xmlns:a16="http://schemas.microsoft.com/office/drawing/2014/main" xmlns="" id="{B68F0D74-8673-A432-A1D7-BDEF7725851A}"/>
+                    <a16:creationId xmlns="" xmlns:a16="http://schemas.microsoft.com/office/drawing/2014/main" id="{B68F0D74-8673-A432-A1D7-BDEF7725851A}"/>
                   </a:ext>
                 </a:extLst>
               </p:cNvPr>
@@ -19358,6 +19397,7 @@
                         <a:solidFill>
                           <a:srgbClr val="00B050"/>
                         </a:solidFill>
+                        <a:latin typeface="Cambria Math" panose="02040503050406030204" pitchFamily="18" charset="0"/>
                       </a:rPr>
                       <m:t>𝑄</m:t>
                     </m:r>
@@ -19558,7 +19598,7 @@
             </p:txBody>
           </p:sp>
         </mc:Choice>
-        <mc:Fallback>
+        <mc:Fallback xmlns="">
           <p:sp>
             <p:nvSpPr>
               <p:cNvPr id="3" name="Espaço Reservado para Conteúdo 2">
@@ -19637,7 +19677,7 @@
           <p:cNvPr id="2" name="Título 1">
             <a:extLst>
               <a:ext uri="{FF2B5EF4-FFF2-40B4-BE49-F238E27FC236}">
-                <a16:creationId xmlns:a16="http://schemas.microsoft.com/office/drawing/2014/main" xmlns="" id="{519F0958-530D-D942-BA01-15C1583DD1E6}"/>
+                <a16:creationId xmlns="" xmlns:a16="http://schemas.microsoft.com/office/drawing/2014/main" id="{519F0958-530D-D942-BA01-15C1583DD1E6}"/>
               </a:ext>
             </a:extLst>
           </p:cNvPr>
@@ -19671,7 +19711,7 @@
               <p:cNvPr id="3" name="Espaço Reservado para Conteúdo 2">
                 <a:extLst>
                   <a:ext uri="{FF2B5EF4-FFF2-40B4-BE49-F238E27FC236}">
-                    <a16:creationId xmlns:a16="http://schemas.microsoft.com/office/drawing/2014/main" xmlns="" id="{21416F72-28FB-E27C-D129-16A944A87C67}"/>
+                    <a16:creationId xmlns="" xmlns:a16="http://schemas.microsoft.com/office/drawing/2014/main" id="{21416F72-28FB-E27C-D129-16A944A87C67}"/>
                   </a:ext>
                 </a:extLst>
               </p:cNvPr>
@@ -19690,7 +19730,7 @@
             </p:spPr>
             <p:txBody>
               <a:bodyPr>
-                <a:normAutofit lnSpcReduction="10000"/>
+                <a:normAutofit/>
               </a:bodyPr>
               <a:lstStyle/>
               <a:p>
@@ -19763,38 +19803,33 @@
                 </a:pPr>
                 <a:r>
                   <a:rPr lang="pt-BR" b="1" dirty="0"/>
-                  <a:t>Classes mutuamente exclusivas</a:t>
-                </a:r>
-                <a:r>
-                  <a:rPr lang="pt-BR" dirty="0"/>
-                  <a:t>: </a:t>
-                </a:r>
-                <a:r>
-                  <a:rPr lang="pt-BR" dirty="0" smtClean="0"/>
-                  <a:t>exemplos </a:t>
-                </a:r>
-                <a:r>
-                  <a:rPr lang="pt-BR" dirty="0"/>
-                  <a:t>pertencem a apenas uma das </a:t>
-                </a:r>
-                <a14:m>
-                  <m:oMath xmlns:m="http://schemas.openxmlformats.org/officeDocument/2006/math">
-                    <m:r>
-                      <a:rPr lang="pt-BR" i="1">
-                        <a:latin typeface="Cambria Math" panose="02040503050406030204" pitchFamily="18" charset="0"/>
-                      </a:rPr>
-                      <m:t>𝑄</m:t>
-                    </m:r>
-                  </m:oMath>
-                </a14:m>
+                  <a:t>Classes mutuamente </a:t>
+                </a:r>
+                <a:r>
+                  <a:rPr lang="pt-BR" b="1" dirty="0" smtClean="0"/>
+                  <a:t>exclusivas</a:t>
+                </a:r>
                 <a:r>
                   <a:rPr lang="pt-BR" dirty="0"/>
                   <a:t> </a:t>
                 </a:r>
                 <a:r>
                   <a:rPr lang="pt-BR" dirty="0" smtClean="0"/>
-                  <a:t>classes.</a:t>
-                </a:r>
+                  <a:t>são classes </a:t>
+                </a:r>
+                <a:r>
+                  <a:rPr lang="pt-BR" dirty="0"/>
+                  <a:t>que </a:t>
+                </a:r>
+                <a:r>
+                  <a:rPr lang="pt-BR" b="1" dirty="0"/>
+                  <a:t>não podem ocorrer simultaneamente para </a:t>
+                </a:r>
+                <a:r>
+                  <a:rPr lang="pt-BR" b="1" dirty="0" smtClean="0"/>
+                  <a:t>o mesmo exemplo.</a:t>
+                </a:r>
+                <a:endParaRPr lang="pt-BR" dirty="0" smtClean="0"/>
               </a:p>
               <a:p>
                 <a:pPr lvl="1">
@@ -19802,16 +19837,8 @@
                   <a:buChar char="§"/>
                 </a:pPr>
                 <a:r>
-                  <a:rPr lang="pt-BR" dirty="0" smtClean="0"/>
-                  <a:t>Por </a:t>
-                </a:r>
-                <a:r>
                   <a:rPr lang="pt-BR" dirty="0"/>
-                  <a:t>exemplo</a:t>
-                </a:r>
-                <a:r>
-                  <a:rPr lang="pt-BR" dirty="0" smtClean="0"/>
-                  <a:t>, s</a:t>
+                  <a:t>S</a:t>
                 </a:r>
                 <a:r>
                   <a:rPr lang="pt-BR" dirty="0" smtClean="0"/>
@@ -19819,43 +19846,29 @@
                 </a:r>
                 <a:r>
                   <a:rPr lang="pt-BR" dirty="0"/>
-                  <a:t>que queremos classificar uma imagem </a:t>
+                  <a:t>que queremos classificar uma </a:t>
                 </a:r>
                 <a:r>
                   <a:rPr lang="pt-BR" dirty="0" smtClean="0"/>
-                  <a:t>em 3 classes:</a:t>
+                  <a:t>imagem em</a:t>
+                </a:r>
+                <a:r>
+                  <a:rPr lang="pt-BR" dirty="0" smtClean="0"/>
+                  <a:t> </a:t>
+                </a:r>
+                <a:r>
+                  <a:rPr lang="pt-BR" dirty="0" smtClean="0"/>
+                  <a:t>Cachorro, </a:t>
+                </a:r>
+                <a:r>
+                  <a:rPr lang="pt-BR" dirty="0"/>
+                  <a:t>Gato </a:t>
+                </a:r>
+                <a:r>
+                  <a:rPr lang="pt-BR" dirty="0" smtClean="0"/>
+                  <a:t>e Coelho.</a:t>
                 </a:r>
                 <a:endParaRPr lang="pt-BR" dirty="0"/>
-              </a:p>
-              <a:p>
-                <a:pPr lvl="2">
-                  <a:buFont typeface="Courier New" panose="02070309020205020404" pitchFamily="49" charset="0"/>
-                  <a:buChar char="o"/>
-                </a:pPr>
-                <a:r>
-                  <a:rPr lang="pt-BR" dirty="0"/>
-                  <a:t>🐶 Cachorro </a:t>
-                </a:r>
-              </a:p>
-              <a:p>
-                <a:pPr lvl="2">
-                  <a:buFont typeface="Courier New" panose="02070309020205020404" pitchFamily="49" charset="0"/>
-                  <a:buChar char="o"/>
-                </a:pPr>
-                <a:r>
-                  <a:rPr lang="pt-BR" dirty="0"/>
-                  <a:t>🐱 Gato </a:t>
-                </a:r>
-              </a:p>
-              <a:p>
-                <a:pPr lvl="2">
-                  <a:buFont typeface="Courier New" panose="02070309020205020404" pitchFamily="49" charset="0"/>
-                  <a:buChar char="o"/>
-                </a:pPr>
-                <a:r>
-                  <a:rPr lang="pt-BR" dirty="0"/>
-                  <a:t>🐰 Coelho </a:t>
-                </a:r>
               </a:p>
               <a:p>
                 <a:pPr lvl="1">
@@ -19890,7 +19903,6 @@
                   <a:rPr lang="pt-BR" dirty="0" smtClean="0"/>
                   <a:t>.</a:t>
                 </a:r>
-                <a:endParaRPr lang="pt-BR" dirty="0" smtClean="0"/>
               </a:p>
               <a:p>
                 <a:r>
@@ -19993,8 +20005,12 @@
                   </m:oMath>
                 </a14:m>
                 <a:r>
+                  <a:rPr lang="pt-BR" dirty="0" smtClean="0"/>
+                  <a:t>, </a:t>
+                </a:r>
+                <a:r>
                   <a:rPr lang="pt-BR" dirty="0"/>
-                  <a:t>, e, consequentemente, </a:t>
+                  <a:t>e, consequentemente, </a:t>
                 </a:r>
                 <a:r>
                   <a:rPr lang="pt-BR" b="1" dirty="0">
@@ -20074,7 +20090,7 @@
                   </m:oMath>
                 </a14:m>
                 <a:r>
-                  <a:rPr lang="pt-BR" dirty="0"/>
+                  <a:rPr lang="pt-BR" dirty="0" smtClean="0"/>
                   <a:t>, </a:t>
                 </a:r>
                 <a:r>
@@ -20178,6 +20194,47 @@
                   <a:rPr lang="pt-BR" dirty="0"/>
                   <a:t>.</a:t>
                 </a:r>
+                <a:endParaRPr lang="pt-BR" dirty="0" smtClean="0"/>
+              </a:p>
+              <a:p>
+                <a:r>
+                  <a:rPr lang="pt-BR" dirty="0"/>
+                  <a:t>Cada função discriminante tem seu próprio vetor de pesos, </a:t>
+                </a:r>
+                <a14:m>
+                  <m:oMath xmlns:m="http://schemas.openxmlformats.org/officeDocument/2006/math">
+                    <m:sSub>
+                      <m:sSubPr>
+                        <m:ctrlPr>
+                          <a:rPr lang="pt-BR" b="1" i="1">
+                            <a:latin typeface="Cambria Math" panose="02040503050406030204" pitchFamily="18" charset="0"/>
+                          </a:rPr>
+                        </m:ctrlPr>
+                      </m:sSubPr>
+                      <m:e>
+                        <m:r>
+                          <a:rPr lang="pt-BR" b="1" i="1">
+                            <a:latin typeface="Cambria Math" panose="02040503050406030204" pitchFamily="18" charset="0"/>
+                          </a:rPr>
+                          <m:t>𝒂</m:t>
+                        </m:r>
+                      </m:e>
+                      <m:sub>
+                        <m:r>
+                          <a:rPr lang="pt-BR" i="1">
+                            <a:latin typeface="Cambria Math" panose="02040503050406030204" pitchFamily="18" charset="0"/>
+                          </a:rPr>
+                          <m:t>𝑞</m:t>
+                        </m:r>
+                      </m:sub>
+                    </m:sSub>
+                  </m:oMath>
+                </a14:m>
+                <a:r>
+                  <a:rPr lang="pt-BR" dirty="0" smtClean="0"/>
+                  <a:t>.</a:t>
+                </a:r>
+                <a:endParaRPr lang="pt-BR" dirty="0"/>
               </a:p>
             </p:txBody>
           </p:sp>
@@ -20188,7 +20245,7 @@
               <p:cNvPr id="3" name="Espaço Reservado para Conteúdo 2">
                 <a:extLst>
                   <a:ext uri="{FF2B5EF4-FFF2-40B4-BE49-F238E27FC236}">
-                    <a16:creationId xmlns:a16="http://schemas.microsoft.com/office/drawing/2014/main" xmlns:a14="http://schemas.microsoft.com/office/drawing/2010/main" xmlns="" id="{21416F72-28FB-E27C-D129-16A944A87C67}"/>
+                    <a16:creationId xmlns="" xmlns:a16="http://schemas.microsoft.com/office/drawing/2014/main" xmlns:a14="http://schemas.microsoft.com/office/drawing/2010/main" id="{21416F72-28FB-E27C-D129-16A944A87C67}"/>
                   </a:ext>
                 </a:extLst>
               </p:cNvPr>
@@ -20207,7 +20264,7 @@
               <a:blipFill rotWithShape="0">
                 <a:blip r:embed="rId3"/>
                 <a:stretch>
-                  <a:fillRect l="-913" t="-2663" r="-859"/>
+                  <a:fillRect l="-913" t="-1937" r="-859" b="-2058"/>
                 </a:stretch>
               </a:blipFill>
             </p:spPr>
@@ -20261,7 +20318,7 @@
           <p:cNvPr id="2" name="Título 1">
             <a:extLst>
               <a:ext uri="{FF2B5EF4-FFF2-40B4-BE49-F238E27FC236}">
-                <a16:creationId xmlns:a16="http://schemas.microsoft.com/office/drawing/2014/main" xmlns="" id="{DCD47F25-5DD1-794E-8733-BFD771A2DE49}"/>
+                <a16:creationId xmlns="" xmlns:a16="http://schemas.microsoft.com/office/drawing/2014/main" id="{DCD47F25-5DD1-794E-8733-BFD771A2DE49}"/>
               </a:ext>
             </a:extLst>
           </p:cNvPr>
@@ -20288,14 +20345,14 @@
           </a:p>
         </p:txBody>
       </p:sp>
-      <mc:AlternateContent xmlns:mc="http://schemas.openxmlformats.org/markup-compatibility/2006" xmlns:a14="http://schemas.microsoft.com/office/drawing/2010/main">
-        <mc:Choice Requires="a14">
+      <mc:AlternateContent xmlns:mc="http://schemas.openxmlformats.org/markup-compatibility/2006">
+        <mc:Choice xmlns:a14="http://schemas.microsoft.com/office/drawing/2010/main" Requires="a14">
           <p:sp>
             <p:nvSpPr>
               <p:cNvPr id="3" name="Espaço Reservado para Conteúdo 2">
                 <a:extLst>
                   <a:ext uri="{FF2B5EF4-FFF2-40B4-BE49-F238E27FC236}">
-                    <a16:creationId xmlns:a16="http://schemas.microsoft.com/office/drawing/2014/main" xmlns="" id="{D79BB7DC-99E7-8958-EC77-566B7E3C2BBB}"/>
+                    <a16:creationId xmlns="" xmlns:a16="http://schemas.microsoft.com/office/drawing/2014/main" id="{D79BB7DC-99E7-8958-EC77-566B7E3C2BBB}"/>
                   </a:ext>
                 </a:extLst>
               </p:cNvPr>
@@ -20309,7 +20366,7 @@
             <p:spPr>
               <a:xfrm>
                 <a:off x="838200" y="1825624"/>
-                <a:ext cx="11239500" cy="5032375"/>
+                <a:ext cx="11353800" cy="5032375"/>
               </a:xfrm>
             </p:spPr>
             <p:txBody>
@@ -20319,7 +20376,7 @@
               <a:lstStyle/>
               <a:p>
                 <a:r>
-                  <a:rPr lang="pt-BR" dirty="0"/>
+                  <a:rPr lang="pt-BR" dirty="0" smtClean="0"/>
                   <a:t>A </a:t>
                 </a:r>
                 <a:r>
@@ -20658,31 +20715,12 @@
                             </a:rPr>
                             <m:t>,</m:t>
                           </m:r>
-                          <m:sSub>
-                            <m:sSubPr>
-                              <m:ctrlPr>
-                                <a:rPr lang="pt-BR" i="1">
-                                  <a:latin typeface="Cambria Math" panose="02040503050406030204" pitchFamily="18" charset="0"/>
-                                </a:rPr>
-                              </m:ctrlPr>
-                            </m:sSubPr>
-                            <m:e>
-                              <m:r>
-                                <a:rPr lang="pt-BR" b="1" i="1">
-                                  <a:latin typeface="Cambria Math" panose="02040503050406030204" pitchFamily="18" charset="0"/>
-                                </a:rPr>
-                                <m:t>𝒂</m:t>
-                              </m:r>
-                            </m:e>
-                            <m:sub>
-                              <m:r>
-                                <a:rPr lang="pt-BR" b="0" i="1" smtClean="0">
-                                  <a:latin typeface="Cambria Math" panose="02040503050406030204" pitchFamily="18" charset="0"/>
-                                </a:rPr>
-                                <m:t>𝑞</m:t>
-                              </m:r>
-                            </m:sub>
-                          </m:sSub>
+                          <m:r>
+                            <a:rPr lang="pt-BR" b="1" i="1" smtClean="0">
+                              <a:latin typeface="Cambria Math" panose="02040503050406030204" pitchFamily="18" charset="0"/>
+                            </a:rPr>
+                            <m:t>𝑨</m:t>
+                          </m:r>
                         </m:e>
                       </m:d>
                       <m:r>
@@ -21008,10 +21046,92 @@
                 </a:pPr>
                 <a:r>
                   <a:rPr lang="pt-BR" dirty="0"/>
-                  <a:t>onde</a:t>
-                </a:r>
-                <a:r>
-                  <a:rPr lang="pt-BR" i="1" dirty="0"/>
+                  <a:t>o</a:t>
+                </a:r>
+                <a:r>
+                  <a:rPr lang="pt-BR" dirty="0" smtClean="0"/>
+                  <a:t>nde </a:t>
+                </a:r>
+                <a14:m>
+                  <m:oMath xmlns:m="http://schemas.openxmlformats.org/officeDocument/2006/math">
+                    <m:r>
+                      <a:rPr lang="pt-BR" b="1" i="1">
+                        <a:latin typeface="Cambria Math" panose="02040503050406030204" pitchFamily="18" charset="0"/>
+                      </a:rPr>
+                      <m:t>𝑨</m:t>
+                    </m:r>
+                    <m:r>
+                      <a:rPr lang="pt-BR" b="1" i="1">
+                        <a:latin typeface="Cambria Math" panose="02040503050406030204" pitchFamily="18" charset="0"/>
+                        <a:ea typeface="Cambria Math" panose="02040503050406030204" pitchFamily="18" charset="0"/>
+                      </a:rPr>
+                      <m:t>∈</m:t>
+                    </m:r>
+                    <m:sSup>
+                      <m:sSupPr>
+                        <m:ctrlPr>
+                          <a:rPr lang="pt-BR" b="1" i="1">
+                            <a:latin typeface="Cambria Math" panose="02040503050406030204" pitchFamily="18" charset="0"/>
+                            <a:ea typeface="Cambria Math" panose="02040503050406030204" pitchFamily="18" charset="0"/>
+                          </a:rPr>
+                        </m:ctrlPr>
+                      </m:sSupPr>
+                      <m:e>
+                        <m:r>
+                          <a:rPr lang="pt-BR" b="1" i="1">
+                            <a:latin typeface="Cambria Math" panose="02040503050406030204" pitchFamily="18" charset="0"/>
+                            <a:ea typeface="Cambria Math" panose="02040503050406030204" pitchFamily="18" charset="0"/>
+                          </a:rPr>
+                          <m:t>ℝ</m:t>
+                        </m:r>
+                      </m:e>
+                      <m:sup>
+                        <m:r>
+                          <a:rPr lang="pt-BR" i="1">
+                            <a:latin typeface="Cambria Math" panose="02040503050406030204" pitchFamily="18" charset="0"/>
+                            <a:ea typeface="Cambria Math" panose="02040503050406030204" pitchFamily="18" charset="0"/>
+                          </a:rPr>
+                          <m:t>𝐾</m:t>
+                        </m:r>
+                        <m:r>
+                          <a:rPr lang="pt-BR" i="1">
+                            <a:latin typeface="Cambria Math" panose="02040503050406030204" pitchFamily="18" charset="0"/>
+                            <a:ea typeface="Cambria Math" panose="02040503050406030204" pitchFamily="18" charset="0"/>
+                          </a:rPr>
+                          <m:t>+1×</m:t>
+                        </m:r>
+                        <m:r>
+                          <a:rPr lang="pt-BR" b="0" i="1" smtClean="0">
+                            <a:latin typeface="Cambria Math" panose="02040503050406030204" pitchFamily="18" charset="0"/>
+                            <a:ea typeface="Cambria Math" panose="02040503050406030204" pitchFamily="18" charset="0"/>
+                          </a:rPr>
+                          <m:t>𝑄</m:t>
+                        </m:r>
+                      </m:sup>
+                    </m:sSup>
+                  </m:oMath>
+                </a14:m>
+                <a:r>
+                  <a:rPr lang="pt-BR" dirty="0" smtClean="0"/>
+                  <a:t> é a matriz contendo todos os </a:t>
+                </a:r>
+                <a14:m>
+                  <m:oMath xmlns:m="http://schemas.openxmlformats.org/officeDocument/2006/math">
+                    <m:r>
+                      <a:rPr lang="pt-BR" i="1">
+                        <a:latin typeface="Cambria Math" panose="02040503050406030204" pitchFamily="18" charset="0"/>
+                        <a:ea typeface="Cambria Math" panose="02040503050406030204" pitchFamily="18" charset="0"/>
+                      </a:rPr>
+                      <m:t>𝑄</m:t>
+                    </m:r>
+                  </m:oMath>
+                </a14:m>
+                <a:r>
+                  <a:rPr lang="pt-BR" dirty="0" smtClean="0"/>
+                  <a:t> vetores de pesos,</a:t>
+                </a:r>
+                <a:r>
+                  <a:rPr lang="pt-BR" i="1" dirty="0" smtClean="0"/>
                   <a:t> </a:t>
                 </a:r>
                 <a14:m>
@@ -21415,47 +21535,12 @@
               </a:p>
               <a:p>
                 <a:r>
-                  <a:rPr lang="pt-BR" sz="2800" dirty="0"/>
-                  <a:t>Cada função discriminante tem seu próprio vetor de pesos, </a:t>
-                </a:r>
-                <a14:m>
-                  <m:oMath xmlns:m="http://schemas.openxmlformats.org/officeDocument/2006/math">
-                    <m:sSub>
-                      <m:sSubPr>
-                        <m:ctrlPr>
-                          <a:rPr lang="pt-BR" b="1" i="1" smtClean="0">
-                            <a:latin typeface="Cambria Math" panose="02040503050406030204" pitchFamily="18" charset="0"/>
-                          </a:rPr>
-                        </m:ctrlPr>
-                      </m:sSubPr>
-                      <m:e>
-                        <m:r>
-                          <a:rPr lang="pt-BR" b="1" i="1">
-                            <a:latin typeface="Cambria Math" panose="02040503050406030204" pitchFamily="18" charset="0"/>
-                          </a:rPr>
-                          <m:t>𝒂</m:t>
-                        </m:r>
-                      </m:e>
-                      <m:sub>
-                        <m:r>
-                          <a:rPr lang="pt-BR" i="1">
-                            <a:latin typeface="Cambria Math" panose="02040503050406030204" pitchFamily="18" charset="0"/>
-                          </a:rPr>
-                          <m:t>𝑞</m:t>
-                        </m:r>
-                      </m:sub>
-                    </m:sSub>
-                  </m:oMath>
-                </a14:m>
-                <a:r>
-                  <a:rPr lang="pt-BR" sz="2800" dirty="0"/>
-                  <a:t>.</a:t>
-                </a:r>
-              </a:p>
-              <a:p>
+                  <a:rPr lang="pt-BR" dirty="0" smtClean="0"/>
+                  <a:t>Além </a:t>
+                </a:r>
                 <a:r>
                   <a:rPr lang="pt-BR" dirty="0"/>
-                  <a:t>Além do regressor </a:t>
+                  <a:t>do regressor </a:t>
                 </a:r>
                 <a:r>
                   <a:rPr lang="pt-BR" i="1" dirty="0"/>
@@ -21516,13 +21601,13 @@
             </p:txBody>
           </p:sp>
         </mc:Choice>
-        <mc:Fallback xmlns="">
+        <mc:Fallback>
           <p:sp>
             <p:nvSpPr>
               <p:cNvPr id="3" name="Espaço Reservado para Conteúdo 2">
                 <a:extLst>
                   <a:ext uri="{FF2B5EF4-FFF2-40B4-BE49-F238E27FC236}">
-                    <a16:creationId xmlns:a16="http://schemas.microsoft.com/office/drawing/2014/main" id="{D79BB7DC-99E7-8958-EC77-566B7E3C2BBB}"/>
+                    <a16:creationId xmlns="" xmlns:a16="http://schemas.microsoft.com/office/drawing/2014/main" xmlns:a14="http://schemas.microsoft.com/office/drawing/2010/main" id="{D79BB7DC-99E7-8958-EC77-566B7E3C2BBB}"/>
                   </a:ext>
                 </a:extLst>
               </p:cNvPr>
@@ -21536,12 +21621,12 @@
             <p:spPr>
               <a:xfrm>
                 <a:off x="838200" y="1825624"/>
-                <a:ext cx="11239500" cy="5032375"/>
+                <a:ext cx="11353800" cy="5032375"/>
               </a:xfrm>
-              <a:blipFill>
+              <a:blipFill rotWithShape="0">
                 <a:blip r:embed="rId3"/>
                 <a:stretch>
-                  <a:fillRect l="-1139" t="-1332" r="-1465"/>
+                  <a:fillRect l="-1128" t="-1332" r="-859"/>
                 </a:stretch>
               </a:blipFill>
             </p:spPr>
@@ -21550,7 +21635,7 @@
               <a:lstStyle/>
               <a:p>
                 <a:r>
-                  <a:rPr lang="en-US">
+                  <a:rPr lang="pt-BR">
                     <a:noFill/>
                   </a:rPr>
                   <a:t> </a:t>
@@ -21595,7 +21680,7 @@
           <p:cNvPr id="2" name="Título 1">
             <a:extLst>
               <a:ext uri="{FF2B5EF4-FFF2-40B4-BE49-F238E27FC236}">
-                <a16:creationId xmlns:a16="http://schemas.microsoft.com/office/drawing/2014/main" xmlns="" id="{52E3438D-F516-F1D3-A02F-51857586D07A}"/>
+                <a16:creationId xmlns="" xmlns:a16="http://schemas.microsoft.com/office/drawing/2014/main" id="{52E3438D-F516-F1D3-A02F-51857586D07A}"/>
               </a:ext>
             </a:extLst>
           </p:cNvPr>
@@ -21622,14 +21707,14 @@
           </a:p>
         </p:txBody>
       </p:sp>
-      <mc:AlternateContent xmlns:mc="http://schemas.openxmlformats.org/markup-compatibility/2006" xmlns:a14="http://schemas.microsoft.com/office/drawing/2010/main">
-        <mc:Choice Requires="a14">
+      <mc:AlternateContent xmlns:mc="http://schemas.openxmlformats.org/markup-compatibility/2006">
+        <mc:Choice xmlns:a14="http://schemas.microsoft.com/office/drawing/2010/main" Requires="a14">
           <p:sp>
             <p:nvSpPr>
               <p:cNvPr id="3" name="Espaço Reservado para Conteúdo 2">
                 <a:extLst>
                   <a:ext uri="{FF2B5EF4-FFF2-40B4-BE49-F238E27FC236}">
-                    <a16:creationId xmlns:a16="http://schemas.microsoft.com/office/drawing/2014/main" xmlns="" id="{BCAAD57B-65A0-9DAD-79FC-2AE2692EB84B}"/>
+                    <a16:creationId xmlns="" xmlns:a16="http://schemas.microsoft.com/office/drawing/2014/main" id="{BCAAD57B-65A0-9DAD-79FC-2AE2692EB84B}"/>
                   </a:ext>
                 </a:extLst>
               </p:cNvPr>
@@ -21653,7 +21738,7 @@
               <a:lstStyle/>
               <a:p>
                 <a:r>
-                  <a:rPr lang="pt-BR" dirty="0"/>
+                  <a:rPr lang="pt-BR" dirty="0" smtClean="0"/>
                   <a:t>É uma </a:t>
                 </a:r>
                 <a:r>
@@ -21786,31 +21871,12 @@
                             </a:rPr>
                             <m:t>,</m:t>
                           </m:r>
-                          <m:sSub>
-                            <m:sSubPr>
-                              <m:ctrlPr>
-                                <a:rPr lang="pt-BR" i="1">
-                                  <a:latin typeface="Cambria Math" panose="02040503050406030204" pitchFamily="18" charset="0"/>
-                                </a:rPr>
-                              </m:ctrlPr>
-                            </m:sSubPr>
-                            <m:e>
-                              <m:r>
-                                <a:rPr lang="pt-BR" b="1" i="1">
-                                  <a:latin typeface="Cambria Math" panose="02040503050406030204" pitchFamily="18" charset="0"/>
-                                </a:rPr>
-                                <m:t>𝒂</m:t>
-                              </m:r>
-                            </m:e>
-                            <m:sub>
-                              <m:r>
-                                <a:rPr lang="pt-BR" i="1">
-                                  <a:latin typeface="Cambria Math" panose="02040503050406030204" pitchFamily="18" charset="0"/>
-                                </a:rPr>
-                                <m:t>𝑞</m:t>
-                              </m:r>
-                            </m:sub>
-                          </m:sSub>
+                          <m:r>
+                            <a:rPr lang="pt-BR" b="1" i="1" smtClean="0">
+                              <a:latin typeface="Cambria Math" panose="02040503050406030204" pitchFamily="18" charset="0"/>
+                            </a:rPr>
+                            <m:t>𝑨</m:t>
+                          </m:r>
                         </m:e>
                       </m:d>
                       <m:r>
@@ -22212,15 +22278,23 @@
                       <a:srgbClr val="00B050"/>
                     </a:solidFill>
                   </a:rPr>
-                  <a:t> funções discriminantes em uma </a:t>
-                </a:r>
-                <a:r>
-                  <a:rPr lang="pt-BR" b="1" dirty="0">
+                  <a:t> funções discriminantes </a:t>
+                </a:r>
+                <a:r>
+                  <a:rPr lang="pt-BR" b="1" dirty="0" smtClean="0">
+                    <a:solidFill>
+                      <a:srgbClr val="00B050"/>
+                    </a:solidFill>
+                  </a:rPr>
+                  <a:t>(chamados de pontuações) em </a:t>
+                </a:r>
+                <a:r>
+                  <a:rPr lang="pt-BR" b="1" dirty="0" smtClean="0">
                     <a:solidFill>
                       <a:schemeClr val="accent2"/>
                     </a:solidFill>
                   </a:rPr>
-                  <a:t>distribuição de probabilidades</a:t>
+                  <a:t>probabilidades</a:t>
                 </a:r>
                 <a:r>
                   <a:rPr lang="pt-BR" dirty="0"/>
@@ -22230,7 +22304,15 @@
               <a:p>
                 <a:r>
                   <a:rPr lang="pt-BR" dirty="0"/>
-                  <a:t>Assim, dado um exemplo de entrada, ela </a:t>
+                  <a:t>Assim</a:t>
+                </a:r>
+                <a:r>
+                  <a:rPr lang="pt-BR" dirty="0" smtClean="0"/>
+                  <a:t>, </a:t>
+                </a:r>
+                <a:r>
+                  <a:rPr lang="pt-BR" dirty="0"/>
+                  <a:t>ela </a:t>
                 </a:r>
                 <a:r>
                   <a:rPr lang="pt-BR" b="1" dirty="0">
@@ -22359,31 +22441,12 @@
                           </a:rPr>
                           <m:t>,</m:t>
                         </m:r>
-                        <m:sSub>
-                          <m:sSubPr>
-                            <m:ctrlPr>
-                              <a:rPr lang="pt-BR" i="1">
-                                <a:latin typeface="Cambria Math" panose="02040503050406030204" pitchFamily="18" charset="0"/>
-                              </a:rPr>
-                            </m:ctrlPr>
-                          </m:sSubPr>
-                          <m:e>
-                            <m:r>
-                              <a:rPr lang="pt-BR" b="1" i="1">
-                                <a:latin typeface="Cambria Math" panose="02040503050406030204" pitchFamily="18" charset="0"/>
-                              </a:rPr>
-                              <m:t>𝒂</m:t>
-                            </m:r>
-                          </m:e>
-                          <m:sub>
-                            <m:r>
-                              <a:rPr lang="pt-BR" i="1">
-                                <a:latin typeface="Cambria Math" panose="02040503050406030204" pitchFamily="18" charset="0"/>
-                              </a:rPr>
-                              <m:t>𝑞</m:t>
-                            </m:r>
-                          </m:sub>
-                        </m:sSub>
+                        <m:r>
+                          <a:rPr lang="pt-BR" b="1" i="1" smtClean="0">
+                            <a:latin typeface="Cambria Math" panose="02040503050406030204" pitchFamily="18" charset="0"/>
+                          </a:rPr>
+                          <m:t>𝑨</m:t>
+                        </m:r>
                       </m:e>
                     </m:d>
                     <m:r>
@@ -22450,7 +22513,11 @@
                 </a14:m>
                 <a:r>
                   <a:rPr lang="pt-BR" dirty="0"/>
-                  <a:t>classes.</a:t>
+                  <a:t>classes dado um exemplo de </a:t>
+                </a:r>
+                <a:r>
+                  <a:rPr lang="pt-BR" dirty="0" smtClean="0"/>
+                  <a:t>entrada e os pesos.</a:t>
                 </a:r>
                 <a:endParaRPr lang="pt-BR" b="1" dirty="0">
                   <a:solidFill>
@@ -22461,13 +22528,13 @@
             </p:txBody>
           </p:sp>
         </mc:Choice>
-        <mc:Fallback xmlns="">
+        <mc:Fallback>
           <p:sp>
             <p:nvSpPr>
               <p:cNvPr id="3" name="Espaço Reservado para Conteúdo 2">
                 <a:extLst>
                   <a:ext uri="{FF2B5EF4-FFF2-40B4-BE49-F238E27FC236}">
-                    <a16:creationId xmlns:a16="http://schemas.microsoft.com/office/drawing/2014/main" id="{BCAAD57B-65A0-9DAD-79FC-2AE2692EB84B}"/>
+                    <a16:creationId xmlns="" xmlns:a16="http://schemas.microsoft.com/office/drawing/2014/main" xmlns:a14="http://schemas.microsoft.com/office/drawing/2010/main" id="{BCAAD57B-65A0-9DAD-79FC-2AE2692EB84B}"/>
                   </a:ext>
                 </a:extLst>
               </p:cNvPr>
@@ -22483,10 +22550,10 @@
                 <a:off x="838200" y="1825624"/>
                 <a:ext cx="11353800" cy="5032375"/>
               </a:xfrm>
-              <a:blipFill>
+              <a:blipFill rotWithShape="0">
                 <a:blip r:embed="rId3"/>
                 <a:stretch>
-                  <a:fillRect l="-967" t="-1937" r="-967"/>
+                  <a:fillRect l="-967" t="-1937" r="-1772"/>
                 </a:stretch>
               </a:blipFill>
             </p:spPr>
@@ -22495,7 +22562,7 @@
               <a:lstStyle/>
               <a:p>
                 <a:r>
-                  <a:rPr lang="en-US">
+                  <a:rPr lang="pt-BR">
                     <a:noFill/>
                   </a:rPr>
                   <a:t> </a:t>
@@ -22510,7 +22577,7 @@
           <p:cNvPr id="5" name="Rectangle 11">
             <a:extLst>
               <a:ext uri="{FF2B5EF4-FFF2-40B4-BE49-F238E27FC236}">
-                <a16:creationId xmlns:a16="http://schemas.microsoft.com/office/drawing/2014/main" xmlns="" id="{D1D7E603-A964-1188-9D09-B0C1E18592FA}"/>
+                <a16:creationId xmlns="" xmlns:a16="http://schemas.microsoft.com/office/drawing/2014/main" id="{D1D7E603-A964-1188-9D09-B0C1E18592FA}"/>
               </a:ext>
             </a:extLst>
           </p:cNvPr>
@@ -22519,7 +22586,7 @@
         </p:nvSpPr>
         <p:spPr>
           <a:xfrm>
-            <a:off x="6765514" y="3622566"/>
+            <a:off x="6705554" y="3622566"/>
             <a:ext cx="2143124" cy="610221"/>
           </a:xfrm>
           <a:prstGeom prst="rect">
@@ -22592,7 +22659,7 @@
           <p:cNvPr id="2" name="Título 1">
             <a:extLst>
               <a:ext uri="{FF2B5EF4-FFF2-40B4-BE49-F238E27FC236}">
-                <a16:creationId xmlns:a16="http://schemas.microsoft.com/office/drawing/2014/main" xmlns="" id="{99DAA83A-B143-94BB-B48B-41A7423070CE}"/>
+                <a16:creationId xmlns="" xmlns:a16="http://schemas.microsoft.com/office/drawing/2014/main" id="{99DAA83A-B143-94BB-B48B-41A7423070CE}"/>
               </a:ext>
             </a:extLst>
           </p:cNvPr>
@@ -22620,14 +22687,14 @@
           </a:p>
         </p:txBody>
       </p:sp>
-      <mc:AlternateContent xmlns:mc="http://schemas.openxmlformats.org/markup-compatibility/2006" xmlns:a14="http://schemas.microsoft.com/office/drawing/2010/main">
-        <mc:Choice Requires="a14">
+      <mc:AlternateContent xmlns:mc="http://schemas.openxmlformats.org/markup-compatibility/2006">
+        <mc:Choice xmlns:a14="http://schemas.microsoft.com/office/drawing/2010/main" Requires="a14">
           <p:sp>
             <p:nvSpPr>
               <p:cNvPr id="3" name="Espaço Reservado para Conteúdo 2">
                 <a:extLst>
                   <a:ext uri="{FF2B5EF4-FFF2-40B4-BE49-F238E27FC236}">
-                    <a16:creationId xmlns:a16="http://schemas.microsoft.com/office/drawing/2014/main" xmlns="" id="{32DF54A1-52F5-C48C-7CD4-D6E451DF19D8}"/>
+                    <a16:creationId xmlns="" xmlns:a16="http://schemas.microsoft.com/office/drawing/2014/main" id="{32DF54A1-52F5-C48C-7CD4-D6E451DF19D8}"/>
                   </a:ext>
                 </a:extLst>
               </p:cNvPr>
@@ -22640,8 +22707,8 @@
             </p:nvSpPr>
             <p:spPr>
               <a:xfrm>
-                <a:off x="6448628" y="1825624"/>
-                <a:ext cx="5743372" cy="5032375"/>
+                <a:off x="6280879" y="1825624"/>
+                <a:ext cx="5911121" cy="5032375"/>
               </a:xfrm>
             </p:spPr>
             <p:txBody>
@@ -22788,7 +22855,43 @@
                     </a:solidFill>
                     <a:effectLst/>
                   </a:rPr>
-                  <a:t>normaliza essas exponenciais dividindo-as pela soma de todas as exponenciais, gerando uma </a:t>
+                  <a:t>normaliza essas exponenciais </a:t>
+                </a:r>
+                <a:r>
+                  <a:rPr lang="pt-BR" b="0" i="0" dirty="0" smtClean="0">
+                    <a:solidFill>
+                      <a:schemeClr val="tx1"/>
+                    </a:solidFill>
+                    <a:effectLst/>
+                  </a:rPr>
+                  <a:t>dividindo-os </a:t>
+                </a:r>
+                <a:r>
+                  <a:rPr lang="pt-BR" b="0" i="0" dirty="0">
+                    <a:solidFill>
+                      <a:schemeClr val="tx1"/>
+                    </a:solidFill>
+                    <a:effectLst/>
+                  </a:rPr>
+                  <a:t>pela soma </a:t>
+                </a:r>
+                <a:r>
+                  <a:rPr lang="pt-BR" b="0" i="0" dirty="0" smtClean="0">
+                    <a:solidFill>
+                      <a:schemeClr val="tx1"/>
+                    </a:solidFill>
+                    <a:effectLst/>
+                  </a:rPr>
+                  <a:t>das exponenciais de todas funções discriminantes, </a:t>
+                </a:r>
+                <a:r>
+                  <a:rPr lang="pt-BR" b="0" i="0" dirty="0">
+                    <a:solidFill>
+                      <a:schemeClr val="tx1"/>
+                    </a:solidFill>
+                    <a:effectLst/>
+                  </a:rPr>
+                  <a:t>gerando uma </a:t>
                 </a:r>
                 <a:r>
                   <a:rPr lang="pt-BR" b="1" i="0" dirty="0">
@@ -22812,13 +22915,13 @@
             </p:txBody>
           </p:sp>
         </mc:Choice>
-        <mc:Fallback xmlns="">
+        <mc:Fallback>
           <p:sp>
             <p:nvSpPr>
               <p:cNvPr id="3" name="Espaço Reservado para Conteúdo 2">
                 <a:extLst>
                   <a:ext uri="{FF2B5EF4-FFF2-40B4-BE49-F238E27FC236}">
-                    <a16:creationId xmlns:a16="http://schemas.microsoft.com/office/drawing/2014/main" id="{32DF54A1-52F5-C48C-7CD4-D6E451DF19D8}"/>
+                    <a16:creationId xmlns="" xmlns:a16="http://schemas.microsoft.com/office/drawing/2014/main" xmlns:a14="http://schemas.microsoft.com/office/drawing/2010/main" id="{32DF54A1-52F5-C48C-7CD4-D6E451DF19D8}"/>
                   </a:ext>
                 </a:extLst>
               </p:cNvPr>
@@ -22831,13 +22934,13 @@
             </p:nvSpPr>
             <p:spPr>
               <a:xfrm>
-                <a:off x="6448628" y="1825624"/>
-                <a:ext cx="5743372" cy="5032375"/>
+                <a:off x="6280879" y="1825624"/>
+                <a:ext cx="5911121" cy="5032375"/>
               </a:xfrm>
-              <a:blipFill>
+              <a:blipFill rotWithShape="0">
                 <a:blip r:embed="rId2"/>
                 <a:stretch>
-                  <a:fillRect l="-1911" t="-1937" r="-1062"/>
+                  <a:fillRect l="-1856" t="-1937" r="-619"/>
                 </a:stretch>
               </a:blipFill>
             </p:spPr>
@@ -22846,7 +22949,7 @@
               <a:lstStyle/>
               <a:p>
                 <a:r>
-                  <a:rPr lang="en-US">
+                  <a:rPr lang="pt-BR">
                     <a:noFill/>
                   </a:rPr>
                   <a:t> </a:t>
@@ -22861,7 +22964,7 @@
           <p:cNvPr id="8" name="CaixaDeTexto 7">
             <a:extLst>
               <a:ext uri="{FF2B5EF4-FFF2-40B4-BE49-F238E27FC236}">
-                <a16:creationId xmlns:a16="http://schemas.microsoft.com/office/drawing/2014/main" xmlns="" id="{0DC5673F-9B77-2E9E-8317-E71CA8896FE0}"/>
+                <a16:creationId xmlns="" xmlns:a16="http://schemas.microsoft.com/office/drawing/2014/main" id="{0DC5673F-9B77-2E9E-8317-E71CA8896FE0}"/>
               </a:ext>
             </a:extLst>
           </p:cNvPr>
@@ -22913,7 +23016,7 @@
               <p:cNvPr id="4" name="CaixaDeTexto 3">
                 <a:extLst>
                   <a:ext uri="{FF2B5EF4-FFF2-40B4-BE49-F238E27FC236}">
-                    <a16:creationId xmlns:a16="http://schemas.microsoft.com/office/drawing/2014/main" xmlns="" id="{CBD55F82-56D5-32C8-C5AB-AF99477FBAAC}"/>
+                    <a16:creationId xmlns="" xmlns:a16="http://schemas.microsoft.com/office/drawing/2014/main" id="{CBD55F82-56D5-32C8-C5AB-AF99477FBAAC}"/>
                   </a:ext>
                 </a:extLst>
               </p:cNvPr>
@@ -23007,20 +23110,14 @@
       </mc:AlternateContent>
       <p:pic>
         <p:nvPicPr>
-          <p:cNvPr id="10" name="Picture 9">
-            <a:extLst>
-              <a:ext uri="{FF2B5EF4-FFF2-40B4-BE49-F238E27FC236}">
-                <a16:creationId xmlns:a16="http://schemas.microsoft.com/office/drawing/2014/main" xmlns="" id="{CBF719E4-6CBA-943F-B474-06306C5F6781}"/>
-              </a:ext>
-            </a:extLst>
-          </p:cNvPr>
+          <p:cNvPr id="5" name="Imagem 4"/>
           <p:cNvPicPr>
             <a:picLocks noChangeAspect="1"/>
           </p:cNvPicPr>
           <p:nvPr/>
         </p:nvPicPr>
         <p:blipFill>
-          <a:blip r:embed="rId5" cstate="print">
+          <a:blip r:embed="rId5">
             <a:extLst>
               <a:ext uri="{28A0092B-C50C-407E-A947-70E740481C1C}">
                 <a14:useLocalDpi xmlns:a14="http://schemas.microsoft.com/office/drawing/2010/main" val="0"/>
@@ -23033,8 +23130,8 @@
         </p:blipFill>
         <p:spPr>
           <a:xfrm>
-            <a:off x="333172" y="2593657"/>
-            <a:ext cx="6115456" cy="2468904"/>
+            <a:off x="251325" y="2424443"/>
+            <a:ext cx="6114818" cy="2481287"/>
           </a:xfrm>
           <a:prstGeom prst="rect">
             <a:avLst/>
@@ -23076,7 +23173,7 @@
           <p:cNvPr id="2" name="Título 1">
             <a:extLst>
               <a:ext uri="{FF2B5EF4-FFF2-40B4-BE49-F238E27FC236}">
-                <a16:creationId xmlns:a16="http://schemas.microsoft.com/office/drawing/2014/main" xmlns="" id="{99DAA83A-B143-94BB-B48B-41A7423070CE}"/>
+                <a16:creationId xmlns="" xmlns:a16="http://schemas.microsoft.com/office/drawing/2014/main" id="{99DAA83A-B143-94BB-B48B-41A7423070CE}"/>
               </a:ext>
             </a:extLst>
           </p:cNvPr>
@@ -23104,14 +23201,14 @@
           </a:p>
         </p:txBody>
       </p:sp>
-      <mc:AlternateContent xmlns:mc="http://schemas.openxmlformats.org/markup-compatibility/2006" xmlns:a14="http://schemas.microsoft.com/office/drawing/2010/main">
-        <mc:Choice Requires="a14">
+      <mc:AlternateContent xmlns:mc="http://schemas.openxmlformats.org/markup-compatibility/2006">
+        <mc:Choice xmlns:a14="http://schemas.microsoft.com/office/drawing/2010/main" Requires="a14">
           <p:sp>
             <p:nvSpPr>
               <p:cNvPr id="3" name="Espaço Reservado para Conteúdo 2">
                 <a:extLst>
                   <a:ext uri="{FF2B5EF4-FFF2-40B4-BE49-F238E27FC236}">
-                    <a16:creationId xmlns:a16="http://schemas.microsoft.com/office/drawing/2014/main" xmlns="" id="{32DF54A1-52F5-C48C-7CD4-D6E451DF19D8}"/>
+                    <a16:creationId xmlns="" xmlns:a16="http://schemas.microsoft.com/office/drawing/2014/main" id="{32DF54A1-52F5-C48C-7CD4-D6E451DF19D8}"/>
                   </a:ext>
                 </a:extLst>
               </p:cNvPr>
@@ -23135,7 +23232,7 @@
               <a:lstStyle/>
               <a:p>
                 <a:r>
-                  <a:rPr lang="pt-BR" b="0" dirty="0">
+                  <a:rPr lang="pt-BR" b="0" dirty="0" smtClean="0">
                     <a:effectLst/>
                   </a:rPr>
                   <a:t>Além de fazer c</a:t>
@@ -23170,11 +23267,20 @@
                 <a:r>
                   <a:rPr lang="pt-BR" b="1" dirty="0">
                     <a:solidFill>
+                      <a:srgbClr val="7030A0"/>
+                    </a:solidFill>
+                    <a:effectLst/>
+                  </a:rPr>
+                  <a:t>soma </a:t>
+                </a:r>
+                <a:r>
+                  <a:rPr lang="pt-BR" b="1" dirty="0">
+                    <a:solidFill>
                       <a:srgbClr val="00B050"/>
                     </a:solidFill>
                     <a:effectLst/>
                   </a:rPr>
-                  <a:t>soma de todas as saídas sempre seja igual a 1</a:t>
+                  <a:t>de todas as saídas sempre seja igual a 1</a:t>
                 </a:r>
                 <a:r>
                   <a:rPr lang="pt-BR" b="0" dirty="0">
@@ -23294,31 +23400,18 @@
                           </a:rPr>
                           <m:t>,</m:t>
                         </m:r>
-                        <m:sSub>
-                          <m:sSubPr>
-                            <m:ctrlPr>
-                              <a:rPr lang="pt-BR" i="1">
-                                <a:latin typeface="Cambria Math" panose="02040503050406030204" pitchFamily="18" charset="0"/>
-                              </a:rPr>
-                            </m:ctrlPr>
-                          </m:sSubPr>
-                          <m:e>
-                            <m:r>
-                              <a:rPr lang="pt-BR" b="1" i="1">
-                                <a:latin typeface="Cambria Math" panose="02040503050406030204" pitchFamily="18" charset="0"/>
-                              </a:rPr>
-                              <m:t>𝒂</m:t>
-                            </m:r>
-                          </m:e>
-                          <m:sub>
-                            <m:r>
-                              <a:rPr lang="pt-BR" i="1">
-                                <a:latin typeface="Cambria Math" panose="02040503050406030204" pitchFamily="18" charset="0"/>
-                              </a:rPr>
-                              <m:t>0</m:t>
-                            </m:r>
-                          </m:sub>
-                        </m:sSub>
+                        <m:r>
+                          <a:rPr lang="pt-BR" b="1" i="1" smtClean="0">
+                            <a:latin typeface="Cambria Math" panose="02040503050406030204" pitchFamily="18" charset="0"/>
+                          </a:rPr>
+                          <m:t>𝑨</m:t>
+                        </m:r>
+                        <m:r>
+                          <a:rPr lang="pt-BR" i="1" smtClean="0">
+                            <a:latin typeface="Cambria Math" panose="02040503050406030204" pitchFamily="18" charset="0"/>
+                          </a:rPr>
+                          <m:t> </m:t>
+                        </m:r>
                       </m:e>
                     </m:d>
                     <m:r>
@@ -23385,55 +23478,35 @@
                           </a:rPr>
                           <m:t>𝒙</m:t>
                         </m:r>
-                        <m:r>
-                          <a:rPr lang="pt-BR" i="1">
-                            <a:latin typeface="Cambria Math" panose="02040503050406030204" pitchFamily="18" charset="0"/>
-                          </a:rPr>
-                          <m:t>(</m:t>
-                        </m:r>
-                        <m:r>
-                          <a:rPr lang="pt-BR" i="1">
-                            <a:latin typeface="Cambria Math" panose="02040503050406030204" pitchFamily="18" charset="0"/>
-                          </a:rPr>
-                          <m:t>𝑛</m:t>
-                        </m:r>
-                        <m:r>
-                          <a:rPr lang="pt-BR" i="1">
-                            <a:latin typeface="Cambria Math" panose="02040503050406030204" pitchFamily="18" charset="0"/>
-                          </a:rPr>
-                          <m:t>)</m:t>
-                        </m:r>
-                        <m:sSub>
-                          <m:sSubPr>
+                        <m:d>
+                          <m:dPr>
                             <m:ctrlPr>
-                              <a:rPr lang="pt-BR" i="1">
+                              <a:rPr lang="pt-BR" b="1" i="1">
                                 <a:latin typeface="Cambria Math" panose="02040503050406030204" pitchFamily="18" charset="0"/>
                               </a:rPr>
                             </m:ctrlPr>
-                          </m:sSubPr>
+                          </m:dPr>
                           <m:e>
-                            <m:r>
-                              <a:rPr lang="pt-BR" b="1" i="1">
-                                <a:latin typeface="Cambria Math" panose="02040503050406030204" pitchFamily="18" charset="0"/>
-                              </a:rPr>
-                              <m:t>,</m:t>
-                            </m:r>
-                            <m:r>
-                              <a:rPr lang="pt-BR" b="1" i="1">
-                                <a:latin typeface="Cambria Math" panose="02040503050406030204" pitchFamily="18" charset="0"/>
-                              </a:rPr>
-                              <m:t>𝒂</m:t>
-                            </m:r>
-                          </m:e>
-                          <m:sub>
                             <m:r>
                               <a:rPr lang="pt-BR" i="1">
                                 <a:latin typeface="Cambria Math" panose="02040503050406030204" pitchFamily="18" charset="0"/>
                               </a:rPr>
-                              <m:t>1</m:t>
+                              <m:t>𝑛</m:t>
                             </m:r>
-                          </m:sub>
-                        </m:sSub>
+                          </m:e>
+                        </m:d>
+                        <m:r>
+                          <a:rPr lang="pt-BR" b="0" i="1" smtClean="0">
+                            <a:latin typeface="Cambria Math" panose="02040503050406030204" pitchFamily="18" charset="0"/>
+                          </a:rPr>
+                          <m:t>,</m:t>
+                        </m:r>
+                        <m:r>
+                          <a:rPr lang="pt-BR" b="1" i="1">
+                            <a:latin typeface="Cambria Math" panose="02040503050406030204" pitchFamily="18" charset="0"/>
+                          </a:rPr>
+                          <m:t>𝑨</m:t>
+                        </m:r>
                       </m:e>
                     </m:d>
                     <m:r>
@@ -23525,42 +23598,17 @@
                           </m:e>
                         </m:d>
                         <m:r>
-                          <a:rPr lang="pt-BR" i="1">
+                          <a:rPr lang="pt-BR" b="0" i="1" smtClean="0">
                             <a:latin typeface="Cambria Math" panose="02040503050406030204" pitchFamily="18" charset="0"/>
                           </a:rPr>
                           <m:t>,</m:t>
                         </m:r>
-                        <m:sSub>
-                          <m:sSubPr>
-                            <m:ctrlPr>
-                              <a:rPr lang="pt-BR" i="1">
-                                <a:latin typeface="Cambria Math" panose="02040503050406030204" pitchFamily="18" charset="0"/>
-                              </a:rPr>
-                            </m:ctrlPr>
-                          </m:sSubPr>
-                          <m:e>
-                            <m:r>
-                              <a:rPr lang="pt-BR" b="1" i="1">
-                                <a:latin typeface="Cambria Math" panose="02040503050406030204" pitchFamily="18" charset="0"/>
-                              </a:rPr>
-                              <m:t>𝒂</m:t>
-                            </m:r>
-                          </m:e>
-                          <m:sub>
-                            <m:r>
-                              <a:rPr lang="pt-BR" i="1">
-                                <a:latin typeface="Cambria Math" panose="02040503050406030204" pitchFamily="18" charset="0"/>
-                              </a:rPr>
-                              <m:t>𝑄</m:t>
-                            </m:r>
-                            <m:r>
-                              <a:rPr lang="pt-BR" i="1">
-                                <a:latin typeface="Cambria Math" panose="02040503050406030204" pitchFamily="18" charset="0"/>
-                              </a:rPr>
-                              <m:t>−1</m:t>
-                            </m:r>
-                          </m:sub>
-                        </m:sSub>
+                        <m:r>
+                          <a:rPr lang="pt-BR" b="1" i="1">
+                            <a:latin typeface="Cambria Math" panose="02040503050406030204" pitchFamily="18" charset="0"/>
+                          </a:rPr>
+                          <m:t>𝑨</m:t>
+                        </m:r>
                       </m:e>
                     </m:d>
                     <m:r>
@@ -23582,7 +23630,7 @@
             </p:txBody>
           </p:sp>
         </mc:Choice>
-        <mc:Fallback xmlns="">
+        <mc:Fallback>
           <p:sp>
             <p:nvSpPr>
               <p:cNvPr id="3" name="Espaço Reservado para Conteúdo 2">
@@ -23633,7 +23681,7 @@
               <p:cNvPr id="4" name="CaixaDeTexto 3">
                 <a:extLst>
                   <a:ext uri="{FF2B5EF4-FFF2-40B4-BE49-F238E27FC236}">
-                    <a16:creationId xmlns:a16="http://schemas.microsoft.com/office/drawing/2014/main" xmlns="" id="{2B7728A0-505D-9DAE-23EC-8172E2EEEFA9}"/>
+                    <a16:creationId xmlns="" xmlns:a16="http://schemas.microsoft.com/office/drawing/2014/main" id="{2B7728A0-505D-9DAE-23EC-8172E2EEEFA9}"/>
                   </a:ext>
                 </a:extLst>
               </p:cNvPr>
@@ -23727,20 +23775,14 @@
       </mc:AlternateContent>
       <p:pic>
         <p:nvPicPr>
-          <p:cNvPr id="5" name="Picture 4">
-            <a:extLst>
-              <a:ext uri="{FF2B5EF4-FFF2-40B4-BE49-F238E27FC236}">
-                <a16:creationId xmlns:a16="http://schemas.microsoft.com/office/drawing/2014/main" xmlns="" id="{5488725B-FC33-B5BC-707D-29521FAA0FD4}"/>
-              </a:ext>
-            </a:extLst>
-          </p:cNvPr>
+          <p:cNvPr id="6" name="Imagem 5"/>
           <p:cNvPicPr>
             <a:picLocks noChangeAspect="1"/>
           </p:cNvPicPr>
           <p:nvPr/>
         </p:nvPicPr>
         <p:blipFill>
-          <a:blip r:embed="rId6" cstate="print">
+          <a:blip r:embed="rId6">
             <a:extLst>
               <a:ext uri="{28A0092B-C50C-407E-A947-70E740481C1C}">
                 <a14:useLocalDpi xmlns:a14="http://schemas.microsoft.com/office/drawing/2010/main" val="0"/>
@@ -23753,8 +23795,8 @@
         </p:blipFill>
         <p:spPr>
           <a:xfrm>
-            <a:off x="3038272" y="3889057"/>
-            <a:ext cx="6115456" cy="2468904"/>
+            <a:off x="3038591" y="3863499"/>
+            <a:ext cx="6114818" cy="2481287"/>
           </a:xfrm>
           <a:prstGeom prst="rect">
             <a:avLst/>

--- a/slides/C24_Regressor_Softmax.pptx
+++ b/slides/C24_Regressor_Softmax.pptx
@@ -4869,7 +4869,7 @@
           <p:cNvPr id="2" name="Título 1">
             <a:extLst>
               <a:ext uri="{FF2B5EF4-FFF2-40B4-BE49-F238E27FC236}">
-                <a16:creationId xmlns="" xmlns:a16="http://schemas.microsoft.com/office/drawing/2014/main" id="{1DB9B4FF-B06E-403C-A326-BDC64D8FF94E}"/>
+                <a16:creationId xmlns:a16="http://schemas.microsoft.com/office/drawing/2014/main" xmlns="" id="{1DB9B4FF-B06E-403C-A326-BDC64D8FF94E}"/>
               </a:ext>
             </a:extLst>
           </p:cNvPr>
@@ -4906,7 +4906,7 @@
           <p:cNvPr id="3" name="Subtítulo 2">
             <a:extLst>
               <a:ext uri="{FF2B5EF4-FFF2-40B4-BE49-F238E27FC236}">
-                <a16:creationId xmlns="" xmlns:a16="http://schemas.microsoft.com/office/drawing/2014/main" id="{247BDFCE-746E-45BF-A319-4733D58D1632}"/>
+                <a16:creationId xmlns:a16="http://schemas.microsoft.com/office/drawing/2014/main" xmlns="" id="{247BDFCE-746E-45BF-A319-4733D58D1632}"/>
               </a:ext>
             </a:extLst>
           </p:cNvPr>
@@ -4976,7 +4976,7 @@
           <p:cNvPr id="4" name="Espaço Reservado para Data 3">
             <a:extLst>
               <a:ext uri="{FF2B5EF4-FFF2-40B4-BE49-F238E27FC236}">
-                <a16:creationId xmlns="" xmlns:a16="http://schemas.microsoft.com/office/drawing/2014/main" id="{9EDE2778-5372-4104-B96D-968184DA8288}"/>
+                <a16:creationId xmlns:a16="http://schemas.microsoft.com/office/drawing/2014/main" xmlns="" id="{9EDE2778-5372-4104-B96D-968184DA8288}"/>
               </a:ext>
             </a:extLst>
           </p:cNvPr>
@@ -5005,7 +5005,7 @@
           <p:cNvPr id="5" name="Espaço Reservado para Rodapé 4">
             <a:extLst>
               <a:ext uri="{FF2B5EF4-FFF2-40B4-BE49-F238E27FC236}">
-                <a16:creationId xmlns="" xmlns:a16="http://schemas.microsoft.com/office/drawing/2014/main" id="{C1DD0F41-C861-4051-988D-3024A37A4B93}"/>
+                <a16:creationId xmlns:a16="http://schemas.microsoft.com/office/drawing/2014/main" xmlns="" id="{C1DD0F41-C861-4051-988D-3024A37A4B93}"/>
               </a:ext>
             </a:extLst>
           </p:cNvPr>
@@ -5030,7 +5030,7 @@
           <p:cNvPr id="6" name="Espaço Reservado para Número de Slide 5">
             <a:extLst>
               <a:ext uri="{FF2B5EF4-FFF2-40B4-BE49-F238E27FC236}">
-                <a16:creationId xmlns="" xmlns:a16="http://schemas.microsoft.com/office/drawing/2014/main" id="{07E5967E-D980-431A-A5DB-3F0C5030A81E}"/>
+                <a16:creationId xmlns:a16="http://schemas.microsoft.com/office/drawing/2014/main" xmlns="" id="{07E5967E-D980-431A-A5DB-3F0C5030A81E}"/>
               </a:ext>
             </a:extLst>
           </p:cNvPr>
@@ -5089,7 +5089,7 @@
           <p:cNvPr id="2" name="Título 1">
             <a:extLst>
               <a:ext uri="{FF2B5EF4-FFF2-40B4-BE49-F238E27FC236}">
-                <a16:creationId xmlns="" xmlns:a16="http://schemas.microsoft.com/office/drawing/2014/main" id="{9036C49F-3E68-4175-81BA-3C3FEE44308A}"/>
+                <a16:creationId xmlns:a16="http://schemas.microsoft.com/office/drawing/2014/main" xmlns="" id="{9036C49F-3E68-4175-81BA-3C3FEE44308A}"/>
               </a:ext>
             </a:extLst>
           </p:cNvPr>
@@ -5117,7 +5117,7 @@
           <p:cNvPr id="3" name="Espaço Reservado para Texto Vertical 2">
             <a:extLst>
               <a:ext uri="{FF2B5EF4-FFF2-40B4-BE49-F238E27FC236}">
-                <a16:creationId xmlns="" xmlns:a16="http://schemas.microsoft.com/office/drawing/2014/main" id="{426FA736-3DD3-4D4E-B57B-BBE1D8F7D424}"/>
+                <a16:creationId xmlns:a16="http://schemas.microsoft.com/office/drawing/2014/main" xmlns="" id="{426FA736-3DD3-4D4E-B57B-BBE1D8F7D424}"/>
               </a:ext>
             </a:extLst>
           </p:cNvPr>
@@ -5174,7 +5174,7 @@
           <p:cNvPr id="4" name="Espaço Reservado para Data 3">
             <a:extLst>
               <a:ext uri="{FF2B5EF4-FFF2-40B4-BE49-F238E27FC236}">
-                <a16:creationId xmlns="" xmlns:a16="http://schemas.microsoft.com/office/drawing/2014/main" id="{99E8855C-D8FD-48F6-B14E-861E0DE4D915}"/>
+                <a16:creationId xmlns:a16="http://schemas.microsoft.com/office/drawing/2014/main" xmlns="" id="{99E8855C-D8FD-48F6-B14E-861E0DE4D915}"/>
               </a:ext>
             </a:extLst>
           </p:cNvPr>
@@ -5203,7 +5203,7 @@
           <p:cNvPr id="5" name="Espaço Reservado para Rodapé 4">
             <a:extLst>
               <a:ext uri="{FF2B5EF4-FFF2-40B4-BE49-F238E27FC236}">
-                <a16:creationId xmlns="" xmlns:a16="http://schemas.microsoft.com/office/drawing/2014/main" id="{97C0BB88-2F21-42A5-ACFF-83DA47F2D340}"/>
+                <a16:creationId xmlns:a16="http://schemas.microsoft.com/office/drawing/2014/main" xmlns="" id="{97C0BB88-2F21-42A5-ACFF-83DA47F2D340}"/>
               </a:ext>
             </a:extLst>
           </p:cNvPr>
@@ -5228,7 +5228,7 @@
           <p:cNvPr id="6" name="Espaço Reservado para Número de Slide 5">
             <a:extLst>
               <a:ext uri="{FF2B5EF4-FFF2-40B4-BE49-F238E27FC236}">
-                <a16:creationId xmlns="" xmlns:a16="http://schemas.microsoft.com/office/drawing/2014/main" id="{6CB462B3-1F22-4C05-B4B8-7A279FB7D5E9}"/>
+                <a16:creationId xmlns:a16="http://schemas.microsoft.com/office/drawing/2014/main" xmlns="" id="{6CB462B3-1F22-4C05-B4B8-7A279FB7D5E9}"/>
               </a:ext>
             </a:extLst>
           </p:cNvPr>
@@ -5287,7 +5287,7 @@
           <p:cNvPr id="2" name="Título Vertical 1">
             <a:extLst>
               <a:ext uri="{FF2B5EF4-FFF2-40B4-BE49-F238E27FC236}">
-                <a16:creationId xmlns="" xmlns:a16="http://schemas.microsoft.com/office/drawing/2014/main" id="{EAEAB728-701C-4207-A9D5-23FF45C60502}"/>
+                <a16:creationId xmlns:a16="http://schemas.microsoft.com/office/drawing/2014/main" xmlns="" id="{EAEAB728-701C-4207-A9D5-23FF45C60502}"/>
               </a:ext>
             </a:extLst>
           </p:cNvPr>
@@ -5320,7 +5320,7 @@
           <p:cNvPr id="3" name="Espaço Reservado para Texto Vertical 2">
             <a:extLst>
               <a:ext uri="{FF2B5EF4-FFF2-40B4-BE49-F238E27FC236}">
-                <a16:creationId xmlns="" xmlns:a16="http://schemas.microsoft.com/office/drawing/2014/main" id="{BA8C8CCF-7823-480A-9A19-0F664DD17E3B}"/>
+                <a16:creationId xmlns:a16="http://schemas.microsoft.com/office/drawing/2014/main" xmlns="" id="{BA8C8CCF-7823-480A-9A19-0F664DD17E3B}"/>
               </a:ext>
             </a:extLst>
           </p:cNvPr>
@@ -5382,7 +5382,7 @@
           <p:cNvPr id="4" name="Espaço Reservado para Data 3">
             <a:extLst>
               <a:ext uri="{FF2B5EF4-FFF2-40B4-BE49-F238E27FC236}">
-                <a16:creationId xmlns="" xmlns:a16="http://schemas.microsoft.com/office/drawing/2014/main" id="{721D5734-7B1F-425D-942F-6EB73344027C}"/>
+                <a16:creationId xmlns:a16="http://schemas.microsoft.com/office/drawing/2014/main" xmlns="" id="{721D5734-7B1F-425D-942F-6EB73344027C}"/>
               </a:ext>
             </a:extLst>
           </p:cNvPr>
@@ -5411,7 +5411,7 @@
           <p:cNvPr id="5" name="Espaço Reservado para Rodapé 4">
             <a:extLst>
               <a:ext uri="{FF2B5EF4-FFF2-40B4-BE49-F238E27FC236}">
-                <a16:creationId xmlns="" xmlns:a16="http://schemas.microsoft.com/office/drawing/2014/main" id="{1E1AAEAC-F08D-45FE-89EC-B1B349A868C9}"/>
+                <a16:creationId xmlns:a16="http://schemas.microsoft.com/office/drawing/2014/main" xmlns="" id="{1E1AAEAC-F08D-45FE-89EC-B1B349A868C9}"/>
               </a:ext>
             </a:extLst>
           </p:cNvPr>
@@ -5436,7 +5436,7 @@
           <p:cNvPr id="6" name="Espaço Reservado para Número de Slide 5">
             <a:extLst>
               <a:ext uri="{FF2B5EF4-FFF2-40B4-BE49-F238E27FC236}">
-                <a16:creationId xmlns="" xmlns:a16="http://schemas.microsoft.com/office/drawing/2014/main" id="{BAA44493-9911-47B2-87A6-C2141A972BC8}"/>
+                <a16:creationId xmlns:a16="http://schemas.microsoft.com/office/drawing/2014/main" xmlns="" id="{BAA44493-9911-47B2-87A6-C2141A972BC8}"/>
               </a:ext>
             </a:extLst>
           </p:cNvPr>
@@ -5495,7 +5495,7 @@
           <p:cNvPr id="2" name="Título 1">
             <a:extLst>
               <a:ext uri="{FF2B5EF4-FFF2-40B4-BE49-F238E27FC236}">
-                <a16:creationId xmlns="" xmlns:a16="http://schemas.microsoft.com/office/drawing/2014/main" id="{71BD44A5-8F21-4626-A01D-48A1C874B1D5}"/>
+                <a16:creationId xmlns:a16="http://schemas.microsoft.com/office/drawing/2014/main" xmlns="" id="{71BD44A5-8F21-4626-A01D-48A1C874B1D5}"/>
               </a:ext>
             </a:extLst>
           </p:cNvPr>
@@ -5523,7 +5523,7 @@
           <p:cNvPr id="3" name="Espaço Reservado para Conteúdo 2">
             <a:extLst>
               <a:ext uri="{FF2B5EF4-FFF2-40B4-BE49-F238E27FC236}">
-                <a16:creationId xmlns="" xmlns:a16="http://schemas.microsoft.com/office/drawing/2014/main" id="{B79E8085-65A9-48AA-951D-71D978BFF4ED}"/>
+                <a16:creationId xmlns:a16="http://schemas.microsoft.com/office/drawing/2014/main" xmlns="" id="{B79E8085-65A9-48AA-951D-71D978BFF4ED}"/>
               </a:ext>
             </a:extLst>
           </p:cNvPr>
@@ -5580,7 +5580,7 @@
           <p:cNvPr id="4" name="Espaço Reservado para Data 3">
             <a:extLst>
               <a:ext uri="{FF2B5EF4-FFF2-40B4-BE49-F238E27FC236}">
-                <a16:creationId xmlns="" xmlns:a16="http://schemas.microsoft.com/office/drawing/2014/main" id="{F05BE1AF-51EA-425D-B188-DE7BD675009F}"/>
+                <a16:creationId xmlns:a16="http://schemas.microsoft.com/office/drawing/2014/main" xmlns="" id="{F05BE1AF-51EA-425D-B188-DE7BD675009F}"/>
               </a:ext>
             </a:extLst>
           </p:cNvPr>
@@ -5609,7 +5609,7 @@
           <p:cNvPr id="5" name="Espaço Reservado para Rodapé 4">
             <a:extLst>
               <a:ext uri="{FF2B5EF4-FFF2-40B4-BE49-F238E27FC236}">
-                <a16:creationId xmlns="" xmlns:a16="http://schemas.microsoft.com/office/drawing/2014/main" id="{121BE632-29CF-4CB9-B365-C9EF38F89BE6}"/>
+                <a16:creationId xmlns:a16="http://schemas.microsoft.com/office/drawing/2014/main" xmlns="" id="{121BE632-29CF-4CB9-B365-C9EF38F89BE6}"/>
               </a:ext>
             </a:extLst>
           </p:cNvPr>
@@ -5634,7 +5634,7 @@
           <p:cNvPr id="6" name="Espaço Reservado para Número de Slide 5">
             <a:extLst>
               <a:ext uri="{FF2B5EF4-FFF2-40B4-BE49-F238E27FC236}">
-                <a16:creationId xmlns="" xmlns:a16="http://schemas.microsoft.com/office/drawing/2014/main" id="{60CF3DD1-9AEC-4A57-B461-4E4DD86FAC18}"/>
+                <a16:creationId xmlns:a16="http://schemas.microsoft.com/office/drawing/2014/main" xmlns="" id="{60CF3DD1-9AEC-4A57-B461-4E4DD86FAC18}"/>
               </a:ext>
             </a:extLst>
           </p:cNvPr>
@@ -5693,7 +5693,7 @@
           <p:cNvPr id="2" name="Título 1">
             <a:extLst>
               <a:ext uri="{FF2B5EF4-FFF2-40B4-BE49-F238E27FC236}">
-                <a16:creationId xmlns="" xmlns:a16="http://schemas.microsoft.com/office/drawing/2014/main" id="{34AB2FF0-A4D7-4E28-991D-FF26140D5988}"/>
+                <a16:creationId xmlns:a16="http://schemas.microsoft.com/office/drawing/2014/main" xmlns="" id="{34AB2FF0-A4D7-4E28-991D-FF26140D5988}"/>
               </a:ext>
             </a:extLst>
           </p:cNvPr>
@@ -5730,7 +5730,7 @@
           <p:cNvPr id="3" name="Espaço Reservado para Texto 2">
             <a:extLst>
               <a:ext uri="{FF2B5EF4-FFF2-40B4-BE49-F238E27FC236}">
-                <a16:creationId xmlns="" xmlns:a16="http://schemas.microsoft.com/office/drawing/2014/main" id="{E2AC45B0-4145-40DB-8E61-105461170604}"/>
+                <a16:creationId xmlns:a16="http://schemas.microsoft.com/office/drawing/2014/main" xmlns="" id="{E2AC45B0-4145-40DB-8E61-105461170604}"/>
               </a:ext>
             </a:extLst>
           </p:cNvPr>
@@ -5855,7 +5855,7 @@
           <p:cNvPr id="4" name="Espaço Reservado para Data 3">
             <a:extLst>
               <a:ext uri="{FF2B5EF4-FFF2-40B4-BE49-F238E27FC236}">
-                <a16:creationId xmlns="" xmlns:a16="http://schemas.microsoft.com/office/drawing/2014/main" id="{50F1D3FB-740A-4EBA-A309-2CE71D12ECFB}"/>
+                <a16:creationId xmlns:a16="http://schemas.microsoft.com/office/drawing/2014/main" xmlns="" id="{50F1D3FB-740A-4EBA-A309-2CE71D12ECFB}"/>
               </a:ext>
             </a:extLst>
           </p:cNvPr>
@@ -5884,7 +5884,7 @@
           <p:cNvPr id="5" name="Espaço Reservado para Rodapé 4">
             <a:extLst>
               <a:ext uri="{FF2B5EF4-FFF2-40B4-BE49-F238E27FC236}">
-                <a16:creationId xmlns="" xmlns:a16="http://schemas.microsoft.com/office/drawing/2014/main" id="{BDCAB18F-8715-4465-A940-F9C193A2ACE9}"/>
+                <a16:creationId xmlns:a16="http://schemas.microsoft.com/office/drawing/2014/main" xmlns="" id="{BDCAB18F-8715-4465-A940-F9C193A2ACE9}"/>
               </a:ext>
             </a:extLst>
           </p:cNvPr>
@@ -5909,7 +5909,7 @@
           <p:cNvPr id="6" name="Espaço Reservado para Número de Slide 5">
             <a:extLst>
               <a:ext uri="{FF2B5EF4-FFF2-40B4-BE49-F238E27FC236}">
-                <a16:creationId xmlns="" xmlns:a16="http://schemas.microsoft.com/office/drawing/2014/main" id="{353466C6-8248-429F-8056-FF040BF509EB}"/>
+                <a16:creationId xmlns:a16="http://schemas.microsoft.com/office/drawing/2014/main" xmlns="" id="{353466C6-8248-429F-8056-FF040BF509EB}"/>
               </a:ext>
             </a:extLst>
           </p:cNvPr>
@@ -5968,7 +5968,7 @@
           <p:cNvPr id="2" name="Título 1">
             <a:extLst>
               <a:ext uri="{FF2B5EF4-FFF2-40B4-BE49-F238E27FC236}">
-                <a16:creationId xmlns="" xmlns:a16="http://schemas.microsoft.com/office/drawing/2014/main" id="{BC7BB9F0-F14B-4A91-B2B7-35BC47FE4DE7}"/>
+                <a16:creationId xmlns:a16="http://schemas.microsoft.com/office/drawing/2014/main" xmlns="" id="{BC7BB9F0-F14B-4A91-B2B7-35BC47FE4DE7}"/>
               </a:ext>
             </a:extLst>
           </p:cNvPr>
@@ -5996,7 +5996,7 @@
           <p:cNvPr id="3" name="Espaço Reservado para Conteúdo 2">
             <a:extLst>
               <a:ext uri="{FF2B5EF4-FFF2-40B4-BE49-F238E27FC236}">
-                <a16:creationId xmlns="" xmlns:a16="http://schemas.microsoft.com/office/drawing/2014/main" id="{EC1FC1C4-73DA-47A6-8496-B0B457F7D39A}"/>
+                <a16:creationId xmlns:a16="http://schemas.microsoft.com/office/drawing/2014/main" xmlns="" id="{EC1FC1C4-73DA-47A6-8496-B0B457F7D39A}"/>
               </a:ext>
             </a:extLst>
           </p:cNvPr>
@@ -6058,7 +6058,7 @@
           <p:cNvPr id="4" name="Espaço Reservado para Conteúdo 3">
             <a:extLst>
               <a:ext uri="{FF2B5EF4-FFF2-40B4-BE49-F238E27FC236}">
-                <a16:creationId xmlns="" xmlns:a16="http://schemas.microsoft.com/office/drawing/2014/main" id="{E92F06A8-A449-4D92-9912-76873E529B38}"/>
+                <a16:creationId xmlns:a16="http://schemas.microsoft.com/office/drawing/2014/main" xmlns="" id="{E92F06A8-A449-4D92-9912-76873E529B38}"/>
               </a:ext>
             </a:extLst>
           </p:cNvPr>
@@ -6120,7 +6120,7 @@
           <p:cNvPr id="5" name="Espaço Reservado para Data 4">
             <a:extLst>
               <a:ext uri="{FF2B5EF4-FFF2-40B4-BE49-F238E27FC236}">
-                <a16:creationId xmlns="" xmlns:a16="http://schemas.microsoft.com/office/drawing/2014/main" id="{938070A4-BC2F-4D55-BD8D-DEAF11BB9EE9}"/>
+                <a16:creationId xmlns:a16="http://schemas.microsoft.com/office/drawing/2014/main" xmlns="" id="{938070A4-BC2F-4D55-BD8D-DEAF11BB9EE9}"/>
               </a:ext>
             </a:extLst>
           </p:cNvPr>
@@ -6149,7 +6149,7 @@
           <p:cNvPr id="6" name="Espaço Reservado para Rodapé 5">
             <a:extLst>
               <a:ext uri="{FF2B5EF4-FFF2-40B4-BE49-F238E27FC236}">
-                <a16:creationId xmlns="" xmlns:a16="http://schemas.microsoft.com/office/drawing/2014/main" id="{45CC2DB8-844A-465F-BA9A-7734C80C7F43}"/>
+                <a16:creationId xmlns:a16="http://schemas.microsoft.com/office/drawing/2014/main" xmlns="" id="{45CC2DB8-844A-465F-BA9A-7734C80C7F43}"/>
               </a:ext>
             </a:extLst>
           </p:cNvPr>
@@ -6174,7 +6174,7 @@
           <p:cNvPr id="7" name="Espaço Reservado para Número de Slide 6">
             <a:extLst>
               <a:ext uri="{FF2B5EF4-FFF2-40B4-BE49-F238E27FC236}">
-                <a16:creationId xmlns="" xmlns:a16="http://schemas.microsoft.com/office/drawing/2014/main" id="{4CC606A8-097B-4040-94E0-CD8C88280D8F}"/>
+                <a16:creationId xmlns:a16="http://schemas.microsoft.com/office/drawing/2014/main" xmlns="" id="{4CC606A8-097B-4040-94E0-CD8C88280D8F}"/>
               </a:ext>
             </a:extLst>
           </p:cNvPr>
@@ -6233,7 +6233,7 @@
           <p:cNvPr id="2" name="Título 1">
             <a:extLst>
               <a:ext uri="{FF2B5EF4-FFF2-40B4-BE49-F238E27FC236}">
-                <a16:creationId xmlns="" xmlns:a16="http://schemas.microsoft.com/office/drawing/2014/main" id="{76D66686-0143-4CB6-8C09-BA326F1E7ACA}"/>
+                <a16:creationId xmlns:a16="http://schemas.microsoft.com/office/drawing/2014/main" xmlns="" id="{76D66686-0143-4CB6-8C09-BA326F1E7ACA}"/>
               </a:ext>
             </a:extLst>
           </p:cNvPr>
@@ -6266,7 +6266,7 @@
           <p:cNvPr id="3" name="Espaço Reservado para Texto 2">
             <a:extLst>
               <a:ext uri="{FF2B5EF4-FFF2-40B4-BE49-F238E27FC236}">
-                <a16:creationId xmlns="" xmlns:a16="http://schemas.microsoft.com/office/drawing/2014/main" id="{0227AB85-F59E-4BCE-B846-4FA0992C2F23}"/>
+                <a16:creationId xmlns:a16="http://schemas.microsoft.com/office/drawing/2014/main" xmlns="" id="{0227AB85-F59E-4BCE-B846-4FA0992C2F23}"/>
               </a:ext>
             </a:extLst>
           </p:cNvPr>
@@ -6337,7 +6337,7 @@
           <p:cNvPr id="4" name="Espaço Reservado para Conteúdo 3">
             <a:extLst>
               <a:ext uri="{FF2B5EF4-FFF2-40B4-BE49-F238E27FC236}">
-                <a16:creationId xmlns="" xmlns:a16="http://schemas.microsoft.com/office/drawing/2014/main" id="{3373456C-7319-4D0A-827D-D29F6B083F5D}"/>
+                <a16:creationId xmlns:a16="http://schemas.microsoft.com/office/drawing/2014/main" xmlns="" id="{3373456C-7319-4D0A-827D-D29F6B083F5D}"/>
               </a:ext>
             </a:extLst>
           </p:cNvPr>
@@ -6399,7 +6399,7 @@
           <p:cNvPr id="5" name="Espaço Reservado para Texto 4">
             <a:extLst>
               <a:ext uri="{FF2B5EF4-FFF2-40B4-BE49-F238E27FC236}">
-                <a16:creationId xmlns="" xmlns:a16="http://schemas.microsoft.com/office/drawing/2014/main" id="{4CD109D0-2E83-4262-8029-A871CEC47406}"/>
+                <a16:creationId xmlns:a16="http://schemas.microsoft.com/office/drawing/2014/main" xmlns="" id="{4CD109D0-2E83-4262-8029-A871CEC47406}"/>
               </a:ext>
             </a:extLst>
           </p:cNvPr>
@@ -6470,7 +6470,7 @@
           <p:cNvPr id="6" name="Espaço Reservado para Conteúdo 5">
             <a:extLst>
               <a:ext uri="{FF2B5EF4-FFF2-40B4-BE49-F238E27FC236}">
-                <a16:creationId xmlns="" xmlns:a16="http://schemas.microsoft.com/office/drawing/2014/main" id="{AD706E3A-CFBB-4A6C-A65F-D0360A9E74FE}"/>
+                <a16:creationId xmlns:a16="http://schemas.microsoft.com/office/drawing/2014/main" xmlns="" id="{AD706E3A-CFBB-4A6C-A65F-D0360A9E74FE}"/>
               </a:ext>
             </a:extLst>
           </p:cNvPr>
@@ -6532,7 +6532,7 @@
           <p:cNvPr id="7" name="Espaço Reservado para Data 6">
             <a:extLst>
               <a:ext uri="{FF2B5EF4-FFF2-40B4-BE49-F238E27FC236}">
-                <a16:creationId xmlns="" xmlns:a16="http://schemas.microsoft.com/office/drawing/2014/main" id="{4172C0E5-5AF0-4805-BB51-443733CD2BD5}"/>
+                <a16:creationId xmlns:a16="http://schemas.microsoft.com/office/drawing/2014/main" xmlns="" id="{4172C0E5-5AF0-4805-BB51-443733CD2BD5}"/>
               </a:ext>
             </a:extLst>
           </p:cNvPr>
@@ -6561,7 +6561,7 @@
           <p:cNvPr id="8" name="Espaço Reservado para Rodapé 7">
             <a:extLst>
               <a:ext uri="{FF2B5EF4-FFF2-40B4-BE49-F238E27FC236}">
-                <a16:creationId xmlns="" xmlns:a16="http://schemas.microsoft.com/office/drawing/2014/main" id="{0E801648-156F-497E-99CF-797DF48051E1}"/>
+                <a16:creationId xmlns:a16="http://schemas.microsoft.com/office/drawing/2014/main" xmlns="" id="{0E801648-156F-497E-99CF-797DF48051E1}"/>
               </a:ext>
             </a:extLst>
           </p:cNvPr>
@@ -6586,7 +6586,7 @@
           <p:cNvPr id="9" name="Espaço Reservado para Número de Slide 8">
             <a:extLst>
               <a:ext uri="{FF2B5EF4-FFF2-40B4-BE49-F238E27FC236}">
-                <a16:creationId xmlns="" xmlns:a16="http://schemas.microsoft.com/office/drawing/2014/main" id="{EEE23D32-80E7-4796-A137-66BF842E4B53}"/>
+                <a16:creationId xmlns:a16="http://schemas.microsoft.com/office/drawing/2014/main" xmlns="" id="{EEE23D32-80E7-4796-A137-66BF842E4B53}"/>
               </a:ext>
             </a:extLst>
           </p:cNvPr>
@@ -6645,7 +6645,7 @@
           <p:cNvPr id="2" name="Título 1">
             <a:extLst>
               <a:ext uri="{FF2B5EF4-FFF2-40B4-BE49-F238E27FC236}">
-                <a16:creationId xmlns="" xmlns:a16="http://schemas.microsoft.com/office/drawing/2014/main" id="{2BCE2379-C78F-47E1-8CFC-B846E7AF148D}"/>
+                <a16:creationId xmlns:a16="http://schemas.microsoft.com/office/drawing/2014/main" xmlns="" id="{2BCE2379-C78F-47E1-8CFC-B846E7AF148D}"/>
               </a:ext>
             </a:extLst>
           </p:cNvPr>
@@ -6673,7 +6673,7 @@
           <p:cNvPr id="3" name="Espaço Reservado para Data 2">
             <a:extLst>
               <a:ext uri="{FF2B5EF4-FFF2-40B4-BE49-F238E27FC236}">
-                <a16:creationId xmlns="" xmlns:a16="http://schemas.microsoft.com/office/drawing/2014/main" id="{342600A9-7F92-4E22-9D94-E4717252A817}"/>
+                <a16:creationId xmlns:a16="http://schemas.microsoft.com/office/drawing/2014/main" xmlns="" id="{342600A9-7F92-4E22-9D94-E4717252A817}"/>
               </a:ext>
             </a:extLst>
           </p:cNvPr>
@@ -6702,7 +6702,7 @@
           <p:cNvPr id="4" name="Espaço Reservado para Rodapé 3">
             <a:extLst>
               <a:ext uri="{FF2B5EF4-FFF2-40B4-BE49-F238E27FC236}">
-                <a16:creationId xmlns="" xmlns:a16="http://schemas.microsoft.com/office/drawing/2014/main" id="{192E6BED-F546-40CC-A2DF-99CBA853654E}"/>
+                <a16:creationId xmlns:a16="http://schemas.microsoft.com/office/drawing/2014/main" xmlns="" id="{192E6BED-F546-40CC-A2DF-99CBA853654E}"/>
               </a:ext>
             </a:extLst>
           </p:cNvPr>
@@ -6727,7 +6727,7 @@
           <p:cNvPr id="5" name="Espaço Reservado para Número de Slide 4">
             <a:extLst>
               <a:ext uri="{FF2B5EF4-FFF2-40B4-BE49-F238E27FC236}">
-                <a16:creationId xmlns="" xmlns:a16="http://schemas.microsoft.com/office/drawing/2014/main" id="{6091CC40-A8C4-4063-80EB-CC5099621678}"/>
+                <a16:creationId xmlns:a16="http://schemas.microsoft.com/office/drawing/2014/main" xmlns="" id="{6091CC40-A8C4-4063-80EB-CC5099621678}"/>
               </a:ext>
             </a:extLst>
           </p:cNvPr>
@@ -6786,7 +6786,7 @@
           <p:cNvPr id="2" name="Espaço Reservado para Data 1">
             <a:extLst>
               <a:ext uri="{FF2B5EF4-FFF2-40B4-BE49-F238E27FC236}">
-                <a16:creationId xmlns="" xmlns:a16="http://schemas.microsoft.com/office/drawing/2014/main" id="{DD19515C-212C-4EAE-84A3-8FF4BC844F1B}"/>
+                <a16:creationId xmlns:a16="http://schemas.microsoft.com/office/drawing/2014/main" xmlns="" id="{DD19515C-212C-4EAE-84A3-8FF4BC844F1B}"/>
               </a:ext>
             </a:extLst>
           </p:cNvPr>
@@ -6815,7 +6815,7 @@
           <p:cNvPr id="3" name="Espaço Reservado para Rodapé 2">
             <a:extLst>
               <a:ext uri="{FF2B5EF4-FFF2-40B4-BE49-F238E27FC236}">
-                <a16:creationId xmlns="" xmlns:a16="http://schemas.microsoft.com/office/drawing/2014/main" id="{94D3D120-B3E8-4C96-861D-7A4F12F49B3A}"/>
+                <a16:creationId xmlns:a16="http://schemas.microsoft.com/office/drawing/2014/main" xmlns="" id="{94D3D120-B3E8-4C96-861D-7A4F12F49B3A}"/>
               </a:ext>
             </a:extLst>
           </p:cNvPr>
@@ -6840,7 +6840,7 @@
           <p:cNvPr id="4" name="Espaço Reservado para Número de Slide 3">
             <a:extLst>
               <a:ext uri="{FF2B5EF4-FFF2-40B4-BE49-F238E27FC236}">
-                <a16:creationId xmlns="" xmlns:a16="http://schemas.microsoft.com/office/drawing/2014/main" id="{42E49B68-FA1B-468B-9F17-D5C09243D454}"/>
+                <a16:creationId xmlns:a16="http://schemas.microsoft.com/office/drawing/2014/main" xmlns="" id="{42E49B68-FA1B-468B-9F17-D5C09243D454}"/>
               </a:ext>
             </a:extLst>
           </p:cNvPr>
@@ -6899,7 +6899,7 @@
           <p:cNvPr id="2" name="Título 1">
             <a:extLst>
               <a:ext uri="{FF2B5EF4-FFF2-40B4-BE49-F238E27FC236}">
-                <a16:creationId xmlns="" xmlns:a16="http://schemas.microsoft.com/office/drawing/2014/main" id="{1C17BCBE-A897-4319-85EC-D87909C24980}"/>
+                <a16:creationId xmlns:a16="http://schemas.microsoft.com/office/drawing/2014/main" xmlns="" id="{1C17BCBE-A897-4319-85EC-D87909C24980}"/>
               </a:ext>
             </a:extLst>
           </p:cNvPr>
@@ -6936,7 +6936,7 @@
           <p:cNvPr id="3" name="Espaço Reservado para Conteúdo 2">
             <a:extLst>
               <a:ext uri="{FF2B5EF4-FFF2-40B4-BE49-F238E27FC236}">
-                <a16:creationId xmlns="" xmlns:a16="http://schemas.microsoft.com/office/drawing/2014/main" id="{4226F885-0204-4913-868B-4B8B82576F17}"/>
+                <a16:creationId xmlns:a16="http://schemas.microsoft.com/office/drawing/2014/main" xmlns="" id="{4226F885-0204-4913-868B-4B8B82576F17}"/>
               </a:ext>
             </a:extLst>
           </p:cNvPr>
@@ -7026,7 +7026,7 @@
           <p:cNvPr id="4" name="Espaço Reservado para Texto 3">
             <a:extLst>
               <a:ext uri="{FF2B5EF4-FFF2-40B4-BE49-F238E27FC236}">
-                <a16:creationId xmlns="" xmlns:a16="http://schemas.microsoft.com/office/drawing/2014/main" id="{00F9F784-A858-441B-8AB5-697098141751}"/>
+                <a16:creationId xmlns:a16="http://schemas.microsoft.com/office/drawing/2014/main" xmlns="" id="{00F9F784-A858-441B-8AB5-697098141751}"/>
               </a:ext>
             </a:extLst>
           </p:cNvPr>
@@ -7097,7 +7097,7 @@
           <p:cNvPr id="5" name="Espaço Reservado para Data 4">
             <a:extLst>
               <a:ext uri="{FF2B5EF4-FFF2-40B4-BE49-F238E27FC236}">
-                <a16:creationId xmlns="" xmlns:a16="http://schemas.microsoft.com/office/drawing/2014/main" id="{A4DC363A-5000-472E-8B17-02E7DCB8840A}"/>
+                <a16:creationId xmlns:a16="http://schemas.microsoft.com/office/drawing/2014/main" xmlns="" id="{A4DC363A-5000-472E-8B17-02E7DCB8840A}"/>
               </a:ext>
             </a:extLst>
           </p:cNvPr>
@@ -7126,7 +7126,7 @@
           <p:cNvPr id="6" name="Espaço Reservado para Rodapé 5">
             <a:extLst>
               <a:ext uri="{FF2B5EF4-FFF2-40B4-BE49-F238E27FC236}">
-                <a16:creationId xmlns="" xmlns:a16="http://schemas.microsoft.com/office/drawing/2014/main" id="{5548425D-2C21-4C56-BAD4-662978775C28}"/>
+                <a16:creationId xmlns:a16="http://schemas.microsoft.com/office/drawing/2014/main" xmlns="" id="{5548425D-2C21-4C56-BAD4-662978775C28}"/>
               </a:ext>
             </a:extLst>
           </p:cNvPr>
@@ -7151,7 +7151,7 @@
           <p:cNvPr id="7" name="Espaço Reservado para Número de Slide 6">
             <a:extLst>
               <a:ext uri="{FF2B5EF4-FFF2-40B4-BE49-F238E27FC236}">
-                <a16:creationId xmlns="" xmlns:a16="http://schemas.microsoft.com/office/drawing/2014/main" id="{C63E9726-E64C-42B2-AE8A-8C235A956B48}"/>
+                <a16:creationId xmlns:a16="http://schemas.microsoft.com/office/drawing/2014/main" xmlns="" id="{C63E9726-E64C-42B2-AE8A-8C235A956B48}"/>
               </a:ext>
             </a:extLst>
           </p:cNvPr>
@@ -7210,7 +7210,7 @@
           <p:cNvPr id="2" name="Título 1">
             <a:extLst>
               <a:ext uri="{FF2B5EF4-FFF2-40B4-BE49-F238E27FC236}">
-                <a16:creationId xmlns="" xmlns:a16="http://schemas.microsoft.com/office/drawing/2014/main" id="{11086A78-3E74-450C-96A6-CA8AC37AF772}"/>
+                <a16:creationId xmlns:a16="http://schemas.microsoft.com/office/drawing/2014/main" xmlns="" id="{11086A78-3E74-450C-96A6-CA8AC37AF772}"/>
               </a:ext>
             </a:extLst>
           </p:cNvPr>
@@ -7247,7 +7247,7 @@
           <p:cNvPr id="3" name="Espaço Reservado para Imagem 2">
             <a:extLst>
               <a:ext uri="{FF2B5EF4-FFF2-40B4-BE49-F238E27FC236}">
-                <a16:creationId xmlns="" xmlns:a16="http://schemas.microsoft.com/office/drawing/2014/main" id="{5F5B7312-975A-4DBC-9B2F-3652ADA006FD}"/>
+                <a16:creationId xmlns:a16="http://schemas.microsoft.com/office/drawing/2014/main" xmlns="" id="{5F5B7312-975A-4DBC-9B2F-3652ADA006FD}"/>
               </a:ext>
             </a:extLst>
           </p:cNvPr>
@@ -7314,7 +7314,7 @@
           <p:cNvPr id="4" name="Espaço Reservado para Texto 3">
             <a:extLst>
               <a:ext uri="{FF2B5EF4-FFF2-40B4-BE49-F238E27FC236}">
-                <a16:creationId xmlns="" xmlns:a16="http://schemas.microsoft.com/office/drawing/2014/main" id="{AAF805F5-1DFF-41C6-944C-7D79FE0D0963}"/>
+                <a16:creationId xmlns:a16="http://schemas.microsoft.com/office/drawing/2014/main" xmlns="" id="{AAF805F5-1DFF-41C6-944C-7D79FE0D0963}"/>
               </a:ext>
             </a:extLst>
           </p:cNvPr>
@@ -7385,7 +7385,7 @@
           <p:cNvPr id="5" name="Espaço Reservado para Data 4">
             <a:extLst>
               <a:ext uri="{FF2B5EF4-FFF2-40B4-BE49-F238E27FC236}">
-                <a16:creationId xmlns="" xmlns:a16="http://schemas.microsoft.com/office/drawing/2014/main" id="{02113D81-8665-4516-BD81-C6A1F254EECD}"/>
+                <a16:creationId xmlns:a16="http://schemas.microsoft.com/office/drawing/2014/main" xmlns="" id="{02113D81-8665-4516-BD81-C6A1F254EECD}"/>
               </a:ext>
             </a:extLst>
           </p:cNvPr>
@@ -7414,7 +7414,7 @@
           <p:cNvPr id="6" name="Espaço Reservado para Rodapé 5">
             <a:extLst>
               <a:ext uri="{FF2B5EF4-FFF2-40B4-BE49-F238E27FC236}">
-                <a16:creationId xmlns="" xmlns:a16="http://schemas.microsoft.com/office/drawing/2014/main" id="{2B00C88B-FF32-40AA-A187-727D96FD7862}"/>
+                <a16:creationId xmlns:a16="http://schemas.microsoft.com/office/drawing/2014/main" xmlns="" id="{2B00C88B-FF32-40AA-A187-727D96FD7862}"/>
               </a:ext>
             </a:extLst>
           </p:cNvPr>
@@ -7439,7 +7439,7 @@
           <p:cNvPr id="7" name="Espaço Reservado para Número de Slide 6">
             <a:extLst>
               <a:ext uri="{FF2B5EF4-FFF2-40B4-BE49-F238E27FC236}">
-                <a16:creationId xmlns="" xmlns:a16="http://schemas.microsoft.com/office/drawing/2014/main" id="{A04D1A2D-69F7-4B8F-A730-BC26DC340BA6}"/>
+                <a16:creationId xmlns:a16="http://schemas.microsoft.com/office/drawing/2014/main" xmlns="" id="{A04D1A2D-69F7-4B8F-A730-BC26DC340BA6}"/>
               </a:ext>
             </a:extLst>
           </p:cNvPr>
@@ -7503,7 +7503,7 @@
           <p:cNvPr id="2" name="Espaço Reservado para Título 1">
             <a:extLst>
               <a:ext uri="{FF2B5EF4-FFF2-40B4-BE49-F238E27FC236}">
-                <a16:creationId xmlns="" xmlns:a16="http://schemas.microsoft.com/office/drawing/2014/main" id="{E69A0273-1966-4A1B-9370-4C1CE5036371}"/>
+                <a16:creationId xmlns:a16="http://schemas.microsoft.com/office/drawing/2014/main" xmlns="" id="{E69A0273-1966-4A1B-9370-4C1CE5036371}"/>
               </a:ext>
             </a:extLst>
           </p:cNvPr>
@@ -7541,7 +7541,7 @@
           <p:cNvPr id="3" name="Espaço Reservado para Texto 2">
             <a:extLst>
               <a:ext uri="{FF2B5EF4-FFF2-40B4-BE49-F238E27FC236}">
-                <a16:creationId xmlns="" xmlns:a16="http://schemas.microsoft.com/office/drawing/2014/main" id="{3B9CF87A-0448-49A7-AB25-EBC1D56A40EF}"/>
+                <a16:creationId xmlns:a16="http://schemas.microsoft.com/office/drawing/2014/main" xmlns="" id="{3B9CF87A-0448-49A7-AB25-EBC1D56A40EF}"/>
               </a:ext>
             </a:extLst>
           </p:cNvPr>
@@ -7608,7 +7608,7 @@
           <p:cNvPr id="4" name="Espaço Reservado para Data 3">
             <a:extLst>
               <a:ext uri="{FF2B5EF4-FFF2-40B4-BE49-F238E27FC236}">
-                <a16:creationId xmlns="" xmlns:a16="http://schemas.microsoft.com/office/drawing/2014/main" id="{2EF7B1F2-BB5A-44D0-816D-16AD2C71430E}"/>
+                <a16:creationId xmlns:a16="http://schemas.microsoft.com/office/drawing/2014/main" xmlns="" id="{2EF7B1F2-BB5A-44D0-816D-16AD2C71430E}"/>
               </a:ext>
             </a:extLst>
           </p:cNvPr>
@@ -7655,7 +7655,7 @@
           <p:cNvPr id="5" name="Espaço Reservado para Rodapé 4">
             <a:extLst>
               <a:ext uri="{FF2B5EF4-FFF2-40B4-BE49-F238E27FC236}">
-                <a16:creationId xmlns="" xmlns:a16="http://schemas.microsoft.com/office/drawing/2014/main" id="{C703F94C-2CC8-4DAA-BC35-14FC3E841DCD}"/>
+                <a16:creationId xmlns:a16="http://schemas.microsoft.com/office/drawing/2014/main" xmlns="" id="{C703F94C-2CC8-4DAA-BC35-14FC3E841DCD}"/>
               </a:ext>
             </a:extLst>
           </p:cNvPr>
@@ -7698,7 +7698,7 @@
           <p:cNvPr id="6" name="Espaço Reservado para Número de Slide 5">
             <a:extLst>
               <a:ext uri="{FF2B5EF4-FFF2-40B4-BE49-F238E27FC236}">
-                <a16:creationId xmlns="" xmlns:a16="http://schemas.microsoft.com/office/drawing/2014/main" id="{64051336-7048-457A-8B61-D94291D71648}"/>
+                <a16:creationId xmlns:a16="http://schemas.microsoft.com/office/drawing/2014/main" xmlns="" id="{64051336-7048-457A-8B61-D94291D71648}"/>
               </a:ext>
             </a:extLst>
           </p:cNvPr>
@@ -8066,7 +8066,7 @@
           <p:cNvPr id="4" name="CaixaDeTexto 3">
             <a:extLst>
               <a:ext uri="{FF2B5EF4-FFF2-40B4-BE49-F238E27FC236}">
-                <a16:creationId xmlns="" xmlns:a16="http://schemas.microsoft.com/office/drawing/2014/main" id="{430EB894-B7D4-434C-9D1A-A14094D9BEEC}"/>
+                <a16:creationId xmlns:a16="http://schemas.microsoft.com/office/drawing/2014/main" xmlns="" id="{430EB894-B7D4-434C-9D1A-A14094D9BEEC}"/>
               </a:ext>
             </a:extLst>
           </p:cNvPr>
@@ -8110,7 +8110,7 @@
           <p:cNvPr id="1026" name="Picture 2" descr="Logo">
             <a:extLst>
               <a:ext uri="{FF2B5EF4-FFF2-40B4-BE49-F238E27FC236}">
-                <a16:creationId xmlns="" xmlns:a16="http://schemas.microsoft.com/office/drawing/2014/main" id="{3F2642E0-4F6A-4196-8F58-E77D36E9A33F}"/>
+                <a16:creationId xmlns:a16="http://schemas.microsoft.com/office/drawing/2014/main" xmlns="" id="{3F2642E0-4F6A-4196-8F58-E77D36E9A33F}"/>
               </a:ext>
             </a:extLst>
           </p:cNvPr>
@@ -8155,7 +8155,7 @@
           <p:cNvPr id="5122" name="Picture 2" descr="Image result for machine learning">
             <a:extLst>
               <a:ext uri="{FF2B5EF4-FFF2-40B4-BE49-F238E27FC236}">
-                <a16:creationId xmlns="" xmlns:a16="http://schemas.microsoft.com/office/drawing/2014/main" id="{810CE0A2-4102-44A6-A370-175E7896CDCB}"/>
+                <a16:creationId xmlns:a16="http://schemas.microsoft.com/office/drawing/2014/main" xmlns="" id="{810CE0A2-4102-44A6-A370-175E7896CDCB}"/>
               </a:ext>
             </a:extLst>
           </p:cNvPr>
@@ -8200,7 +8200,7 @@
           <p:cNvPr id="7" name="Título 1">
             <a:extLst>
               <a:ext uri="{FF2B5EF4-FFF2-40B4-BE49-F238E27FC236}">
-                <a16:creationId xmlns="" xmlns:a16="http://schemas.microsoft.com/office/drawing/2014/main" id="{32666AC8-2E17-4DB4-B0F5-60C640CCFD2E}"/>
+                <a16:creationId xmlns:a16="http://schemas.microsoft.com/office/drawing/2014/main" xmlns="" id="{32666AC8-2E17-4DB4-B0F5-60C640CCFD2E}"/>
               </a:ext>
             </a:extLst>
           </p:cNvPr>
@@ -8285,7 +8285,7 @@
           <p:cNvPr id="2" name="Título 1">
             <a:extLst>
               <a:ext uri="{FF2B5EF4-FFF2-40B4-BE49-F238E27FC236}">
-                <a16:creationId xmlns="" xmlns:a16="http://schemas.microsoft.com/office/drawing/2014/main" id="{028A152F-93D8-11FA-9B7A-B62AE5BB6486}"/>
+                <a16:creationId xmlns:a16="http://schemas.microsoft.com/office/drawing/2014/main" xmlns="" id="{028A152F-93D8-11FA-9B7A-B62AE5BB6486}"/>
               </a:ext>
             </a:extLst>
           </p:cNvPr>
@@ -8312,14 +8312,14 @@
           </a:p>
         </p:txBody>
       </p:sp>
-      <mc:AlternateContent xmlns:mc="http://schemas.openxmlformats.org/markup-compatibility/2006">
-        <mc:Choice xmlns:a14="http://schemas.microsoft.com/office/drawing/2010/main" Requires="a14">
+      <mc:AlternateContent xmlns:mc="http://schemas.openxmlformats.org/markup-compatibility/2006" xmlns:a14="http://schemas.microsoft.com/office/drawing/2010/main">
+        <mc:Choice Requires="a14">
           <p:sp>
             <p:nvSpPr>
               <p:cNvPr id="3" name="Espaço Reservado para Conteúdo 2">
                 <a:extLst>
                   <a:ext uri="{FF2B5EF4-FFF2-40B4-BE49-F238E27FC236}">
-                    <a16:creationId xmlns="" xmlns:a16="http://schemas.microsoft.com/office/drawing/2014/main" id="{B3535727-BB24-BB15-5C03-3DA9A3F9A09A}"/>
+                    <a16:creationId xmlns:a16="http://schemas.microsoft.com/office/drawing/2014/main" xmlns="" id="{B3535727-BB24-BB15-5C03-3DA9A3F9A09A}"/>
                   </a:ext>
                 </a:extLst>
               </p:cNvPr>
@@ -8504,7 +8504,7 @@
             </p:txBody>
           </p:sp>
         </mc:Choice>
-        <mc:Fallback>
+        <mc:Fallback xmlns="">
           <p:sp>
             <p:nvSpPr>
               <p:cNvPr id="3" name="Espaço Reservado para Conteúdo 2">
@@ -8553,7 +8553,7 @@
           <p:cNvPr id="7" name="Picture 6">
             <a:extLst>
               <a:ext uri="{FF2B5EF4-FFF2-40B4-BE49-F238E27FC236}">
-                <a16:creationId xmlns="" xmlns:a16="http://schemas.microsoft.com/office/drawing/2014/main" id="{B29D6ED4-6B75-62EC-8922-9CCA4F704E2B}"/>
+                <a16:creationId xmlns:a16="http://schemas.microsoft.com/office/drawing/2014/main" xmlns="" id="{B29D6ED4-6B75-62EC-8922-9CCA4F704E2B}"/>
               </a:ext>
             </a:extLst>
           </p:cNvPr>
@@ -8619,7 +8619,7 @@
           <p:cNvPr id="2" name="Title 1">
             <a:extLst>
               <a:ext uri="{FF2B5EF4-FFF2-40B4-BE49-F238E27FC236}">
-                <a16:creationId xmlns="" xmlns:a16="http://schemas.microsoft.com/office/drawing/2014/main" id="{2DB9D242-5419-0FFB-7863-B3BB3BD80869}"/>
+                <a16:creationId xmlns:a16="http://schemas.microsoft.com/office/drawing/2014/main" xmlns="" id="{2DB9D242-5419-0FFB-7863-B3BB3BD80869}"/>
               </a:ext>
             </a:extLst>
           </p:cNvPr>
@@ -8643,14 +8643,14 @@
           </a:p>
         </p:txBody>
       </p:sp>
-      <mc:AlternateContent xmlns:mc="http://schemas.openxmlformats.org/markup-compatibility/2006">
-        <mc:Choice xmlns:a14="http://schemas.microsoft.com/office/drawing/2010/main" Requires="a14">
+      <mc:AlternateContent xmlns:mc="http://schemas.openxmlformats.org/markup-compatibility/2006" xmlns:a14="http://schemas.microsoft.com/office/drawing/2010/main">
+        <mc:Choice Requires="a14">
           <p:sp>
             <p:nvSpPr>
               <p:cNvPr id="3" name="Content Placeholder 2">
                 <a:extLst>
                   <a:ext uri="{FF2B5EF4-FFF2-40B4-BE49-F238E27FC236}">
-                    <a16:creationId xmlns="" xmlns:a16="http://schemas.microsoft.com/office/drawing/2014/main" id="{34B1DEA3-BAAD-D90C-CD9D-99A5A24F4544}"/>
+                    <a16:creationId xmlns:a16="http://schemas.microsoft.com/office/drawing/2014/main" xmlns="" id="{34B1DEA3-BAAD-D90C-CD9D-99A5A24F4544}"/>
                   </a:ext>
                 </a:extLst>
               </p:cNvPr>
@@ -9529,7 +9529,7 @@
             </p:txBody>
           </p:sp>
         </mc:Choice>
-        <mc:Fallback>
+        <mc:Fallback xmlns="">
           <p:sp>
             <p:nvSpPr>
               <p:cNvPr id="3" name="Content Placeholder 2">
@@ -9608,7 +9608,7 @@
           <p:cNvPr id="2" name="Title 1">
             <a:extLst>
               <a:ext uri="{FF2B5EF4-FFF2-40B4-BE49-F238E27FC236}">
-                <a16:creationId xmlns="" xmlns:a16="http://schemas.microsoft.com/office/drawing/2014/main" id="{997538D5-DC01-EC48-38D2-99D754F1BB92}"/>
+                <a16:creationId xmlns:a16="http://schemas.microsoft.com/office/drawing/2014/main" xmlns="" id="{997538D5-DC01-EC48-38D2-99D754F1BB92}"/>
               </a:ext>
             </a:extLst>
           </p:cNvPr>
@@ -9632,14 +9632,14 @@
           </a:p>
         </p:txBody>
       </p:sp>
-      <mc:AlternateContent xmlns:mc="http://schemas.openxmlformats.org/markup-compatibility/2006">
-        <mc:Choice xmlns:a14="http://schemas.microsoft.com/office/drawing/2010/main" Requires="a14">
+      <mc:AlternateContent xmlns:mc="http://schemas.openxmlformats.org/markup-compatibility/2006" xmlns:a14="http://schemas.microsoft.com/office/drawing/2010/main">
+        <mc:Choice Requires="a14">
           <p:sp>
             <p:nvSpPr>
               <p:cNvPr id="3" name="Content Placeholder 2">
                 <a:extLst>
                   <a:ext uri="{FF2B5EF4-FFF2-40B4-BE49-F238E27FC236}">
-                    <a16:creationId xmlns="" xmlns:a16="http://schemas.microsoft.com/office/drawing/2014/main" id="{17D7928D-3A32-7330-5FDC-756155EF2F3D}"/>
+                    <a16:creationId xmlns:a16="http://schemas.microsoft.com/office/drawing/2014/main" xmlns="" id="{17D7928D-3A32-7330-5FDC-756155EF2F3D}"/>
                   </a:ext>
                 </a:extLst>
               </p:cNvPr>
@@ -10087,7 +10087,7 @@
             </p:txBody>
           </p:sp>
         </mc:Choice>
-        <mc:Fallback>
+        <mc:Fallback xmlns="">
           <p:sp>
             <p:nvSpPr>
               <p:cNvPr id="3" name="Content Placeholder 2">
@@ -10136,7 +10136,7 @@
           <p:cNvPr id="5" name="Picture 4">
             <a:extLst>
               <a:ext uri="{FF2B5EF4-FFF2-40B4-BE49-F238E27FC236}">
-                <a16:creationId xmlns="" xmlns:a16="http://schemas.microsoft.com/office/drawing/2014/main" id="{4AA09737-BB93-F7AB-8A47-090B362628C6}"/>
+                <a16:creationId xmlns:a16="http://schemas.microsoft.com/office/drawing/2014/main" xmlns="" id="{4AA09737-BB93-F7AB-8A47-090B362628C6}"/>
               </a:ext>
             </a:extLst>
           </p:cNvPr>
@@ -10202,7 +10202,7 @@
           <p:cNvPr id="2" name="Título 1">
             <a:extLst>
               <a:ext uri="{FF2B5EF4-FFF2-40B4-BE49-F238E27FC236}">
-                <a16:creationId xmlns="" xmlns:a16="http://schemas.microsoft.com/office/drawing/2014/main" id="{1FE7CD05-66F2-8967-6154-CCED38E0F987}"/>
+                <a16:creationId xmlns:a16="http://schemas.microsoft.com/office/drawing/2014/main" xmlns="" id="{1FE7CD05-66F2-8967-6154-CCED38E0F987}"/>
               </a:ext>
             </a:extLst>
           </p:cNvPr>
@@ -10232,7 +10232,7 @@
               <p:cNvPr id="3" name="Espaço Reservado para Conteúdo 2">
                 <a:extLst>
                   <a:ext uri="{FF2B5EF4-FFF2-40B4-BE49-F238E27FC236}">
-                    <a16:creationId xmlns="" xmlns:a16="http://schemas.microsoft.com/office/drawing/2014/main" id="{21A86630-5D79-AD4B-79FC-6C8373E8DB39}"/>
+                    <a16:creationId xmlns:a16="http://schemas.microsoft.com/office/drawing/2014/main" xmlns="" id="{21A86630-5D79-AD4B-79FC-6C8373E8DB39}"/>
                   </a:ext>
                 </a:extLst>
               </p:cNvPr>
@@ -10251,12 +10251,12 @@
             </p:spPr>
             <p:txBody>
               <a:bodyPr>
-                <a:normAutofit/>
+                <a:normAutofit lnSpcReduction="10000"/>
               </a:bodyPr>
               <a:lstStyle/>
               <a:p>
                 <a:r>
-                  <a:rPr lang="pt-BR" dirty="0"/>
+                  <a:rPr lang="pt-BR" dirty="0" smtClean="0"/>
                   <a:t>Usando a codificação </a:t>
                 </a:r>
                 <a:r>
@@ -10568,60 +10568,122 @@
                             </m:ctrlPr>
                           </m:dPr>
                           <m:e>
-                            <m:r>
-                              <a:rPr lang="pt-BR" i="1">
-                                <a:latin typeface="Cambria Math" panose="02040503050406030204" pitchFamily="18" charset="0"/>
-                              </a:rPr>
-                              <m:t>1</m:t>
-                            </m:r>
-                            <m:d>
-                              <m:dPr>
-                                <m:begChr m:val="{"/>
-                                <m:endChr m:val="}"/>
+                            <m:limLow>
+                              <m:limLowPr>
                                 <m:ctrlPr>
-                                  <a:rPr lang="pt-BR" i="1">
+                                  <a:rPr lang="pt-BR" i="1" smtClean="0">
                                     <a:latin typeface="Cambria Math" panose="02040503050406030204" pitchFamily="18" charset="0"/>
                                   </a:rPr>
                                 </m:ctrlPr>
-                              </m:dPr>
+                              </m:limLowPr>
                               <m:e>
-                                <m:r>
-                                  <a:rPr lang="pt-BR" i="1">
-                                    <a:latin typeface="Cambria Math" panose="02040503050406030204" pitchFamily="18" charset="0"/>
-                                  </a:rPr>
-                                  <m:t>𝑦</m:t>
-                                </m:r>
-                                <m:d>
-                                  <m:dPr>
+                                <m:groupChr>
+                                  <m:groupChrPr>
+                                    <m:chr m:val="⏟"/>
                                     <m:ctrlPr>
-                                      <a:rPr lang="pt-BR" i="1">
+                                      <a:rPr lang="pt-BR" i="1" smtClean="0">
                                         <a:latin typeface="Cambria Math" panose="02040503050406030204" pitchFamily="18" charset="0"/>
                                       </a:rPr>
                                     </m:ctrlPr>
-                                  </m:dPr>
+                                  </m:groupChrPr>
                                   <m:e>
                                     <m:r>
                                       <a:rPr lang="pt-BR" i="1">
                                         <a:latin typeface="Cambria Math" panose="02040503050406030204" pitchFamily="18" charset="0"/>
                                       </a:rPr>
-                                      <m:t>𝑛</m:t>
+                                      <m:t>1</m:t>
+                                    </m:r>
+                                    <m:d>
+                                      <m:dPr>
+                                        <m:begChr m:val="{"/>
+                                        <m:endChr m:val="}"/>
+                                        <m:ctrlPr>
+                                          <a:rPr lang="pt-BR" i="1">
+                                            <a:latin typeface="Cambria Math" panose="02040503050406030204" pitchFamily="18" charset="0"/>
+                                          </a:rPr>
+                                        </m:ctrlPr>
+                                      </m:dPr>
+                                      <m:e>
+                                        <m:r>
+                                          <a:rPr lang="pt-BR" i="1">
+                                            <a:latin typeface="Cambria Math" panose="02040503050406030204" pitchFamily="18" charset="0"/>
+                                          </a:rPr>
+                                          <m:t>𝑦</m:t>
+                                        </m:r>
+                                        <m:d>
+                                          <m:dPr>
+                                            <m:ctrlPr>
+                                              <a:rPr lang="pt-BR" i="1">
+                                                <a:latin typeface="Cambria Math" panose="02040503050406030204" pitchFamily="18" charset="0"/>
+                                              </a:rPr>
+                                            </m:ctrlPr>
+                                          </m:dPr>
+                                          <m:e>
+                                            <m:r>
+                                              <a:rPr lang="pt-BR" i="1">
+                                                <a:latin typeface="Cambria Math" panose="02040503050406030204" pitchFamily="18" charset="0"/>
+                                              </a:rPr>
+                                              <m:t>𝑛</m:t>
+                                            </m:r>
+                                          </m:e>
+                                        </m:d>
+                                        <m:r>
+                                          <a:rPr lang="pt-BR" i="1">
+                                            <a:latin typeface="Cambria Math" panose="02040503050406030204" pitchFamily="18" charset="0"/>
+                                          </a:rPr>
+                                          <m:t>==0</m:t>
+                                        </m:r>
+                                      </m:e>
+                                    </m:d>
+                                  </m:e>
+                                </m:groupChr>
+                              </m:e>
+                              <m:lim>
+                                <m:sSub>
+                                  <m:sSubPr>
+                                    <m:ctrlPr>
+                                      <a:rPr lang="pt-BR" i="1" smtClean="0">
+                                        <a:latin typeface="Cambria Math" panose="02040503050406030204" pitchFamily="18" charset="0"/>
+                                      </a:rPr>
+                                    </m:ctrlPr>
+                                  </m:sSubPr>
+                                  <m:e>
+                                    <m:r>
+                                      <a:rPr lang="pt-BR" b="0" i="1" smtClean="0">
+                                        <a:latin typeface="Cambria Math" panose="02040503050406030204" pitchFamily="18" charset="0"/>
+                                      </a:rPr>
+                                      <m:t>𝑦</m:t>
                                     </m:r>
                                   </m:e>
-                                </m:d>
+                                  <m:sub>
+                                    <m:r>
+                                      <a:rPr lang="pt-BR" b="0" i="1" smtClean="0">
+                                        <a:latin typeface="Cambria Math" panose="02040503050406030204" pitchFamily="18" charset="0"/>
+                                      </a:rPr>
+                                      <m:t>0</m:t>
+                                    </m:r>
+                                  </m:sub>
+                                </m:sSub>
                                 <m:r>
-                                  <a:rPr lang="pt-BR" i="1">
+                                  <a:rPr lang="pt-BR" b="0" i="1" smtClean="0">
                                     <a:latin typeface="Cambria Math" panose="02040503050406030204" pitchFamily="18" charset="0"/>
                                   </a:rPr>
-                                  <m:t>==</m:t>
+                                  <m:t>(</m:t>
                                 </m:r>
                                 <m:r>
                                   <a:rPr lang="pt-BR" b="0" i="1" smtClean="0">
                                     <a:latin typeface="Cambria Math" panose="02040503050406030204" pitchFamily="18" charset="0"/>
                                   </a:rPr>
-                                  <m:t>0</m:t>
+                                  <m:t>𝑛</m:t>
                                 </m:r>
-                              </m:e>
-                            </m:d>
+                                <m:r>
+                                  <a:rPr lang="pt-BR" b="0" i="1" smtClean="0">
+                                    <a:latin typeface="Cambria Math" panose="02040503050406030204" pitchFamily="18" charset="0"/>
+                                  </a:rPr>
+                                  <m:t>)</m:t>
+                                </m:r>
+                              </m:lim>
+                            </m:limLow>
                             <m:r>
                               <a:rPr lang="pt-BR" b="0" i="1" smtClean="0">
                                 <a:latin typeface="Cambria Math" panose="02040503050406030204" pitchFamily="18" charset="0"/>
@@ -10641,66 +10703,146 @@
                               </a:rPr>
                               <m:t>,</m:t>
                             </m:r>
-                            <m:r>
-                              <a:rPr lang="pt-BR" i="1">
-                                <a:latin typeface="Cambria Math" panose="02040503050406030204" pitchFamily="18" charset="0"/>
-                              </a:rPr>
-                              <m:t>1</m:t>
-                            </m:r>
-                            <m:d>
-                              <m:dPr>
-                                <m:begChr m:val="{"/>
-                                <m:endChr m:val="}"/>
+                            <m:limLow>
+                              <m:limLowPr>
                                 <m:ctrlPr>
-                                  <a:rPr lang="pt-BR" i="1">
+                                  <a:rPr lang="pt-BR" b="0" i="1" smtClean="0">
                                     <a:latin typeface="Cambria Math" panose="02040503050406030204" pitchFamily="18" charset="0"/>
                                   </a:rPr>
                                 </m:ctrlPr>
-                              </m:dPr>
+                              </m:limLowPr>
                               <m:e>
-                                <m:r>
-                                  <a:rPr lang="pt-BR" i="1">
-                                    <a:latin typeface="Cambria Math" panose="02040503050406030204" pitchFamily="18" charset="0"/>
-                                  </a:rPr>
-                                  <m:t>𝑦</m:t>
-                                </m:r>
-                                <m:d>
-                                  <m:dPr>
+                                <m:groupChr>
+                                  <m:groupChrPr>
+                                    <m:chr m:val="⏟"/>
+                                    <m:ctrlPr>
+                                      <a:rPr lang="pt-BR" b="0" i="1" smtClean="0">
+                                        <a:latin typeface="Cambria Math" panose="02040503050406030204" pitchFamily="18" charset="0"/>
+                                      </a:rPr>
+                                    </m:ctrlPr>
+                                  </m:groupChrPr>
+                                  <m:e>
+                                    <m:r>
+                                      <a:rPr lang="pt-BR" i="1">
+                                        <a:latin typeface="Cambria Math" panose="02040503050406030204" pitchFamily="18" charset="0"/>
+                                      </a:rPr>
+                                      <m:t>1</m:t>
+                                    </m:r>
+                                    <m:d>
+                                      <m:dPr>
+                                        <m:begChr m:val="{"/>
+                                        <m:endChr m:val="}"/>
+                                        <m:ctrlPr>
+                                          <a:rPr lang="pt-BR" i="1">
+                                            <a:latin typeface="Cambria Math" panose="02040503050406030204" pitchFamily="18" charset="0"/>
+                                          </a:rPr>
+                                        </m:ctrlPr>
+                                      </m:dPr>
+                                      <m:e>
+                                        <m:r>
+                                          <a:rPr lang="pt-BR" i="1">
+                                            <a:latin typeface="Cambria Math" panose="02040503050406030204" pitchFamily="18" charset="0"/>
+                                          </a:rPr>
+                                          <m:t>𝑦</m:t>
+                                        </m:r>
+                                        <m:d>
+                                          <m:dPr>
+                                            <m:ctrlPr>
+                                              <a:rPr lang="pt-BR" i="1">
+                                                <a:latin typeface="Cambria Math" panose="02040503050406030204" pitchFamily="18" charset="0"/>
+                                              </a:rPr>
+                                            </m:ctrlPr>
+                                          </m:dPr>
+                                          <m:e>
+                                            <m:r>
+                                              <a:rPr lang="pt-BR" i="1">
+                                                <a:latin typeface="Cambria Math" panose="02040503050406030204" pitchFamily="18" charset="0"/>
+                                              </a:rPr>
+                                              <m:t>𝑛</m:t>
+                                            </m:r>
+                                          </m:e>
+                                        </m:d>
+                                        <m:r>
+                                          <a:rPr lang="pt-BR" i="1">
+                                            <a:latin typeface="Cambria Math" panose="02040503050406030204" pitchFamily="18" charset="0"/>
+                                          </a:rPr>
+                                          <m:t>==</m:t>
+                                        </m:r>
+                                        <m:r>
+                                          <a:rPr lang="pt-BR" i="1">
+                                            <a:latin typeface="Cambria Math" panose="02040503050406030204" pitchFamily="18" charset="0"/>
+                                          </a:rPr>
+                                          <m:t>𝑄</m:t>
+                                        </m:r>
+                                        <m:r>
+                                          <a:rPr lang="pt-BR" i="1">
+                                            <a:latin typeface="Cambria Math" panose="02040503050406030204" pitchFamily="18" charset="0"/>
+                                          </a:rPr>
+                                          <m:t>−1</m:t>
+                                        </m:r>
+                                      </m:e>
+                                    </m:d>
+                                  </m:e>
+                                </m:groupChr>
+                              </m:e>
+                              <m:lim>
+                                <m:sSub>
+                                  <m:sSubPr>
                                     <m:ctrlPr>
                                       <a:rPr lang="pt-BR" i="1">
                                         <a:latin typeface="Cambria Math" panose="02040503050406030204" pitchFamily="18" charset="0"/>
                                       </a:rPr>
                                     </m:ctrlPr>
-                                  </m:dPr>
+                                  </m:sSubPr>
                                   <m:e>
                                     <m:r>
                                       <a:rPr lang="pt-BR" i="1">
                                         <a:latin typeface="Cambria Math" panose="02040503050406030204" pitchFamily="18" charset="0"/>
                                       </a:rPr>
-                                      <m:t>𝑛</m:t>
+                                      <m:t>𝑦</m:t>
                                     </m:r>
                                   </m:e>
-                                </m:d>
+                                  <m:sub>
+                                    <m:r>
+                                      <a:rPr lang="pt-BR" b="0" i="1" smtClean="0">
+                                        <a:latin typeface="Cambria Math" panose="02040503050406030204" pitchFamily="18" charset="0"/>
+                                      </a:rPr>
+                                      <m:t>𝑄</m:t>
+                                    </m:r>
+                                    <m:r>
+                                      <a:rPr lang="pt-BR" b="0" i="1" smtClean="0">
+                                        <a:latin typeface="Cambria Math" panose="02040503050406030204" pitchFamily="18" charset="0"/>
+                                      </a:rPr>
+                                      <m:t>−1</m:t>
+                                    </m:r>
+                                  </m:sub>
+                                </m:sSub>
                                 <m:r>
                                   <a:rPr lang="pt-BR" i="1">
                                     <a:latin typeface="Cambria Math" panose="02040503050406030204" pitchFamily="18" charset="0"/>
                                   </a:rPr>
-                                  <m:t>==</m:t>
+                                  <m:t>(</m:t>
                                 </m:r>
                                 <m:r>
-                                  <a:rPr lang="pt-BR" b="0" i="1" smtClean="0">
+                                  <a:rPr lang="pt-BR" i="1">
                                     <a:latin typeface="Cambria Math" panose="02040503050406030204" pitchFamily="18" charset="0"/>
                                   </a:rPr>
-                                  <m:t>𝑄</m:t>
+                                  <m:t>𝑛</m:t>
                                 </m:r>
                                 <m:r>
-                                  <a:rPr lang="pt-BR" b="0" i="1" smtClean="0">
+                                  <a:rPr lang="pt-BR" i="1">
                                     <a:latin typeface="Cambria Math" panose="02040503050406030204" pitchFamily="18" charset="0"/>
                                   </a:rPr>
-                                  <m:t>−1</m:t>
+                                  <m:t>)</m:t>
                                 </m:r>
-                              </m:e>
-                            </m:d>
+                              </m:lim>
+                            </m:limLow>
+                            <m:r>
+                              <a:rPr lang="pt-BR" i="1" smtClean="0">
+                                <a:latin typeface="Cambria Math" panose="02040503050406030204" pitchFamily="18" charset="0"/>
+                              </a:rPr>
+                              <m:t> </m:t>
+                            </m:r>
                           </m:e>
                         </m:d>
                       </m:e>
@@ -11162,7 +11304,7 @@
               <p:cNvPr id="3" name="Espaço Reservado para Conteúdo 2">
                 <a:extLst>
                   <a:ext uri="{FF2B5EF4-FFF2-40B4-BE49-F238E27FC236}">
-                    <a16:creationId xmlns:a16="http://schemas.microsoft.com/office/drawing/2014/main" id="{21A86630-5D79-AD4B-79FC-6C8373E8DB39}"/>
+                    <a16:creationId xmlns="" xmlns:a16="http://schemas.microsoft.com/office/drawing/2014/main" xmlns:a14="http://schemas.microsoft.com/office/drawing/2010/main" id="{21A86630-5D79-AD4B-79FC-6C8373E8DB39}"/>
                   </a:ext>
                 </a:extLst>
               </p:cNvPr>
@@ -11178,10 +11320,10 @@
                 <a:off x="838200" y="1825624"/>
                 <a:ext cx="11353800" cy="5032375"/>
               </a:xfrm>
-              <a:blipFill>
+              <a:blipFill rotWithShape="0">
                 <a:blip r:embed="rId2"/>
                 <a:stretch>
-                  <a:fillRect l="-1128" t="-1937" r="-967"/>
+                  <a:fillRect l="-1128" t="-2663" r="-1611"/>
                 </a:stretch>
               </a:blipFill>
             </p:spPr>
@@ -11190,7 +11332,7 @@
               <a:lstStyle/>
               <a:p>
                 <a:r>
-                  <a:rPr lang="en-US">
+                  <a:rPr lang="pt-BR">
                     <a:noFill/>
                   </a:rPr>
                   <a:t> </a:t>
@@ -11235,7 +11377,7 @@
           <p:cNvPr id="2" name="Título 1">
             <a:extLst>
               <a:ext uri="{FF2B5EF4-FFF2-40B4-BE49-F238E27FC236}">
-                <a16:creationId xmlns="" xmlns:a16="http://schemas.microsoft.com/office/drawing/2014/main" id="{E4598F11-6F65-0753-89FE-F5ABED77B46A}"/>
+                <a16:creationId xmlns:a16="http://schemas.microsoft.com/office/drawing/2014/main" xmlns="" id="{E4598F11-6F65-0753-89FE-F5ABED77B46A}"/>
               </a:ext>
             </a:extLst>
           </p:cNvPr>
@@ -11259,14 +11401,14 @@
           </a:p>
         </p:txBody>
       </p:sp>
-      <mc:AlternateContent xmlns:mc="http://schemas.openxmlformats.org/markup-compatibility/2006">
-        <mc:Choice xmlns:a14="http://schemas.microsoft.com/office/drawing/2010/main" Requires="a14">
+      <mc:AlternateContent xmlns:mc="http://schemas.openxmlformats.org/markup-compatibility/2006" xmlns:a14="http://schemas.microsoft.com/office/drawing/2010/main">
+        <mc:Choice Requires="a14">
           <p:sp>
             <p:nvSpPr>
               <p:cNvPr id="3" name="Espaço Reservado para Conteúdo 2">
                 <a:extLst>
                   <a:ext uri="{FF2B5EF4-FFF2-40B4-BE49-F238E27FC236}">
-                    <a16:creationId xmlns="" xmlns:a16="http://schemas.microsoft.com/office/drawing/2014/main" id="{FEF4E6DC-E916-D97A-4D18-D469285C4F2C}"/>
+                    <a16:creationId xmlns:a16="http://schemas.microsoft.com/office/drawing/2014/main" xmlns="" id="{FEF4E6DC-E916-D97A-4D18-D469285C4F2C}"/>
                   </a:ext>
                 </a:extLst>
               </p:cNvPr>
@@ -11668,7 +11810,7 @@
             </p:txBody>
           </p:sp>
         </mc:Choice>
-        <mc:Fallback>
+        <mc:Fallback xmlns="">
           <p:sp>
             <p:nvSpPr>
               <p:cNvPr id="3" name="Espaço Reservado para Conteúdo 2">
@@ -11747,7 +11889,7 @@
           <p:cNvPr id="2" name="Título 1">
             <a:extLst>
               <a:ext uri="{FF2B5EF4-FFF2-40B4-BE49-F238E27FC236}">
-                <a16:creationId xmlns="" xmlns:a16="http://schemas.microsoft.com/office/drawing/2014/main" id="{D5807923-28D2-8150-E304-526DA460D220}"/>
+                <a16:creationId xmlns:a16="http://schemas.microsoft.com/office/drawing/2014/main" xmlns="" id="{D5807923-28D2-8150-E304-526DA460D220}"/>
               </a:ext>
             </a:extLst>
           </p:cNvPr>
@@ -11776,7 +11918,7 @@
           <p:cNvPr id="3" name="Espaço Reservado para Conteúdo 2">
             <a:extLst>
               <a:ext uri="{FF2B5EF4-FFF2-40B4-BE49-F238E27FC236}">
-                <a16:creationId xmlns="" xmlns:a16="http://schemas.microsoft.com/office/drawing/2014/main" id="{FFACD180-C529-EB91-BD2D-B5F491B1E35C}"/>
+                <a16:creationId xmlns:a16="http://schemas.microsoft.com/office/drawing/2014/main" xmlns="" id="{FFACD180-C529-EB91-BD2D-B5F491B1E35C}"/>
               </a:ext>
             </a:extLst>
           </p:cNvPr>
@@ -11908,7 +12050,7 @@
           <p:cNvPr id="1026" name="Picture 2">
             <a:extLst>
               <a:ext uri="{FF2B5EF4-FFF2-40B4-BE49-F238E27FC236}">
-                <a16:creationId xmlns="" xmlns:a16="http://schemas.microsoft.com/office/drawing/2014/main" id="{6FC2BDE8-91E0-6379-9BA3-76511C6153D5}"/>
+                <a16:creationId xmlns:a16="http://schemas.microsoft.com/office/drawing/2014/main" xmlns="" id="{6FC2BDE8-91E0-6379-9BA3-76511C6153D5}"/>
               </a:ext>
             </a:extLst>
           </p:cNvPr>
@@ -11953,7 +12095,7 @@
           <p:cNvPr id="5" name="Picture 2">
             <a:extLst>
               <a:ext uri="{FF2B5EF4-FFF2-40B4-BE49-F238E27FC236}">
-                <a16:creationId xmlns="" xmlns:a16="http://schemas.microsoft.com/office/drawing/2014/main" id="{2771BE1F-7B74-36A4-AA69-9171B025A4B6}"/>
+                <a16:creationId xmlns:a16="http://schemas.microsoft.com/office/drawing/2014/main" xmlns="" id="{2771BE1F-7B74-36A4-AA69-9171B025A4B6}"/>
               </a:ext>
             </a:extLst>
           </p:cNvPr>
@@ -12028,7 +12170,7 @@
           <p:cNvPr id="2" name="Título 1">
             <a:extLst>
               <a:ext uri="{FF2B5EF4-FFF2-40B4-BE49-F238E27FC236}">
-                <a16:creationId xmlns="" xmlns:a16="http://schemas.microsoft.com/office/drawing/2014/main" id="{5D929962-9BFC-4174-AB35-CC23FA013168}"/>
+                <a16:creationId xmlns:a16="http://schemas.microsoft.com/office/drawing/2014/main" xmlns="" id="{5D929962-9BFC-4174-AB35-CC23FA013168}"/>
               </a:ext>
             </a:extLst>
           </p:cNvPr>
@@ -12059,7 +12201,7 @@
               <p:cNvPr id="3" name="Espaço Reservado para Conteúdo 2">
                 <a:extLst>
                   <a:ext uri="{FF2B5EF4-FFF2-40B4-BE49-F238E27FC236}">
-                    <a16:creationId xmlns="" xmlns:a16="http://schemas.microsoft.com/office/drawing/2014/main" id="{1D38055D-E355-F780-9CA0-0337EA0BE4FD}"/>
+                    <a16:creationId xmlns:a16="http://schemas.microsoft.com/office/drawing/2014/main" xmlns="" id="{1D38055D-E355-F780-9CA0-0337EA0BE4FD}"/>
                   </a:ext>
                 </a:extLst>
               </p:cNvPr>
@@ -13361,7 +13503,7 @@
           <p:cNvPr id="2" name="Título 1">
             <a:extLst>
               <a:ext uri="{FF2B5EF4-FFF2-40B4-BE49-F238E27FC236}">
-                <a16:creationId xmlns="" xmlns:a16="http://schemas.microsoft.com/office/drawing/2014/main" id="{01D0947A-594D-A8D5-95F3-38EB04C6BDB6}"/>
+                <a16:creationId xmlns:a16="http://schemas.microsoft.com/office/drawing/2014/main" xmlns="" id="{01D0947A-594D-A8D5-95F3-38EB04C6BDB6}"/>
               </a:ext>
             </a:extLst>
           </p:cNvPr>
@@ -13395,7 +13537,7 @@
               <p:cNvPr id="3" name="Espaço Reservado para Conteúdo 2">
                 <a:extLst>
                   <a:ext uri="{FF2B5EF4-FFF2-40B4-BE49-F238E27FC236}">
-                    <a16:creationId xmlns="" xmlns:a16="http://schemas.microsoft.com/office/drawing/2014/main" id="{DDBA288E-BBB8-E157-840C-AA685AD7D65C}"/>
+                    <a16:creationId xmlns:a16="http://schemas.microsoft.com/office/drawing/2014/main" xmlns="" id="{DDBA288E-BBB8-E157-840C-AA685AD7D65C}"/>
                   </a:ext>
                 </a:extLst>
               </p:cNvPr>
@@ -14319,7 +14461,7 @@
           <p:cNvPr id="2" name="Título 1">
             <a:extLst>
               <a:ext uri="{FF2B5EF4-FFF2-40B4-BE49-F238E27FC236}">
-                <a16:creationId xmlns="" xmlns:a16="http://schemas.microsoft.com/office/drawing/2014/main" id="{E0F1FD81-6095-2AF0-8691-34E55B8A93B5}"/>
+                <a16:creationId xmlns:a16="http://schemas.microsoft.com/office/drawing/2014/main" xmlns="" id="{E0F1FD81-6095-2AF0-8691-34E55B8A93B5}"/>
               </a:ext>
             </a:extLst>
           </p:cNvPr>
@@ -14346,14 +14488,14 @@
           </a:p>
         </p:txBody>
       </p:sp>
-      <mc:AlternateContent xmlns:mc="http://schemas.openxmlformats.org/markup-compatibility/2006" xmlns:a14="http://schemas.microsoft.com/office/drawing/2010/main">
-        <mc:Choice Requires="a14">
+      <mc:AlternateContent xmlns:mc="http://schemas.openxmlformats.org/markup-compatibility/2006">
+        <mc:Choice xmlns:a14="http://schemas.microsoft.com/office/drawing/2010/main" Requires="a14">
           <p:sp>
             <p:nvSpPr>
               <p:cNvPr id="3" name="Espaço Reservado para Conteúdo 2">
                 <a:extLst>
                   <a:ext uri="{FF2B5EF4-FFF2-40B4-BE49-F238E27FC236}">
-                    <a16:creationId xmlns="" xmlns:a16="http://schemas.microsoft.com/office/drawing/2014/main" id="{BB734B24-DA50-860B-5D55-C33F6F451B6F}"/>
+                    <a16:creationId xmlns:a16="http://schemas.microsoft.com/office/drawing/2014/main" xmlns="" id="{BB734B24-DA50-860B-5D55-C33F6F451B6F}"/>
                   </a:ext>
                 </a:extLst>
               </p:cNvPr>
@@ -14366,8 +14508,8 @@
             </p:nvSpPr>
             <p:spPr>
               <a:xfrm>
-                <a:off x="6096000" y="1825624"/>
-                <a:ext cx="5930899" cy="5032375"/>
+                <a:off x="6096000" y="1840614"/>
+                <a:ext cx="6096000" cy="5032375"/>
               </a:xfrm>
             </p:spPr>
             <p:txBody>
@@ -14487,7 +14629,23 @@
                       <a:schemeClr val="tx1"/>
                     </a:solidFill>
                   </a:rPr>
-                  <a:t>maior probabilidade estimada</a:t>
+                  <a:t>maior </a:t>
+                </a:r>
+                <a:r>
+                  <a:rPr lang="pt-BR" b="1" dirty="0" smtClean="0">
+                    <a:solidFill>
+                      <a:schemeClr val="tx1"/>
+                    </a:solidFill>
+                  </a:rPr>
+                  <a:t>probabilidade</a:t>
+                </a:r>
+                <a:r>
+                  <a:rPr lang="pt-BR" dirty="0" smtClean="0">
+                    <a:solidFill>
+                      <a:schemeClr val="tx1"/>
+                    </a:solidFill>
+                  </a:rPr>
+                  <a:t>, </a:t>
                 </a:r>
                 <a:r>
                   <a:rPr lang="pt-BR" dirty="0">
@@ -14495,7 +14653,7 @@
                       <a:schemeClr val="tx1"/>
                     </a:solidFill>
                   </a:rPr>
-                  <a:t>, ou seja, atribui a classe, </a:t>
+                  <a:t>ou seja, atribui a classe, </a:t>
                 </a:r>
                 <a14:m>
                   <m:oMath xmlns:m="http://schemas.openxmlformats.org/officeDocument/2006/math">
@@ -14868,13 +15026,13 @@
             </p:txBody>
           </p:sp>
         </mc:Choice>
-        <mc:Fallback xmlns="">
+        <mc:Fallback>
           <p:sp>
             <p:nvSpPr>
               <p:cNvPr id="3" name="Espaço Reservado para Conteúdo 2">
                 <a:extLst>
                   <a:ext uri="{FF2B5EF4-FFF2-40B4-BE49-F238E27FC236}">
-                    <a16:creationId xmlns="" xmlns:a16="http://schemas.microsoft.com/office/drawing/2014/main" xmlns:a14="http://schemas.microsoft.com/office/drawing/2010/main" id="{BB734B24-DA50-860B-5D55-C33F6F451B6F}"/>
+                    <a16:creationId xmlns:a16="http://schemas.microsoft.com/office/drawing/2014/main" xmlns="" xmlns:a14="http://schemas.microsoft.com/office/drawing/2010/main" id="{BB734B24-DA50-860B-5D55-C33F6F451B6F}"/>
                   </a:ext>
                 </a:extLst>
               </p:cNvPr>
@@ -14887,13 +15045,13 @@
             </p:nvSpPr>
             <p:spPr>
               <a:xfrm>
-                <a:off x="6096000" y="1825624"/>
-                <a:ext cx="5930899" cy="5032375"/>
+                <a:off x="6096000" y="1840614"/>
+                <a:ext cx="6096000" cy="5032375"/>
               </a:xfrm>
               <a:blipFill rotWithShape="0">
                 <a:blip r:embed="rId3"/>
                 <a:stretch>
-                  <a:fillRect l="-1850" t="-1937" r="-3186"/>
+                  <a:fillRect l="-1800" t="-2061" r="-2700"/>
                 </a:stretch>
               </a:blipFill>
             </p:spPr>
@@ -14917,7 +15075,7 @@
           <p:cNvPr id="4" name="Imagem 5">
             <a:extLst>
               <a:ext uri="{FF2B5EF4-FFF2-40B4-BE49-F238E27FC236}">
-                <a16:creationId xmlns="" xmlns:a16="http://schemas.microsoft.com/office/drawing/2014/main" id="{535159CB-11DC-74B8-5C5F-D571CD018327}"/>
+                <a16:creationId xmlns:a16="http://schemas.microsoft.com/office/drawing/2014/main" xmlns="" id="{535159CB-11DC-74B8-5C5F-D571CD018327}"/>
               </a:ext>
             </a:extLst>
           </p:cNvPr>
@@ -14983,7 +15141,7 @@
           <p:cNvPr id="2" name="Título 1">
             <a:extLst>
               <a:ext uri="{FF2B5EF4-FFF2-40B4-BE49-F238E27FC236}">
-                <a16:creationId xmlns="" xmlns:a16="http://schemas.microsoft.com/office/drawing/2014/main" id="{FC175046-E9DF-FCC8-C62B-B00332089713}"/>
+                <a16:creationId xmlns:a16="http://schemas.microsoft.com/office/drawing/2014/main" xmlns="" id="{FC175046-E9DF-FCC8-C62B-B00332089713}"/>
               </a:ext>
             </a:extLst>
           </p:cNvPr>
@@ -15017,7 +15175,7 @@
               <p:cNvPr id="3" name="Espaço Reservado para Conteúdo 2">
                 <a:extLst>
                   <a:ext uri="{FF2B5EF4-FFF2-40B4-BE49-F238E27FC236}">
-                    <a16:creationId xmlns="" xmlns:a16="http://schemas.microsoft.com/office/drawing/2014/main" id="{24721BB7-DBA3-D8BF-7F98-ED91BD59DAEC}"/>
+                    <a16:creationId xmlns:a16="http://schemas.microsoft.com/office/drawing/2014/main" xmlns="" id="{24721BB7-DBA3-D8BF-7F98-ED91BD59DAEC}"/>
                   </a:ext>
                 </a:extLst>
               </p:cNvPr>
@@ -15325,7 +15483,7 @@
           <p:cNvPr id="6" name="Imagem 5">
             <a:extLst>
               <a:ext uri="{FF2B5EF4-FFF2-40B4-BE49-F238E27FC236}">
-                <a16:creationId xmlns="" xmlns:a16="http://schemas.microsoft.com/office/drawing/2014/main" id="{FF78CF76-EB26-3FAE-0391-E452288FA28E}"/>
+                <a16:creationId xmlns:a16="http://schemas.microsoft.com/office/drawing/2014/main" xmlns="" id="{FF78CF76-EB26-3FAE-0391-E452288FA28E}"/>
               </a:ext>
             </a:extLst>
           </p:cNvPr>
@@ -15576,7 +15734,7 @@
           <p:cNvPr id="4" name="Picture 2" descr="Ana Barros (@anathinker) | Twitter">
             <a:extLst>
               <a:ext uri="{FF2B5EF4-FFF2-40B4-BE49-F238E27FC236}">
-                <a16:creationId xmlns="" xmlns:a16="http://schemas.microsoft.com/office/drawing/2014/main" id="{AF3F0044-4F7D-98F6-34C1-8351487DFDAA}"/>
+                <a16:creationId xmlns:a16="http://schemas.microsoft.com/office/drawing/2014/main" xmlns="" id="{AF3F0044-4F7D-98F6-34C1-8351487DFDAA}"/>
               </a:ext>
             </a:extLst>
           </p:cNvPr>
@@ -15623,7 +15781,7 @@
           <p:cNvPr id="5" name="Picture 6" descr="Analyzing Text Classification Techniques on Youtube Data">
             <a:extLst>
               <a:ext uri="{FF2B5EF4-FFF2-40B4-BE49-F238E27FC236}">
-                <a16:creationId xmlns="" xmlns:a16="http://schemas.microsoft.com/office/drawing/2014/main" id="{0E6041F8-AB14-54C0-C790-0288A3AC8FBA}"/>
+                <a16:creationId xmlns:a16="http://schemas.microsoft.com/office/drawing/2014/main" xmlns="" id="{0E6041F8-AB14-54C0-C790-0288A3AC8FBA}"/>
               </a:ext>
             </a:extLst>
           </p:cNvPr>
@@ -15668,7 +15826,7 @@
           <p:cNvPr id="6" name="Picture 2" descr="Sentiment Fig 1">
             <a:extLst>
               <a:ext uri="{FF2B5EF4-FFF2-40B4-BE49-F238E27FC236}">
-                <a16:creationId xmlns="" xmlns:a16="http://schemas.microsoft.com/office/drawing/2014/main" id="{1E7CC96F-55AB-1482-92F6-240F8E2E0D1E}"/>
+                <a16:creationId xmlns:a16="http://schemas.microsoft.com/office/drawing/2014/main" xmlns="" id="{1E7CC96F-55AB-1482-92F6-240F8E2E0D1E}"/>
               </a:ext>
             </a:extLst>
           </p:cNvPr>
@@ -15745,7 +15903,7 @@
           <p:cNvPr id="2" name="Título 1">
             <a:extLst>
               <a:ext uri="{FF2B5EF4-FFF2-40B4-BE49-F238E27FC236}">
-                <a16:creationId xmlns="" xmlns:a16="http://schemas.microsoft.com/office/drawing/2014/main" id="{94AB8438-E56E-2412-517C-8456E4CA773C}"/>
+                <a16:creationId xmlns:a16="http://schemas.microsoft.com/office/drawing/2014/main" xmlns="" id="{94AB8438-E56E-2412-517C-8456E4CA773C}"/>
               </a:ext>
             </a:extLst>
           </p:cNvPr>
@@ -15773,7 +15931,7 @@
           <p:cNvPr id="3" name="Espaço Reservado para Conteúdo 2">
             <a:extLst>
               <a:ext uri="{FF2B5EF4-FFF2-40B4-BE49-F238E27FC236}">
-                <a16:creationId xmlns="" xmlns:a16="http://schemas.microsoft.com/office/drawing/2014/main" id="{F7E2B09C-6D56-4C9F-A364-B904CCE2F1A0}"/>
+                <a16:creationId xmlns:a16="http://schemas.microsoft.com/office/drawing/2014/main" xmlns="" id="{F7E2B09C-6D56-4C9F-A364-B904CCE2F1A0}"/>
               </a:ext>
             </a:extLst>
           </p:cNvPr>
@@ -15810,7 +15968,7 @@
           <p:cNvPr id="18" name="Group 17">
             <a:extLst>
               <a:ext uri="{FF2B5EF4-FFF2-40B4-BE49-F238E27FC236}">
-                <a16:creationId xmlns="" xmlns:a16="http://schemas.microsoft.com/office/drawing/2014/main" id="{627C64FD-88E0-EC8E-2A34-0D5737B4C854}"/>
+                <a16:creationId xmlns:a16="http://schemas.microsoft.com/office/drawing/2014/main" xmlns="" id="{627C64FD-88E0-EC8E-2A34-0D5737B4C854}"/>
               </a:ext>
             </a:extLst>
           </p:cNvPr>
@@ -15830,7 +15988,7 @@
             <p:cNvPr id="12" name="Picture 4" descr="Project Jupyter | Try Jupyter">
               <a:extLst>
                 <a:ext uri="{FF2B5EF4-FFF2-40B4-BE49-F238E27FC236}">
-                  <a16:creationId xmlns="" xmlns:a16="http://schemas.microsoft.com/office/drawing/2014/main" id="{FF92EA36-91E7-292B-D7A0-2D4D83A10F98}"/>
+                  <a16:creationId xmlns:a16="http://schemas.microsoft.com/office/drawing/2014/main" xmlns="" id="{FF92EA36-91E7-292B-D7A0-2D4D83A10F98}"/>
                 </a:ext>
               </a:extLst>
             </p:cNvPr>
@@ -15877,7 +16035,7 @@
             <p:cNvPr id="13" name="Picture 8" descr="Google Colaboratory Colab - Guía Completa Español - Marketing Branding">
               <a:extLst>
                 <a:ext uri="{FF2B5EF4-FFF2-40B4-BE49-F238E27FC236}">
-                  <a16:creationId xmlns="" xmlns:a16="http://schemas.microsoft.com/office/drawing/2014/main" id="{46F1718A-89E6-9E63-E40B-2B19852D6AA0}"/>
+                  <a16:creationId xmlns:a16="http://schemas.microsoft.com/office/drawing/2014/main" xmlns="" id="{46F1718A-89E6-9E63-E40B-2B19852D6AA0}"/>
                 </a:ext>
               </a:extLst>
             </p:cNvPr>
@@ -15922,7 +16080,7 @@
             <p:cNvPr id="14" name="Picture 10" descr="IT12A01: FUNDAMENTALS OF PYTHON PROGRAMMING (SF) (SYNCHRONOUS E-LEARNING) -  NTUC LearningHub">
               <a:extLst>
                 <a:ext uri="{FF2B5EF4-FFF2-40B4-BE49-F238E27FC236}">
-                  <a16:creationId xmlns="" xmlns:a16="http://schemas.microsoft.com/office/drawing/2014/main" id="{33F6B1B4-9B79-D634-3E35-33F24609C848}"/>
+                  <a16:creationId xmlns:a16="http://schemas.microsoft.com/office/drawing/2014/main" xmlns="" id="{33F6B1B4-9B79-D634-3E35-33F24609C848}"/>
                 </a:ext>
               </a:extLst>
             </p:cNvPr>
@@ -15967,7 +16125,7 @@
             <p:cNvPr id="15" name="Sinal de Adição 7">
               <a:extLst>
                 <a:ext uri="{FF2B5EF4-FFF2-40B4-BE49-F238E27FC236}">
-                  <a16:creationId xmlns="" xmlns:a16="http://schemas.microsoft.com/office/drawing/2014/main" id="{6959EE6C-DCDB-E78B-5C50-EBD3FF3049E2}"/>
+                  <a16:creationId xmlns:a16="http://schemas.microsoft.com/office/drawing/2014/main" xmlns="" id="{6959EE6C-DCDB-E78B-5C50-EBD3FF3049E2}"/>
                 </a:ext>
               </a:extLst>
             </p:cNvPr>
@@ -16015,7 +16173,7 @@
             <p:cNvPr id="17" name="Sinal de Adição 10">
               <a:extLst>
                 <a:ext uri="{FF2B5EF4-FFF2-40B4-BE49-F238E27FC236}">
-                  <a16:creationId xmlns="" xmlns:a16="http://schemas.microsoft.com/office/drawing/2014/main" id="{30A21FDB-ABA6-9FD5-49EF-7762414AEF0C}"/>
+                  <a16:creationId xmlns:a16="http://schemas.microsoft.com/office/drawing/2014/main" xmlns="" id="{30A21FDB-ABA6-9FD5-49EF-7762414AEF0C}"/>
                 </a:ext>
               </a:extLst>
             </p:cNvPr>
@@ -16101,7 +16259,7 @@
           <p:cNvPr id="2" name="Title 1">
             <a:extLst>
               <a:ext uri="{FF2B5EF4-FFF2-40B4-BE49-F238E27FC236}">
-                <a16:creationId xmlns="" xmlns:a16="http://schemas.microsoft.com/office/drawing/2014/main" id="{CF49AE95-3E0A-F9BB-A3FD-4C328EF25334}"/>
+                <a16:creationId xmlns:a16="http://schemas.microsoft.com/office/drawing/2014/main" xmlns="" id="{CF49AE95-3E0A-F9BB-A3FD-4C328EF25334}"/>
               </a:ext>
             </a:extLst>
           </p:cNvPr>
@@ -16130,7 +16288,7 @@
           <p:cNvPr id="3" name="Content Placeholder 2">
             <a:extLst>
               <a:ext uri="{FF2B5EF4-FFF2-40B4-BE49-F238E27FC236}">
-                <a16:creationId xmlns="" xmlns:a16="http://schemas.microsoft.com/office/drawing/2014/main" id="{A431927B-FE56-CB25-3ECF-AB5E92A7DC71}"/>
+                <a16:creationId xmlns:a16="http://schemas.microsoft.com/office/drawing/2014/main" xmlns="" id="{A431927B-FE56-CB25-3ECF-AB5E92A7DC71}"/>
               </a:ext>
             </a:extLst>
           </p:cNvPr>
@@ -16219,7 +16377,7 @@
           <p:cNvPr id="4" name="Título 1">
             <a:extLst>
               <a:ext uri="{FF2B5EF4-FFF2-40B4-BE49-F238E27FC236}">
-                <a16:creationId xmlns="" xmlns:a16="http://schemas.microsoft.com/office/drawing/2014/main" id="{32666AC8-2E17-4DB4-B0F5-60C640CCFD2E}"/>
+                <a16:creationId xmlns:a16="http://schemas.microsoft.com/office/drawing/2014/main" xmlns="" id="{32666AC8-2E17-4DB4-B0F5-60C640CCFD2E}"/>
               </a:ext>
             </a:extLst>
           </p:cNvPr>
@@ -16280,6 +16438,13 @@
   <p:clrMapOvr>
     <a:masterClrMapping/>
   </p:clrMapOvr>
+  <p:timing>
+    <p:tnLst>
+      <p:par>
+        <p:cTn id="1" dur="indefinite" restart="never" nodeType="tmRoot"/>
+      </p:par>
+    </p:tnLst>
+  </p:timing>
 </p:sld>
 </file>
 
@@ -16305,7 +16470,7 @@
           <p:cNvPr id="4" name="Título 1">
             <a:extLst>
               <a:ext uri="{FF2B5EF4-FFF2-40B4-BE49-F238E27FC236}">
-                <a16:creationId xmlns="" xmlns:a16="http://schemas.microsoft.com/office/drawing/2014/main" id="{32666AC8-2E17-4DB4-B0F5-60C640CCFD2E}"/>
+                <a16:creationId xmlns:a16="http://schemas.microsoft.com/office/drawing/2014/main" xmlns="" id="{32666AC8-2E17-4DB4-B0F5-60C640CCFD2E}"/>
               </a:ext>
             </a:extLst>
           </p:cNvPr>
@@ -16377,7 +16542,7 @@
         <p:cNvPr id="1" name="">
           <a:extLst>
             <a:ext uri="{FF2B5EF4-FFF2-40B4-BE49-F238E27FC236}">
-              <a16:creationId xmlns="" xmlns:a16="http://schemas.microsoft.com/office/drawing/2014/main" id="{66DA37F4-4ED4-806C-CFDE-46C776755B3A}"/>
+              <a16:creationId xmlns:a16="http://schemas.microsoft.com/office/drawing/2014/main" xmlns="" id="{66DA37F4-4ED4-806C-CFDE-46C776755B3A}"/>
             </a:ext>
           </a:extLst>
         </p:cNvPr>
@@ -16397,7 +16562,7 @@
           <p:cNvPr id="4" name="Título 1">
             <a:extLst>
               <a:ext uri="{FF2B5EF4-FFF2-40B4-BE49-F238E27FC236}">
-                <a16:creationId xmlns="" xmlns:a16="http://schemas.microsoft.com/office/drawing/2014/main" id="{616605E6-566B-D397-B0D6-339FE7F8CB5E}"/>
+                <a16:creationId xmlns:a16="http://schemas.microsoft.com/office/drawing/2014/main" xmlns="" id="{616605E6-566B-D397-B0D6-339FE7F8CB5E}"/>
               </a:ext>
             </a:extLst>
           </p:cNvPr>
@@ -16483,7 +16648,7 @@
           <p:cNvPr id="4" name="Agrupar 22">
             <a:extLst>
               <a:ext uri="{FF2B5EF4-FFF2-40B4-BE49-F238E27FC236}">
-                <a16:creationId xmlns="" xmlns:a16="http://schemas.microsoft.com/office/drawing/2014/main" id="{BDB2E9D3-18AD-6A55-F414-20E01AF3185A}"/>
+                <a16:creationId xmlns:a16="http://schemas.microsoft.com/office/drawing/2014/main" xmlns="" id="{BDB2E9D3-18AD-6A55-F414-20E01AF3185A}"/>
               </a:ext>
             </a:extLst>
           </p:cNvPr>
@@ -16505,7 +16670,7 @@
                 <p:cNvPr id="5" name="CaixaDeTexto 5">
                   <a:extLst>
                     <a:ext uri="{FF2B5EF4-FFF2-40B4-BE49-F238E27FC236}">
-                      <a16:creationId xmlns="" xmlns:a16="http://schemas.microsoft.com/office/drawing/2014/main" id="{AF11FFDB-E923-3C94-D47A-83418BDAD06C}"/>
+                      <a16:creationId xmlns:a16="http://schemas.microsoft.com/office/drawing/2014/main" xmlns="" id="{AF11FFDB-E923-3C94-D47A-83418BDAD06C}"/>
                     </a:ext>
                   </a:extLst>
                 </p:cNvPr>
@@ -16712,7 +16877,7 @@
             <p:cNvPr id="6" name="Agrupar 21">
               <a:extLst>
                 <a:ext uri="{FF2B5EF4-FFF2-40B4-BE49-F238E27FC236}">
-                  <a16:creationId xmlns="" xmlns:a16="http://schemas.microsoft.com/office/drawing/2014/main" id="{0216B346-D594-78F5-A2A5-C50F3A50B5DC}"/>
+                  <a16:creationId xmlns:a16="http://schemas.microsoft.com/office/drawing/2014/main" xmlns="" id="{0216B346-D594-78F5-A2A5-C50F3A50B5DC}"/>
                 </a:ext>
               </a:extLst>
             </p:cNvPr>
@@ -16732,7 +16897,7 @@
               <p:cNvPr id="19" name="Retângulo 6">
                 <a:extLst>
                   <a:ext uri="{FF2B5EF4-FFF2-40B4-BE49-F238E27FC236}">
-                    <a16:creationId xmlns="" xmlns:a16="http://schemas.microsoft.com/office/drawing/2014/main" id="{C45F9961-D53D-BEB9-F54B-3CC4703FA1F8}"/>
+                    <a16:creationId xmlns:a16="http://schemas.microsoft.com/office/drawing/2014/main" xmlns="" id="{C45F9961-D53D-BEB9-F54B-3CC4703FA1F8}"/>
                   </a:ext>
                 </a:extLst>
               </p:cNvPr>
@@ -16786,7 +16951,7 @@
                   <p:cNvPr id="20" name="CaixaDeTexto 7">
                     <a:extLst>
                       <a:ext uri="{FF2B5EF4-FFF2-40B4-BE49-F238E27FC236}">
-                        <a16:creationId xmlns="" xmlns:a16="http://schemas.microsoft.com/office/drawing/2014/main" id="{DD14F424-8D9A-FCFC-0455-7D5B5C6C43F0}"/>
+                        <a16:creationId xmlns:a16="http://schemas.microsoft.com/office/drawing/2014/main" xmlns="" id="{DD14F424-8D9A-FCFC-0455-7D5B5C6C43F0}"/>
                       </a:ext>
                     </a:extLst>
                   </p:cNvPr>
@@ -17050,7 +17215,7 @@
             <p:cNvPr id="7" name="Seta: para a Direita 8">
               <a:extLst>
                 <a:ext uri="{FF2B5EF4-FFF2-40B4-BE49-F238E27FC236}">
-                  <a16:creationId xmlns="" xmlns:a16="http://schemas.microsoft.com/office/drawing/2014/main" id="{D3504EFE-235C-4EED-BD67-1F0134363B33}"/>
+                  <a16:creationId xmlns:a16="http://schemas.microsoft.com/office/drawing/2014/main" xmlns="" id="{D3504EFE-235C-4EED-BD67-1F0134363B33}"/>
                 </a:ext>
               </a:extLst>
             </p:cNvPr>
@@ -17104,7 +17269,7 @@
             <p:cNvPr id="8" name="Seta: para a Direita 9">
               <a:extLst>
                 <a:ext uri="{FF2B5EF4-FFF2-40B4-BE49-F238E27FC236}">
-                  <a16:creationId xmlns="" xmlns:a16="http://schemas.microsoft.com/office/drawing/2014/main" id="{E56F7404-32FC-ED2A-B5D6-AA6AAC63911A}"/>
+                  <a16:creationId xmlns:a16="http://schemas.microsoft.com/office/drawing/2014/main" xmlns="" id="{E56F7404-32FC-ED2A-B5D6-AA6AAC63911A}"/>
                 </a:ext>
               </a:extLst>
             </p:cNvPr>
@@ -17158,7 +17323,7 @@
             <p:cNvPr id="9" name="CaixaDeTexto 10">
               <a:extLst>
                 <a:ext uri="{FF2B5EF4-FFF2-40B4-BE49-F238E27FC236}">
-                  <a16:creationId xmlns="" xmlns:a16="http://schemas.microsoft.com/office/drawing/2014/main" id="{4F9BC649-95D4-52BD-BA63-08F8688BBFD3}"/>
+                  <a16:creationId xmlns:a16="http://schemas.microsoft.com/office/drawing/2014/main" xmlns="" id="{4F9BC649-95D4-52BD-BA63-08F8688BBFD3}"/>
                 </a:ext>
               </a:extLst>
             </p:cNvPr>
@@ -17194,7 +17359,7 @@
             <p:cNvPr id="10" name="CaixaDeTexto 12">
               <a:extLst>
                 <a:ext uri="{FF2B5EF4-FFF2-40B4-BE49-F238E27FC236}">
-                  <a16:creationId xmlns="" xmlns:a16="http://schemas.microsoft.com/office/drawing/2014/main" id="{9C4DD653-BC48-DCA1-5663-281ACCF13641}"/>
+                  <a16:creationId xmlns:a16="http://schemas.microsoft.com/office/drawing/2014/main" xmlns="" id="{9C4DD653-BC48-DCA1-5663-281ACCF13641}"/>
                 </a:ext>
               </a:extLst>
             </p:cNvPr>
@@ -17234,7 +17399,7 @@
             <p:cNvPr id="11" name="Agrupar 20">
               <a:extLst>
                 <a:ext uri="{FF2B5EF4-FFF2-40B4-BE49-F238E27FC236}">
-                  <a16:creationId xmlns="" xmlns:a16="http://schemas.microsoft.com/office/drawing/2014/main" id="{1FBA146D-CAB5-65CA-C09C-DFAE2CF0121E}"/>
+                  <a16:creationId xmlns:a16="http://schemas.microsoft.com/office/drawing/2014/main" xmlns="" id="{1FBA146D-CAB5-65CA-C09C-DFAE2CF0121E}"/>
                 </a:ext>
               </a:extLst>
             </p:cNvPr>
@@ -17256,7 +17421,7 @@
                   <p:cNvPr id="12" name="CaixaDeTexto 4">
                     <a:extLst>
                       <a:ext uri="{FF2B5EF4-FFF2-40B4-BE49-F238E27FC236}">
-                        <a16:creationId xmlns="" xmlns:a16="http://schemas.microsoft.com/office/drawing/2014/main" id="{43C8BB8A-C849-2483-4102-05D4F8A25AE9}"/>
+                        <a16:creationId xmlns:a16="http://schemas.microsoft.com/office/drawing/2014/main" xmlns="" id="{43C8BB8A-C849-2483-4102-05D4F8A25AE9}"/>
                       </a:ext>
                     </a:extLst>
                   </p:cNvPr>
@@ -17465,7 +17630,7 @@
                   <p:cNvPr id="13" name="CaixaDeTexto 11">
                     <a:extLst>
                       <a:ext uri="{FF2B5EF4-FFF2-40B4-BE49-F238E27FC236}">
-                        <a16:creationId xmlns="" xmlns:a16="http://schemas.microsoft.com/office/drawing/2014/main" id="{AF290EB5-D075-77C8-B194-538454B60861}"/>
+                        <a16:creationId xmlns:a16="http://schemas.microsoft.com/office/drawing/2014/main" xmlns="" id="{AF290EB5-D075-77C8-B194-538454B60861}"/>
                       </a:ext>
                     </a:extLst>
                   </p:cNvPr>
@@ -17556,14 +17721,14 @@
               </p:sp>
             </mc:Fallback>
           </mc:AlternateContent>
-          <mc:AlternateContent xmlns:mc="http://schemas.openxmlformats.org/markup-compatibility/2006">
-            <mc:Choice xmlns:a14="http://schemas.microsoft.com/office/drawing/2010/main" Requires="a14">
+          <mc:AlternateContent xmlns:mc="http://schemas.openxmlformats.org/markup-compatibility/2006" xmlns:a14="http://schemas.microsoft.com/office/drawing/2010/main">
+            <mc:Choice Requires="a14">
               <p:sp>
                 <p:nvSpPr>
                   <p:cNvPr id="14" name="CaixaDeTexto 14">
                     <a:extLst>
                       <a:ext uri="{FF2B5EF4-FFF2-40B4-BE49-F238E27FC236}">
-                        <a16:creationId xmlns="" xmlns:a16="http://schemas.microsoft.com/office/drawing/2014/main" id="{34981BFA-7FF1-3BFF-417B-6F22F9C69AF2}"/>
+                        <a16:creationId xmlns:a16="http://schemas.microsoft.com/office/drawing/2014/main" xmlns="" id="{34981BFA-7FF1-3BFF-417B-6F22F9C69AF2}"/>
                       </a:ext>
                     </a:extLst>
                   </p:cNvPr>
@@ -17644,7 +17809,7 @@
                 </p:txBody>
               </p:sp>
             </mc:Choice>
-            <mc:Fallback>
+            <mc:Fallback xmlns="">
               <p:sp>
                 <p:nvSpPr>
                   <p:cNvPr id="14" name="CaixaDeTexto 14">
@@ -17689,14 +17854,14 @@
               </p:sp>
             </mc:Fallback>
           </mc:AlternateContent>
-          <mc:AlternateContent xmlns:mc="http://schemas.openxmlformats.org/markup-compatibility/2006">
-            <mc:Choice xmlns:a14="http://schemas.microsoft.com/office/drawing/2010/main" Requires="a14">
+          <mc:AlternateContent xmlns:mc="http://schemas.openxmlformats.org/markup-compatibility/2006" xmlns:a14="http://schemas.microsoft.com/office/drawing/2010/main">
+            <mc:Choice Requires="a14">
               <p:sp>
                 <p:nvSpPr>
                   <p:cNvPr id="15" name="CaixaDeTexto 15">
                     <a:extLst>
                       <a:ext uri="{FF2B5EF4-FFF2-40B4-BE49-F238E27FC236}">
-                        <a16:creationId xmlns="" xmlns:a16="http://schemas.microsoft.com/office/drawing/2014/main" id="{DB8F6DFA-2208-43E8-18F4-BC5ACFDCAE49}"/>
+                        <a16:creationId xmlns:a16="http://schemas.microsoft.com/office/drawing/2014/main" xmlns="" id="{DB8F6DFA-2208-43E8-18F4-BC5ACFDCAE49}"/>
                       </a:ext>
                     </a:extLst>
                   </p:cNvPr>
@@ -17777,7 +17942,7 @@
                 </p:txBody>
               </p:sp>
             </mc:Choice>
-            <mc:Fallback>
+            <mc:Fallback xmlns="">
               <p:sp>
                 <p:nvSpPr>
                   <p:cNvPr id="15" name="CaixaDeTexto 15">
@@ -17822,14 +17987,14 @@
               </p:sp>
             </mc:Fallback>
           </mc:AlternateContent>
-          <mc:AlternateContent xmlns:mc="http://schemas.openxmlformats.org/markup-compatibility/2006">
-            <mc:Choice xmlns:a14="http://schemas.microsoft.com/office/drawing/2010/main" Requires="a14">
+          <mc:AlternateContent xmlns:mc="http://schemas.openxmlformats.org/markup-compatibility/2006" xmlns:a14="http://schemas.microsoft.com/office/drawing/2010/main">
+            <mc:Choice Requires="a14">
               <p:sp>
                 <p:nvSpPr>
                   <p:cNvPr id="16" name="CaixaDeTexto 16">
                     <a:extLst>
                       <a:ext uri="{FF2B5EF4-FFF2-40B4-BE49-F238E27FC236}">
-                        <a16:creationId xmlns="" xmlns:a16="http://schemas.microsoft.com/office/drawing/2014/main" id="{A5EC037D-8EF0-3DEF-2F8B-84248AE8B86A}"/>
+                        <a16:creationId xmlns:a16="http://schemas.microsoft.com/office/drawing/2014/main" xmlns="" id="{A5EC037D-8EF0-3DEF-2F8B-84248AE8B86A}"/>
                       </a:ext>
                     </a:extLst>
                   </p:cNvPr>
@@ -17910,7 +18075,7 @@
                 </p:txBody>
               </p:sp>
             </mc:Choice>
-            <mc:Fallback>
+            <mc:Fallback xmlns="">
               <p:sp>
                 <p:nvSpPr>
                   <p:cNvPr id="16" name="CaixaDeTexto 16">
@@ -17955,14 +18120,14 @@
               </p:sp>
             </mc:Fallback>
           </mc:AlternateContent>
-          <mc:AlternateContent xmlns:mc="http://schemas.openxmlformats.org/markup-compatibility/2006">
-            <mc:Choice xmlns:a14="http://schemas.microsoft.com/office/drawing/2010/main" Requires="a14">
+          <mc:AlternateContent xmlns:mc="http://schemas.openxmlformats.org/markup-compatibility/2006" xmlns:a14="http://schemas.microsoft.com/office/drawing/2010/main">
+            <mc:Choice Requires="a14">
               <p:sp>
                 <p:nvSpPr>
                   <p:cNvPr id="17" name="CaixaDeTexto 17">
                     <a:extLst>
                       <a:ext uri="{FF2B5EF4-FFF2-40B4-BE49-F238E27FC236}">
-                        <a16:creationId xmlns="" xmlns:a16="http://schemas.microsoft.com/office/drawing/2014/main" id="{E842A6BA-1A35-A84A-B1B8-54B2C0A49661}"/>
+                        <a16:creationId xmlns:a16="http://schemas.microsoft.com/office/drawing/2014/main" xmlns="" id="{E842A6BA-1A35-A84A-B1B8-54B2C0A49661}"/>
                       </a:ext>
                     </a:extLst>
                   </p:cNvPr>
@@ -18043,7 +18208,7 @@
                 </p:txBody>
               </p:sp>
             </mc:Choice>
-            <mc:Fallback>
+            <mc:Fallback xmlns="">
               <p:sp>
                 <p:nvSpPr>
                   <p:cNvPr id="17" name="CaixaDeTexto 17">
@@ -18088,14 +18253,14 @@
               </p:sp>
             </mc:Fallback>
           </mc:AlternateContent>
-          <mc:AlternateContent xmlns:mc="http://schemas.openxmlformats.org/markup-compatibility/2006">
-            <mc:Choice xmlns:a14="http://schemas.microsoft.com/office/drawing/2010/main" Requires="a14">
+          <mc:AlternateContent xmlns:mc="http://schemas.openxmlformats.org/markup-compatibility/2006" xmlns:a14="http://schemas.microsoft.com/office/drawing/2010/main">
+            <mc:Choice Requires="a14">
               <p:sp>
                 <p:nvSpPr>
                   <p:cNvPr id="18" name="CaixaDeTexto 18">
                     <a:extLst>
                       <a:ext uri="{FF2B5EF4-FFF2-40B4-BE49-F238E27FC236}">
-                        <a16:creationId xmlns="" xmlns:a16="http://schemas.microsoft.com/office/drawing/2014/main" id="{AE06ADE1-A3FE-3684-A19B-1A4A69C1E4AB}"/>
+                        <a16:creationId xmlns:a16="http://schemas.microsoft.com/office/drawing/2014/main" xmlns="" id="{AE06ADE1-A3FE-3684-A19B-1A4A69C1E4AB}"/>
                       </a:ext>
                     </a:extLst>
                   </p:cNvPr>
@@ -18176,7 +18341,7 @@
                 </p:txBody>
               </p:sp>
             </mc:Choice>
-            <mc:Fallback>
+            <mc:Fallback xmlns="">
               <p:sp>
                 <p:nvSpPr>
                   <p:cNvPr id="18" name="CaixaDeTexto 18">
@@ -18244,7 +18409,7 @@
         <p:cNvPr id="1" name="">
           <a:extLst>
             <a:ext uri="{FF2B5EF4-FFF2-40B4-BE49-F238E27FC236}">
-              <a16:creationId xmlns="" xmlns:a16="http://schemas.microsoft.com/office/drawing/2014/main" id="{5C4572DC-35C8-C64C-E103-3D4F9246EA98}"/>
+              <a16:creationId xmlns:a16="http://schemas.microsoft.com/office/drawing/2014/main" xmlns="" id="{5C4572DC-35C8-C64C-E103-3D4F9246EA98}"/>
             </a:ext>
           </a:extLst>
         </p:cNvPr>
@@ -18264,7 +18429,7 @@
           <p:cNvPr id="36" name="Group 35">
             <a:extLst>
               <a:ext uri="{FF2B5EF4-FFF2-40B4-BE49-F238E27FC236}">
-                <a16:creationId xmlns="" xmlns:a16="http://schemas.microsoft.com/office/drawing/2014/main" id="{48F378AC-D060-0026-4561-6496453280FF}"/>
+                <a16:creationId xmlns:a16="http://schemas.microsoft.com/office/drawing/2014/main" xmlns="" id="{48F378AC-D060-0026-4561-6496453280FF}"/>
               </a:ext>
             </a:extLst>
           </p:cNvPr>
@@ -18286,7 +18451,7 @@
                 <p:cNvPr id="5" name="CaixaDeTexto 5">
                   <a:extLst>
                     <a:ext uri="{FF2B5EF4-FFF2-40B4-BE49-F238E27FC236}">
-                      <a16:creationId xmlns="" xmlns:a16="http://schemas.microsoft.com/office/drawing/2014/main" id="{E8D0D67D-860E-2510-92FC-57A520894F28}"/>
+                      <a16:creationId xmlns:a16="http://schemas.microsoft.com/office/drawing/2014/main" xmlns="" id="{E8D0D67D-860E-2510-92FC-57A520894F28}"/>
                     </a:ext>
                   </a:extLst>
                 </p:cNvPr>
@@ -18493,7 +18658,7 @@
             <p:cNvPr id="9" name="CaixaDeTexto 10">
               <a:extLst>
                 <a:ext uri="{FF2B5EF4-FFF2-40B4-BE49-F238E27FC236}">
-                  <a16:creationId xmlns="" xmlns:a16="http://schemas.microsoft.com/office/drawing/2014/main" id="{E297B5F7-3383-6E2F-1D8A-03955FAC43D2}"/>
+                  <a16:creationId xmlns:a16="http://schemas.microsoft.com/office/drawing/2014/main" xmlns="" id="{E297B5F7-3383-6E2F-1D8A-03955FAC43D2}"/>
                 </a:ext>
               </a:extLst>
             </p:cNvPr>
@@ -18543,7 +18708,7 @@
                 <p:cNvPr id="12" name="CaixaDeTexto 4">
                   <a:extLst>
                     <a:ext uri="{FF2B5EF4-FFF2-40B4-BE49-F238E27FC236}">
-                      <a16:creationId xmlns="" xmlns:a16="http://schemas.microsoft.com/office/drawing/2014/main" id="{2C8DDC51-3A16-5E93-8268-EE62BDE151E0}"/>
+                      <a16:creationId xmlns:a16="http://schemas.microsoft.com/office/drawing/2014/main" xmlns="" id="{2C8DDC51-3A16-5E93-8268-EE62BDE151E0}"/>
                     </a:ext>
                   </a:extLst>
                 </p:cNvPr>
@@ -18732,7 +18897,7 @@
             <p:cNvPr id="2" name="Rectangle 1">
               <a:extLst>
                 <a:ext uri="{FF2B5EF4-FFF2-40B4-BE49-F238E27FC236}">
-                  <a16:creationId xmlns="" xmlns:a16="http://schemas.microsoft.com/office/drawing/2014/main" id="{EB611083-738F-80C1-2BA7-92EDB40EFB94}"/>
+                  <a16:creationId xmlns:a16="http://schemas.microsoft.com/office/drawing/2014/main" xmlns="" id="{EB611083-738F-80C1-2BA7-92EDB40EFB94}"/>
                 </a:ext>
               </a:extLst>
             </p:cNvPr>
@@ -18796,7 +18961,7 @@
             <p:cNvPr id="3" name="CaixaDeTexto 10">
               <a:extLst>
                 <a:ext uri="{FF2B5EF4-FFF2-40B4-BE49-F238E27FC236}">
-                  <a16:creationId xmlns="" xmlns:a16="http://schemas.microsoft.com/office/drawing/2014/main" id="{F0E4EAFE-2F57-D46C-B71A-FC2B97DD9DC3}"/>
+                  <a16:creationId xmlns:a16="http://schemas.microsoft.com/office/drawing/2014/main" xmlns="" id="{F0E4EAFE-2F57-D46C-B71A-FC2B97DD9DC3}"/>
                 </a:ext>
               </a:extLst>
             </p:cNvPr>
@@ -18844,7 +19009,7 @@
             <p:cNvPr id="22" name="Straight Arrow Connector 21">
               <a:extLst>
                 <a:ext uri="{FF2B5EF4-FFF2-40B4-BE49-F238E27FC236}">
-                  <a16:creationId xmlns="" xmlns:a16="http://schemas.microsoft.com/office/drawing/2014/main" id="{8F2714CA-3421-42C2-2575-C2D5DB1B504D}"/>
+                  <a16:creationId xmlns:a16="http://schemas.microsoft.com/office/drawing/2014/main" xmlns="" id="{8F2714CA-3421-42C2-2575-C2D5DB1B504D}"/>
                 </a:ext>
               </a:extLst>
             </p:cNvPr>
@@ -18890,7 +19055,7 @@
             <p:cNvPr id="29" name="Straight Arrow Connector 28">
               <a:extLst>
                 <a:ext uri="{FF2B5EF4-FFF2-40B4-BE49-F238E27FC236}">
-                  <a16:creationId xmlns="" xmlns:a16="http://schemas.microsoft.com/office/drawing/2014/main" id="{4613A6D9-EABC-0CE5-50B4-C1C9AA047D5D}"/>
+                  <a16:creationId xmlns:a16="http://schemas.microsoft.com/office/drawing/2014/main" xmlns="" id="{4613A6D9-EABC-0CE5-50B4-C1C9AA047D5D}"/>
                 </a:ext>
               </a:extLst>
             </p:cNvPr>
@@ -19126,7 +19291,7 @@
           <p:cNvPr id="7" name="Picture 2" descr="Ana Barros (@anathinker) | Twitter">
             <a:extLst>
               <a:ext uri="{FF2B5EF4-FFF2-40B4-BE49-F238E27FC236}">
-                <a16:creationId xmlns="" xmlns:a16="http://schemas.microsoft.com/office/drawing/2014/main" id="{A2D479C7-0684-420F-2CCD-64C3DB79FDAB}"/>
+                <a16:creationId xmlns:a16="http://schemas.microsoft.com/office/drawing/2014/main" xmlns="" id="{A2D479C7-0684-420F-2CCD-64C3DB79FDAB}"/>
               </a:ext>
             </a:extLst>
           </p:cNvPr>
@@ -19173,7 +19338,7 @@
           <p:cNvPr id="8" name="Picture 6" descr="Analyzing Text Classification Techniques on Youtube Data">
             <a:extLst>
               <a:ext uri="{FF2B5EF4-FFF2-40B4-BE49-F238E27FC236}">
-                <a16:creationId xmlns="" xmlns:a16="http://schemas.microsoft.com/office/drawing/2014/main" id="{A59F8A2C-ACDF-09C7-B528-9064CEF3B848}"/>
+                <a16:creationId xmlns:a16="http://schemas.microsoft.com/office/drawing/2014/main" xmlns="" id="{A59F8A2C-ACDF-09C7-B528-9064CEF3B848}"/>
               </a:ext>
             </a:extLst>
           </p:cNvPr>
@@ -19218,7 +19383,7 @@
           <p:cNvPr id="9" name="Picture 2" descr="Sentiment Fig 1">
             <a:extLst>
               <a:ext uri="{FF2B5EF4-FFF2-40B4-BE49-F238E27FC236}">
-                <a16:creationId xmlns="" xmlns:a16="http://schemas.microsoft.com/office/drawing/2014/main" id="{E178FF16-CC3F-C34B-6C8B-874BC4FA61A4}"/>
+                <a16:creationId xmlns:a16="http://schemas.microsoft.com/office/drawing/2014/main" xmlns="" id="{E178FF16-CC3F-C34B-6C8B-874BC4FA61A4}"/>
               </a:ext>
             </a:extLst>
           </p:cNvPr>
@@ -19295,7 +19460,7 @@
           <p:cNvPr id="2" name="Título 1">
             <a:extLst>
               <a:ext uri="{FF2B5EF4-FFF2-40B4-BE49-F238E27FC236}">
-                <a16:creationId xmlns="" xmlns:a16="http://schemas.microsoft.com/office/drawing/2014/main" id="{B022D379-CAA0-9DC9-CDBD-6E0EBE1BFF31}"/>
+                <a16:creationId xmlns:a16="http://schemas.microsoft.com/office/drawing/2014/main" xmlns="" id="{B022D379-CAA0-9DC9-CDBD-6E0EBE1BFF31}"/>
               </a:ext>
             </a:extLst>
           </p:cNvPr>
@@ -19329,7 +19494,7 @@
               <p:cNvPr id="3" name="Espaço Reservado para Conteúdo 2">
                 <a:extLst>
                   <a:ext uri="{FF2B5EF4-FFF2-40B4-BE49-F238E27FC236}">
-                    <a16:creationId xmlns="" xmlns:a16="http://schemas.microsoft.com/office/drawing/2014/main" id="{B68F0D74-8673-A432-A1D7-BDEF7725851A}"/>
+                    <a16:creationId xmlns:a16="http://schemas.microsoft.com/office/drawing/2014/main" xmlns="" id="{B68F0D74-8673-A432-A1D7-BDEF7725851A}"/>
                   </a:ext>
                 </a:extLst>
               </p:cNvPr>
@@ -19677,7 +19842,7 @@
           <p:cNvPr id="2" name="Título 1">
             <a:extLst>
               <a:ext uri="{FF2B5EF4-FFF2-40B4-BE49-F238E27FC236}">
-                <a16:creationId xmlns="" xmlns:a16="http://schemas.microsoft.com/office/drawing/2014/main" id="{519F0958-530D-D942-BA01-15C1583DD1E6}"/>
+                <a16:creationId xmlns:a16="http://schemas.microsoft.com/office/drawing/2014/main" xmlns="" id="{519F0958-530D-D942-BA01-15C1583DD1E6}"/>
               </a:ext>
             </a:extLst>
           </p:cNvPr>
@@ -19704,14 +19869,14 @@
           </a:p>
         </p:txBody>
       </p:sp>
-      <mc:AlternateContent xmlns:mc="http://schemas.openxmlformats.org/markup-compatibility/2006">
-        <mc:Choice xmlns:a14="http://schemas.microsoft.com/office/drawing/2010/main" Requires="a14">
+      <mc:AlternateContent xmlns:mc="http://schemas.openxmlformats.org/markup-compatibility/2006" xmlns:a14="http://schemas.microsoft.com/office/drawing/2010/main">
+        <mc:Choice Requires="a14">
           <p:sp>
             <p:nvSpPr>
               <p:cNvPr id="3" name="Espaço Reservado para Conteúdo 2">
                 <a:extLst>
                   <a:ext uri="{FF2B5EF4-FFF2-40B4-BE49-F238E27FC236}">
-                    <a16:creationId xmlns="" xmlns:a16="http://schemas.microsoft.com/office/drawing/2014/main" id="{21416F72-28FB-E27C-D129-16A944A87C67}"/>
+                    <a16:creationId xmlns:a16="http://schemas.microsoft.com/office/drawing/2014/main" xmlns="" id="{21416F72-28FB-E27C-D129-16A944A87C67}"/>
                   </a:ext>
                 </a:extLst>
               </p:cNvPr>
@@ -19850,15 +20015,7 @@
                 </a:r>
                 <a:r>
                   <a:rPr lang="pt-BR" dirty="0" smtClean="0"/>
-                  <a:t>imagem em</a:t>
-                </a:r>
-                <a:r>
-                  <a:rPr lang="pt-BR" dirty="0" smtClean="0"/>
-                  <a:t> </a:t>
-                </a:r>
-                <a:r>
-                  <a:rPr lang="pt-BR" dirty="0" smtClean="0"/>
-                  <a:t>Cachorro, </a:t>
+                  <a:t>imagem em Cachorro, </a:t>
                 </a:r>
                 <a:r>
                   <a:rPr lang="pt-BR" dirty="0"/>
@@ -20239,7 +20396,7 @@
             </p:txBody>
           </p:sp>
         </mc:Choice>
-        <mc:Fallback>
+        <mc:Fallback xmlns="">
           <p:sp>
             <p:nvSpPr>
               <p:cNvPr id="3" name="Espaço Reservado para Conteúdo 2">
@@ -20318,7 +20475,7 @@
           <p:cNvPr id="2" name="Título 1">
             <a:extLst>
               <a:ext uri="{FF2B5EF4-FFF2-40B4-BE49-F238E27FC236}">
-                <a16:creationId xmlns="" xmlns:a16="http://schemas.microsoft.com/office/drawing/2014/main" id="{DCD47F25-5DD1-794E-8733-BFD771A2DE49}"/>
+                <a16:creationId xmlns:a16="http://schemas.microsoft.com/office/drawing/2014/main" xmlns="" id="{DCD47F25-5DD1-794E-8733-BFD771A2DE49}"/>
               </a:ext>
             </a:extLst>
           </p:cNvPr>
@@ -20345,14 +20502,14 @@
           </a:p>
         </p:txBody>
       </p:sp>
-      <mc:AlternateContent xmlns:mc="http://schemas.openxmlformats.org/markup-compatibility/2006">
-        <mc:Choice xmlns:a14="http://schemas.microsoft.com/office/drawing/2010/main" Requires="a14">
+      <mc:AlternateContent xmlns:mc="http://schemas.openxmlformats.org/markup-compatibility/2006" xmlns:a14="http://schemas.microsoft.com/office/drawing/2010/main">
+        <mc:Choice Requires="a14">
           <p:sp>
             <p:nvSpPr>
               <p:cNvPr id="3" name="Espaço Reservado para Conteúdo 2">
                 <a:extLst>
                   <a:ext uri="{FF2B5EF4-FFF2-40B4-BE49-F238E27FC236}">
-                    <a16:creationId xmlns="" xmlns:a16="http://schemas.microsoft.com/office/drawing/2014/main" id="{D79BB7DC-99E7-8958-EC77-566B7E3C2BBB}"/>
+                    <a16:creationId xmlns:a16="http://schemas.microsoft.com/office/drawing/2014/main" xmlns="" id="{D79BB7DC-99E7-8958-EC77-566B7E3C2BBB}"/>
                   </a:ext>
                 </a:extLst>
               </p:cNvPr>
@@ -21601,7 +21758,7 @@
             </p:txBody>
           </p:sp>
         </mc:Choice>
-        <mc:Fallback>
+        <mc:Fallback xmlns="">
           <p:sp>
             <p:nvSpPr>
               <p:cNvPr id="3" name="Espaço Reservado para Conteúdo 2">
@@ -21680,7 +21837,7 @@
           <p:cNvPr id="2" name="Título 1">
             <a:extLst>
               <a:ext uri="{FF2B5EF4-FFF2-40B4-BE49-F238E27FC236}">
-                <a16:creationId xmlns="" xmlns:a16="http://schemas.microsoft.com/office/drawing/2014/main" id="{52E3438D-F516-F1D3-A02F-51857586D07A}"/>
+                <a16:creationId xmlns:a16="http://schemas.microsoft.com/office/drawing/2014/main" xmlns="" id="{52E3438D-F516-F1D3-A02F-51857586D07A}"/>
               </a:ext>
             </a:extLst>
           </p:cNvPr>
@@ -21707,14 +21864,14 @@
           </a:p>
         </p:txBody>
       </p:sp>
-      <mc:AlternateContent xmlns:mc="http://schemas.openxmlformats.org/markup-compatibility/2006">
-        <mc:Choice xmlns:a14="http://schemas.microsoft.com/office/drawing/2010/main" Requires="a14">
+      <mc:AlternateContent xmlns:mc="http://schemas.openxmlformats.org/markup-compatibility/2006" xmlns:a14="http://schemas.microsoft.com/office/drawing/2010/main">
+        <mc:Choice Requires="a14">
           <p:sp>
             <p:nvSpPr>
               <p:cNvPr id="3" name="Espaço Reservado para Conteúdo 2">
                 <a:extLst>
                   <a:ext uri="{FF2B5EF4-FFF2-40B4-BE49-F238E27FC236}">
-                    <a16:creationId xmlns="" xmlns:a16="http://schemas.microsoft.com/office/drawing/2014/main" id="{BCAAD57B-65A0-9DAD-79FC-2AE2692EB84B}"/>
+                    <a16:creationId xmlns:a16="http://schemas.microsoft.com/office/drawing/2014/main" xmlns="" id="{BCAAD57B-65A0-9DAD-79FC-2AE2692EB84B}"/>
                   </a:ext>
                 </a:extLst>
               </p:cNvPr>
@@ -22528,7 +22685,7 @@
             </p:txBody>
           </p:sp>
         </mc:Choice>
-        <mc:Fallback>
+        <mc:Fallback xmlns="">
           <p:sp>
             <p:nvSpPr>
               <p:cNvPr id="3" name="Espaço Reservado para Conteúdo 2">
@@ -22577,7 +22734,7 @@
           <p:cNvPr id="5" name="Rectangle 11">
             <a:extLst>
               <a:ext uri="{FF2B5EF4-FFF2-40B4-BE49-F238E27FC236}">
-                <a16:creationId xmlns="" xmlns:a16="http://schemas.microsoft.com/office/drawing/2014/main" id="{D1D7E603-A964-1188-9D09-B0C1E18592FA}"/>
+                <a16:creationId xmlns:a16="http://schemas.microsoft.com/office/drawing/2014/main" xmlns="" id="{D1D7E603-A964-1188-9D09-B0C1E18592FA}"/>
               </a:ext>
             </a:extLst>
           </p:cNvPr>
@@ -22659,7 +22816,7 @@
           <p:cNvPr id="2" name="Título 1">
             <a:extLst>
               <a:ext uri="{FF2B5EF4-FFF2-40B4-BE49-F238E27FC236}">
-                <a16:creationId xmlns="" xmlns:a16="http://schemas.microsoft.com/office/drawing/2014/main" id="{99DAA83A-B143-94BB-B48B-41A7423070CE}"/>
+                <a16:creationId xmlns:a16="http://schemas.microsoft.com/office/drawing/2014/main" xmlns="" id="{99DAA83A-B143-94BB-B48B-41A7423070CE}"/>
               </a:ext>
             </a:extLst>
           </p:cNvPr>
@@ -22687,14 +22844,14 @@
           </a:p>
         </p:txBody>
       </p:sp>
-      <mc:AlternateContent xmlns:mc="http://schemas.openxmlformats.org/markup-compatibility/2006">
-        <mc:Choice xmlns:a14="http://schemas.microsoft.com/office/drawing/2010/main" Requires="a14">
+      <mc:AlternateContent xmlns:mc="http://schemas.openxmlformats.org/markup-compatibility/2006" xmlns:a14="http://schemas.microsoft.com/office/drawing/2010/main">
+        <mc:Choice Requires="a14">
           <p:sp>
             <p:nvSpPr>
               <p:cNvPr id="3" name="Espaço Reservado para Conteúdo 2">
                 <a:extLst>
                   <a:ext uri="{FF2B5EF4-FFF2-40B4-BE49-F238E27FC236}">
-                    <a16:creationId xmlns="" xmlns:a16="http://schemas.microsoft.com/office/drawing/2014/main" id="{32DF54A1-52F5-C48C-7CD4-D6E451DF19D8}"/>
+                    <a16:creationId xmlns:a16="http://schemas.microsoft.com/office/drawing/2014/main" xmlns="" id="{32DF54A1-52F5-C48C-7CD4-D6E451DF19D8}"/>
                   </a:ext>
                 </a:extLst>
               </p:cNvPr>
@@ -22915,7 +23072,7 @@
             </p:txBody>
           </p:sp>
         </mc:Choice>
-        <mc:Fallback>
+        <mc:Fallback xmlns="">
           <p:sp>
             <p:nvSpPr>
               <p:cNvPr id="3" name="Espaço Reservado para Conteúdo 2">
@@ -22964,7 +23121,7 @@
           <p:cNvPr id="8" name="CaixaDeTexto 7">
             <a:extLst>
               <a:ext uri="{FF2B5EF4-FFF2-40B4-BE49-F238E27FC236}">
-                <a16:creationId xmlns="" xmlns:a16="http://schemas.microsoft.com/office/drawing/2014/main" id="{0DC5673F-9B77-2E9E-8317-E71CA8896FE0}"/>
+                <a16:creationId xmlns:a16="http://schemas.microsoft.com/office/drawing/2014/main" xmlns="" id="{0DC5673F-9B77-2E9E-8317-E71CA8896FE0}"/>
               </a:ext>
             </a:extLst>
           </p:cNvPr>
@@ -23016,7 +23173,7 @@
               <p:cNvPr id="4" name="CaixaDeTexto 3">
                 <a:extLst>
                   <a:ext uri="{FF2B5EF4-FFF2-40B4-BE49-F238E27FC236}">
-                    <a16:creationId xmlns="" xmlns:a16="http://schemas.microsoft.com/office/drawing/2014/main" id="{CBD55F82-56D5-32C8-C5AB-AF99477FBAAC}"/>
+                    <a16:creationId xmlns:a16="http://schemas.microsoft.com/office/drawing/2014/main" xmlns="" id="{CBD55F82-56D5-32C8-C5AB-AF99477FBAAC}"/>
                   </a:ext>
                 </a:extLst>
               </p:cNvPr>
@@ -23173,7 +23330,7 @@
           <p:cNvPr id="2" name="Título 1">
             <a:extLst>
               <a:ext uri="{FF2B5EF4-FFF2-40B4-BE49-F238E27FC236}">
-                <a16:creationId xmlns="" xmlns:a16="http://schemas.microsoft.com/office/drawing/2014/main" id="{99DAA83A-B143-94BB-B48B-41A7423070CE}"/>
+                <a16:creationId xmlns:a16="http://schemas.microsoft.com/office/drawing/2014/main" xmlns="" id="{99DAA83A-B143-94BB-B48B-41A7423070CE}"/>
               </a:ext>
             </a:extLst>
           </p:cNvPr>
@@ -23201,14 +23358,14 @@
           </a:p>
         </p:txBody>
       </p:sp>
-      <mc:AlternateContent xmlns:mc="http://schemas.openxmlformats.org/markup-compatibility/2006">
-        <mc:Choice xmlns:a14="http://schemas.microsoft.com/office/drawing/2010/main" Requires="a14">
+      <mc:AlternateContent xmlns:mc="http://schemas.openxmlformats.org/markup-compatibility/2006" xmlns:a14="http://schemas.microsoft.com/office/drawing/2010/main">
+        <mc:Choice Requires="a14">
           <p:sp>
             <p:nvSpPr>
               <p:cNvPr id="3" name="Espaço Reservado para Conteúdo 2">
                 <a:extLst>
                   <a:ext uri="{FF2B5EF4-FFF2-40B4-BE49-F238E27FC236}">
-                    <a16:creationId xmlns="" xmlns:a16="http://schemas.microsoft.com/office/drawing/2014/main" id="{32DF54A1-52F5-C48C-7CD4-D6E451DF19D8}"/>
+                    <a16:creationId xmlns:a16="http://schemas.microsoft.com/office/drawing/2014/main" xmlns="" id="{32DF54A1-52F5-C48C-7CD4-D6E451DF19D8}"/>
                   </a:ext>
                 </a:extLst>
               </p:cNvPr>
@@ -23630,7 +23787,7 @@
             </p:txBody>
           </p:sp>
         </mc:Choice>
-        <mc:Fallback>
+        <mc:Fallback xmlns="">
           <p:sp>
             <p:nvSpPr>
               <p:cNvPr id="3" name="Espaço Reservado para Conteúdo 2">
@@ -23681,7 +23838,7 @@
               <p:cNvPr id="4" name="CaixaDeTexto 3">
                 <a:extLst>
                   <a:ext uri="{FF2B5EF4-FFF2-40B4-BE49-F238E27FC236}">
-                    <a16:creationId xmlns="" xmlns:a16="http://schemas.microsoft.com/office/drawing/2014/main" id="{2B7728A0-505D-9DAE-23EC-8172E2EEEFA9}"/>
+                    <a16:creationId xmlns:a16="http://schemas.microsoft.com/office/drawing/2014/main" xmlns="" id="{2B7728A0-505D-9DAE-23EC-8172E2EEEFA9}"/>
                   </a:ext>
                 </a:extLst>
               </p:cNvPr>

--- a/slides/C24_Regressor_Softmax.pptx
+++ b/slides/C24_Regressor_Softmax.pptx
@@ -300,7 +300,7 @@
           <a:p>
             <a:fld id="{144F1436-6906-4D93-B7A2-786C327BFA14}" type="datetimeFigureOut">
               <a:rPr lang="nl-BE" smtClean="0"/>
-              <a:t>13/09/2026</a:t>
+              <a:t>14/09/2026</a:t>
             </a:fld>
             <a:endParaRPr lang="nl-BE"/>
           </a:p>
@@ -465,7 +465,7 @@
           <a:p>
             <a:fld id="{AA8CD09E-2914-4F47-B6C1-51B2C31814C9}" type="datetimeFigureOut">
               <a:rPr lang="pt-BR" smtClean="0"/>
-              <a:t>13/09/2026</a:t>
+              <a:t>14/09/2026</a:t>
             </a:fld>
             <a:endParaRPr lang="pt-BR"/>
           </a:p>
@@ -884,7 +884,7 @@
                     <m:sSub>
                       <m:sSubPr>
                         <m:ctrlPr>
-                          <a:rPr lang="pt-BR" sz="1200" i="1" smtClean="0">
+                          <a:rPr lang="pt-BR" sz="1200" b="1" i="1">
                             <a:latin typeface="Cambria Math" panose="02040503050406030204" pitchFamily="18" charset="0"/>
                           </a:rPr>
                         </m:ctrlPr>
@@ -986,7 +986,7 @@
                     <m:sSub>
                       <m:sSubPr>
                         <m:ctrlPr>
-                          <a:rPr lang="pt-BR" sz="1200" i="1" smtClean="0">
+                          <a:rPr lang="pt-BR" sz="1200" i="1">
                             <a:latin typeface="Cambria Math" panose="02040503050406030204" pitchFamily="18" charset="0"/>
                           </a:rPr>
                         </m:ctrlPr>
@@ -996,7 +996,7 @@
                           <m:accPr>
                             <m:chr m:val="̂"/>
                             <m:ctrlPr>
-                              <a:rPr lang="pt-BR" sz="1200" i="1">
+                              <a:rPr lang="pt-BR" sz="1200" b="1" i="1">
                                 <a:latin typeface="Cambria Math" panose="02040503050406030204" pitchFamily="18" charset="0"/>
                               </a:rPr>
                             </m:ctrlPr>
@@ -2173,7 +2173,7 @@
                     <m:sSup>
                       <m:sSupPr>
                         <m:ctrlPr>
-                          <a:rPr lang="pt-BR" i="1">
+                          <a:rPr lang="pt-BR" b="1" i="1">
                             <a:latin typeface="Cambria Math" panose="02040503050406030204" pitchFamily="18" charset="0"/>
                           </a:rPr>
                         </m:ctrlPr>
@@ -2881,405 +2881,26 @@
                 <a:ea typeface="+mn-ea"/>
                 <a:cs typeface="+mn-cs"/>
               </a:rPr>
-              <a:t>Exemplos de classes não mutuamente exclusivas:</a:t>
+              <a:t>O regressor softmax não atribui mais de uma classe ao mesmo exemplo de entrada.</a:t>
             </a:r>
           </a:p>
           <a:p>
-            <a:r>
-              <a:rPr lang="pt-BR" sz="1200" b="1" i="0" kern="1200" dirty="0">
-                <a:solidFill>
-                  <a:schemeClr val="tx1"/>
-                </a:solidFill>
-                <a:effectLst/>
-                <a:latin typeface="+mn-lt"/>
-                <a:ea typeface="+mn-ea"/>
-                <a:cs typeface="+mn-cs"/>
-              </a:rPr>
-              <a:t>Classificação de documentos por tópicos</a:t>
-            </a:r>
-            <a:r>
-              <a:rPr lang="pt-BR" sz="1200" b="0" i="0" kern="1200" dirty="0">
-                <a:solidFill>
-                  <a:schemeClr val="tx1"/>
-                </a:solidFill>
-                <a:effectLst/>
-                <a:latin typeface="+mn-lt"/>
-                <a:ea typeface="+mn-ea"/>
-                <a:cs typeface="+mn-cs"/>
-              </a:rPr>
-              <a:t/>
-            </a:r>
-            <a:br>
-              <a:rPr lang="pt-BR" sz="1200" b="0" i="0" kern="1200" dirty="0">
-                <a:solidFill>
-                  <a:schemeClr val="tx1"/>
-                </a:solidFill>
-                <a:effectLst/>
-                <a:latin typeface="+mn-lt"/>
-                <a:ea typeface="+mn-ea"/>
-                <a:cs typeface="+mn-cs"/>
-              </a:rPr>
-            </a:br>
-            <a:r>
-              <a:rPr lang="pt-BR" sz="1200" b="0" i="0" kern="1200" dirty="0">
-                <a:solidFill>
-                  <a:schemeClr val="tx1"/>
-                </a:solidFill>
-                <a:effectLst/>
-                <a:latin typeface="+mn-lt"/>
-                <a:ea typeface="+mn-ea"/>
-                <a:cs typeface="+mn-cs"/>
-              </a:rPr>
-              <a:t>Um documento pode ser sobre "Política", "Economia" e "Saúde" ao mesmo tempo.</a:t>
-            </a:r>
+            <a:endParaRPr lang="pt-BR" sz="1200" b="0" i="0" kern="1200" dirty="0">
+              <a:solidFill>
+                <a:schemeClr val="tx1"/>
+              </a:solidFill>
+              <a:effectLst/>
+              <a:latin typeface="+mn-lt"/>
+              <a:ea typeface="+mn-ea"/>
+              <a:cs typeface="+mn-cs"/>
+            </a:endParaRPr>
           </a:p>
           <a:p>
-            <a:r>
-              <a:rPr lang="pt-BR" sz="1200" b="1" i="0" kern="1200" dirty="0">
-                <a:solidFill>
-                  <a:schemeClr val="tx1"/>
-                </a:solidFill>
-                <a:effectLst/>
-                <a:latin typeface="+mn-lt"/>
-                <a:ea typeface="+mn-ea"/>
-                <a:cs typeface="+mn-cs"/>
-              </a:rPr>
-              <a:t>Reconhecimento de objetos em imagens</a:t>
-            </a:r>
-            <a:r>
-              <a:rPr lang="pt-BR" sz="1200" b="0" i="0" kern="1200" dirty="0">
-                <a:solidFill>
-                  <a:schemeClr val="tx1"/>
-                </a:solidFill>
-                <a:effectLst/>
-                <a:latin typeface="+mn-lt"/>
-                <a:ea typeface="+mn-ea"/>
-                <a:cs typeface="+mn-cs"/>
-              </a:rPr>
-              <a:t/>
-            </a:r>
-            <a:br>
-              <a:rPr lang="pt-BR" sz="1200" b="0" i="0" kern="1200" dirty="0">
-                <a:solidFill>
-                  <a:schemeClr val="tx1"/>
-                </a:solidFill>
-                <a:effectLst/>
-                <a:latin typeface="+mn-lt"/>
-                <a:ea typeface="+mn-ea"/>
-                <a:cs typeface="+mn-cs"/>
-              </a:rPr>
-            </a:br>
-            <a:r>
-              <a:rPr lang="pt-BR" sz="1200" b="0" i="0" kern="1200" dirty="0">
-                <a:solidFill>
-                  <a:schemeClr val="tx1"/>
-                </a:solidFill>
-                <a:effectLst/>
-                <a:latin typeface="+mn-lt"/>
-                <a:ea typeface="+mn-ea"/>
-                <a:cs typeface="+mn-cs"/>
-              </a:rPr>
-              <a:t>Uma imagem pode conter "gato", "cão" e "árvore" simultaneamente.</a:t>
-            </a:r>
-          </a:p>
-          <a:p>
-            <a:r>
-              <a:rPr lang="pt-BR" sz="1200" b="1" i="0" kern="1200" dirty="0">
-                <a:solidFill>
-                  <a:schemeClr val="tx1"/>
-                </a:solidFill>
-                <a:effectLst/>
-                <a:latin typeface="+mn-lt"/>
-                <a:ea typeface="+mn-ea"/>
-                <a:cs typeface="+mn-cs"/>
-              </a:rPr>
-              <a:t>Sistema de recomendação de filmes por gêneros</a:t>
-            </a:r>
-            <a:r>
-              <a:rPr lang="pt-BR" sz="1200" b="0" i="0" kern="1200" dirty="0">
-                <a:solidFill>
-                  <a:schemeClr val="tx1"/>
-                </a:solidFill>
-                <a:effectLst/>
-                <a:latin typeface="+mn-lt"/>
-                <a:ea typeface="+mn-ea"/>
-                <a:cs typeface="+mn-cs"/>
-              </a:rPr>
-              <a:t/>
-            </a:r>
-            <a:br>
-              <a:rPr lang="pt-BR" sz="1200" b="0" i="0" kern="1200" dirty="0">
-                <a:solidFill>
-                  <a:schemeClr val="tx1"/>
-                </a:solidFill>
-                <a:effectLst/>
-                <a:latin typeface="+mn-lt"/>
-                <a:ea typeface="+mn-ea"/>
-                <a:cs typeface="+mn-cs"/>
-              </a:rPr>
-            </a:br>
-            <a:r>
-              <a:rPr lang="pt-BR" sz="1200" b="0" i="0" kern="1200" dirty="0">
-                <a:solidFill>
-                  <a:schemeClr val="tx1"/>
-                </a:solidFill>
-                <a:effectLst/>
-                <a:latin typeface="+mn-lt"/>
-                <a:ea typeface="+mn-ea"/>
-                <a:cs typeface="+mn-cs"/>
-              </a:rPr>
-              <a:t>Um filme pode ser classificado como "Comédia", "Romance" e "Drama".</a:t>
-            </a:r>
-          </a:p>
-          <a:p>
-            <a:r>
-              <a:rPr lang="pt-BR" sz="1200" b="1" i="0" kern="1200" dirty="0">
-                <a:solidFill>
-                  <a:schemeClr val="tx1"/>
-                </a:solidFill>
-                <a:effectLst/>
-                <a:latin typeface="+mn-lt"/>
-                <a:ea typeface="+mn-ea"/>
-                <a:cs typeface="+mn-cs"/>
-              </a:rPr>
-              <a:t>Diagnóstico médico</a:t>
-            </a:r>
-            <a:r>
-              <a:rPr lang="pt-BR" sz="1200" b="0" i="0" kern="1200" dirty="0">
-                <a:solidFill>
-                  <a:schemeClr val="tx1"/>
-                </a:solidFill>
-                <a:effectLst/>
-                <a:latin typeface="+mn-lt"/>
-                <a:ea typeface="+mn-ea"/>
-                <a:cs typeface="+mn-cs"/>
-              </a:rPr>
-              <a:t/>
-            </a:r>
-            <a:br>
-              <a:rPr lang="pt-BR" sz="1200" b="0" i="0" kern="1200" dirty="0">
-                <a:solidFill>
-                  <a:schemeClr val="tx1"/>
-                </a:solidFill>
-                <a:effectLst/>
-                <a:latin typeface="+mn-lt"/>
-                <a:ea typeface="+mn-ea"/>
-                <a:cs typeface="+mn-cs"/>
-              </a:rPr>
-            </a:br>
-            <a:r>
-              <a:rPr lang="pt-BR" sz="1200" b="0" i="0" kern="1200" dirty="0">
-                <a:solidFill>
-                  <a:schemeClr val="tx1"/>
-                </a:solidFill>
-                <a:effectLst/>
-                <a:latin typeface="+mn-lt"/>
-                <a:ea typeface="+mn-ea"/>
-                <a:cs typeface="+mn-cs"/>
-              </a:rPr>
-              <a:t>Um paciente pode ter múltiplas doenças: "diabetes", "hipertensão" e "asma".</a:t>
-            </a:r>
-          </a:p>
-          <a:p>
-            <a:r>
-              <a:rPr lang="pt-BR" sz="1200" b="1" i="0" kern="1200" dirty="0">
-                <a:solidFill>
-                  <a:schemeClr val="tx1"/>
-                </a:solidFill>
-                <a:effectLst/>
-                <a:latin typeface="+mn-lt"/>
-                <a:ea typeface="+mn-ea"/>
-                <a:cs typeface="+mn-cs"/>
-              </a:rPr>
-              <a:t>Análise de sentimentos em texto</a:t>
-            </a:r>
-            <a:r>
-              <a:rPr lang="pt-BR" sz="1200" b="0" i="0" kern="1200" dirty="0">
-                <a:solidFill>
-                  <a:schemeClr val="tx1"/>
-                </a:solidFill>
-                <a:effectLst/>
-                <a:latin typeface="+mn-lt"/>
-                <a:ea typeface="+mn-ea"/>
-                <a:cs typeface="+mn-cs"/>
-              </a:rPr>
-              <a:t/>
-            </a:r>
-            <a:br>
-              <a:rPr lang="pt-BR" sz="1200" b="0" i="0" kern="1200" dirty="0">
-                <a:solidFill>
-                  <a:schemeClr val="tx1"/>
-                </a:solidFill>
-                <a:effectLst/>
-                <a:latin typeface="+mn-lt"/>
-                <a:ea typeface="+mn-ea"/>
-                <a:cs typeface="+mn-cs"/>
-              </a:rPr>
-            </a:br>
-            <a:r>
-              <a:rPr lang="pt-BR" sz="1200" b="0" i="0" kern="1200" dirty="0">
-                <a:solidFill>
-                  <a:schemeClr val="tx1"/>
-                </a:solidFill>
-                <a:effectLst/>
-                <a:latin typeface="+mn-lt"/>
-                <a:ea typeface="+mn-ea"/>
-                <a:cs typeface="+mn-cs"/>
-              </a:rPr>
-              <a:t>Um texto pode expressar "alegria", "surpresa" e "raiva" ao mesmo tempo.</a:t>
-            </a:r>
-          </a:p>
-          <a:p>
-            <a:r>
-              <a:rPr lang="pt-BR" sz="1200" b="1" i="0" kern="1200" dirty="0" err="1">
-                <a:solidFill>
-                  <a:schemeClr val="tx1"/>
-                </a:solidFill>
-                <a:effectLst/>
-                <a:latin typeface="+mn-lt"/>
-                <a:ea typeface="+mn-ea"/>
-                <a:cs typeface="+mn-cs"/>
-              </a:rPr>
-              <a:t>Tags</a:t>
-            </a:r>
-            <a:r>
-              <a:rPr lang="pt-BR" sz="1200" b="1" i="0" kern="1200" dirty="0">
-                <a:solidFill>
-                  <a:schemeClr val="tx1"/>
-                </a:solidFill>
-                <a:effectLst/>
-                <a:latin typeface="+mn-lt"/>
-                <a:ea typeface="+mn-ea"/>
-                <a:cs typeface="+mn-cs"/>
-              </a:rPr>
-              <a:t> em produtos de e-commerce</a:t>
-            </a:r>
-            <a:r>
-              <a:rPr lang="pt-BR" sz="1200" b="0" i="0" kern="1200" dirty="0">
-                <a:solidFill>
-                  <a:schemeClr val="tx1"/>
-                </a:solidFill>
-                <a:effectLst/>
-                <a:latin typeface="+mn-lt"/>
-                <a:ea typeface="+mn-ea"/>
-                <a:cs typeface="+mn-cs"/>
-              </a:rPr>
-              <a:t/>
-            </a:r>
-            <a:br>
-              <a:rPr lang="pt-BR" sz="1200" b="0" i="0" kern="1200" dirty="0">
-                <a:solidFill>
-                  <a:schemeClr val="tx1"/>
-                </a:solidFill>
-                <a:effectLst/>
-                <a:latin typeface="+mn-lt"/>
-                <a:ea typeface="+mn-ea"/>
-                <a:cs typeface="+mn-cs"/>
-              </a:rPr>
-            </a:br>
-            <a:r>
-              <a:rPr lang="pt-BR" sz="1200" b="0" i="0" kern="1200" dirty="0">
-                <a:solidFill>
-                  <a:schemeClr val="tx1"/>
-                </a:solidFill>
-                <a:effectLst/>
-                <a:latin typeface="+mn-lt"/>
-                <a:ea typeface="+mn-ea"/>
-                <a:cs typeface="+mn-cs"/>
-              </a:rPr>
-              <a:t>Um produto pode ter </a:t>
-            </a:r>
-            <a:r>
-              <a:rPr lang="pt-BR" sz="1200" b="0" i="0" kern="1200" dirty="0" err="1">
-                <a:solidFill>
-                  <a:schemeClr val="tx1"/>
-                </a:solidFill>
-                <a:effectLst/>
-                <a:latin typeface="+mn-lt"/>
-                <a:ea typeface="+mn-ea"/>
-                <a:cs typeface="+mn-cs"/>
-              </a:rPr>
-              <a:t>tags</a:t>
-            </a:r>
-            <a:r>
-              <a:rPr lang="pt-BR" sz="1200" b="0" i="0" kern="1200" dirty="0">
-                <a:solidFill>
-                  <a:schemeClr val="tx1"/>
-                </a:solidFill>
-                <a:effectLst/>
-                <a:latin typeface="+mn-lt"/>
-                <a:ea typeface="+mn-ea"/>
-                <a:cs typeface="+mn-cs"/>
-              </a:rPr>
-              <a:t> como "barato", "ecológico", "promoção" e "novidade".</a:t>
-            </a:r>
-          </a:p>
-          <a:p>
-            <a:r>
-              <a:rPr lang="pt-BR" sz="1200" b="1" i="0" kern="1200" dirty="0">
-                <a:solidFill>
-                  <a:schemeClr val="tx1"/>
-                </a:solidFill>
-                <a:effectLst/>
-                <a:latin typeface="+mn-lt"/>
-                <a:ea typeface="+mn-ea"/>
-                <a:cs typeface="+mn-cs"/>
-              </a:rPr>
-              <a:t>Classificação de músicas por gênero</a:t>
-            </a:r>
-            <a:r>
-              <a:rPr lang="pt-BR" sz="1200" b="0" i="0" kern="1200" dirty="0">
-                <a:solidFill>
-                  <a:schemeClr val="tx1"/>
-                </a:solidFill>
-                <a:effectLst/>
-                <a:latin typeface="+mn-lt"/>
-                <a:ea typeface="+mn-ea"/>
-                <a:cs typeface="+mn-cs"/>
-              </a:rPr>
-              <a:t/>
-            </a:r>
-            <a:br>
-              <a:rPr lang="pt-BR" sz="1200" b="0" i="0" kern="1200" dirty="0">
-                <a:solidFill>
-                  <a:schemeClr val="tx1"/>
-                </a:solidFill>
-                <a:effectLst/>
-                <a:latin typeface="+mn-lt"/>
-                <a:ea typeface="+mn-ea"/>
-                <a:cs typeface="+mn-cs"/>
-              </a:rPr>
-            </a:br>
-            <a:r>
-              <a:rPr lang="pt-BR" sz="1200" b="0" i="0" kern="1200" dirty="0">
-                <a:solidFill>
-                  <a:schemeClr val="tx1"/>
-                </a:solidFill>
-                <a:effectLst/>
-                <a:latin typeface="+mn-lt"/>
-                <a:ea typeface="+mn-ea"/>
-                <a:cs typeface="+mn-cs"/>
-              </a:rPr>
-              <a:t>Uma música pode ser "rock", "eletrônica" e "experimental" simultaneamente.</a:t>
-            </a:r>
-          </a:p>
-          <a:p>
-            <a:r>
-              <a:rPr lang="pt-BR" dirty="0"/>
-              <a:t/>
-            </a:r>
             <a:br>
               <a:rPr lang="pt-BR" dirty="0"/>
             </a:br>
             <a:r>
               <a:rPr lang="pt-BR" dirty="0"/>
-              <a:t/>
-            </a:r>
-            <a:br>
-              <a:rPr lang="pt-BR" dirty="0"/>
-            </a:br>
-            <a:r>
-              <a:rPr lang="pt-BR" dirty="0"/>
               <a:t>O classificador Softmax prevê/prediz apenas uma classe de cada vez (ou seja, ele é </a:t>
             </a:r>
             <a:r>
@@ -3289,14 +2910,6 @@
             <a:r>
               <a:rPr lang="pt-BR" dirty="0"/>
               <a:t>, e não </a:t>
-            </a:r>
-            <a:r>
-              <a:rPr lang="pt-BR" dirty="0" err="1"/>
-              <a:t>multi-saída</a:t>
-            </a:r>
-            <a:r>
-              <a:rPr lang="pt-BR" dirty="0"/>
-              <a:t> ou </a:t>
             </a:r>
             <a:r>
               <a:rPr lang="pt-BR" dirty="0" err="1"/>
@@ -4869,7 +4482,7 @@
           <p:cNvPr id="2" name="Título 1">
             <a:extLst>
               <a:ext uri="{FF2B5EF4-FFF2-40B4-BE49-F238E27FC236}">
-                <a16:creationId xmlns:a16="http://schemas.microsoft.com/office/drawing/2014/main" xmlns="" id="{1DB9B4FF-B06E-403C-A326-BDC64D8FF94E}"/>
+                <a16:creationId xmlns:a16="http://schemas.microsoft.com/office/drawing/2014/main" id="{1DB9B4FF-B06E-403C-A326-BDC64D8FF94E}"/>
               </a:ext>
             </a:extLst>
           </p:cNvPr>
@@ -4906,7 +4519,7 @@
           <p:cNvPr id="3" name="Subtítulo 2">
             <a:extLst>
               <a:ext uri="{FF2B5EF4-FFF2-40B4-BE49-F238E27FC236}">
-                <a16:creationId xmlns:a16="http://schemas.microsoft.com/office/drawing/2014/main" xmlns="" id="{247BDFCE-746E-45BF-A319-4733D58D1632}"/>
+                <a16:creationId xmlns:a16="http://schemas.microsoft.com/office/drawing/2014/main" id="{247BDFCE-746E-45BF-A319-4733D58D1632}"/>
               </a:ext>
             </a:extLst>
           </p:cNvPr>
@@ -4976,7 +4589,7 @@
           <p:cNvPr id="4" name="Espaço Reservado para Data 3">
             <a:extLst>
               <a:ext uri="{FF2B5EF4-FFF2-40B4-BE49-F238E27FC236}">
-                <a16:creationId xmlns:a16="http://schemas.microsoft.com/office/drawing/2014/main" xmlns="" id="{9EDE2778-5372-4104-B96D-968184DA8288}"/>
+                <a16:creationId xmlns:a16="http://schemas.microsoft.com/office/drawing/2014/main" id="{9EDE2778-5372-4104-B96D-968184DA8288}"/>
               </a:ext>
             </a:extLst>
           </p:cNvPr>
@@ -4994,7 +4607,7 @@
           <a:p>
             <a:fld id="{63289F7E-B80B-496E-81B4-D396C37C9454}" type="datetimeFigureOut">
               <a:rPr lang="pt-BR" smtClean="0"/>
-              <a:t>13/09/2026</a:t>
+              <a:t>14/09/2026</a:t>
             </a:fld>
             <a:endParaRPr lang="pt-BR"/>
           </a:p>
@@ -5005,7 +4618,7 @@
           <p:cNvPr id="5" name="Espaço Reservado para Rodapé 4">
             <a:extLst>
               <a:ext uri="{FF2B5EF4-FFF2-40B4-BE49-F238E27FC236}">
-                <a16:creationId xmlns:a16="http://schemas.microsoft.com/office/drawing/2014/main" xmlns="" id="{C1DD0F41-C861-4051-988D-3024A37A4B93}"/>
+                <a16:creationId xmlns:a16="http://schemas.microsoft.com/office/drawing/2014/main" id="{C1DD0F41-C861-4051-988D-3024A37A4B93}"/>
               </a:ext>
             </a:extLst>
           </p:cNvPr>
@@ -5030,7 +4643,7 @@
           <p:cNvPr id="6" name="Espaço Reservado para Número de Slide 5">
             <a:extLst>
               <a:ext uri="{FF2B5EF4-FFF2-40B4-BE49-F238E27FC236}">
-                <a16:creationId xmlns:a16="http://schemas.microsoft.com/office/drawing/2014/main" xmlns="" id="{07E5967E-D980-431A-A5DB-3F0C5030A81E}"/>
+                <a16:creationId xmlns:a16="http://schemas.microsoft.com/office/drawing/2014/main" id="{07E5967E-D980-431A-A5DB-3F0C5030A81E}"/>
               </a:ext>
             </a:extLst>
           </p:cNvPr>
@@ -5089,7 +4702,7 @@
           <p:cNvPr id="2" name="Título 1">
             <a:extLst>
               <a:ext uri="{FF2B5EF4-FFF2-40B4-BE49-F238E27FC236}">
-                <a16:creationId xmlns:a16="http://schemas.microsoft.com/office/drawing/2014/main" xmlns="" id="{9036C49F-3E68-4175-81BA-3C3FEE44308A}"/>
+                <a16:creationId xmlns:a16="http://schemas.microsoft.com/office/drawing/2014/main" id="{9036C49F-3E68-4175-81BA-3C3FEE44308A}"/>
               </a:ext>
             </a:extLst>
           </p:cNvPr>
@@ -5117,7 +4730,7 @@
           <p:cNvPr id="3" name="Espaço Reservado para Texto Vertical 2">
             <a:extLst>
               <a:ext uri="{FF2B5EF4-FFF2-40B4-BE49-F238E27FC236}">
-                <a16:creationId xmlns:a16="http://schemas.microsoft.com/office/drawing/2014/main" xmlns="" id="{426FA736-3DD3-4D4E-B57B-BBE1D8F7D424}"/>
+                <a16:creationId xmlns:a16="http://schemas.microsoft.com/office/drawing/2014/main" id="{426FA736-3DD3-4D4E-B57B-BBE1D8F7D424}"/>
               </a:ext>
             </a:extLst>
           </p:cNvPr>
@@ -5174,7 +4787,7 @@
           <p:cNvPr id="4" name="Espaço Reservado para Data 3">
             <a:extLst>
               <a:ext uri="{FF2B5EF4-FFF2-40B4-BE49-F238E27FC236}">
-                <a16:creationId xmlns:a16="http://schemas.microsoft.com/office/drawing/2014/main" xmlns="" id="{99E8855C-D8FD-48F6-B14E-861E0DE4D915}"/>
+                <a16:creationId xmlns:a16="http://schemas.microsoft.com/office/drawing/2014/main" id="{99E8855C-D8FD-48F6-B14E-861E0DE4D915}"/>
               </a:ext>
             </a:extLst>
           </p:cNvPr>
@@ -5192,7 +4805,7 @@
           <a:p>
             <a:fld id="{63289F7E-B80B-496E-81B4-D396C37C9454}" type="datetimeFigureOut">
               <a:rPr lang="pt-BR" smtClean="0"/>
-              <a:t>13/09/2026</a:t>
+              <a:t>14/09/2026</a:t>
             </a:fld>
             <a:endParaRPr lang="pt-BR"/>
           </a:p>
@@ -5203,7 +4816,7 @@
           <p:cNvPr id="5" name="Espaço Reservado para Rodapé 4">
             <a:extLst>
               <a:ext uri="{FF2B5EF4-FFF2-40B4-BE49-F238E27FC236}">
-                <a16:creationId xmlns:a16="http://schemas.microsoft.com/office/drawing/2014/main" xmlns="" id="{97C0BB88-2F21-42A5-ACFF-83DA47F2D340}"/>
+                <a16:creationId xmlns:a16="http://schemas.microsoft.com/office/drawing/2014/main" id="{97C0BB88-2F21-42A5-ACFF-83DA47F2D340}"/>
               </a:ext>
             </a:extLst>
           </p:cNvPr>
@@ -5228,7 +4841,7 @@
           <p:cNvPr id="6" name="Espaço Reservado para Número de Slide 5">
             <a:extLst>
               <a:ext uri="{FF2B5EF4-FFF2-40B4-BE49-F238E27FC236}">
-                <a16:creationId xmlns:a16="http://schemas.microsoft.com/office/drawing/2014/main" xmlns="" id="{6CB462B3-1F22-4C05-B4B8-7A279FB7D5E9}"/>
+                <a16:creationId xmlns:a16="http://schemas.microsoft.com/office/drawing/2014/main" id="{6CB462B3-1F22-4C05-B4B8-7A279FB7D5E9}"/>
               </a:ext>
             </a:extLst>
           </p:cNvPr>
@@ -5287,7 +4900,7 @@
           <p:cNvPr id="2" name="Título Vertical 1">
             <a:extLst>
               <a:ext uri="{FF2B5EF4-FFF2-40B4-BE49-F238E27FC236}">
-                <a16:creationId xmlns:a16="http://schemas.microsoft.com/office/drawing/2014/main" xmlns="" id="{EAEAB728-701C-4207-A9D5-23FF45C60502}"/>
+                <a16:creationId xmlns:a16="http://schemas.microsoft.com/office/drawing/2014/main" id="{EAEAB728-701C-4207-A9D5-23FF45C60502}"/>
               </a:ext>
             </a:extLst>
           </p:cNvPr>
@@ -5320,7 +4933,7 @@
           <p:cNvPr id="3" name="Espaço Reservado para Texto Vertical 2">
             <a:extLst>
               <a:ext uri="{FF2B5EF4-FFF2-40B4-BE49-F238E27FC236}">
-                <a16:creationId xmlns:a16="http://schemas.microsoft.com/office/drawing/2014/main" xmlns="" id="{BA8C8CCF-7823-480A-9A19-0F664DD17E3B}"/>
+                <a16:creationId xmlns:a16="http://schemas.microsoft.com/office/drawing/2014/main" id="{BA8C8CCF-7823-480A-9A19-0F664DD17E3B}"/>
               </a:ext>
             </a:extLst>
           </p:cNvPr>
@@ -5382,7 +4995,7 @@
           <p:cNvPr id="4" name="Espaço Reservado para Data 3">
             <a:extLst>
               <a:ext uri="{FF2B5EF4-FFF2-40B4-BE49-F238E27FC236}">
-                <a16:creationId xmlns:a16="http://schemas.microsoft.com/office/drawing/2014/main" xmlns="" id="{721D5734-7B1F-425D-942F-6EB73344027C}"/>
+                <a16:creationId xmlns:a16="http://schemas.microsoft.com/office/drawing/2014/main" id="{721D5734-7B1F-425D-942F-6EB73344027C}"/>
               </a:ext>
             </a:extLst>
           </p:cNvPr>
@@ -5400,7 +5013,7 @@
           <a:p>
             <a:fld id="{63289F7E-B80B-496E-81B4-D396C37C9454}" type="datetimeFigureOut">
               <a:rPr lang="pt-BR" smtClean="0"/>
-              <a:t>13/09/2026</a:t>
+              <a:t>14/09/2026</a:t>
             </a:fld>
             <a:endParaRPr lang="pt-BR"/>
           </a:p>
@@ -5411,7 +5024,7 @@
           <p:cNvPr id="5" name="Espaço Reservado para Rodapé 4">
             <a:extLst>
               <a:ext uri="{FF2B5EF4-FFF2-40B4-BE49-F238E27FC236}">
-                <a16:creationId xmlns:a16="http://schemas.microsoft.com/office/drawing/2014/main" xmlns="" id="{1E1AAEAC-F08D-45FE-89EC-B1B349A868C9}"/>
+                <a16:creationId xmlns:a16="http://schemas.microsoft.com/office/drawing/2014/main" id="{1E1AAEAC-F08D-45FE-89EC-B1B349A868C9}"/>
               </a:ext>
             </a:extLst>
           </p:cNvPr>
@@ -5436,7 +5049,7 @@
           <p:cNvPr id="6" name="Espaço Reservado para Número de Slide 5">
             <a:extLst>
               <a:ext uri="{FF2B5EF4-FFF2-40B4-BE49-F238E27FC236}">
-                <a16:creationId xmlns:a16="http://schemas.microsoft.com/office/drawing/2014/main" xmlns="" id="{BAA44493-9911-47B2-87A6-C2141A972BC8}"/>
+                <a16:creationId xmlns:a16="http://schemas.microsoft.com/office/drawing/2014/main" id="{BAA44493-9911-47B2-87A6-C2141A972BC8}"/>
               </a:ext>
             </a:extLst>
           </p:cNvPr>
@@ -5495,7 +5108,7 @@
           <p:cNvPr id="2" name="Título 1">
             <a:extLst>
               <a:ext uri="{FF2B5EF4-FFF2-40B4-BE49-F238E27FC236}">
-                <a16:creationId xmlns:a16="http://schemas.microsoft.com/office/drawing/2014/main" xmlns="" id="{71BD44A5-8F21-4626-A01D-48A1C874B1D5}"/>
+                <a16:creationId xmlns:a16="http://schemas.microsoft.com/office/drawing/2014/main" id="{71BD44A5-8F21-4626-A01D-48A1C874B1D5}"/>
               </a:ext>
             </a:extLst>
           </p:cNvPr>
@@ -5523,7 +5136,7 @@
           <p:cNvPr id="3" name="Espaço Reservado para Conteúdo 2">
             <a:extLst>
               <a:ext uri="{FF2B5EF4-FFF2-40B4-BE49-F238E27FC236}">
-                <a16:creationId xmlns:a16="http://schemas.microsoft.com/office/drawing/2014/main" xmlns="" id="{B79E8085-65A9-48AA-951D-71D978BFF4ED}"/>
+                <a16:creationId xmlns:a16="http://schemas.microsoft.com/office/drawing/2014/main" id="{B79E8085-65A9-48AA-951D-71D978BFF4ED}"/>
               </a:ext>
             </a:extLst>
           </p:cNvPr>
@@ -5580,7 +5193,7 @@
           <p:cNvPr id="4" name="Espaço Reservado para Data 3">
             <a:extLst>
               <a:ext uri="{FF2B5EF4-FFF2-40B4-BE49-F238E27FC236}">
-                <a16:creationId xmlns:a16="http://schemas.microsoft.com/office/drawing/2014/main" xmlns="" id="{F05BE1AF-51EA-425D-B188-DE7BD675009F}"/>
+                <a16:creationId xmlns:a16="http://schemas.microsoft.com/office/drawing/2014/main" id="{F05BE1AF-51EA-425D-B188-DE7BD675009F}"/>
               </a:ext>
             </a:extLst>
           </p:cNvPr>
@@ -5598,7 +5211,7 @@
           <a:p>
             <a:fld id="{63289F7E-B80B-496E-81B4-D396C37C9454}" type="datetimeFigureOut">
               <a:rPr lang="pt-BR" smtClean="0"/>
-              <a:t>13/09/2026</a:t>
+              <a:t>14/09/2026</a:t>
             </a:fld>
             <a:endParaRPr lang="pt-BR"/>
           </a:p>
@@ -5609,7 +5222,7 @@
           <p:cNvPr id="5" name="Espaço Reservado para Rodapé 4">
             <a:extLst>
               <a:ext uri="{FF2B5EF4-FFF2-40B4-BE49-F238E27FC236}">
-                <a16:creationId xmlns:a16="http://schemas.microsoft.com/office/drawing/2014/main" xmlns="" id="{121BE632-29CF-4CB9-B365-C9EF38F89BE6}"/>
+                <a16:creationId xmlns:a16="http://schemas.microsoft.com/office/drawing/2014/main" id="{121BE632-29CF-4CB9-B365-C9EF38F89BE6}"/>
               </a:ext>
             </a:extLst>
           </p:cNvPr>
@@ -5634,7 +5247,7 @@
           <p:cNvPr id="6" name="Espaço Reservado para Número de Slide 5">
             <a:extLst>
               <a:ext uri="{FF2B5EF4-FFF2-40B4-BE49-F238E27FC236}">
-                <a16:creationId xmlns:a16="http://schemas.microsoft.com/office/drawing/2014/main" xmlns="" id="{60CF3DD1-9AEC-4A57-B461-4E4DD86FAC18}"/>
+                <a16:creationId xmlns:a16="http://schemas.microsoft.com/office/drawing/2014/main" id="{60CF3DD1-9AEC-4A57-B461-4E4DD86FAC18}"/>
               </a:ext>
             </a:extLst>
           </p:cNvPr>
@@ -5693,7 +5306,7 @@
           <p:cNvPr id="2" name="Título 1">
             <a:extLst>
               <a:ext uri="{FF2B5EF4-FFF2-40B4-BE49-F238E27FC236}">
-                <a16:creationId xmlns:a16="http://schemas.microsoft.com/office/drawing/2014/main" xmlns="" id="{34AB2FF0-A4D7-4E28-991D-FF26140D5988}"/>
+                <a16:creationId xmlns:a16="http://schemas.microsoft.com/office/drawing/2014/main" id="{34AB2FF0-A4D7-4E28-991D-FF26140D5988}"/>
               </a:ext>
             </a:extLst>
           </p:cNvPr>
@@ -5730,7 +5343,7 @@
           <p:cNvPr id="3" name="Espaço Reservado para Texto 2">
             <a:extLst>
               <a:ext uri="{FF2B5EF4-FFF2-40B4-BE49-F238E27FC236}">
-                <a16:creationId xmlns:a16="http://schemas.microsoft.com/office/drawing/2014/main" xmlns="" id="{E2AC45B0-4145-40DB-8E61-105461170604}"/>
+                <a16:creationId xmlns:a16="http://schemas.microsoft.com/office/drawing/2014/main" id="{E2AC45B0-4145-40DB-8E61-105461170604}"/>
               </a:ext>
             </a:extLst>
           </p:cNvPr>
@@ -5855,7 +5468,7 @@
           <p:cNvPr id="4" name="Espaço Reservado para Data 3">
             <a:extLst>
               <a:ext uri="{FF2B5EF4-FFF2-40B4-BE49-F238E27FC236}">
-                <a16:creationId xmlns:a16="http://schemas.microsoft.com/office/drawing/2014/main" xmlns="" id="{50F1D3FB-740A-4EBA-A309-2CE71D12ECFB}"/>
+                <a16:creationId xmlns:a16="http://schemas.microsoft.com/office/drawing/2014/main" id="{50F1D3FB-740A-4EBA-A309-2CE71D12ECFB}"/>
               </a:ext>
             </a:extLst>
           </p:cNvPr>
@@ -5873,7 +5486,7 @@
           <a:p>
             <a:fld id="{63289F7E-B80B-496E-81B4-D396C37C9454}" type="datetimeFigureOut">
               <a:rPr lang="pt-BR" smtClean="0"/>
-              <a:t>13/09/2026</a:t>
+              <a:t>14/09/2026</a:t>
             </a:fld>
             <a:endParaRPr lang="pt-BR"/>
           </a:p>
@@ -5884,7 +5497,7 @@
           <p:cNvPr id="5" name="Espaço Reservado para Rodapé 4">
             <a:extLst>
               <a:ext uri="{FF2B5EF4-FFF2-40B4-BE49-F238E27FC236}">
-                <a16:creationId xmlns:a16="http://schemas.microsoft.com/office/drawing/2014/main" xmlns="" id="{BDCAB18F-8715-4465-A940-F9C193A2ACE9}"/>
+                <a16:creationId xmlns:a16="http://schemas.microsoft.com/office/drawing/2014/main" id="{BDCAB18F-8715-4465-A940-F9C193A2ACE9}"/>
               </a:ext>
             </a:extLst>
           </p:cNvPr>
@@ -5909,7 +5522,7 @@
           <p:cNvPr id="6" name="Espaço Reservado para Número de Slide 5">
             <a:extLst>
               <a:ext uri="{FF2B5EF4-FFF2-40B4-BE49-F238E27FC236}">
-                <a16:creationId xmlns:a16="http://schemas.microsoft.com/office/drawing/2014/main" xmlns="" id="{353466C6-8248-429F-8056-FF040BF509EB}"/>
+                <a16:creationId xmlns:a16="http://schemas.microsoft.com/office/drawing/2014/main" id="{353466C6-8248-429F-8056-FF040BF509EB}"/>
               </a:ext>
             </a:extLst>
           </p:cNvPr>
@@ -5968,7 +5581,7 @@
           <p:cNvPr id="2" name="Título 1">
             <a:extLst>
               <a:ext uri="{FF2B5EF4-FFF2-40B4-BE49-F238E27FC236}">
-                <a16:creationId xmlns:a16="http://schemas.microsoft.com/office/drawing/2014/main" xmlns="" id="{BC7BB9F0-F14B-4A91-B2B7-35BC47FE4DE7}"/>
+                <a16:creationId xmlns:a16="http://schemas.microsoft.com/office/drawing/2014/main" id="{BC7BB9F0-F14B-4A91-B2B7-35BC47FE4DE7}"/>
               </a:ext>
             </a:extLst>
           </p:cNvPr>
@@ -5996,7 +5609,7 @@
           <p:cNvPr id="3" name="Espaço Reservado para Conteúdo 2">
             <a:extLst>
               <a:ext uri="{FF2B5EF4-FFF2-40B4-BE49-F238E27FC236}">
-                <a16:creationId xmlns:a16="http://schemas.microsoft.com/office/drawing/2014/main" xmlns="" id="{EC1FC1C4-73DA-47A6-8496-B0B457F7D39A}"/>
+                <a16:creationId xmlns:a16="http://schemas.microsoft.com/office/drawing/2014/main" id="{EC1FC1C4-73DA-47A6-8496-B0B457F7D39A}"/>
               </a:ext>
             </a:extLst>
           </p:cNvPr>
@@ -6058,7 +5671,7 @@
           <p:cNvPr id="4" name="Espaço Reservado para Conteúdo 3">
             <a:extLst>
               <a:ext uri="{FF2B5EF4-FFF2-40B4-BE49-F238E27FC236}">
-                <a16:creationId xmlns:a16="http://schemas.microsoft.com/office/drawing/2014/main" xmlns="" id="{E92F06A8-A449-4D92-9912-76873E529B38}"/>
+                <a16:creationId xmlns:a16="http://schemas.microsoft.com/office/drawing/2014/main" id="{E92F06A8-A449-4D92-9912-76873E529B38}"/>
               </a:ext>
             </a:extLst>
           </p:cNvPr>
@@ -6120,7 +5733,7 @@
           <p:cNvPr id="5" name="Espaço Reservado para Data 4">
             <a:extLst>
               <a:ext uri="{FF2B5EF4-FFF2-40B4-BE49-F238E27FC236}">
-                <a16:creationId xmlns:a16="http://schemas.microsoft.com/office/drawing/2014/main" xmlns="" id="{938070A4-BC2F-4D55-BD8D-DEAF11BB9EE9}"/>
+                <a16:creationId xmlns:a16="http://schemas.microsoft.com/office/drawing/2014/main" id="{938070A4-BC2F-4D55-BD8D-DEAF11BB9EE9}"/>
               </a:ext>
             </a:extLst>
           </p:cNvPr>
@@ -6138,7 +5751,7 @@
           <a:p>
             <a:fld id="{63289F7E-B80B-496E-81B4-D396C37C9454}" type="datetimeFigureOut">
               <a:rPr lang="pt-BR" smtClean="0"/>
-              <a:t>13/09/2026</a:t>
+              <a:t>14/09/2026</a:t>
             </a:fld>
             <a:endParaRPr lang="pt-BR"/>
           </a:p>
@@ -6149,7 +5762,7 @@
           <p:cNvPr id="6" name="Espaço Reservado para Rodapé 5">
             <a:extLst>
               <a:ext uri="{FF2B5EF4-FFF2-40B4-BE49-F238E27FC236}">
-                <a16:creationId xmlns:a16="http://schemas.microsoft.com/office/drawing/2014/main" xmlns="" id="{45CC2DB8-844A-465F-BA9A-7734C80C7F43}"/>
+                <a16:creationId xmlns:a16="http://schemas.microsoft.com/office/drawing/2014/main" id="{45CC2DB8-844A-465F-BA9A-7734C80C7F43}"/>
               </a:ext>
             </a:extLst>
           </p:cNvPr>
@@ -6174,7 +5787,7 @@
           <p:cNvPr id="7" name="Espaço Reservado para Número de Slide 6">
             <a:extLst>
               <a:ext uri="{FF2B5EF4-FFF2-40B4-BE49-F238E27FC236}">
-                <a16:creationId xmlns:a16="http://schemas.microsoft.com/office/drawing/2014/main" xmlns="" id="{4CC606A8-097B-4040-94E0-CD8C88280D8F}"/>
+                <a16:creationId xmlns:a16="http://schemas.microsoft.com/office/drawing/2014/main" id="{4CC606A8-097B-4040-94E0-CD8C88280D8F}"/>
               </a:ext>
             </a:extLst>
           </p:cNvPr>
@@ -6233,7 +5846,7 @@
           <p:cNvPr id="2" name="Título 1">
             <a:extLst>
               <a:ext uri="{FF2B5EF4-FFF2-40B4-BE49-F238E27FC236}">
-                <a16:creationId xmlns:a16="http://schemas.microsoft.com/office/drawing/2014/main" xmlns="" id="{76D66686-0143-4CB6-8C09-BA326F1E7ACA}"/>
+                <a16:creationId xmlns:a16="http://schemas.microsoft.com/office/drawing/2014/main" id="{76D66686-0143-4CB6-8C09-BA326F1E7ACA}"/>
               </a:ext>
             </a:extLst>
           </p:cNvPr>
@@ -6266,7 +5879,7 @@
           <p:cNvPr id="3" name="Espaço Reservado para Texto 2">
             <a:extLst>
               <a:ext uri="{FF2B5EF4-FFF2-40B4-BE49-F238E27FC236}">
-                <a16:creationId xmlns:a16="http://schemas.microsoft.com/office/drawing/2014/main" xmlns="" id="{0227AB85-F59E-4BCE-B846-4FA0992C2F23}"/>
+                <a16:creationId xmlns:a16="http://schemas.microsoft.com/office/drawing/2014/main" id="{0227AB85-F59E-4BCE-B846-4FA0992C2F23}"/>
               </a:ext>
             </a:extLst>
           </p:cNvPr>
@@ -6337,7 +5950,7 @@
           <p:cNvPr id="4" name="Espaço Reservado para Conteúdo 3">
             <a:extLst>
               <a:ext uri="{FF2B5EF4-FFF2-40B4-BE49-F238E27FC236}">
-                <a16:creationId xmlns:a16="http://schemas.microsoft.com/office/drawing/2014/main" xmlns="" id="{3373456C-7319-4D0A-827D-D29F6B083F5D}"/>
+                <a16:creationId xmlns:a16="http://schemas.microsoft.com/office/drawing/2014/main" id="{3373456C-7319-4D0A-827D-D29F6B083F5D}"/>
               </a:ext>
             </a:extLst>
           </p:cNvPr>
@@ -6399,7 +6012,7 @@
           <p:cNvPr id="5" name="Espaço Reservado para Texto 4">
             <a:extLst>
               <a:ext uri="{FF2B5EF4-FFF2-40B4-BE49-F238E27FC236}">
-                <a16:creationId xmlns:a16="http://schemas.microsoft.com/office/drawing/2014/main" xmlns="" id="{4CD109D0-2E83-4262-8029-A871CEC47406}"/>
+                <a16:creationId xmlns:a16="http://schemas.microsoft.com/office/drawing/2014/main" id="{4CD109D0-2E83-4262-8029-A871CEC47406}"/>
               </a:ext>
             </a:extLst>
           </p:cNvPr>
@@ -6470,7 +6083,7 @@
           <p:cNvPr id="6" name="Espaço Reservado para Conteúdo 5">
             <a:extLst>
               <a:ext uri="{FF2B5EF4-FFF2-40B4-BE49-F238E27FC236}">
-                <a16:creationId xmlns:a16="http://schemas.microsoft.com/office/drawing/2014/main" xmlns="" id="{AD706E3A-CFBB-4A6C-A65F-D0360A9E74FE}"/>
+                <a16:creationId xmlns:a16="http://schemas.microsoft.com/office/drawing/2014/main" id="{AD706E3A-CFBB-4A6C-A65F-D0360A9E74FE}"/>
               </a:ext>
             </a:extLst>
           </p:cNvPr>
@@ -6532,7 +6145,7 @@
           <p:cNvPr id="7" name="Espaço Reservado para Data 6">
             <a:extLst>
               <a:ext uri="{FF2B5EF4-FFF2-40B4-BE49-F238E27FC236}">
-                <a16:creationId xmlns:a16="http://schemas.microsoft.com/office/drawing/2014/main" xmlns="" id="{4172C0E5-5AF0-4805-BB51-443733CD2BD5}"/>
+                <a16:creationId xmlns:a16="http://schemas.microsoft.com/office/drawing/2014/main" id="{4172C0E5-5AF0-4805-BB51-443733CD2BD5}"/>
               </a:ext>
             </a:extLst>
           </p:cNvPr>
@@ -6550,7 +6163,7 @@
           <a:p>
             <a:fld id="{63289F7E-B80B-496E-81B4-D396C37C9454}" type="datetimeFigureOut">
               <a:rPr lang="pt-BR" smtClean="0"/>
-              <a:t>13/09/2026</a:t>
+              <a:t>14/09/2026</a:t>
             </a:fld>
             <a:endParaRPr lang="pt-BR"/>
           </a:p>
@@ -6561,7 +6174,7 @@
           <p:cNvPr id="8" name="Espaço Reservado para Rodapé 7">
             <a:extLst>
               <a:ext uri="{FF2B5EF4-FFF2-40B4-BE49-F238E27FC236}">
-                <a16:creationId xmlns:a16="http://schemas.microsoft.com/office/drawing/2014/main" xmlns="" id="{0E801648-156F-497E-99CF-797DF48051E1}"/>
+                <a16:creationId xmlns:a16="http://schemas.microsoft.com/office/drawing/2014/main" id="{0E801648-156F-497E-99CF-797DF48051E1}"/>
               </a:ext>
             </a:extLst>
           </p:cNvPr>
@@ -6586,7 +6199,7 @@
           <p:cNvPr id="9" name="Espaço Reservado para Número de Slide 8">
             <a:extLst>
               <a:ext uri="{FF2B5EF4-FFF2-40B4-BE49-F238E27FC236}">
-                <a16:creationId xmlns:a16="http://schemas.microsoft.com/office/drawing/2014/main" xmlns="" id="{EEE23D32-80E7-4796-A137-66BF842E4B53}"/>
+                <a16:creationId xmlns:a16="http://schemas.microsoft.com/office/drawing/2014/main" id="{EEE23D32-80E7-4796-A137-66BF842E4B53}"/>
               </a:ext>
             </a:extLst>
           </p:cNvPr>
@@ -6645,7 +6258,7 @@
           <p:cNvPr id="2" name="Título 1">
             <a:extLst>
               <a:ext uri="{FF2B5EF4-FFF2-40B4-BE49-F238E27FC236}">
-                <a16:creationId xmlns:a16="http://schemas.microsoft.com/office/drawing/2014/main" xmlns="" id="{2BCE2379-C78F-47E1-8CFC-B846E7AF148D}"/>
+                <a16:creationId xmlns:a16="http://schemas.microsoft.com/office/drawing/2014/main" id="{2BCE2379-C78F-47E1-8CFC-B846E7AF148D}"/>
               </a:ext>
             </a:extLst>
           </p:cNvPr>
@@ -6673,7 +6286,7 @@
           <p:cNvPr id="3" name="Espaço Reservado para Data 2">
             <a:extLst>
               <a:ext uri="{FF2B5EF4-FFF2-40B4-BE49-F238E27FC236}">
-                <a16:creationId xmlns:a16="http://schemas.microsoft.com/office/drawing/2014/main" xmlns="" id="{342600A9-7F92-4E22-9D94-E4717252A817}"/>
+                <a16:creationId xmlns:a16="http://schemas.microsoft.com/office/drawing/2014/main" id="{342600A9-7F92-4E22-9D94-E4717252A817}"/>
               </a:ext>
             </a:extLst>
           </p:cNvPr>
@@ -6691,7 +6304,7 @@
           <a:p>
             <a:fld id="{63289F7E-B80B-496E-81B4-D396C37C9454}" type="datetimeFigureOut">
               <a:rPr lang="pt-BR" smtClean="0"/>
-              <a:t>13/09/2026</a:t>
+              <a:t>14/09/2026</a:t>
             </a:fld>
             <a:endParaRPr lang="pt-BR"/>
           </a:p>
@@ -6702,7 +6315,7 @@
           <p:cNvPr id="4" name="Espaço Reservado para Rodapé 3">
             <a:extLst>
               <a:ext uri="{FF2B5EF4-FFF2-40B4-BE49-F238E27FC236}">
-                <a16:creationId xmlns:a16="http://schemas.microsoft.com/office/drawing/2014/main" xmlns="" id="{192E6BED-F546-40CC-A2DF-99CBA853654E}"/>
+                <a16:creationId xmlns:a16="http://schemas.microsoft.com/office/drawing/2014/main" id="{192E6BED-F546-40CC-A2DF-99CBA853654E}"/>
               </a:ext>
             </a:extLst>
           </p:cNvPr>
@@ -6727,7 +6340,7 @@
           <p:cNvPr id="5" name="Espaço Reservado para Número de Slide 4">
             <a:extLst>
               <a:ext uri="{FF2B5EF4-FFF2-40B4-BE49-F238E27FC236}">
-                <a16:creationId xmlns:a16="http://schemas.microsoft.com/office/drawing/2014/main" xmlns="" id="{6091CC40-A8C4-4063-80EB-CC5099621678}"/>
+                <a16:creationId xmlns:a16="http://schemas.microsoft.com/office/drawing/2014/main" id="{6091CC40-A8C4-4063-80EB-CC5099621678}"/>
               </a:ext>
             </a:extLst>
           </p:cNvPr>
@@ -6786,7 +6399,7 @@
           <p:cNvPr id="2" name="Espaço Reservado para Data 1">
             <a:extLst>
               <a:ext uri="{FF2B5EF4-FFF2-40B4-BE49-F238E27FC236}">
-                <a16:creationId xmlns:a16="http://schemas.microsoft.com/office/drawing/2014/main" xmlns="" id="{DD19515C-212C-4EAE-84A3-8FF4BC844F1B}"/>
+                <a16:creationId xmlns:a16="http://schemas.microsoft.com/office/drawing/2014/main" id="{DD19515C-212C-4EAE-84A3-8FF4BC844F1B}"/>
               </a:ext>
             </a:extLst>
           </p:cNvPr>
@@ -6804,7 +6417,7 @@
           <a:p>
             <a:fld id="{63289F7E-B80B-496E-81B4-D396C37C9454}" type="datetimeFigureOut">
               <a:rPr lang="pt-BR" smtClean="0"/>
-              <a:t>13/09/2026</a:t>
+              <a:t>14/09/2026</a:t>
             </a:fld>
             <a:endParaRPr lang="pt-BR"/>
           </a:p>
@@ -6815,7 +6428,7 @@
           <p:cNvPr id="3" name="Espaço Reservado para Rodapé 2">
             <a:extLst>
               <a:ext uri="{FF2B5EF4-FFF2-40B4-BE49-F238E27FC236}">
-                <a16:creationId xmlns:a16="http://schemas.microsoft.com/office/drawing/2014/main" xmlns="" id="{94D3D120-B3E8-4C96-861D-7A4F12F49B3A}"/>
+                <a16:creationId xmlns:a16="http://schemas.microsoft.com/office/drawing/2014/main" id="{94D3D120-B3E8-4C96-861D-7A4F12F49B3A}"/>
               </a:ext>
             </a:extLst>
           </p:cNvPr>
@@ -6840,7 +6453,7 @@
           <p:cNvPr id="4" name="Espaço Reservado para Número de Slide 3">
             <a:extLst>
               <a:ext uri="{FF2B5EF4-FFF2-40B4-BE49-F238E27FC236}">
-                <a16:creationId xmlns:a16="http://schemas.microsoft.com/office/drawing/2014/main" xmlns="" id="{42E49B68-FA1B-468B-9F17-D5C09243D454}"/>
+                <a16:creationId xmlns:a16="http://schemas.microsoft.com/office/drawing/2014/main" id="{42E49B68-FA1B-468B-9F17-D5C09243D454}"/>
               </a:ext>
             </a:extLst>
           </p:cNvPr>
@@ -6899,7 +6512,7 @@
           <p:cNvPr id="2" name="Título 1">
             <a:extLst>
               <a:ext uri="{FF2B5EF4-FFF2-40B4-BE49-F238E27FC236}">
-                <a16:creationId xmlns:a16="http://schemas.microsoft.com/office/drawing/2014/main" xmlns="" id="{1C17BCBE-A897-4319-85EC-D87909C24980}"/>
+                <a16:creationId xmlns:a16="http://schemas.microsoft.com/office/drawing/2014/main" id="{1C17BCBE-A897-4319-85EC-D87909C24980}"/>
               </a:ext>
             </a:extLst>
           </p:cNvPr>
@@ -6936,7 +6549,7 @@
           <p:cNvPr id="3" name="Espaço Reservado para Conteúdo 2">
             <a:extLst>
               <a:ext uri="{FF2B5EF4-FFF2-40B4-BE49-F238E27FC236}">
-                <a16:creationId xmlns:a16="http://schemas.microsoft.com/office/drawing/2014/main" xmlns="" id="{4226F885-0204-4913-868B-4B8B82576F17}"/>
+                <a16:creationId xmlns:a16="http://schemas.microsoft.com/office/drawing/2014/main" id="{4226F885-0204-4913-868B-4B8B82576F17}"/>
               </a:ext>
             </a:extLst>
           </p:cNvPr>
@@ -7026,7 +6639,7 @@
           <p:cNvPr id="4" name="Espaço Reservado para Texto 3">
             <a:extLst>
               <a:ext uri="{FF2B5EF4-FFF2-40B4-BE49-F238E27FC236}">
-                <a16:creationId xmlns:a16="http://schemas.microsoft.com/office/drawing/2014/main" xmlns="" id="{00F9F784-A858-441B-8AB5-697098141751}"/>
+                <a16:creationId xmlns:a16="http://schemas.microsoft.com/office/drawing/2014/main" id="{00F9F784-A858-441B-8AB5-697098141751}"/>
               </a:ext>
             </a:extLst>
           </p:cNvPr>
@@ -7097,7 +6710,7 @@
           <p:cNvPr id="5" name="Espaço Reservado para Data 4">
             <a:extLst>
               <a:ext uri="{FF2B5EF4-FFF2-40B4-BE49-F238E27FC236}">
-                <a16:creationId xmlns:a16="http://schemas.microsoft.com/office/drawing/2014/main" xmlns="" id="{A4DC363A-5000-472E-8B17-02E7DCB8840A}"/>
+                <a16:creationId xmlns:a16="http://schemas.microsoft.com/office/drawing/2014/main" id="{A4DC363A-5000-472E-8B17-02E7DCB8840A}"/>
               </a:ext>
             </a:extLst>
           </p:cNvPr>
@@ -7115,7 +6728,7 @@
           <a:p>
             <a:fld id="{63289F7E-B80B-496E-81B4-D396C37C9454}" type="datetimeFigureOut">
               <a:rPr lang="pt-BR" smtClean="0"/>
-              <a:t>13/09/2026</a:t>
+              <a:t>14/09/2026</a:t>
             </a:fld>
             <a:endParaRPr lang="pt-BR"/>
           </a:p>
@@ -7126,7 +6739,7 @@
           <p:cNvPr id="6" name="Espaço Reservado para Rodapé 5">
             <a:extLst>
               <a:ext uri="{FF2B5EF4-FFF2-40B4-BE49-F238E27FC236}">
-                <a16:creationId xmlns:a16="http://schemas.microsoft.com/office/drawing/2014/main" xmlns="" id="{5548425D-2C21-4C56-BAD4-662978775C28}"/>
+                <a16:creationId xmlns:a16="http://schemas.microsoft.com/office/drawing/2014/main" id="{5548425D-2C21-4C56-BAD4-662978775C28}"/>
               </a:ext>
             </a:extLst>
           </p:cNvPr>
@@ -7151,7 +6764,7 @@
           <p:cNvPr id="7" name="Espaço Reservado para Número de Slide 6">
             <a:extLst>
               <a:ext uri="{FF2B5EF4-FFF2-40B4-BE49-F238E27FC236}">
-                <a16:creationId xmlns:a16="http://schemas.microsoft.com/office/drawing/2014/main" xmlns="" id="{C63E9726-E64C-42B2-AE8A-8C235A956B48}"/>
+                <a16:creationId xmlns:a16="http://schemas.microsoft.com/office/drawing/2014/main" id="{C63E9726-E64C-42B2-AE8A-8C235A956B48}"/>
               </a:ext>
             </a:extLst>
           </p:cNvPr>
@@ -7210,7 +6823,7 @@
           <p:cNvPr id="2" name="Título 1">
             <a:extLst>
               <a:ext uri="{FF2B5EF4-FFF2-40B4-BE49-F238E27FC236}">
-                <a16:creationId xmlns:a16="http://schemas.microsoft.com/office/drawing/2014/main" xmlns="" id="{11086A78-3E74-450C-96A6-CA8AC37AF772}"/>
+                <a16:creationId xmlns:a16="http://schemas.microsoft.com/office/drawing/2014/main" id="{11086A78-3E74-450C-96A6-CA8AC37AF772}"/>
               </a:ext>
             </a:extLst>
           </p:cNvPr>
@@ -7247,7 +6860,7 @@
           <p:cNvPr id="3" name="Espaço Reservado para Imagem 2">
             <a:extLst>
               <a:ext uri="{FF2B5EF4-FFF2-40B4-BE49-F238E27FC236}">
-                <a16:creationId xmlns:a16="http://schemas.microsoft.com/office/drawing/2014/main" xmlns="" id="{5F5B7312-975A-4DBC-9B2F-3652ADA006FD}"/>
+                <a16:creationId xmlns:a16="http://schemas.microsoft.com/office/drawing/2014/main" id="{5F5B7312-975A-4DBC-9B2F-3652ADA006FD}"/>
               </a:ext>
             </a:extLst>
           </p:cNvPr>
@@ -7314,7 +6927,7 @@
           <p:cNvPr id="4" name="Espaço Reservado para Texto 3">
             <a:extLst>
               <a:ext uri="{FF2B5EF4-FFF2-40B4-BE49-F238E27FC236}">
-                <a16:creationId xmlns:a16="http://schemas.microsoft.com/office/drawing/2014/main" xmlns="" id="{AAF805F5-1DFF-41C6-944C-7D79FE0D0963}"/>
+                <a16:creationId xmlns:a16="http://schemas.microsoft.com/office/drawing/2014/main" id="{AAF805F5-1DFF-41C6-944C-7D79FE0D0963}"/>
               </a:ext>
             </a:extLst>
           </p:cNvPr>
@@ -7385,7 +6998,7 @@
           <p:cNvPr id="5" name="Espaço Reservado para Data 4">
             <a:extLst>
               <a:ext uri="{FF2B5EF4-FFF2-40B4-BE49-F238E27FC236}">
-                <a16:creationId xmlns:a16="http://schemas.microsoft.com/office/drawing/2014/main" xmlns="" id="{02113D81-8665-4516-BD81-C6A1F254EECD}"/>
+                <a16:creationId xmlns:a16="http://schemas.microsoft.com/office/drawing/2014/main" id="{02113D81-8665-4516-BD81-C6A1F254EECD}"/>
               </a:ext>
             </a:extLst>
           </p:cNvPr>
@@ -7403,7 +7016,7 @@
           <a:p>
             <a:fld id="{63289F7E-B80B-496E-81B4-D396C37C9454}" type="datetimeFigureOut">
               <a:rPr lang="pt-BR" smtClean="0"/>
-              <a:t>13/09/2026</a:t>
+              <a:t>14/09/2026</a:t>
             </a:fld>
             <a:endParaRPr lang="pt-BR"/>
           </a:p>
@@ -7414,7 +7027,7 @@
           <p:cNvPr id="6" name="Espaço Reservado para Rodapé 5">
             <a:extLst>
               <a:ext uri="{FF2B5EF4-FFF2-40B4-BE49-F238E27FC236}">
-                <a16:creationId xmlns:a16="http://schemas.microsoft.com/office/drawing/2014/main" xmlns="" id="{2B00C88B-FF32-40AA-A187-727D96FD7862}"/>
+                <a16:creationId xmlns:a16="http://schemas.microsoft.com/office/drawing/2014/main" id="{2B00C88B-FF32-40AA-A187-727D96FD7862}"/>
               </a:ext>
             </a:extLst>
           </p:cNvPr>
@@ -7439,7 +7052,7 @@
           <p:cNvPr id="7" name="Espaço Reservado para Número de Slide 6">
             <a:extLst>
               <a:ext uri="{FF2B5EF4-FFF2-40B4-BE49-F238E27FC236}">
-                <a16:creationId xmlns:a16="http://schemas.microsoft.com/office/drawing/2014/main" xmlns="" id="{A04D1A2D-69F7-4B8F-A730-BC26DC340BA6}"/>
+                <a16:creationId xmlns:a16="http://schemas.microsoft.com/office/drawing/2014/main" id="{A04D1A2D-69F7-4B8F-A730-BC26DC340BA6}"/>
               </a:ext>
             </a:extLst>
           </p:cNvPr>
@@ -7503,7 +7116,7 @@
           <p:cNvPr id="2" name="Espaço Reservado para Título 1">
             <a:extLst>
               <a:ext uri="{FF2B5EF4-FFF2-40B4-BE49-F238E27FC236}">
-                <a16:creationId xmlns:a16="http://schemas.microsoft.com/office/drawing/2014/main" xmlns="" id="{E69A0273-1966-4A1B-9370-4C1CE5036371}"/>
+                <a16:creationId xmlns:a16="http://schemas.microsoft.com/office/drawing/2014/main" id="{E69A0273-1966-4A1B-9370-4C1CE5036371}"/>
               </a:ext>
             </a:extLst>
           </p:cNvPr>
@@ -7541,7 +7154,7 @@
           <p:cNvPr id="3" name="Espaço Reservado para Texto 2">
             <a:extLst>
               <a:ext uri="{FF2B5EF4-FFF2-40B4-BE49-F238E27FC236}">
-                <a16:creationId xmlns:a16="http://schemas.microsoft.com/office/drawing/2014/main" xmlns="" id="{3B9CF87A-0448-49A7-AB25-EBC1D56A40EF}"/>
+                <a16:creationId xmlns:a16="http://schemas.microsoft.com/office/drawing/2014/main" id="{3B9CF87A-0448-49A7-AB25-EBC1D56A40EF}"/>
               </a:ext>
             </a:extLst>
           </p:cNvPr>
@@ -7608,7 +7221,7 @@
           <p:cNvPr id="4" name="Espaço Reservado para Data 3">
             <a:extLst>
               <a:ext uri="{FF2B5EF4-FFF2-40B4-BE49-F238E27FC236}">
-                <a16:creationId xmlns:a16="http://schemas.microsoft.com/office/drawing/2014/main" xmlns="" id="{2EF7B1F2-BB5A-44D0-816D-16AD2C71430E}"/>
+                <a16:creationId xmlns:a16="http://schemas.microsoft.com/office/drawing/2014/main" id="{2EF7B1F2-BB5A-44D0-816D-16AD2C71430E}"/>
               </a:ext>
             </a:extLst>
           </p:cNvPr>
@@ -7644,7 +7257,7 @@
           <a:p>
             <a:fld id="{63289F7E-B80B-496E-81B4-D396C37C9454}" type="datetimeFigureOut">
               <a:rPr lang="pt-BR" smtClean="0"/>
-              <a:t>13/09/2026</a:t>
+              <a:t>14/09/2026</a:t>
             </a:fld>
             <a:endParaRPr lang="pt-BR"/>
           </a:p>
@@ -7655,7 +7268,7 @@
           <p:cNvPr id="5" name="Espaço Reservado para Rodapé 4">
             <a:extLst>
               <a:ext uri="{FF2B5EF4-FFF2-40B4-BE49-F238E27FC236}">
-                <a16:creationId xmlns:a16="http://schemas.microsoft.com/office/drawing/2014/main" xmlns="" id="{C703F94C-2CC8-4DAA-BC35-14FC3E841DCD}"/>
+                <a16:creationId xmlns:a16="http://schemas.microsoft.com/office/drawing/2014/main" id="{C703F94C-2CC8-4DAA-BC35-14FC3E841DCD}"/>
               </a:ext>
             </a:extLst>
           </p:cNvPr>
@@ -7698,7 +7311,7 @@
           <p:cNvPr id="6" name="Espaço Reservado para Número de Slide 5">
             <a:extLst>
               <a:ext uri="{FF2B5EF4-FFF2-40B4-BE49-F238E27FC236}">
-                <a16:creationId xmlns:a16="http://schemas.microsoft.com/office/drawing/2014/main" xmlns="" id="{64051336-7048-457A-8B61-D94291D71648}"/>
+                <a16:creationId xmlns:a16="http://schemas.microsoft.com/office/drawing/2014/main" id="{64051336-7048-457A-8B61-D94291D71648}"/>
               </a:ext>
             </a:extLst>
           </p:cNvPr>
@@ -8066,7 +7679,7 @@
           <p:cNvPr id="4" name="CaixaDeTexto 3">
             <a:extLst>
               <a:ext uri="{FF2B5EF4-FFF2-40B4-BE49-F238E27FC236}">
-                <a16:creationId xmlns:a16="http://schemas.microsoft.com/office/drawing/2014/main" xmlns="" id="{430EB894-B7D4-434C-9D1A-A14094D9BEEC}"/>
+                <a16:creationId xmlns:a16="http://schemas.microsoft.com/office/drawing/2014/main" id="{430EB894-B7D4-434C-9D1A-A14094D9BEEC}"/>
               </a:ext>
             </a:extLst>
           </p:cNvPr>
@@ -8110,7 +7723,7 @@
           <p:cNvPr id="1026" name="Picture 2" descr="Logo">
             <a:extLst>
               <a:ext uri="{FF2B5EF4-FFF2-40B4-BE49-F238E27FC236}">
-                <a16:creationId xmlns:a16="http://schemas.microsoft.com/office/drawing/2014/main" xmlns="" id="{3F2642E0-4F6A-4196-8F58-E77D36E9A33F}"/>
+                <a16:creationId xmlns:a16="http://schemas.microsoft.com/office/drawing/2014/main" id="{3F2642E0-4F6A-4196-8F58-E77D36E9A33F}"/>
               </a:ext>
             </a:extLst>
           </p:cNvPr>
@@ -8155,7 +7768,7 @@
           <p:cNvPr id="5122" name="Picture 2" descr="Image result for machine learning">
             <a:extLst>
               <a:ext uri="{FF2B5EF4-FFF2-40B4-BE49-F238E27FC236}">
-                <a16:creationId xmlns:a16="http://schemas.microsoft.com/office/drawing/2014/main" xmlns="" id="{810CE0A2-4102-44A6-A370-175E7896CDCB}"/>
+                <a16:creationId xmlns:a16="http://schemas.microsoft.com/office/drawing/2014/main" id="{810CE0A2-4102-44A6-A370-175E7896CDCB}"/>
               </a:ext>
             </a:extLst>
           </p:cNvPr>
@@ -8200,7 +7813,7 @@
           <p:cNvPr id="7" name="Título 1">
             <a:extLst>
               <a:ext uri="{FF2B5EF4-FFF2-40B4-BE49-F238E27FC236}">
-                <a16:creationId xmlns:a16="http://schemas.microsoft.com/office/drawing/2014/main" xmlns="" id="{32666AC8-2E17-4DB4-B0F5-60C640CCFD2E}"/>
+                <a16:creationId xmlns:a16="http://schemas.microsoft.com/office/drawing/2014/main" id="{32666AC8-2E17-4DB4-B0F5-60C640CCFD2E}"/>
               </a:ext>
             </a:extLst>
           </p:cNvPr>
@@ -8226,10 +7839,6 @@
             <a:r>
               <a:rPr lang="pt-BR" sz="6600" dirty="0"/>
               <a:t>C24 – Inteligência Artificial:</a:t>
-            </a:r>
-            <a:r>
-              <a:rPr lang="pt-BR" sz="7200" dirty="0"/>
-              <a:t/>
             </a:r>
             <a:br>
               <a:rPr lang="pt-BR" sz="7200" dirty="0"/>
@@ -8285,7 +7894,7 @@
           <p:cNvPr id="2" name="Título 1">
             <a:extLst>
               <a:ext uri="{FF2B5EF4-FFF2-40B4-BE49-F238E27FC236}">
-                <a16:creationId xmlns:a16="http://schemas.microsoft.com/office/drawing/2014/main" xmlns="" id="{028A152F-93D8-11FA-9B7A-B62AE5BB6486}"/>
+                <a16:creationId xmlns:a16="http://schemas.microsoft.com/office/drawing/2014/main" id="{028A152F-93D8-11FA-9B7A-B62AE5BB6486}"/>
               </a:ext>
             </a:extLst>
           </p:cNvPr>
@@ -8312,14 +7921,14 @@
           </a:p>
         </p:txBody>
       </p:sp>
-      <mc:AlternateContent xmlns:mc="http://schemas.openxmlformats.org/markup-compatibility/2006" xmlns:a14="http://schemas.microsoft.com/office/drawing/2010/main">
-        <mc:Choice Requires="a14">
+      <mc:AlternateContent xmlns:mc="http://schemas.openxmlformats.org/markup-compatibility/2006">
+        <mc:Choice xmlns:a14="http://schemas.microsoft.com/office/drawing/2010/main" Requires="a14">
           <p:sp>
             <p:nvSpPr>
               <p:cNvPr id="3" name="Espaço Reservado para Conteúdo 2">
                 <a:extLst>
                   <a:ext uri="{FF2B5EF4-FFF2-40B4-BE49-F238E27FC236}">
-                    <a16:creationId xmlns:a16="http://schemas.microsoft.com/office/drawing/2014/main" xmlns="" id="{B3535727-BB24-BB15-5C03-3DA9A3F9A09A}"/>
+                    <a16:creationId xmlns:a16="http://schemas.microsoft.com/office/drawing/2014/main" id="{B3535727-BB24-BB15-5C03-3DA9A3F9A09A}"/>
                   </a:ext>
                 </a:extLst>
               </p:cNvPr>
@@ -8420,7 +8029,7 @@
                 </a14:m>
                 <a:r>
                   <a:rPr lang="pt-BR" dirty="0"/>
-                  <a:t> funções hipótese) que </a:t>
+                  <a:t> funções discriminantes) que </a:t>
                 </a:r>
               </a:p>
               <a:p>
@@ -8486,15 +8095,7 @@
                       <a:srgbClr val="7030A0"/>
                     </a:solidFill>
                   </a:rPr>
-                  <a:t> como </a:t>
-                </a:r>
-                <a:r>
-                  <a:rPr lang="pt-BR" b="1" dirty="0" smtClean="0">
-                    <a:solidFill>
-                      <a:srgbClr val="7030A0"/>
-                    </a:solidFill>
-                  </a:rPr>
-                  <a:t>a representação dos rótulos</a:t>
+                  <a:t> como a representação dos rótulos</a:t>
                 </a:r>
                 <a:r>
                   <a:rPr lang="pt-BR" dirty="0"/>
@@ -8504,13 +8105,13 @@
             </p:txBody>
           </p:sp>
         </mc:Choice>
-        <mc:Fallback xmlns="">
+        <mc:Fallback>
           <p:sp>
             <p:nvSpPr>
               <p:cNvPr id="3" name="Espaço Reservado para Conteúdo 2">
                 <a:extLst>
                   <a:ext uri="{FF2B5EF4-FFF2-40B4-BE49-F238E27FC236}">
-                    <a16:creationId xmlns="" xmlns:a16="http://schemas.microsoft.com/office/drawing/2014/main" xmlns:a14="http://schemas.microsoft.com/office/drawing/2010/main" id="{B3535727-BB24-BB15-5C03-3DA9A3F9A09A}"/>
+                    <a16:creationId xmlns:a16="http://schemas.microsoft.com/office/drawing/2014/main" id="{B3535727-BB24-BB15-5C03-3DA9A3F9A09A}"/>
                   </a:ext>
                 </a:extLst>
               </p:cNvPr>
@@ -8526,7 +8127,7 @@
                 <a:off x="5286376" y="1825624"/>
                 <a:ext cx="6905624" cy="5032375"/>
               </a:xfrm>
-              <a:blipFill rotWithShape="0">
+              <a:blipFill>
                 <a:blip r:embed="rId3"/>
                 <a:stretch>
                   <a:fillRect l="-1589" t="-1937" r="-1677"/>
@@ -8538,7 +8139,7 @@
               <a:lstStyle/>
               <a:p>
                 <a:r>
-                  <a:rPr lang="pt-BR">
+                  <a:rPr lang="en-US">
                     <a:noFill/>
                   </a:rPr>
                   <a:t> </a:t>
@@ -8553,7 +8154,7 @@
           <p:cNvPr id="7" name="Picture 6">
             <a:extLst>
               <a:ext uri="{FF2B5EF4-FFF2-40B4-BE49-F238E27FC236}">
-                <a16:creationId xmlns:a16="http://schemas.microsoft.com/office/drawing/2014/main" xmlns="" id="{B29D6ED4-6B75-62EC-8922-9CCA4F704E2B}"/>
+                <a16:creationId xmlns:a16="http://schemas.microsoft.com/office/drawing/2014/main" id="{B29D6ED4-6B75-62EC-8922-9CCA4F704E2B}"/>
               </a:ext>
             </a:extLst>
           </p:cNvPr>
@@ -8619,7 +8220,7 @@
           <p:cNvPr id="2" name="Title 1">
             <a:extLst>
               <a:ext uri="{FF2B5EF4-FFF2-40B4-BE49-F238E27FC236}">
-                <a16:creationId xmlns:a16="http://schemas.microsoft.com/office/drawing/2014/main" xmlns="" id="{2DB9D242-5419-0FFB-7863-B3BB3BD80869}"/>
+                <a16:creationId xmlns:a16="http://schemas.microsoft.com/office/drawing/2014/main" id="{2DB9D242-5419-0FFB-7863-B3BB3BD80869}"/>
               </a:ext>
             </a:extLst>
           </p:cNvPr>
@@ -8650,7 +8251,7 @@
               <p:cNvPr id="3" name="Content Placeholder 2">
                 <a:extLst>
                   <a:ext uri="{FF2B5EF4-FFF2-40B4-BE49-F238E27FC236}">
-                    <a16:creationId xmlns:a16="http://schemas.microsoft.com/office/drawing/2014/main" xmlns="" id="{34B1DEA3-BAAD-D90C-CD9D-99A5A24F4544}"/>
+                    <a16:creationId xmlns:a16="http://schemas.microsoft.com/office/drawing/2014/main" id="{34B1DEA3-BAAD-D90C-CD9D-99A5A24F4544}"/>
                   </a:ext>
                 </a:extLst>
               </p:cNvPr>
@@ -8700,12 +8301,8 @@
               </a:p>
               <a:p>
                 <a:r>
-                  <a:rPr lang="pt-BR" dirty="0" smtClean="0"/>
-                  <a:t>Para isso, usamos </a:t>
-                </a:r>
-                <a:r>
-                  <a:rPr lang="pt-BR" dirty="0"/>
-                  <a:t>a </a:t>
+                  <a:rPr lang="pt-BR" dirty="0"/>
+                  <a:t>Para isso, usamos a </a:t>
                 </a:r>
                 <a:r>
                   <a:rPr lang="pt-BR" b="1" dirty="0">
@@ -8734,10 +8331,7 @@
                 </a:pPr>
                 <a14:m>
                   <m:oMathPara xmlns:m="http://schemas.openxmlformats.org/officeDocument/2006/math">
-                    <m:oMathParaPr>
-                      <m:jc m:val="centerGroup"/>
-                    </m:oMathParaPr>
-                    <m:oMath xmlns:m="http://schemas.openxmlformats.org/officeDocument/2006/math">
+                    <m:oMath>
                       <m:sSub>
                         <m:sSubPr>
                           <m:ctrlPr>
@@ -8766,7 +8360,7 @@
                       <m:d>
                         <m:dPr>
                           <m:ctrlPr>
-                            <a:rPr lang="pt-BR" i="1">
+                            <a:rPr lang="pt-BR" b="1" i="1" smtClean="0">
                               <a:latin typeface="Cambria Math" panose="02040503050406030204" pitchFamily="18" charset="0"/>
                             </a:rPr>
                           </m:ctrlPr>
@@ -8947,7 +8541,7 @@
                               <m:func>
                                 <m:funcPr>
                                   <m:ctrlPr>
-                                    <a:rPr lang="pt-BR" i="1">
+                                    <a:rPr lang="pt-BR">
                                       <a:latin typeface="Cambria Math" panose="02040503050406030204" pitchFamily="18" charset="0"/>
                                     </a:rPr>
                                   </m:ctrlPr>
@@ -8985,8 +8579,10 @@
                                           <m:groupChr>
                                             <m:groupChrPr>
                                               <m:chr m:val="⏟"/>
+                                              <m:pos m:val="bot"/>
+                                              <m:vertJc m:val="top"/>
                                               <m:ctrlPr>
-                                                <a:rPr lang="pt-BR" i="1" smtClean="0">
+                                                <a:rPr lang="pt-BR" b="1" i="1">
                                                   <a:latin typeface="Cambria Math" panose="02040503050406030204" pitchFamily="18" charset="0"/>
                                                 </a:rPr>
                                               </m:ctrlPr>
@@ -8995,7 +8591,7 @@
                                               <m:sSubSup>
                                                 <m:sSubSupPr>
                                                   <m:ctrlPr>
-                                                    <a:rPr lang="pt-BR" b="1" i="1">
+                                                    <a:rPr lang="pt-BR" i="1">
                                                       <a:latin typeface="Cambria Math" panose="02040503050406030204" pitchFamily="18" charset="0"/>
                                                     </a:rPr>
                                                   </m:ctrlPr>
@@ -9005,7 +8601,7 @@
                                                     <a:rPr lang="pt-BR" i="1">
                                                       <a:latin typeface="Cambria Math" panose="02040503050406030204" pitchFamily="18" charset="0"/>
                                                     </a:rPr>
-                                                    <m:t>h</m:t>
+                                                    <m:t>ℎ</m:t>
                                                   </m:r>
                                                 </m:e>
                                                 <m:sub>
@@ -9028,7 +8624,7 @@
                                               <m:d>
                                                 <m:dPr>
                                                   <m:ctrlPr>
-                                                    <a:rPr lang="pt-BR" i="1">
+                                                    <a:rPr lang="pt-BR" b="1" i="1">
                                                       <a:latin typeface="Cambria Math" panose="02040503050406030204" pitchFamily="18" charset="0"/>
                                                     </a:rPr>
                                                   </m:ctrlPr>
@@ -9043,7 +8639,7 @@
                                                   <m:d>
                                                     <m:dPr>
                                                       <m:ctrlPr>
-                                                        <a:rPr lang="pt-BR" b="1" i="1">
+                                                        <a:rPr lang="pt-BR" i="1">
                                                           <a:latin typeface="Cambria Math" panose="02040503050406030204" pitchFamily="18" charset="0"/>
                                                         </a:rPr>
                                                       </m:ctrlPr>
@@ -9276,14 +8872,10 @@
                 </a14:m>
                 <a:r>
                   <a:rPr lang="pt-BR" dirty="0"/>
-                  <a:t> é </a:t>
-                </a:r>
-                <a:r>
-                  <a:rPr lang="pt-BR" dirty="0" smtClean="0"/>
-                  <a:t>o </a:t>
-                </a:r>
-                <a:r>
-                  <a:rPr lang="pt-BR" b="1" dirty="0" smtClean="0">
+                  <a:t> é o </a:t>
+                </a:r>
+                <a:r>
+                  <a:rPr lang="pt-BR" b="1" dirty="0">
                     <a:solidFill>
                       <a:srgbClr val="7030A0"/>
                     </a:solidFill>
@@ -9291,7 +8883,7 @@
                   <a:t>rótulo escalar </a:t>
                 </a:r>
                 <a:r>
-                  <a:rPr lang="pt-BR" dirty="0" smtClean="0"/>
+                  <a:rPr lang="pt-BR" dirty="0"/>
                   <a:t>da </a:t>
                 </a:r>
                 <a14:m>
@@ -9321,7 +8913,7 @@
                     <m:sSubSup>
                       <m:sSubSupPr>
                         <m:ctrlPr>
-                          <a:rPr lang="pt-BR" b="1" i="1">
+                          <a:rPr lang="pt-BR" i="1">
                             <a:latin typeface="Cambria Math" panose="02040503050406030204" pitchFamily="18" charset="0"/>
                           </a:rPr>
                         </m:ctrlPr>
@@ -9331,7 +8923,7 @@
                           <a:rPr lang="pt-BR" i="1">
                             <a:latin typeface="Cambria Math" panose="02040503050406030204" pitchFamily="18" charset="0"/>
                           </a:rPr>
-                          <m:t>h</m:t>
+                          <m:t>ℎ</m:t>
                         </m:r>
                       </m:e>
                       <m:sub>
@@ -9354,7 +8946,7 @@
                     <m:d>
                       <m:dPr>
                         <m:ctrlPr>
-                          <a:rPr lang="pt-BR" i="1">
+                          <a:rPr lang="pt-BR" b="1" i="1">
                             <a:latin typeface="Cambria Math" panose="02040503050406030204" pitchFamily="18" charset="0"/>
                           </a:rPr>
                         </m:ctrlPr>
@@ -9369,7 +8961,7 @@
                         <m:d>
                           <m:dPr>
                             <m:ctrlPr>
-                              <a:rPr lang="pt-BR" b="1" i="1">
+                              <a:rPr lang="pt-BR" i="1">
                                 <a:latin typeface="Cambria Math" panose="02040503050406030204" pitchFamily="18" charset="0"/>
                               </a:rPr>
                             </m:ctrlPr>
@@ -9454,7 +9046,7 @@
                     <m:sSubSup>
                       <m:sSubSupPr>
                         <m:ctrlPr>
-                          <a:rPr lang="pt-BR" b="1" i="1">
+                          <a:rPr lang="pt-BR" i="1">
                             <a:latin typeface="Cambria Math" panose="02040503050406030204" pitchFamily="18" charset="0"/>
                           </a:rPr>
                         </m:ctrlPr>
@@ -9464,7 +9056,7 @@
                           <a:rPr lang="pt-BR" i="1">
                             <a:latin typeface="Cambria Math" panose="02040503050406030204" pitchFamily="18" charset="0"/>
                           </a:rPr>
-                          <m:t>h</m:t>
+                          <m:t>ℎ</m:t>
                         </m:r>
                       </m:e>
                       <m:sub>
@@ -9487,7 +9079,7 @@
                     <m:d>
                       <m:dPr>
                         <m:ctrlPr>
-                          <a:rPr lang="pt-BR" i="1">
+                          <a:rPr lang="pt-BR" b="1" i="1">
                             <a:latin typeface="Cambria Math" panose="02040503050406030204" pitchFamily="18" charset="0"/>
                           </a:rPr>
                         </m:ctrlPr>
@@ -9608,7 +9200,7 @@
           <p:cNvPr id="2" name="Title 1">
             <a:extLst>
               <a:ext uri="{FF2B5EF4-FFF2-40B4-BE49-F238E27FC236}">
-                <a16:creationId xmlns:a16="http://schemas.microsoft.com/office/drawing/2014/main" xmlns="" id="{997538D5-DC01-EC48-38D2-99D754F1BB92}"/>
+                <a16:creationId xmlns:a16="http://schemas.microsoft.com/office/drawing/2014/main" id="{997538D5-DC01-EC48-38D2-99D754F1BB92}"/>
               </a:ext>
             </a:extLst>
           </p:cNvPr>
@@ -9632,14 +9224,14 @@
           </a:p>
         </p:txBody>
       </p:sp>
-      <mc:AlternateContent xmlns:mc="http://schemas.openxmlformats.org/markup-compatibility/2006" xmlns:a14="http://schemas.microsoft.com/office/drawing/2010/main">
-        <mc:Choice Requires="a14">
+      <mc:AlternateContent xmlns:mc="http://schemas.openxmlformats.org/markup-compatibility/2006">
+        <mc:Choice xmlns:a14="http://schemas.microsoft.com/office/drawing/2010/main" Requires="a14">
           <p:sp>
             <p:nvSpPr>
               <p:cNvPr id="3" name="Content Placeholder 2">
                 <a:extLst>
                   <a:ext uri="{FF2B5EF4-FFF2-40B4-BE49-F238E27FC236}">
-                    <a16:creationId xmlns:a16="http://schemas.microsoft.com/office/drawing/2014/main" xmlns="" id="{17D7928D-3A32-7330-5FDC-756155EF2F3D}"/>
+                    <a16:creationId xmlns:a16="http://schemas.microsoft.com/office/drawing/2014/main" id="{17D7928D-3A32-7330-5FDC-756155EF2F3D}"/>
                   </a:ext>
                 </a:extLst>
               </p:cNvPr>
@@ -9665,10 +9257,7 @@
                 </a:pPr>
                 <a14:m>
                   <m:oMathPara xmlns:m="http://schemas.openxmlformats.org/officeDocument/2006/math">
-                    <m:oMathParaPr>
-                      <m:jc m:val="centerGroup"/>
-                    </m:oMathParaPr>
-                    <m:oMath xmlns:m="http://schemas.openxmlformats.org/officeDocument/2006/math">
+                    <m:oMath>
                       <m:sSub>
                         <m:sSubPr>
                           <m:ctrlPr>
@@ -9697,7 +9286,7 @@
                       <m:d>
                         <m:dPr>
                           <m:ctrlPr>
-                            <a:rPr lang="pt-BR" i="1">
+                            <a:rPr lang="pt-BR" b="1" i="1">
                               <a:latin typeface="Cambria Math" panose="02040503050406030204" pitchFamily="18" charset="0"/>
                             </a:rPr>
                           </m:ctrlPr>
@@ -9878,7 +9467,7 @@
                               <m:func>
                                 <m:funcPr>
                                   <m:ctrlPr>
-                                    <a:rPr lang="pt-BR" i="1">
+                                    <a:rPr lang="pt-BR">
                                       <a:latin typeface="Cambria Math" panose="02040503050406030204" pitchFamily="18" charset="0"/>
                                     </a:rPr>
                                   </m:ctrlPr>
@@ -10048,7 +9637,7 @@
               </a:p>
               <a:p>
                 <a:r>
-                  <a:rPr lang="pt-BR" dirty="0" smtClean="0"/>
+                  <a:rPr lang="pt-BR" dirty="0"/>
                   <a:t>A </a:t>
                 </a:r>
                 <a:r>
@@ -10056,12 +9645,8 @@
                   <a:t>entropia cruzada categórica </a:t>
                 </a:r>
                 <a:r>
-                  <a:rPr lang="pt-BR" dirty="0" smtClean="0"/>
-                  <a:t>mede </a:t>
-                </a:r>
-                <a:r>
-                  <a:rPr lang="pt-BR" dirty="0"/>
-                  <a:t>a </a:t>
+                  <a:rPr lang="pt-BR" dirty="0"/>
+                  <a:t>mede a </a:t>
                 </a:r>
                 <a:r>
                   <a:rPr lang="pt-BR" b="1" dirty="0">
@@ -10069,7 +9654,7 @@
                       <a:schemeClr val="accent2"/>
                     </a:solidFill>
                   </a:rPr>
-                  <a:t>diferença </a:t>
+                  <a:t>diferença média </a:t>
                 </a:r>
                 <a:r>
                   <a:rPr lang="pt-BR" b="1" dirty="0">
@@ -10077,23 +9662,23 @@
                       <a:srgbClr val="7030A0"/>
                     </a:solidFill>
                   </a:rPr>
-                  <a:t>entre as distribuições de probabilidade da saída do modelo e a dos rótulos </a:t>
-                </a:r>
-                <a:r>
-                  <a:rPr lang="pt-BR" dirty="0"/>
-                  <a:t>das classes.</a:t>
+                  <a:t>entre as distribuições de probabilidade da saída do modelo e a do vetor de rótulos </a:t>
+                </a:r>
+                <a:r>
+                  <a:rPr lang="pt-BR" dirty="0"/>
+                  <a:t>correspondente.</a:t>
                 </a:r>
               </a:p>
             </p:txBody>
           </p:sp>
         </mc:Choice>
-        <mc:Fallback xmlns="">
+        <mc:Fallback>
           <p:sp>
             <p:nvSpPr>
               <p:cNvPr id="3" name="Content Placeholder 2">
                 <a:extLst>
                   <a:ext uri="{FF2B5EF4-FFF2-40B4-BE49-F238E27FC236}">
-                    <a16:creationId xmlns="" xmlns:a16="http://schemas.microsoft.com/office/drawing/2014/main" xmlns:a14="http://schemas.microsoft.com/office/drawing/2010/main" id="{17D7928D-3A32-7330-5FDC-756155EF2F3D}"/>
+                    <a16:creationId xmlns:a16="http://schemas.microsoft.com/office/drawing/2014/main" id="{17D7928D-3A32-7330-5FDC-756155EF2F3D}"/>
                   </a:ext>
                 </a:extLst>
               </p:cNvPr>
@@ -10109,10 +9694,10 @@
                 <a:off x="4952246" y="1840372"/>
                 <a:ext cx="7239754" cy="5017627"/>
               </a:xfrm>
-              <a:blipFill rotWithShape="0">
+              <a:blipFill>
                 <a:blip r:embed="rId2"/>
                 <a:stretch>
-                  <a:fillRect l="-1515" r="-1010"/>
+                  <a:fillRect l="-1515" t="-122" r="-1010"/>
                 </a:stretch>
               </a:blipFill>
             </p:spPr>
@@ -10121,7 +9706,7 @@
               <a:lstStyle/>
               <a:p>
                 <a:r>
-                  <a:rPr lang="pt-BR">
+                  <a:rPr lang="en-US">
                     <a:noFill/>
                   </a:rPr>
                   <a:t> </a:t>
@@ -10136,7 +9721,7 @@
           <p:cNvPr id="5" name="Picture 4">
             <a:extLst>
               <a:ext uri="{FF2B5EF4-FFF2-40B4-BE49-F238E27FC236}">
-                <a16:creationId xmlns:a16="http://schemas.microsoft.com/office/drawing/2014/main" xmlns="" id="{4AA09737-BB93-F7AB-8A47-090B362628C6}"/>
+                <a16:creationId xmlns:a16="http://schemas.microsoft.com/office/drawing/2014/main" id="{4AA09737-BB93-F7AB-8A47-090B362628C6}"/>
               </a:ext>
             </a:extLst>
           </p:cNvPr>
@@ -10202,7 +9787,7 @@
           <p:cNvPr id="2" name="Título 1">
             <a:extLst>
               <a:ext uri="{FF2B5EF4-FFF2-40B4-BE49-F238E27FC236}">
-                <a16:creationId xmlns:a16="http://schemas.microsoft.com/office/drawing/2014/main" xmlns="" id="{1FE7CD05-66F2-8967-6154-CCED38E0F987}"/>
+                <a16:creationId xmlns:a16="http://schemas.microsoft.com/office/drawing/2014/main" id="{1FE7CD05-66F2-8967-6154-CCED38E0F987}"/>
               </a:ext>
             </a:extLst>
           </p:cNvPr>
@@ -10225,14 +9810,14 @@
           </a:p>
         </p:txBody>
       </p:sp>
-      <mc:AlternateContent xmlns:mc="http://schemas.openxmlformats.org/markup-compatibility/2006" xmlns:a14="http://schemas.microsoft.com/office/drawing/2010/main">
-        <mc:Choice Requires="a14">
+      <mc:AlternateContent xmlns:mc="http://schemas.openxmlformats.org/markup-compatibility/2006">
+        <mc:Choice xmlns:a14="http://schemas.microsoft.com/office/drawing/2010/main" Requires="a14">
           <p:sp>
             <p:nvSpPr>
               <p:cNvPr id="3" name="Espaço Reservado para Conteúdo 2">
                 <a:extLst>
                   <a:ext uri="{FF2B5EF4-FFF2-40B4-BE49-F238E27FC236}">
-                    <a16:creationId xmlns:a16="http://schemas.microsoft.com/office/drawing/2014/main" xmlns="" id="{21A86630-5D79-AD4B-79FC-6C8373E8DB39}"/>
+                    <a16:creationId xmlns:a16="http://schemas.microsoft.com/office/drawing/2014/main" id="{21A86630-5D79-AD4B-79FC-6C8373E8DB39}"/>
                   </a:ext>
                 </a:extLst>
               </p:cNvPr>
@@ -10251,12 +9836,12 @@
             </p:spPr>
             <p:txBody>
               <a:bodyPr>
-                <a:normAutofit lnSpcReduction="10000"/>
+                <a:normAutofit/>
               </a:bodyPr>
               <a:lstStyle/>
               <a:p>
                 <a:r>
-                  <a:rPr lang="pt-BR" dirty="0" smtClean="0"/>
+                  <a:rPr lang="pt-BR" dirty="0"/>
                   <a:t>Usando a codificação </a:t>
                 </a:r>
                 <a:r>
@@ -10274,10 +9859,7 @@
                 </a:pPr>
                 <a14:m>
                   <m:oMathPara xmlns:m="http://schemas.openxmlformats.org/officeDocument/2006/math">
-                    <m:oMathParaPr>
-                      <m:jc m:val="centerGroup"/>
-                    </m:oMathParaPr>
-                    <m:oMath xmlns:m="http://schemas.openxmlformats.org/officeDocument/2006/math">
+                    <m:oMath>
                       <m:sSub>
                         <m:sSubPr>
                           <m:ctrlPr>
@@ -10306,7 +9888,7 @@
                       <m:d>
                         <m:dPr>
                           <m:ctrlPr>
-                            <a:rPr lang="pt-BR" i="1">
+                            <a:rPr lang="pt-BR" b="1" i="1" smtClean="0">
                               <a:latin typeface="Cambria Math" panose="02040503050406030204" pitchFamily="18" charset="0"/>
                             </a:rPr>
                           </m:ctrlPr>
@@ -10355,7 +9937,7 @@
                         <m:naryPr>
                           <m:chr m:val="∑"/>
                           <m:ctrlPr>
-                            <a:rPr lang="pt-BR" i="1">
+                            <a:rPr lang="pt-BR" b="0" i="1" smtClean="0">
                               <a:latin typeface="Cambria Math" panose="02040503050406030204" pitchFamily="18" charset="0"/>
                             </a:rPr>
                           </m:ctrlPr>
@@ -10392,7 +9974,7 @@
                           <m:sSup>
                             <m:sSupPr>
                               <m:ctrlPr>
-                                <a:rPr lang="pt-BR" i="1">
+                                <a:rPr lang="pt-BR" b="1" i="1">
                                   <a:latin typeface="Cambria Math" panose="02040503050406030204" pitchFamily="18" charset="0"/>
                                 </a:rPr>
                               </m:ctrlPr>
@@ -10407,7 +9989,7 @@
                               <m:d>
                                 <m:dPr>
                                   <m:ctrlPr>
-                                    <a:rPr lang="pt-BR" b="1" i="1">
+                                    <a:rPr lang="pt-BR" b="0" i="1" smtClean="0">
                                       <a:latin typeface="Cambria Math" panose="02040503050406030204" pitchFamily="18" charset="0"/>
                                     </a:rPr>
                                   </m:ctrlPr>
@@ -10434,7 +10016,7 @@
                           <m:func>
                             <m:funcPr>
                               <m:ctrlPr>
-                                <a:rPr lang="pt-BR" i="1">
+                                <a:rPr lang="pt-BR">
                                   <a:latin typeface="Cambria Math" panose="02040503050406030204" pitchFamily="18" charset="0"/>
                                 </a:rPr>
                               </m:ctrlPr>
@@ -10464,7 +10046,7 @@
                                     <m:accPr>
                                       <m:chr m:val="̂"/>
                                       <m:ctrlPr>
-                                        <a:rPr lang="pt-BR" i="1" smtClean="0">
+                                        <a:rPr lang="pt-BR" b="1" i="1" smtClean="0">
                                           <a:latin typeface="Cambria Math" panose="02040503050406030204" pitchFamily="18" charset="0"/>
                                         </a:rPr>
                                       </m:ctrlPr>
@@ -10580,8 +10162,10 @@
                                 <m:groupChr>
                                   <m:groupChrPr>
                                     <m:chr m:val="⏟"/>
+                                    <m:pos m:val="bot"/>
+                                    <m:vertJc m:val="top"/>
                                     <m:ctrlPr>
-                                      <a:rPr lang="pt-BR" i="1" smtClean="0">
+                                      <a:rPr lang="pt-BR" i="1">
                                         <a:latin typeface="Cambria Math" panose="02040503050406030204" pitchFamily="18" charset="0"/>
                                       </a:rPr>
                                     </m:ctrlPr>
@@ -10642,7 +10226,7 @@
                                 <m:sSub>
                                   <m:sSubPr>
                                     <m:ctrlPr>
-                                      <a:rPr lang="pt-BR" i="1" smtClean="0">
+                                      <a:rPr lang="pt-BR" b="0" i="1" smtClean="0">
                                         <a:latin typeface="Cambria Math" panose="02040503050406030204" pitchFamily="18" charset="0"/>
                                       </a:rPr>
                                     </m:ctrlPr>
@@ -10715,8 +10299,10 @@
                                 <m:groupChr>
                                   <m:groupChrPr>
                                     <m:chr m:val="⏟"/>
+                                    <m:pos m:val="bot"/>
+                                    <m:vertJc m:val="top"/>
                                     <m:ctrlPr>
-                                      <a:rPr lang="pt-BR" b="0" i="1" smtClean="0">
+                                      <a:rPr lang="pt-BR" i="1">
                                         <a:latin typeface="Cambria Math" panose="02040503050406030204" pitchFamily="18" charset="0"/>
                                       </a:rPr>
                                     </m:ctrlPr>
@@ -10908,7 +10494,19 @@
                 </a14:m>
                 <a:r>
                   <a:rPr lang="pt-BR" dirty="0"/>
-                  <a:t> é o vetor do </a:t>
+                  <a:t> é o vetor </a:t>
+                </a:r>
+                <a:r>
+                  <a:rPr lang="pt-BR" b="1" i="1" dirty="0" err="1"/>
+                  <a:t>one</a:t>
+                </a:r>
+                <a:r>
+                  <a:rPr lang="pt-BR" b="1" i="1" dirty="0"/>
+                  <a:t>-hot</a:t>
+                </a:r>
+                <a:r>
+                  <a:rPr lang="pt-BR" dirty="0"/>
+                  <a:t> do </a:t>
                 </a:r>
                 <a14:m>
                   <m:oMath xmlns:m="http://schemas.openxmlformats.org/officeDocument/2006/math">
@@ -10922,23 +10520,7 @@
                 </a14:m>
                 <a:r>
                   <a:rPr lang="pt-BR" dirty="0"/>
-                  <a:t>-</a:t>
-                </a:r>
-                <a:r>
-                  <a:rPr lang="pt-BR" dirty="0" err="1"/>
-                  <a:t>ésimo</a:t>
-                </a:r>
-                <a:r>
-                  <a:rPr lang="pt-BR" dirty="0"/>
-                  <a:t> rótulo usando a codificação </a:t>
-                </a:r>
-                <a:r>
-                  <a:rPr lang="pt-BR" b="1" i="1" dirty="0"/>
-                  <a:t>one-hot</a:t>
-                </a:r>
-                <a:r>
-                  <a:rPr lang="pt-BR" dirty="0"/>
-                  <a:t> e </a:t>
+                  <a:t>-ésimo rótulo e </a:t>
                 </a:r>
                 <a14:m>
                   <m:oMath xmlns:m="http://schemas.openxmlformats.org/officeDocument/2006/math">
@@ -10946,7 +10528,7 @@
                       <m:accPr>
                         <m:chr m:val="̂"/>
                         <m:ctrlPr>
-                          <a:rPr lang="pt-BR" i="1">
+                          <a:rPr lang="pt-BR" b="1" i="1">
                             <a:latin typeface="Cambria Math" panose="02040503050406030204" pitchFamily="18" charset="0"/>
                           </a:rPr>
                         </m:ctrlPr>
@@ -10986,7 +10568,7 @@
                     <m:sSup>
                       <m:sSupPr>
                         <m:ctrlPr>
-                          <a:rPr lang="pt-BR" b="0" i="1" smtClean="0">
+                          <a:rPr lang="pt-BR" i="1">
                             <a:latin typeface="Cambria Math" panose="02040503050406030204" pitchFamily="18" charset="0"/>
                           </a:rPr>
                         </m:ctrlPr>
@@ -11286,7 +10868,7 @@
                     </a:solidFill>
                     <a:effectLst/>
                   </a:rPr>
-                  <a:t>probabilidades previstas pelo modelo se aproximem ao máximo dos rótulos dos exemplos</a:t>
+                  <a:t>probabilidades preditas pelo modelo se aproximem ao máximo dos rótulos dos exemplos</a:t>
                 </a:r>
                 <a:r>
                   <a:rPr lang="pt-BR" b="0" dirty="0">
@@ -11298,13 +10880,13 @@
             </p:txBody>
           </p:sp>
         </mc:Choice>
-        <mc:Fallback xmlns="">
+        <mc:Fallback>
           <p:sp>
             <p:nvSpPr>
               <p:cNvPr id="3" name="Espaço Reservado para Conteúdo 2">
                 <a:extLst>
                   <a:ext uri="{FF2B5EF4-FFF2-40B4-BE49-F238E27FC236}">
-                    <a16:creationId xmlns="" xmlns:a16="http://schemas.microsoft.com/office/drawing/2014/main" xmlns:a14="http://schemas.microsoft.com/office/drawing/2010/main" id="{21A86630-5D79-AD4B-79FC-6C8373E8DB39}"/>
+                    <a16:creationId xmlns:a16="http://schemas.microsoft.com/office/drawing/2014/main" id="{21A86630-5D79-AD4B-79FC-6C8373E8DB39}"/>
                   </a:ext>
                 </a:extLst>
               </p:cNvPr>
@@ -11320,10 +10902,10 @@
                 <a:off x="838200" y="1825624"/>
                 <a:ext cx="11353800" cy="5032375"/>
               </a:xfrm>
-              <a:blipFill rotWithShape="0">
+              <a:blipFill>
                 <a:blip r:embed="rId2"/>
                 <a:stretch>
-                  <a:fillRect l="-1128" t="-2663" r="-1611"/>
+                  <a:fillRect l="-1128" t="-1937" r="-1289"/>
                 </a:stretch>
               </a:blipFill>
             </p:spPr>
@@ -11332,7 +10914,7 @@
               <a:lstStyle/>
               <a:p>
                 <a:r>
-                  <a:rPr lang="pt-BR">
+                  <a:rPr lang="en-US">
                     <a:noFill/>
                   </a:rPr>
                   <a:t> </a:t>
@@ -11377,7 +10959,7 @@
           <p:cNvPr id="2" name="Título 1">
             <a:extLst>
               <a:ext uri="{FF2B5EF4-FFF2-40B4-BE49-F238E27FC236}">
-                <a16:creationId xmlns:a16="http://schemas.microsoft.com/office/drawing/2014/main" xmlns="" id="{E4598F11-6F65-0753-89FE-F5ABED77B46A}"/>
+                <a16:creationId xmlns:a16="http://schemas.microsoft.com/office/drawing/2014/main" id="{E4598F11-6F65-0753-89FE-F5ABED77B46A}"/>
               </a:ext>
             </a:extLst>
           </p:cNvPr>
@@ -11401,14 +10983,14 @@
           </a:p>
         </p:txBody>
       </p:sp>
-      <mc:AlternateContent xmlns:mc="http://schemas.openxmlformats.org/markup-compatibility/2006" xmlns:a14="http://schemas.microsoft.com/office/drawing/2010/main">
-        <mc:Choice Requires="a14">
+      <mc:AlternateContent xmlns:mc="http://schemas.openxmlformats.org/markup-compatibility/2006">
+        <mc:Choice xmlns:a14="http://schemas.microsoft.com/office/drawing/2010/main" Requires="a14">
           <p:sp>
             <p:nvSpPr>
               <p:cNvPr id="3" name="Espaço Reservado para Conteúdo 2">
                 <a:extLst>
                   <a:ext uri="{FF2B5EF4-FFF2-40B4-BE49-F238E27FC236}">
-                    <a16:creationId xmlns:a16="http://schemas.microsoft.com/office/drawing/2014/main" xmlns="" id="{FEF4E6DC-E916-D97A-4D18-D469285C4F2C}"/>
+                    <a16:creationId xmlns:a16="http://schemas.microsoft.com/office/drawing/2014/main" id="{FEF4E6DC-E916-D97A-4D18-D469285C4F2C}"/>
                   </a:ext>
                 </a:extLst>
               </p:cNvPr>
@@ -11436,14 +11018,11 @@
                 </a:pPr>
                 <a14:m>
                   <m:oMathPara xmlns:m="http://schemas.openxmlformats.org/officeDocument/2006/math">
-                    <m:oMathParaPr>
-                      <m:jc m:val="centerGroup"/>
-                    </m:oMathParaPr>
-                    <m:oMath xmlns:m="http://schemas.openxmlformats.org/officeDocument/2006/math">
+                    <m:oMath>
                       <m:sSub>
                         <m:sSubPr>
                           <m:ctrlPr>
-                            <a:rPr lang="pt-BR" i="1" smtClean="0">
+                            <a:rPr lang="pt-BR" i="1">
                               <a:latin typeface="Cambria Math" panose="02040503050406030204" pitchFamily="18" charset="0"/>
                             </a:rPr>
                           </m:ctrlPr>
@@ -11468,7 +11047,7 @@
                       <m:d>
                         <m:dPr>
                           <m:ctrlPr>
-                            <a:rPr lang="pt-BR" i="1">
+                            <a:rPr lang="pt-BR" b="1" i="1">
                               <a:latin typeface="Cambria Math" panose="02040503050406030204" pitchFamily="18" charset="0"/>
                             </a:rPr>
                           </m:ctrlPr>
@@ -11483,10 +11062,16 @@
                         </m:e>
                       </m:d>
                       <m:r>
+                        <a:rPr lang="pt-BR" b="0" i="1" smtClean="0">
+                          <a:latin typeface="Cambria Math" panose="02040503050406030204" pitchFamily="18" charset="0"/>
+                        </a:rPr>
+                        <m:t>=</m:t>
+                      </m:r>
+                      <m:r>
                         <a:rPr lang="pt-BR" i="1">
                           <a:latin typeface="Cambria Math" panose="02040503050406030204" pitchFamily="18" charset="0"/>
                         </a:rPr>
-                        <m:t>=−</m:t>
+                        <m:t>−</m:t>
                       </m:r>
                       <m:f>
                         <m:fPr>
@@ -11524,7 +11109,7 @@
                         </m:naryPr>
                         <m:sub>
                           <m:r>
-                            <a:rPr lang="pt-BR" b="0" i="1" smtClean="0">
+                            <a:rPr lang="pt-BR" i="1">
                               <a:latin typeface="Cambria Math" panose="02040503050406030204" pitchFamily="18" charset="0"/>
                             </a:rPr>
                             <m:t>𝑛</m:t>
@@ -11551,52 +11136,126 @@
                           </m:r>
                         </m:sup>
                         <m:e>
-                          <m:sSup>
-                            <m:sSupPr>
+                          <m:limLow>
+                            <m:limLowPr>
                               <m:ctrlPr>
+                                <a:rPr lang="pt-BR" i="1" smtClean="0">
+                                  <a:latin typeface="Cambria Math" panose="02040503050406030204" pitchFamily="18" charset="0"/>
+                                </a:rPr>
+                              </m:ctrlPr>
+                            </m:limLowPr>
+                            <m:e>
+                              <m:groupChr>
+                                <m:groupChrPr>
+                                  <m:chr m:val="⏟"/>
+                                  <m:pos m:val="bot"/>
+                                  <m:vertJc m:val="top"/>
+                                  <m:ctrlPr>
+                                    <a:rPr lang="pt-BR" i="1">
+                                      <a:latin typeface="Cambria Math" panose="02040503050406030204" pitchFamily="18" charset="0"/>
+                                    </a:rPr>
+                                  </m:ctrlPr>
+                                </m:groupChrPr>
+                                <m:e>
+                                  <m:r>
+                                    <a:rPr lang="pt-BR" i="1">
+                                      <a:latin typeface="Cambria Math" panose="02040503050406030204" pitchFamily="18" charset="0"/>
+                                    </a:rPr>
+                                    <m:t>1</m:t>
+                                  </m:r>
+                                  <m:d>
+                                    <m:dPr>
+                                      <m:begChr m:val="{"/>
+                                      <m:endChr m:val="}"/>
+                                      <m:ctrlPr>
+                                        <a:rPr lang="pt-BR" i="1">
+                                          <a:latin typeface="Cambria Math" panose="02040503050406030204" pitchFamily="18" charset="0"/>
+                                        </a:rPr>
+                                      </m:ctrlPr>
+                                    </m:dPr>
+                                    <m:e>
+                                      <m:r>
+                                        <a:rPr lang="pt-BR" i="1">
+                                          <a:latin typeface="Cambria Math" panose="02040503050406030204" pitchFamily="18" charset="0"/>
+                                        </a:rPr>
+                                        <m:t>𝑦</m:t>
+                                      </m:r>
+                                      <m:d>
+                                        <m:dPr>
+                                          <m:ctrlPr>
+                                            <a:rPr lang="pt-BR" i="1">
+                                              <a:latin typeface="Cambria Math" panose="02040503050406030204" pitchFamily="18" charset="0"/>
+                                            </a:rPr>
+                                          </m:ctrlPr>
+                                        </m:dPr>
+                                        <m:e>
+                                          <m:r>
+                                            <a:rPr lang="pt-BR" i="1">
+                                              <a:latin typeface="Cambria Math" panose="02040503050406030204" pitchFamily="18" charset="0"/>
+                                            </a:rPr>
+                                            <m:t>𝑛</m:t>
+                                          </m:r>
+                                        </m:e>
+                                      </m:d>
+                                      <m:r>
+                                        <a:rPr lang="pt-BR" i="1">
+                                          <a:latin typeface="Cambria Math" panose="02040503050406030204" pitchFamily="18" charset="0"/>
+                                        </a:rPr>
+                                        <m:t>==</m:t>
+                                      </m:r>
+                                      <m:r>
+                                        <a:rPr lang="pt-BR" i="1">
+                                          <a:latin typeface="Cambria Math" panose="02040503050406030204" pitchFamily="18" charset="0"/>
+                                        </a:rPr>
+                                        <m:t>0</m:t>
+                                      </m:r>
+                                    </m:e>
+                                  </m:d>
+                                </m:e>
+                              </m:groupChr>
+                            </m:e>
+                            <m:lim>
+                              <m:r>
+                                <a:rPr lang="pt-BR" b="0" i="1" smtClean="0">
+                                  <a:latin typeface="Cambria Math" panose="02040503050406030204" pitchFamily="18" charset="0"/>
+                                </a:rPr>
+                                <m:t>(1−</m:t>
+                              </m:r>
+                              <m:r>
                                 <a:rPr lang="pt-BR" i="1">
                                   <a:latin typeface="Cambria Math" panose="02040503050406030204" pitchFamily="18" charset="0"/>
                                 </a:rPr>
-                              </m:ctrlPr>
-                            </m:sSupPr>
-                            <m:e>
-                              <m:r>
-                                <a:rPr lang="pt-BR" b="1" i="1">
-                                  <a:latin typeface="Cambria Math" panose="02040503050406030204" pitchFamily="18" charset="0"/>
-                                </a:rPr>
-                                <m:t>𝒚</m:t>
+                                <m:t>𝑦</m:t>
                               </m:r>
                               <m:d>
                                 <m:dPr>
                                   <m:ctrlPr>
-                                    <a:rPr lang="pt-BR" b="1" i="1">
+                                    <a:rPr lang="pt-BR" i="1">
                                       <a:latin typeface="Cambria Math" panose="02040503050406030204" pitchFamily="18" charset="0"/>
                                     </a:rPr>
                                   </m:ctrlPr>
                                 </m:dPr>
                                 <m:e>
                                   <m:r>
-                                    <a:rPr lang="pt-BR" b="0" i="1" smtClean="0">
+                                    <a:rPr lang="pt-BR" i="1">
                                       <a:latin typeface="Cambria Math" panose="02040503050406030204" pitchFamily="18" charset="0"/>
                                     </a:rPr>
                                     <m:t>𝑛</m:t>
                                   </m:r>
                                 </m:e>
                               </m:d>
-                            </m:e>
-                            <m:sup>
                               <m:r>
-                                <a:rPr lang="pt-BR" i="1">
+                                <a:rPr lang="pt-BR" b="0" i="1" smtClean="0">
                                   <a:latin typeface="Cambria Math" panose="02040503050406030204" pitchFamily="18" charset="0"/>
                                 </a:rPr>
-                                <m:t>𝑇</m:t>
+                                <m:t>)</m:t>
                               </m:r>
-                            </m:sup>
-                          </m:sSup>
+                            </m:lim>
+                          </m:limLow>
                           <m:func>
                             <m:funcPr>
                               <m:ctrlPr>
-                                <a:rPr lang="pt-BR" i="1">
+                                <a:rPr lang="pt-BR">
                                   <a:latin typeface="Cambria Math" panose="02040503050406030204" pitchFamily="18" charset="0"/>
                                 </a:rPr>
                               </m:ctrlPr>
@@ -11622,30 +11281,240 @@
                                   </m:ctrlPr>
                                 </m:dPr>
                                 <m:e>
-                                  <m:acc>
-                                    <m:accPr>
-                                      <m:chr m:val="̂"/>
+                                  <m:sSub>
+                                    <m:sSubPr>
                                       <m:ctrlPr>
                                         <a:rPr lang="pt-BR" i="1">
                                           <a:latin typeface="Cambria Math" panose="02040503050406030204" pitchFamily="18" charset="0"/>
                                         </a:rPr>
                                       </m:ctrlPr>
-                                    </m:accPr>
+                                    </m:sSubPr>
+                                    <m:e>
+                                      <m:acc>
+                                        <m:accPr>
+                                          <m:chr m:val="̂"/>
+                                          <m:ctrlPr>
+                                            <a:rPr lang="pt-BR" i="1">
+                                              <a:latin typeface="Cambria Math" panose="02040503050406030204" pitchFamily="18" charset="0"/>
+                                            </a:rPr>
+                                          </m:ctrlPr>
+                                        </m:accPr>
+                                        <m:e>
+                                          <m:r>
+                                            <a:rPr lang="pt-BR" i="1">
+                                              <a:latin typeface="Cambria Math" panose="02040503050406030204" pitchFamily="18" charset="0"/>
+                                            </a:rPr>
+                                            <m:t>𝑦</m:t>
+                                          </m:r>
+                                        </m:e>
+                                      </m:acc>
+                                    </m:e>
+                                    <m:sub>
+                                      <m:r>
+                                        <a:rPr lang="pt-BR" b="0" i="1" smtClean="0">
+                                          <a:latin typeface="Cambria Math" panose="02040503050406030204" pitchFamily="18" charset="0"/>
+                                        </a:rPr>
+                                        <m:t>0</m:t>
+                                      </m:r>
+                                    </m:sub>
+                                  </m:sSub>
+                                  <m:d>
+                                    <m:dPr>
+                                      <m:ctrlPr>
+                                        <a:rPr lang="pt-BR" i="1">
+                                          <a:latin typeface="Cambria Math" panose="02040503050406030204" pitchFamily="18" charset="0"/>
+                                        </a:rPr>
+                                      </m:ctrlPr>
+                                    </m:dPr>
                                     <m:e>
                                       <m:r>
-                                        <a:rPr lang="pt-BR" b="1" i="1">
+                                        <a:rPr lang="pt-BR" i="1">
                                           <a:latin typeface="Cambria Math" panose="02040503050406030204" pitchFamily="18" charset="0"/>
                                         </a:rPr>
-                                        <m:t>𝒚</m:t>
+                                        <m:t>𝑛</m:t>
                                       </m:r>
                                     </m:e>
-                                  </m:acc>
+                                  </m:d>
+                                </m:e>
+                              </m:d>
+                            </m:e>
+                          </m:func>
+                          <m:r>
+                            <a:rPr lang="pt-BR" b="0" i="1" smtClean="0">
+                              <a:latin typeface="Cambria Math" panose="02040503050406030204" pitchFamily="18" charset="0"/>
+                            </a:rPr>
+                            <m:t>+</m:t>
+                          </m:r>
+                          <m:limLow>
+                            <m:limLowPr>
+                              <m:ctrlPr>
+                                <a:rPr lang="pt-BR" b="0" i="1" smtClean="0">
+                                  <a:latin typeface="Cambria Math" panose="02040503050406030204" pitchFamily="18" charset="0"/>
+                                </a:rPr>
+                              </m:ctrlPr>
+                            </m:limLowPr>
+                            <m:e>
+                              <m:groupChr>
+                                <m:groupChrPr>
+                                  <m:chr m:val="⏟"/>
+                                  <m:pos m:val="bot"/>
+                                  <m:vertJc m:val="top"/>
+                                  <m:ctrlPr>
+                                    <a:rPr lang="pt-BR" i="1">
+                                      <a:latin typeface="Cambria Math" panose="02040503050406030204" pitchFamily="18" charset="0"/>
+                                    </a:rPr>
+                                  </m:ctrlPr>
+                                </m:groupChrPr>
+                                <m:e>
                                   <m:r>
                                     <a:rPr lang="pt-BR" i="1">
                                       <a:latin typeface="Cambria Math" panose="02040503050406030204" pitchFamily="18" charset="0"/>
                                     </a:rPr>
-                                    <m:t> </m:t>
+                                    <m:t>1</m:t>
                                   </m:r>
+                                  <m:d>
+                                    <m:dPr>
+                                      <m:begChr m:val="{"/>
+                                      <m:endChr m:val="}"/>
+                                      <m:ctrlPr>
+                                        <a:rPr lang="pt-BR" i="1">
+                                          <a:latin typeface="Cambria Math" panose="02040503050406030204" pitchFamily="18" charset="0"/>
+                                        </a:rPr>
+                                      </m:ctrlPr>
+                                    </m:dPr>
+                                    <m:e>
+                                      <m:r>
+                                        <a:rPr lang="pt-BR" i="1">
+                                          <a:latin typeface="Cambria Math" panose="02040503050406030204" pitchFamily="18" charset="0"/>
+                                        </a:rPr>
+                                        <m:t>𝑦</m:t>
+                                      </m:r>
+                                      <m:d>
+                                        <m:dPr>
+                                          <m:ctrlPr>
+                                            <a:rPr lang="pt-BR" i="1">
+                                              <a:latin typeface="Cambria Math" panose="02040503050406030204" pitchFamily="18" charset="0"/>
+                                            </a:rPr>
+                                          </m:ctrlPr>
+                                        </m:dPr>
+                                        <m:e>
+                                          <m:r>
+                                            <a:rPr lang="pt-BR" i="1">
+                                              <a:latin typeface="Cambria Math" panose="02040503050406030204" pitchFamily="18" charset="0"/>
+                                            </a:rPr>
+                                            <m:t>𝑛</m:t>
+                                          </m:r>
+                                        </m:e>
+                                      </m:d>
+                                      <m:r>
+                                        <a:rPr lang="pt-BR" i="1">
+                                          <a:latin typeface="Cambria Math" panose="02040503050406030204" pitchFamily="18" charset="0"/>
+                                        </a:rPr>
+                                        <m:t>==</m:t>
+                                      </m:r>
+                                      <m:r>
+                                        <a:rPr lang="pt-BR" i="1">
+                                          <a:latin typeface="Cambria Math" panose="02040503050406030204" pitchFamily="18" charset="0"/>
+                                        </a:rPr>
+                                        <m:t>1</m:t>
+                                      </m:r>
+                                    </m:e>
+                                  </m:d>
+                                </m:e>
+                              </m:groupChr>
+                            </m:e>
+                            <m:lim>
+                              <m:r>
+                                <a:rPr lang="pt-BR" i="1">
+                                  <a:latin typeface="Cambria Math" panose="02040503050406030204" pitchFamily="18" charset="0"/>
+                                </a:rPr>
+                                <m:t>𝑦</m:t>
+                              </m:r>
+                              <m:d>
+                                <m:dPr>
+                                  <m:ctrlPr>
+                                    <a:rPr lang="pt-BR" i="1">
+                                      <a:latin typeface="Cambria Math" panose="02040503050406030204" pitchFamily="18" charset="0"/>
+                                    </a:rPr>
+                                  </m:ctrlPr>
+                                </m:dPr>
+                                <m:e>
+                                  <m:r>
+                                    <a:rPr lang="pt-BR" i="1">
+                                      <a:latin typeface="Cambria Math" panose="02040503050406030204" pitchFamily="18" charset="0"/>
+                                    </a:rPr>
+                                    <m:t>𝑛</m:t>
+                                  </m:r>
+                                </m:e>
+                              </m:d>
+                            </m:lim>
+                          </m:limLow>
+                          <m:func>
+                            <m:funcPr>
+                              <m:ctrlPr>
+                                <a:rPr lang="pt-BR">
+                                  <a:latin typeface="Cambria Math" panose="02040503050406030204" pitchFamily="18" charset="0"/>
+                                </a:rPr>
+                              </m:ctrlPr>
+                            </m:funcPr>
+                            <m:fName>
+                              <m:r>
+                                <m:rPr>
+                                  <m:sty m:val="p"/>
+                                </m:rPr>
+                                <a:rPr lang="pt-BR">
+                                  <a:latin typeface="Cambria Math" panose="02040503050406030204" pitchFamily="18" charset="0"/>
+                                </a:rPr>
+                                <m:t>log</m:t>
+                              </m:r>
+                            </m:fName>
+                            <m:e>
+                              <m:d>
+                                <m:dPr>
+                                  <m:ctrlPr>
+                                    <a:rPr lang="pt-BR" i="1">
+                                      <a:latin typeface="Cambria Math" panose="02040503050406030204" pitchFamily="18" charset="0"/>
+                                    </a:rPr>
+                                  </m:ctrlPr>
+                                </m:dPr>
+                                <m:e>
+                                  <m:sSub>
+                                    <m:sSubPr>
+                                      <m:ctrlPr>
+                                        <a:rPr lang="pt-BR" i="1">
+                                          <a:latin typeface="Cambria Math" panose="02040503050406030204" pitchFamily="18" charset="0"/>
+                                        </a:rPr>
+                                      </m:ctrlPr>
+                                    </m:sSubPr>
+                                    <m:e>
+                                      <m:acc>
+                                        <m:accPr>
+                                          <m:chr m:val="̂"/>
+                                          <m:ctrlPr>
+                                            <a:rPr lang="pt-BR" i="1">
+                                              <a:latin typeface="Cambria Math" panose="02040503050406030204" pitchFamily="18" charset="0"/>
+                                            </a:rPr>
+                                          </m:ctrlPr>
+                                        </m:accPr>
+                                        <m:e>
+                                          <m:r>
+                                            <a:rPr lang="pt-BR" i="1">
+                                              <a:latin typeface="Cambria Math" panose="02040503050406030204" pitchFamily="18" charset="0"/>
+                                            </a:rPr>
+                                            <m:t>𝑦</m:t>
+                                          </m:r>
+                                        </m:e>
+                                      </m:acc>
+                                    </m:e>
+                                    <m:sub>
+                                      <m:r>
+                                        <a:rPr lang="pt-BR" b="0" i="1" smtClean="0">
+                                          <a:latin typeface="Cambria Math" panose="02040503050406030204" pitchFamily="18" charset="0"/>
+                                        </a:rPr>
+                                        <m:t>1</m:t>
+                                      </m:r>
+                                    </m:sub>
+                                  </m:sSub>
                                   <m:d>
                                     <m:dPr>
                                       <m:ctrlPr>
@@ -11683,7 +11552,7 @@
               <a:p>
                 <a:r>
                   <a:rPr lang="pt-BR" dirty="0"/>
-                  <a:t>Notem que quando existem apenas duas classes (</a:t>
+                  <a:t>Quando existem apenas duas classes (</a:t>
                 </a:r>
                 <a14:m>
                   <m:oMath xmlns:m="http://schemas.openxmlformats.org/officeDocument/2006/math">
@@ -11786,7 +11655,7 @@
                   </m:oMath>
                 </a14:m>
                 <a:r>
-                  <a:rPr lang="pt-BR" dirty="0" smtClean="0"/>
+                  <a:rPr lang="pt-BR" dirty="0"/>
                   <a:t>.</a:t>
                 </a:r>
               </a:p>
@@ -11796,10 +11665,9 @@
                   <a:buChar char="§"/>
                 </a:pPr>
                 <a:r>
-                  <a:rPr lang="pt-BR" dirty="0" smtClean="0"/>
-                  <a:t>Porém, ao invés de uma única saída escalar, ele apresenta duas saídas, uma para a classe positiva e outra para a negativa.</a:t>
-                </a:r>
-                <a:endParaRPr lang="pt-BR" dirty="0"/>
+                  <a:rPr lang="pt-BR" dirty="0"/>
+                  <a:t>Porém, ao invés de uma única saída escalar, ele apresenta duas saídas, uma para a classe negativa e outra para a positiva.</a:t>
+                </a:r>
               </a:p>
               <a:p>
                 <a:r>
@@ -11810,13 +11678,13 @@
             </p:txBody>
           </p:sp>
         </mc:Choice>
-        <mc:Fallback xmlns="">
+        <mc:Fallback>
           <p:sp>
             <p:nvSpPr>
               <p:cNvPr id="3" name="Espaço Reservado para Conteúdo 2">
                 <a:extLst>
                   <a:ext uri="{FF2B5EF4-FFF2-40B4-BE49-F238E27FC236}">
-                    <a16:creationId xmlns="" xmlns:a16="http://schemas.microsoft.com/office/drawing/2014/main" xmlns:a14="http://schemas.microsoft.com/office/drawing/2010/main" id="{FEF4E6DC-E916-D97A-4D18-D469285C4F2C}"/>
+                    <a16:creationId xmlns:a16="http://schemas.microsoft.com/office/drawing/2014/main" id="{FEF4E6DC-E916-D97A-4D18-D469285C4F2C}"/>
                   </a:ext>
                 </a:extLst>
               </p:cNvPr>
@@ -11832,10 +11700,10 @@
                 <a:off x="838200" y="1825624"/>
                 <a:ext cx="11353800" cy="5032375"/>
               </a:xfrm>
-              <a:blipFill rotWithShape="0">
+              <a:blipFill>
                 <a:blip r:embed="rId3"/>
                 <a:stretch>
-                  <a:fillRect l="-967" r="-1611"/>
+                  <a:fillRect l="-967"/>
                 </a:stretch>
               </a:blipFill>
             </p:spPr>
@@ -11844,7 +11712,7 @@
               <a:lstStyle/>
               <a:p>
                 <a:r>
-                  <a:rPr lang="pt-BR">
+                  <a:rPr lang="en-US">
                     <a:noFill/>
                   </a:rPr>
                   <a:t> </a:t>
@@ -11889,7 +11757,7 @@
           <p:cNvPr id="2" name="Título 1">
             <a:extLst>
               <a:ext uri="{FF2B5EF4-FFF2-40B4-BE49-F238E27FC236}">
-                <a16:creationId xmlns:a16="http://schemas.microsoft.com/office/drawing/2014/main" xmlns="" id="{D5807923-28D2-8150-E304-526DA460D220}"/>
+                <a16:creationId xmlns:a16="http://schemas.microsoft.com/office/drawing/2014/main" id="{D5807923-28D2-8150-E304-526DA460D220}"/>
               </a:ext>
             </a:extLst>
           </p:cNvPr>
@@ -11918,7 +11786,7 @@
           <p:cNvPr id="3" name="Espaço Reservado para Conteúdo 2">
             <a:extLst>
               <a:ext uri="{FF2B5EF4-FFF2-40B4-BE49-F238E27FC236}">
-                <a16:creationId xmlns:a16="http://schemas.microsoft.com/office/drawing/2014/main" xmlns="" id="{FFACD180-C529-EB91-BD2D-B5F491B1E35C}"/>
+                <a16:creationId xmlns:a16="http://schemas.microsoft.com/office/drawing/2014/main" id="{FFACD180-C529-EB91-BD2D-B5F491B1E35C}"/>
               </a:ext>
             </a:extLst>
           </p:cNvPr>
@@ -12041,6 +11909,12 @@
             </a:r>
           </a:p>
           <a:p>
+            <a:r>
+              <a:rPr lang="pt-BR" dirty="0"/>
+              <a:t>Vejamos como fica o GD.</a:t>
+            </a:r>
+          </a:p>
+          <a:p>
             <a:endParaRPr lang="pt-BR" dirty="0"/>
           </a:p>
         </p:txBody>
@@ -12050,7 +11924,7 @@
           <p:cNvPr id="1026" name="Picture 2">
             <a:extLst>
               <a:ext uri="{FF2B5EF4-FFF2-40B4-BE49-F238E27FC236}">
-                <a16:creationId xmlns:a16="http://schemas.microsoft.com/office/drawing/2014/main" xmlns="" id="{6FC2BDE8-91E0-6379-9BA3-76511C6153D5}"/>
+                <a16:creationId xmlns:a16="http://schemas.microsoft.com/office/drawing/2014/main" id="{6FC2BDE8-91E0-6379-9BA3-76511C6153D5}"/>
               </a:ext>
             </a:extLst>
           </p:cNvPr>
@@ -12095,7 +11969,7 @@
           <p:cNvPr id="5" name="Picture 2">
             <a:extLst>
               <a:ext uri="{FF2B5EF4-FFF2-40B4-BE49-F238E27FC236}">
-                <a16:creationId xmlns:a16="http://schemas.microsoft.com/office/drawing/2014/main" xmlns="" id="{2771BE1F-7B74-36A4-AA69-9171B025A4B6}"/>
+                <a16:creationId xmlns:a16="http://schemas.microsoft.com/office/drawing/2014/main" id="{2771BE1F-7B74-36A4-AA69-9171B025A4B6}"/>
               </a:ext>
             </a:extLst>
           </p:cNvPr>
@@ -12170,7 +12044,7 @@
           <p:cNvPr id="2" name="Título 1">
             <a:extLst>
               <a:ext uri="{FF2B5EF4-FFF2-40B4-BE49-F238E27FC236}">
-                <a16:creationId xmlns:a16="http://schemas.microsoft.com/office/drawing/2014/main" xmlns="" id="{5D929962-9BFC-4174-AB35-CC23FA013168}"/>
+                <a16:creationId xmlns:a16="http://schemas.microsoft.com/office/drawing/2014/main" id="{5D929962-9BFC-4174-AB35-CC23FA013168}"/>
               </a:ext>
             </a:extLst>
           </p:cNvPr>
@@ -12194,14 +12068,14 @@
           </a:p>
         </p:txBody>
       </p:sp>
-      <mc:AlternateContent xmlns:mc="http://schemas.openxmlformats.org/markup-compatibility/2006" xmlns:a14="http://schemas.microsoft.com/office/drawing/2010/main">
-        <mc:Choice Requires="a14">
+      <mc:AlternateContent xmlns:mc="http://schemas.openxmlformats.org/markup-compatibility/2006">
+        <mc:Choice xmlns:a14="http://schemas.microsoft.com/office/drawing/2010/main" Requires="a14">
           <p:sp>
             <p:nvSpPr>
               <p:cNvPr id="3" name="Espaço Reservado para Conteúdo 2">
                 <a:extLst>
                   <a:ext uri="{FF2B5EF4-FFF2-40B4-BE49-F238E27FC236}">
-                    <a16:creationId xmlns:a16="http://schemas.microsoft.com/office/drawing/2014/main" xmlns="" id="{1D38055D-E355-F780-9CA0-0337EA0BE4FD}"/>
+                    <a16:creationId xmlns:a16="http://schemas.microsoft.com/office/drawing/2014/main" id="{1D38055D-E355-F780-9CA0-0337EA0BE4FD}"/>
                   </a:ext>
                 </a:extLst>
               </p:cNvPr>
@@ -12226,15 +12100,19 @@
               <a:p>
                 <a:r>
                   <a:rPr lang="pt-BR" dirty="0"/>
-                  <a:t>A atualização dos </a:t>
-                </a:r>
-                <a:r>
-                  <a:rPr lang="pt-BR" b="1" dirty="0"/>
-                  <a:t>pesos</a:t>
-                </a:r>
-                <a:r>
-                  <a:rPr lang="pt-BR" dirty="0"/>
-                  <a:t> da</a:t>
+                  <a:t>A </a:t>
+                </a:r>
+                <a:r>
+                  <a:rPr lang="pt-BR" b="1" dirty="0">
+                    <a:solidFill>
+                      <a:srgbClr val="7030A0"/>
+                    </a:solidFill>
+                  </a:rPr>
+                  <a:t>equação de atualização dos pesos </a:t>
+                </a:r>
+                <a:r>
+                  <a:rPr lang="pt-BR" dirty="0"/>
+                  <a:t>da</a:t>
                 </a:r>
                 <a:r>
                   <a:rPr lang="pt-BR" b="1" dirty="0">
@@ -12285,7 +12163,7 @@
                     <m:sSub>
                       <m:sSubPr>
                         <m:ctrlPr>
-                          <a:rPr lang="pt-BR" i="1" smtClean="0">
+                          <a:rPr lang="pt-BR" i="1">
                             <a:latin typeface="Cambria Math" panose="02040503050406030204" pitchFamily="18" charset="0"/>
                           </a:rPr>
                         </m:ctrlPr>
@@ -12356,14 +12234,11 @@
                 </a:pPr>
                 <a14:m>
                   <m:oMathPara xmlns:m="http://schemas.openxmlformats.org/officeDocument/2006/math">
-                    <m:oMathParaPr>
-                      <m:jc m:val="centerGroup"/>
-                    </m:oMathParaPr>
-                    <m:oMath xmlns:m="http://schemas.openxmlformats.org/officeDocument/2006/math">
+                    <m:oMath>
                       <m:sSub>
                         <m:sSubPr>
                           <m:ctrlPr>
-                            <a:rPr lang="pt-BR" sz="2400" i="1">
+                            <a:rPr lang="pt-BR" sz="2400" b="1" i="1">
                               <a:latin typeface="Cambria Math" panose="02040503050406030204" pitchFamily="18" charset="0"/>
                             </a:rPr>
                           </m:ctrlPr>
@@ -12394,7 +12269,7 @@
                       <m:sSub>
                         <m:sSubPr>
                           <m:ctrlPr>
-                            <a:rPr lang="pt-BR" sz="2400" i="1">
+                            <a:rPr lang="pt-BR" sz="2400" b="1" i="1">
                               <a:latin typeface="Cambria Math" panose="02040503050406030204" pitchFamily="18" charset="0"/>
                             </a:rPr>
                           </m:ctrlPr>
@@ -12472,7 +12347,7 @@
                           <m:d>
                             <m:dPr>
                               <m:ctrlPr>
-                                <a:rPr lang="pt-BR" sz="2400" i="1">
+                                <a:rPr lang="pt-BR" sz="2400" b="1" i="1">
                                   <a:latin typeface="Cambria Math" panose="02040503050406030204" pitchFamily="18" charset="0"/>
                                 </a:rPr>
                               </m:ctrlPr>
@@ -12497,7 +12372,7 @@
                           <m:sSub>
                             <m:sSubPr>
                               <m:ctrlPr>
-                                <a:rPr lang="pt-BR" sz="2400" i="1">
+                                <a:rPr lang="pt-BR" sz="2400" b="1" i="1">
                                   <a:latin typeface="Cambria Math" panose="02040503050406030204" pitchFamily="18" charset="0"/>
                                 </a:rPr>
                               </m:ctrlPr>
@@ -12612,7 +12487,7 @@
                     <m:d>
                       <m:dPr>
                         <m:ctrlPr>
-                          <a:rPr lang="pt-BR" i="1">
+                          <a:rPr lang="pt-BR" b="1" i="1">
                             <a:latin typeface="Cambria Math" panose="02040503050406030204" pitchFamily="18" charset="0"/>
                           </a:rPr>
                         </m:ctrlPr>
@@ -12630,14 +12505,14 @@
                 </a14:m>
                 <a:r>
                   <a:rPr lang="pt-BR" dirty="0"/>
-                  <a:t>, com respeito ao vetor de pesos, </a:t>
+                  <a:t>, com relação ao vetor de pesos, </a:t>
                 </a:r>
                 <a14:m>
                   <m:oMath xmlns:m="http://schemas.openxmlformats.org/officeDocument/2006/math">
                     <m:sSub>
                       <m:sSubPr>
                         <m:ctrlPr>
-                          <a:rPr lang="pt-BR" i="1">
+                          <a:rPr lang="pt-BR" b="1" i="1">
                             <a:latin typeface="Cambria Math" panose="02040503050406030204" pitchFamily="18" charset="0"/>
                           </a:rPr>
                         </m:ctrlPr>
@@ -12672,10 +12547,7 @@
                 </a:pPr>
                 <a14:m>
                   <m:oMathPara xmlns:m="http://schemas.openxmlformats.org/officeDocument/2006/math">
-                    <m:oMathParaPr>
-                      <m:jc m:val="centerGroup"/>
-                    </m:oMathParaPr>
-                    <m:oMath xmlns:m="http://schemas.openxmlformats.org/officeDocument/2006/math">
+                    <m:oMath>
                       <m:f>
                         <m:fPr>
                           <m:ctrlPr>
@@ -12719,7 +12591,7 @@
                           <m:d>
                             <m:dPr>
                               <m:ctrlPr>
-                                <a:rPr lang="pt-BR" sz="2400" i="1">
+                                <a:rPr lang="pt-BR" sz="2400" b="1" i="1">
                                   <a:latin typeface="Cambria Math" panose="02040503050406030204" pitchFamily="18" charset="0"/>
                                 </a:rPr>
                               </m:ctrlPr>
@@ -12744,7 +12616,7 @@
                           <m:sSub>
                             <m:sSubPr>
                               <m:ctrlPr>
-                                <a:rPr lang="pt-BR" sz="2400" i="1">
+                                <a:rPr lang="pt-BR" sz="2400" b="1" i="1">
                                   <a:latin typeface="Cambria Math" panose="02040503050406030204" pitchFamily="18" charset="0"/>
                                 </a:rPr>
                               </m:ctrlPr>
@@ -12809,7 +12681,7 @@
                         <m:naryPr>
                           <m:chr m:val="∑"/>
                           <m:ctrlPr>
-                            <a:rPr lang="pt-BR" sz="2400" i="1">
+                            <a:rPr lang="pt-BR" sz="2400" b="0" i="1" smtClean="0">
                               <a:latin typeface="Cambria Math" panose="02040503050406030204" pitchFamily="18" charset="0"/>
                             </a:rPr>
                           </m:ctrlPr>
@@ -12880,7 +12752,7 @@
                                   <m:d>
                                     <m:dPr>
                                       <m:ctrlPr>
-                                        <a:rPr lang="pt-BR" sz="2400" i="1">
+                                        <a:rPr lang="pt-BR" sz="2400" b="0" i="1" smtClean="0">
                                           <a:latin typeface="Cambria Math" panose="02040503050406030204" pitchFamily="18" charset="0"/>
                                         </a:rPr>
                                       </m:ctrlPr>
@@ -12917,7 +12789,7 @@
                               <m:sSubSup>
                                 <m:sSubSupPr>
                                   <m:ctrlPr>
-                                    <a:rPr lang="pt-BR" sz="2400" b="1" i="1">
+                                    <a:rPr lang="pt-BR" sz="2400" i="1">
                                       <a:latin typeface="Cambria Math" panose="02040503050406030204" pitchFamily="18" charset="0"/>
                                     </a:rPr>
                                   </m:ctrlPr>
@@ -12927,7 +12799,7 @@
                                     <a:rPr lang="pt-BR" sz="2400" i="1">
                                       <a:latin typeface="Cambria Math" panose="02040503050406030204" pitchFamily="18" charset="0"/>
                                     </a:rPr>
-                                    <m:t>h</m:t>
+                                    <m:t>ℎ</m:t>
                                   </m:r>
                                 </m:e>
                                 <m:sub>
@@ -12950,7 +12822,7 @@
                               <m:d>
                                 <m:dPr>
                                   <m:ctrlPr>
-                                    <a:rPr lang="pt-BR" sz="2400" i="1">
+                                    <a:rPr lang="pt-BR" sz="2400" b="1" i="1">
                                       <a:latin typeface="Cambria Math" panose="02040503050406030204" pitchFamily="18" charset="0"/>
                                     </a:rPr>
                                   </m:ctrlPr>
@@ -12965,7 +12837,7 @@
                                   <m:d>
                                     <m:dPr>
                                       <m:ctrlPr>
-                                        <a:rPr lang="pt-BR" sz="2400" b="1" i="1">
+                                        <a:rPr lang="pt-BR" sz="2400" b="0" i="1" smtClean="0">
                                           <a:latin typeface="Cambria Math" panose="02040503050406030204" pitchFamily="18" charset="0"/>
                                         </a:rPr>
                                       </m:ctrlPr>
@@ -12992,7 +12864,7 @@
                           <m:d>
                             <m:dPr>
                               <m:ctrlPr>
-                                <a:rPr lang="pt-BR" sz="2400" b="1" i="1">
+                                <a:rPr lang="pt-BR" sz="2400" b="0" i="1" smtClean="0">
                                   <a:latin typeface="Cambria Math" panose="02040503050406030204" pitchFamily="18" charset="0"/>
                                 </a:rPr>
                               </m:ctrlPr>
@@ -13073,7 +12945,7 @@
                       <m:d>
                         <m:dPr>
                           <m:ctrlPr>
-                            <a:rPr lang="pt-BR" sz="2400" i="1">
+                            <a:rPr lang="pt-BR" sz="2400" i="1" smtClean="0">
                               <a:latin typeface="Cambria Math" panose="02040503050406030204" pitchFamily="18" charset="0"/>
                             </a:rPr>
                           </m:ctrlPr>
@@ -13082,7 +12954,7 @@
                           <m:sSub>
                             <m:sSubPr>
                               <m:ctrlPr>
-                                <a:rPr lang="pt-BR" sz="2400" i="1" smtClean="0">
+                                <a:rPr lang="pt-BR" sz="2400" b="1" i="1">
                                   <a:latin typeface="Cambria Math" panose="02040503050406030204" pitchFamily="18" charset="0"/>
                                 </a:rPr>
                               </m:ctrlPr>
@@ -13113,7 +12985,7 @@
                           <m:sSub>
                             <m:sSubPr>
                               <m:ctrlPr>
-                                <a:rPr lang="pt-BR" sz="2400" i="1" smtClean="0">
+                                <a:rPr lang="pt-BR" sz="2400" i="1">
                                   <a:latin typeface="Cambria Math" panose="02040503050406030204" pitchFamily="18" charset="0"/>
                                 </a:rPr>
                               </m:ctrlPr>
@@ -13123,7 +12995,7 @@
                                 <m:accPr>
                                   <m:chr m:val="̂"/>
                                   <m:ctrlPr>
-                                    <a:rPr lang="pt-BR" sz="2400" i="1">
+                                    <a:rPr lang="pt-BR" sz="2400" b="1" i="1">
                                       <a:latin typeface="Cambria Math" panose="02040503050406030204" pitchFamily="18" charset="0"/>
                                     </a:rPr>
                                   </m:ctrlPr>
@@ -13223,7 +13095,7 @@
                     <m:sSub>
                       <m:sSubPr>
                         <m:ctrlPr>
-                          <a:rPr lang="pt-BR" sz="2800" i="1" smtClean="0">
+                          <a:rPr lang="pt-BR" sz="2800" b="1" i="1">
                             <a:latin typeface="Cambria Math" panose="02040503050406030204" pitchFamily="18" charset="0"/>
                           </a:rPr>
                         </m:ctrlPr>
@@ -13282,7 +13154,7 @@
                           <m:accPr>
                             <m:chr m:val="̂"/>
                             <m:ctrlPr>
-                              <a:rPr lang="pt-BR" sz="2800" i="1">
+                              <a:rPr lang="pt-BR" sz="2800" b="1" i="1">
                                 <a:latin typeface="Cambria Math" panose="02040503050406030204" pitchFamily="18" charset="0"/>
                               </a:rPr>
                             </m:ctrlPr>
@@ -13384,7 +13256,7 @@
                 </a:r>
                 <a:r>
                   <a:rPr lang="pt-BR" dirty="0"/>
-                  <a:t> elementos dos vetores </a:t>
+                  <a:t> elementos dos  vetores </a:t>
                 </a:r>
                 <a:r>
                   <a:rPr lang="pt-BR" i="1" dirty="0" err="1"/>
@@ -13409,7 +13281,7 @@
                 <a14:m>
                   <m:oMath xmlns:m="http://schemas.openxmlformats.org/officeDocument/2006/math">
                     <m:r>
-                      <a:rPr lang="pt-BR" i="1">
+                      <a:rPr lang="pt-BR" i="1" smtClean="0">
                         <a:latin typeface="Cambria Math" panose="02040503050406030204" pitchFamily="18" charset="0"/>
                       </a:rPr>
                       <m:t>𝑁</m:t>
@@ -13424,7 +13296,7 @@
             </p:txBody>
           </p:sp>
         </mc:Choice>
-        <mc:Fallback xmlns="">
+        <mc:Fallback>
           <p:sp>
             <p:nvSpPr>
               <p:cNvPr id="3" name="Espaço Reservado para Conteúdo 2">
@@ -13449,7 +13321,7 @@
               <a:blipFill>
                 <a:blip r:embed="rId3"/>
                 <a:stretch>
-                  <a:fillRect l="-1074" t="-1695"/>
+                  <a:fillRect l="-1074" t="-1937"/>
                 </a:stretch>
               </a:blipFill>
             </p:spPr>
@@ -13503,7 +13375,7 @@
           <p:cNvPr id="2" name="Título 1">
             <a:extLst>
               <a:ext uri="{FF2B5EF4-FFF2-40B4-BE49-F238E27FC236}">
-                <a16:creationId xmlns:a16="http://schemas.microsoft.com/office/drawing/2014/main" xmlns="" id="{01D0947A-594D-A8D5-95F3-38EB04C6BDB6}"/>
+                <a16:creationId xmlns:a16="http://schemas.microsoft.com/office/drawing/2014/main" id="{01D0947A-594D-A8D5-95F3-38EB04C6BDB6}"/>
               </a:ext>
             </a:extLst>
           </p:cNvPr>
@@ -13537,7 +13409,7 @@
               <p:cNvPr id="3" name="Espaço Reservado para Conteúdo 2">
                 <a:extLst>
                   <a:ext uri="{FF2B5EF4-FFF2-40B4-BE49-F238E27FC236}">
-                    <a16:creationId xmlns:a16="http://schemas.microsoft.com/office/drawing/2014/main" xmlns="" id="{DDBA288E-BBB8-E157-840C-AA685AD7D65C}"/>
+                    <a16:creationId xmlns:a16="http://schemas.microsoft.com/office/drawing/2014/main" id="{DDBA288E-BBB8-E157-840C-AA685AD7D65C}"/>
                   </a:ext>
                 </a:extLst>
               </p:cNvPr>
@@ -13565,14 +13437,11 @@
                 </a:pPr>
                 <a14:m>
                   <m:oMathPara xmlns:m="http://schemas.openxmlformats.org/officeDocument/2006/math">
-                    <m:oMathParaPr>
-                      <m:jc m:val="centerGroup"/>
-                    </m:oMathParaPr>
-                    <m:oMath xmlns:m="http://schemas.openxmlformats.org/officeDocument/2006/math">
+                    <m:oMath>
                       <m:f>
                         <m:fPr>
                           <m:ctrlPr>
-                            <a:rPr lang="pt-BR" sz="2800" i="1" smtClean="0">
+                            <a:rPr lang="pt-BR" sz="2800" i="1">
                               <a:latin typeface="Cambria Math" panose="02040503050406030204" pitchFamily="18" charset="0"/>
                             </a:rPr>
                           </m:ctrlPr>
@@ -13612,7 +13481,7 @@
                           <m:d>
                             <m:dPr>
                               <m:ctrlPr>
-                                <a:rPr lang="pt-BR" sz="2800" i="1">
+                                <a:rPr lang="pt-BR" sz="2800" b="1" i="1">
                                   <a:latin typeface="Cambria Math" panose="02040503050406030204" pitchFamily="18" charset="0"/>
                                 </a:rPr>
                               </m:ctrlPr>
@@ -13637,7 +13506,7 @@
                           <m:sSub>
                             <m:sSubPr>
                               <m:ctrlPr>
-                                <a:rPr lang="pt-BR" sz="2800" i="1">
+                                <a:rPr lang="pt-BR" sz="2800" b="1" i="1">
                                   <a:latin typeface="Cambria Math" panose="02040503050406030204" pitchFamily="18" charset="0"/>
                                 </a:rPr>
                               </m:ctrlPr>
@@ -13726,7 +13595,7 @@
                       <m:d>
                         <m:dPr>
                           <m:ctrlPr>
-                            <a:rPr lang="pt-BR" sz="2800" i="1">
+                            <a:rPr lang="pt-BR" sz="2800" i="1" smtClean="0">
                               <a:latin typeface="Cambria Math" panose="02040503050406030204" pitchFamily="18" charset="0"/>
                             </a:rPr>
                           </m:ctrlPr>
@@ -13735,7 +13604,7 @@
                           <m:sSub>
                             <m:sSubPr>
                               <m:ctrlPr>
-                                <a:rPr lang="pt-BR" sz="2800" i="1" smtClean="0">
+                                <a:rPr lang="pt-BR" sz="2800" b="1" i="1">
                                   <a:latin typeface="Cambria Math" panose="02040503050406030204" pitchFamily="18" charset="0"/>
                                 </a:rPr>
                               </m:ctrlPr>
@@ -13766,7 +13635,7 @@
                           <m:sSub>
                             <m:sSubPr>
                               <m:ctrlPr>
-                                <a:rPr lang="pt-BR" sz="2800" i="1" smtClean="0">
+                                <a:rPr lang="pt-BR" sz="2800" i="1">
                                   <a:latin typeface="Cambria Math" panose="02040503050406030204" pitchFamily="18" charset="0"/>
                                 </a:rPr>
                               </m:ctrlPr>
@@ -13776,7 +13645,7 @@
                                 <m:accPr>
                                   <m:chr m:val="̂"/>
                                   <m:ctrlPr>
-                                    <a:rPr lang="pt-BR" sz="2800" i="1">
+                                    <a:rPr lang="pt-BR" sz="2800" b="1" i="1">
                                       <a:latin typeface="Cambria Math" panose="02040503050406030204" pitchFamily="18" charset="0"/>
                                     </a:rPr>
                                   </m:ctrlPr>
@@ -13906,14 +13775,11 @@
                 </a:pPr>
                 <a14:m>
                   <m:oMathPara xmlns:m="http://schemas.openxmlformats.org/officeDocument/2006/math">
-                    <m:oMathParaPr>
-                      <m:jc m:val="centerGroup"/>
-                    </m:oMathParaPr>
-                    <m:oMath xmlns:m="http://schemas.openxmlformats.org/officeDocument/2006/math">
+                    <m:oMath>
                       <m:f>
                         <m:fPr>
                           <m:ctrlPr>
-                            <a:rPr lang="pt-BR" sz="2800" i="1" smtClean="0">
+                            <a:rPr lang="pt-BR" sz="2800" i="1">
                               <a:latin typeface="Cambria Math" panose="02040503050406030204" pitchFamily="18" charset="0"/>
                             </a:rPr>
                           </m:ctrlPr>
@@ -13953,7 +13819,7 @@
                           <m:d>
                             <m:dPr>
                               <m:ctrlPr>
-                                <a:rPr lang="pt-BR" sz="2800" i="1">
+                                <a:rPr lang="pt-BR" sz="2800" b="1" i="1">
                                   <a:latin typeface="Cambria Math" panose="02040503050406030204" pitchFamily="18" charset="0"/>
                                 </a:rPr>
                               </m:ctrlPr>
@@ -14048,7 +13914,7 @@
                       <m:d>
                         <m:dPr>
                           <m:ctrlPr>
-                            <a:rPr lang="pt-BR" sz="2800" i="1" smtClean="0">
+                            <a:rPr lang="pt-BR" sz="2800" b="1" i="1" smtClean="0">
                               <a:latin typeface="Cambria Math" panose="02040503050406030204" pitchFamily="18" charset="0"/>
                             </a:rPr>
                           </m:ctrlPr>
@@ -14070,7 +13936,7 @@
                             <m:accPr>
                               <m:chr m:val="̂"/>
                               <m:ctrlPr>
-                                <a:rPr lang="pt-BR" sz="2800" b="0" i="1" smtClean="0">
+                                <a:rPr lang="pt-BR" sz="2800" b="1" i="1" smtClean="0">
                                   <a:latin typeface="Cambria Math" panose="02040503050406030204" pitchFamily="18" charset="0"/>
                                 </a:rPr>
                               </m:ctrlPr>
@@ -14174,7 +14040,7 @@
                       <m:accPr>
                         <m:chr m:val="̂"/>
                         <m:ctrlPr>
-                          <a:rPr lang="pt-BR" i="1">
+                          <a:rPr lang="pt-BR" b="1" i="1">
                             <a:latin typeface="Cambria Math" panose="02040503050406030204" pitchFamily="18" charset="0"/>
                           </a:rPr>
                         </m:ctrlPr>
@@ -14248,7 +14114,7 @@
                     <m:sSup>
                       <m:sSupPr>
                         <m:ctrlPr>
-                          <a:rPr lang="pt-BR" i="1" smtClean="0">
+                          <a:rPr lang="pt-BR" b="1" i="1">
                             <a:latin typeface="Cambria Math" panose="02040503050406030204" pitchFamily="18" charset="0"/>
                           </a:rPr>
                         </m:ctrlPr>
@@ -14299,7 +14165,7 @@
                     <m:sSup>
                       <m:sSupPr>
                         <m:ctrlPr>
-                          <a:rPr lang="pt-BR" i="1" smtClean="0">
+                          <a:rPr lang="pt-BR" i="1">
                             <a:latin typeface="Cambria Math" panose="02040503050406030204" pitchFamily="18" charset="0"/>
                           </a:rPr>
                         </m:ctrlPr>
@@ -14309,7 +14175,7 @@
                           <m:accPr>
                             <m:chr m:val="̂"/>
                             <m:ctrlPr>
-                              <a:rPr lang="pt-BR" i="1">
+                              <a:rPr lang="pt-BR" b="1" i="1">
                                 <a:latin typeface="Cambria Math" panose="02040503050406030204" pitchFamily="18" charset="0"/>
                               </a:rPr>
                             </m:ctrlPr>
@@ -14461,7 +14327,7 @@
           <p:cNvPr id="2" name="Título 1">
             <a:extLst>
               <a:ext uri="{FF2B5EF4-FFF2-40B4-BE49-F238E27FC236}">
-                <a16:creationId xmlns:a16="http://schemas.microsoft.com/office/drawing/2014/main" xmlns="" id="{E0F1FD81-6095-2AF0-8691-34E55B8A93B5}"/>
+                <a16:creationId xmlns:a16="http://schemas.microsoft.com/office/drawing/2014/main" id="{E0F1FD81-6095-2AF0-8691-34E55B8A93B5}"/>
               </a:ext>
             </a:extLst>
           </p:cNvPr>
@@ -14495,7 +14361,7 @@
               <p:cNvPr id="3" name="Espaço Reservado para Conteúdo 2">
                 <a:extLst>
                   <a:ext uri="{FF2B5EF4-FFF2-40B4-BE49-F238E27FC236}">
-                    <a16:creationId xmlns:a16="http://schemas.microsoft.com/office/drawing/2014/main" xmlns="" id="{BB734B24-DA50-860B-5D55-C33F6F451B6F}"/>
+                    <a16:creationId xmlns:a16="http://schemas.microsoft.com/office/drawing/2014/main" id="{BB734B24-DA50-860B-5D55-C33F6F451B6F}"/>
                   </a:ext>
                 </a:extLst>
               </p:cNvPr>
@@ -14572,7 +14438,7 @@
                     <m:d>
                       <m:dPr>
                         <m:ctrlPr>
-                          <a:rPr lang="pt-BR" b="1" i="1">
+                          <a:rPr lang="pt-BR" b="0" i="1" smtClean="0">
                             <a:solidFill>
                               <a:schemeClr val="tx1"/>
                             </a:solidFill>
@@ -14629,23 +14495,7 @@
                       <a:schemeClr val="tx1"/>
                     </a:solidFill>
                   </a:rPr>
-                  <a:t>maior </a:t>
-                </a:r>
-                <a:r>
-                  <a:rPr lang="pt-BR" b="1" dirty="0" smtClean="0">
-                    <a:solidFill>
-                      <a:schemeClr val="tx1"/>
-                    </a:solidFill>
-                  </a:rPr>
-                  <a:t>probabilidade</a:t>
-                </a:r>
-                <a:r>
-                  <a:rPr lang="pt-BR" dirty="0" smtClean="0">
-                    <a:solidFill>
-                      <a:schemeClr val="tx1"/>
-                    </a:solidFill>
-                  </a:rPr>
-                  <a:t>, </a:t>
+                  <a:t>maior probabilidade</a:t>
                 </a:r>
                 <a:r>
                   <a:rPr lang="pt-BR" dirty="0">
@@ -14653,7 +14503,7 @@
                       <a:schemeClr val="tx1"/>
                     </a:solidFill>
                   </a:rPr>
-                  <a:t>ou seja, atribui a classe, </a:t>
+                  <a:t>, ou seja, atribui a classe, </a:t>
                 </a:r>
                 <a14:m>
                   <m:oMath xmlns:m="http://schemas.openxmlformats.org/officeDocument/2006/math">
@@ -14688,14 +14538,11 @@
                 </a:pPr>
                 <a14:m>
                   <m:oMathPara xmlns:m="http://schemas.openxmlformats.org/officeDocument/2006/math">
-                    <m:oMathParaPr>
-                      <m:jc m:val="centerGroup"/>
-                    </m:oMathParaPr>
-                    <m:oMath xmlns:m="http://schemas.openxmlformats.org/officeDocument/2006/math">
+                    <m:oMath>
                       <m:sSub>
                         <m:sSubPr>
                           <m:ctrlPr>
-                            <a:rPr lang="pt-BR" i="1" smtClean="0">
+                            <a:rPr lang="pt-BR" i="1">
                               <a:solidFill>
                                 <a:schemeClr val="tx1"/>
                               </a:solidFill>
@@ -14739,23 +14586,12 @@
                         <m:rPr>
                           <m:nor/>
                         </m:rPr>
-                        <a:rPr lang="pt-BR" dirty="0">
+                        <a:rPr lang="pt-BR" i="0" dirty="0">
                           <a:solidFill>
                             <a:schemeClr val="tx1"/>
                           </a:solidFill>
                         </a:rPr>
-                        <m:t>arg</m:t>
-                      </m:r>
-                      <m:r>
-                        <m:rPr>
-                          <m:nor/>
-                        </m:rPr>
-                        <a:rPr lang="pt-BR" dirty="0">
-                          <a:solidFill>
-                            <a:schemeClr val="tx1"/>
-                          </a:solidFill>
-                        </a:rPr>
-                        <m:t>. </m:t>
+                        <m:t>arg. </m:t>
                       </m:r>
                       <m:func>
                         <m:funcPr>
@@ -14772,7 +14608,7 @@
                           <m:limLow>
                             <m:limLowPr>
                               <m:ctrlPr>
-                                <a:rPr lang="pt-BR" i="1">
+                                <a:rPr lang="pt-BR">
                                   <a:solidFill>
                                     <a:schemeClr val="tx1"/>
                                   </a:solidFill>
@@ -14811,7 +14647,7 @@
                           <m:sSubSup>
                             <m:sSubSupPr>
                               <m:ctrlPr>
-                                <a:rPr lang="pt-BR" b="1" i="1">
+                                <a:rPr lang="pt-BR" i="1">
                                   <a:solidFill>
                                     <a:schemeClr val="tx1"/>
                                   </a:solidFill>
@@ -14827,7 +14663,7 @@
                                   </a:solidFill>
                                   <a:latin typeface="Cambria Math" panose="02040503050406030204" pitchFamily="18" charset="0"/>
                                 </a:rPr>
-                                <m:t>h</m:t>
+                                <m:t>ℎ</m:t>
                               </m:r>
                             </m:e>
                             <m:sub>
@@ -14856,7 +14692,7 @@
                           <m:d>
                             <m:dPr>
                               <m:ctrlPr>
-                                <a:rPr lang="pt-BR" i="1">
+                                <a:rPr lang="pt-BR" b="1" i="1">
                                   <a:solidFill>
                                     <a:schemeClr val="tx1"/>
                                   </a:solidFill>
@@ -14877,7 +14713,7 @@
                               <m:d>
                                 <m:dPr>
                                   <m:ctrlPr>
-                                    <a:rPr lang="pt-BR" b="1" i="1">
+                                    <a:rPr lang="pt-BR" b="0" i="1" smtClean="0">
                                       <a:solidFill>
                                         <a:schemeClr val="tx1"/>
                                       </a:solidFill>
@@ -15032,7 +14868,7 @@
               <p:cNvPr id="3" name="Espaço Reservado para Conteúdo 2">
                 <a:extLst>
                   <a:ext uri="{FF2B5EF4-FFF2-40B4-BE49-F238E27FC236}">
-                    <a16:creationId xmlns:a16="http://schemas.microsoft.com/office/drawing/2014/main" xmlns="" xmlns:a14="http://schemas.microsoft.com/office/drawing/2010/main" id="{BB734B24-DA50-860B-5D55-C33F6F451B6F}"/>
+                    <a16:creationId xmlns:a16="http://schemas.microsoft.com/office/drawing/2014/main" id="{BB734B24-DA50-860B-5D55-C33F6F451B6F}"/>
                   </a:ext>
                 </a:extLst>
               </p:cNvPr>
@@ -15048,7 +14884,7 @@
                 <a:off x="6096000" y="1840614"/>
                 <a:ext cx="6096000" cy="5032375"/>
               </a:xfrm>
-              <a:blipFill rotWithShape="0">
+              <a:blipFill>
                 <a:blip r:embed="rId3"/>
                 <a:stretch>
                   <a:fillRect l="-1800" t="-2061" r="-2700"/>
@@ -15060,7 +14896,7 @@
               <a:lstStyle/>
               <a:p>
                 <a:r>
-                  <a:rPr lang="pt-BR">
+                  <a:rPr lang="en-US">
                     <a:noFill/>
                   </a:rPr>
                   <a:t> </a:t>
@@ -15075,7 +14911,7 @@
           <p:cNvPr id="4" name="Imagem 5">
             <a:extLst>
               <a:ext uri="{FF2B5EF4-FFF2-40B4-BE49-F238E27FC236}">
-                <a16:creationId xmlns:a16="http://schemas.microsoft.com/office/drawing/2014/main" xmlns="" id="{535159CB-11DC-74B8-5C5F-D571CD018327}"/>
+                <a16:creationId xmlns:a16="http://schemas.microsoft.com/office/drawing/2014/main" id="{535159CB-11DC-74B8-5C5F-D571CD018327}"/>
               </a:ext>
             </a:extLst>
           </p:cNvPr>
@@ -15098,7 +14934,7 @@
         </p:blipFill>
         <p:spPr>
           <a:xfrm>
-            <a:off x="110236" y="2370360"/>
+            <a:off x="165100" y="2370360"/>
             <a:ext cx="5840814" cy="2951148"/>
           </a:xfrm>
           <a:prstGeom prst="rect">
@@ -15141,7 +14977,7 @@
           <p:cNvPr id="2" name="Título 1">
             <a:extLst>
               <a:ext uri="{FF2B5EF4-FFF2-40B4-BE49-F238E27FC236}">
-                <a16:creationId xmlns:a16="http://schemas.microsoft.com/office/drawing/2014/main" xmlns="" id="{FC175046-E9DF-FCC8-C62B-B00332089713}"/>
+                <a16:creationId xmlns:a16="http://schemas.microsoft.com/office/drawing/2014/main" id="{FC175046-E9DF-FCC8-C62B-B00332089713}"/>
               </a:ext>
             </a:extLst>
           </p:cNvPr>
@@ -15175,7 +15011,7 @@
               <p:cNvPr id="3" name="Espaço Reservado para Conteúdo 2">
                 <a:extLst>
                   <a:ext uri="{FF2B5EF4-FFF2-40B4-BE49-F238E27FC236}">
-                    <a16:creationId xmlns:a16="http://schemas.microsoft.com/office/drawing/2014/main" xmlns="" id="{24721BB7-DBA3-D8BF-7F98-ED91BD59DAEC}"/>
+                    <a16:creationId xmlns:a16="http://schemas.microsoft.com/office/drawing/2014/main" id="{24721BB7-DBA3-D8BF-7F98-ED91BD59DAEC}"/>
                   </a:ext>
                 </a:extLst>
               </p:cNvPr>
@@ -15483,7 +15319,7 @@
           <p:cNvPr id="6" name="Imagem 5">
             <a:extLst>
               <a:ext uri="{FF2B5EF4-FFF2-40B4-BE49-F238E27FC236}">
-                <a16:creationId xmlns:a16="http://schemas.microsoft.com/office/drawing/2014/main" xmlns="" id="{FF78CF76-EB26-3FAE-0391-E452288FA28E}"/>
+                <a16:creationId xmlns:a16="http://schemas.microsoft.com/office/drawing/2014/main" id="{FF78CF76-EB26-3FAE-0391-E452288FA28E}"/>
               </a:ext>
             </a:extLst>
           </p:cNvPr>
@@ -15524,13 +15360,6 @@
   <p:clrMapOvr>
     <a:masterClrMapping/>
   </p:clrMapOvr>
-  <p:timing>
-    <p:tnLst>
-      <p:par>
-        <p:cTn id="1" dur="indefinite" restart="never" nodeType="tmRoot"/>
-      </p:par>
-    </p:tnLst>
-  </p:timing>
 </p:sld>
 </file>
 
@@ -15573,8 +15402,8 @@
           </a:p>
         </p:txBody>
       </p:sp>
-      <mc:AlternateContent xmlns:mc="http://schemas.openxmlformats.org/markup-compatibility/2006" xmlns:a14="http://schemas.microsoft.com/office/drawing/2010/main">
-        <mc:Choice Requires="a14">
+      <mc:AlternateContent xmlns:mc="http://schemas.openxmlformats.org/markup-compatibility/2006">
+        <mc:Choice xmlns:a14="http://schemas.microsoft.com/office/drawing/2010/main" Requires="a14">
           <p:sp>
             <p:nvSpPr>
               <p:cNvPr id="3" name="Content Placeholder 2"/>
@@ -15588,7 +15417,7 @@
             <p:spPr>
               <a:xfrm>
                 <a:off x="5638799" y="1784680"/>
-                <a:ext cx="6444343" cy="5073320"/>
+                <a:ext cx="6553201" cy="5073320"/>
               </a:xfrm>
             </p:spPr>
             <p:txBody>
@@ -15675,7 +15504,7 @@
                 </a:pPr>
                 <a:r>
                   <a:rPr lang="pt-BR" dirty="0"/>
-                  <a:t>Classificação de texto: Esportes, Economia, Política, Entretenimento, etc.</a:t>
+                  <a:t>Classificação de sentimentos: Neutro, Positivo, Negativo.</a:t>
                 </a:r>
               </a:p>
               <a:p>
@@ -15685,13 +15514,13 @@
                 </a:pPr>
                 <a:r>
                   <a:rPr lang="pt-BR" dirty="0"/>
-                  <a:t>Classificação de sentimentos: Neutro, Positivo, Negativo.</a:t>
+                  <a:t>Classificação de texto: Esportes, Economia, Política, Entretenimento, etc.</a:t>
                 </a:r>
               </a:p>
             </p:txBody>
           </p:sp>
         </mc:Choice>
-        <mc:Fallback xmlns="">
+        <mc:Fallback>
           <p:sp>
             <p:nvSpPr>
               <p:cNvPr id="3" name="Content Placeholder 2"/>
@@ -15705,12 +15534,12 @@
             <p:spPr>
               <a:xfrm>
                 <a:off x="5638799" y="1784680"/>
-                <a:ext cx="6444343" cy="5073320"/>
+                <a:ext cx="6553201" cy="5073320"/>
               </a:xfrm>
               <a:blipFill>
                 <a:blip r:embed="rId2"/>
                 <a:stretch>
-                  <a:fillRect l="-1703" t="-2043"/>
+                  <a:fillRect l="-1674" t="-2043" r="-2884"/>
                 </a:stretch>
               </a:blipFill>
             </p:spPr>
@@ -15734,7 +15563,7 @@
           <p:cNvPr id="4" name="Picture 2" descr="Ana Barros (@anathinker) | Twitter">
             <a:extLst>
               <a:ext uri="{FF2B5EF4-FFF2-40B4-BE49-F238E27FC236}">
-                <a16:creationId xmlns:a16="http://schemas.microsoft.com/office/drawing/2014/main" xmlns="" id="{AF3F0044-4F7D-98F6-34C1-8351487DFDAA}"/>
+                <a16:creationId xmlns:a16="http://schemas.microsoft.com/office/drawing/2014/main" id="{AF3F0044-4F7D-98F6-34C1-8351487DFDAA}"/>
               </a:ext>
             </a:extLst>
           </p:cNvPr>
@@ -15781,7 +15610,7 @@
           <p:cNvPr id="5" name="Picture 6" descr="Analyzing Text Classification Techniques on Youtube Data">
             <a:extLst>
               <a:ext uri="{FF2B5EF4-FFF2-40B4-BE49-F238E27FC236}">
-                <a16:creationId xmlns:a16="http://schemas.microsoft.com/office/drawing/2014/main" xmlns="" id="{0E6041F8-AB14-54C0-C790-0288A3AC8FBA}"/>
+                <a16:creationId xmlns:a16="http://schemas.microsoft.com/office/drawing/2014/main" id="{0E6041F8-AB14-54C0-C790-0288A3AC8FBA}"/>
               </a:ext>
             </a:extLst>
           </p:cNvPr>
@@ -15826,7 +15655,7 @@
           <p:cNvPr id="6" name="Picture 2" descr="Sentiment Fig 1">
             <a:extLst>
               <a:ext uri="{FF2B5EF4-FFF2-40B4-BE49-F238E27FC236}">
-                <a16:creationId xmlns:a16="http://schemas.microsoft.com/office/drawing/2014/main" xmlns="" id="{1E7CC96F-55AB-1482-92F6-240F8E2E0D1E}"/>
+                <a16:creationId xmlns:a16="http://schemas.microsoft.com/office/drawing/2014/main" id="{1E7CC96F-55AB-1482-92F6-240F8E2E0D1E}"/>
               </a:ext>
             </a:extLst>
           </p:cNvPr>
@@ -15903,7 +15732,7 @@
           <p:cNvPr id="2" name="Título 1">
             <a:extLst>
               <a:ext uri="{FF2B5EF4-FFF2-40B4-BE49-F238E27FC236}">
-                <a16:creationId xmlns:a16="http://schemas.microsoft.com/office/drawing/2014/main" xmlns="" id="{94AB8438-E56E-2412-517C-8456E4CA773C}"/>
+                <a16:creationId xmlns:a16="http://schemas.microsoft.com/office/drawing/2014/main" id="{94AB8438-E56E-2412-517C-8456E4CA773C}"/>
               </a:ext>
             </a:extLst>
           </p:cNvPr>
@@ -15931,7 +15760,7 @@
           <p:cNvPr id="3" name="Espaço Reservado para Conteúdo 2">
             <a:extLst>
               <a:ext uri="{FF2B5EF4-FFF2-40B4-BE49-F238E27FC236}">
-                <a16:creationId xmlns:a16="http://schemas.microsoft.com/office/drawing/2014/main" xmlns="" id="{F7E2B09C-6D56-4C9F-A364-B904CCE2F1A0}"/>
+                <a16:creationId xmlns:a16="http://schemas.microsoft.com/office/drawing/2014/main" id="{F7E2B09C-6D56-4C9F-A364-B904CCE2F1A0}"/>
               </a:ext>
             </a:extLst>
           </p:cNvPr>
@@ -15968,7 +15797,7 @@
           <p:cNvPr id="18" name="Group 17">
             <a:extLst>
               <a:ext uri="{FF2B5EF4-FFF2-40B4-BE49-F238E27FC236}">
-                <a16:creationId xmlns:a16="http://schemas.microsoft.com/office/drawing/2014/main" xmlns="" id="{627C64FD-88E0-EC8E-2A34-0D5737B4C854}"/>
+                <a16:creationId xmlns:a16="http://schemas.microsoft.com/office/drawing/2014/main" id="{627C64FD-88E0-EC8E-2A34-0D5737B4C854}"/>
               </a:ext>
             </a:extLst>
           </p:cNvPr>
@@ -15988,7 +15817,7 @@
             <p:cNvPr id="12" name="Picture 4" descr="Project Jupyter | Try Jupyter">
               <a:extLst>
                 <a:ext uri="{FF2B5EF4-FFF2-40B4-BE49-F238E27FC236}">
-                  <a16:creationId xmlns:a16="http://schemas.microsoft.com/office/drawing/2014/main" xmlns="" id="{FF92EA36-91E7-292B-D7A0-2D4D83A10F98}"/>
+                  <a16:creationId xmlns:a16="http://schemas.microsoft.com/office/drawing/2014/main" id="{FF92EA36-91E7-292B-D7A0-2D4D83A10F98}"/>
                 </a:ext>
               </a:extLst>
             </p:cNvPr>
@@ -16035,7 +15864,7 @@
             <p:cNvPr id="13" name="Picture 8" descr="Google Colaboratory Colab - Guía Completa Español - Marketing Branding">
               <a:extLst>
                 <a:ext uri="{FF2B5EF4-FFF2-40B4-BE49-F238E27FC236}">
-                  <a16:creationId xmlns:a16="http://schemas.microsoft.com/office/drawing/2014/main" xmlns="" id="{46F1718A-89E6-9E63-E40B-2B19852D6AA0}"/>
+                  <a16:creationId xmlns:a16="http://schemas.microsoft.com/office/drawing/2014/main" id="{46F1718A-89E6-9E63-E40B-2B19852D6AA0}"/>
                 </a:ext>
               </a:extLst>
             </p:cNvPr>
@@ -16080,7 +15909,7 @@
             <p:cNvPr id="14" name="Picture 10" descr="IT12A01: FUNDAMENTALS OF PYTHON PROGRAMMING (SF) (SYNCHRONOUS E-LEARNING) -  NTUC LearningHub">
               <a:extLst>
                 <a:ext uri="{FF2B5EF4-FFF2-40B4-BE49-F238E27FC236}">
-                  <a16:creationId xmlns:a16="http://schemas.microsoft.com/office/drawing/2014/main" xmlns="" id="{33F6B1B4-9B79-D634-3E35-33F24609C848}"/>
+                  <a16:creationId xmlns:a16="http://schemas.microsoft.com/office/drawing/2014/main" id="{33F6B1B4-9B79-D634-3E35-33F24609C848}"/>
                 </a:ext>
               </a:extLst>
             </p:cNvPr>
@@ -16125,7 +15954,7 @@
             <p:cNvPr id="15" name="Sinal de Adição 7">
               <a:extLst>
                 <a:ext uri="{FF2B5EF4-FFF2-40B4-BE49-F238E27FC236}">
-                  <a16:creationId xmlns:a16="http://schemas.microsoft.com/office/drawing/2014/main" xmlns="" id="{6959EE6C-DCDB-E78B-5C50-EBD3FF3049E2}"/>
+                  <a16:creationId xmlns:a16="http://schemas.microsoft.com/office/drawing/2014/main" id="{6959EE6C-DCDB-E78B-5C50-EBD3FF3049E2}"/>
                 </a:ext>
               </a:extLst>
             </p:cNvPr>
@@ -16173,7 +16002,7 @@
             <p:cNvPr id="17" name="Sinal de Adição 10">
               <a:extLst>
                 <a:ext uri="{FF2B5EF4-FFF2-40B4-BE49-F238E27FC236}">
-                  <a16:creationId xmlns:a16="http://schemas.microsoft.com/office/drawing/2014/main" xmlns="" id="{30A21FDB-ABA6-9FD5-49EF-7762414AEF0C}"/>
+                  <a16:creationId xmlns:a16="http://schemas.microsoft.com/office/drawing/2014/main" id="{30A21FDB-ABA6-9FD5-49EF-7762414AEF0C}"/>
                 </a:ext>
               </a:extLst>
             </p:cNvPr>
@@ -16227,13 +16056,6 @@
   <p:clrMapOvr>
     <a:masterClrMapping/>
   </p:clrMapOvr>
-  <p:timing>
-    <p:tnLst>
-      <p:par>
-        <p:cTn id="1" dur="indefinite" restart="never" nodeType="tmRoot"/>
-      </p:par>
-    </p:tnLst>
-  </p:timing>
 </p:sld>
 </file>
 
@@ -16259,7 +16081,7 @@
           <p:cNvPr id="2" name="Title 1">
             <a:extLst>
               <a:ext uri="{FF2B5EF4-FFF2-40B4-BE49-F238E27FC236}">
-                <a16:creationId xmlns:a16="http://schemas.microsoft.com/office/drawing/2014/main" xmlns="" id="{CF49AE95-3E0A-F9BB-A3FD-4C328EF25334}"/>
+                <a16:creationId xmlns:a16="http://schemas.microsoft.com/office/drawing/2014/main" id="{CF49AE95-3E0A-F9BB-A3FD-4C328EF25334}"/>
               </a:ext>
             </a:extLst>
           </p:cNvPr>
@@ -16288,7 +16110,7 @@
           <p:cNvPr id="3" name="Content Placeholder 2">
             <a:extLst>
               <a:ext uri="{FF2B5EF4-FFF2-40B4-BE49-F238E27FC236}">
-                <a16:creationId xmlns:a16="http://schemas.microsoft.com/office/drawing/2014/main" xmlns="" id="{A431927B-FE56-CB25-3ECF-AB5E92A7DC71}"/>
+                <a16:creationId xmlns:a16="http://schemas.microsoft.com/office/drawing/2014/main" id="{A431927B-FE56-CB25-3ECF-AB5E92A7DC71}"/>
               </a:ext>
             </a:extLst>
           </p:cNvPr>
@@ -16345,13 +16167,6 @@
   <p:clrMapOvr>
     <a:masterClrMapping/>
   </p:clrMapOvr>
-  <p:timing>
-    <p:tnLst>
-      <p:par>
-        <p:cTn id="1" dur="indefinite" restart="never" nodeType="tmRoot"/>
-      </p:par>
-    </p:tnLst>
-  </p:timing>
 </p:sld>
 </file>
 
@@ -16377,7 +16192,7 @@
           <p:cNvPr id="4" name="Título 1">
             <a:extLst>
               <a:ext uri="{FF2B5EF4-FFF2-40B4-BE49-F238E27FC236}">
-                <a16:creationId xmlns:a16="http://schemas.microsoft.com/office/drawing/2014/main" xmlns="" id="{32666AC8-2E17-4DB4-B0F5-60C640CCFD2E}"/>
+                <a16:creationId xmlns:a16="http://schemas.microsoft.com/office/drawing/2014/main" id="{32666AC8-2E17-4DB4-B0F5-60C640CCFD2E}"/>
               </a:ext>
             </a:extLst>
           </p:cNvPr>
@@ -16438,13 +16253,6 @@
   <p:clrMapOvr>
     <a:masterClrMapping/>
   </p:clrMapOvr>
-  <p:timing>
-    <p:tnLst>
-      <p:par>
-        <p:cTn id="1" dur="indefinite" restart="never" nodeType="tmRoot"/>
-      </p:par>
-    </p:tnLst>
-  </p:timing>
 </p:sld>
 </file>
 
@@ -16470,7 +16278,7 @@
           <p:cNvPr id="4" name="Título 1">
             <a:extLst>
               <a:ext uri="{FF2B5EF4-FFF2-40B4-BE49-F238E27FC236}">
-                <a16:creationId xmlns:a16="http://schemas.microsoft.com/office/drawing/2014/main" xmlns="" id="{32666AC8-2E17-4DB4-B0F5-60C640CCFD2E}"/>
+                <a16:creationId xmlns:a16="http://schemas.microsoft.com/office/drawing/2014/main" id="{32666AC8-2E17-4DB4-B0F5-60C640CCFD2E}"/>
               </a:ext>
             </a:extLst>
           </p:cNvPr>
@@ -16542,7 +16350,7 @@
         <p:cNvPr id="1" name="">
           <a:extLst>
             <a:ext uri="{FF2B5EF4-FFF2-40B4-BE49-F238E27FC236}">
-              <a16:creationId xmlns:a16="http://schemas.microsoft.com/office/drawing/2014/main" xmlns="" id="{66DA37F4-4ED4-806C-CFDE-46C776755B3A}"/>
+              <a16:creationId xmlns:a16="http://schemas.microsoft.com/office/drawing/2014/main" id="{66DA37F4-4ED4-806C-CFDE-46C776755B3A}"/>
             </a:ext>
           </a:extLst>
         </p:cNvPr>
@@ -16562,7 +16370,7 @@
           <p:cNvPr id="4" name="Título 1">
             <a:extLst>
               <a:ext uri="{FF2B5EF4-FFF2-40B4-BE49-F238E27FC236}">
-                <a16:creationId xmlns:a16="http://schemas.microsoft.com/office/drawing/2014/main" xmlns="" id="{616605E6-566B-D397-B0D6-339FE7F8CB5E}"/>
+                <a16:creationId xmlns:a16="http://schemas.microsoft.com/office/drawing/2014/main" id="{616605E6-566B-D397-B0D6-339FE7F8CB5E}"/>
               </a:ext>
             </a:extLst>
           </p:cNvPr>
@@ -16648,7 +16456,7 @@
           <p:cNvPr id="4" name="Agrupar 22">
             <a:extLst>
               <a:ext uri="{FF2B5EF4-FFF2-40B4-BE49-F238E27FC236}">
-                <a16:creationId xmlns:a16="http://schemas.microsoft.com/office/drawing/2014/main" xmlns="" id="{BDB2E9D3-18AD-6A55-F414-20E01AF3185A}"/>
+                <a16:creationId xmlns:a16="http://schemas.microsoft.com/office/drawing/2014/main" id="{BDB2E9D3-18AD-6A55-F414-20E01AF3185A}"/>
               </a:ext>
             </a:extLst>
           </p:cNvPr>
@@ -16670,7 +16478,7 @@
                 <p:cNvPr id="5" name="CaixaDeTexto 5">
                   <a:extLst>
                     <a:ext uri="{FF2B5EF4-FFF2-40B4-BE49-F238E27FC236}">
-                      <a16:creationId xmlns:a16="http://schemas.microsoft.com/office/drawing/2014/main" xmlns="" id="{AF11FFDB-E923-3C94-D47A-83418BDAD06C}"/>
+                      <a16:creationId xmlns:a16="http://schemas.microsoft.com/office/drawing/2014/main" id="{AF11FFDB-E923-3C94-D47A-83418BDAD06C}"/>
                     </a:ext>
                   </a:extLst>
                 </p:cNvPr>
@@ -16696,10 +16504,7 @@
                   <a:pPr/>
                   <a14:m>
                     <m:oMathPara xmlns:m="http://schemas.openxmlformats.org/officeDocument/2006/math">
-                      <m:oMathParaPr>
-                        <m:jc m:val="centerGroup"/>
-                      </m:oMathParaPr>
-                      <m:oMath xmlns:m="http://schemas.openxmlformats.org/officeDocument/2006/math">
+                      <m:oMath>
                         <m:d>
                           <m:dPr>
                             <m:begChr m:val="["/>
@@ -16877,7 +16682,7 @@
             <p:cNvPr id="6" name="Agrupar 21">
               <a:extLst>
                 <a:ext uri="{FF2B5EF4-FFF2-40B4-BE49-F238E27FC236}">
-                  <a16:creationId xmlns:a16="http://schemas.microsoft.com/office/drawing/2014/main" xmlns="" id="{0216B346-D594-78F5-A2A5-C50F3A50B5DC}"/>
+                  <a16:creationId xmlns:a16="http://schemas.microsoft.com/office/drawing/2014/main" id="{0216B346-D594-78F5-A2A5-C50F3A50B5DC}"/>
                 </a:ext>
               </a:extLst>
             </p:cNvPr>
@@ -16897,7 +16702,7 @@
               <p:cNvPr id="19" name="Retângulo 6">
                 <a:extLst>
                   <a:ext uri="{FF2B5EF4-FFF2-40B4-BE49-F238E27FC236}">
-                    <a16:creationId xmlns:a16="http://schemas.microsoft.com/office/drawing/2014/main" xmlns="" id="{C45F9961-D53D-BEB9-F54B-3CC4703FA1F8}"/>
+                    <a16:creationId xmlns:a16="http://schemas.microsoft.com/office/drawing/2014/main" id="{C45F9961-D53D-BEB9-F54B-3CC4703FA1F8}"/>
                   </a:ext>
                 </a:extLst>
               </p:cNvPr>
@@ -16944,14 +16749,14 @@
               </a:p>
             </p:txBody>
           </p:sp>
-          <mc:AlternateContent xmlns:mc="http://schemas.openxmlformats.org/markup-compatibility/2006" xmlns:a14="http://schemas.microsoft.com/office/drawing/2010/main">
-            <mc:Choice Requires="a14">
+          <mc:AlternateContent xmlns:mc="http://schemas.openxmlformats.org/markup-compatibility/2006">
+            <mc:Choice xmlns:a14="http://schemas.microsoft.com/office/drawing/2010/main" Requires="a14">
               <p:sp>
                 <p:nvSpPr>
                   <p:cNvPr id="20" name="CaixaDeTexto 7">
                     <a:extLst>
                       <a:ext uri="{FF2B5EF4-FFF2-40B4-BE49-F238E27FC236}">
-                        <a16:creationId xmlns:a16="http://schemas.microsoft.com/office/drawing/2014/main" xmlns="" id="{DD14F424-8D9A-FCFC-0455-7D5B5C6C43F0}"/>
+                        <a16:creationId xmlns:a16="http://schemas.microsoft.com/office/drawing/2014/main" id="{DD14F424-8D9A-FCFC-0455-7D5B5C6C43F0}"/>
                       </a:ext>
                     </a:extLst>
                   </p:cNvPr>
@@ -16977,14 +16782,11 @@
                     <a:pPr/>
                     <a14:m>
                       <m:oMathPara xmlns:m="http://schemas.openxmlformats.org/officeDocument/2006/math">
-                        <m:oMathParaPr>
-                          <m:jc m:val="centerGroup"/>
-                        </m:oMathParaPr>
-                        <m:oMath xmlns:m="http://schemas.openxmlformats.org/officeDocument/2006/math">
+                        <m:oMath>
                           <m:f>
                             <m:fPr>
                               <m:ctrlPr>
-                                <a:rPr lang="pt-BR" sz="2800" b="0" i="1" smtClean="0">
+                                <a:rPr lang="pt-BR" sz="2800" i="1">
                                   <a:latin typeface="Cambria Math" panose="02040503050406030204" pitchFamily="18" charset="0"/>
                                 </a:rPr>
                               </m:ctrlPr>
@@ -17078,7 +16880,13 @@
                                     <a:rPr lang="pt-BR" sz="2800" b="0" i="1" smtClean="0">
                                       <a:latin typeface="Cambria Math" panose="02040503050406030204" pitchFamily="18" charset="0"/>
                                     </a:rPr>
-                                    <m:t>=1</m:t>
+                                    <m:t>=</m:t>
+                                  </m:r>
+                                  <m:r>
+                                    <a:rPr lang="pt-BR" sz="2800" b="0" i="1" smtClean="0">
+                                      <a:latin typeface="Cambria Math" panose="02040503050406030204" pitchFamily="18" charset="0"/>
+                                    </a:rPr>
+                                    <m:t>0</m:t>
                                   </m:r>
                                 </m:sub>
                                 <m:sup>
@@ -17087,6 +16895,12 @@
                                       <a:latin typeface="Cambria Math" panose="02040503050406030204" pitchFamily="18" charset="0"/>
                                     </a:rPr>
                                     <m:t>𝑄</m:t>
+                                  </m:r>
+                                  <m:r>
+                                    <a:rPr lang="pt-BR" sz="2800" b="0" i="1" smtClean="0">
+                                      <a:latin typeface="Cambria Math" panose="02040503050406030204" pitchFamily="18" charset="0"/>
+                                    </a:rPr>
+                                    <m:t>−1</m:t>
                                   </m:r>
                                 </m:sup>
                                 <m:e>
@@ -17164,13 +16978,13 @@
                 </p:txBody>
               </p:sp>
             </mc:Choice>
-            <mc:Fallback xmlns="">
+            <mc:Fallback>
               <p:sp>
                 <p:nvSpPr>
-                  <p:cNvPr id="8" name="CaixaDeTexto 7">
+                  <p:cNvPr id="20" name="CaixaDeTexto 7">
                     <a:extLst>
                       <a:ext uri="{FF2B5EF4-FFF2-40B4-BE49-F238E27FC236}">
-                        <a16:creationId xmlns:a16="http://schemas.microsoft.com/office/drawing/2014/main" id="{4607DCF3-656F-5B3E-9FD4-3A9E08FFF13B}"/>
+                        <a16:creationId xmlns:a16="http://schemas.microsoft.com/office/drawing/2014/main" id="{DD14F424-8D9A-FCFC-0455-7D5B5C6C43F0}"/>
                       </a:ext>
                     </a:extLst>
                   </p:cNvPr>
@@ -17199,7 +17013,7 @@
                   <a:lstStyle/>
                   <a:p>
                     <a:r>
-                      <a:rPr lang="pt-BR">
+                      <a:rPr lang="en-US">
                         <a:noFill/>
                       </a:rPr>
                       <a:t> </a:t>
@@ -17215,7 +17029,7 @@
             <p:cNvPr id="7" name="Seta: para a Direita 8">
               <a:extLst>
                 <a:ext uri="{FF2B5EF4-FFF2-40B4-BE49-F238E27FC236}">
-                  <a16:creationId xmlns:a16="http://schemas.microsoft.com/office/drawing/2014/main" xmlns="" id="{D3504EFE-235C-4EED-BD67-1F0134363B33}"/>
+                  <a16:creationId xmlns:a16="http://schemas.microsoft.com/office/drawing/2014/main" id="{D3504EFE-235C-4EED-BD67-1F0134363B33}"/>
                 </a:ext>
               </a:extLst>
             </p:cNvPr>
@@ -17269,7 +17083,7 @@
             <p:cNvPr id="8" name="Seta: para a Direita 9">
               <a:extLst>
                 <a:ext uri="{FF2B5EF4-FFF2-40B4-BE49-F238E27FC236}">
-                  <a16:creationId xmlns:a16="http://schemas.microsoft.com/office/drawing/2014/main" xmlns="" id="{E56F7404-32FC-ED2A-B5D6-AA6AAC63911A}"/>
+                  <a16:creationId xmlns:a16="http://schemas.microsoft.com/office/drawing/2014/main" id="{E56F7404-32FC-ED2A-B5D6-AA6AAC63911A}"/>
                 </a:ext>
               </a:extLst>
             </p:cNvPr>
@@ -17323,7 +17137,7 @@
             <p:cNvPr id="9" name="CaixaDeTexto 10">
               <a:extLst>
                 <a:ext uri="{FF2B5EF4-FFF2-40B4-BE49-F238E27FC236}">
-                  <a16:creationId xmlns:a16="http://schemas.microsoft.com/office/drawing/2014/main" xmlns="" id="{4F9BC649-95D4-52BD-BA63-08F8688BBFD3}"/>
+                  <a16:creationId xmlns:a16="http://schemas.microsoft.com/office/drawing/2014/main" id="{4F9BC649-95D4-52BD-BA63-08F8688BBFD3}"/>
                 </a:ext>
               </a:extLst>
             </p:cNvPr>
@@ -17359,7 +17173,7 @@
             <p:cNvPr id="10" name="CaixaDeTexto 12">
               <a:extLst>
                 <a:ext uri="{FF2B5EF4-FFF2-40B4-BE49-F238E27FC236}">
-                  <a16:creationId xmlns:a16="http://schemas.microsoft.com/office/drawing/2014/main" xmlns="" id="{9C4DD653-BC48-DCA1-5663-281ACCF13641}"/>
+                  <a16:creationId xmlns:a16="http://schemas.microsoft.com/office/drawing/2014/main" id="{9C4DD653-BC48-DCA1-5663-281ACCF13641}"/>
                 </a:ext>
               </a:extLst>
             </p:cNvPr>
@@ -17399,7 +17213,7 @@
             <p:cNvPr id="11" name="Agrupar 20">
               <a:extLst>
                 <a:ext uri="{FF2B5EF4-FFF2-40B4-BE49-F238E27FC236}">
-                  <a16:creationId xmlns:a16="http://schemas.microsoft.com/office/drawing/2014/main" xmlns="" id="{1FBA146D-CAB5-65CA-C09C-DFAE2CF0121E}"/>
+                  <a16:creationId xmlns:a16="http://schemas.microsoft.com/office/drawing/2014/main" id="{1FBA146D-CAB5-65CA-C09C-DFAE2CF0121E}"/>
                 </a:ext>
               </a:extLst>
             </p:cNvPr>
@@ -17421,7 +17235,7 @@
                   <p:cNvPr id="12" name="CaixaDeTexto 4">
                     <a:extLst>
                       <a:ext uri="{FF2B5EF4-FFF2-40B4-BE49-F238E27FC236}">
-                        <a16:creationId xmlns:a16="http://schemas.microsoft.com/office/drawing/2014/main" xmlns="" id="{43C8BB8A-C849-2483-4102-05D4F8A25AE9}"/>
+                        <a16:creationId xmlns:a16="http://schemas.microsoft.com/office/drawing/2014/main" id="{43C8BB8A-C849-2483-4102-05D4F8A25AE9}"/>
                       </a:ext>
                     </a:extLst>
                   </p:cNvPr>
@@ -17447,10 +17261,7 @@
                     <a:pPr/>
                     <a14:m>
                       <m:oMathPara xmlns:m="http://schemas.openxmlformats.org/officeDocument/2006/math">
-                        <m:oMathParaPr>
-                          <m:jc m:val="centerGroup"/>
-                        </m:oMathParaPr>
-                        <m:oMath xmlns:m="http://schemas.openxmlformats.org/officeDocument/2006/math">
+                        <m:oMath>
                           <m:d>
                             <m:dPr>
                               <m:begChr m:val="["/>
@@ -17630,7 +17441,7 @@
                   <p:cNvPr id="13" name="CaixaDeTexto 11">
                     <a:extLst>
                       <a:ext uri="{FF2B5EF4-FFF2-40B4-BE49-F238E27FC236}">
-                        <a16:creationId xmlns:a16="http://schemas.microsoft.com/office/drawing/2014/main" xmlns="" id="{AF290EB5-D075-77C8-B194-538454B60861}"/>
+                        <a16:creationId xmlns:a16="http://schemas.microsoft.com/office/drawing/2014/main" id="{AF290EB5-D075-77C8-B194-538454B60861}"/>
                       </a:ext>
                     </a:extLst>
                   </p:cNvPr>
@@ -17728,7 +17539,7 @@
                   <p:cNvPr id="14" name="CaixaDeTexto 14">
                     <a:extLst>
                       <a:ext uri="{FF2B5EF4-FFF2-40B4-BE49-F238E27FC236}">
-                        <a16:creationId xmlns:a16="http://schemas.microsoft.com/office/drawing/2014/main" xmlns="" id="{34981BFA-7FF1-3BFF-417B-6F22F9C69AF2}"/>
+                        <a16:creationId xmlns:a16="http://schemas.microsoft.com/office/drawing/2014/main" id="{34981BFA-7FF1-3BFF-417B-6F22F9C69AF2}"/>
                       </a:ext>
                     </a:extLst>
                   </p:cNvPr>
@@ -17754,14 +17565,11 @@
                     <a:pPr/>
                     <a14:m>
                       <m:oMathPara xmlns:m="http://schemas.openxmlformats.org/officeDocument/2006/math">
-                        <m:oMathParaPr>
-                          <m:jc m:val="centerGroup"/>
-                        </m:oMathParaPr>
-                        <m:oMath xmlns:m="http://schemas.openxmlformats.org/officeDocument/2006/math">
+                        <m:oMath>
                           <m:sSub>
                             <m:sSubPr>
                               <m:ctrlPr>
-                                <a:rPr lang="pt-BR" sz="1600" i="1" smtClean="0">
+                                <a:rPr lang="pt-BR" sz="1600" i="1">
                                   <a:latin typeface="Cambria Math" panose="02040503050406030204" pitchFamily="18" charset="0"/>
                                 </a:rPr>
                               </m:ctrlPr>
@@ -17861,7 +17669,7 @@
                   <p:cNvPr id="15" name="CaixaDeTexto 15">
                     <a:extLst>
                       <a:ext uri="{FF2B5EF4-FFF2-40B4-BE49-F238E27FC236}">
-                        <a16:creationId xmlns:a16="http://schemas.microsoft.com/office/drawing/2014/main" xmlns="" id="{DB8F6DFA-2208-43E8-18F4-BC5ACFDCAE49}"/>
+                        <a16:creationId xmlns:a16="http://schemas.microsoft.com/office/drawing/2014/main" id="{DB8F6DFA-2208-43E8-18F4-BC5ACFDCAE49}"/>
                       </a:ext>
                     </a:extLst>
                   </p:cNvPr>
@@ -17887,14 +17695,11 @@
                     <a:pPr/>
                     <a14:m>
                       <m:oMathPara xmlns:m="http://schemas.openxmlformats.org/officeDocument/2006/math">
-                        <m:oMathParaPr>
-                          <m:jc m:val="centerGroup"/>
-                        </m:oMathParaPr>
-                        <m:oMath xmlns:m="http://schemas.openxmlformats.org/officeDocument/2006/math">
+                        <m:oMath>
                           <m:sSub>
                             <m:sSubPr>
                               <m:ctrlPr>
-                                <a:rPr lang="pt-BR" sz="1600" i="1" smtClean="0">
+                                <a:rPr lang="pt-BR" sz="1600" i="1">
                                   <a:latin typeface="Cambria Math" panose="02040503050406030204" pitchFamily="18" charset="0"/>
                                 </a:rPr>
                               </m:ctrlPr>
@@ -17994,7 +17799,7 @@
                   <p:cNvPr id="16" name="CaixaDeTexto 16">
                     <a:extLst>
                       <a:ext uri="{FF2B5EF4-FFF2-40B4-BE49-F238E27FC236}">
-                        <a16:creationId xmlns:a16="http://schemas.microsoft.com/office/drawing/2014/main" xmlns="" id="{A5EC037D-8EF0-3DEF-2F8B-84248AE8B86A}"/>
+                        <a16:creationId xmlns:a16="http://schemas.microsoft.com/office/drawing/2014/main" id="{A5EC037D-8EF0-3DEF-2F8B-84248AE8B86A}"/>
                       </a:ext>
                     </a:extLst>
                   </p:cNvPr>
@@ -18020,14 +17825,11 @@
                     <a:pPr/>
                     <a14:m>
                       <m:oMathPara xmlns:m="http://schemas.openxmlformats.org/officeDocument/2006/math">
-                        <m:oMathParaPr>
-                          <m:jc m:val="centerGroup"/>
-                        </m:oMathParaPr>
-                        <m:oMath xmlns:m="http://schemas.openxmlformats.org/officeDocument/2006/math">
+                        <m:oMath>
                           <m:sSub>
                             <m:sSubPr>
                               <m:ctrlPr>
-                                <a:rPr lang="pt-BR" sz="1600" i="1" smtClean="0">
+                                <a:rPr lang="pt-BR" sz="1600" i="1">
                                   <a:latin typeface="Cambria Math" panose="02040503050406030204" pitchFamily="18" charset="0"/>
                                 </a:rPr>
                               </m:ctrlPr>
@@ -18127,7 +17929,7 @@
                   <p:cNvPr id="17" name="CaixaDeTexto 17">
                     <a:extLst>
                       <a:ext uri="{FF2B5EF4-FFF2-40B4-BE49-F238E27FC236}">
-                        <a16:creationId xmlns:a16="http://schemas.microsoft.com/office/drawing/2014/main" xmlns="" id="{E842A6BA-1A35-A84A-B1B8-54B2C0A49661}"/>
+                        <a16:creationId xmlns:a16="http://schemas.microsoft.com/office/drawing/2014/main" id="{E842A6BA-1A35-A84A-B1B8-54B2C0A49661}"/>
                       </a:ext>
                     </a:extLst>
                   </p:cNvPr>
@@ -18153,14 +17955,11 @@
                     <a:pPr/>
                     <a14:m>
                       <m:oMathPara xmlns:m="http://schemas.openxmlformats.org/officeDocument/2006/math">
-                        <m:oMathParaPr>
-                          <m:jc m:val="centerGroup"/>
-                        </m:oMathParaPr>
-                        <m:oMath xmlns:m="http://schemas.openxmlformats.org/officeDocument/2006/math">
+                        <m:oMath>
                           <m:sSub>
                             <m:sSubPr>
                               <m:ctrlPr>
-                                <a:rPr lang="pt-BR" sz="1600" i="1" smtClean="0">
+                                <a:rPr lang="pt-BR" sz="1600" i="1">
                                   <a:latin typeface="Cambria Math" panose="02040503050406030204" pitchFamily="18" charset="0"/>
                                 </a:rPr>
                               </m:ctrlPr>
@@ -18260,7 +18059,7 @@
                   <p:cNvPr id="18" name="CaixaDeTexto 18">
                     <a:extLst>
                       <a:ext uri="{FF2B5EF4-FFF2-40B4-BE49-F238E27FC236}">
-                        <a16:creationId xmlns:a16="http://schemas.microsoft.com/office/drawing/2014/main" xmlns="" id="{AE06ADE1-A3FE-3684-A19B-1A4A69C1E4AB}"/>
+                        <a16:creationId xmlns:a16="http://schemas.microsoft.com/office/drawing/2014/main" id="{AE06ADE1-A3FE-3684-A19B-1A4A69C1E4AB}"/>
                       </a:ext>
                     </a:extLst>
                   </p:cNvPr>
@@ -18286,14 +18085,11 @@
                     <a:pPr/>
                     <a14:m>
                       <m:oMathPara xmlns:m="http://schemas.openxmlformats.org/officeDocument/2006/math">
-                        <m:oMathParaPr>
-                          <m:jc m:val="centerGroup"/>
-                        </m:oMathParaPr>
-                        <m:oMath xmlns:m="http://schemas.openxmlformats.org/officeDocument/2006/math">
+                        <m:oMath>
                           <m:sSub>
                             <m:sSubPr>
                               <m:ctrlPr>
-                                <a:rPr lang="pt-BR" sz="1600" i="1" smtClean="0">
+                                <a:rPr lang="pt-BR" sz="1600" i="1">
                                   <a:latin typeface="Cambria Math" panose="02040503050406030204" pitchFamily="18" charset="0"/>
                                 </a:rPr>
                               </m:ctrlPr>
@@ -18409,7 +18205,7 @@
         <p:cNvPr id="1" name="">
           <a:extLst>
             <a:ext uri="{FF2B5EF4-FFF2-40B4-BE49-F238E27FC236}">
-              <a16:creationId xmlns:a16="http://schemas.microsoft.com/office/drawing/2014/main" xmlns="" id="{5C4572DC-35C8-C64C-E103-3D4F9246EA98}"/>
+              <a16:creationId xmlns:a16="http://schemas.microsoft.com/office/drawing/2014/main" id="{5C4572DC-35C8-C64C-E103-3D4F9246EA98}"/>
             </a:ext>
           </a:extLst>
         </p:cNvPr>
@@ -18429,7 +18225,7 @@
           <p:cNvPr id="36" name="Group 35">
             <a:extLst>
               <a:ext uri="{FF2B5EF4-FFF2-40B4-BE49-F238E27FC236}">
-                <a16:creationId xmlns:a16="http://schemas.microsoft.com/office/drawing/2014/main" xmlns="" id="{48F378AC-D060-0026-4561-6496453280FF}"/>
+                <a16:creationId xmlns:a16="http://schemas.microsoft.com/office/drawing/2014/main" id="{48F378AC-D060-0026-4561-6496453280FF}"/>
               </a:ext>
             </a:extLst>
           </p:cNvPr>
@@ -18451,7 +18247,7 @@
                 <p:cNvPr id="5" name="CaixaDeTexto 5">
                   <a:extLst>
                     <a:ext uri="{FF2B5EF4-FFF2-40B4-BE49-F238E27FC236}">
-                      <a16:creationId xmlns:a16="http://schemas.microsoft.com/office/drawing/2014/main" xmlns="" id="{E8D0D67D-860E-2510-92FC-57A520894F28}"/>
+                      <a16:creationId xmlns:a16="http://schemas.microsoft.com/office/drawing/2014/main" id="{E8D0D67D-860E-2510-92FC-57A520894F28}"/>
                     </a:ext>
                   </a:extLst>
                 </p:cNvPr>
@@ -18477,10 +18273,7 @@
                   <a:pPr/>
                   <a14:m>
                     <m:oMathPara xmlns:m="http://schemas.openxmlformats.org/officeDocument/2006/math">
-                      <m:oMathParaPr>
-                        <m:jc m:val="centerGroup"/>
-                      </m:oMathParaPr>
-                      <m:oMath xmlns:m="http://schemas.openxmlformats.org/officeDocument/2006/math">
+                      <m:oMath>
                         <m:d>
                           <m:dPr>
                             <m:begChr m:val="["/>
@@ -18658,7 +18451,7 @@
             <p:cNvPr id="9" name="CaixaDeTexto 10">
               <a:extLst>
                 <a:ext uri="{FF2B5EF4-FFF2-40B4-BE49-F238E27FC236}">
-                  <a16:creationId xmlns:a16="http://schemas.microsoft.com/office/drawing/2014/main" xmlns="" id="{E297B5F7-3383-6E2F-1D8A-03955FAC43D2}"/>
+                  <a16:creationId xmlns:a16="http://schemas.microsoft.com/office/drawing/2014/main" id="{E297B5F7-3383-6E2F-1D8A-03955FAC43D2}"/>
                 </a:ext>
               </a:extLst>
             </p:cNvPr>
@@ -18708,7 +18501,7 @@
                 <p:cNvPr id="12" name="CaixaDeTexto 4">
                   <a:extLst>
                     <a:ext uri="{FF2B5EF4-FFF2-40B4-BE49-F238E27FC236}">
-                      <a16:creationId xmlns:a16="http://schemas.microsoft.com/office/drawing/2014/main" xmlns="" id="{2C8DDC51-3A16-5E93-8268-EE62BDE151E0}"/>
+                      <a16:creationId xmlns:a16="http://schemas.microsoft.com/office/drawing/2014/main" id="{2C8DDC51-3A16-5E93-8268-EE62BDE151E0}"/>
                     </a:ext>
                   </a:extLst>
                 </p:cNvPr>
@@ -18734,10 +18527,7 @@
                   <a:pPr/>
                   <a14:m>
                     <m:oMathPara xmlns:m="http://schemas.openxmlformats.org/officeDocument/2006/math">
-                      <m:oMathParaPr>
-                        <m:jc m:val="centerGroup"/>
-                      </m:oMathParaPr>
-                      <m:oMath xmlns:m="http://schemas.openxmlformats.org/officeDocument/2006/math">
+                      <m:oMath>
                         <m:d>
                           <m:dPr>
                             <m:begChr m:val="["/>
@@ -18897,7 +18687,7 @@
             <p:cNvPr id="2" name="Rectangle 1">
               <a:extLst>
                 <a:ext uri="{FF2B5EF4-FFF2-40B4-BE49-F238E27FC236}">
-                  <a16:creationId xmlns:a16="http://schemas.microsoft.com/office/drawing/2014/main" xmlns="" id="{EB611083-738F-80C1-2BA7-92EDB40EFB94}"/>
+                  <a16:creationId xmlns:a16="http://schemas.microsoft.com/office/drawing/2014/main" id="{EB611083-738F-80C1-2BA7-92EDB40EFB94}"/>
                 </a:ext>
               </a:extLst>
             </p:cNvPr>
@@ -18961,7 +18751,7 @@
             <p:cNvPr id="3" name="CaixaDeTexto 10">
               <a:extLst>
                 <a:ext uri="{FF2B5EF4-FFF2-40B4-BE49-F238E27FC236}">
-                  <a16:creationId xmlns:a16="http://schemas.microsoft.com/office/drawing/2014/main" xmlns="" id="{F0E4EAFE-2F57-D46C-B71A-FC2B97DD9DC3}"/>
+                  <a16:creationId xmlns:a16="http://schemas.microsoft.com/office/drawing/2014/main" id="{F0E4EAFE-2F57-D46C-B71A-FC2B97DD9DC3}"/>
                 </a:ext>
               </a:extLst>
             </p:cNvPr>
@@ -19009,7 +18799,7 @@
             <p:cNvPr id="22" name="Straight Arrow Connector 21">
               <a:extLst>
                 <a:ext uri="{FF2B5EF4-FFF2-40B4-BE49-F238E27FC236}">
-                  <a16:creationId xmlns:a16="http://schemas.microsoft.com/office/drawing/2014/main" xmlns="" id="{8F2714CA-3421-42C2-2575-C2D5DB1B504D}"/>
+                  <a16:creationId xmlns:a16="http://schemas.microsoft.com/office/drawing/2014/main" id="{8F2714CA-3421-42C2-2575-C2D5DB1B504D}"/>
                 </a:ext>
               </a:extLst>
             </p:cNvPr>
@@ -19055,7 +18845,7 @@
             <p:cNvPr id="29" name="Straight Arrow Connector 28">
               <a:extLst>
                 <a:ext uri="{FF2B5EF4-FFF2-40B4-BE49-F238E27FC236}">
-                  <a16:creationId xmlns:a16="http://schemas.microsoft.com/office/drawing/2014/main" xmlns="" id="{4613A6D9-EABC-0CE5-50B4-C1C9AA047D5D}"/>
+                  <a16:creationId xmlns:a16="http://schemas.microsoft.com/office/drawing/2014/main" id="{4613A6D9-EABC-0CE5-50B4-C1C9AA047D5D}"/>
                 </a:ext>
               </a:extLst>
             </p:cNvPr>
@@ -19291,7 +19081,7 @@
           <p:cNvPr id="7" name="Picture 2" descr="Ana Barros (@anathinker) | Twitter">
             <a:extLst>
               <a:ext uri="{FF2B5EF4-FFF2-40B4-BE49-F238E27FC236}">
-                <a16:creationId xmlns:a16="http://schemas.microsoft.com/office/drawing/2014/main" xmlns="" id="{A2D479C7-0684-420F-2CCD-64C3DB79FDAB}"/>
+                <a16:creationId xmlns:a16="http://schemas.microsoft.com/office/drawing/2014/main" id="{A2D479C7-0684-420F-2CCD-64C3DB79FDAB}"/>
               </a:ext>
             </a:extLst>
           </p:cNvPr>
@@ -19338,7 +19128,7 @@
           <p:cNvPr id="8" name="Picture 6" descr="Analyzing Text Classification Techniques on Youtube Data">
             <a:extLst>
               <a:ext uri="{FF2B5EF4-FFF2-40B4-BE49-F238E27FC236}">
-                <a16:creationId xmlns:a16="http://schemas.microsoft.com/office/drawing/2014/main" xmlns="" id="{A59F8A2C-ACDF-09C7-B528-9064CEF3B848}"/>
+                <a16:creationId xmlns:a16="http://schemas.microsoft.com/office/drawing/2014/main" id="{A59F8A2C-ACDF-09C7-B528-9064CEF3B848}"/>
               </a:ext>
             </a:extLst>
           </p:cNvPr>
@@ -19383,7 +19173,7 @@
           <p:cNvPr id="9" name="Picture 2" descr="Sentiment Fig 1">
             <a:extLst>
               <a:ext uri="{FF2B5EF4-FFF2-40B4-BE49-F238E27FC236}">
-                <a16:creationId xmlns:a16="http://schemas.microsoft.com/office/drawing/2014/main" xmlns="" id="{E178FF16-CC3F-C34B-6C8B-874BC4FA61A4}"/>
+                <a16:creationId xmlns:a16="http://schemas.microsoft.com/office/drawing/2014/main" id="{E178FF16-CC3F-C34B-6C8B-874BC4FA61A4}"/>
               </a:ext>
             </a:extLst>
           </p:cNvPr>
@@ -19460,7 +19250,7 @@
           <p:cNvPr id="2" name="Título 1">
             <a:extLst>
               <a:ext uri="{FF2B5EF4-FFF2-40B4-BE49-F238E27FC236}">
-                <a16:creationId xmlns:a16="http://schemas.microsoft.com/office/drawing/2014/main" xmlns="" id="{B022D379-CAA0-9DC9-CDBD-6E0EBE1BFF31}"/>
+                <a16:creationId xmlns:a16="http://schemas.microsoft.com/office/drawing/2014/main" id="{B022D379-CAA0-9DC9-CDBD-6E0EBE1BFF31}"/>
               </a:ext>
             </a:extLst>
           </p:cNvPr>
@@ -19487,14 +19277,14 @@
           </a:p>
         </p:txBody>
       </p:sp>
-      <mc:AlternateContent xmlns:mc="http://schemas.openxmlformats.org/markup-compatibility/2006" xmlns:a14="http://schemas.microsoft.com/office/drawing/2010/main">
-        <mc:Choice Requires="a14">
+      <mc:AlternateContent xmlns:mc="http://schemas.openxmlformats.org/markup-compatibility/2006">
+        <mc:Choice xmlns:a14="http://schemas.microsoft.com/office/drawing/2010/main" Requires="a14">
           <p:sp>
             <p:nvSpPr>
               <p:cNvPr id="3" name="Espaço Reservado para Conteúdo 2">
                 <a:extLst>
                   <a:ext uri="{FF2B5EF4-FFF2-40B4-BE49-F238E27FC236}">
-                    <a16:creationId xmlns:a16="http://schemas.microsoft.com/office/drawing/2014/main" xmlns="" id="{B68F0D74-8673-A432-A1D7-BDEF7725851A}"/>
+                    <a16:creationId xmlns:a16="http://schemas.microsoft.com/office/drawing/2014/main" id="{B68F0D74-8673-A432-A1D7-BDEF7725851A}"/>
                   </a:ext>
                 </a:extLst>
               </p:cNvPr>
@@ -19519,7 +19309,15 @@
               <a:p>
                 <a:r>
                   <a:rPr lang="pt-BR" dirty="0"/>
-                  <a:t>Também conhecida como </a:t>
+                  <a:t>A regressão </a:t>
+                </a:r>
+                <a:r>
+                  <a:rPr lang="pt-BR" i="1" dirty="0"/>
+                  <a:t>softmax</a:t>
+                </a:r>
+                <a:r>
+                  <a:rPr lang="pt-BR" dirty="0"/>
+                  <a:t> é também conhecida como </a:t>
                 </a:r>
                 <a:r>
                   <a:rPr lang="pt-BR" b="1" dirty="0"/>
@@ -19537,7 +19335,7 @@
                 </a:pPr>
                 <a:r>
                   <a:rPr lang="pt-BR" dirty="0"/>
-                  <a:t>Pois suas saídas podem ser interpretadas como as </a:t>
+                  <a:t>Pois as saídas do regressor podem ser interpretadas como as </a:t>
                 </a:r>
                 <a:r>
                   <a:rPr lang="pt-BR" b="1" dirty="0">
@@ -19545,15 +19343,7 @@
                       <a:srgbClr val="00B050"/>
                     </a:solidFill>
                   </a:rPr>
-                  <a:t>probabilidades </a:t>
-                </a:r>
-                <a:r>
-                  <a:rPr lang="pt-BR" b="1" dirty="0" smtClean="0">
-                    <a:solidFill>
-                      <a:srgbClr val="00B050"/>
-                    </a:solidFill>
-                  </a:rPr>
-                  <a:t>condicionais das </a:t>
+                  <a:t>probabilidades condicionais das </a:t>
                 </a:r>
                 <a14:m>
                   <m:oMath xmlns:m="http://schemas.openxmlformats.org/officeDocument/2006/math">
@@ -19569,7 +19359,7 @@
                   </m:oMath>
                 </a14:m>
                 <a:r>
-                  <a:rPr lang="pt-BR" b="1" dirty="0" smtClean="0">
+                  <a:rPr lang="pt-BR" b="1" dirty="0">
                     <a:solidFill>
                       <a:srgbClr val="00B050"/>
                     </a:solidFill>
@@ -19583,12 +19373,8 @@
                   <a:buChar char="§"/>
                 </a:pPr>
                 <a:r>
-                  <a:rPr lang="pt-BR" dirty="0" smtClean="0"/>
-                  <a:t>Ou </a:t>
-                </a:r>
-                <a:r>
-                  <a:rPr lang="pt-BR" dirty="0"/>
-                  <a:t>seja, a regressão </a:t>
+                  <a:rPr lang="pt-BR" dirty="0"/>
+                  <a:t>Ou seja, a regressão </a:t>
                 </a:r>
                 <a:r>
                   <a:rPr lang="pt-BR" b="1" i="1" dirty="0">
@@ -19763,13 +19549,13 @@
             </p:txBody>
           </p:sp>
         </mc:Choice>
-        <mc:Fallback xmlns="">
+        <mc:Fallback>
           <p:sp>
             <p:nvSpPr>
               <p:cNvPr id="3" name="Espaço Reservado para Conteúdo 2">
                 <a:extLst>
                   <a:ext uri="{FF2B5EF4-FFF2-40B4-BE49-F238E27FC236}">
-                    <a16:creationId xmlns:a16="http://schemas.microsoft.com/office/drawing/2014/main" xmlns:a14="http://schemas.microsoft.com/office/drawing/2010/main" xmlns="" id="{B68F0D74-8673-A432-A1D7-BDEF7725851A}"/>
+                    <a16:creationId xmlns:a16="http://schemas.microsoft.com/office/drawing/2014/main" id="{B68F0D74-8673-A432-A1D7-BDEF7725851A}"/>
                   </a:ext>
                 </a:extLst>
               </p:cNvPr>
@@ -19785,7 +19571,7 @@
                 <a:off x="838199" y="1825624"/>
                 <a:ext cx="11353801" cy="5032375"/>
               </a:xfrm>
-              <a:blipFill rotWithShape="0">
+              <a:blipFill>
                 <a:blip r:embed="rId3"/>
                 <a:stretch>
                   <a:fillRect l="-913" t="-1937"/>
@@ -19797,7 +19583,7 @@
               <a:lstStyle/>
               <a:p>
                 <a:r>
-                  <a:rPr lang="pt-BR">
+                  <a:rPr lang="en-US">
                     <a:noFill/>
                   </a:rPr>
                   <a:t> </a:t>
@@ -19842,7 +19628,7 @@
           <p:cNvPr id="2" name="Título 1">
             <a:extLst>
               <a:ext uri="{FF2B5EF4-FFF2-40B4-BE49-F238E27FC236}">
-                <a16:creationId xmlns:a16="http://schemas.microsoft.com/office/drawing/2014/main" xmlns="" id="{519F0958-530D-D942-BA01-15C1583DD1E6}"/>
+                <a16:creationId xmlns:a16="http://schemas.microsoft.com/office/drawing/2014/main" id="{519F0958-530D-D942-BA01-15C1583DD1E6}"/>
               </a:ext>
             </a:extLst>
           </p:cNvPr>
@@ -19876,7 +19662,7 @@
               <p:cNvPr id="3" name="Espaço Reservado para Conteúdo 2">
                 <a:extLst>
                   <a:ext uri="{FF2B5EF4-FFF2-40B4-BE49-F238E27FC236}">
-                    <a16:creationId xmlns:a16="http://schemas.microsoft.com/office/drawing/2014/main" xmlns="" id="{21416F72-28FB-E27C-D129-16A944A87C67}"/>
+                    <a16:creationId xmlns:a16="http://schemas.microsoft.com/office/drawing/2014/main" id="{21416F72-28FB-E27C-D129-16A944A87C67}"/>
                   </a:ext>
                 </a:extLst>
               </p:cNvPr>
@@ -19945,19 +19731,29 @@
                       <a:schemeClr val="accent2"/>
                     </a:solidFill>
                   </a:rPr>
-                  <a:t>mutuamente </a:t>
-                </a:r>
-                <a:r>
-                  <a:rPr lang="pt-BR" b="1" dirty="0" smtClean="0">
-                    <a:solidFill>
-                      <a:schemeClr val="accent2"/>
-                    </a:solidFill>
-                  </a:rPr>
-                  <a:t>exclusivas</a:t>
-                </a:r>
-                <a:r>
-                  <a:rPr lang="pt-BR" dirty="0" smtClean="0"/>
+                  <a:t>mutuamente exclusivas</a:t>
+                </a:r>
+                <a:r>
+                  <a:rPr lang="pt-BR" dirty="0"/>
                   <a:t>.</a:t>
+                </a:r>
+              </a:p>
+              <a:p>
+                <a:pPr lvl="1">
+                  <a:buFont typeface="Wingdings" panose="05000000000000000000" pitchFamily="2" charset="2"/>
+                  <a:buChar char="§"/>
+                </a:pPr>
+                <a:r>
+                  <a:rPr lang="pt-BR" b="1" dirty="0"/>
+                  <a:t>Classes mutuamente exclusivas</a:t>
+                </a:r>
+                <a:r>
+                  <a:rPr lang="pt-BR" dirty="0"/>
+                  <a:t> são classes que </a:t>
+                </a:r>
+                <a:r>
+                  <a:rPr lang="pt-BR" b="1" dirty="0"/>
+                  <a:t>não podem ocorrer simultaneamente para o mesmo exemplo.</a:t>
                 </a:r>
                 <a:endParaRPr lang="pt-BR" dirty="0"/>
               </a:p>
@@ -19967,34 +19763,9 @@
                   <a:buChar char="§"/>
                 </a:pPr>
                 <a:r>
-                  <a:rPr lang="pt-BR" b="1" dirty="0"/>
-                  <a:t>Classes mutuamente </a:t>
-                </a:r>
-                <a:r>
-                  <a:rPr lang="pt-BR" b="1" dirty="0" smtClean="0"/>
-                  <a:t>exclusivas</a:t>
-                </a:r>
-                <a:r>
-                  <a:rPr lang="pt-BR" dirty="0"/>
-                  <a:t> </a:t>
-                </a:r>
-                <a:r>
-                  <a:rPr lang="pt-BR" dirty="0" smtClean="0"/>
-                  <a:t>são classes </a:t>
-                </a:r>
-                <a:r>
-                  <a:rPr lang="pt-BR" dirty="0"/>
-                  <a:t>que </a:t>
-                </a:r>
-                <a:r>
-                  <a:rPr lang="pt-BR" b="1" dirty="0"/>
-                  <a:t>não podem ocorrer simultaneamente para </a:t>
-                </a:r>
-                <a:r>
-                  <a:rPr lang="pt-BR" b="1" dirty="0" smtClean="0"/>
-                  <a:t>o mesmo exemplo.</a:t>
-                </a:r>
-                <a:endParaRPr lang="pt-BR" dirty="0" smtClean="0"/>
+                  <a:rPr lang="pt-BR" dirty="0"/>
+                  <a:t>Suponham que queremos classificar uma imagem em Cachorro, Gato e Coelho.</a:t>
+                </a:r>
               </a:p>
               <a:p>
                 <a:pPr lvl="1">
@@ -20003,37 +19774,6 @@
                 </a:pPr>
                 <a:r>
                   <a:rPr lang="pt-BR" dirty="0"/>
-                  <a:t>S</a:t>
-                </a:r>
-                <a:r>
-                  <a:rPr lang="pt-BR" dirty="0" smtClean="0"/>
-                  <a:t>uponham </a:t>
-                </a:r>
-                <a:r>
-                  <a:rPr lang="pt-BR" dirty="0"/>
-                  <a:t>que queremos classificar uma </a:t>
-                </a:r>
-                <a:r>
-                  <a:rPr lang="pt-BR" dirty="0" smtClean="0"/>
-                  <a:t>imagem em Cachorro, </a:t>
-                </a:r>
-                <a:r>
-                  <a:rPr lang="pt-BR" dirty="0"/>
-                  <a:t>Gato </a:t>
-                </a:r>
-                <a:r>
-                  <a:rPr lang="pt-BR" dirty="0" smtClean="0"/>
-                  <a:t>e Coelho.</a:t>
-                </a:r>
-                <a:endParaRPr lang="pt-BR" dirty="0"/>
-              </a:p>
-              <a:p>
-                <a:pPr lvl="1">
-                  <a:buFont typeface="Wingdings" panose="05000000000000000000" pitchFamily="2" charset="2"/>
-                  <a:buChar char="§"/>
-                </a:pPr>
-                <a:r>
-                  <a:rPr lang="pt-BR" dirty="0"/>
                   <a:t>Se estamos fazendo </a:t>
                 </a:r>
                 <a:r>
@@ -20042,22 +19782,14 @@
                 </a:r>
                 <a:r>
                   <a:rPr lang="pt-BR" dirty="0"/>
-                  <a:t>, uma determinada imagem só pode </a:t>
-                </a:r>
-                <a:r>
-                  <a:rPr lang="pt-BR" dirty="0" smtClean="0"/>
-                  <a:t>receber </a:t>
-                </a:r>
-                <a:r>
-                  <a:rPr lang="pt-BR" b="1" dirty="0" smtClean="0"/>
-                  <a:t>uma </a:t>
+                  <a:t>, uma determinada imagem só pode receber </a:t>
                 </a:r>
                 <a:r>
                   <a:rPr lang="pt-BR" b="1" dirty="0"/>
-                  <a:t>dessas classes</a:t>
-                </a:r>
-                <a:r>
-                  <a:rPr lang="pt-BR" dirty="0" smtClean="0"/>
+                  <a:t>uma dessas classes</a:t>
+                </a:r>
+                <a:r>
+                  <a:rPr lang="pt-BR" dirty="0"/>
                   <a:t>.</a:t>
                 </a:r>
               </a:p>
@@ -20095,7 +19827,7 @@
                     <m:sSubSup>
                       <m:sSubSupPr>
                         <m:ctrlPr>
-                          <a:rPr lang="pt-BR" b="1" i="1">
+                          <a:rPr lang="pt-BR" i="1">
                             <a:latin typeface="Cambria Math" panose="02040503050406030204" pitchFamily="18" charset="0"/>
                           </a:rPr>
                         </m:ctrlPr>
@@ -20105,7 +19837,7 @@
                           <a:rPr lang="pt-BR" i="1">
                             <a:latin typeface="Cambria Math" panose="02040503050406030204" pitchFamily="18" charset="0"/>
                           </a:rPr>
-                          <m:t>h</m:t>
+                          <m:t>ℎ</m:t>
                         </m:r>
                       </m:e>
                       <m:sub>
@@ -20128,7 +19860,7 @@
                     <m:d>
                       <m:dPr>
                         <m:ctrlPr>
-                          <a:rPr lang="pt-BR" i="1">
+                          <a:rPr lang="pt-BR" b="1" i="1">
                             <a:latin typeface="Cambria Math" panose="02040503050406030204" pitchFamily="18" charset="0"/>
                           </a:rPr>
                         </m:ctrlPr>
@@ -20143,7 +19875,7 @@
                         <m:d>
                           <m:dPr>
                             <m:ctrlPr>
-                              <a:rPr lang="pt-BR" b="1" i="1">
+                              <a:rPr lang="pt-BR" b="0" i="1" smtClean="0">
                                 <a:latin typeface="Cambria Math" panose="02040503050406030204" pitchFamily="18" charset="0"/>
                               </a:rPr>
                             </m:ctrlPr>
@@ -20162,12 +19894,8 @@
                   </m:oMath>
                 </a14:m>
                 <a:r>
-                  <a:rPr lang="pt-BR" dirty="0" smtClean="0"/>
-                  <a:t>, </a:t>
-                </a:r>
-                <a:r>
-                  <a:rPr lang="pt-BR" dirty="0"/>
-                  <a:t>e, consequentemente, </a:t>
+                  <a:rPr lang="pt-BR" dirty="0"/>
+                  <a:t>, e, consequentemente, </a:t>
                 </a:r>
                 <a:r>
                   <a:rPr lang="pt-BR" b="1" dirty="0">
@@ -20247,7 +19975,7 @@
                   </m:oMath>
                 </a14:m>
                 <a:r>
-                  <a:rPr lang="pt-BR" dirty="0" smtClean="0"/>
+                  <a:rPr lang="pt-BR" dirty="0"/>
                   <a:t>, </a:t>
                 </a:r>
                 <a:r>
@@ -20351,7 +20079,6 @@
                   <a:rPr lang="pt-BR" dirty="0"/>
                   <a:t>.</a:t>
                 </a:r>
-                <a:endParaRPr lang="pt-BR" dirty="0" smtClean="0"/>
               </a:p>
               <a:p>
                 <a:r>
@@ -20388,10 +20115,9 @@
                   </m:oMath>
                 </a14:m>
                 <a:r>
-                  <a:rPr lang="pt-BR" dirty="0" smtClean="0"/>
+                  <a:rPr lang="pt-BR" dirty="0"/>
                   <a:t>.</a:t>
                 </a:r>
-                <a:endParaRPr lang="pt-BR" dirty="0"/>
               </a:p>
             </p:txBody>
           </p:sp>
@@ -20475,7 +20201,7 @@
           <p:cNvPr id="2" name="Título 1">
             <a:extLst>
               <a:ext uri="{FF2B5EF4-FFF2-40B4-BE49-F238E27FC236}">
-                <a16:creationId xmlns:a16="http://schemas.microsoft.com/office/drawing/2014/main" xmlns="" id="{DCD47F25-5DD1-794E-8733-BFD771A2DE49}"/>
+                <a16:creationId xmlns:a16="http://schemas.microsoft.com/office/drawing/2014/main" id="{DCD47F25-5DD1-794E-8733-BFD771A2DE49}"/>
               </a:ext>
             </a:extLst>
           </p:cNvPr>
@@ -20502,14 +20228,14 @@
           </a:p>
         </p:txBody>
       </p:sp>
-      <mc:AlternateContent xmlns:mc="http://schemas.openxmlformats.org/markup-compatibility/2006" xmlns:a14="http://schemas.microsoft.com/office/drawing/2010/main">
-        <mc:Choice Requires="a14">
+      <mc:AlternateContent xmlns:mc="http://schemas.openxmlformats.org/markup-compatibility/2006">
+        <mc:Choice xmlns:a14="http://schemas.microsoft.com/office/drawing/2010/main" Requires="a14">
           <p:sp>
             <p:nvSpPr>
               <p:cNvPr id="3" name="Espaço Reservado para Conteúdo 2">
                 <a:extLst>
                   <a:ext uri="{FF2B5EF4-FFF2-40B4-BE49-F238E27FC236}">
-                    <a16:creationId xmlns:a16="http://schemas.microsoft.com/office/drawing/2014/main" xmlns="" id="{D79BB7DC-99E7-8958-EC77-566B7E3C2BBB}"/>
+                    <a16:creationId xmlns:a16="http://schemas.microsoft.com/office/drawing/2014/main" id="{D79BB7DC-99E7-8958-EC77-566B7E3C2BBB}"/>
                   </a:ext>
                 </a:extLst>
               </p:cNvPr>
@@ -20533,7 +20259,7 @@
               <a:lstStyle/>
               <a:p>
                 <a:r>
-                  <a:rPr lang="pt-BR" dirty="0" smtClean="0"/>
+                  <a:rPr lang="pt-BR" dirty="0"/>
                   <a:t>A </a:t>
                 </a:r>
                 <a:r>
@@ -20579,7 +20305,7 @@
                     <m:sSubSup>
                       <m:sSubSupPr>
                         <m:ctrlPr>
-                          <a:rPr lang="pt-BR" b="1" i="1">
+                          <a:rPr lang="pt-BR" i="1">
                             <a:latin typeface="Cambria Math" panose="02040503050406030204" pitchFamily="18" charset="0"/>
                           </a:rPr>
                         </m:ctrlPr>
@@ -20589,7 +20315,7 @@
                           <a:rPr lang="pt-BR" i="1">
                             <a:latin typeface="Cambria Math" panose="02040503050406030204" pitchFamily="18" charset="0"/>
                           </a:rPr>
-                          <m:t>h</m:t>
+                          <m:t>ℎ</m:t>
                         </m:r>
                       </m:e>
                       <m:sub>
@@ -20612,7 +20338,7 @@
                     <m:d>
                       <m:dPr>
                         <m:ctrlPr>
-                          <a:rPr lang="pt-BR" i="1">
+                          <a:rPr lang="pt-BR" b="1" i="1">
                             <a:latin typeface="Cambria Math" panose="02040503050406030204" pitchFamily="18" charset="0"/>
                           </a:rPr>
                         </m:ctrlPr>
@@ -20627,7 +20353,7 @@
                         <m:d>
                           <m:dPr>
                             <m:ctrlPr>
-                              <a:rPr lang="pt-BR" b="1" i="1">
+                              <a:rPr lang="pt-BR" b="0" i="1" smtClean="0">
                                 <a:latin typeface="Cambria Math" panose="02040503050406030204" pitchFamily="18" charset="0"/>
                               </a:rPr>
                             </m:ctrlPr>
@@ -20653,37 +20379,15 @@
                 </a14:m>
                 <a:r>
                   <a:rPr lang="pt-BR" dirty="0"/>
-                  <a:t> é obtida passando-se a </a:t>
+                  <a:t> é obtida passando-se sua </a:t>
                 </a:r>
                 <a:r>
                   <a:rPr lang="pt-BR" b="1" dirty="0"/>
-                  <a:t>função discriminante </a:t>
-                </a:r>
-                <a:r>
-                  <a:rPr lang="pt-BR" dirty="0"/>
-                  <a:t>da </a:t>
-                </a:r>
-                <a14:m>
-                  <m:oMath xmlns:m="http://schemas.openxmlformats.org/officeDocument/2006/math">
-                    <m:r>
-                      <a:rPr lang="pt-BR" i="1">
-                        <a:latin typeface="Cambria Math" panose="02040503050406030204" pitchFamily="18" charset="0"/>
-                      </a:rPr>
-                      <m:t>𝑞</m:t>
-                    </m:r>
-                  </m:oMath>
-                </a14:m>
-                <a:r>
-                  <a:rPr lang="pt-BR" dirty="0"/>
-                  <a:t>-</a:t>
-                </a:r>
-                <a:r>
-                  <a:rPr lang="pt-BR" dirty="0" err="1"/>
-                  <a:t>ésima</a:t>
-                </a:r>
-                <a:r>
-                  <a:rPr lang="pt-BR" dirty="0"/>
-                  <a:t> classe, </a:t>
+                  <a:t>função discriminante</a:t>
+                </a:r>
+                <a:r>
+                  <a:rPr lang="pt-BR" dirty="0"/>
+                  <a:t>, </a:t>
                 </a:r>
                 <a14:m>
                   <m:oMath xmlns:m="http://schemas.openxmlformats.org/officeDocument/2006/math">
@@ -20781,10 +20485,7 @@
                 </a:pPr>
                 <a14:m>
                   <m:oMathPara xmlns:m="http://schemas.openxmlformats.org/officeDocument/2006/math">
-                    <m:oMathParaPr>
-                      <m:jc m:val="centerGroup"/>
-                    </m:oMathParaPr>
-                    <m:oMath xmlns:m="http://schemas.openxmlformats.org/officeDocument/2006/math">
+                    <m:oMath>
                       <m:r>
                         <a:rPr lang="pt-BR" i="1">
                           <a:latin typeface="Cambria Math" panose="02040503050406030204" pitchFamily="18" charset="0"/>
@@ -20852,7 +20553,7 @@
                           <m:d>
                             <m:dPr>
                               <m:ctrlPr>
-                                <a:rPr lang="pt-BR" b="1" i="1">
+                                <a:rPr lang="pt-BR" b="0" i="1" smtClean="0">
                                   <a:latin typeface="Cambria Math" panose="02040503050406030204" pitchFamily="18" charset="0"/>
                                 </a:rPr>
                               </m:ctrlPr>
@@ -20889,7 +20590,7 @@
                       <m:sSubSup>
                         <m:sSubSupPr>
                           <m:ctrlPr>
-                            <a:rPr lang="pt-BR" b="1" i="1">
+                            <a:rPr lang="pt-BR" i="1">
                               <a:latin typeface="Cambria Math" panose="02040503050406030204" pitchFamily="18" charset="0"/>
                             </a:rPr>
                           </m:ctrlPr>
@@ -20899,7 +20600,7 @@
                             <a:rPr lang="pt-BR" i="1">
                               <a:latin typeface="Cambria Math" panose="02040503050406030204" pitchFamily="18" charset="0"/>
                             </a:rPr>
-                            <m:t>h</m:t>
+                            <m:t>ℎ</m:t>
                           </m:r>
                         </m:e>
                         <m:sub>
@@ -20922,7 +20623,7 @@
                       <m:d>
                         <m:dPr>
                           <m:ctrlPr>
-                            <a:rPr lang="pt-BR" i="1">
+                            <a:rPr lang="pt-BR" b="1" i="1">
                               <a:latin typeface="Cambria Math" panose="02040503050406030204" pitchFamily="18" charset="0"/>
                             </a:rPr>
                           </m:ctrlPr>
@@ -20937,7 +20638,7 @@
                           <m:d>
                             <m:dPr>
                               <m:ctrlPr>
-                                <a:rPr lang="pt-BR" b="1" i="1">
+                                <a:rPr lang="pt-BR" b="0" i="1" smtClean="0">
                                   <a:latin typeface="Cambria Math" panose="02040503050406030204" pitchFamily="18" charset="0"/>
                                 </a:rPr>
                               </m:ctrlPr>
@@ -20971,7 +20672,7 @@
                           <m:sSup>
                             <m:sSupPr>
                               <m:ctrlPr>
-                                <a:rPr lang="pt-BR" b="1" i="1">
+                                <a:rPr lang="pt-BR" i="1">
                                   <a:latin typeface="Cambria Math" panose="02040503050406030204" pitchFamily="18" charset="0"/>
                                 </a:rPr>
                               </m:ctrlPr>
@@ -21054,7 +20755,7 @@
                             <m:naryPr>
                               <m:chr m:val="∑"/>
                               <m:ctrlPr>
-                                <a:rPr lang="pt-BR" b="1" i="1">
+                                <a:rPr lang="pt-BR" i="1">
                                   <a:latin typeface="Cambria Math" panose="02040503050406030204" pitchFamily="18" charset="0"/>
                                 </a:rPr>
                               </m:ctrlPr>
@@ -21091,7 +20792,7 @@
                               <m:sSup>
                                 <m:sSupPr>
                                   <m:ctrlPr>
-                                    <a:rPr lang="pt-BR" b="1" i="1">
+                                    <a:rPr lang="pt-BR" i="1">
                                       <a:latin typeface="Cambria Math" panose="02040503050406030204" pitchFamily="18" charset="0"/>
                                     </a:rPr>
                                   </m:ctrlPr>
@@ -21203,11 +20904,7 @@
                 </a:pPr>
                 <a:r>
                   <a:rPr lang="pt-BR" dirty="0"/>
-                  <a:t>o</a:t>
-                </a:r>
-                <a:r>
-                  <a:rPr lang="pt-BR" dirty="0" smtClean="0"/>
-                  <a:t>nde </a:t>
+                  <a:t>onde </a:t>
                 </a:r>
                 <a14:m>
                   <m:oMath xmlns:m="http://schemas.openxmlformats.org/officeDocument/2006/math">
@@ -21269,7 +20966,7 @@
                   </m:oMath>
                 </a14:m>
                 <a:r>
-                  <a:rPr lang="pt-BR" dirty="0" smtClean="0"/>
+                  <a:rPr lang="pt-BR" dirty="0"/>
                   <a:t> é a matriz contendo todos os </a:t>
                 </a:r>
                 <a14:m>
@@ -21284,11 +20981,11 @@
                   </m:oMath>
                 </a14:m>
                 <a:r>
-                  <a:rPr lang="pt-BR" dirty="0" smtClean="0"/>
+                  <a:rPr lang="pt-BR" dirty="0"/>
                   <a:t> vetores de pesos,</a:t>
                 </a:r>
                 <a:r>
-                  <a:rPr lang="pt-BR" i="1" dirty="0" smtClean="0"/>
+                  <a:rPr lang="pt-BR" i="1" dirty="0"/>
                   <a:t> </a:t>
                 </a:r>
                 <a14:m>
@@ -21692,12 +21389,8 @@
               </a:p>
               <a:p>
                 <a:r>
-                  <a:rPr lang="pt-BR" dirty="0" smtClean="0"/>
-                  <a:t>Além </a:t>
-                </a:r>
-                <a:r>
-                  <a:rPr lang="pt-BR" dirty="0"/>
-                  <a:t>do regressor </a:t>
+                  <a:rPr lang="pt-BR" dirty="0"/>
+                  <a:t>Além do regressor </a:t>
                 </a:r>
                 <a:r>
                   <a:rPr lang="pt-BR" i="1" dirty="0"/>
@@ -21758,13 +21451,13 @@
             </p:txBody>
           </p:sp>
         </mc:Choice>
-        <mc:Fallback xmlns="">
+        <mc:Fallback>
           <p:sp>
             <p:nvSpPr>
               <p:cNvPr id="3" name="Espaço Reservado para Conteúdo 2">
                 <a:extLst>
                   <a:ext uri="{FF2B5EF4-FFF2-40B4-BE49-F238E27FC236}">
-                    <a16:creationId xmlns="" xmlns:a16="http://schemas.microsoft.com/office/drawing/2014/main" xmlns:a14="http://schemas.microsoft.com/office/drawing/2010/main" id="{D79BB7DC-99E7-8958-EC77-566B7E3C2BBB}"/>
+                    <a16:creationId xmlns:a16="http://schemas.microsoft.com/office/drawing/2014/main" id="{D79BB7DC-99E7-8958-EC77-566B7E3C2BBB}"/>
                   </a:ext>
                 </a:extLst>
               </p:cNvPr>
@@ -21780,10 +21473,10 @@
                 <a:off x="838200" y="1825624"/>
                 <a:ext cx="11353800" cy="5032375"/>
               </a:xfrm>
-              <a:blipFill rotWithShape="0">
+              <a:blipFill>
                 <a:blip r:embed="rId3"/>
                 <a:stretch>
-                  <a:fillRect l="-1128" t="-1332" r="-859"/>
+                  <a:fillRect l="-1128" t="-1332" r="-1128"/>
                 </a:stretch>
               </a:blipFill>
             </p:spPr>
@@ -21792,7 +21485,7 @@
               <a:lstStyle/>
               <a:p>
                 <a:r>
-                  <a:rPr lang="pt-BR">
+                  <a:rPr lang="en-US">
                     <a:noFill/>
                   </a:rPr>
                   <a:t> </a:t>
@@ -21837,7 +21530,7 @@
           <p:cNvPr id="2" name="Título 1">
             <a:extLst>
               <a:ext uri="{FF2B5EF4-FFF2-40B4-BE49-F238E27FC236}">
-                <a16:creationId xmlns:a16="http://schemas.microsoft.com/office/drawing/2014/main" xmlns="" id="{52E3438D-F516-F1D3-A02F-51857586D07A}"/>
+                <a16:creationId xmlns:a16="http://schemas.microsoft.com/office/drawing/2014/main" id="{52E3438D-F516-F1D3-A02F-51857586D07A}"/>
               </a:ext>
             </a:extLst>
           </p:cNvPr>
@@ -21871,7 +21564,7 @@
               <p:cNvPr id="3" name="Espaço Reservado para Conteúdo 2">
                 <a:extLst>
                   <a:ext uri="{FF2B5EF4-FFF2-40B4-BE49-F238E27FC236}">
-                    <a16:creationId xmlns:a16="http://schemas.microsoft.com/office/drawing/2014/main" xmlns="" id="{BCAAD57B-65A0-9DAD-79FC-2AE2692EB84B}"/>
+                    <a16:creationId xmlns:a16="http://schemas.microsoft.com/office/drawing/2014/main" id="{BCAAD57B-65A0-9DAD-79FC-2AE2692EB84B}"/>
                   </a:ext>
                 </a:extLst>
               </p:cNvPr>
@@ -21895,7 +21588,7 @@
               <a:lstStyle/>
               <a:p>
                 <a:r>
-                  <a:rPr lang="pt-BR" dirty="0" smtClean="0"/>
+                  <a:rPr lang="pt-BR" dirty="0"/>
                   <a:t>É uma </a:t>
                 </a:r>
                 <a:r>
@@ -21949,10 +21642,7 @@
                 </a:pPr>
                 <a14:m>
                   <m:oMathPara xmlns:m="http://schemas.openxmlformats.org/officeDocument/2006/math">
-                    <m:oMathParaPr>
-                      <m:jc m:val="centerGroup"/>
-                    </m:oMathParaPr>
-                    <m:oMath xmlns:m="http://schemas.openxmlformats.org/officeDocument/2006/math">
+                    <m:oMath>
                       <m:r>
                         <a:rPr lang="pt-BR" i="1">
                           <a:latin typeface="Cambria Math" panose="02040503050406030204" pitchFamily="18" charset="0"/>
@@ -22008,7 +21698,7 @@
                           <m:d>
                             <m:dPr>
                               <m:ctrlPr>
-                                <a:rPr lang="pt-BR" b="1" i="1">
+                                <a:rPr lang="pt-BR" b="0" i="1" smtClean="0">
                                   <a:latin typeface="Cambria Math" panose="02040503050406030204" pitchFamily="18" charset="0"/>
                                 </a:rPr>
                               </m:ctrlPr>
@@ -22045,7 +21735,7 @@
                       <m:sSubSup>
                         <m:sSubSupPr>
                           <m:ctrlPr>
-                            <a:rPr lang="pt-BR" b="1" i="1">
+                            <a:rPr lang="pt-BR" i="1">
                               <a:latin typeface="Cambria Math" panose="02040503050406030204" pitchFamily="18" charset="0"/>
                             </a:rPr>
                           </m:ctrlPr>
@@ -22055,7 +21745,7 @@
                             <a:rPr lang="pt-BR" i="1">
                               <a:latin typeface="Cambria Math" panose="02040503050406030204" pitchFamily="18" charset="0"/>
                             </a:rPr>
-                            <m:t>h</m:t>
+                            <m:t>ℎ</m:t>
                           </m:r>
                         </m:e>
                         <m:sub>
@@ -22078,7 +21768,7 @@
                       <m:d>
                         <m:dPr>
                           <m:ctrlPr>
-                            <a:rPr lang="pt-BR" i="1">
+                            <a:rPr lang="pt-BR" b="1" i="1">
                               <a:latin typeface="Cambria Math" panose="02040503050406030204" pitchFamily="18" charset="0"/>
                             </a:rPr>
                           </m:ctrlPr>
@@ -22093,7 +21783,7 @@
                           <m:d>
                             <m:dPr>
                               <m:ctrlPr>
-                                <a:rPr lang="pt-BR" b="1" i="1">
+                                <a:rPr lang="pt-BR" b="0" i="1" smtClean="0">
                                   <a:latin typeface="Cambria Math" panose="02040503050406030204" pitchFamily="18" charset="0"/>
                                 </a:rPr>
                               </m:ctrlPr>
@@ -22127,7 +21817,7 @@
                           <m:sSup>
                             <m:sSupPr>
                               <m:ctrlPr>
-                                <a:rPr lang="pt-BR" b="1" i="1">
+                                <a:rPr lang="pt-BR" i="1">
                                   <a:latin typeface="Cambria Math" panose="02040503050406030204" pitchFamily="18" charset="0"/>
                                 </a:rPr>
                               </m:ctrlPr>
@@ -22210,7 +21900,7 @@
                             <m:naryPr>
                               <m:chr m:val="∑"/>
                               <m:ctrlPr>
-                                <a:rPr lang="pt-BR" b="1" i="1">
+                                <a:rPr lang="pt-BR" i="1">
                                   <a:latin typeface="Cambria Math" panose="02040503050406030204" pitchFamily="18" charset="0"/>
                                 </a:rPr>
                               </m:ctrlPr>
@@ -22247,7 +21937,7 @@
                               <m:sSup>
                                 <m:sSupPr>
                                   <m:ctrlPr>
-                                    <a:rPr lang="pt-BR" b="1" i="1">
+                                    <a:rPr lang="pt-BR" i="1">
                                       <a:latin typeface="Cambria Math" panose="02040503050406030204" pitchFamily="18" charset="0"/>
                                     </a:rPr>
                                   </m:ctrlPr>
@@ -22354,9 +22044,8 @@
                           <m:begChr m:val="["/>
                           <m:endChr m:val="]"/>
                           <m:ctrlPr>
-                            <a:rPr lang="pt-BR" b="1" i="1">
+                            <a:rPr lang="pt-BR">
                               <a:latin typeface="Cambria Math" panose="02040503050406030204" pitchFamily="18" charset="0"/>
-                              <a:ea typeface="Cambria Math" panose="02040503050406030204" pitchFamily="18" charset="0"/>
                             </a:rPr>
                           </m:ctrlPr>
                         </m:dPr>
@@ -22435,18 +22124,10 @@
                       <a:srgbClr val="00B050"/>
                     </a:solidFill>
                   </a:rPr>
-                  <a:t> funções discriminantes </a:t>
-                </a:r>
-                <a:r>
-                  <a:rPr lang="pt-BR" b="1" dirty="0" smtClean="0">
-                    <a:solidFill>
-                      <a:srgbClr val="00B050"/>
-                    </a:solidFill>
-                  </a:rPr>
-                  <a:t>(chamados de pontuações) em </a:t>
-                </a:r>
-                <a:r>
-                  <a:rPr lang="pt-BR" b="1" dirty="0" smtClean="0">
+                  <a:t> funções discriminantes (chamados de pontuações) em </a:t>
+                </a:r>
+                <a:r>
+                  <a:rPr lang="pt-BR" b="1" dirty="0">
                     <a:solidFill>
                       <a:schemeClr val="accent2"/>
                     </a:solidFill>
@@ -22461,15 +22142,7 @@
               <a:p>
                 <a:r>
                   <a:rPr lang="pt-BR" dirty="0"/>
-                  <a:t>Assim</a:t>
-                </a:r>
-                <a:r>
-                  <a:rPr lang="pt-BR" dirty="0" smtClean="0"/>
-                  <a:t>, </a:t>
-                </a:r>
-                <a:r>
-                  <a:rPr lang="pt-BR" dirty="0"/>
-                  <a:t>ela </a:t>
+                  <a:t>Assim, ela </a:t>
                 </a:r>
                 <a:r>
                   <a:rPr lang="pt-BR" b="1" dirty="0">
@@ -22578,7 +22251,7 @@
                         <m:d>
                           <m:dPr>
                             <m:ctrlPr>
-                              <a:rPr lang="pt-BR" b="1" i="1">
+                              <a:rPr lang="pt-BR" i="1">
                                 <a:latin typeface="Cambria Math" panose="02040503050406030204" pitchFamily="18" charset="0"/>
                               </a:rPr>
                             </m:ctrlPr>
@@ -22670,11 +22343,7 @@
                 </a14:m>
                 <a:r>
                   <a:rPr lang="pt-BR" dirty="0"/>
-                  <a:t>classes dado um exemplo de </a:t>
-                </a:r>
-                <a:r>
-                  <a:rPr lang="pt-BR" dirty="0" smtClean="0"/>
-                  <a:t>entrada e os pesos.</a:t>
+                  <a:t>classes dado um exemplo de entrada e os pesos.</a:t>
                 </a:r>
                 <a:endParaRPr lang="pt-BR" b="1" dirty="0">
                   <a:solidFill>
@@ -22734,7 +22403,7 @@
           <p:cNvPr id="5" name="Rectangle 11">
             <a:extLst>
               <a:ext uri="{FF2B5EF4-FFF2-40B4-BE49-F238E27FC236}">
-                <a16:creationId xmlns:a16="http://schemas.microsoft.com/office/drawing/2014/main" xmlns="" id="{D1D7E603-A964-1188-9D09-B0C1E18592FA}"/>
+                <a16:creationId xmlns:a16="http://schemas.microsoft.com/office/drawing/2014/main" id="{D1D7E603-A964-1188-9D09-B0C1E18592FA}"/>
               </a:ext>
             </a:extLst>
           </p:cNvPr>
@@ -22816,7 +22485,7 @@
           <p:cNvPr id="2" name="Título 1">
             <a:extLst>
               <a:ext uri="{FF2B5EF4-FFF2-40B4-BE49-F238E27FC236}">
-                <a16:creationId xmlns:a16="http://schemas.microsoft.com/office/drawing/2014/main" xmlns="" id="{99DAA83A-B143-94BB-B48B-41A7423070CE}"/>
+                <a16:creationId xmlns:a16="http://schemas.microsoft.com/office/drawing/2014/main" id="{99DAA83A-B143-94BB-B48B-41A7423070CE}"/>
               </a:ext>
             </a:extLst>
           </p:cNvPr>
@@ -22844,14 +22513,14 @@
           </a:p>
         </p:txBody>
       </p:sp>
-      <mc:AlternateContent xmlns:mc="http://schemas.openxmlformats.org/markup-compatibility/2006" xmlns:a14="http://schemas.microsoft.com/office/drawing/2010/main">
-        <mc:Choice Requires="a14">
+      <mc:AlternateContent xmlns:mc="http://schemas.openxmlformats.org/markup-compatibility/2006">
+        <mc:Choice xmlns:a14="http://schemas.microsoft.com/office/drawing/2010/main" Requires="a14">
           <p:sp>
             <p:nvSpPr>
               <p:cNvPr id="3" name="Espaço Reservado para Conteúdo 2">
                 <a:extLst>
                   <a:ext uri="{FF2B5EF4-FFF2-40B4-BE49-F238E27FC236}">
-                    <a16:creationId xmlns:a16="http://schemas.microsoft.com/office/drawing/2014/main" xmlns="" id="{32DF54A1-52F5-C48C-7CD4-D6E451DF19D8}"/>
+                    <a16:creationId xmlns:a16="http://schemas.microsoft.com/office/drawing/2014/main" id="{32DF54A1-52F5-C48C-7CD4-D6E451DF19D8}"/>
                   </a:ext>
                 </a:extLst>
               </p:cNvPr>
@@ -23012,43 +22681,7 @@
                     </a:solidFill>
                     <a:effectLst/>
                   </a:rPr>
-                  <a:t>normaliza essas exponenciais </a:t>
-                </a:r>
-                <a:r>
-                  <a:rPr lang="pt-BR" b="0" i="0" dirty="0" smtClean="0">
-                    <a:solidFill>
-                      <a:schemeClr val="tx1"/>
-                    </a:solidFill>
-                    <a:effectLst/>
-                  </a:rPr>
-                  <a:t>dividindo-os </a:t>
-                </a:r>
-                <a:r>
-                  <a:rPr lang="pt-BR" b="0" i="0" dirty="0">
-                    <a:solidFill>
-                      <a:schemeClr val="tx1"/>
-                    </a:solidFill>
-                    <a:effectLst/>
-                  </a:rPr>
-                  <a:t>pela soma </a:t>
-                </a:r>
-                <a:r>
-                  <a:rPr lang="pt-BR" b="0" i="0" dirty="0" smtClean="0">
-                    <a:solidFill>
-                      <a:schemeClr val="tx1"/>
-                    </a:solidFill>
-                    <a:effectLst/>
-                  </a:rPr>
-                  <a:t>das exponenciais de todas funções discriminantes, </a:t>
-                </a:r>
-                <a:r>
-                  <a:rPr lang="pt-BR" b="0" i="0" dirty="0">
-                    <a:solidFill>
-                      <a:schemeClr val="tx1"/>
-                    </a:solidFill>
-                    <a:effectLst/>
-                  </a:rPr>
-                  <a:t>gerando uma </a:t>
+                  <a:t>normaliza essas exponenciais dividindo-as pela soma das exponenciais de todas as funções discriminantes, gerando uma </a:t>
                 </a:r>
                 <a:r>
                   <a:rPr lang="pt-BR" b="1" i="0" dirty="0">
@@ -23072,13 +22705,13 @@
             </p:txBody>
           </p:sp>
         </mc:Choice>
-        <mc:Fallback xmlns="">
+        <mc:Fallback>
           <p:sp>
             <p:nvSpPr>
               <p:cNvPr id="3" name="Espaço Reservado para Conteúdo 2">
                 <a:extLst>
                   <a:ext uri="{FF2B5EF4-FFF2-40B4-BE49-F238E27FC236}">
-                    <a16:creationId xmlns="" xmlns:a16="http://schemas.microsoft.com/office/drawing/2014/main" xmlns:a14="http://schemas.microsoft.com/office/drawing/2010/main" id="{32DF54A1-52F5-C48C-7CD4-D6E451DF19D8}"/>
+                    <a16:creationId xmlns:a16="http://schemas.microsoft.com/office/drawing/2014/main" id="{32DF54A1-52F5-C48C-7CD4-D6E451DF19D8}"/>
                   </a:ext>
                 </a:extLst>
               </p:cNvPr>
@@ -23094,10 +22727,10 @@
                 <a:off x="6280879" y="1825624"/>
                 <a:ext cx="5911121" cy="5032375"/>
               </a:xfrm>
-              <a:blipFill rotWithShape="0">
+              <a:blipFill>
                 <a:blip r:embed="rId2"/>
                 <a:stretch>
-                  <a:fillRect l="-1856" t="-1937" r="-619"/>
+                  <a:fillRect l="-1856" t="-1937" r="-1340"/>
                 </a:stretch>
               </a:blipFill>
             </p:spPr>
@@ -23106,7 +22739,7 @@
               <a:lstStyle/>
               <a:p>
                 <a:r>
-                  <a:rPr lang="pt-BR">
+                  <a:rPr lang="en-US">
                     <a:noFill/>
                   </a:rPr>
                   <a:t> </a:t>
@@ -23121,7 +22754,7 @@
           <p:cNvPr id="8" name="CaixaDeTexto 7">
             <a:extLst>
               <a:ext uri="{FF2B5EF4-FFF2-40B4-BE49-F238E27FC236}">
-                <a16:creationId xmlns:a16="http://schemas.microsoft.com/office/drawing/2014/main" xmlns="" id="{0DC5673F-9B77-2E9E-8317-E71CA8896FE0}"/>
+                <a16:creationId xmlns:a16="http://schemas.microsoft.com/office/drawing/2014/main" id="{0DC5673F-9B77-2E9E-8317-E71CA8896FE0}"/>
               </a:ext>
             </a:extLst>
           </p:cNvPr>
@@ -23173,7 +22806,7 @@
               <p:cNvPr id="4" name="CaixaDeTexto 3">
                 <a:extLst>
                   <a:ext uri="{FF2B5EF4-FFF2-40B4-BE49-F238E27FC236}">
-                    <a16:creationId xmlns:a16="http://schemas.microsoft.com/office/drawing/2014/main" xmlns="" id="{CBD55F82-56D5-32C8-C5AB-AF99477FBAAC}"/>
+                    <a16:creationId xmlns:a16="http://schemas.microsoft.com/office/drawing/2014/main" id="{CBD55F82-56D5-32C8-C5AB-AF99477FBAAC}"/>
                   </a:ext>
                 </a:extLst>
               </p:cNvPr>
@@ -23267,7 +22900,13 @@
       </mc:AlternateContent>
       <p:pic>
         <p:nvPicPr>
-          <p:cNvPr id="5" name="Imagem 4"/>
+          <p:cNvPr id="7" name="Imagem 6">
+            <a:extLst>
+              <a:ext uri="{FF2B5EF4-FFF2-40B4-BE49-F238E27FC236}">
+                <a16:creationId xmlns:a16="http://schemas.microsoft.com/office/drawing/2014/main" id="{03DADAA4-A9A3-C4FC-EC6D-6222F1C4F8C4}"/>
+              </a:ext>
+            </a:extLst>
+          </p:cNvPr>
           <p:cNvPicPr>
             <a:picLocks noChangeAspect="1"/>
           </p:cNvPicPr>
@@ -23287,8 +22926,8 @@
         </p:blipFill>
         <p:spPr>
           <a:xfrm>
-            <a:off x="251325" y="2424443"/>
-            <a:ext cx="6114818" cy="2481287"/>
+            <a:off x="165423" y="2485499"/>
+            <a:ext cx="6115456" cy="2468904"/>
           </a:xfrm>
           <a:prstGeom prst="rect">
             <a:avLst/>
@@ -23330,7 +22969,7 @@
           <p:cNvPr id="2" name="Título 1">
             <a:extLst>
               <a:ext uri="{FF2B5EF4-FFF2-40B4-BE49-F238E27FC236}">
-                <a16:creationId xmlns:a16="http://schemas.microsoft.com/office/drawing/2014/main" xmlns="" id="{99DAA83A-B143-94BB-B48B-41A7423070CE}"/>
+                <a16:creationId xmlns:a16="http://schemas.microsoft.com/office/drawing/2014/main" id="{99DAA83A-B143-94BB-B48B-41A7423070CE}"/>
               </a:ext>
             </a:extLst>
           </p:cNvPr>
@@ -23365,7 +23004,7 @@
               <p:cNvPr id="3" name="Espaço Reservado para Conteúdo 2">
                 <a:extLst>
                   <a:ext uri="{FF2B5EF4-FFF2-40B4-BE49-F238E27FC236}">
-                    <a16:creationId xmlns:a16="http://schemas.microsoft.com/office/drawing/2014/main" xmlns="" id="{32DF54A1-52F5-C48C-7CD4-D6E451DF19D8}"/>
+                    <a16:creationId xmlns:a16="http://schemas.microsoft.com/office/drawing/2014/main" id="{32DF54A1-52F5-C48C-7CD4-D6E451DF19D8}"/>
                   </a:ext>
                 </a:extLst>
               </p:cNvPr>
@@ -23389,7 +23028,7 @@
               <a:lstStyle/>
               <a:p>
                 <a:r>
-                  <a:rPr lang="pt-BR" b="0" dirty="0" smtClean="0">
+                  <a:rPr lang="pt-BR" b="0" dirty="0">
                     <a:effectLst/>
                   </a:rPr>
                   <a:t>Além de fazer c</a:t>
@@ -23537,7 +23176,7 @@
                         <m:d>
                           <m:dPr>
                             <m:ctrlPr>
-                              <a:rPr lang="pt-BR" b="1" i="1">
+                              <a:rPr lang="pt-BR" i="1">
                                 <a:latin typeface="Cambria Math" panose="02040503050406030204" pitchFamily="18" charset="0"/>
                               </a:rPr>
                             </m:ctrlPr>
@@ -23638,7 +23277,7 @@
                         <m:d>
                           <m:dPr>
                             <m:ctrlPr>
-                              <a:rPr lang="pt-BR" b="1" i="1">
+                              <a:rPr lang="pt-BR" i="1">
                                 <a:latin typeface="Cambria Math" panose="02040503050406030204" pitchFamily="18" charset="0"/>
                               </a:rPr>
                             </m:ctrlPr>
@@ -23740,7 +23379,7 @@
                         <m:d>
                           <m:dPr>
                             <m:ctrlPr>
-                              <a:rPr lang="pt-BR" b="1" i="1">
+                              <a:rPr lang="pt-BR" i="1">
                                 <a:latin typeface="Cambria Math" panose="02040503050406030204" pitchFamily="18" charset="0"/>
                               </a:rPr>
                             </m:ctrlPr>
@@ -23838,7 +23477,7 @@
               <p:cNvPr id="4" name="CaixaDeTexto 3">
                 <a:extLst>
                   <a:ext uri="{FF2B5EF4-FFF2-40B4-BE49-F238E27FC236}">
-                    <a16:creationId xmlns:a16="http://schemas.microsoft.com/office/drawing/2014/main" xmlns="" id="{2B7728A0-505D-9DAE-23EC-8172E2EEEFA9}"/>
+                    <a16:creationId xmlns:a16="http://schemas.microsoft.com/office/drawing/2014/main" id="{2B7728A0-505D-9DAE-23EC-8172E2EEEFA9}"/>
                   </a:ext>
                 </a:extLst>
               </p:cNvPr>
@@ -23932,7 +23571,13 @@
       </mc:AlternateContent>
       <p:pic>
         <p:nvPicPr>
-          <p:cNvPr id="6" name="Imagem 5"/>
+          <p:cNvPr id="7" name="Imagem 6">
+            <a:extLst>
+              <a:ext uri="{FF2B5EF4-FFF2-40B4-BE49-F238E27FC236}">
+                <a16:creationId xmlns:a16="http://schemas.microsoft.com/office/drawing/2014/main" id="{82FEAA71-0C5D-6685-9695-89249F4043DE}"/>
+              </a:ext>
+            </a:extLst>
+          </p:cNvPr>
           <p:cNvPicPr>
             <a:picLocks noChangeAspect="1"/>
           </p:cNvPicPr>
@@ -23952,8 +23597,8 @@
         </p:blipFill>
         <p:spPr>
           <a:xfrm>
-            <a:off x="3038591" y="3863499"/>
-            <a:ext cx="6114818" cy="2481287"/>
+            <a:off x="3038272" y="4019763"/>
+            <a:ext cx="6115456" cy="2468904"/>
           </a:xfrm>
           <a:prstGeom prst="rect">
             <a:avLst/>

--- a/slides/C24_Regressor_Softmax.pptx
+++ b/slides/C24_Regressor_Softmax.pptx
@@ -1855,27 +1855,7 @@
                 <a:effectLst/>
                 <a:latin typeface="Söhne"/>
               </a:rPr>
-              <a:t> O regressor softmax é comumente usado em problemas de classificação </a:t>
-            </a:r>
-            <a:r>
-              <a:rPr lang="pt-BR" b="0" i="0" dirty="0" err="1">
-                <a:solidFill>
-                  <a:srgbClr val="374151"/>
-                </a:solidFill>
-                <a:effectLst/>
-                <a:latin typeface="Söhne"/>
-              </a:rPr>
-              <a:t>multiclasse</a:t>
-            </a:r>
-            <a:r>
-              <a:rPr lang="pt-BR" b="0" i="0" dirty="0">
-                <a:solidFill>
-                  <a:srgbClr val="374151"/>
-                </a:solidFill>
-                <a:effectLst/>
-                <a:latin typeface="Söhne"/>
-              </a:rPr>
-              <a:t>, onde você deseja atribuir uma probabilidade para cada classe possível. Normalizando as combinações de atributos em probabilidades, você obtém uma interpretação probabilística direta dos resultados. Isso significa que as saídas do regressor representam a probabilidade de pertencer a cada classe.</a:t>
+              <a:t> O regressor softmax é comumente usado em problemas de classificação multiclasse, onde você deseja atribuir uma probabilidade para cada classe possível. Normalizando as combinações de atributos em probabilidades, você obtém uma interpretação probabilística direta dos resultados. Isso significa que as saídas do regressor representam a probabilidade de pertencer a cada classe.</a:t>
             </a:r>
           </a:p>
           <a:p>
@@ -2896,6 +2876,10 @@
             </a:endParaRPr>
           </a:p>
           <a:p>
+            <a:r>
+              <a:rPr lang="pt-BR" dirty="0"/>
+              <a:t/>
+            </a:r>
             <a:br>
               <a:rPr lang="pt-BR" dirty="0"/>
             </a:br>
@@ -4482,7 +4466,7 @@
           <p:cNvPr id="2" name="Título 1">
             <a:extLst>
               <a:ext uri="{FF2B5EF4-FFF2-40B4-BE49-F238E27FC236}">
-                <a16:creationId xmlns:a16="http://schemas.microsoft.com/office/drawing/2014/main" id="{1DB9B4FF-B06E-403C-A326-BDC64D8FF94E}"/>
+                <a16:creationId xmlns:a16="http://schemas.microsoft.com/office/drawing/2014/main" xmlns="" id="{1DB9B4FF-B06E-403C-A326-BDC64D8FF94E}"/>
               </a:ext>
             </a:extLst>
           </p:cNvPr>
@@ -4519,7 +4503,7 @@
           <p:cNvPr id="3" name="Subtítulo 2">
             <a:extLst>
               <a:ext uri="{FF2B5EF4-FFF2-40B4-BE49-F238E27FC236}">
-                <a16:creationId xmlns:a16="http://schemas.microsoft.com/office/drawing/2014/main" id="{247BDFCE-746E-45BF-A319-4733D58D1632}"/>
+                <a16:creationId xmlns:a16="http://schemas.microsoft.com/office/drawing/2014/main" xmlns="" id="{247BDFCE-746E-45BF-A319-4733D58D1632}"/>
               </a:ext>
             </a:extLst>
           </p:cNvPr>
@@ -4589,7 +4573,7 @@
           <p:cNvPr id="4" name="Espaço Reservado para Data 3">
             <a:extLst>
               <a:ext uri="{FF2B5EF4-FFF2-40B4-BE49-F238E27FC236}">
-                <a16:creationId xmlns:a16="http://schemas.microsoft.com/office/drawing/2014/main" id="{9EDE2778-5372-4104-B96D-968184DA8288}"/>
+                <a16:creationId xmlns:a16="http://schemas.microsoft.com/office/drawing/2014/main" xmlns="" id="{9EDE2778-5372-4104-B96D-968184DA8288}"/>
               </a:ext>
             </a:extLst>
           </p:cNvPr>
@@ -4618,7 +4602,7 @@
           <p:cNvPr id="5" name="Espaço Reservado para Rodapé 4">
             <a:extLst>
               <a:ext uri="{FF2B5EF4-FFF2-40B4-BE49-F238E27FC236}">
-                <a16:creationId xmlns:a16="http://schemas.microsoft.com/office/drawing/2014/main" id="{C1DD0F41-C861-4051-988D-3024A37A4B93}"/>
+                <a16:creationId xmlns:a16="http://schemas.microsoft.com/office/drawing/2014/main" xmlns="" id="{C1DD0F41-C861-4051-988D-3024A37A4B93}"/>
               </a:ext>
             </a:extLst>
           </p:cNvPr>
@@ -4643,7 +4627,7 @@
           <p:cNvPr id="6" name="Espaço Reservado para Número de Slide 5">
             <a:extLst>
               <a:ext uri="{FF2B5EF4-FFF2-40B4-BE49-F238E27FC236}">
-                <a16:creationId xmlns:a16="http://schemas.microsoft.com/office/drawing/2014/main" id="{07E5967E-D980-431A-A5DB-3F0C5030A81E}"/>
+                <a16:creationId xmlns:a16="http://schemas.microsoft.com/office/drawing/2014/main" xmlns="" id="{07E5967E-D980-431A-A5DB-3F0C5030A81E}"/>
               </a:ext>
             </a:extLst>
           </p:cNvPr>
@@ -4702,7 +4686,7 @@
           <p:cNvPr id="2" name="Título 1">
             <a:extLst>
               <a:ext uri="{FF2B5EF4-FFF2-40B4-BE49-F238E27FC236}">
-                <a16:creationId xmlns:a16="http://schemas.microsoft.com/office/drawing/2014/main" id="{9036C49F-3E68-4175-81BA-3C3FEE44308A}"/>
+                <a16:creationId xmlns:a16="http://schemas.microsoft.com/office/drawing/2014/main" xmlns="" id="{9036C49F-3E68-4175-81BA-3C3FEE44308A}"/>
               </a:ext>
             </a:extLst>
           </p:cNvPr>
@@ -4730,7 +4714,7 @@
           <p:cNvPr id="3" name="Espaço Reservado para Texto Vertical 2">
             <a:extLst>
               <a:ext uri="{FF2B5EF4-FFF2-40B4-BE49-F238E27FC236}">
-                <a16:creationId xmlns:a16="http://schemas.microsoft.com/office/drawing/2014/main" id="{426FA736-3DD3-4D4E-B57B-BBE1D8F7D424}"/>
+                <a16:creationId xmlns:a16="http://schemas.microsoft.com/office/drawing/2014/main" xmlns="" id="{426FA736-3DD3-4D4E-B57B-BBE1D8F7D424}"/>
               </a:ext>
             </a:extLst>
           </p:cNvPr>
@@ -4787,7 +4771,7 @@
           <p:cNvPr id="4" name="Espaço Reservado para Data 3">
             <a:extLst>
               <a:ext uri="{FF2B5EF4-FFF2-40B4-BE49-F238E27FC236}">
-                <a16:creationId xmlns:a16="http://schemas.microsoft.com/office/drawing/2014/main" id="{99E8855C-D8FD-48F6-B14E-861E0DE4D915}"/>
+                <a16:creationId xmlns:a16="http://schemas.microsoft.com/office/drawing/2014/main" xmlns="" id="{99E8855C-D8FD-48F6-B14E-861E0DE4D915}"/>
               </a:ext>
             </a:extLst>
           </p:cNvPr>
@@ -4816,7 +4800,7 @@
           <p:cNvPr id="5" name="Espaço Reservado para Rodapé 4">
             <a:extLst>
               <a:ext uri="{FF2B5EF4-FFF2-40B4-BE49-F238E27FC236}">
-                <a16:creationId xmlns:a16="http://schemas.microsoft.com/office/drawing/2014/main" id="{97C0BB88-2F21-42A5-ACFF-83DA47F2D340}"/>
+                <a16:creationId xmlns:a16="http://schemas.microsoft.com/office/drawing/2014/main" xmlns="" id="{97C0BB88-2F21-42A5-ACFF-83DA47F2D340}"/>
               </a:ext>
             </a:extLst>
           </p:cNvPr>
@@ -4841,7 +4825,7 @@
           <p:cNvPr id="6" name="Espaço Reservado para Número de Slide 5">
             <a:extLst>
               <a:ext uri="{FF2B5EF4-FFF2-40B4-BE49-F238E27FC236}">
-                <a16:creationId xmlns:a16="http://schemas.microsoft.com/office/drawing/2014/main" id="{6CB462B3-1F22-4C05-B4B8-7A279FB7D5E9}"/>
+                <a16:creationId xmlns:a16="http://schemas.microsoft.com/office/drawing/2014/main" xmlns="" id="{6CB462B3-1F22-4C05-B4B8-7A279FB7D5E9}"/>
               </a:ext>
             </a:extLst>
           </p:cNvPr>
@@ -4900,7 +4884,7 @@
           <p:cNvPr id="2" name="Título Vertical 1">
             <a:extLst>
               <a:ext uri="{FF2B5EF4-FFF2-40B4-BE49-F238E27FC236}">
-                <a16:creationId xmlns:a16="http://schemas.microsoft.com/office/drawing/2014/main" id="{EAEAB728-701C-4207-A9D5-23FF45C60502}"/>
+                <a16:creationId xmlns:a16="http://schemas.microsoft.com/office/drawing/2014/main" xmlns="" id="{EAEAB728-701C-4207-A9D5-23FF45C60502}"/>
               </a:ext>
             </a:extLst>
           </p:cNvPr>
@@ -4933,7 +4917,7 @@
           <p:cNvPr id="3" name="Espaço Reservado para Texto Vertical 2">
             <a:extLst>
               <a:ext uri="{FF2B5EF4-FFF2-40B4-BE49-F238E27FC236}">
-                <a16:creationId xmlns:a16="http://schemas.microsoft.com/office/drawing/2014/main" id="{BA8C8CCF-7823-480A-9A19-0F664DD17E3B}"/>
+                <a16:creationId xmlns:a16="http://schemas.microsoft.com/office/drawing/2014/main" xmlns="" id="{BA8C8CCF-7823-480A-9A19-0F664DD17E3B}"/>
               </a:ext>
             </a:extLst>
           </p:cNvPr>
@@ -4995,7 +4979,7 @@
           <p:cNvPr id="4" name="Espaço Reservado para Data 3">
             <a:extLst>
               <a:ext uri="{FF2B5EF4-FFF2-40B4-BE49-F238E27FC236}">
-                <a16:creationId xmlns:a16="http://schemas.microsoft.com/office/drawing/2014/main" id="{721D5734-7B1F-425D-942F-6EB73344027C}"/>
+                <a16:creationId xmlns:a16="http://schemas.microsoft.com/office/drawing/2014/main" xmlns="" id="{721D5734-7B1F-425D-942F-6EB73344027C}"/>
               </a:ext>
             </a:extLst>
           </p:cNvPr>
@@ -5024,7 +5008,7 @@
           <p:cNvPr id="5" name="Espaço Reservado para Rodapé 4">
             <a:extLst>
               <a:ext uri="{FF2B5EF4-FFF2-40B4-BE49-F238E27FC236}">
-                <a16:creationId xmlns:a16="http://schemas.microsoft.com/office/drawing/2014/main" id="{1E1AAEAC-F08D-45FE-89EC-B1B349A868C9}"/>
+                <a16:creationId xmlns:a16="http://schemas.microsoft.com/office/drawing/2014/main" xmlns="" id="{1E1AAEAC-F08D-45FE-89EC-B1B349A868C9}"/>
               </a:ext>
             </a:extLst>
           </p:cNvPr>
@@ -5049,7 +5033,7 @@
           <p:cNvPr id="6" name="Espaço Reservado para Número de Slide 5">
             <a:extLst>
               <a:ext uri="{FF2B5EF4-FFF2-40B4-BE49-F238E27FC236}">
-                <a16:creationId xmlns:a16="http://schemas.microsoft.com/office/drawing/2014/main" id="{BAA44493-9911-47B2-87A6-C2141A972BC8}"/>
+                <a16:creationId xmlns:a16="http://schemas.microsoft.com/office/drawing/2014/main" xmlns="" id="{BAA44493-9911-47B2-87A6-C2141A972BC8}"/>
               </a:ext>
             </a:extLst>
           </p:cNvPr>
@@ -5108,7 +5092,7 @@
           <p:cNvPr id="2" name="Título 1">
             <a:extLst>
               <a:ext uri="{FF2B5EF4-FFF2-40B4-BE49-F238E27FC236}">
-                <a16:creationId xmlns:a16="http://schemas.microsoft.com/office/drawing/2014/main" id="{71BD44A5-8F21-4626-A01D-48A1C874B1D5}"/>
+                <a16:creationId xmlns:a16="http://schemas.microsoft.com/office/drawing/2014/main" xmlns="" id="{71BD44A5-8F21-4626-A01D-48A1C874B1D5}"/>
               </a:ext>
             </a:extLst>
           </p:cNvPr>
@@ -5136,7 +5120,7 @@
           <p:cNvPr id="3" name="Espaço Reservado para Conteúdo 2">
             <a:extLst>
               <a:ext uri="{FF2B5EF4-FFF2-40B4-BE49-F238E27FC236}">
-                <a16:creationId xmlns:a16="http://schemas.microsoft.com/office/drawing/2014/main" id="{B79E8085-65A9-48AA-951D-71D978BFF4ED}"/>
+                <a16:creationId xmlns:a16="http://schemas.microsoft.com/office/drawing/2014/main" xmlns="" id="{B79E8085-65A9-48AA-951D-71D978BFF4ED}"/>
               </a:ext>
             </a:extLst>
           </p:cNvPr>
@@ -5193,7 +5177,7 @@
           <p:cNvPr id="4" name="Espaço Reservado para Data 3">
             <a:extLst>
               <a:ext uri="{FF2B5EF4-FFF2-40B4-BE49-F238E27FC236}">
-                <a16:creationId xmlns:a16="http://schemas.microsoft.com/office/drawing/2014/main" id="{F05BE1AF-51EA-425D-B188-DE7BD675009F}"/>
+                <a16:creationId xmlns:a16="http://schemas.microsoft.com/office/drawing/2014/main" xmlns="" id="{F05BE1AF-51EA-425D-B188-DE7BD675009F}"/>
               </a:ext>
             </a:extLst>
           </p:cNvPr>
@@ -5222,7 +5206,7 @@
           <p:cNvPr id="5" name="Espaço Reservado para Rodapé 4">
             <a:extLst>
               <a:ext uri="{FF2B5EF4-FFF2-40B4-BE49-F238E27FC236}">
-                <a16:creationId xmlns:a16="http://schemas.microsoft.com/office/drawing/2014/main" id="{121BE632-29CF-4CB9-B365-C9EF38F89BE6}"/>
+                <a16:creationId xmlns:a16="http://schemas.microsoft.com/office/drawing/2014/main" xmlns="" id="{121BE632-29CF-4CB9-B365-C9EF38F89BE6}"/>
               </a:ext>
             </a:extLst>
           </p:cNvPr>
@@ -5247,7 +5231,7 @@
           <p:cNvPr id="6" name="Espaço Reservado para Número de Slide 5">
             <a:extLst>
               <a:ext uri="{FF2B5EF4-FFF2-40B4-BE49-F238E27FC236}">
-                <a16:creationId xmlns:a16="http://schemas.microsoft.com/office/drawing/2014/main" id="{60CF3DD1-9AEC-4A57-B461-4E4DD86FAC18}"/>
+                <a16:creationId xmlns:a16="http://schemas.microsoft.com/office/drawing/2014/main" xmlns="" id="{60CF3DD1-9AEC-4A57-B461-4E4DD86FAC18}"/>
               </a:ext>
             </a:extLst>
           </p:cNvPr>
@@ -5306,7 +5290,7 @@
           <p:cNvPr id="2" name="Título 1">
             <a:extLst>
               <a:ext uri="{FF2B5EF4-FFF2-40B4-BE49-F238E27FC236}">
-                <a16:creationId xmlns:a16="http://schemas.microsoft.com/office/drawing/2014/main" id="{34AB2FF0-A4D7-4E28-991D-FF26140D5988}"/>
+                <a16:creationId xmlns:a16="http://schemas.microsoft.com/office/drawing/2014/main" xmlns="" id="{34AB2FF0-A4D7-4E28-991D-FF26140D5988}"/>
               </a:ext>
             </a:extLst>
           </p:cNvPr>
@@ -5343,7 +5327,7 @@
           <p:cNvPr id="3" name="Espaço Reservado para Texto 2">
             <a:extLst>
               <a:ext uri="{FF2B5EF4-FFF2-40B4-BE49-F238E27FC236}">
-                <a16:creationId xmlns:a16="http://schemas.microsoft.com/office/drawing/2014/main" id="{E2AC45B0-4145-40DB-8E61-105461170604}"/>
+                <a16:creationId xmlns:a16="http://schemas.microsoft.com/office/drawing/2014/main" xmlns="" id="{E2AC45B0-4145-40DB-8E61-105461170604}"/>
               </a:ext>
             </a:extLst>
           </p:cNvPr>
@@ -5468,7 +5452,7 @@
           <p:cNvPr id="4" name="Espaço Reservado para Data 3">
             <a:extLst>
               <a:ext uri="{FF2B5EF4-FFF2-40B4-BE49-F238E27FC236}">
-                <a16:creationId xmlns:a16="http://schemas.microsoft.com/office/drawing/2014/main" id="{50F1D3FB-740A-4EBA-A309-2CE71D12ECFB}"/>
+                <a16:creationId xmlns:a16="http://schemas.microsoft.com/office/drawing/2014/main" xmlns="" id="{50F1D3FB-740A-4EBA-A309-2CE71D12ECFB}"/>
               </a:ext>
             </a:extLst>
           </p:cNvPr>
@@ -5497,7 +5481,7 @@
           <p:cNvPr id="5" name="Espaço Reservado para Rodapé 4">
             <a:extLst>
               <a:ext uri="{FF2B5EF4-FFF2-40B4-BE49-F238E27FC236}">
-                <a16:creationId xmlns:a16="http://schemas.microsoft.com/office/drawing/2014/main" id="{BDCAB18F-8715-4465-A940-F9C193A2ACE9}"/>
+                <a16:creationId xmlns:a16="http://schemas.microsoft.com/office/drawing/2014/main" xmlns="" id="{BDCAB18F-8715-4465-A940-F9C193A2ACE9}"/>
               </a:ext>
             </a:extLst>
           </p:cNvPr>
@@ -5522,7 +5506,7 @@
           <p:cNvPr id="6" name="Espaço Reservado para Número de Slide 5">
             <a:extLst>
               <a:ext uri="{FF2B5EF4-FFF2-40B4-BE49-F238E27FC236}">
-                <a16:creationId xmlns:a16="http://schemas.microsoft.com/office/drawing/2014/main" id="{353466C6-8248-429F-8056-FF040BF509EB}"/>
+                <a16:creationId xmlns:a16="http://schemas.microsoft.com/office/drawing/2014/main" xmlns="" id="{353466C6-8248-429F-8056-FF040BF509EB}"/>
               </a:ext>
             </a:extLst>
           </p:cNvPr>
@@ -5581,7 +5565,7 @@
           <p:cNvPr id="2" name="Título 1">
             <a:extLst>
               <a:ext uri="{FF2B5EF4-FFF2-40B4-BE49-F238E27FC236}">
-                <a16:creationId xmlns:a16="http://schemas.microsoft.com/office/drawing/2014/main" id="{BC7BB9F0-F14B-4A91-B2B7-35BC47FE4DE7}"/>
+                <a16:creationId xmlns:a16="http://schemas.microsoft.com/office/drawing/2014/main" xmlns="" id="{BC7BB9F0-F14B-4A91-B2B7-35BC47FE4DE7}"/>
               </a:ext>
             </a:extLst>
           </p:cNvPr>
@@ -5609,7 +5593,7 @@
           <p:cNvPr id="3" name="Espaço Reservado para Conteúdo 2">
             <a:extLst>
               <a:ext uri="{FF2B5EF4-FFF2-40B4-BE49-F238E27FC236}">
-                <a16:creationId xmlns:a16="http://schemas.microsoft.com/office/drawing/2014/main" id="{EC1FC1C4-73DA-47A6-8496-B0B457F7D39A}"/>
+                <a16:creationId xmlns:a16="http://schemas.microsoft.com/office/drawing/2014/main" xmlns="" id="{EC1FC1C4-73DA-47A6-8496-B0B457F7D39A}"/>
               </a:ext>
             </a:extLst>
           </p:cNvPr>
@@ -5671,7 +5655,7 @@
           <p:cNvPr id="4" name="Espaço Reservado para Conteúdo 3">
             <a:extLst>
               <a:ext uri="{FF2B5EF4-FFF2-40B4-BE49-F238E27FC236}">
-                <a16:creationId xmlns:a16="http://schemas.microsoft.com/office/drawing/2014/main" id="{E92F06A8-A449-4D92-9912-76873E529B38}"/>
+                <a16:creationId xmlns:a16="http://schemas.microsoft.com/office/drawing/2014/main" xmlns="" id="{E92F06A8-A449-4D92-9912-76873E529B38}"/>
               </a:ext>
             </a:extLst>
           </p:cNvPr>
@@ -5733,7 +5717,7 @@
           <p:cNvPr id="5" name="Espaço Reservado para Data 4">
             <a:extLst>
               <a:ext uri="{FF2B5EF4-FFF2-40B4-BE49-F238E27FC236}">
-                <a16:creationId xmlns:a16="http://schemas.microsoft.com/office/drawing/2014/main" id="{938070A4-BC2F-4D55-BD8D-DEAF11BB9EE9}"/>
+                <a16:creationId xmlns:a16="http://schemas.microsoft.com/office/drawing/2014/main" xmlns="" id="{938070A4-BC2F-4D55-BD8D-DEAF11BB9EE9}"/>
               </a:ext>
             </a:extLst>
           </p:cNvPr>
@@ -5762,7 +5746,7 @@
           <p:cNvPr id="6" name="Espaço Reservado para Rodapé 5">
             <a:extLst>
               <a:ext uri="{FF2B5EF4-FFF2-40B4-BE49-F238E27FC236}">
-                <a16:creationId xmlns:a16="http://schemas.microsoft.com/office/drawing/2014/main" id="{45CC2DB8-844A-465F-BA9A-7734C80C7F43}"/>
+                <a16:creationId xmlns:a16="http://schemas.microsoft.com/office/drawing/2014/main" xmlns="" id="{45CC2DB8-844A-465F-BA9A-7734C80C7F43}"/>
               </a:ext>
             </a:extLst>
           </p:cNvPr>
@@ -5787,7 +5771,7 @@
           <p:cNvPr id="7" name="Espaço Reservado para Número de Slide 6">
             <a:extLst>
               <a:ext uri="{FF2B5EF4-FFF2-40B4-BE49-F238E27FC236}">
-                <a16:creationId xmlns:a16="http://schemas.microsoft.com/office/drawing/2014/main" id="{4CC606A8-097B-4040-94E0-CD8C88280D8F}"/>
+                <a16:creationId xmlns:a16="http://schemas.microsoft.com/office/drawing/2014/main" xmlns="" id="{4CC606A8-097B-4040-94E0-CD8C88280D8F}"/>
               </a:ext>
             </a:extLst>
           </p:cNvPr>
@@ -5846,7 +5830,7 @@
           <p:cNvPr id="2" name="Título 1">
             <a:extLst>
               <a:ext uri="{FF2B5EF4-FFF2-40B4-BE49-F238E27FC236}">
-                <a16:creationId xmlns:a16="http://schemas.microsoft.com/office/drawing/2014/main" id="{76D66686-0143-4CB6-8C09-BA326F1E7ACA}"/>
+                <a16:creationId xmlns:a16="http://schemas.microsoft.com/office/drawing/2014/main" xmlns="" id="{76D66686-0143-4CB6-8C09-BA326F1E7ACA}"/>
               </a:ext>
             </a:extLst>
           </p:cNvPr>
@@ -5879,7 +5863,7 @@
           <p:cNvPr id="3" name="Espaço Reservado para Texto 2">
             <a:extLst>
               <a:ext uri="{FF2B5EF4-FFF2-40B4-BE49-F238E27FC236}">
-                <a16:creationId xmlns:a16="http://schemas.microsoft.com/office/drawing/2014/main" id="{0227AB85-F59E-4BCE-B846-4FA0992C2F23}"/>
+                <a16:creationId xmlns:a16="http://schemas.microsoft.com/office/drawing/2014/main" xmlns="" id="{0227AB85-F59E-4BCE-B846-4FA0992C2F23}"/>
               </a:ext>
             </a:extLst>
           </p:cNvPr>
@@ -5950,7 +5934,7 @@
           <p:cNvPr id="4" name="Espaço Reservado para Conteúdo 3">
             <a:extLst>
               <a:ext uri="{FF2B5EF4-FFF2-40B4-BE49-F238E27FC236}">
-                <a16:creationId xmlns:a16="http://schemas.microsoft.com/office/drawing/2014/main" id="{3373456C-7319-4D0A-827D-D29F6B083F5D}"/>
+                <a16:creationId xmlns:a16="http://schemas.microsoft.com/office/drawing/2014/main" xmlns="" id="{3373456C-7319-4D0A-827D-D29F6B083F5D}"/>
               </a:ext>
             </a:extLst>
           </p:cNvPr>
@@ -6012,7 +5996,7 @@
           <p:cNvPr id="5" name="Espaço Reservado para Texto 4">
             <a:extLst>
               <a:ext uri="{FF2B5EF4-FFF2-40B4-BE49-F238E27FC236}">
-                <a16:creationId xmlns:a16="http://schemas.microsoft.com/office/drawing/2014/main" id="{4CD109D0-2E83-4262-8029-A871CEC47406}"/>
+                <a16:creationId xmlns:a16="http://schemas.microsoft.com/office/drawing/2014/main" xmlns="" id="{4CD109D0-2E83-4262-8029-A871CEC47406}"/>
               </a:ext>
             </a:extLst>
           </p:cNvPr>
@@ -6083,7 +6067,7 @@
           <p:cNvPr id="6" name="Espaço Reservado para Conteúdo 5">
             <a:extLst>
               <a:ext uri="{FF2B5EF4-FFF2-40B4-BE49-F238E27FC236}">
-                <a16:creationId xmlns:a16="http://schemas.microsoft.com/office/drawing/2014/main" id="{AD706E3A-CFBB-4A6C-A65F-D0360A9E74FE}"/>
+                <a16:creationId xmlns:a16="http://schemas.microsoft.com/office/drawing/2014/main" xmlns="" id="{AD706E3A-CFBB-4A6C-A65F-D0360A9E74FE}"/>
               </a:ext>
             </a:extLst>
           </p:cNvPr>
@@ -6145,7 +6129,7 @@
           <p:cNvPr id="7" name="Espaço Reservado para Data 6">
             <a:extLst>
               <a:ext uri="{FF2B5EF4-FFF2-40B4-BE49-F238E27FC236}">
-                <a16:creationId xmlns:a16="http://schemas.microsoft.com/office/drawing/2014/main" id="{4172C0E5-5AF0-4805-BB51-443733CD2BD5}"/>
+                <a16:creationId xmlns:a16="http://schemas.microsoft.com/office/drawing/2014/main" xmlns="" id="{4172C0E5-5AF0-4805-BB51-443733CD2BD5}"/>
               </a:ext>
             </a:extLst>
           </p:cNvPr>
@@ -6174,7 +6158,7 @@
           <p:cNvPr id="8" name="Espaço Reservado para Rodapé 7">
             <a:extLst>
               <a:ext uri="{FF2B5EF4-FFF2-40B4-BE49-F238E27FC236}">
-                <a16:creationId xmlns:a16="http://schemas.microsoft.com/office/drawing/2014/main" id="{0E801648-156F-497E-99CF-797DF48051E1}"/>
+                <a16:creationId xmlns:a16="http://schemas.microsoft.com/office/drawing/2014/main" xmlns="" id="{0E801648-156F-497E-99CF-797DF48051E1}"/>
               </a:ext>
             </a:extLst>
           </p:cNvPr>
@@ -6199,7 +6183,7 @@
           <p:cNvPr id="9" name="Espaço Reservado para Número de Slide 8">
             <a:extLst>
               <a:ext uri="{FF2B5EF4-FFF2-40B4-BE49-F238E27FC236}">
-                <a16:creationId xmlns:a16="http://schemas.microsoft.com/office/drawing/2014/main" id="{EEE23D32-80E7-4796-A137-66BF842E4B53}"/>
+                <a16:creationId xmlns:a16="http://schemas.microsoft.com/office/drawing/2014/main" xmlns="" id="{EEE23D32-80E7-4796-A137-66BF842E4B53}"/>
               </a:ext>
             </a:extLst>
           </p:cNvPr>
@@ -6258,7 +6242,7 @@
           <p:cNvPr id="2" name="Título 1">
             <a:extLst>
               <a:ext uri="{FF2B5EF4-FFF2-40B4-BE49-F238E27FC236}">
-                <a16:creationId xmlns:a16="http://schemas.microsoft.com/office/drawing/2014/main" id="{2BCE2379-C78F-47E1-8CFC-B846E7AF148D}"/>
+                <a16:creationId xmlns:a16="http://schemas.microsoft.com/office/drawing/2014/main" xmlns="" id="{2BCE2379-C78F-47E1-8CFC-B846E7AF148D}"/>
               </a:ext>
             </a:extLst>
           </p:cNvPr>
@@ -6286,7 +6270,7 @@
           <p:cNvPr id="3" name="Espaço Reservado para Data 2">
             <a:extLst>
               <a:ext uri="{FF2B5EF4-FFF2-40B4-BE49-F238E27FC236}">
-                <a16:creationId xmlns:a16="http://schemas.microsoft.com/office/drawing/2014/main" id="{342600A9-7F92-4E22-9D94-E4717252A817}"/>
+                <a16:creationId xmlns:a16="http://schemas.microsoft.com/office/drawing/2014/main" xmlns="" id="{342600A9-7F92-4E22-9D94-E4717252A817}"/>
               </a:ext>
             </a:extLst>
           </p:cNvPr>
@@ -6315,7 +6299,7 @@
           <p:cNvPr id="4" name="Espaço Reservado para Rodapé 3">
             <a:extLst>
               <a:ext uri="{FF2B5EF4-FFF2-40B4-BE49-F238E27FC236}">
-                <a16:creationId xmlns:a16="http://schemas.microsoft.com/office/drawing/2014/main" id="{192E6BED-F546-40CC-A2DF-99CBA853654E}"/>
+                <a16:creationId xmlns:a16="http://schemas.microsoft.com/office/drawing/2014/main" xmlns="" id="{192E6BED-F546-40CC-A2DF-99CBA853654E}"/>
               </a:ext>
             </a:extLst>
           </p:cNvPr>
@@ -6340,7 +6324,7 @@
           <p:cNvPr id="5" name="Espaço Reservado para Número de Slide 4">
             <a:extLst>
               <a:ext uri="{FF2B5EF4-FFF2-40B4-BE49-F238E27FC236}">
-                <a16:creationId xmlns:a16="http://schemas.microsoft.com/office/drawing/2014/main" id="{6091CC40-A8C4-4063-80EB-CC5099621678}"/>
+                <a16:creationId xmlns:a16="http://schemas.microsoft.com/office/drawing/2014/main" xmlns="" id="{6091CC40-A8C4-4063-80EB-CC5099621678}"/>
               </a:ext>
             </a:extLst>
           </p:cNvPr>
@@ -6399,7 +6383,7 @@
           <p:cNvPr id="2" name="Espaço Reservado para Data 1">
             <a:extLst>
               <a:ext uri="{FF2B5EF4-FFF2-40B4-BE49-F238E27FC236}">
-                <a16:creationId xmlns:a16="http://schemas.microsoft.com/office/drawing/2014/main" id="{DD19515C-212C-4EAE-84A3-8FF4BC844F1B}"/>
+                <a16:creationId xmlns:a16="http://schemas.microsoft.com/office/drawing/2014/main" xmlns="" id="{DD19515C-212C-4EAE-84A3-8FF4BC844F1B}"/>
               </a:ext>
             </a:extLst>
           </p:cNvPr>
@@ -6428,7 +6412,7 @@
           <p:cNvPr id="3" name="Espaço Reservado para Rodapé 2">
             <a:extLst>
               <a:ext uri="{FF2B5EF4-FFF2-40B4-BE49-F238E27FC236}">
-                <a16:creationId xmlns:a16="http://schemas.microsoft.com/office/drawing/2014/main" id="{94D3D120-B3E8-4C96-861D-7A4F12F49B3A}"/>
+                <a16:creationId xmlns:a16="http://schemas.microsoft.com/office/drawing/2014/main" xmlns="" id="{94D3D120-B3E8-4C96-861D-7A4F12F49B3A}"/>
               </a:ext>
             </a:extLst>
           </p:cNvPr>
@@ -6453,7 +6437,7 @@
           <p:cNvPr id="4" name="Espaço Reservado para Número de Slide 3">
             <a:extLst>
               <a:ext uri="{FF2B5EF4-FFF2-40B4-BE49-F238E27FC236}">
-                <a16:creationId xmlns:a16="http://schemas.microsoft.com/office/drawing/2014/main" id="{42E49B68-FA1B-468B-9F17-D5C09243D454}"/>
+                <a16:creationId xmlns:a16="http://schemas.microsoft.com/office/drawing/2014/main" xmlns="" id="{42E49B68-FA1B-468B-9F17-D5C09243D454}"/>
               </a:ext>
             </a:extLst>
           </p:cNvPr>
@@ -6512,7 +6496,7 @@
           <p:cNvPr id="2" name="Título 1">
             <a:extLst>
               <a:ext uri="{FF2B5EF4-FFF2-40B4-BE49-F238E27FC236}">
-                <a16:creationId xmlns:a16="http://schemas.microsoft.com/office/drawing/2014/main" id="{1C17BCBE-A897-4319-85EC-D87909C24980}"/>
+                <a16:creationId xmlns:a16="http://schemas.microsoft.com/office/drawing/2014/main" xmlns="" id="{1C17BCBE-A897-4319-85EC-D87909C24980}"/>
               </a:ext>
             </a:extLst>
           </p:cNvPr>
@@ -6549,7 +6533,7 @@
           <p:cNvPr id="3" name="Espaço Reservado para Conteúdo 2">
             <a:extLst>
               <a:ext uri="{FF2B5EF4-FFF2-40B4-BE49-F238E27FC236}">
-                <a16:creationId xmlns:a16="http://schemas.microsoft.com/office/drawing/2014/main" id="{4226F885-0204-4913-868B-4B8B82576F17}"/>
+                <a16:creationId xmlns:a16="http://schemas.microsoft.com/office/drawing/2014/main" xmlns="" id="{4226F885-0204-4913-868B-4B8B82576F17}"/>
               </a:ext>
             </a:extLst>
           </p:cNvPr>
@@ -6639,7 +6623,7 @@
           <p:cNvPr id="4" name="Espaço Reservado para Texto 3">
             <a:extLst>
               <a:ext uri="{FF2B5EF4-FFF2-40B4-BE49-F238E27FC236}">
-                <a16:creationId xmlns:a16="http://schemas.microsoft.com/office/drawing/2014/main" id="{00F9F784-A858-441B-8AB5-697098141751}"/>
+                <a16:creationId xmlns:a16="http://schemas.microsoft.com/office/drawing/2014/main" xmlns="" id="{00F9F784-A858-441B-8AB5-697098141751}"/>
               </a:ext>
             </a:extLst>
           </p:cNvPr>
@@ -6710,7 +6694,7 @@
           <p:cNvPr id="5" name="Espaço Reservado para Data 4">
             <a:extLst>
               <a:ext uri="{FF2B5EF4-FFF2-40B4-BE49-F238E27FC236}">
-                <a16:creationId xmlns:a16="http://schemas.microsoft.com/office/drawing/2014/main" id="{A4DC363A-5000-472E-8B17-02E7DCB8840A}"/>
+                <a16:creationId xmlns:a16="http://schemas.microsoft.com/office/drawing/2014/main" xmlns="" id="{A4DC363A-5000-472E-8B17-02E7DCB8840A}"/>
               </a:ext>
             </a:extLst>
           </p:cNvPr>
@@ -6739,7 +6723,7 @@
           <p:cNvPr id="6" name="Espaço Reservado para Rodapé 5">
             <a:extLst>
               <a:ext uri="{FF2B5EF4-FFF2-40B4-BE49-F238E27FC236}">
-                <a16:creationId xmlns:a16="http://schemas.microsoft.com/office/drawing/2014/main" id="{5548425D-2C21-4C56-BAD4-662978775C28}"/>
+                <a16:creationId xmlns:a16="http://schemas.microsoft.com/office/drawing/2014/main" xmlns="" id="{5548425D-2C21-4C56-BAD4-662978775C28}"/>
               </a:ext>
             </a:extLst>
           </p:cNvPr>
@@ -6764,7 +6748,7 @@
           <p:cNvPr id="7" name="Espaço Reservado para Número de Slide 6">
             <a:extLst>
               <a:ext uri="{FF2B5EF4-FFF2-40B4-BE49-F238E27FC236}">
-                <a16:creationId xmlns:a16="http://schemas.microsoft.com/office/drawing/2014/main" id="{C63E9726-E64C-42B2-AE8A-8C235A956B48}"/>
+                <a16:creationId xmlns:a16="http://schemas.microsoft.com/office/drawing/2014/main" xmlns="" id="{C63E9726-E64C-42B2-AE8A-8C235A956B48}"/>
               </a:ext>
             </a:extLst>
           </p:cNvPr>
@@ -6823,7 +6807,7 @@
           <p:cNvPr id="2" name="Título 1">
             <a:extLst>
               <a:ext uri="{FF2B5EF4-FFF2-40B4-BE49-F238E27FC236}">
-                <a16:creationId xmlns:a16="http://schemas.microsoft.com/office/drawing/2014/main" id="{11086A78-3E74-450C-96A6-CA8AC37AF772}"/>
+                <a16:creationId xmlns:a16="http://schemas.microsoft.com/office/drawing/2014/main" xmlns="" id="{11086A78-3E74-450C-96A6-CA8AC37AF772}"/>
               </a:ext>
             </a:extLst>
           </p:cNvPr>
@@ -6860,7 +6844,7 @@
           <p:cNvPr id="3" name="Espaço Reservado para Imagem 2">
             <a:extLst>
               <a:ext uri="{FF2B5EF4-FFF2-40B4-BE49-F238E27FC236}">
-                <a16:creationId xmlns:a16="http://schemas.microsoft.com/office/drawing/2014/main" id="{5F5B7312-975A-4DBC-9B2F-3652ADA006FD}"/>
+                <a16:creationId xmlns:a16="http://schemas.microsoft.com/office/drawing/2014/main" xmlns="" id="{5F5B7312-975A-4DBC-9B2F-3652ADA006FD}"/>
               </a:ext>
             </a:extLst>
           </p:cNvPr>
@@ -6927,7 +6911,7 @@
           <p:cNvPr id="4" name="Espaço Reservado para Texto 3">
             <a:extLst>
               <a:ext uri="{FF2B5EF4-FFF2-40B4-BE49-F238E27FC236}">
-                <a16:creationId xmlns:a16="http://schemas.microsoft.com/office/drawing/2014/main" id="{AAF805F5-1DFF-41C6-944C-7D79FE0D0963}"/>
+                <a16:creationId xmlns:a16="http://schemas.microsoft.com/office/drawing/2014/main" xmlns="" id="{AAF805F5-1DFF-41C6-944C-7D79FE0D0963}"/>
               </a:ext>
             </a:extLst>
           </p:cNvPr>
@@ -6998,7 +6982,7 @@
           <p:cNvPr id="5" name="Espaço Reservado para Data 4">
             <a:extLst>
               <a:ext uri="{FF2B5EF4-FFF2-40B4-BE49-F238E27FC236}">
-                <a16:creationId xmlns:a16="http://schemas.microsoft.com/office/drawing/2014/main" id="{02113D81-8665-4516-BD81-C6A1F254EECD}"/>
+                <a16:creationId xmlns:a16="http://schemas.microsoft.com/office/drawing/2014/main" xmlns="" id="{02113D81-8665-4516-BD81-C6A1F254EECD}"/>
               </a:ext>
             </a:extLst>
           </p:cNvPr>
@@ -7027,7 +7011,7 @@
           <p:cNvPr id="6" name="Espaço Reservado para Rodapé 5">
             <a:extLst>
               <a:ext uri="{FF2B5EF4-FFF2-40B4-BE49-F238E27FC236}">
-                <a16:creationId xmlns:a16="http://schemas.microsoft.com/office/drawing/2014/main" id="{2B00C88B-FF32-40AA-A187-727D96FD7862}"/>
+                <a16:creationId xmlns:a16="http://schemas.microsoft.com/office/drawing/2014/main" xmlns="" id="{2B00C88B-FF32-40AA-A187-727D96FD7862}"/>
               </a:ext>
             </a:extLst>
           </p:cNvPr>
@@ -7052,7 +7036,7 @@
           <p:cNvPr id="7" name="Espaço Reservado para Número de Slide 6">
             <a:extLst>
               <a:ext uri="{FF2B5EF4-FFF2-40B4-BE49-F238E27FC236}">
-                <a16:creationId xmlns:a16="http://schemas.microsoft.com/office/drawing/2014/main" id="{A04D1A2D-69F7-4B8F-A730-BC26DC340BA6}"/>
+                <a16:creationId xmlns:a16="http://schemas.microsoft.com/office/drawing/2014/main" xmlns="" id="{A04D1A2D-69F7-4B8F-A730-BC26DC340BA6}"/>
               </a:ext>
             </a:extLst>
           </p:cNvPr>
@@ -7116,7 +7100,7 @@
           <p:cNvPr id="2" name="Espaço Reservado para Título 1">
             <a:extLst>
               <a:ext uri="{FF2B5EF4-FFF2-40B4-BE49-F238E27FC236}">
-                <a16:creationId xmlns:a16="http://schemas.microsoft.com/office/drawing/2014/main" id="{E69A0273-1966-4A1B-9370-4C1CE5036371}"/>
+                <a16:creationId xmlns:a16="http://schemas.microsoft.com/office/drawing/2014/main" xmlns="" id="{E69A0273-1966-4A1B-9370-4C1CE5036371}"/>
               </a:ext>
             </a:extLst>
           </p:cNvPr>
@@ -7154,7 +7138,7 @@
           <p:cNvPr id="3" name="Espaço Reservado para Texto 2">
             <a:extLst>
               <a:ext uri="{FF2B5EF4-FFF2-40B4-BE49-F238E27FC236}">
-                <a16:creationId xmlns:a16="http://schemas.microsoft.com/office/drawing/2014/main" id="{3B9CF87A-0448-49A7-AB25-EBC1D56A40EF}"/>
+                <a16:creationId xmlns:a16="http://schemas.microsoft.com/office/drawing/2014/main" xmlns="" id="{3B9CF87A-0448-49A7-AB25-EBC1D56A40EF}"/>
               </a:ext>
             </a:extLst>
           </p:cNvPr>
@@ -7221,7 +7205,7 @@
           <p:cNvPr id="4" name="Espaço Reservado para Data 3">
             <a:extLst>
               <a:ext uri="{FF2B5EF4-FFF2-40B4-BE49-F238E27FC236}">
-                <a16:creationId xmlns:a16="http://schemas.microsoft.com/office/drawing/2014/main" id="{2EF7B1F2-BB5A-44D0-816D-16AD2C71430E}"/>
+                <a16:creationId xmlns:a16="http://schemas.microsoft.com/office/drawing/2014/main" xmlns="" id="{2EF7B1F2-BB5A-44D0-816D-16AD2C71430E}"/>
               </a:ext>
             </a:extLst>
           </p:cNvPr>
@@ -7268,7 +7252,7 @@
           <p:cNvPr id="5" name="Espaço Reservado para Rodapé 4">
             <a:extLst>
               <a:ext uri="{FF2B5EF4-FFF2-40B4-BE49-F238E27FC236}">
-                <a16:creationId xmlns:a16="http://schemas.microsoft.com/office/drawing/2014/main" id="{C703F94C-2CC8-4DAA-BC35-14FC3E841DCD}"/>
+                <a16:creationId xmlns:a16="http://schemas.microsoft.com/office/drawing/2014/main" xmlns="" id="{C703F94C-2CC8-4DAA-BC35-14FC3E841DCD}"/>
               </a:ext>
             </a:extLst>
           </p:cNvPr>
@@ -7311,7 +7295,7 @@
           <p:cNvPr id="6" name="Espaço Reservado para Número de Slide 5">
             <a:extLst>
               <a:ext uri="{FF2B5EF4-FFF2-40B4-BE49-F238E27FC236}">
-                <a16:creationId xmlns:a16="http://schemas.microsoft.com/office/drawing/2014/main" id="{64051336-7048-457A-8B61-D94291D71648}"/>
+                <a16:creationId xmlns:a16="http://schemas.microsoft.com/office/drawing/2014/main" xmlns="" id="{64051336-7048-457A-8B61-D94291D71648}"/>
               </a:ext>
             </a:extLst>
           </p:cNvPr>
@@ -7679,7 +7663,7 @@
           <p:cNvPr id="4" name="CaixaDeTexto 3">
             <a:extLst>
               <a:ext uri="{FF2B5EF4-FFF2-40B4-BE49-F238E27FC236}">
-                <a16:creationId xmlns:a16="http://schemas.microsoft.com/office/drawing/2014/main" id="{430EB894-B7D4-434C-9D1A-A14094D9BEEC}"/>
+                <a16:creationId xmlns:a16="http://schemas.microsoft.com/office/drawing/2014/main" xmlns="" id="{430EB894-B7D4-434C-9D1A-A14094D9BEEC}"/>
               </a:ext>
             </a:extLst>
           </p:cNvPr>
@@ -7723,7 +7707,7 @@
           <p:cNvPr id="1026" name="Picture 2" descr="Logo">
             <a:extLst>
               <a:ext uri="{FF2B5EF4-FFF2-40B4-BE49-F238E27FC236}">
-                <a16:creationId xmlns:a16="http://schemas.microsoft.com/office/drawing/2014/main" id="{3F2642E0-4F6A-4196-8F58-E77D36E9A33F}"/>
+                <a16:creationId xmlns:a16="http://schemas.microsoft.com/office/drawing/2014/main" xmlns="" id="{3F2642E0-4F6A-4196-8F58-E77D36E9A33F}"/>
               </a:ext>
             </a:extLst>
           </p:cNvPr>
@@ -7768,7 +7752,7 @@
           <p:cNvPr id="5122" name="Picture 2" descr="Image result for machine learning">
             <a:extLst>
               <a:ext uri="{FF2B5EF4-FFF2-40B4-BE49-F238E27FC236}">
-                <a16:creationId xmlns:a16="http://schemas.microsoft.com/office/drawing/2014/main" id="{810CE0A2-4102-44A6-A370-175E7896CDCB}"/>
+                <a16:creationId xmlns:a16="http://schemas.microsoft.com/office/drawing/2014/main" xmlns="" id="{810CE0A2-4102-44A6-A370-175E7896CDCB}"/>
               </a:ext>
             </a:extLst>
           </p:cNvPr>
@@ -7813,7 +7797,7 @@
           <p:cNvPr id="7" name="Título 1">
             <a:extLst>
               <a:ext uri="{FF2B5EF4-FFF2-40B4-BE49-F238E27FC236}">
-                <a16:creationId xmlns:a16="http://schemas.microsoft.com/office/drawing/2014/main" id="{32666AC8-2E17-4DB4-B0F5-60C640CCFD2E}"/>
+                <a16:creationId xmlns:a16="http://schemas.microsoft.com/office/drawing/2014/main" xmlns="" id="{32666AC8-2E17-4DB4-B0F5-60C640CCFD2E}"/>
               </a:ext>
             </a:extLst>
           </p:cNvPr>
@@ -7840,16 +7824,16 @@
               <a:rPr lang="pt-BR" sz="6600" dirty="0"/>
               <a:t>C24 – Inteligência Artificial:</a:t>
             </a:r>
+            <a:r>
+              <a:rPr lang="pt-BR" sz="7200" dirty="0"/>
+              <a:t/>
+            </a:r>
             <a:br>
               <a:rPr lang="pt-BR" sz="7200" dirty="0"/>
             </a:br>
             <a:r>
-              <a:rPr lang="pt-BR" sz="7200" b="1" i="1" dirty="0" err="1"/>
-              <a:t>Regressor</a:t>
-            </a:r>
-            <a:r>
               <a:rPr lang="pt-BR" sz="7200" b="1" i="1" dirty="0"/>
-              <a:t> </a:t>
+              <a:t>Regressor </a:t>
             </a:r>
             <a:r>
               <a:rPr lang="pt-BR" sz="7200" b="1" i="1" dirty="0" err="1"/>
@@ -7894,7 +7878,7 @@
           <p:cNvPr id="2" name="Título 1">
             <a:extLst>
               <a:ext uri="{FF2B5EF4-FFF2-40B4-BE49-F238E27FC236}">
-                <a16:creationId xmlns:a16="http://schemas.microsoft.com/office/drawing/2014/main" id="{028A152F-93D8-11FA-9B7A-B62AE5BB6486}"/>
+                <a16:creationId xmlns:a16="http://schemas.microsoft.com/office/drawing/2014/main" xmlns="" id="{028A152F-93D8-11FA-9B7A-B62AE5BB6486}"/>
               </a:ext>
             </a:extLst>
           </p:cNvPr>
@@ -7921,14 +7905,14 @@
           </a:p>
         </p:txBody>
       </p:sp>
-      <mc:AlternateContent xmlns:mc="http://schemas.openxmlformats.org/markup-compatibility/2006">
-        <mc:Choice xmlns:a14="http://schemas.microsoft.com/office/drawing/2010/main" Requires="a14">
+      <mc:AlternateContent xmlns:mc="http://schemas.openxmlformats.org/markup-compatibility/2006" xmlns:a14="http://schemas.microsoft.com/office/drawing/2010/main">
+        <mc:Choice Requires="a14">
           <p:sp>
             <p:nvSpPr>
               <p:cNvPr id="3" name="Espaço Reservado para Conteúdo 2">
                 <a:extLst>
                   <a:ext uri="{FF2B5EF4-FFF2-40B4-BE49-F238E27FC236}">
-                    <a16:creationId xmlns:a16="http://schemas.microsoft.com/office/drawing/2014/main" id="{B3535727-BB24-BB15-5C03-3DA9A3F9A09A}"/>
+                    <a16:creationId xmlns:a16="http://schemas.microsoft.com/office/drawing/2014/main" xmlns="" id="{B3535727-BB24-BB15-5C03-3DA9A3F9A09A}"/>
                   </a:ext>
                 </a:extLst>
               </p:cNvPr>
@@ -8105,7 +8089,7 @@
             </p:txBody>
           </p:sp>
         </mc:Choice>
-        <mc:Fallback>
+        <mc:Fallback xmlns="">
           <p:sp>
             <p:nvSpPr>
               <p:cNvPr id="3" name="Espaço Reservado para Conteúdo 2">
@@ -8154,7 +8138,7 @@
           <p:cNvPr id="7" name="Picture 6">
             <a:extLst>
               <a:ext uri="{FF2B5EF4-FFF2-40B4-BE49-F238E27FC236}">
-                <a16:creationId xmlns:a16="http://schemas.microsoft.com/office/drawing/2014/main" id="{B29D6ED4-6B75-62EC-8922-9CCA4F704E2B}"/>
+                <a16:creationId xmlns:a16="http://schemas.microsoft.com/office/drawing/2014/main" xmlns="" id="{B29D6ED4-6B75-62EC-8922-9CCA4F704E2B}"/>
               </a:ext>
             </a:extLst>
           </p:cNvPr>
@@ -8220,7 +8204,7 @@
           <p:cNvPr id="2" name="Title 1">
             <a:extLst>
               <a:ext uri="{FF2B5EF4-FFF2-40B4-BE49-F238E27FC236}">
-                <a16:creationId xmlns:a16="http://schemas.microsoft.com/office/drawing/2014/main" id="{2DB9D242-5419-0FFB-7863-B3BB3BD80869}"/>
+                <a16:creationId xmlns:a16="http://schemas.microsoft.com/office/drawing/2014/main" xmlns="" id="{2DB9D242-5419-0FFB-7863-B3BB3BD80869}"/>
               </a:ext>
             </a:extLst>
           </p:cNvPr>
@@ -8251,7 +8235,7 @@
               <p:cNvPr id="3" name="Content Placeholder 2">
                 <a:extLst>
                   <a:ext uri="{FF2B5EF4-FFF2-40B4-BE49-F238E27FC236}">
-                    <a16:creationId xmlns:a16="http://schemas.microsoft.com/office/drawing/2014/main" id="{34B1DEA3-BAAD-D90C-CD9D-99A5A24F4544}"/>
+                    <a16:creationId xmlns:a16="http://schemas.microsoft.com/office/drawing/2014/main" xmlns="" id="{34B1DEA3-BAAD-D90C-CD9D-99A5A24F4544}"/>
                   </a:ext>
                 </a:extLst>
               </p:cNvPr>
@@ -8331,7 +8315,10 @@
                 </a:pPr>
                 <a14:m>
                   <m:oMathPara xmlns:m="http://schemas.openxmlformats.org/officeDocument/2006/math">
-                    <m:oMath>
+                    <m:oMathParaPr>
+                      <m:jc m:val="centerGroup"/>
+                    </m:oMathParaPr>
+                    <m:oMath xmlns:m="http://schemas.openxmlformats.org/officeDocument/2006/math">
                       <m:sSub>
                         <m:sSubPr>
                           <m:ctrlPr>
@@ -8541,7 +8528,7 @@
                               <m:func>
                                 <m:funcPr>
                                   <m:ctrlPr>
-                                    <a:rPr lang="pt-BR">
+                                    <a:rPr lang="pt-BR" i="1">
                                       <a:latin typeface="Cambria Math" panose="02040503050406030204" pitchFamily="18" charset="0"/>
                                     </a:rPr>
                                   </m:ctrlPr>
@@ -8579,8 +8566,6 @@
                                           <m:groupChr>
                                             <m:groupChrPr>
                                               <m:chr m:val="⏟"/>
-                                              <m:pos m:val="bot"/>
-                                              <m:vertJc m:val="top"/>
                                               <m:ctrlPr>
                                                 <a:rPr lang="pt-BR" b="1" i="1">
                                                   <a:latin typeface="Cambria Math" panose="02040503050406030204" pitchFamily="18" charset="0"/>
@@ -8601,7 +8586,7 @@
                                                     <a:rPr lang="pt-BR" i="1">
                                                       <a:latin typeface="Cambria Math" panose="02040503050406030204" pitchFamily="18" charset="0"/>
                                                     </a:rPr>
-                                                    <m:t>ℎ</m:t>
+                                                    <m:t>h</m:t>
                                                   </m:r>
                                                 </m:e>
                                                 <m:sub>
@@ -8923,7 +8908,7 @@
                           <a:rPr lang="pt-BR" i="1">
                             <a:latin typeface="Cambria Math" panose="02040503050406030204" pitchFamily="18" charset="0"/>
                           </a:rPr>
-                          <m:t>ℎ</m:t>
+                          <m:t>h</m:t>
                         </m:r>
                       </m:e>
                       <m:sub>
@@ -9056,7 +9041,7 @@
                           <a:rPr lang="pt-BR" i="1">
                             <a:latin typeface="Cambria Math" panose="02040503050406030204" pitchFamily="18" charset="0"/>
                           </a:rPr>
-                          <m:t>ℎ</m:t>
+                          <m:t>h</m:t>
                         </m:r>
                       </m:e>
                       <m:sub>
@@ -9200,7 +9185,7 @@
           <p:cNvPr id="2" name="Title 1">
             <a:extLst>
               <a:ext uri="{FF2B5EF4-FFF2-40B4-BE49-F238E27FC236}">
-                <a16:creationId xmlns:a16="http://schemas.microsoft.com/office/drawing/2014/main" id="{997538D5-DC01-EC48-38D2-99D754F1BB92}"/>
+                <a16:creationId xmlns:a16="http://schemas.microsoft.com/office/drawing/2014/main" xmlns="" id="{997538D5-DC01-EC48-38D2-99D754F1BB92}"/>
               </a:ext>
             </a:extLst>
           </p:cNvPr>
@@ -9224,14 +9209,14 @@
           </a:p>
         </p:txBody>
       </p:sp>
-      <mc:AlternateContent xmlns:mc="http://schemas.openxmlformats.org/markup-compatibility/2006">
-        <mc:Choice xmlns:a14="http://schemas.microsoft.com/office/drawing/2010/main" Requires="a14">
+      <mc:AlternateContent xmlns:mc="http://schemas.openxmlformats.org/markup-compatibility/2006" xmlns:a14="http://schemas.microsoft.com/office/drawing/2010/main">
+        <mc:Choice Requires="a14">
           <p:sp>
             <p:nvSpPr>
               <p:cNvPr id="3" name="Content Placeholder 2">
                 <a:extLst>
                   <a:ext uri="{FF2B5EF4-FFF2-40B4-BE49-F238E27FC236}">
-                    <a16:creationId xmlns:a16="http://schemas.microsoft.com/office/drawing/2014/main" id="{17D7928D-3A32-7330-5FDC-756155EF2F3D}"/>
+                    <a16:creationId xmlns:a16="http://schemas.microsoft.com/office/drawing/2014/main" xmlns="" id="{17D7928D-3A32-7330-5FDC-756155EF2F3D}"/>
                   </a:ext>
                 </a:extLst>
               </p:cNvPr>
@@ -9257,7 +9242,10 @@
                 </a:pPr>
                 <a14:m>
                   <m:oMathPara xmlns:m="http://schemas.openxmlformats.org/officeDocument/2006/math">
-                    <m:oMath>
+                    <m:oMathParaPr>
+                      <m:jc m:val="centerGroup"/>
+                    </m:oMathParaPr>
+                    <m:oMath xmlns:m="http://schemas.openxmlformats.org/officeDocument/2006/math">
                       <m:sSub>
                         <m:sSubPr>
                           <m:ctrlPr>
@@ -9467,7 +9455,7 @@
                               <m:func>
                                 <m:funcPr>
                                   <m:ctrlPr>
-                                    <a:rPr lang="pt-BR">
+                                    <a:rPr lang="pt-BR" i="1">
                                       <a:latin typeface="Cambria Math" panose="02040503050406030204" pitchFamily="18" charset="0"/>
                                     </a:rPr>
                                   </m:ctrlPr>
@@ -9672,7 +9660,7 @@
             </p:txBody>
           </p:sp>
         </mc:Choice>
-        <mc:Fallback>
+        <mc:Fallback xmlns="">
           <p:sp>
             <p:nvSpPr>
               <p:cNvPr id="3" name="Content Placeholder 2">
@@ -9721,7 +9709,7 @@
           <p:cNvPr id="5" name="Picture 4">
             <a:extLst>
               <a:ext uri="{FF2B5EF4-FFF2-40B4-BE49-F238E27FC236}">
-                <a16:creationId xmlns:a16="http://schemas.microsoft.com/office/drawing/2014/main" id="{4AA09737-BB93-F7AB-8A47-090B362628C6}"/>
+                <a16:creationId xmlns:a16="http://schemas.microsoft.com/office/drawing/2014/main" xmlns="" id="{4AA09737-BB93-F7AB-8A47-090B362628C6}"/>
               </a:ext>
             </a:extLst>
           </p:cNvPr>
@@ -9787,7 +9775,7 @@
           <p:cNvPr id="2" name="Título 1">
             <a:extLst>
               <a:ext uri="{FF2B5EF4-FFF2-40B4-BE49-F238E27FC236}">
-                <a16:creationId xmlns:a16="http://schemas.microsoft.com/office/drawing/2014/main" id="{1FE7CD05-66F2-8967-6154-CCED38E0F987}"/>
+                <a16:creationId xmlns:a16="http://schemas.microsoft.com/office/drawing/2014/main" xmlns="" id="{1FE7CD05-66F2-8967-6154-CCED38E0F987}"/>
               </a:ext>
             </a:extLst>
           </p:cNvPr>
@@ -9810,14 +9798,14 @@
           </a:p>
         </p:txBody>
       </p:sp>
-      <mc:AlternateContent xmlns:mc="http://schemas.openxmlformats.org/markup-compatibility/2006">
-        <mc:Choice xmlns:a14="http://schemas.microsoft.com/office/drawing/2010/main" Requires="a14">
+      <mc:AlternateContent xmlns:mc="http://schemas.openxmlformats.org/markup-compatibility/2006" xmlns:a14="http://schemas.microsoft.com/office/drawing/2010/main">
+        <mc:Choice Requires="a14">
           <p:sp>
             <p:nvSpPr>
               <p:cNvPr id="3" name="Espaço Reservado para Conteúdo 2">
                 <a:extLst>
                   <a:ext uri="{FF2B5EF4-FFF2-40B4-BE49-F238E27FC236}">
-                    <a16:creationId xmlns:a16="http://schemas.microsoft.com/office/drawing/2014/main" id="{21A86630-5D79-AD4B-79FC-6C8373E8DB39}"/>
+                    <a16:creationId xmlns:a16="http://schemas.microsoft.com/office/drawing/2014/main" xmlns="" id="{21A86630-5D79-AD4B-79FC-6C8373E8DB39}"/>
                   </a:ext>
                 </a:extLst>
               </p:cNvPr>
@@ -9859,7 +9847,10 @@
                 </a:pPr>
                 <a14:m>
                   <m:oMathPara xmlns:m="http://schemas.openxmlformats.org/officeDocument/2006/math">
-                    <m:oMath>
+                    <m:oMathParaPr>
+                      <m:jc m:val="centerGroup"/>
+                    </m:oMathParaPr>
+                    <m:oMath xmlns:m="http://schemas.openxmlformats.org/officeDocument/2006/math">
                       <m:sSub>
                         <m:sSubPr>
                           <m:ctrlPr>
@@ -10016,7 +10007,7 @@
                           <m:func>
                             <m:funcPr>
                               <m:ctrlPr>
-                                <a:rPr lang="pt-BR">
+                                <a:rPr lang="pt-BR" i="1">
                                   <a:latin typeface="Cambria Math" panose="02040503050406030204" pitchFamily="18" charset="0"/>
                                 </a:rPr>
                               </m:ctrlPr>
@@ -10162,8 +10153,6 @@
                                 <m:groupChr>
                                   <m:groupChrPr>
                                     <m:chr m:val="⏟"/>
-                                    <m:pos m:val="bot"/>
-                                    <m:vertJc m:val="top"/>
                                     <m:ctrlPr>
                                       <a:rPr lang="pt-BR" i="1">
                                         <a:latin typeface="Cambria Math" panose="02040503050406030204" pitchFamily="18" charset="0"/>
@@ -10299,8 +10288,6 @@
                                 <m:groupChr>
                                   <m:groupChrPr>
                                     <m:chr m:val="⏟"/>
-                                    <m:pos m:val="bot"/>
-                                    <m:vertJc m:val="top"/>
                                     <m:ctrlPr>
                                       <a:rPr lang="pt-BR" i="1">
                                         <a:latin typeface="Cambria Math" panose="02040503050406030204" pitchFamily="18" charset="0"/>
@@ -10880,7 +10867,7 @@
             </p:txBody>
           </p:sp>
         </mc:Choice>
-        <mc:Fallback>
+        <mc:Fallback xmlns="">
           <p:sp>
             <p:nvSpPr>
               <p:cNvPr id="3" name="Espaço Reservado para Conteúdo 2">
@@ -10959,7 +10946,7 @@
           <p:cNvPr id="2" name="Título 1">
             <a:extLst>
               <a:ext uri="{FF2B5EF4-FFF2-40B4-BE49-F238E27FC236}">
-                <a16:creationId xmlns:a16="http://schemas.microsoft.com/office/drawing/2014/main" id="{E4598F11-6F65-0753-89FE-F5ABED77B46A}"/>
+                <a16:creationId xmlns:a16="http://schemas.microsoft.com/office/drawing/2014/main" xmlns="" id="{E4598F11-6F65-0753-89FE-F5ABED77B46A}"/>
               </a:ext>
             </a:extLst>
           </p:cNvPr>
@@ -10983,14 +10970,14 @@
           </a:p>
         </p:txBody>
       </p:sp>
-      <mc:AlternateContent xmlns:mc="http://schemas.openxmlformats.org/markup-compatibility/2006">
-        <mc:Choice xmlns:a14="http://schemas.microsoft.com/office/drawing/2010/main" Requires="a14">
+      <mc:AlternateContent xmlns:mc="http://schemas.openxmlformats.org/markup-compatibility/2006" xmlns:a14="http://schemas.microsoft.com/office/drawing/2010/main">
+        <mc:Choice Requires="a14">
           <p:sp>
             <p:nvSpPr>
               <p:cNvPr id="3" name="Espaço Reservado para Conteúdo 2">
                 <a:extLst>
                   <a:ext uri="{FF2B5EF4-FFF2-40B4-BE49-F238E27FC236}">
-                    <a16:creationId xmlns:a16="http://schemas.microsoft.com/office/drawing/2014/main" id="{FEF4E6DC-E916-D97A-4D18-D469285C4F2C}"/>
+                    <a16:creationId xmlns:a16="http://schemas.microsoft.com/office/drawing/2014/main" xmlns="" id="{FEF4E6DC-E916-D97A-4D18-D469285C4F2C}"/>
                   </a:ext>
                 </a:extLst>
               </p:cNvPr>
@@ -11018,7 +11005,10 @@
                 </a:pPr>
                 <a14:m>
                   <m:oMathPara xmlns:m="http://schemas.openxmlformats.org/officeDocument/2006/math">
-                    <m:oMath>
+                    <m:oMathParaPr>
+                      <m:jc m:val="centerGroup"/>
+                    </m:oMathParaPr>
+                    <m:oMath xmlns:m="http://schemas.openxmlformats.org/officeDocument/2006/math">
                       <m:sSub>
                         <m:sSubPr>
                           <m:ctrlPr>
@@ -11148,8 +11138,6 @@
                               <m:groupChr>
                                 <m:groupChrPr>
                                   <m:chr m:val="⏟"/>
-                                  <m:pos m:val="bot"/>
-                                  <m:vertJc m:val="top"/>
                                   <m:ctrlPr>
                                     <a:rPr lang="pt-BR" i="1">
                                       <a:latin typeface="Cambria Math" panose="02040503050406030204" pitchFamily="18" charset="0"/>
@@ -11201,13 +11189,7 @@
                                         <a:rPr lang="pt-BR" i="1">
                                           <a:latin typeface="Cambria Math" panose="02040503050406030204" pitchFamily="18" charset="0"/>
                                         </a:rPr>
-                                        <m:t>==</m:t>
-                                      </m:r>
-                                      <m:r>
-                                        <a:rPr lang="pt-BR" i="1">
-                                          <a:latin typeface="Cambria Math" panose="02040503050406030204" pitchFamily="18" charset="0"/>
-                                        </a:rPr>
-                                        <m:t>0</m:t>
+                                        <m:t>==0</m:t>
                                       </m:r>
                                     </m:e>
                                   </m:d>
@@ -11255,7 +11237,7 @@
                           <m:func>
                             <m:funcPr>
                               <m:ctrlPr>
-                                <a:rPr lang="pt-BR">
+                                <a:rPr lang="pt-BR" i="1">
                                   <a:latin typeface="Cambria Math" panose="02040503050406030204" pitchFamily="18" charset="0"/>
                                 </a:rPr>
                               </m:ctrlPr>
@@ -11357,8 +11339,6 @@
                               <m:groupChr>
                                 <m:groupChrPr>
                                   <m:chr m:val="⏟"/>
-                                  <m:pos m:val="bot"/>
-                                  <m:vertJc m:val="top"/>
                                   <m:ctrlPr>
                                     <a:rPr lang="pt-BR" i="1">
                                       <a:latin typeface="Cambria Math" panose="02040503050406030204" pitchFamily="18" charset="0"/>
@@ -11410,13 +11390,7 @@
                                         <a:rPr lang="pt-BR" i="1">
                                           <a:latin typeface="Cambria Math" panose="02040503050406030204" pitchFamily="18" charset="0"/>
                                         </a:rPr>
-                                        <m:t>==</m:t>
-                                      </m:r>
-                                      <m:r>
-                                        <a:rPr lang="pt-BR" i="1">
-                                          <a:latin typeface="Cambria Math" panose="02040503050406030204" pitchFamily="18" charset="0"/>
-                                        </a:rPr>
-                                        <m:t>1</m:t>
+                                        <m:t>==1</m:t>
                                       </m:r>
                                     </m:e>
                                   </m:d>
@@ -11452,7 +11426,7 @@
                           <m:func>
                             <m:funcPr>
                               <m:ctrlPr>
-                                <a:rPr lang="pt-BR">
+                                <a:rPr lang="pt-BR" i="1">
                                   <a:latin typeface="Cambria Math" panose="02040503050406030204" pitchFamily="18" charset="0"/>
                                 </a:rPr>
                               </m:ctrlPr>
@@ -11678,7 +11652,7 @@
             </p:txBody>
           </p:sp>
         </mc:Choice>
-        <mc:Fallback>
+        <mc:Fallback xmlns="">
           <p:sp>
             <p:nvSpPr>
               <p:cNvPr id="3" name="Espaço Reservado para Conteúdo 2">
@@ -11757,7 +11731,7 @@
           <p:cNvPr id="2" name="Título 1">
             <a:extLst>
               <a:ext uri="{FF2B5EF4-FFF2-40B4-BE49-F238E27FC236}">
-                <a16:creationId xmlns:a16="http://schemas.microsoft.com/office/drawing/2014/main" id="{D5807923-28D2-8150-E304-526DA460D220}"/>
+                <a16:creationId xmlns:a16="http://schemas.microsoft.com/office/drawing/2014/main" xmlns="" id="{D5807923-28D2-8150-E304-526DA460D220}"/>
               </a:ext>
             </a:extLst>
           </p:cNvPr>
@@ -11786,7 +11760,7 @@
           <p:cNvPr id="3" name="Espaço Reservado para Conteúdo 2">
             <a:extLst>
               <a:ext uri="{FF2B5EF4-FFF2-40B4-BE49-F238E27FC236}">
-                <a16:creationId xmlns:a16="http://schemas.microsoft.com/office/drawing/2014/main" id="{FFACD180-C529-EB91-BD2D-B5F491B1E35C}"/>
+                <a16:creationId xmlns:a16="http://schemas.microsoft.com/office/drawing/2014/main" xmlns="" id="{FFACD180-C529-EB91-BD2D-B5F491B1E35C}"/>
               </a:ext>
             </a:extLst>
           </p:cNvPr>
@@ -11911,8 +11885,21 @@
           <a:p>
             <a:r>
               <a:rPr lang="pt-BR" dirty="0"/>
-              <a:t>Vejamos como fica o GD.</a:t>
-            </a:r>
+              <a:t>Vejamos como fica o </a:t>
+            </a:r>
+            <a:r>
+              <a:rPr lang="pt-BR" dirty="0" smtClean="0"/>
+              <a:t>GD para o regressor </a:t>
+            </a:r>
+            <a:r>
+              <a:rPr lang="pt-BR" i="1" dirty="0" err="1" smtClean="0"/>
+              <a:t>softmax</a:t>
+            </a:r>
+            <a:r>
+              <a:rPr lang="pt-BR" dirty="0" smtClean="0"/>
+              <a:t>.</a:t>
+            </a:r>
+            <a:endParaRPr lang="pt-BR" dirty="0"/>
           </a:p>
           <a:p>
             <a:endParaRPr lang="pt-BR" dirty="0"/>
@@ -11924,7 +11911,7 @@
           <p:cNvPr id="1026" name="Picture 2">
             <a:extLst>
               <a:ext uri="{FF2B5EF4-FFF2-40B4-BE49-F238E27FC236}">
-                <a16:creationId xmlns:a16="http://schemas.microsoft.com/office/drawing/2014/main" id="{6FC2BDE8-91E0-6379-9BA3-76511C6153D5}"/>
+                <a16:creationId xmlns:a16="http://schemas.microsoft.com/office/drawing/2014/main" xmlns="" id="{6FC2BDE8-91E0-6379-9BA3-76511C6153D5}"/>
               </a:ext>
             </a:extLst>
           </p:cNvPr>
@@ -11969,7 +11956,7 @@
           <p:cNvPr id="5" name="Picture 2">
             <a:extLst>
               <a:ext uri="{FF2B5EF4-FFF2-40B4-BE49-F238E27FC236}">
-                <a16:creationId xmlns:a16="http://schemas.microsoft.com/office/drawing/2014/main" id="{2771BE1F-7B74-36A4-AA69-9171B025A4B6}"/>
+                <a16:creationId xmlns:a16="http://schemas.microsoft.com/office/drawing/2014/main" xmlns="" id="{2771BE1F-7B74-36A4-AA69-9171B025A4B6}"/>
               </a:ext>
             </a:extLst>
           </p:cNvPr>
@@ -12044,7 +12031,7 @@
           <p:cNvPr id="2" name="Título 1">
             <a:extLst>
               <a:ext uri="{FF2B5EF4-FFF2-40B4-BE49-F238E27FC236}">
-                <a16:creationId xmlns:a16="http://schemas.microsoft.com/office/drawing/2014/main" id="{5D929962-9BFC-4174-AB35-CC23FA013168}"/>
+                <a16:creationId xmlns:a16="http://schemas.microsoft.com/office/drawing/2014/main" xmlns="" id="{5D929962-9BFC-4174-AB35-CC23FA013168}"/>
               </a:ext>
             </a:extLst>
           </p:cNvPr>
@@ -12068,14 +12055,14 @@
           </a:p>
         </p:txBody>
       </p:sp>
-      <mc:AlternateContent xmlns:mc="http://schemas.openxmlformats.org/markup-compatibility/2006">
-        <mc:Choice xmlns:a14="http://schemas.microsoft.com/office/drawing/2010/main" Requires="a14">
+      <mc:AlternateContent xmlns:mc="http://schemas.openxmlformats.org/markup-compatibility/2006" xmlns:a14="http://schemas.microsoft.com/office/drawing/2010/main">
+        <mc:Choice Requires="a14">
           <p:sp>
             <p:nvSpPr>
               <p:cNvPr id="3" name="Espaço Reservado para Conteúdo 2">
                 <a:extLst>
                   <a:ext uri="{FF2B5EF4-FFF2-40B4-BE49-F238E27FC236}">
-                    <a16:creationId xmlns:a16="http://schemas.microsoft.com/office/drawing/2014/main" id="{1D38055D-E355-F780-9CA0-0337EA0BE4FD}"/>
+                    <a16:creationId xmlns:a16="http://schemas.microsoft.com/office/drawing/2014/main" xmlns="" id="{1D38055D-E355-F780-9CA0-0337EA0BE4FD}"/>
                   </a:ext>
                 </a:extLst>
               </p:cNvPr>
@@ -12234,7 +12221,10 @@
                 </a:pPr>
                 <a14:m>
                   <m:oMathPara xmlns:m="http://schemas.openxmlformats.org/officeDocument/2006/math">
-                    <m:oMath>
+                    <m:oMathParaPr>
+                      <m:jc m:val="centerGroup"/>
+                    </m:oMathParaPr>
+                    <m:oMath xmlns:m="http://schemas.openxmlformats.org/officeDocument/2006/math">
                       <m:sSub>
                         <m:sSubPr>
                           <m:ctrlPr>
@@ -12547,7 +12537,10 @@
                 </a:pPr>
                 <a14:m>
                   <m:oMathPara xmlns:m="http://schemas.openxmlformats.org/officeDocument/2006/math">
-                    <m:oMath>
+                    <m:oMathParaPr>
+                      <m:jc m:val="centerGroup"/>
+                    </m:oMathParaPr>
+                    <m:oMath xmlns:m="http://schemas.openxmlformats.org/officeDocument/2006/math">
                       <m:f>
                         <m:fPr>
                           <m:ctrlPr>
@@ -12799,7 +12792,7 @@
                                     <a:rPr lang="pt-BR" sz="2400" i="1">
                                       <a:latin typeface="Cambria Math" panose="02040503050406030204" pitchFamily="18" charset="0"/>
                                     </a:rPr>
-                                    <m:t>ℎ</m:t>
+                                    <m:t>h</m:t>
                                   </m:r>
                                 </m:e>
                                 <m:sub>
@@ -13296,7 +13289,7 @@
             </p:txBody>
           </p:sp>
         </mc:Choice>
-        <mc:Fallback>
+        <mc:Fallback xmlns="">
           <p:sp>
             <p:nvSpPr>
               <p:cNvPr id="3" name="Espaço Reservado para Conteúdo 2">
@@ -13375,7 +13368,7 @@
           <p:cNvPr id="2" name="Título 1">
             <a:extLst>
               <a:ext uri="{FF2B5EF4-FFF2-40B4-BE49-F238E27FC236}">
-                <a16:creationId xmlns:a16="http://schemas.microsoft.com/office/drawing/2014/main" id="{01D0947A-594D-A8D5-95F3-38EB04C6BDB6}"/>
+                <a16:creationId xmlns:a16="http://schemas.microsoft.com/office/drawing/2014/main" xmlns="" id="{01D0947A-594D-A8D5-95F3-38EB04C6BDB6}"/>
               </a:ext>
             </a:extLst>
           </p:cNvPr>
@@ -13409,7 +13402,7 @@
               <p:cNvPr id="3" name="Espaço Reservado para Conteúdo 2">
                 <a:extLst>
                   <a:ext uri="{FF2B5EF4-FFF2-40B4-BE49-F238E27FC236}">
-                    <a16:creationId xmlns:a16="http://schemas.microsoft.com/office/drawing/2014/main" id="{DDBA288E-BBB8-E157-840C-AA685AD7D65C}"/>
+                    <a16:creationId xmlns:a16="http://schemas.microsoft.com/office/drawing/2014/main" xmlns="" id="{DDBA288E-BBB8-E157-840C-AA685AD7D65C}"/>
                   </a:ext>
                 </a:extLst>
               </p:cNvPr>
@@ -13437,7 +13430,10 @@
                 </a:pPr>
                 <a14:m>
                   <m:oMathPara xmlns:m="http://schemas.openxmlformats.org/officeDocument/2006/math">
-                    <m:oMath>
+                    <m:oMathParaPr>
+                      <m:jc m:val="centerGroup"/>
+                    </m:oMathParaPr>
+                    <m:oMath xmlns:m="http://schemas.openxmlformats.org/officeDocument/2006/math">
                       <m:f>
                         <m:fPr>
                           <m:ctrlPr>
@@ -13775,7 +13771,10 @@
                 </a:pPr>
                 <a14:m>
                   <m:oMathPara xmlns:m="http://schemas.openxmlformats.org/officeDocument/2006/math">
-                    <m:oMath>
+                    <m:oMathParaPr>
+                      <m:jc m:val="centerGroup"/>
+                    </m:oMathParaPr>
+                    <m:oMath xmlns:m="http://schemas.openxmlformats.org/officeDocument/2006/math">
                       <m:f>
                         <m:fPr>
                           <m:ctrlPr>
@@ -14327,7 +14326,7 @@
           <p:cNvPr id="2" name="Título 1">
             <a:extLst>
               <a:ext uri="{FF2B5EF4-FFF2-40B4-BE49-F238E27FC236}">
-                <a16:creationId xmlns:a16="http://schemas.microsoft.com/office/drawing/2014/main" id="{E0F1FD81-6095-2AF0-8691-34E55B8A93B5}"/>
+                <a16:creationId xmlns:a16="http://schemas.microsoft.com/office/drawing/2014/main" xmlns="" id="{E0F1FD81-6095-2AF0-8691-34E55B8A93B5}"/>
               </a:ext>
             </a:extLst>
           </p:cNvPr>
@@ -14361,7 +14360,7 @@
               <p:cNvPr id="3" name="Espaço Reservado para Conteúdo 2">
                 <a:extLst>
                   <a:ext uri="{FF2B5EF4-FFF2-40B4-BE49-F238E27FC236}">
-                    <a16:creationId xmlns:a16="http://schemas.microsoft.com/office/drawing/2014/main" id="{BB734B24-DA50-860B-5D55-C33F6F451B6F}"/>
+                    <a16:creationId xmlns:a16="http://schemas.microsoft.com/office/drawing/2014/main" xmlns="" id="{BB734B24-DA50-860B-5D55-C33F6F451B6F}"/>
                   </a:ext>
                 </a:extLst>
               </p:cNvPr>
@@ -14374,8 +14373,8 @@
             </p:nvSpPr>
             <p:spPr>
               <a:xfrm>
-                <a:off x="6096000" y="1840614"/>
-                <a:ext cx="6096000" cy="5032375"/>
+                <a:off x="6096000" y="1840615"/>
+                <a:ext cx="6096000" cy="5017386"/>
               </a:xfrm>
             </p:spPr>
             <p:txBody>
@@ -14406,23 +14405,7 @@
                       <a:schemeClr val="tx1"/>
                     </a:solidFill>
                   </a:rPr>
-                  <a:t>, o </a:t>
-                </a:r>
-                <a:r>
-                  <a:rPr lang="pt-BR" dirty="0" err="1">
-                    <a:solidFill>
-                      <a:schemeClr val="tx1"/>
-                    </a:solidFill>
-                  </a:rPr>
-                  <a:t>regressor</a:t>
-                </a:r>
-                <a:r>
-                  <a:rPr lang="pt-BR" dirty="0">
-                    <a:solidFill>
-                      <a:schemeClr val="tx1"/>
-                    </a:solidFill>
-                  </a:rPr>
-                  <a:t> atribui ao exemplo de entrada, </a:t>
+                  <a:t>, o regressor atribui ao exemplo de entrada, </a:t>
                 </a:r>
                 <a14:m>
                   <m:oMath xmlns:m="http://schemas.openxmlformats.org/officeDocument/2006/math">
@@ -14538,7 +14521,10 @@
                 </a:pPr>
                 <a14:m>
                   <m:oMathPara xmlns:m="http://schemas.openxmlformats.org/officeDocument/2006/math">
-                    <m:oMath>
+                    <m:oMathParaPr>
+                      <m:jc m:val="centerGroup"/>
+                    </m:oMathParaPr>
+                    <m:oMath xmlns:m="http://schemas.openxmlformats.org/officeDocument/2006/math">
                       <m:sSub>
                         <m:sSubPr>
                           <m:ctrlPr>
@@ -14591,7 +14577,18 @@
                             <a:schemeClr val="tx1"/>
                           </a:solidFill>
                         </a:rPr>
-                        <m:t>arg. </m:t>
+                        <m:t>arg</m:t>
+                      </m:r>
+                      <m:r>
+                        <m:rPr>
+                          <m:nor/>
+                        </m:rPr>
+                        <a:rPr lang="pt-BR" i="0" dirty="0">
+                          <a:solidFill>
+                            <a:schemeClr val="tx1"/>
+                          </a:solidFill>
+                        </a:rPr>
+                        <m:t>. </m:t>
                       </m:r>
                       <m:func>
                         <m:funcPr>
@@ -14608,7 +14605,7 @@
                           <m:limLow>
                             <m:limLowPr>
                               <m:ctrlPr>
-                                <a:rPr lang="pt-BR">
+                                <a:rPr lang="pt-BR" i="1">
                                   <a:solidFill>
                                     <a:schemeClr val="tx1"/>
                                   </a:solidFill>
@@ -14663,7 +14660,7 @@
                                   </a:solidFill>
                                   <a:latin typeface="Cambria Math" panose="02040503050406030204" pitchFamily="18" charset="0"/>
                                 </a:rPr>
-                                <m:t>ℎ</m:t>
+                                <m:t>h</m:t>
                               </m:r>
                             </m:e>
                             <m:sub>
@@ -14868,7 +14865,7 @@
               <p:cNvPr id="3" name="Espaço Reservado para Conteúdo 2">
                 <a:extLst>
                   <a:ext uri="{FF2B5EF4-FFF2-40B4-BE49-F238E27FC236}">
-                    <a16:creationId xmlns:a16="http://schemas.microsoft.com/office/drawing/2014/main" id="{BB734B24-DA50-860B-5D55-C33F6F451B6F}"/>
+                    <a16:creationId xmlns:a16="http://schemas.microsoft.com/office/drawing/2014/main" xmlns:a14="http://schemas.microsoft.com/office/drawing/2010/main" xmlns="" id="{BB734B24-DA50-860B-5D55-C33F6F451B6F}"/>
                   </a:ext>
                 </a:extLst>
               </p:cNvPr>
@@ -14881,13 +14878,13 @@
             </p:nvSpPr>
             <p:spPr>
               <a:xfrm>
-                <a:off x="6096000" y="1840614"/>
-                <a:ext cx="6096000" cy="5032375"/>
+                <a:off x="6096000" y="1840615"/>
+                <a:ext cx="6096000" cy="5017386"/>
               </a:xfrm>
-              <a:blipFill>
+              <a:blipFill rotWithShape="0">
                 <a:blip r:embed="rId3"/>
                 <a:stretch>
-                  <a:fillRect l="-1800" t="-2061" r="-2700"/>
+                  <a:fillRect l="-1800" t="-2066" r="-2700"/>
                 </a:stretch>
               </a:blipFill>
             </p:spPr>
@@ -14896,7 +14893,7 @@
               <a:lstStyle/>
               <a:p>
                 <a:r>
-                  <a:rPr lang="en-US">
+                  <a:rPr lang="pt-BR">
                     <a:noFill/>
                   </a:rPr>
                   <a:t> </a:t>
@@ -14911,7 +14908,7 @@
           <p:cNvPr id="4" name="Imagem 5">
             <a:extLst>
               <a:ext uri="{FF2B5EF4-FFF2-40B4-BE49-F238E27FC236}">
-                <a16:creationId xmlns:a16="http://schemas.microsoft.com/office/drawing/2014/main" id="{535159CB-11DC-74B8-5C5F-D571CD018327}"/>
+                <a16:creationId xmlns:a16="http://schemas.microsoft.com/office/drawing/2014/main" xmlns="" id="{535159CB-11DC-74B8-5C5F-D571CD018327}"/>
               </a:ext>
             </a:extLst>
           </p:cNvPr>
@@ -14977,7 +14974,7 @@
           <p:cNvPr id="2" name="Título 1">
             <a:extLst>
               <a:ext uri="{FF2B5EF4-FFF2-40B4-BE49-F238E27FC236}">
-                <a16:creationId xmlns:a16="http://schemas.microsoft.com/office/drawing/2014/main" id="{FC175046-E9DF-FCC8-C62B-B00332089713}"/>
+                <a16:creationId xmlns:a16="http://schemas.microsoft.com/office/drawing/2014/main" xmlns="" id="{FC175046-E9DF-FCC8-C62B-B00332089713}"/>
               </a:ext>
             </a:extLst>
           </p:cNvPr>
@@ -15011,7 +15008,7 @@
               <p:cNvPr id="3" name="Espaço Reservado para Conteúdo 2">
                 <a:extLst>
                   <a:ext uri="{FF2B5EF4-FFF2-40B4-BE49-F238E27FC236}">
-                    <a16:creationId xmlns:a16="http://schemas.microsoft.com/office/drawing/2014/main" id="{24721BB7-DBA3-D8BF-7F98-ED91BD59DAEC}"/>
+                    <a16:creationId xmlns:a16="http://schemas.microsoft.com/office/drawing/2014/main" xmlns="" id="{24721BB7-DBA3-D8BF-7F98-ED91BD59DAEC}"/>
                   </a:ext>
                 </a:extLst>
               </p:cNvPr>
@@ -15319,7 +15316,7 @@
           <p:cNvPr id="6" name="Imagem 5">
             <a:extLst>
               <a:ext uri="{FF2B5EF4-FFF2-40B4-BE49-F238E27FC236}">
-                <a16:creationId xmlns:a16="http://schemas.microsoft.com/office/drawing/2014/main" id="{FF78CF76-EB26-3FAE-0391-E452288FA28E}"/>
+                <a16:creationId xmlns:a16="http://schemas.microsoft.com/office/drawing/2014/main" xmlns="" id="{FF78CF76-EB26-3FAE-0391-E452288FA28E}"/>
               </a:ext>
             </a:extLst>
           </p:cNvPr>
@@ -15402,8 +15399,8 @@
           </a:p>
         </p:txBody>
       </p:sp>
-      <mc:AlternateContent xmlns:mc="http://schemas.openxmlformats.org/markup-compatibility/2006">
-        <mc:Choice xmlns:a14="http://schemas.microsoft.com/office/drawing/2010/main" Requires="a14">
+      <mc:AlternateContent xmlns:mc="http://schemas.openxmlformats.org/markup-compatibility/2006" xmlns:a14="http://schemas.microsoft.com/office/drawing/2010/main">
+        <mc:Choice Requires="a14">
           <p:sp>
             <p:nvSpPr>
               <p:cNvPr id="3" name="Content Placeholder 2"/>
@@ -15520,7 +15517,7 @@
             </p:txBody>
           </p:sp>
         </mc:Choice>
-        <mc:Fallback>
+        <mc:Fallback xmlns="">
           <p:sp>
             <p:nvSpPr>
               <p:cNvPr id="3" name="Content Placeholder 2"/>
@@ -15563,7 +15560,7 @@
           <p:cNvPr id="4" name="Picture 2" descr="Ana Barros (@anathinker) | Twitter">
             <a:extLst>
               <a:ext uri="{FF2B5EF4-FFF2-40B4-BE49-F238E27FC236}">
-                <a16:creationId xmlns:a16="http://schemas.microsoft.com/office/drawing/2014/main" id="{AF3F0044-4F7D-98F6-34C1-8351487DFDAA}"/>
+                <a16:creationId xmlns:a16="http://schemas.microsoft.com/office/drawing/2014/main" xmlns="" id="{AF3F0044-4F7D-98F6-34C1-8351487DFDAA}"/>
               </a:ext>
             </a:extLst>
           </p:cNvPr>
@@ -15610,7 +15607,7 @@
           <p:cNvPr id="5" name="Picture 6" descr="Analyzing Text Classification Techniques on Youtube Data">
             <a:extLst>
               <a:ext uri="{FF2B5EF4-FFF2-40B4-BE49-F238E27FC236}">
-                <a16:creationId xmlns:a16="http://schemas.microsoft.com/office/drawing/2014/main" id="{0E6041F8-AB14-54C0-C790-0288A3AC8FBA}"/>
+                <a16:creationId xmlns:a16="http://schemas.microsoft.com/office/drawing/2014/main" xmlns="" id="{0E6041F8-AB14-54C0-C790-0288A3AC8FBA}"/>
               </a:ext>
             </a:extLst>
           </p:cNvPr>
@@ -15655,7 +15652,7 @@
           <p:cNvPr id="6" name="Picture 2" descr="Sentiment Fig 1">
             <a:extLst>
               <a:ext uri="{FF2B5EF4-FFF2-40B4-BE49-F238E27FC236}">
-                <a16:creationId xmlns:a16="http://schemas.microsoft.com/office/drawing/2014/main" id="{1E7CC96F-55AB-1482-92F6-240F8E2E0D1E}"/>
+                <a16:creationId xmlns:a16="http://schemas.microsoft.com/office/drawing/2014/main" xmlns="" id="{1E7CC96F-55AB-1482-92F6-240F8E2E0D1E}"/>
               </a:ext>
             </a:extLst>
           </p:cNvPr>
@@ -15732,7 +15729,7 @@
           <p:cNvPr id="2" name="Título 1">
             <a:extLst>
               <a:ext uri="{FF2B5EF4-FFF2-40B4-BE49-F238E27FC236}">
-                <a16:creationId xmlns:a16="http://schemas.microsoft.com/office/drawing/2014/main" id="{94AB8438-E56E-2412-517C-8456E4CA773C}"/>
+                <a16:creationId xmlns:a16="http://schemas.microsoft.com/office/drawing/2014/main" xmlns="" id="{94AB8438-E56E-2412-517C-8456E4CA773C}"/>
               </a:ext>
             </a:extLst>
           </p:cNvPr>
@@ -15760,7 +15757,7 @@
           <p:cNvPr id="3" name="Espaço Reservado para Conteúdo 2">
             <a:extLst>
               <a:ext uri="{FF2B5EF4-FFF2-40B4-BE49-F238E27FC236}">
-                <a16:creationId xmlns:a16="http://schemas.microsoft.com/office/drawing/2014/main" id="{F7E2B09C-6D56-4C9F-A364-B904CCE2F1A0}"/>
+                <a16:creationId xmlns:a16="http://schemas.microsoft.com/office/drawing/2014/main" xmlns="" id="{F7E2B09C-6D56-4C9F-A364-B904CCE2F1A0}"/>
               </a:ext>
             </a:extLst>
           </p:cNvPr>
@@ -15797,7 +15794,7 @@
           <p:cNvPr id="18" name="Group 17">
             <a:extLst>
               <a:ext uri="{FF2B5EF4-FFF2-40B4-BE49-F238E27FC236}">
-                <a16:creationId xmlns:a16="http://schemas.microsoft.com/office/drawing/2014/main" id="{627C64FD-88E0-EC8E-2A34-0D5737B4C854}"/>
+                <a16:creationId xmlns:a16="http://schemas.microsoft.com/office/drawing/2014/main" xmlns="" id="{627C64FD-88E0-EC8E-2A34-0D5737B4C854}"/>
               </a:ext>
             </a:extLst>
           </p:cNvPr>
@@ -15817,7 +15814,7 @@
             <p:cNvPr id="12" name="Picture 4" descr="Project Jupyter | Try Jupyter">
               <a:extLst>
                 <a:ext uri="{FF2B5EF4-FFF2-40B4-BE49-F238E27FC236}">
-                  <a16:creationId xmlns:a16="http://schemas.microsoft.com/office/drawing/2014/main" id="{FF92EA36-91E7-292B-D7A0-2D4D83A10F98}"/>
+                  <a16:creationId xmlns:a16="http://schemas.microsoft.com/office/drawing/2014/main" xmlns="" id="{FF92EA36-91E7-292B-D7A0-2D4D83A10F98}"/>
                 </a:ext>
               </a:extLst>
             </p:cNvPr>
@@ -15864,7 +15861,7 @@
             <p:cNvPr id="13" name="Picture 8" descr="Google Colaboratory Colab - Guía Completa Español - Marketing Branding">
               <a:extLst>
                 <a:ext uri="{FF2B5EF4-FFF2-40B4-BE49-F238E27FC236}">
-                  <a16:creationId xmlns:a16="http://schemas.microsoft.com/office/drawing/2014/main" id="{46F1718A-89E6-9E63-E40B-2B19852D6AA0}"/>
+                  <a16:creationId xmlns:a16="http://schemas.microsoft.com/office/drawing/2014/main" xmlns="" id="{46F1718A-89E6-9E63-E40B-2B19852D6AA0}"/>
                 </a:ext>
               </a:extLst>
             </p:cNvPr>
@@ -15909,7 +15906,7 @@
             <p:cNvPr id="14" name="Picture 10" descr="IT12A01: FUNDAMENTALS OF PYTHON PROGRAMMING (SF) (SYNCHRONOUS E-LEARNING) -  NTUC LearningHub">
               <a:extLst>
                 <a:ext uri="{FF2B5EF4-FFF2-40B4-BE49-F238E27FC236}">
-                  <a16:creationId xmlns:a16="http://schemas.microsoft.com/office/drawing/2014/main" id="{33F6B1B4-9B79-D634-3E35-33F24609C848}"/>
+                  <a16:creationId xmlns:a16="http://schemas.microsoft.com/office/drawing/2014/main" xmlns="" id="{33F6B1B4-9B79-D634-3E35-33F24609C848}"/>
                 </a:ext>
               </a:extLst>
             </p:cNvPr>
@@ -15954,7 +15951,7 @@
             <p:cNvPr id="15" name="Sinal de Adição 7">
               <a:extLst>
                 <a:ext uri="{FF2B5EF4-FFF2-40B4-BE49-F238E27FC236}">
-                  <a16:creationId xmlns:a16="http://schemas.microsoft.com/office/drawing/2014/main" id="{6959EE6C-DCDB-E78B-5C50-EBD3FF3049E2}"/>
+                  <a16:creationId xmlns:a16="http://schemas.microsoft.com/office/drawing/2014/main" xmlns="" id="{6959EE6C-DCDB-E78B-5C50-EBD3FF3049E2}"/>
                 </a:ext>
               </a:extLst>
             </p:cNvPr>
@@ -16002,7 +15999,7 @@
             <p:cNvPr id="17" name="Sinal de Adição 10">
               <a:extLst>
                 <a:ext uri="{FF2B5EF4-FFF2-40B4-BE49-F238E27FC236}">
-                  <a16:creationId xmlns:a16="http://schemas.microsoft.com/office/drawing/2014/main" id="{30A21FDB-ABA6-9FD5-49EF-7762414AEF0C}"/>
+                  <a16:creationId xmlns:a16="http://schemas.microsoft.com/office/drawing/2014/main" xmlns="" id="{30A21FDB-ABA6-9FD5-49EF-7762414AEF0C}"/>
                 </a:ext>
               </a:extLst>
             </p:cNvPr>
@@ -16081,7 +16078,7 @@
           <p:cNvPr id="2" name="Title 1">
             <a:extLst>
               <a:ext uri="{FF2B5EF4-FFF2-40B4-BE49-F238E27FC236}">
-                <a16:creationId xmlns:a16="http://schemas.microsoft.com/office/drawing/2014/main" id="{CF49AE95-3E0A-F9BB-A3FD-4C328EF25334}"/>
+                <a16:creationId xmlns:a16="http://schemas.microsoft.com/office/drawing/2014/main" xmlns="" id="{CF49AE95-3E0A-F9BB-A3FD-4C328EF25334}"/>
               </a:ext>
             </a:extLst>
           </p:cNvPr>
@@ -16110,7 +16107,7 @@
           <p:cNvPr id="3" name="Content Placeholder 2">
             <a:extLst>
               <a:ext uri="{FF2B5EF4-FFF2-40B4-BE49-F238E27FC236}">
-                <a16:creationId xmlns:a16="http://schemas.microsoft.com/office/drawing/2014/main" id="{A431927B-FE56-CB25-3ECF-AB5E92A7DC71}"/>
+                <a16:creationId xmlns:a16="http://schemas.microsoft.com/office/drawing/2014/main" xmlns="" id="{A431927B-FE56-CB25-3ECF-AB5E92A7DC71}"/>
               </a:ext>
             </a:extLst>
           </p:cNvPr>
@@ -16192,7 +16189,7 @@
           <p:cNvPr id="4" name="Título 1">
             <a:extLst>
               <a:ext uri="{FF2B5EF4-FFF2-40B4-BE49-F238E27FC236}">
-                <a16:creationId xmlns:a16="http://schemas.microsoft.com/office/drawing/2014/main" id="{32666AC8-2E17-4DB4-B0F5-60C640CCFD2E}"/>
+                <a16:creationId xmlns:a16="http://schemas.microsoft.com/office/drawing/2014/main" xmlns="" id="{32666AC8-2E17-4DB4-B0F5-60C640CCFD2E}"/>
               </a:ext>
             </a:extLst>
           </p:cNvPr>
@@ -16278,7 +16275,7 @@
           <p:cNvPr id="4" name="Título 1">
             <a:extLst>
               <a:ext uri="{FF2B5EF4-FFF2-40B4-BE49-F238E27FC236}">
-                <a16:creationId xmlns:a16="http://schemas.microsoft.com/office/drawing/2014/main" id="{32666AC8-2E17-4DB4-B0F5-60C640CCFD2E}"/>
+                <a16:creationId xmlns:a16="http://schemas.microsoft.com/office/drawing/2014/main" xmlns="" id="{32666AC8-2E17-4DB4-B0F5-60C640CCFD2E}"/>
               </a:ext>
             </a:extLst>
           </p:cNvPr>
@@ -16350,7 +16347,7 @@
         <p:cNvPr id="1" name="">
           <a:extLst>
             <a:ext uri="{FF2B5EF4-FFF2-40B4-BE49-F238E27FC236}">
-              <a16:creationId xmlns:a16="http://schemas.microsoft.com/office/drawing/2014/main" id="{66DA37F4-4ED4-806C-CFDE-46C776755B3A}"/>
+              <a16:creationId xmlns:a16="http://schemas.microsoft.com/office/drawing/2014/main" xmlns="" id="{66DA37F4-4ED4-806C-CFDE-46C776755B3A}"/>
             </a:ext>
           </a:extLst>
         </p:cNvPr>
@@ -16370,7 +16367,7 @@
           <p:cNvPr id="4" name="Título 1">
             <a:extLst>
               <a:ext uri="{FF2B5EF4-FFF2-40B4-BE49-F238E27FC236}">
-                <a16:creationId xmlns:a16="http://schemas.microsoft.com/office/drawing/2014/main" id="{616605E6-566B-D397-B0D6-339FE7F8CB5E}"/>
+                <a16:creationId xmlns:a16="http://schemas.microsoft.com/office/drawing/2014/main" xmlns="" id="{616605E6-566B-D397-B0D6-339FE7F8CB5E}"/>
               </a:ext>
             </a:extLst>
           </p:cNvPr>
@@ -16456,7 +16453,7 @@
           <p:cNvPr id="4" name="Agrupar 22">
             <a:extLst>
               <a:ext uri="{FF2B5EF4-FFF2-40B4-BE49-F238E27FC236}">
-                <a16:creationId xmlns:a16="http://schemas.microsoft.com/office/drawing/2014/main" id="{BDB2E9D3-18AD-6A55-F414-20E01AF3185A}"/>
+                <a16:creationId xmlns:a16="http://schemas.microsoft.com/office/drawing/2014/main" xmlns="" id="{BDB2E9D3-18AD-6A55-F414-20E01AF3185A}"/>
               </a:ext>
             </a:extLst>
           </p:cNvPr>
@@ -16478,7 +16475,7 @@
                 <p:cNvPr id="5" name="CaixaDeTexto 5">
                   <a:extLst>
                     <a:ext uri="{FF2B5EF4-FFF2-40B4-BE49-F238E27FC236}">
-                      <a16:creationId xmlns:a16="http://schemas.microsoft.com/office/drawing/2014/main" id="{AF11FFDB-E923-3C94-D47A-83418BDAD06C}"/>
+                      <a16:creationId xmlns:a16="http://schemas.microsoft.com/office/drawing/2014/main" xmlns="" id="{AF11FFDB-E923-3C94-D47A-83418BDAD06C}"/>
                     </a:ext>
                   </a:extLst>
                 </p:cNvPr>
@@ -16504,7 +16501,10 @@
                   <a:pPr/>
                   <a14:m>
                     <m:oMathPara xmlns:m="http://schemas.openxmlformats.org/officeDocument/2006/math">
-                      <m:oMath>
+                      <m:oMathParaPr>
+                        <m:jc m:val="centerGroup"/>
+                      </m:oMathParaPr>
+                      <m:oMath xmlns:m="http://schemas.openxmlformats.org/officeDocument/2006/math">
                         <m:d>
                           <m:dPr>
                             <m:begChr m:val="["/>
@@ -16682,7 +16682,7 @@
             <p:cNvPr id="6" name="Agrupar 21">
               <a:extLst>
                 <a:ext uri="{FF2B5EF4-FFF2-40B4-BE49-F238E27FC236}">
-                  <a16:creationId xmlns:a16="http://schemas.microsoft.com/office/drawing/2014/main" id="{0216B346-D594-78F5-A2A5-C50F3A50B5DC}"/>
+                  <a16:creationId xmlns:a16="http://schemas.microsoft.com/office/drawing/2014/main" xmlns="" id="{0216B346-D594-78F5-A2A5-C50F3A50B5DC}"/>
                 </a:ext>
               </a:extLst>
             </p:cNvPr>
@@ -16702,7 +16702,7 @@
               <p:cNvPr id="19" name="Retângulo 6">
                 <a:extLst>
                   <a:ext uri="{FF2B5EF4-FFF2-40B4-BE49-F238E27FC236}">
-                    <a16:creationId xmlns:a16="http://schemas.microsoft.com/office/drawing/2014/main" id="{C45F9961-D53D-BEB9-F54B-3CC4703FA1F8}"/>
+                    <a16:creationId xmlns:a16="http://schemas.microsoft.com/office/drawing/2014/main" xmlns="" id="{C45F9961-D53D-BEB9-F54B-3CC4703FA1F8}"/>
                   </a:ext>
                 </a:extLst>
               </p:cNvPr>
@@ -16749,14 +16749,14 @@
               </a:p>
             </p:txBody>
           </p:sp>
-          <mc:AlternateContent xmlns:mc="http://schemas.openxmlformats.org/markup-compatibility/2006">
-            <mc:Choice xmlns:a14="http://schemas.microsoft.com/office/drawing/2010/main" Requires="a14">
+          <mc:AlternateContent xmlns:mc="http://schemas.openxmlformats.org/markup-compatibility/2006" xmlns:a14="http://schemas.microsoft.com/office/drawing/2010/main">
+            <mc:Choice Requires="a14">
               <p:sp>
                 <p:nvSpPr>
                   <p:cNvPr id="20" name="CaixaDeTexto 7">
                     <a:extLst>
                       <a:ext uri="{FF2B5EF4-FFF2-40B4-BE49-F238E27FC236}">
-                        <a16:creationId xmlns:a16="http://schemas.microsoft.com/office/drawing/2014/main" id="{DD14F424-8D9A-FCFC-0455-7D5B5C6C43F0}"/>
+                        <a16:creationId xmlns:a16="http://schemas.microsoft.com/office/drawing/2014/main" xmlns="" id="{DD14F424-8D9A-FCFC-0455-7D5B5C6C43F0}"/>
                       </a:ext>
                     </a:extLst>
                   </p:cNvPr>
@@ -16782,7 +16782,10 @@
                     <a:pPr/>
                     <a14:m>
                       <m:oMathPara xmlns:m="http://schemas.openxmlformats.org/officeDocument/2006/math">
-                        <m:oMath>
+                        <m:oMathParaPr>
+                          <m:jc m:val="centerGroup"/>
+                        </m:oMathParaPr>
+                        <m:oMath xmlns:m="http://schemas.openxmlformats.org/officeDocument/2006/math">
                           <m:f>
                             <m:fPr>
                               <m:ctrlPr>
@@ -16880,13 +16883,7 @@
                                     <a:rPr lang="pt-BR" sz="2800" b="0" i="1" smtClean="0">
                                       <a:latin typeface="Cambria Math" panose="02040503050406030204" pitchFamily="18" charset="0"/>
                                     </a:rPr>
-                                    <m:t>=</m:t>
-                                  </m:r>
-                                  <m:r>
-                                    <a:rPr lang="pt-BR" sz="2800" b="0" i="1" smtClean="0">
-                                      <a:latin typeface="Cambria Math" panose="02040503050406030204" pitchFamily="18" charset="0"/>
-                                    </a:rPr>
-                                    <m:t>0</m:t>
+                                    <m:t>=0</m:t>
                                   </m:r>
                                 </m:sub>
                                 <m:sup>
@@ -16978,7 +16975,7 @@
                 </p:txBody>
               </p:sp>
             </mc:Choice>
-            <mc:Fallback>
+            <mc:Fallback xmlns="">
               <p:sp>
                 <p:nvSpPr>
                   <p:cNvPr id="20" name="CaixaDeTexto 7">
@@ -17029,7 +17026,7 @@
             <p:cNvPr id="7" name="Seta: para a Direita 8">
               <a:extLst>
                 <a:ext uri="{FF2B5EF4-FFF2-40B4-BE49-F238E27FC236}">
-                  <a16:creationId xmlns:a16="http://schemas.microsoft.com/office/drawing/2014/main" id="{D3504EFE-235C-4EED-BD67-1F0134363B33}"/>
+                  <a16:creationId xmlns:a16="http://schemas.microsoft.com/office/drawing/2014/main" xmlns="" id="{D3504EFE-235C-4EED-BD67-1F0134363B33}"/>
                 </a:ext>
               </a:extLst>
             </p:cNvPr>
@@ -17083,7 +17080,7 @@
             <p:cNvPr id="8" name="Seta: para a Direita 9">
               <a:extLst>
                 <a:ext uri="{FF2B5EF4-FFF2-40B4-BE49-F238E27FC236}">
-                  <a16:creationId xmlns:a16="http://schemas.microsoft.com/office/drawing/2014/main" id="{E56F7404-32FC-ED2A-B5D6-AA6AAC63911A}"/>
+                  <a16:creationId xmlns:a16="http://schemas.microsoft.com/office/drawing/2014/main" xmlns="" id="{E56F7404-32FC-ED2A-B5D6-AA6AAC63911A}"/>
                 </a:ext>
               </a:extLst>
             </p:cNvPr>
@@ -17137,7 +17134,7 @@
             <p:cNvPr id="9" name="CaixaDeTexto 10">
               <a:extLst>
                 <a:ext uri="{FF2B5EF4-FFF2-40B4-BE49-F238E27FC236}">
-                  <a16:creationId xmlns:a16="http://schemas.microsoft.com/office/drawing/2014/main" id="{4F9BC649-95D4-52BD-BA63-08F8688BBFD3}"/>
+                  <a16:creationId xmlns:a16="http://schemas.microsoft.com/office/drawing/2014/main" xmlns="" id="{4F9BC649-95D4-52BD-BA63-08F8688BBFD3}"/>
                 </a:ext>
               </a:extLst>
             </p:cNvPr>
@@ -17173,7 +17170,7 @@
             <p:cNvPr id="10" name="CaixaDeTexto 12">
               <a:extLst>
                 <a:ext uri="{FF2B5EF4-FFF2-40B4-BE49-F238E27FC236}">
-                  <a16:creationId xmlns:a16="http://schemas.microsoft.com/office/drawing/2014/main" id="{9C4DD653-BC48-DCA1-5663-281ACCF13641}"/>
+                  <a16:creationId xmlns:a16="http://schemas.microsoft.com/office/drawing/2014/main" xmlns="" id="{9C4DD653-BC48-DCA1-5663-281ACCF13641}"/>
                 </a:ext>
               </a:extLst>
             </p:cNvPr>
@@ -17213,7 +17210,7 @@
             <p:cNvPr id="11" name="Agrupar 20">
               <a:extLst>
                 <a:ext uri="{FF2B5EF4-FFF2-40B4-BE49-F238E27FC236}">
-                  <a16:creationId xmlns:a16="http://schemas.microsoft.com/office/drawing/2014/main" id="{1FBA146D-CAB5-65CA-C09C-DFAE2CF0121E}"/>
+                  <a16:creationId xmlns:a16="http://schemas.microsoft.com/office/drawing/2014/main" xmlns="" id="{1FBA146D-CAB5-65CA-C09C-DFAE2CF0121E}"/>
                 </a:ext>
               </a:extLst>
             </p:cNvPr>
@@ -17235,7 +17232,7 @@
                   <p:cNvPr id="12" name="CaixaDeTexto 4">
                     <a:extLst>
                       <a:ext uri="{FF2B5EF4-FFF2-40B4-BE49-F238E27FC236}">
-                        <a16:creationId xmlns:a16="http://schemas.microsoft.com/office/drawing/2014/main" id="{43C8BB8A-C849-2483-4102-05D4F8A25AE9}"/>
+                        <a16:creationId xmlns:a16="http://schemas.microsoft.com/office/drawing/2014/main" xmlns="" id="{43C8BB8A-C849-2483-4102-05D4F8A25AE9}"/>
                       </a:ext>
                     </a:extLst>
                   </p:cNvPr>
@@ -17261,7 +17258,10 @@
                     <a:pPr/>
                     <a14:m>
                       <m:oMathPara xmlns:m="http://schemas.openxmlformats.org/officeDocument/2006/math">
-                        <m:oMath>
+                        <m:oMathParaPr>
+                          <m:jc m:val="centerGroup"/>
+                        </m:oMathParaPr>
+                        <m:oMath xmlns:m="http://schemas.openxmlformats.org/officeDocument/2006/math">
                           <m:d>
                             <m:dPr>
                               <m:begChr m:val="["/>
@@ -17441,7 +17441,7 @@
                   <p:cNvPr id="13" name="CaixaDeTexto 11">
                     <a:extLst>
                       <a:ext uri="{FF2B5EF4-FFF2-40B4-BE49-F238E27FC236}">
-                        <a16:creationId xmlns:a16="http://schemas.microsoft.com/office/drawing/2014/main" id="{AF290EB5-D075-77C8-B194-538454B60861}"/>
+                        <a16:creationId xmlns:a16="http://schemas.microsoft.com/office/drawing/2014/main" xmlns="" id="{AF290EB5-D075-77C8-B194-538454B60861}"/>
                       </a:ext>
                     </a:extLst>
                   </p:cNvPr>
@@ -17539,7 +17539,7 @@
                   <p:cNvPr id="14" name="CaixaDeTexto 14">
                     <a:extLst>
                       <a:ext uri="{FF2B5EF4-FFF2-40B4-BE49-F238E27FC236}">
-                        <a16:creationId xmlns:a16="http://schemas.microsoft.com/office/drawing/2014/main" id="{34981BFA-7FF1-3BFF-417B-6F22F9C69AF2}"/>
+                        <a16:creationId xmlns:a16="http://schemas.microsoft.com/office/drawing/2014/main" xmlns="" id="{34981BFA-7FF1-3BFF-417B-6F22F9C69AF2}"/>
                       </a:ext>
                     </a:extLst>
                   </p:cNvPr>
@@ -17565,7 +17565,10 @@
                     <a:pPr/>
                     <a14:m>
                       <m:oMathPara xmlns:m="http://schemas.openxmlformats.org/officeDocument/2006/math">
-                        <m:oMath>
+                        <m:oMathParaPr>
+                          <m:jc m:val="centerGroup"/>
+                        </m:oMathParaPr>
+                        <m:oMath xmlns:m="http://schemas.openxmlformats.org/officeDocument/2006/math">
                           <m:sSub>
                             <m:sSubPr>
                               <m:ctrlPr>
@@ -17669,7 +17672,7 @@
                   <p:cNvPr id="15" name="CaixaDeTexto 15">
                     <a:extLst>
                       <a:ext uri="{FF2B5EF4-FFF2-40B4-BE49-F238E27FC236}">
-                        <a16:creationId xmlns:a16="http://schemas.microsoft.com/office/drawing/2014/main" id="{DB8F6DFA-2208-43E8-18F4-BC5ACFDCAE49}"/>
+                        <a16:creationId xmlns:a16="http://schemas.microsoft.com/office/drawing/2014/main" xmlns="" id="{DB8F6DFA-2208-43E8-18F4-BC5ACFDCAE49}"/>
                       </a:ext>
                     </a:extLst>
                   </p:cNvPr>
@@ -17695,7 +17698,10 @@
                     <a:pPr/>
                     <a14:m>
                       <m:oMathPara xmlns:m="http://schemas.openxmlformats.org/officeDocument/2006/math">
-                        <m:oMath>
+                        <m:oMathParaPr>
+                          <m:jc m:val="centerGroup"/>
+                        </m:oMathParaPr>
+                        <m:oMath xmlns:m="http://schemas.openxmlformats.org/officeDocument/2006/math">
                           <m:sSub>
                             <m:sSubPr>
                               <m:ctrlPr>
@@ -17799,7 +17805,7 @@
                   <p:cNvPr id="16" name="CaixaDeTexto 16">
                     <a:extLst>
                       <a:ext uri="{FF2B5EF4-FFF2-40B4-BE49-F238E27FC236}">
-                        <a16:creationId xmlns:a16="http://schemas.microsoft.com/office/drawing/2014/main" id="{A5EC037D-8EF0-3DEF-2F8B-84248AE8B86A}"/>
+                        <a16:creationId xmlns:a16="http://schemas.microsoft.com/office/drawing/2014/main" xmlns="" id="{A5EC037D-8EF0-3DEF-2F8B-84248AE8B86A}"/>
                       </a:ext>
                     </a:extLst>
                   </p:cNvPr>
@@ -17825,7 +17831,10 @@
                     <a:pPr/>
                     <a14:m>
                       <m:oMathPara xmlns:m="http://schemas.openxmlformats.org/officeDocument/2006/math">
-                        <m:oMath>
+                        <m:oMathParaPr>
+                          <m:jc m:val="centerGroup"/>
+                        </m:oMathParaPr>
+                        <m:oMath xmlns:m="http://schemas.openxmlformats.org/officeDocument/2006/math">
                           <m:sSub>
                             <m:sSubPr>
                               <m:ctrlPr>
@@ -17929,7 +17938,7 @@
                   <p:cNvPr id="17" name="CaixaDeTexto 17">
                     <a:extLst>
                       <a:ext uri="{FF2B5EF4-FFF2-40B4-BE49-F238E27FC236}">
-                        <a16:creationId xmlns:a16="http://schemas.microsoft.com/office/drawing/2014/main" id="{E842A6BA-1A35-A84A-B1B8-54B2C0A49661}"/>
+                        <a16:creationId xmlns:a16="http://schemas.microsoft.com/office/drawing/2014/main" xmlns="" id="{E842A6BA-1A35-A84A-B1B8-54B2C0A49661}"/>
                       </a:ext>
                     </a:extLst>
                   </p:cNvPr>
@@ -17955,7 +17964,10 @@
                     <a:pPr/>
                     <a14:m>
                       <m:oMathPara xmlns:m="http://schemas.openxmlformats.org/officeDocument/2006/math">
-                        <m:oMath>
+                        <m:oMathParaPr>
+                          <m:jc m:val="centerGroup"/>
+                        </m:oMathParaPr>
+                        <m:oMath xmlns:m="http://schemas.openxmlformats.org/officeDocument/2006/math">
                           <m:sSub>
                             <m:sSubPr>
                               <m:ctrlPr>
@@ -18059,7 +18071,7 @@
                   <p:cNvPr id="18" name="CaixaDeTexto 18">
                     <a:extLst>
                       <a:ext uri="{FF2B5EF4-FFF2-40B4-BE49-F238E27FC236}">
-                        <a16:creationId xmlns:a16="http://schemas.microsoft.com/office/drawing/2014/main" id="{AE06ADE1-A3FE-3684-A19B-1A4A69C1E4AB}"/>
+                        <a16:creationId xmlns:a16="http://schemas.microsoft.com/office/drawing/2014/main" xmlns="" id="{AE06ADE1-A3FE-3684-A19B-1A4A69C1E4AB}"/>
                       </a:ext>
                     </a:extLst>
                   </p:cNvPr>
@@ -18085,7 +18097,10 @@
                     <a:pPr/>
                     <a14:m>
                       <m:oMathPara xmlns:m="http://schemas.openxmlformats.org/officeDocument/2006/math">
-                        <m:oMath>
+                        <m:oMathParaPr>
+                          <m:jc m:val="centerGroup"/>
+                        </m:oMathParaPr>
+                        <m:oMath xmlns:m="http://schemas.openxmlformats.org/officeDocument/2006/math">
                           <m:sSub>
                             <m:sSubPr>
                               <m:ctrlPr>
@@ -18205,7 +18220,7 @@
         <p:cNvPr id="1" name="">
           <a:extLst>
             <a:ext uri="{FF2B5EF4-FFF2-40B4-BE49-F238E27FC236}">
-              <a16:creationId xmlns:a16="http://schemas.microsoft.com/office/drawing/2014/main" id="{5C4572DC-35C8-C64C-E103-3D4F9246EA98}"/>
+              <a16:creationId xmlns:a16="http://schemas.microsoft.com/office/drawing/2014/main" xmlns="" id="{5C4572DC-35C8-C64C-E103-3D4F9246EA98}"/>
             </a:ext>
           </a:extLst>
         </p:cNvPr>
@@ -18225,7 +18240,7 @@
           <p:cNvPr id="36" name="Group 35">
             <a:extLst>
               <a:ext uri="{FF2B5EF4-FFF2-40B4-BE49-F238E27FC236}">
-                <a16:creationId xmlns:a16="http://schemas.microsoft.com/office/drawing/2014/main" id="{48F378AC-D060-0026-4561-6496453280FF}"/>
+                <a16:creationId xmlns:a16="http://schemas.microsoft.com/office/drawing/2014/main" xmlns="" id="{48F378AC-D060-0026-4561-6496453280FF}"/>
               </a:ext>
             </a:extLst>
           </p:cNvPr>
@@ -18247,7 +18262,7 @@
                 <p:cNvPr id="5" name="CaixaDeTexto 5">
                   <a:extLst>
                     <a:ext uri="{FF2B5EF4-FFF2-40B4-BE49-F238E27FC236}">
-                      <a16:creationId xmlns:a16="http://schemas.microsoft.com/office/drawing/2014/main" id="{E8D0D67D-860E-2510-92FC-57A520894F28}"/>
+                      <a16:creationId xmlns:a16="http://schemas.microsoft.com/office/drawing/2014/main" xmlns="" id="{E8D0D67D-860E-2510-92FC-57A520894F28}"/>
                     </a:ext>
                   </a:extLst>
                 </p:cNvPr>
@@ -18273,7 +18288,10 @@
                   <a:pPr/>
                   <a14:m>
                     <m:oMathPara xmlns:m="http://schemas.openxmlformats.org/officeDocument/2006/math">
-                      <m:oMath>
+                      <m:oMathParaPr>
+                        <m:jc m:val="centerGroup"/>
+                      </m:oMathParaPr>
+                      <m:oMath xmlns:m="http://schemas.openxmlformats.org/officeDocument/2006/math">
                         <m:d>
                           <m:dPr>
                             <m:begChr m:val="["/>
@@ -18451,7 +18469,7 @@
             <p:cNvPr id="9" name="CaixaDeTexto 10">
               <a:extLst>
                 <a:ext uri="{FF2B5EF4-FFF2-40B4-BE49-F238E27FC236}">
-                  <a16:creationId xmlns:a16="http://schemas.microsoft.com/office/drawing/2014/main" id="{E297B5F7-3383-6E2F-1D8A-03955FAC43D2}"/>
+                  <a16:creationId xmlns:a16="http://schemas.microsoft.com/office/drawing/2014/main" xmlns="" id="{E297B5F7-3383-6E2F-1D8A-03955FAC43D2}"/>
                 </a:ext>
               </a:extLst>
             </p:cNvPr>
@@ -18501,7 +18519,7 @@
                 <p:cNvPr id="12" name="CaixaDeTexto 4">
                   <a:extLst>
                     <a:ext uri="{FF2B5EF4-FFF2-40B4-BE49-F238E27FC236}">
-                      <a16:creationId xmlns:a16="http://schemas.microsoft.com/office/drawing/2014/main" id="{2C8DDC51-3A16-5E93-8268-EE62BDE151E0}"/>
+                      <a16:creationId xmlns:a16="http://schemas.microsoft.com/office/drawing/2014/main" xmlns="" id="{2C8DDC51-3A16-5E93-8268-EE62BDE151E0}"/>
                     </a:ext>
                   </a:extLst>
                 </p:cNvPr>
@@ -18527,7 +18545,10 @@
                   <a:pPr/>
                   <a14:m>
                     <m:oMathPara xmlns:m="http://schemas.openxmlformats.org/officeDocument/2006/math">
-                      <m:oMath>
+                      <m:oMathParaPr>
+                        <m:jc m:val="centerGroup"/>
+                      </m:oMathParaPr>
+                      <m:oMath xmlns:m="http://schemas.openxmlformats.org/officeDocument/2006/math">
                         <m:d>
                           <m:dPr>
                             <m:begChr m:val="["/>
@@ -18687,7 +18708,7 @@
             <p:cNvPr id="2" name="Rectangle 1">
               <a:extLst>
                 <a:ext uri="{FF2B5EF4-FFF2-40B4-BE49-F238E27FC236}">
-                  <a16:creationId xmlns:a16="http://schemas.microsoft.com/office/drawing/2014/main" id="{EB611083-738F-80C1-2BA7-92EDB40EFB94}"/>
+                  <a16:creationId xmlns:a16="http://schemas.microsoft.com/office/drawing/2014/main" xmlns="" id="{EB611083-738F-80C1-2BA7-92EDB40EFB94}"/>
                 </a:ext>
               </a:extLst>
             </p:cNvPr>
@@ -18751,7 +18772,7 @@
             <p:cNvPr id="3" name="CaixaDeTexto 10">
               <a:extLst>
                 <a:ext uri="{FF2B5EF4-FFF2-40B4-BE49-F238E27FC236}">
-                  <a16:creationId xmlns:a16="http://schemas.microsoft.com/office/drawing/2014/main" id="{F0E4EAFE-2F57-D46C-B71A-FC2B97DD9DC3}"/>
+                  <a16:creationId xmlns:a16="http://schemas.microsoft.com/office/drawing/2014/main" xmlns="" id="{F0E4EAFE-2F57-D46C-B71A-FC2B97DD9DC3}"/>
                 </a:ext>
               </a:extLst>
             </p:cNvPr>
@@ -18799,7 +18820,7 @@
             <p:cNvPr id="22" name="Straight Arrow Connector 21">
               <a:extLst>
                 <a:ext uri="{FF2B5EF4-FFF2-40B4-BE49-F238E27FC236}">
-                  <a16:creationId xmlns:a16="http://schemas.microsoft.com/office/drawing/2014/main" id="{8F2714CA-3421-42C2-2575-C2D5DB1B504D}"/>
+                  <a16:creationId xmlns:a16="http://schemas.microsoft.com/office/drawing/2014/main" xmlns="" id="{8F2714CA-3421-42C2-2575-C2D5DB1B504D}"/>
                 </a:ext>
               </a:extLst>
             </p:cNvPr>
@@ -18845,7 +18866,7 @@
             <p:cNvPr id="29" name="Straight Arrow Connector 28">
               <a:extLst>
                 <a:ext uri="{FF2B5EF4-FFF2-40B4-BE49-F238E27FC236}">
-                  <a16:creationId xmlns:a16="http://schemas.microsoft.com/office/drawing/2014/main" id="{4613A6D9-EABC-0CE5-50B4-C1C9AA047D5D}"/>
+                  <a16:creationId xmlns:a16="http://schemas.microsoft.com/office/drawing/2014/main" xmlns="" id="{4613A6D9-EABC-0CE5-50B4-C1C9AA047D5D}"/>
                 </a:ext>
               </a:extLst>
             </p:cNvPr>
@@ -19081,7 +19102,7 @@
           <p:cNvPr id="7" name="Picture 2" descr="Ana Barros (@anathinker) | Twitter">
             <a:extLst>
               <a:ext uri="{FF2B5EF4-FFF2-40B4-BE49-F238E27FC236}">
-                <a16:creationId xmlns:a16="http://schemas.microsoft.com/office/drawing/2014/main" id="{A2D479C7-0684-420F-2CCD-64C3DB79FDAB}"/>
+                <a16:creationId xmlns:a16="http://schemas.microsoft.com/office/drawing/2014/main" xmlns="" id="{A2D479C7-0684-420F-2CCD-64C3DB79FDAB}"/>
               </a:ext>
             </a:extLst>
           </p:cNvPr>
@@ -19128,7 +19149,7 @@
           <p:cNvPr id="8" name="Picture 6" descr="Analyzing Text Classification Techniques on Youtube Data">
             <a:extLst>
               <a:ext uri="{FF2B5EF4-FFF2-40B4-BE49-F238E27FC236}">
-                <a16:creationId xmlns:a16="http://schemas.microsoft.com/office/drawing/2014/main" id="{A59F8A2C-ACDF-09C7-B528-9064CEF3B848}"/>
+                <a16:creationId xmlns:a16="http://schemas.microsoft.com/office/drawing/2014/main" xmlns="" id="{A59F8A2C-ACDF-09C7-B528-9064CEF3B848}"/>
               </a:ext>
             </a:extLst>
           </p:cNvPr>
@@ -19173,7 +19194,7 @@
           <p:cNvPr id="9" name="Picture 2" descr="Sentiment Fig 1">
             <a:extLst>
               <a:ext uri="{FF2B5EF4-FFF2-40B4-BE49-F238E27FC236}">
-                <a16:creationId xmlns:a16="http://schemas.microsoft.com/office/drawing/2014/main" id="{E178FF16-CC3F-C34B-6C8B-874BC4FA61A4}"/>
+                <a16:creationId xmlns:a16="http://schemas.microsoft.com/office/drawing/2014/main" xmlns="" id="{E178FF16-CC3F-C34B-6C8B-874BC4FA61A4}"/>
               </a:ext>
             </a:extLst>
           </p:cNvPr>
@@ -19250,7 +19271,7 @@
           <p:cNvPr id="2" name="Título 1">
             <a:extLst>
               <a:ext uri="{FF2B5EF4-FFF2-40B4-BE49-F238E27FC236}">
-                <a16:creationId xmlns:a16="http://schemas.microsoft.com/office/drawing/2014/main" id="{B022D379-CAA0-9DC9-CDBD-6E0EBE1BFF31}"/>
+                <a16:creationId xmlns:a16="http://schemas.microsoft.com/office/drawing/2014/main" xmlns="" id="{B022D379-CAA0-9DC9-CDBD-6E0EBE1BFF31}"/>
               </a:ext>
             </a:extLst>
           </p:cNvPr>
@@ -19277,14 +19298,14 @@
           </a:p>
         </p:txBody>
       </p:sp>
-      <mc:AlternateContent xmlns:mc="http://schemas.openxmlformats.org/markup-compatibility/2006">
-        <mc:Choice xmlns:a14="http://schemas.microsoft.com/office/drawing/2010/main" Requires="a14">
+      <mc:AlternateContent xmlns:mc="http://schemas.openxmlformats.org/markup-compatibility/2006" xmlns:a14="http://schemas.microsoft.com/office/drawing/2010/main">
+        <mc:Choice Requires="a14">
           <p:sp>
             <p:nvSpPr>
               <p:cNvPr id="3" name="Espaço Reservado para Conteúdo 2">
                 <a:extLst>
                   <a:ext uri="{FF2B5EF4-FFF2-40B4-BE49-F238E27FC236}">
-                    <a16:creationId xmlns:a16="http://schemas.microsoft.com/office/drawing/2014/main" id="{B68F0D74-8673-A432-A1D7-BDEF7725851A}"/>
+                    <a16:creationId xmlns:a16="http://schemas.microsoft.com/office/drawing/2014/main" xmlns="" id="{B68F0D74-8673-A432-A1D7-BDEF7725851A}"/>
                   </a:ext>
                 </a:extLst>
               </p:cNvPr>
@@ -19477,15 +19498,7 @@
               <a:p>
                 <a:r>
                   <a:rPr lang="pt-BR" dirty="0"/>
-                  <a:t>O </a:t>
-                </a:r>
-                <a:r>
-                  <a:rPr lang="pt-BR" dirty="0" err="1"/>
-                  <a:t>regressor</a:t>
-                </a:r>
-                <a:r>
-                  <a:rPr lang="pt-BR" dirty="0"/>
-                  <a:t> </a:t>
+                  <a:t>O regressor </a:t>
                 </a:r>
                 <a:r>
                   <a:rPr lang="pt-BR" i="1" dirty="0" err="1"/>
@@ -19549,7 +19562,7 @@
             </p:txBody>
           </p:sp>
         </mc:Choice>
-        <mc:Fallback>
+        <mc:Fallback xmlns="">
           <p:sp>
             <p:nvSpPr>
               <p:cNvPr id="3" name="Espaço Reservado para Conteúdo 2">
@@ -19628,7 +19641,7 @@
           <p:cNvPr id="2" name="Título 1">
             <a:extLst>
               <a:ext uri="{FF2B5EF4-FFF2-40B4-BE49-F238E27FC236}">
-                <a16:creationId xmlns:a16="http://schemas.microsoft.com/office/drawing/2014/main" id="{519F0958-530D-D942-BA01-15C1583DD1E6}"/>
+                <a16:creationId xmlns:a16="http://schemas.microsoft.com/office/drawing/2014/main" xmlns="" id="{519F0958-530D-D942-BA01-15C1583DD1E6}"/>
               </a:ext>
             </a:extLst>
           </p:cNvPr>
@@ -19662,7 +19675,7 @@
               <p:cNvPr id="3" name="Espaço Reservado para Conteúdo 2">
                 <a:extLst>
                   <a:ext uri="{FF2B5EF4-FFF2-40B4-BE49-F238E27FC236}">
-                    <a16:creationId xmlns:a16="http://schemas.microsoft.com/office/drawing/2014/main" id="{21416F72-28FB-E27C-D129-16A944A87C67}"/>
+                    <a16:creationId xmlns:a16="http://schemas.microsoft.com/office/drawing/2014/main" xmlns="" id="{21416F72-28FB-E27C-D129-16A944A87C67}"/>
                   </a:ext>
                 </a:extLst>
               </p:cNvPr>
@@ -19837,7 +19850,7 @@
                           <a:rPr lang="pt-BR" i="1">
                             <a:latin typeface="Cambria Math" panose="02040503050406030204" pitchFamily="18" charset="0"/>
                           </a:rPr>
-                          <m:t>ℎ</m:t>
+                          <m:t>h</m:t>
                         </m:r>
                       </m:e>
                       <m:sub>
@@ -20201,7 +20214,7 @@
           <p:cNvPr id="2" name="Título 1">
             <a:extLst>
               <a:ext uri="{FF2B5EF4-FFF2-40B4-BE49-F238E27FC236}">
-                <a16:creationId xmlns:a16="http://schemas.microsoft.com/office/drawing/2014/main" id="{DCD47F25-5DD1-794E-8733-BFD771A2DE49}"/>
+                <a16:creationId xmlns:a16="http://schemas.microsoft.com/office/drawing/2014/main" xmlns="" id="{DCD47F25-5DD1-794E-8733-BFD771A2DE49}"/>
               </a:ext>
             </a:extLst>
           </p:cNvPr>
@@ -20228,14 +20241,14 @@
           </a:p>
         </p:txBody>
       </p:sp>
-      <mc:AlternateContent xmlns:mc="http://schemas.openxmlformats.org/markup-compatibility/2006">
-        <mc:Choice xmlns:a14="http://schemas.microsoft.com/office/drawing/2010/main" Requires="a14">
+      <mc:AlternateContent xmlns:mc="http://schemas.openxmlformats.org/markup-compatibility/2006" xmlns:a14="http://schemas.microsoft.com/office/drawing/2010/main">
+        <mc:Choice Requires="a14">
           <p:sp>
             <p:nvSpPr>
               <p:cNvPr id="3" name="Espaço Reservado para Conteúdo 2">
                 <a:extLst>
                   <a:ext uri="{FF2B5EF4-FFF2-40B4-BE49-F238E27FC236}">
-                    <a16:creationId xmlns:a16="http://schemas.microsoft.com/office/drawing/2014/main" id="{D79BB7DC-99E7-8958-EC77-566B7E3C2BBB}"/>
+                    <a16:creationId xmlns:a16="http://schemas.microsoft.com/office/drawing/2014/main" xmlns="" id="{D79BB7DC-99E7-8958-EC77-566B7E3C2BBB}"/>
                   </a:ext>
                 </a:extLst>
               </p:cNvPr>
@@ -20315,7 +20328,7 @@
                           <a:rPr lang="pt-BR" i="1">
                             <a:latin typeface="Cambria Math" panose="02040503050406030204" pitchFamily="18" charset="0"/>
                           </a:rPr>
-                          <m:t>ℎ</m:t>
+                          <m:t>h</m:t>
                         </m:r>
                       </m:e>
                       <m:sub>
@@ -20485,7 +20498,10 @@
                 </a:pPr>
                 <a14:m>
                   <m:oMathPara xmlns:m="http://schemas.openxmlformats.org/officeDocument/2006/math">
-                    <m:oMath>
+                    <m:oMathParaPr>
+                      <m:jc m:val="centerGroup"/>
+                    </m:oMathParaPr>
+                    <m:oMath xmlns:m="http://schemas.openxmlformats.org/officeDocument/2006/math">
                       <m:r>
                         <a:rPr lang="pt-BR" i="1">
                           <a:latin typeface="Cambria Math" panose="02040503050406030204" pitchFamily="18" charset="0"/>
@@ -20600,7 +20616,7 @@
                             <a:rPr lang="pt-BR" i="1">
                               <a:latin typeface="Cambria Math" panose="02040503050406030204" pitchFamily="18" charset="0"/>
                             </a:rPr>
-                            <m:t>ℎ</m:t>
+                            <m:t>h</m:t>
                           </m:r>
                         </m:e>
                         <m:sub>
@@ -21451,7 +21467,7 @@
             </p:txBody>
           </p:sp>
         </mc:Choice>
-        <mc:Fallback>
+        <mc:Fallback xmlns="">
           <p:sp>
             <p:nvSpPr>
               <p:cNvPr id="3" name="Espaço Reservado para Conteúdo 2">
@@ -21530,7 +21546,7 @@
           <p:cNvPr id="2" name="Título 1">
             <a:extLst>
               <a:ext uri="{FF2B5EF4-FFF2-40B4-BE49-F238E27FC236}">
-                <a16:creationId xmlns:a16="http://schemas.microsoft.com/office/drawing/2014/main" id="{52E3438D-F516-F1D3-A02F-51857586D07A}"/>
+                <a16:creationId xmlns:a16="http://schemas.microsoft.com/office/drawing/2014/main" xmlns="" id="{52E3438D-F516-F1D3-A02F-51857586D07A}"/>
               </a:ext>
             </a:extLst>
           </p:cNvPr>
@@ -21564,7 +21580,7 @@
               <p:cNvPr id="3" name="Espaço Reservado para Conteúdo 2">
                 <a:extLst>
                   <a:ext uri="{FF2B5EF4-FFF2-40B4-BE49-F238E27FC236}">
-                    <a16:creationId xmlns:a16="http://schemas.microsoft.com/office/drawing/2014/main" id="{BCAAD57B-65A0-9DAD-79FC-2AE2692EB84B}"/>
+                    <a16:creationId xmlns:a16="http://schemas.microsoft.com/office/drawing/2014/main" xmlns="" id="{BCAAD57B-65A0-9DAD-79FC-2AE2692EB84B}"/>
                   </a:ext>
                 </a:extLst>
               </p:cNvPr>
@@ -21642,7 +21658,10 @@
                 </a:pPr>
                 <a14:m>
                   <m:oMathPara xmlns:m="http://schemas.openxmlformats.org/officeDocument/2006/math">
-                    <m:oMath>
+                    <m:oMathParaPr>
+                      <m:jc m:val="centerGroup"/>
+                    </m:oMathParaPr>
+                    <m:oMath xmlns:m="http://schemas.openxmlformats.org/officeDocument/2006/math">
                       <m:r>
                         <a:rPr lang="pt-BR" i="1">
                           <a:latin typeface="Cambria Math" panose="02040503050406030204" pitchFamily="18" charset="0"/>
@@ -21745,7 +21764,7 @@
                             <a:rPr lang="pt-BR" i="1">
                               <a:latin typeface="Cambria Math" panose="02040503050406030204" pitchFamily="18" charset="0"/>
                             </a:rPr>
-                            <m:t>ℎ</m:t>
+                            <m:t>h</m:t>
                           </m:r>
                         </m:e>
                         <m:sub>
@@ -22044,7 +22063,7 @@
                           <m:begChr m:val="["/>
                           <m:endChr m:val="]"/>
                           <m:ctrlPr>
-                            <a:rPr lang="pt-BR">
+                            <a:rPr lang="pt-BR" i="1">
                               <a:latin typeface="Cambria Math" panose="02040503050406030204" pitchFamily="18" charset="0"/>
                             </a:rPr>
                           </m:ctrlPr>
@@ -22403,7 +22422,7 @@
           <p:cNvPr id="5" name="Rectangle 11">
             <a:extLst>
               <a:ext uri="{FF2B5EF4-FFF2-40B4-BE49-F238E27FC236}">
-                <a16:creationId xmlns:a16="http://schemas.microsoft.com/office/drawing/2014/main" id="{D1D7E603-A964-1188-9D09-B0C1E18592FA}"/>
+                <a16:creationId xmlns:a16="http://schemas.microsoft.com/office/drawing/2014/main" xmlns="" id="{D1D7E603-A964-1188-9D09-B0C1E18592FA}"/>
               </a:ext>
             </a:extLst>
           </p:cNvPr>
@@ -22485,7 +22504,7 @@
           <p:cNvPr id="2" name="Título 1">
             <a:extLst>
               <a:ext uri="{FF2B5EF4-FFF2-40B4-BE49-F238E27FC236}">
-                <a16:creationId xmlns:a16="http://schemas.microsoft.com/office/drawing/2014/main" id="{99DAA83A-B143-94BB-B48B-41A7423070CE}"/>
+                <a16:creationId xmlns:a16="http://schemas.microsoft.com/office/drawing/2014/main" xmlns="" id="{99DAA83A-B143-94BB-B48B-41A7423070CE}"/>
               </a:ext>
             </a:extLst>
           </p:cNvPr>
@@ -22520,7 +22539,7 @@
               <p:cNvPr id="3" name="Espaço Reservado para Conteúdo 2">
                 <a:extLst>
                   <a:ext uri="{FF2B5EF4-FFF2-40B4-BE49-F238E27FC236}">
-                    <a16:creationId xmlns:a16="http://schemas.microsoft.com/office/drawing/2014/main" id="{32DF54A1-52F5-C48C-7CD4-D6E451DF19D8}"/>
+                    <a16:creationId xmlns:a16="http://schemas.microsoft.com/office/drawing/2014/main" xmlns="" id="{32DF54A1-52F5-C48C-7CD4-D6E451DF19D8}"/>
                   </a:ext>
                 </a:extLst>
               </p:cNvPr>
@@ -22607,10 +22626,19 @@
                     </a:solidFill>
                     <a:effectLst/>
                   </a:rPr>
-                  <a:t> os valores das </a:t>
-                </a:r>
-                <a:r>
-                  <a:rPr lang="pt-BR" dirty="0"/>
+                  <a:t> os valores </a:t>
+                </a:r>
+                <a:r>
+                  <a:rPr lang="pt-BR" b="1" dirty="0" smtClean="0">
+                    <a:solidFill>
+                      <a:srgbClr val="00B050"/>
+                    </a:solidFill>
+                    <a:effectLst/>
+                  </a:rPr>
+                  <a:t>das</a:t>
+                </a:r>
+                <a:r>
+                  <a:rPr lang="pt-BR" dirty="0" smtClean="0"/>
                   <a:t> </a:t>
                 </a:r>
                 <a14:m>
@@ -22711,7 +22739,7 @@
               <p:cNvPr id="3" name="Espaço Reservado para Conteúdo 2">
                 <a:extLst>
                   <a:ext uri="{FF2B5EF4-FFF2-40B4-BE49-F238E27FC236}">
-                    <a16:creationId xmlns:a16="http://schemas.microsoft.com/office/drawing/2014/main" id="{32DF54A1-52F5-C48C-7CD4-D6E451DF19D8}"/>
+                    <a16:creationId xmlns:a16="http://schemas.microsoft.com/office/drawing/2014/main" xmlns:a14="http://schemas.microsoft.com/office/drawing/2010/main" xmlns="" id="{32DF54A1-52F5-C48C-7CD4-D6E451DF19D8}"/>
                   </a:ext>
                 </a:extLst>
               </p:cNvPr>
@@ -22727,7 +22755,7 @@
                 <a:off x="6280879" y="1825624"/>
                 <a:ext cx="5911121" cy="5032375"/>
               </a:xfrm>
-              <a:blipFill>
+              <a:blipFill rotWithShape="0">
                 <a:blip r:embed="rId2"/>
                 <a:stretch>
                   <a:fillRect l="-1856" t="-1937" r="-1340"/>
@@ -22739,7 +22767,7 @@
               <a:lstStyle/>
               <a:p>
                 <a:r>
-                  <a:rPr lang="en-US">
+                  <a:rPr lang="pt-BR">
                     <a:noFill/>
                   </a:rPr>
                   <a:t> </a:t>
@@ -22754,7 +22782,7 @@
           <p:cNvPr id="8" name="CaixaDeTexto 7">
             <a:extLst>
               <a:ext uri="{FF2B5EF4-FFF2-40B4-BE49-F238E27FC236}">
-                <a16:creationId xmlns:a16="http://schemas.microsoft.com/office/drawing/2014/main" id="{0DC5673F-9B77-2E9E-8317-E71CA8896FE0}"/>
+                <a16:creationId xmlns:a16="http://schemas.microsoft.com/office/drawing/2014/main" xmlns="" id="{0DC5673F-9B77-2E9E-8317-E71CA8896FE0}"/>
               </a:ext>
             </a:extLst>
           </p:cNvPr>
@@ -22806,7 +22834,7 @@
               <p:cNvPr id="4" name="CaixaDeTexto 3">
                 <a:extLst>
                   <a:ext uri="{FF2B5EF4-FFF2-40B4-BE49-F238E27FC236}">
-                    <a16:creationId xmlns:a16="http://schemas.microsoft.com/office/drawing/2014/main" id="{CBD55F82-56D5-32C8-C5AB-AF99477FBAAC}"/>
+                    <a16:creationId xmlns:a16="http://schemas.microsoft.com/office/drawing/2014/main" xmlns="" id="{CBD55F82-56D5-32C8-C5AB-AF99477FBAAC}"/>
                   </a:ext>
                 </a:extLst>
               </p:cNvPr>
@@ -22903,7 +22931,7 @@
           <p:cNvPr id="7" name="Imagem 6">
             <a:extLst>
               <a:ext uri="{FF2B5EF4-FFF2-40B4-BE49-F238E27FC236}">
-                <a16:creationId xmlns:a16="http://schemas.microsoft.com/office/drawing/2014/main" id="{03DADAA4-A9A3-C4FC-EC6D-6222F1C4F8C4}"/>
+                <a16:creationId xmlns:a16="http://schemas.microsoft.com/office/drawing/2014/main" xmlns="" id="{03DADAA4-A9A3-C4FC-EC6D-6222F1C4F8C4}"/>
               </a:ext>
             </a:extLst>
           </p:cNvPr>
@@ -22913,7 +22941,7 @@
           <p:nvPr/>
         </p:nvPicPr>
         <p:blipFill>
-          <a:blip r:embed="rId5">
+          <a:blip r:embed="rId5" cstate="print">
             <a:extLst>
               <a:ext uri="{28A0092B-C50C-407E-A947-70E740481C1C}">
                 <a14:useLocalDpi xmlns:a14="http://schemas.microsoft.com/office/drawing/2010/main" val="0"/>
@@ -22969,7 +22997,7 @@
           <p:cNvPr id="2" name="Título 1">
             <a:extLst>
               <a:ext uri="{FF2B5EF4-FFF2-40B4-BE49-F238E27FC236}">
-                <a16:creationId xmlns:a16="http://schemas.microsoft.com/office/drawing/2014/main" id="{99DAA83A-B143-94BB-B48B-41A7423070CE}"/>
+                <a16:creationId xmlns:a16="http://schemas.microsoft.com/office/drawing/2014/main" xmlns="" id="{99DAA83A-B143-94BB-B48B-41A7423070CE}"/>
               </a:ext>
             </a:extLst>
           </p:cNvPr>
@@ -23004,7 +23032,7 @@
               <p:cNvPr id="3" name="Espaço Reservado para Conteúdo 2">
                 <a:extLst>
                   <a:ext uri="{FF2B5EF4-FFF2-40B4-BE49-F238E27FC236}">
-                    <a16:creationId xmlns:a16="http://schemas.microsoft.com/office/drawing/2014/main" id="{32DF54A1-52F5-C48C-7CD4-D6E451DF19D8}"/>
+                    <a16:creationId xmlns:a16="http://schemas.microsoft.com/office/drawing/2014/main" xmlns="" id="{32DF54A1-52F5-C48C-7CD4-D6E451DF19D8}"/>
                   </a:ext>
                 </a:extLst>
               </p:cNvPr>
@@ -23477,7 +23505,7 @@
               <p:cNvPr id="4" name="CaixaDeTexto 3">
                 <a:extLst>
                   <a:ext uri="{FF2B5EF4-FFF2-40B4-BE49-F238E27FC236}">
-                    <a16:creationId xmlns:a16="http://schemas.microsoft.com/office/drawing/2014/main" id="{2B7728A0-505D-9DAE-23EC-8172E2EEEFA9}"/>
+                    <a16:creationId xmlns:a16="http://schemas.microsoft.com/office/drawing/2014/main" xmlns="" id="{2B7728A0-505D-9DAE-23EC-8172E2EEEFA9}"/>
                   </a:ext>
                 </a:extLst>
               </p:cNvPr>
@@ -23574,7 +23602,7 @@
           <p:cNvPr id="7" name="Imagem 6">
             <a:extLst>
               <a:ext uri="{FF2B5EF4-FFF2-40B4-BE49-F238E27FC236}">
-                <a16:creationId xmlns:a16="http://schemas.microsoft.com/office/drawing/2014/main" id="{82FEAA71-0C5D-6685-9695-89249F4043DE}"/>
+                <a16:creationId xmlns:a16="http://schemas.microsoft.com/office/drawing/2014/main" xmlns="" id="{82FEAA71-0C5D-6685-9695-89249F4043DE}"/>
               </a:ext>
             </a:extLst>
           </p:cNvPr>
@@ -23584,7 +23612,7 @@
           <p:nvPr/>
         </p:nvPicPr>
         <p:blipFill>
-          <a:blip r:embed="rId6">
+          <a:blip r:embed="rId6" cstate="print">
             <a:extLst>
               <a:ext uri="{28A0092B-C50C-407E-A947-70E740481C1C}">
                 <a14:useLocalDpi xmlns:a14="http://schemas.microsoft.com/office/drawing/2010/main" val="0"/>
